--- a/downloads/presentations/modules/anl-310.pptx
+++ b/downloads/presentations/modules/anl-310.pptx
@@ -615,7 +615,8 @@
               <a:t>Technical Deep Dive
 Generative AI evaluation should begin with intended use. A brainstormed outline, internal draft, public advisory, case summary, policy synthesis, or operational recommendation requires different levels of review. The more sensitive, public-facing, or consequential the use, the stronger the review should be.
 Factuality review requires comparison to source material. Reviewers should check names, dates, numbers, conditions, legal requirements, recommendations, and causal statements. They should also verify that the output does not add unsupported claims or remove important caveats. For RAG systems, reviewers should inspect whether citations actually support the claims they accompany.
-Completeness review asks whether the output includes the information needed for the task. A summary can be accurate but incomplete if it omits a critical exposure, eligibility criterion, limitation, or escalation instruction. Public health review should consider whether omitted information could change interpretation or action.</a:t>
+Completeness review asks whether the output includes the information needed for the task. A summary can be accurate but incomplete if it omits a critical exposure, eligibility criterion, limitation, or escalation instruction. Public health review should consider whether omitted information could change interpretation or action.
+Application guidance: Connect the concept to data quality, model performance, validation evidence, monitoring measures, and decisions that remain under human control.</a:t>
             </a:r>
             <a:endParaRPr lang="en-US" dirty="0"/>
           </a:p>
@@ -705,7 +706,8 @@
               <a:rPr lang="en-US" dirty="0"/>
               <a:t>Technical Deep Dive
 Equity and accessibility review should be included when outputs affect staff, partners, or the public. Reviewers should assess reading level, language access, disability accessibility, cultural context, stigma, blame, and whether the output addresses affected communities respectfully. Translation or multilingual adaptation should include review by qualified humans when used for public-facing or consequential communication.
-Documentation should be proportionate to risk. Low-risk drafting may require only human review before use. Higher-risk workflows may require saved prompts, source references, reviewer initials, revision history, approval records, and incident escalation procedures.</a:t>
+Documentation should be proportionate to risk. Low-risk drafting may require only human review before use. Higher-risk workflows may require saved prompts, source references, reviewer initials, revision history, approval records, and incident escalation procedures.
+Application guidance: Connect the concept to data quality, model performance, validation evidence, monitoring measures, and decisions that remain under human control.</a:t>
             </a:r>
             <a:endParaRPr lang="en-US" dirty="0"/>
           </a:p>
@@ -796,7 +798,8 @@
               <a:t>Risks, Failure Modes, and Guardrails
 Fluent but false outputs. A polished output may contain unsupported claims. Guardrails include source checking, citations, and reviewer signoff.
 Omitted caveats. AI may simplify uncertainty away. Guardrails include completeness review and required caveat checks.
-Inappropriate tone or accessibility. Outputs may be stigmatizing or inaccessible. Guardrails include plain language, equity, language access, and accessibility review.</a:t>
+Inappropriate tone or accessibility. Outputs may be stigmatizing or inaccessible. Guardrails include plain language, equity, language access, and accessibility review.
+Application guidance: Identify what could go wrong, who could be affected, what safeguards are needed, and what evidence should be reviewed before use expands.</a:t>
             </a:r>
             <a:endParaRPr lang="en-US" dirty="0"/>
           </a:p>
@@ -885,7 +888,8 @@
             <a:r>
               <a:rPr lang="en-US" dirty="0"/>
               <a:t>Risks, Failure Modes, and Guardrails
-Privacy exposure. Prompts or outputs may include sensitive data. Guardrails include approved tools, data-use tiers, redaction, access controls, and records guidance.</a:t>
+Privacy exposure. Prompts or outputs may include sensitive data. Guardrails include approved tools, data-use tiers, redaction, access controls, and records guidance.
+Application guidance: Identify what could go wrong, who could be affected, what safeguards are needed, and what evidence should be reviewed before use expands.</a:t>
             </a:r>
             <a:endParaRPr lang="en-US" dirty="0"/>
           </a:p>
@@ -975,7 +979,8 @@
               <a:rPr lang="en-US" dirty="0"/>
               <a:t>Application to AI-Supported Workflows
 Generative AI output evaluation applies to drafting, summarization, classification, translation, code generation, and decision-support explanation. It is also relevant to RAG and agentic workflows because generated text may summarize retrieved sources or explain automated actions. Evaluation should be built into workflow design, not added after deployment.
-The strongest approach is to create rubrics for specific output types. A case summary rubric will differ from a public message rubric, and a policy synthesis rubric will differ from a code review rubric. Each rubric should define what reviewers must check, who approves final use, and how errors are documented.</a:t>
+The strongest approach is to create rubrics for specific output types. A case summary rubric will differ from a public message rubric, and a policy synthesis rubric will differ from a code review rubric. Each rubric should define what reviewers must check, who approves final use, and how errors are documented.
+Application guidance: Connect the concept to data quality, model performance, validation evidence, monitoring measures, and decisions that remain under human control.</a:t>
             </a:r>
             <a:endParaRPr lang="en-US" dirty="0"/>
           </a:p>
@@ -1066,7 +1071,8 @@
               <a:t>Reflection Questions
 What type of generative AI output is being evaluated?
 What source material should be used to verify the output?
-What errors or omissions would be most harmful?</a:t>
+What errors or omissions would be most harmful?
+Application guidance: Connect the concept to data quality, model performance, validation evidence, monitoring measures, and decisions that remain under human control.</a:t>
             </a:r>
             <a:endParaRPr lang="en-US" dirty="0"/>
           </a:p>
@@ -1156,7 +1162,8 @@
               <a:rPr lang="en-US" dirty="0"/>
               <a:t>Reflection Questions
 What review criteria are needed for equity, accessibility, language, and tone?
-What documentation is required before the output can be used?</a:t>
+What documentation is required before the output can be used?
+Application guidance: Connect the concept to data quality, model performance, validation evidence, monitoring measures, and decisions that remain under human control.</a:t>
             </a:r>
             <a:endParaRPr lang="en-US" dirty="0"/>
           </a:p>
@@ -1246,7 +1253,8 @@
               <a:rPr lang="en-US" dirty="0"/>
               <a:t>Practical Exercise
 Create a generative AI output evaluation rubric for one public health use case. Include intended use, source verification, factuality, completeness, unsupported claims, omissions, bias, tone, accessibility, privacy, approval requirements, and escalation criteria.
-Then apply the rubric to a sample AI-generated output and document whether the output should be accepted, edited, rejected, or escalated.</a:t>
+Then apply the rubric to a sample AI-generated output and document whether the output should be accepted, edited, rejected, or escalated.
+Application guidance: Use the assignment to test whether you can explain the concept, apply it to a realistic public health situation, and identify what would need review before the work moves forward.</a:t>
             </a:r>
             <a:endParaRPr lang="en-US" dirty="0"/>
           </a:p>
@@ -1337,7 +1345,8 @@
               <a:t>Expected Artifact or Evidence
 Generative AI output evaluation rubric
 Completed sample review
-Source verification notes</a:t>
+Source verification notes
+Application guidance: Connect the concept to data quality, model performance, validation evidence, monitoring measures, and decisions that remain under human control.</a:t>
             </a:r>
             <a:endParaRPr lang="en-US" dirty="0"/>
           </a:p>
@@ -1426,7 +1435,8 @@
             <a:r>
               <a:rPr lang="en-US" dirty="0"/>
               <a:t>Expected Artifact or Evidence
-Approval or escalation documentation</a:t>
+Approval or escalation documentation
+Application guidance: Connect the concept to data quality, model performance, validation evidence, monitoring measures, and decisions that remain under human control.</a:t>
             </a:r>
             <a:endParaRPr lang="en-US" dirty="0"/>
           </a:p>
@@ -1610,7 +1620,8 @@
 Generative AI output evaluation rubric
 Completed sample review
 Source verification notes
-Approval or escalation documentation</a:t>
+Approval or escalation documentation
+Application guidance: Use the assignment to test whether you can explain the concept, apply it to a realistic public health situation, and identify what would need review before the work moves forward.</a:t>
             </a:r>
             <a:endParaRPr lang="en-US" dirty="0"/>
           </a:p>
@@ -1703,7 +1714,8 @@
 2. What does grounding mean?
 3. Which issue can be as harmful as an incorrect statement?
 4. What should a rubric define?
-5. Which output usually requires stronger review?</a:t>
+5. Which output usually requires stronger review?
+Application guidance: Use the assignment to test whether you can explain the concept, apply it to a realistic public health situation, and identify what would need review before the work moves forward.</a:t>
             </a:r>
             <a:endParaRPr lang="en-US" dirty="0"/>
           </a:p>
@@ -1795,7 +1807,8 @@
 NIST AI RMF Generative AI Profile: https://www.nist.gov/publications/artificial-intelligence-risk-management-framework-generative-artificial-intelligence
 NIST Artificial Intelligence Risk Management Framework: https://www.nist.gov/itl/ai-risk-management-framework
 OWASP Top 10 for Large Language Model Applications: https://owasp.org/www-project-top-10-for-large-language-model-applications/
-WHO Guidance on Large Multi-Modal Models: https://www.who.int/publications/i/item/9789240084759</a:t>
+WHO Guidance on Large Multi-Modal Models: https://www.who.int/publications/i/item/9789240084759
+Application guidance: Connect the concept to data quality, model performance, validation evidence, monitoring measures, and decisions that remain under human control.</a:t>
             </a:r>
             <a:endParaRPr lang="en-US" dirty="0"/>
           </a:p>
@@ -2074,7 +2087,8 @@
 Distinguish factuality, source grounding, completeness, relevance, tone, and accessibility.
 Identify hallucinations, omissions, unsupported claims, and misleading certainty.
 Design review criteria for different output types, including summaries, drafts, classifications, and recommendations.
-Apply stronger review requirements for sensitive, public-facing, or consequential outputs.</a:t>
+Apply stronger review requirements for sensitive, public-facing, or consequential outputs.
+Application guidance: Use the assignment to test whether you can explain the concept, apply it to a realistic public health situation, and identify what would need review before the work moves forward.</a:t>
             </a:r>
             <a:endParaRPr lang="en-US" dirty="0"/>
           </a:p>
@@ -2163,7 +2177,8 @@
             <a:r>
               <a:rPr lang="en-US" dirty="0"/>
               <a:t>Learning Objectives
-Produce a generative AI output evaluation rubric.</a:t>
+Produce a generative AI output evaluation rubric.
+Application guidance: Use the assignment to test whether you can explain the concept, apply it to a realistic public health situation, and identify what would need review before the work moves forward.</a:t>
             </a:r>
             <a:endParaRPr lang="en-US" dirty="0"/>
           </a:p>
@@ -2254,7 +2269,8 @@
               <a:t>Module Overview
 Generative AI can draft, summarize, translate, classify, explain, and synthesize information, but its outputs require careful evaluation. In public health, generated content may affect case review, public communication, policy interpretation, community trust, staff training, or leadership decisions. Fluent writing does not guarantee accuracy, completeness, appropriateness, or safety.
 This module teaches learners how to evaluate generative AI outputs using structured review criteria. The module emphasizes factuality, source grounding, omissions, unsupported claims, bias, privacy, tone, accessibility, language quality, and fitness for intended use. Learners will distinguish low-risk drafting support from outputs that require stronger review because they could affect public health action.
-By the end of the module, learners should be able to create and apply an evaluation rubric for generative AI outputs in a public health workflow.</a:t>
+By the end of the module, learners should be able to create and apply an evaluation rubric for generative AI outputs in a public health workflow.
+Application guidance: Connect the concept to data quality, model performance, validation evidence, monitoring measures, and decisions that remain under human control.</a:t>
             </a:r>
             <a:endParaRPr lang="en-US" dirty="0"/>
           </a:p>
@@ -2345,7 +2361,8 @@
               <a:t>Why This Topic Matters for Public Health AI
 Generative AI matters for public health because it can reduce burden in text-heavy workflows. Staff may use it to summarize guidance, draft meeting notes, simplify technical language, translate or adapt messages, organize case information, or synthesize stakeholder feedback. These uses can be valuable when they save time and improve clarity.
 The same capabilities create risk. Generative AI can invent facts, omit caveats, misstate guidance, flatten uncertainty, or produce language that sounds more definitive than the evidence supports. It may introduce bias, inappropriate tone, or inaccessible wording. When sensitive data are involved, prompting and output handling can also create privacy and records concerns.
-Public health agencies need structured evaluation because informal review is inconsistent. A reviewer may notice grammar errors but miss unsupported claims. Another may trust a polished summary without checking source documents. A rubric helps reviewers evaluate outputs against the purpose, source material, audience, and safeguards required for the use case.</a:t>
+Public health agencies need structured evaluation because informal review is inconsistent. A reviewer may notice grammar errors but miss unsupported claims. Another may trust a polished summary without checking source documents. A rubric helps reviewers evaluate outputs against the purpose, source material, audience, and safeguards required for the use case.
+Application guidance: Connect the concept to data quality, model performance, validation evidence, monitoring measures, and decisions that remain under human control.</a:t>
             </a:r>
             <a:endParaRPr lang="en-US" dirty="0"/>
           </a:p>
@@ -2435,7 +2452,8 @@
               <a:rPr lang="en-US" dirty="0"/>
               <a:t>Public Health Example
 A communications team may use generative AI to draft a plain-language public message about a local respiratory illness increase. The draft may be clear and readable, but reviewers must check whether the numbers are correct, whether the recommendations match current guidance, whether uncertainty is represented accurately, and whether the message is accessible in multiple languages.
-An epidemiology team may use generative AI to summarize case investigation notes for internal review. The summary must be checked against source notes because a missed exposure, incorrect date, or invented symptom could affect follow-up. The team should document whether the summary was accepted, edited, or rejected.</a:t>
+An epidemiology team may use generative AI to summarize case investigation notes for internal review. The summary must be checked against source notes because a missed exposure, incorrect date, or invented symptom could affect follow-up. The team should document whether the summary was accepted, edited, or rejected.
+Application guidance: Connect the concept to data quality, model performance, validation evidence, monitoring measures, and decisions that remain under human control.</a:t>
             </a:r>
             <a:endParaRPr lang="en-US" dirty="0"/>
           </a:p>
@@ -3206,8 +3224,8 @@
         </p:nvSpPr>
         <p:spPr>
           <a:xfrm>
-            <a:off x="9966960" y="6537960"/>
-            <a:ext cx="1645920" cy="201168"/>
+            <a:off x="9646920" y="6537960"/>
+            <a:ext cx="1965960" cy="201168"/>
           </a:xfrm>
           <a:prstGeom prst="rect">
             <a:avLst/>
@@ -3231,7 +3249,7 @@
                 <a:ea typeface="Aptos" pitchFamily="34" charset="-122"/>
                 <a:cs typeface="Aptos" pitchFamily="34" charset="-120"/>
               </a:rPr>
-              <a:t>Â© Paula Soper</a:t>
+              <a:t>Copyright Paula Soper</a:t>
             </a:r>
             <a:endParaRPr lang="en-US" sz="800" dirty="0"/>
           </a:p>
@@ -3278,77 +3296,13 @@
       </p:sp>
       <p:sp>
         <p:nvSpPr>
-          <p:cNvPr id="8" name="Shape 6"/>
+          <p:cNvPr id="8" name="Text 6"/>
           <p:cNvSpPr/>
           <p:nvPr/>
         </p:nvSpPr>
         <p:spPr>
           <a:xfrm>
             <a:off x="640080" y="658368"/>
-            <a:ext cx="420624" cy="420624"/>
-          </a:xfrm>
-          <a:prstGeom prst="ellipse">
-            <a:avLst/>
-          </a:prstGeom>
-          <a:solidFill>
-            <a:srgbClr val="0068B7"/>
-          </a:solidFill>
-          <a:ln w="12700">
-            <a:solidFill>
-              <a:srgbClr val="0068B7"/>
-            </a:solidFill>
-            <a:prstDash val="solid"/>
-          </a:ln>
-        </p:spPr>
-      </p:sp>
-      <p:sp>
-        <p:nvSpPr>
-          <p:cNvPr id="9" name="Text 7"/>
-          <p:cNvSpPr/>
-          <p:nvPr/>
-        </p:nvSpPr>
-        <p:spPr>
-          <a:xfrm>
-            <a:off x="640080" y="731520"/>
-            <a:ext cx="420624" cy="164592"/>
-          </a:xfrm>
-          <a:prstGeom prst="rect">
-            <a:avLst/>
-          </a:prstGeom>
-          <a:noFill/>
-          <a:ln/>
-        </p:spPr>
-        <p:txBody>
-          <a:bodyPr wrap="square" lIns="0" tIns="0" rIns="0" bIns="0" rtlCol="0" anchor="ctr"/>
-          <a:lstStyle/>
-          <a:p>
-            <a:pPr algn="ctr" indent="0" marL="0">
-              <a:buNone/>
-            </a:pPr>
-            <a:r>
-              <a:rPr lang="en-US" sz="1100" b="1" dirty="0">
-                <a:solidFill>
-                  <a:srgbClr val="FFFFFF"/>
-                </a:solidFill>
-                <a:latin typeface="Aptos" pitchFamily="34" charset="0"/>
-                <a:ea typeface="Aptos" pitchFamily="34" charset="-122"/>
-                <a:cs typeface="Aptos" pitchFamily="34" charset="-120"/>
-              </a:rPr>
-              <a:t>5</a:t>
-            </a:r>
-            <a:endParaRPr lang="en-US" sz="1100" dirty="0"/>
-          </a:p>
-        </p:txBody>
-      </p:sp>
-      <p:sp>
-        <p:nvSpPr>
-          <p:cNvPr id="10" name="Text 8"/>
-          <p:cNvSpPr/>
-          <p:nvPr/>
-        </p:nvSpPr>
-        <p:spPr>
-          <a:xfrm>
-            <a:off x="640080" y="621792"/>
             <a:ext cx="10881360" cy="713232"/>
           </a:xfrm>
           <a:prstGeom prst="rect">
@@ -3383,14 +3337,14 @@
       </p:sp>
       <p:sp>
         <p:nvSpPr>
-          <p:cNvPr id="11" name="Text 9"/>
+          <p:cNvPr id="9" name="Text 7"/>
           <p:cNvSpPr/>
           <p:nvPr/>
         </p:nvSpPr>
         <p:spPr>
           <a:xfrm>
             <a:off x="868680" y="1508760"/>
-            <a:ext cx="6537960" cy="4160520"/>
+            <a:ext cx="6309360" cy="4160520"/>
           </a:xfrm>
           <a:prstGeom prst="rect">
             <a:avLst/>
@@ -3449,18 +3403,18 @@
       </p:sp>
       <p:sp>
         <p:nvSpPr>
-          <p:cNvPr id="12" name="Shape 10"/>
-          <p:cNvSpPr/>
-          <p:nvPr/>
-        </p:nvSpPr>
-        <p:spPr>
-          <a:xfrm>
-            <a:off x="7909560" y="1417320"/>
-            <a:ext cx="3154680" cy="1828800"/>
+          <p:cNvPr id="10" name="Shape 8"/>
+          <p:cNvSpPr/>
+          <p:nvPr/>
+        </p:nvSpPr>
+        <p:spPr>
+          <a:xfrm>
+            <a:off x="7635240" y="1325880"/>
+            <a:ext cx="3474720" cy="1325880"/>
           </a:xfrm>
           <a:prstGeom prst="roundRect">
             <a:avLst>
-              <a:gd name="adj" fmla="val 6000"/>
+              <a:gd name="adj" fmla="val 8276"/>
             </a:avLst>
           </a:prstGeom>
           <a:solidFill>
@@ -3476,14 +3430,14 @@
       </p:sp>
       <p:sp>
         <p:nvSpPr>
-          <p:cNvPr id="13" name="Text 11"/>
-          <p:cNvSpPr/>
-          <p:nvPr/>
-        </p:nvSpPr>
-        <p:spPr>
-          <a:xfrm>
-            <a:off x="8074152" y="1563624"/>
-            <a:ext cx="2825496" cy="256032"/>
+          <p:cNvPr id="11" name="Text 9"/>
+          <p:cNvSpPr/>
+          <p:nvPr/>
+        </p:nvSpPr>
+        <p:spPr>
+          <a:xfrm>
+            <a:off x="7799832" y="1472184"/>
+            <a:ext cx="3145536" cy="256032"/>
           </a:xfrm>
           <a:prstGeom prst="rect">
             <a:avLst/>
@@ -3507,7 +3461,7 @@
                 <a:ea typeface="Aptos" pitchFamily="34" charset="-122"/>
                 <a:cs typeface="Aptos" pitchFamily="34" charset="-120"/>
               </a:rPr>
-              <a:t>Key idea</a:t>
+              <a:t>Data decision</a:t>
             </a:r>
             <a:endParaRPr lang="en-US" sz="1300" dirty="0"/>
           </a:p>
@@ -3515,14 +3469,14 @@
       </p:sp>
       <p:sp>
         <p:nvSpPr>
-          <p:cNvPr id="14" name="Text 12"/>
-          <p:cNvSpPr/>
-          <p:nvPr/>
-        </p:nvSpPr>
-        <p:spPr>
-          <a:xfrm>
-            <a:off x="8074152" y="1920240"/>
-            <a:ext cx="2825496" cy="1188720"/>
+          <p:cNvPr id="12" name="Text 10"/>
+          <p:cNvSpPr/>
+          <p:nvPr/>
+        </p:nvSpPr>
+        <p:spPr>
+          <a:xfrm>
+            <a:off x="7799832" y="1828800"/>
+            <a:ext cx="3145536" cy="685800"/>
           </a:xfrm>
           <a:prstGeom prst="rect">
             <a:avLst/>
@@ -3556,21 +3510,212 @@
       </p:sp>
       <p:sp>
         <p:nvSpPr>
-          <p:cNvPr id="15" name="Shape 13"/>
-          <p:cNvSpPr/>
-          <p:nvPr/>
-        </p:nvSpPr>
-        <p:spPr>
-          <a:xfrm>
-            <a:off x="7909560" y="3520440"/>
-            <a:ext cx="3154680" cy="1737360"/>
+          <p:cNvPr id="13" name="Shape 11"/>
+          <p:cNvSpPr/>
+          <p:nvPr/>
+        </p:nvSpPr>
+        <p:spPr>
+          <a:xfrm>
+            <a:off x="7635240" y="2788920"/>
+            <a:ext cx="3474720" cy="1536192"/>
           </a:xfrm>
           <a:prstGeom prst="roundRect">
             <a:avLst>
-              <a:gd name="adj" fmla="val 6316"/>
+              <a:gd name="adj" fmla="val 7143"/>
             </a:avLst>
           </a:prstGeom>
           <a:solidFill>
+            <a:srgbClr val="FFFFFF">
+              <a:alpha val="88000"/>
+            </a:srgbClr>
+          </a:solidFill>
+          <a:ln w="12700">
+            <a:solidFill>
+              <a:srgbClr val="D6E8F2"/>
+            </a:solidFill>
+            <a:prstDash val="solid"/>
+          </a:ln>
+        </p:spPr>
+      </p:sp>
+      <p:sp>
+        <p:nvSpPr>
+          <p:cNvPr id="14" name="Shape 12"/>
+          <p:cNvSpPr/>
+          <p:nvPr/>
+        </p:nvSpPr>
+        <p:spPr>
+          <a:xfrm>
+            <a:off x="8138160" y="3474720"/>
+            <a:ext cx="256032" cy="411480"/>
+          </a:xfrm>
+          <a:prstGeom prst="rect">
+            <a:avLst/>
+          </a:prstGeom>
+          <a:solidFill>
+            <a:srgbClr val="0068B7"/>
+          </a:solidFill>
+          <a:ln w="12700">
+            <a:solidFill>
+              <a:srgbClr val="0068B7"/>
+            </a:solidFill>
+            <a:prstDash val="solid"/>
+          </a:ln>
+        </p:spPr>
+      </p:sp>
+      <p:sp>
+        <p:nvSpPr>
+          <p:cNvPr id="15" name="Shape 13"/>
+          <p:cNvSpPr/>
+          <p:nvPr/>
+        </p:nvSpPr>
+        <p:spPr>
+          <a:xfrm>
+            <a:off x="8577072" y="3172968"/>
+            <a:ext cx="256032" cy="713232"/>
+          </a:xfrm>
+          <a:prstGeom prst="rect">
+            <a:avLst/>
+          </a:prstGeom>
+          <a:solidFill>
+            <a:srgbClr val="2F8A28"/>
+          </a:solidFill>
+          <a:ln w="12700">
+            <a:solidFill>
+              <a:srgbClr val="2F8A28"/>
+            </a:solidFill>
+            <a:prstDash val="solid"/>
+          </a:ln>
+        </p:spPr>
+      </p:sp>
+      <p:sp>
+        <p:nvSpPr>
+          <p:cNvPr id="16" name="Shape 14"/>
+          <p:cNvSpPr/>
+          <p:nvPr/>
+        </p:nvSpPr>
+        <p:spPr>
+          <a:xfrm>
+            <a:off x="9015984" y="2880360"/>
+            <a:ext cx="256032" cy="1005840"/>
+          </a:xfrm>
+          <a:prstGeom prst="rect">
+            <a:avLst/>
+          </a:prstGeom>
+          <a:solidFill>
+            <a:srgbClr val="D69A2D"/>
+          </a:solidFill>
+          <a:ln w="12700">
+            <a:solidFill>
+              <a:srgbClr val="D69A2D"/>
+            </a:solidFill>
+            <a:prstDash val="solid"/>
+          </a:ln>
+        </p:spPr>
+      </p:sp>
+      <p:sp>
+        <p:nvSpPr>
+          <p:cNvPr id="17" name="Shape 15"/>
+          <p:cNvSpPr/>
+          <p:nvPr/>
+        </p:nvSpPr>
+        <p:spPr>
+          <a:xfrm>
+            <a:off x="9454896" y="3319272"/>
+            <a:ext cx="256032" cy="566928"/>
+          </a:xfrm>
+          <a:prstGeom prst="rect">
+            <a:avLst/>
+          </a:prstGeom>
+          <a:solidFill>
+            <a:srgbClr val="6A4CA3"/>
+          </a:solidFill>
+          <a:ln w="12700">
+            <a:solidFill>
+              <a:srgbClr val="6A4CA3"/>
+            </a:solidFill>
+            <a:prstDash val="solid"/>
+          </a:ln>
+        </p:spPr>
+      </p:sp>
+      <p:sp>
+        <p:nvSpPr>
+          <p:cNvPr id="18" name="Shape 16"/>
+          <p:cNvSpPr/>
+          <p:nvPr/>
+        </p:nvSpPr>
+        <p:spPr>
+          <a:xfrm>
+            <a:off x="8019288" y="3886200"/>
+            <a:ext cx="2706624" cy="0"/>
+          </a:xfrm>
+          <a:prstGeom prst="line">
+            <a:avLst/>
+          </a:prstGeom>
+          <a:noFill/>
+          <a:ln w="15240">
+            <a:solidFill>
+              <a:srgbClr val="003A63"/>
+            </a:solidFill>
+            <a:prstDash val="solid"/>
+          </a:ln>
+        </p:spPr>
+      </p:sp>
+      <p:sp>
+        <p:nvSpPr>
+          <p:cNvPr id="19" name="Text 17"/>
+          <p:cNvSpPr/>
+          <p:nvPr/>
+        </p:nvSpPr>
+        <p:spPr>
+          <a:xfrm>
+            <a:off x="7863840" y="3017520"/>
+            <a:ext cx="3017520" cy="201168"/>
+          </a:xfrm>
+          <a:prstGeom prst="rect">
+            <a:avLst/>
+          </a:prstGeom>
+          <a:noFill/>
+          <a:ln/>
+        </p:spPr>
+        <p:txBody>
+          <a:bodyPr wrap="square" lIns="0" tIns="0" rIns="0" bIns="0" rtlCol="0" anchor="ctr"/>
+          <a:lstStyle/>
+          <a:p>
+            <a:pPr algn="ctr" indent="0" marL="0">
+              <a:buNone/>
+            </a:pPr>
+            <a:r>
+              <a:rPr lang="en-US" sz="1050" b="1" dirty="0">
+                <a:solidFill>
+                  <a:srgbClr val="003A63"/>
+                </a:solidFill>
+                <a:latin typeface="Aptos" pitchFamily="34" charset="0"/>
+                <a:ea typeface="Aptos" pitchFamily="34" charset="-122"/>
+                <a:cs typeface="Aptos" pitchFamily="34" charset="-120"/>
+              </a:rPr>
+              <a:t>Measure and monitor</a:t>
+            </a:r>
+            <a:endParaRPr lang="en-US" sz="1050" dirty="0"/>
+          </a:p>
+        </p:txBody>
+      </p:sp>
+      <p:sp>
+        <p:nvSpPr>
+          <p:cNvPr id="20" name="Shape 18"/>
+          <p:cNvSpPr/>
+          <p:nvPr/>
+        </p:nvSpPr>
+        <p:spPr>
+          <a:xfrm>
+            <a:off x="7635240" y="4498848"/>
+            <a:ext cx="3474720" cy="1143000"/>
+          </a:xfrm>
+          <a:prstGeom prst="roundRect">
+            <a:avLst>
+              <a:gd name="adj" fmla="val 9600"/>
+            </a:avLst>
+          </a:prstGeom>
+          <a:solidFill>
             <a:srgbClr val="EAF6F8"/>
           </a:solidFill>
           <a:ln w="12700">
@@ -3583,14 +3728,14 @@
       </p:sp>
       <p:sp>
         <p:nvSpPr>
-          <p:cNvPr id="16" name="Text 14"/>
-          <p:cNvSpPr/>
-          <p:nvPr/>
-        </p:nvSpPr>
-        <p:spPr>
-          <a:xfrm>
-            <a:off x="8074152" y="3666744"/>
-            <a:ext cx="2825496" cy="256032"/>
+          <p:cNvPr id="21" name="Text 19"/>
+          <p:cNvSpPr/>
+          <p:nvPr/>
+        </p:nvSpPr>
+        <p:spPr>
+          <a:xfrm>
+            <a:off x="7799832" y="4645152"/>
+            <a:ext cx="3145536" cy="256032"/>
           </a:xfrm>
           <a:prstGeom prst="rect">
             <a:avLst/>
@@ -3614,7 +3759,7 @@
                 <a:ea typeface="Aptos" pitchFamily="34" charset="-122"/>
                 <a:cs typeface="Aptos" pitchFamily="34" charset="-120"/>
               </a:rPr>
-              <a:t>Use this for</a:t>
+              <a:t>How to validate</a:t>
             </a:r>
             <a:endParaRPr lang="en-US" sz="1300" dirty="0"/>
           </a:p>
@@ -3622,14 +3767,14 @@
       </p:sp>
       <p:sp>
         <p:nvSpPr>
-          <p:cNvPr id="17" name="Text 15"/>
-          <p:cNvSpPr/>
-          <p:nvPr/>
-        </p:nvSpPr>
-        <p:spPr>
-          <a:xfrm>
-            <a:off x="8074152" y="4023360"/>
-            <a:ext cx="2825496" cy="1097280"/>
+          <p:cNvPr id="22" name="Text 20"/>
+          <p:cNvSpPr/>
+          <p:nvPr/>
+        </p:nvSpPr>
+        <p:spPr>
+          <a:xfrm>
+            <a:off x="7799832" y="5001768"/>
+            <a:ext cx="3145536" cy="502920"/>
           </a:xfrm>
           <a:prstGeom prst="rect">
             <a:avLst/>
@@ -3655,7 +3800,7 @@
                 <a:ea typeface="Aptos" pitchFamily="34" charset="-122"/>
                 <a:cs typeface="Aptos" pitchFamily="34" charset="-120"/>
               </a:rPr>
-              <a:t>Connect the concept to public health decisions, safeguards, documentation, or implementation work.</a:t>
+              <a:t>Connect the concept to data quality, model performance, validation evidence, monitoring measures, and decisions that remain under human control.</a:t>
             </a:r>
             <a:endParaRPr lang="en-US" sz="1550" dirty="0"/>
           </a:p>
@@ -3829,8 +3974,8 @@
         </p:nvSpPr>
         <p:spPr>
           <a:xfrm>
-            <a:off x="9966960" y="6537960"/>
-            <a:ext cx="1645920" cy="201168"/>
+            <a:off x="9646920" y="6537960"/>
+            <a:ext cx="1965960" cy="201168"/>
           </a:xfrm>
           <a:prstGeom prst="rect">
             <a:avLst/>
@@ -3854,7 +3999,7 @@
                 <a:ea typeface="Aptos" pitchFamily="34" charset="-122"/>
                 <a:cs typeface="Aptos" pitchFamily="34" charset="-120"/>
               </a:rPr>
-              <a:t>Â© Paula Soper</a:t>
+              <a:t>Copyright Paula Soper</a:t>
             </a:r>
             <a:endParaRPr lang="en-US" sz="800" dirty="0"/>
           </a:p>
@@ -3949,7 +4094,7 @@
         <p:spPr>
           <a:xfrm>
             <a:off x="868680" y="1508760"/>
-            <a:ext cx="6537960" cy="4160520"/>
+            <a:ext cx="6309360" cy="4160520"/>
           </a:xfrm>
           <a:prstGeom prst="rect">
             <a:avLst/>
@@ -4014,12 +4159,12 @@
         </p:nvSpPr>
         <p:spPr>
           <a:xfrm>
-            <a:off x="7909560" y="1417320"/>
-            <a:ext cx="3154680" cy="1828800"/>
+            <a:off x="7635240" y="1325880"/>
+            <a:ext cx="3474720" cy="1325880"/>
           </a:xfrm>
           <a:prstGeom prst="roundRect">
             <a:avLst>
-              <a:gd name="adj" fmla="val 6000"/>
+              <a:gd name="adj" fmla="val 8276"/>
             </a:avLst>
           </a:prstGeom>
           <a:solidFill>
@@ -4041,8 +4186,8 @@
         </p:nvSpPr>
         <p:spPr>
           <a:xfrm>
-            <a:off x="8074152" y="1563624"/>
-            <a:ext cx="2825496" cy="256032"/>
+            <a:off x="7799832" y="1472184"/>
+            <a:ext cx="3145536" cy="256032"/>
           </a:xfrm>
           <a:prstGeom prst="rect">
             <a:avLst/>
@@ -4066,7 +4211,7 @@
                 <a:ea typeface="Aptos" pitchFamily="34" charset="-122"/>
                 <a:cs typeface="Aptos" pitchFamily="34" charset="-120"/>
               </a:rPr>
-              <a:t>Key idea</a:t>
+              <a:t>Data decision</a:t>
             </a:r>
             <a:endParaRPr lang="en-US" sz="1300" dirty="0"/>
           </a:p>
@@ -4080,8 +4225,8 @@
         </p:nvSpPr>
         <p:spPr>
           <a:xfrm>
-            <a:off x="8074152" y="1920240"/>
-            <a:ext cx="2825496" cy="1188720"/>
+            <a:off x="7799832" y="1828800"/>
+            <a:ext cx="3145536" cy="685800"/>
           </a:xfrm>
           <a:prstGeom prst="rect">
             <a:avLst/>
@@ -4121,15 +4266,206 @@
         </p:nvSpPr>
         <p:spPr>
           <a:xfrm>
-            <a:off x="7909560" y="3520440"/>
-            <a:ext cx="3154680" cy="1737360"/>
+            <a:off x="7635240" y="2788920"/>
+            <a:ext cx="3474720" cy="1536192"/>
           </a:xfrm>
           <a:prstGeom prst="roundRect">
             <a:avLst>
-              <a:gd name="adj" fmla="val 6316"/>
+              <a:gd name="adj" fmla="val 7143"/>
             </a:avLst>
           </a:prstGeom>
           <a:solidFill>
+            <a:srgbClr val="FFFFFF">
+              <a:alpha val="88000"/>
+            </a:srgbClr>
+          </a:solidFill>
+          <a:ln w="12700">
+            <a:solidFill>
+              <a:srgbClr val="D6E8F2"/>
+            </a:solidFill>
+            <a:prstDash val="solid"/>
+          </a:ln>
+        </p:spPr>
+      </p:sp>
+      <p:sp>
+        <p:nvSpPr>
+          <p:cNvPr id="14" name="Shape 12"/>
+          <p:cNvSpPr/>
+          <p:nvPr/>
+        </p:nvSpPr>
+        <p:spPr>
+          <a:xfrm>
+            <a:off x="8138160" y="3474720"/>
+            <a:ext cx="256032" cy="411480"/>
+          </a:xfrm>
+          <a:prstGeom prst="rect">
+            <a:avLst/>
+          </a:prstGeom>
+          <a:solidFill>
+            <a:srgbClr val="0068B7"/>
+          </a:solidFill>
+          <a:ln w="12700">
+            <a:solidFill>
+              <a:srgbClr val="0068B7"/>
+            </a:solidFill>
+            <a:prstDash val="solid"/>
+          </a:ln>
+        </p:spPr>
+      </p:sp>
+      <p:sp>
+        <p:nvSpPr>
+          <p:cNvPr id="15" name="Shape 13"/>
+          <p:cNvSpPr/>
+          <p:nvPr/>
+        </p:nvSpPr>
+        <p:spPr>
+          <a:xfrm>
+            <a:off x="8577072" y="3172968"/>
+            <a:ext cx="256032" cy="713232"/>
+          </a:xfrm>
+          <a:prstGeom prst="rect">
+            <a:avLst/>
+          </a:prstGeom>
+          <a:solidFill>
+            <a:srgbClr val="2F8A28"/>
+          </a:solidFill>
+          <a:ln w="12700">
+            <a:solidFill>
+              <a:srgbClr val="2F8A28"/>
+            </a:solidFill>
+            <a:prstDash val="solid"/>
+          </a:ln>
+        </p:spPr>
+      </p:sp>
+      <p:sp>
+        <p:nvSpPr>
+          <p:cNvPr id="16" name="Shape 14"/>
+          <p:cNvSpPr/>
+          <p:nvPr/>
+        </p:nvSpPr>
+        <p:spPr>
+          <a:xfrm>
+            <a:off x="9015984" y="2880360"/>
+            <a:ext cx="256032" cy="1005840"/>
+          </a:xfrm>
+          <a:prstGeom prst="rect">
+            <a:avLst/>
+          </a:prstGeom>
+          <a:solidFill>
+            <a:srgbClr val="D69A2D"/>
+          </a:solidFill>
+          <a:ln w="12700">
+            <a:solidFill>
+              <a:srgbClr val="D69A2D"/>
+            </a:solidFill>
+            <a:prstDash val="solid"/>
+          </a:ln>
+        </p:spPr>
+      </p:sp>
+      <p:sp>
+        <p:nvSpPr>
+          <p:cNvPr id="17" name="Shape 15"/>
+          <p:cNvSpPr/>
+          <p:nvPr/>
+        </p:nvSpPr>
+        <p:spPr>
+          <a:xfrm>
+            <a:off x="9454896" y="3319272"/>
+            <a:ext cx="256032" cy="566928"/>
+          </a:xfrm>
+          <a:prstGeom prst="rect">
+            <a:avLst/>
+          </a:prstGeom>
+          <a:solidFill>
+            <a:srgbClr val="6A4CA3"/>
+          </a:solidFill>
+          <a:ln w="12700">
+            <a:solidFill>
+              <a:srgbClr val="6A4CA3"/>
+            </a:solidFill>
+            <a:prstDash val="solid"/>
+          </a:ln>
+        </p:spPr>
+      </p:sp>
+      <p:sp>
+        <p:nvSpPr>
+          <p:cNvPr id="18" name="Shape 16"/>
+          <p:cNvSpPr/>
+          <p:nvPr/>
+        </p:nvSpPr>
+        <p:spPr>
+          <a:xfrm>
+            <a:off x="8019288" y="3886200"/>
+            <a:ext cx="2706624" cy="0"/>
+          </a:xfrm>
+          <a:prstGeom prst="line">
+            <a:avLst/>
+          </a:prstGeom>
+          <a:noFill/>
+          <a:ln w="15240">
+            <a:solidFill>
+              <a:srgbClr val="003A63"/>
+            </a:solidFill>
+            <a:prstDash val="solid"/>
+          </a:ln>
+        </p:spPr>
+      </p:sp>
+      <p:sp>
+        <p:nvSpPr>
+          <p:cNvPr id="19" name="Text 17"/>
+          <p:cNvSpPr/>
+          <p:nvPr/>
+        </p:nvSpPr>
+        <p:spPr>
+          <a:xfrm>
+            <a:off x="7863840" y="3017520"/>
+            <a:ext cx="3017520" cy="201168"/>
+          </a:xfrm>
+          <a:prstGeom prst="rect">
+            <a:avLst/>
+          </a:prstGeom>
+          <a:noFill/>
+          <a:ln/>
+        </p:spPr>
+        <p:txBody>
+          <a:bodyPr wrap="square" lIns="0" tIns="0" rIns="0" bIns="0" rtlCol="0" anchor="ctr"/>
+          <a:lstStyle/>
+          <a:p>
+            <a:pPr algn="ctr" indent="0" marL="0">
+              <a:buNone/>
+            </a:pPr>
+            <a:r>
+              <a:rPr lang="en-US" sz="1050" b="1" dirty="0">
+                <a:solidFill>
+                  <a:srgbClr val="003A63"/>
+                </a:solidFill>
+                <a:latin typeface="Aptos" pitchFamily="34" charset="0"/>
+                <a:ea typeface="Aptos" pitchFamily="34" charset="-122"/>
+                <a:cs typeface="Aptos" pitchFamily="34" charset="-120"/>
+              </a:rPr>
+              <a:t>Measure and monitor</a:t>
+            </a:r>
+            <a:endParaRPr lang="en-US" sz="1050" dirty="0"/>
+          </a:p>
+        </p:txBody>
+      </p:sp>
+      <p:sp>
+        <p:nvSpPr>
+          <p:cNvPr id="20" name="Shape 18"/>
+          <p:cNvSpPr/>
+          <p:nvPr/>
+        </p:nvSpPr>
+        <p:spPr>
+          <a:xfrm>
+            <a:off x="7635240" y="4498848"/>
+            <a:ext cx="3474720" cy="1143000"/>
+          </a:xfrm>
+          <a:prstGeom prst="roundRect">
+            <a:avLst>
+              <a:gd name="adj" fmla="val 9600"/>
+            </a:avLst>
+          </a:prstGeom>
+          <a:solidFill>
             <a:srgbClr val="EAF6F8"/>
           </a:solidFill>
           <a:ln w="12700">
@@ -4142,14 +4478,14 @@
       </p:sp>
       <p:sp>
         <p:nvSpPr>
-          <p:cNvPr id="14" name="Text 12"/>
-          <p:cNvSpPr/>
-          <p:nvPr/>
-        </p:nvSpPr>
-        <p:spPr>
-          <a:xfrm>
-            <a:off x="8074152" y="3666744"/>
-            <a:ext cx="2825496" cy="256032"/>
+          <p:cNvPr id="21" name="Text 19"/>
+          <p:cNvSpPr/>
+          <p:nvPr/>
+        </p:nvSpPr>
+        <p:spPr>
+          <a:xfrm>
+            <a:off x="7799832" y="4645152"/>
+            <a:ext cx="3145536" cy="256032"/>
           </a:xfrm>
           <a:prstGeom prst="rect">
             <a:avLst/>
@@ -4173,7 +4509,7 @@
                 <a:ea typeface="Aptos" pitchFamily="34" charset="-122"/>
                 <a:cs typeface="Aptos" pitchFamily="34" charset="-120"/>
               </a:rPr>
-              <a:t>Use this for</a:t>
+              <a:t>How to validate</a:t>
             </a:r>
             <a:endParaRPr lang="en-US" sz="1300" dirty="0"/>
           </a:p>
@@ -4181,14 +4517,14 @@
       </p:sp>
       <p:sp>
         <p:nvSpPr>
-          <p:cNvPr id="15" name="Text 13"/>
-          <p:cNvSpPr/>
-          <p:nvPr/>
-        </p:nvSpPr>
-        <p:spPr>
-          <a:xfrm>
-            <a:off x="8074152" y="4023360"/>
-            <a:ext cx="2825496" cy="1097280"/>
+          <p:cNvPr id="22" name="Text 20"/>
+          <p:cNvSpPr/>
+          <p:nvPr/>
+        </p:nvSpPr>
+        <p:spPr>
+          <a:xfrm>
+            <a:off x="7799832" y="5001768"/>
+            <a:ext cx="3145536" cy="502920"/>
           </a:xfrm>
           <a:prstGeom prst="rect">
             <a:avLst/>
@@ -4214,7 +4550,7 @@
                 <a:ea typeface="Aptos" pitchFamily="34" charset="-122"/>
                 <a:cs typeface="Aptos" pitchFamily="34" charset="-120"/>
               </a:rPr>
-              <a:t>Connect the concept to public health decisions, safeguards, documentation, or implementation work.</a:t>
+              <a:t>Connect the concept to data quality, model performance, validation evidence, monitoring measures, and decisions that remain under human control.</a:t>
             </a:r>
             <a:endParaRPr lang="en-US" sz="1550" dirty="0"/>
           </a:p>
@@ -4388,8 +4724,8 @@
         </p:nvSpPr>
         <p:spPr>
           <a:xfrm>
-            <a:off x="9966960" y="6537960"/>
-            <a:ext cx="1645920" cy="201168"/>
+            <a:off x="9646920" y="6537960"/>
+            <a:ext cx="1965960" cy="201168"/>
           </a:xfrm>
           <a:prstGeom prst="rect">
             <a:avLst/>
@@ -4413,7 +4749,7 @@
                 <a:ea typeface="Aptos" pitchFamily="34" charset="-122"/>
                 <a:cs typeface="Aptos" pitchFamily="34" charset="-120"/>
               </a:rPr>
-              <a:t>Â© Paula Soper</a:t>
+              <a:t>Copyright Paula Soper</a:t>
             </a:r>
             <a:endParaRPr lang="en-US" sz="800" dirty="0"/>
           </a:p>
@@ -4460,77 +4796,13 @@
       </p:sp>
       <p:sp>
         <p:nvSpPr>
-          <p:cNvPr id="8" name="Shape 6"/>
+          <p:cNvPr id="8" name="Text 6"/>
           <p:cNvSpPr/>
           <p:nvPr/>
         </p:nvSpPr>
         <p:spPr>
           <a:xfrm>
             <a:off x="640080" y="658368"/>
-            <a:ext cx="420624" cy="420624"/>
-          </a:xfrm>
-          <a:prstGeom prst="ellipse">
-            <a:avLst/>
-          </a:prstGeom>
-          <a:solidFill>
-            <a:srgbClr val="0068B7"/>
-          </a:solidFill>
-          <a:ln w="12700">
-            <a:solidFill>
-              <a:srgbClr val="0068B7"/>
-            </a:solidFill>
-            <a:prstDash val="solid"/>
-          </a:ln>
-        </p:spPr>
-      </p:sp>
-      <p:sp>
-        <p:nvSpPr>
-          <p:cNvPr id="9" name="Text 7"/>
-          <p:cNvSpPr/>
-          <p:nvPr/>
-        </p:nvSpPr>
-        <p:spPr>
-          <a:xfrm>
-            <a:off x="640080" y="731520"/>
-            <a:ext cx="420624" cy="164592"/>
-          </a:xfrm>
-          <a:prstGeom prst="rect">
-            <a:avLst/>
-          </a:prstGeom>
-          <a:noFill/>
-          <a:ln/>
-        </p:spPr>
-        <p:txBody>
-          <a:bodyPr wrap="square" lIns="0" tIns="0" rIns="0" bIns="0" rtlCol="0" anchor="ctr"/>
-          <a:lstStyle/>
-          <a:p>
-            <a:pPr algn="ctr" indent="0" marL="0">
-              <a:buNone/>
-            </a:pPr>
-            <a:r>
-              <a:rPr lang="en-US" sz="1100" b="1" dirty="0">
-                <a:solidFill>
-                  <a:srgbClr val="FFFFFF"/>
-                </a:solidFill>
-                <a:latin typeface="Aptos" pitchFamily="34" charset="0"/>
-                <a:ea typeface="Aptos" pitchFamily="34" charset="-122"/>
-                <a:cs typeface="Aptos" pitchFamily="34" charset="-120"/>
-              </a:rPr>
-              <a:t>6</a:t>
-            </a:r>
-            <a:endParaRPr lang="en-US" sz="1100" dirty="0"/>
-          </a:p>
-        </p:txBody>
-      </p:sp>
-      <p:sp>
-        <p:nvSpPr>
-          <p:cNvPr id="10" name="Text 8"/>
-          <p:cNvSpPr/>
-          <p:nvPr/>
-        </p:nvSpPr>
-        <p:spPr>
-          <a:xfrm>
-            <a:off x="640080" y="621792"/>
             <a:ext cx="10881360" cy="713232"/>
           </a:xfrm>
           <a:prstGeom prst="rect">
@@ -4565,14 +4837,14 @@
       </p:sp>
       <p:sp>
         <p:nvSpPr>
-          <p:cNvPr id="11" name="Text 9"/>
+          <p:cNvPr id="9" name="Text 7"/>
           <p:cNvSpPr/>
           <p:nvPr/>
         </p:nvSpPr>
         <p:spPr>
           <a:xfrm>
             <a:off x="868680" y="1508760"/>
-            <a:ext cx="6537960" cy="4160520"/>
+            <a:ext cx="6309360" cy="4160520"/>
           </a:xfrm>
           <a:prstGeom prst="rect">
             <a:avLst/>
@@ -4631,18 +4903,18 @@
       </p:sp>
       <p:sp>
         <p:nvSpPr>
-          <p:cNvPr id="12" name="Shape 10"/>
-          <p:cNvSpPr/>
-          <p:nvPr/>
-        </p:nvSpPr>
-        <p:spPr>
-          <a:xfrm>
-            <a:off x="7909560" y="1417320"/>
-            <a:ext cx="3154680" cy="1828800"/>
+          <p:cNvPr id="10" name="Shape 8"/>
+          <p:cNvSpPr/>
+          <p:nvPr/>
+        </p:nvSpPr>
+        <p:spPr>
+          <a:xfrm>
+            <a:off x="7635240" y="1325880"/>
+            <a:ext cx="3474720" cy="1325880"/>
           </a:xfrm>
           <a:prstGeom prst="roundRect">
             <a:avLst>
-              <a:gd name="adj" fmla="val 6000"/>
+              <a:gd name="adj" fmla="val 8276"/>
             </a:avLst>
           </a:prstGeom>
           <a:solidFill>
@@ -4658,14 +4930,14 @@
       </p:sp>
       <p:sp>
         <p:nvSpPr>
-          <p:cNvPr id="13" name="Text 11"/>
-          <p:cNvSpPr/>
-          <p:nvPr/>
-        </p:nvSpPr>
-        <p:spPr>
-          <a:xfrm>
-            <a:off x="8074152" y="1563624"/>
-            <a:ext cx="2825496" cy="256032"/>
+          <p:cNvPr id="11" name="Text 9"/>
+          <p:cNvSpPr/>
+          <p:nvPr/>
+        </p:nvSpPr>
+        <p:spPr>
+          <a:xfrm>
+            <a:off x="7799832" y="1472184"/>
+            <a:ext cx="3145536" cy="256032"/>
           </a:xfrm>
           <a:prstGeom prst="rect">
             <a:avLst/>
@@ -4689,7 +4961,7 @@
                 <a:ea typeface="Aptos" pitchFamily="34" charset="-122"/>
                 <a:cs typeface="Aptos" pitchFamily="34" charset="-120"/>
               </a:rPr>
-              <a:t>Key idea</a:t>
+              <a:t>Risk check</a:t>
             </a:r>
             <a:endParaRPr lang="en-US" sz="1300" dirty="0"/>
           </a:p>
@@ -4697,14 +4969,14 @@
       </p:sp>
       <p:sp>
         <p:nvSpPr>
-          <p:cNvPr id="14" name="Text 12"/>
-          <p:cNvSpPr/>
-          <p:nvPr/>
-        </p:nvSpPr>
-        <p:spPr>
-          <a:xfrm>
-            <a:off x="8074152" y="1920240"/>
-            <a:ext cx="2825496" cy="1188720"/>
+          <p:cNvPr id="12" name="Text 10"/>
+          <p:cNvSpPr/>
+          <p:nvPr/>
+        </p:nvSpPr>
+        <p:spPr>
+          <a:xfrm>
+            <a:off x="7799832" y="1828800"/>
+            <a:ext cx="3145536" cy="685800"/>
           </a:xfrm>
           <a:prstGeom prst="rect">
             <a:avLst/>
@@ -4738,21 +5010,174 @@
       </p:sp>
       <p:sp>
         <p:nvSpPr>
-          <p:cNvPr id="15" name="Shape 13"/>
-          <p:cNvSpPr/>
-          <p:nvPr/>
-        </p:nvSpPr>
-        <p:spPr>
-          <a:xfrm>
-            <a:off x="7909560" y="3520440"/>
-            <a:ext cx="3154680" cy="1737360"/>
+          <p:cNvPr id="13" name="Shape 11"/>
+          <p:cNvSpPr/>
+          <p:nvPr/>
+        </p:nvSpPr>
+        <p:spPr>
+          <a:xfrm>
+            <a:off x="7635240" y="2788920"/>
+            <a:ext cx="3474720" cy="1536192"/>
           </a:xfrm>
           <a:prstGeom prst="roundRect">
             <a:avLst>
-              <a:gd name="adj" fmla="val 6316"/>
+              <a:gd name="adj" fmla="val 7143"/>
             </a:avLst>
           </a:prstGeom>
           <a:solidFill>
+            <a:srgbClr val="FFFFFF">
+              <a:alpha val="88000"/>
+            </a:srgbClr>
+          </a:solidFill>
+          <a:ln w="12700">
+            <a:solidFill>
+              <a:srgbClr val="D6E8F2"/>
+            </a:solidFill>
+            <a:prstDash val="solid"/>
+          </a:ln>
+        </p:spPr>
+      </p:sp>
+      <p:sp>
+        <p:nvSpPr>
+          <p:cNvPr id="14" name="Shape 12"/>
+          <p:cNvSpPr/>
+          <p:nvPr/>
+        </p:nvSpPr>
+        <p:spPr>
+          <a:xfrm>
+            <a:off x="8046720" y="3108960"/>
+            <a:ext cx="2651760" cy="896112"/>
+          </a:xfrm>
+          <a:prstGeom prst="arc">
+            <a:avLst/>
+          </a:prstGeom>
+          <a:noFill/>
+          <a:ln w="25400">
+            <a:solidFill>
+              <a:srgbClr val="0068B7"/>
+            </a:solidFill>
+            <a:prstDash val="solid"/>
+          </a:ln>
+        </p:spPr>
+      </p:sp>
+      <p:sp>
+        <p:nvSpPr>
+          <p:cNvPr id="15" name="Text 13"/>
+          <p:cNvSpPr/>
+          <p:nvPr/>
+        </p:nvSpPr>
+        <p:spPr>
+          <a:xfrm>
+            <a:off x="7909560" y="3099816"/>
+            <a:ext cx="2926080" cy="256032"/>
+          </a:xfrm>
+          <a:prstGeom prst="rect">
+            <a:avLst/>
+          </a:prstGeom>
+          <a:noFill/>
+          <a:ln/>
+        </p:spPr>
+        <p:txBody>
+          <a:bodyPr wrap="square" lIns="0" tIns="0" rIns="0" bIns="0" rtlCol="0" anchor="ctr"/>
+          <a:lstStyle/>
+          <a:p>
+            <a:pPr algn="ctr" indent="0" marL="0">
+              <a:buNone/>
+            </a:pPr>
+            <a:r>
+              <a:rPr lang="en-US" sz="1500" b="1" dirty="0">
+                <a:solidFill>
+                  <a:srgbClr val="003A63"/>
+                </a:solidFill>
+                <a:latin typeface="Aptos" pitchFamily="34" charset="0"/>
+                <a:ea typeface="Aptos" pitchFamily="34" charset="-122"/>
+                <a:cs typeface="Aptos" pitchFamily="34" charset="-120"/>
+              </a:rPr>
+              <a:t>Risk</a:t>
+            </a:r>
+            <a:endParaRPr lang="en-US" sz="1500" dirty="0"/>
+          </a:p>
+        </p:txBody>
+      </p:sp>
+      <p:sp>
+        <p:nvSpPr>
+          <p:cNvPr id="16" name="Shape 14"/>
+          <p:cNvSpPr/>
+          <p:nvPr/>
+        </p:nvSpPr>
+        <p:spPr>
+          <a:xfrm>
+            <a:off x="8366760" y="3639312"/>
+            <a:ext cx="2011680" cy="0"/>
+          </a:xfrm>
+          <a:prstGeom prst="line">
+            <a:avLst/>
+          </a:prstGeom>
+          <a:noFill/>
+          <a:ln w="63500">
+            <a:solidFill>
+              <a:srgbClr val="2F8A28"/>
+            </a:solidFill>
+            <a:prstDash val="solid"/>
+          </a:ln>
+        </p:spPr>
+      </p:sp>
+      <p:sp>
+        <p:nvSpPr>
+          <p:cNvPr id="17" name="Text 15"/>
+          <p:cNvSpPr/>
+          <p:nvPr/>
+        </p:nvSpPr>
+        <p:spPr>
+          <a:xfrm>
+            <a:off x="7909560" y="3849624"/>
+            <a:ext cx="2926080" cy="164592"/>
+          </a:xfrm>
+          <a:prstGeom prst="rect">
+            <a:avLst/>
+          </a:prstGeom>
+          <a:noFill/>
+          <a:ln/>
+        </p:spPr>
+        <p:txBody>
+          <a:bodyPr wrap="square" lIns="0" tIns="0" rIns="0" bIns="0" rtlCol="0" anchor="ctr"/>
+          <a:lstStyle/>
+          <a:p>
+            <a:pPr algn="ctr" indent="0" marL="0">
+              <a:buNone/>
+            </a:pPr>
+            <a:r>
+              <a:rPr lang="en-US" sz="900" dirty="0">
+                <a:solidFill>
+                  <a:srgbClr val="003A63"/>
+                </a:solidFill>
+                <a:latin typeface="Aptos" pitchFamily="34" charset="0"/>
+                <a:ea typeface="Aptos" pitchFamily="34" charset="-122"/>
+                <a:cs typeface="Aptos" pitchFamily="34" charset="-120"/>
+              </a:rPr>
+              <a:t>Human review</a:t>
+            </a:r>
+            <a:endParaRPr lang="en-US" sz="900" dirty="0"/>
+          </a:p>
+        </p:txBody>
+      </p:sp>
+      <p:sp>
+        <p:nvSpPr>
+          <p:cNvPr id="18" name="Shape 16"/>
+          <p:cNvSpPr/>
+          <p:nvPr/>
+        </p:nvSpPr>
+        <p:spPr>
+          <a:xfrm>
+            <a:off x="7635240" y="4498848"/>
+            <a:ext cx="3474720" cy="1143000"/>
+          </a:xfrm>
+          <a:prstGeom prst="roundRect">
+            <a:avLst>
+              <a:gd name="adj" fmla="val 9600"/>
+            </a:avLst>
+          </a:prstGeom>
+          <a:solidFill>
             <a:srgbClr val="EAF6F8"/>
           </a:solidFill>
           <a:ln w="12700">
@@ -4765,14 +5190,14 @@
       </p:sp>
       <p:sp>
         <p:nvSpPr>
-          <p:cNvPr id="16" name="Text 14"/>
-          <p:cNvSpPr/>
-          <p:nvPr/>
-        </p:nvSpPr>
-        <p:spPr>
-          <a:xfrm>
-            <a:off x="8074152" y="3666744"/>
-            <a:ext cx="2825496" cy="256032"/>
+          <p:cNvPr id="19" name="Text 17"/>
+          <p:cNvSpPr/>
+          <p:nvPr/>
+        </p:nvSpPr>
+        <p:spPr>
+          <a:xfrm>
+            <a:off x="7799832" y="4645152"/>
+            <a:ext cx="3145536" cy="256032"/>
           </a:xfrm>
           <a:prstGeom prst="rect">
             <a:avLst/>
@@ -4796,7 +5221,7 @@
                 <a:ea typeface="Aptos" pitchFamily="34" charset="-122"/>
                 <a:cs typeface="Aptos" pitchFamily="34" charset="-120"/>
               </a:rPr>
-              <a:t>Use this for</a:t>
+              <a:t>Safeguard to plan</a:t>
             </a:r>
             <a:endParaRPr lang="en-US" sz="1300" dirty="0"/>
           </a:p>
@@ -4804,14 +5229,14 @@
       </p:sp>
       <p:sp>
         <p:nvSpPr>
-          <p:cNvPr id="17" name="Text 15"/>
-          <p:cNvSpPr/>
-          <p:nvPr/>
-        </p:nvSpPr>
-        <p:spPr>
-          <a:xfrm>
-            <a:off x="8074152" y="4023360"/>
-            <a:ext cx="2825496" cy="1097280"/>
+          <p:cNvPr id="20" name="Text 18"/>
+          <p:cNvSpPr/>
+          <p:nvPr/>
+        </p:nvSpPr>
+        <p:spPr>
+          <a:xfrm>
+            <a:off x="7799832" y="5001768"/>
+            <a:ext cx="3145536" cy="502920"/>
           </a:xfrm>
           <a:prstGeom prst="rect">
             <a:avLst/>
@@ -4837,7 +5262,7 @@
                 <a:ea typeface="Aptos" pitchFamily="34" charset="-122"/>
                 <a:cs typeface="Aptos" pitchFamily="34" charset="-120"/>
               </a:rPr>
-              <a:t>Connect the concept to public health decisions, safeguards, documentation, or implementation work.</a:t>
+              <a:t>Identify what could go wrong, who could be affected, what safeguards are needed, and what evidence should be reviewed before use expands.</a:t>
             </a:r>
             <a:endParaRPr lang="en-US" sz="1550" dirty="0"/>
           </a:p>
@@ -5011,8 +5436,8 @@
         </p:nvSpPr>
         <p:spPr>
           <a:xfrm>
-            <a:off x="9966960" y="6537960"/>
-            <a:ext cx="1645920" cy="201168"/>
+            <a:off x="9646920" y="6537960"/>
+            <a:ext cx="1965960" cy="201168"/>
           </a:xfrm>
           <a:prstGeom prst="rect">
             <a:avLst/>
@@ -5036,7 +5461,7 @@
                 <a:ea typeface="Aptos" pitchFamily="34" charset="-122"/>
                 <a:cs typeface="Aptos" pitchFamily="34" charset="-120"/>
               </a:rPr>
-              <a:t>Â© Paula Soper</a:t>
+              <a:t>Copyright Paula Soper</a:t>
             </a:r>
             <a:endParaRPr lang="en-US" sz="800" dirty="0"/>
           </a:p>
@@ -5131,7 +5556,7 @@
         <p:spPr>
           <a:xfrm>
             <a:off x="868680" y="1508760"/>
-            <a:ext cx="6537960" cy="4160520"/>
+            <a:ext cx="6309360" cy="4160520"/>
           </a:xfrm>
           <a:prstGeom prst="rect">
             <a:avLst/>
@@ -5196,12 +5621,12 @@
         </p:nvSpPr>
         <p:spPr>
           <a:xfrm>
-            <a:off x="7909560" y="1417320"/>
-            <a:ext cx="3154680" cy="1828800"/>
+            <a:off x="7635240" y="1325880"/>
+            <a:ext cx="3474720" cy="1325880"/>
           </a:xfrm>
           <a:prstGeom prst="roundRect">
             <a:avLst>
-              <a:gd name="adj" fmla="val 6000"/>
+              <a:gd name="adj" fmla="val 8276"/>
             </a:avLst>
           </a:prstGeom>
           <a:solidFill>
@@ -5223,8 +5648,8 @@
         </p:nvSpPr>
         <p:spPr>
           <a:xfrm>
-            <a:off x="8074152" y="1563624"/>
-            <a:ext cx="2825496" cy="256032"/>
+            <a:off x="7799832" y="1472184"/>
+            <a:ext cx="3145536" cy="256032"/>
           </a:xfrm>
           <a:prstGeom prst="rect">
             <a:avLst/>
@@ -5248,7 +5673,7 @@
                 <a:ea typeface="Aptos" pitchFamily="34" charset="-122"/>
                 <a:cs typeface="Aptos" pitchFamily="34" charset="-120"/>
               </a:rPr>
-              <a:t>Key idea</a:t>
+              <a:t>Risk check</a:t>
             </a:r>
             <a:endParaRPr lang="en-US" sz="1300" dirty="0"/>
           </a:p>
@@ -5262,8 +5687,8 @@
         </p:nvSpPr>
         <p:spPr>
           <a:xfrm>
-            <a:off x="8074152" y="1920240"/>
-            <a:ext cx="2825496" cy="1188720"/>
+            <a:off x="7799832" y="1828800"/>
+            <a:ext cx="3145536" cy="685800"/>
           </a:xfrm>
           <a:prstGeom prst="rect">
             <a:avLst/>
@@ -5303,15 +5728,168 @@
         </p:nvSpPr>
         <p:spPr>
           <a:xfrm>
-            <a:off x="7909560" y="3520440"/>
-            <a:ext cx="3154680" cy="1737360"/>
+            <a:off x="7635240" y="2788920"/>
+            <a:ext cx="3474720" cy="1536192"/>
           </a:xfrm>
           <a:prstGeom prst="roundRect">
             <a:avLst>
-              <a:gd name="adj" fmla="val 6316"/>
+              <a:gd name="adj" fmla="val 7143"/>
             </a:avLst>
           </a:prstGeom>
           <a:solidFill>
+            <a:srgbClr val="FFFFFF">
+              <a:alpha val="88000"/>
+            </a:srgbClr>
+          </a:solidFill>
+          <a:ln w="12700">
+            <a:solidFill>
+              <a:srgbClr val="D6E8F2"/>
+            </a:solidFill>
+            <a:prstDash val="solid"/>
+          </a:ln>
+        </p:spPr>
+      </p:sp>
+      <p:sp>
+        <p:nvSpPr>
+          <p:cNvPr id="14" name="Shape 12"/>
+          <p:cNvSpPr/>
+          <p:nvPr/>
+        </p:nvSpPr>
+        <p:spPr>
+          <a:xfrm>
+            <a:off x="8046720" y="3108960"/>
+            <a:ext cx="2651760" cy="896112"/>
+          </a:xfrm>
+          <a:prstGeom prst="arc">
+            <a:avLst/>
+          </a:prstGeom>
+          <a:noFill/>
+          <a:ln w="25400">
+            <a:solidFill>
+              <a:srgbClr val="0068B7"/>
+            </a:solidFill>
+            <a:prstDash val="solid"/>
+          </a:ln>
+        </p:spPr>
+      </p:sp>
+      <p:sp>
+        <p:nvSpPr>
+          <p:cNvPr id="15" name="Text 13"/>
+          <p:cNvSpPr/>
+          <p:nvPr/>
+        </p:nvSpPr>
+        <p:spPr>
+          <a:xfrm>
+            <a:off x="7909560" y="3099816"/>
+            <a:ext cx="2926080" cy="256032"/>
+          </a:xfrm>
+          <a:prstGeom prst="rect">
+            <a:avLst/>
+          </a:prstGeom>
+          <a:noFill/>
+          <a:ln/>
+        </p:spPr>
+        <p:txBody>
+          <a:bodyPr wrap="square" lIns="0" tIns="0" rIns="0" bIns="0" rtlCol="0" anchor="ctr"/>
+          <a:lstStyle/>
+          <a:p>
+            <a:pPr algn="ctr" indent="0" marL="0">
+              <a:buNone/>
+            </a:pPr>
+            <a:r>
+              <a:rPr lang="en-US" sz="1500" b="1" dirty="0">
+                <a:solidFill>
+                  <a:srgbClr val="003A63"/>
+                </a:solidFill>
+                <a:latin typeface="Aptos" pitchFamily="34" charset="0"/>
+                <a:ea typeface="Aptos" pitchFamily="34" charset="-122"/>
+                <a:cs typeface="Aptos" pitchFamily="34" charset="-120"/>
+              </a:rPr>
+              <a:t>Risk</a:t>
+            </a:r>
+            <a:endParaRPr lang="en-US" sz="1500" dirty="0"/>
+          </a:p>
+        </p:txBody>
+      </p:sp>
+      <p:sp>
+        <p:nvSpPr>
+          <p:cNvPr id="16" name="Shape 14"/>
+          <p:cNvSpPr/>
+          <p:nvPr/>
+        </p:nvSpPr>
+        <p:spPr>
+          <a:xfrm>
+            <a:off x="8366760" y="3639312"/>
+            <a:ext cx="2011680" cy="0"/>
+          </a:xfrm>
+          <a:prstGeom prst="line">
+            <a:avLst/>
+          </a:prstGeom>
+          <a:noFill/>
+          <a:ln w="63500">
+            <a:solidFill>
+              <a:srgbClr val="2F8A28"/>
+            </a:solidFill>
+            <a:prstDash val="solid"/>
+          </a:ln>
+        </p:spPr>
+      </p:sp>
+      <p:sp>
+        <p:nvSpPr>
+          <p:cNvPr id="17" name="Text 15"/>
+          <p:cNvSpPr/>
+          <p:nvPr/>
+        </p:nvSpPr>
+        <p:spPr>
+          <a:xfrm>
+            <a:off x="7909560" y="3849624"/>
+            <a:ext cx="2926080" cy="164592"/>
+          </a:xfrm>
+          <a:prstGeom prst="rect">
+            <a:avLst/>
+          </a:prstGeom>
+          <a:noFill/>
+          <a:ln/>
+        </p:spPr>
+        <p:txBody>
+          <a:bodyPr wrap="square" lIns="0" tIns="0" rIns="0" bIns="0" rtlCol="0" anchor="ctr"/>
+          <a:lstStyle/>
+          <a:p>
+            <a:pPr algn="ctr" indent="0" marL="0">
+              <a:buNone/>
+            </a:pPr>
+            <a:r>
+              <a:rPr lang="en-US" sz="900" dirty="0">
+                <a:solidFill>
+                  <a:srgbClr val="003A63"/>
+                </a:solidFill>
+                <a:latin typeface="Aptos" pitchFamily="34" charset="0"/>
+                <a:ea typeface="Aptos" pitchFamily="34" charset="-122"/>
+                <a:cs typeface="Aptos" pitchFamily="34" charset="-120"/>
+              </a:rPr>
+              <a:t>Human review</a:t>
+            </a:r>
+            <a:endParaRPr lang="en-US" sz="900" dirty="0"/>
+          </a:p>
+        </p:txBody>
+      </p:sp>
+      <p:sp>
+        <p:nvSpPr>
+          <p:cNvPr id="18" name="Shape 16"/>
+          <p:cNvSpPr/>
+          <p:nvPr/>
+        </p:nvSpPr>
+        <p:spPr>
+          <a:xfrm>
+            <a:off x="7635240" y="4498848"/>
+            <a:ext cx="3474720" cy="1143000"/>
+          </a:xfrm>
+          <a:prstGeom prst="roundRect">
+            <a:avLst>
+              <a:gd name="adj" fmla="val 9600"/>
+            </a:avLst>
+          </a:prstGeom>
+          <a:solidFill>
             <a:srgbClr val="EAF6F8"/>
           </a:solidFill>
           <a:ln w="12700">
@@ -5324,14 +5902,14 @@
       </p:sp>
       <p:sp>
         <p:nvSpPr>
-          <p:cNvPr id="14" name="Text 12"/>
-          <p:cNvSpPr/>
-          <p:nvPr/>
-        </p:nvSpPr>
-        <p:spPr>
-          <a:xfrm>
-            <a:off x="8074152" y="3666744"/>
-            <a:ext cx="2825496" cy="256032"/>
+          <p:cNvPr id="19" name="Text 17"/>
+          <p:cNvSpPr/>
+          <p:nvPr/>
+        </p:nvSpPr>
+        <p:spPr>
+          <a:xfrm>
+            <a:off x="7799832" y="4645152"/>
+            <a:ext cx="3145536" cy="256032"/>
           </a:xfrm>
           <a:prstGeom prst="rect">
             <a:avLst/>
@@ -5355,7 +5933,7 @@
                 <a:ea typeface="Aptos" pitchFamily="34" charset="-122"/>
                 <a:cs typeface="Aptos" pitchFamily="34" charset="-120"/>
               </a:rPr>
-              <a:t>Use this for</a:t>
+              <a:t>Safeguard to plan</a:t>
             </a:r>
             <a:endParaRPr lang="en-US" sz="1300" dirty="0"/>
           </a:p>
@@ -5363,14 +5941,14 @@
       </p:sp>
       <p:sp>
         <p:nvSpPr>
-          <p:cNvPr id="15" name="Text 13"/>
-          <p:cNvSpPr/>
-          <p:nvPr/>
-        </p:nvSpPr>
-        <p:spPr>
-          <a:xfrm>
-            <a:off x="8074152" y="4023360"/>
-            <a:ext cx="2825496" cy="1097280"/>
+          <p:cNvPr id="20" name="Text 18"/>
+          <p:cNvSpPr/>
+          <p:nvPr/>
+        </p:nvSpPr>
+        <p:spPr>
+          <a:xfrm>
+            <a:off x="7799832" y="5001768"/>
+            <a:ext cx="3145536" cy="502920"/>
           </a:xfrm>
           <a:prstGeom prst="rect">
             <a:avLst/>
@@ -5396,7 +5974,7 @@
                 <a:ea typeface="Aptos" pitchFamily="34" charset="-122"/>
                 <a:cs typeface="Aptos" pitchFamily="34" charset="-120"/>
               </a:rPr>
-              <a:t>Connect the concept to public health decisions, safeguards, documentation, or implementation work.</a:t>
+              <a:t>Identify what could go wrong, who could be affected, what safeguards are needed, and what evidence should be reviewed before use expands.</a:t>
             </a:r>
             <a:endParaRPr lang="en-US" sz="1550" dirty="0"/>
           </a:p>
@@ -5570,8 +6148,8 @@
         </p:nvSpPr>
         <p:spPr>
           <a:xfrm>
-            <a:off x="9966960" y="6537960"/>
-            <a:ext cx="1645920" cy="201168"/>
+            <a:off x="9646920" y="6537960"/>
+            <a:ext cx="1965960" cy="201168"/>
           </a:xfrm>
           <a:prstGeom prst="rect">
             <a:avLst/>
@@ -5595,7 +6173,7 @@
                 <a:ea typeface="Aptos" pitchFamily="34" charset="-122"/>
                 <a:cs typeface="Aptos" pitchFamily="34" charset="-120"/>
               </a:rPr>
-              <a:t>Â© Paula Soper</a:t>
+              <a:t>Copyright Paula Soper</a:t>
             </a:r>
             <a:endParaRPr lang="en-US" sz="800" dirty="0"/>
           </a:p>
@@ -5642,77 +6220,13 @@
       </p:sp>
       <p:sp>
         <p:nvSpPr>
-          <p:cNvPr id="8" name="Shape 6"/>
+          <p:cNvPr id="8" name="Text 6"/>
           <p:cNvSpPr/>
           <p:nvPr/>
         </p:nvSpPr>
         <p:spPr>
           <a:xfrm>
             <a:off x="640080" y="658368"/>
-            <a:ext cx="420624" cy="420624"/>
-          </a:xfrm>
-          <a:prstGeom prst="ellipse">
-            <a:avLst/>
-          </a:prstGeom>
-          <a:solidFill>
-            <a:srgbClr val="0068B7"/>
-          </a:solidFill>
-          <a:ln w="12700">
-            <a:solidFill>
-              <a:srgbClr val="0068B7"/>
-            </a:solidFill>
-            <a:prstDash val="solid"/>
-          </a:ln>
-        </p:spPr>
-      </p:sp>
-      <p:sp>
-        <p:nvSpPr>
-          <p:cNvPr id="9" name="Text 7"/>
-          <p:cNvSpPr/>
-          <p:nvPr/>
-        </p:nvSpPr>
-        <p:spPr>
-          <a:xfrm>
-            <a:off x="640080" y="731520"/>
-            <a:ext cx="420624" cy="164592"/>
-          </a:xfrm>
-          <a:prstGeom prst="rect">
-            <a:avLst/>
-          </a:prstGeom>
-          <a:noFill/>
-          <a:ln/>
-        </p:spPr>
-        <p:txBody>
-          <a:bodyPr wrap="square" lIns="0" tIns="0" rIns="0" bIns="0" rtlCol="0" anchor="ctr"/>
-          <a:lstStyle/>
-          <a:p>
-            <a:pPr algn="ctr" indent="0" marL="0">
-              <a:buNone/>
-            </a:pPr>
-            <a:r>
-              <a:rPr lang="en-US" sz="1100" b="1" dirty="0">
-                <a:solidFill>
-                  <a:srgbClr val="FFFFFF"/>
-                </a:solidFill>
-                <a:latin typeface="Aptos" pitchFamily="34" charset="0"/>
-                <a:ea typeface="Aptos" pitchFamily="34" charset="-122"/>
-                <a:cs typeface="Aptos" pitchFamily="34" charset="-120"/>
-              </a:rPr>
-              <a:t>7</a:t>
-            </a:r>
-            <a:endParaRPr lang="en-US" sz="1100" dirty="0"/>
-          </a:p>
-        </p:txBody>
-      </p:sp>
-      <p:sp>
-        <p:nvSpPr>
-          <p:cNvPr id="10" name="Text 8"/>
-          <p:cNvSpPr/>
-          <p:nvPr/>
-        </p:nvSpPr>
-        <p:spPr>
-          <a:xfrm>
-            <a:off x="640080" y="621792"/>
             <a:ext cx="10881360" cy="713232"/>
           </a:xfrm>
           <a:prstGeom prst="rect">
@@ -5747,14 +6261,14 @@
       </p:sp>
       <p:sp>
         <p:nvSpPr>
-          <p:cNvPr id="11" name="Text 9"/>
+          <p:cNvPr id="9" name="Text 7"/>
           <p:cNvSpPr/>
           <p:nvPr/>
         </p:nvSpPr>
         <p:spPr>
           <a:xfrm>
             <a:off x="868680" y="1508760"/>
-            <a:ext cx="6537960" cy="4160520"/>
+            <a:ext cx="6309360" cy="4160520"/>
           </a:xfrm>
           <a:prstGeom prst="rect">
             <a:avLst/>
@@ -5813,18 +6327,18 @@
       </p:sp>
       <p:sp>
         <p:nvSpPr>
-          <p:cNvPr id="12" name="Shape 10"/>
-          <p:cNvSpPr/>
-          <p:nvPr/>
-        </p:nvSpPr>
-        <p:spPr>
-          <a:xfrm>
-            <a:off x="7909560" y="1417320"/>
-            <a:ext cx="3154680" cy="1828800"/>
+          <p:cNvPr id="10" name="Shape 8"/>
+          <p:cNvSpPr/>
+          <p:nvPr/>
+        </p:nvSpPr>
+        <p:spPr>
+          <a:xfrm>
+            <a:off x="7635240" y="1325880"/>
+            <a:ext cx="3474720" cy="1325880"/>
           </a:xfrm>
           <a:prstGeom prst="roundRect">
             <a:avLst>
-              <a:gd name="adj" fmla="val 6000"/>
+              <a:gd name="adj" fmla="val 8276"/>
             </a:avLst>
           </a:prstGeom>
           <a:solidFill>
@@ -5840,14 +6354,14 @@
       </p:sp>
       <p:sp>
         <p:nvSpPr>
-          <p:cNvPr id="13" name="Text 11"/>
-          <p:cNvSpPr/>
-          <p:nvPr/>
-        </p:nvSpPr>
-        <p:spPr>
-          <a:xfrm>
-            <a:off x="8074152" y="1563624"/>
-            <a:ext cx="2825496" cy="256032"/>
+          <p:cNvPr id="11" name="Text 9"/>
+          <p:cNvSpPr/>
+          <p:nvPr/>
+        </p:nvSpPr>
+        <p:spPr>
+          <a:xfrm>
+            <a:off x="7799832" y="1472184"/>
+            <a:ext cx="3145536" cy="256032"/>
           </a:xfrm>
           <a:prstGeom prst="rect">
             <a:avLst/>
@@ -5871,7 +6385,7 @@
                 <a:ea typeface="Aptos" pitchFamily="34" charset="-122"/>
                 <a:cs typeface="Aptos" pitchFamily="34" charset="-120"/>
               </a:rPr>
-              <a:t>Key idea</a:t>
+              <a:t>Data decision</a:t>
             </a:r>
             <a:endParaRPr lang="en-US" sz="1300" dirty="0"/>
           </a:p>
@@ -5879,14 +6393,14 @@
       </p:sp>
       <p:sp>
         <p:nvSpPr>
-          <p:cNvPr id="14" name="Text 12"/>
-          <p:cNvSpPr/>
-          <p:nvPr/>
-        </p:nvSpPr>
-        <p:spPr>
-          <a:xfrm>
-            <a:off x="8074152" y="1920240"/>
-            <a:ext cx="2825496" cy="1188720"/>
+          <p:cNvPr id="12" name="Text 10"/>
+          <p:cNvSpPr/>
+          <p:nvPr/>
+        </p:nvSpPr>
+        <p:spPr>
+          <a:xfrm>
+            <a:off x="7799832" y="1828800"/>
+            <a:ext cx="3145536" cy="685800"/>
           </a:xfrm>
           <a:prstGeom prst="rect">
             <a:avLst/>
@@ -5920,21 +6434,212 @@
       </p:sp>
       <p:sp>
         <p:nvSpPr>
-          <p:cNvPr id="15" name="Shape 13"/>
-          <p:cNvSpPr/>
-          <p:nvPr/>
-        </p:nvSpPr>
-        <p:spPr>
-          <a:xfrm>
-            <a:off x="7909560" y="3520440"/>
-            <a:ext cx="3154680" cy="1737360"/>
+          <p:cNvPr id="13" name="Shape 11"/>
+          <p:cNvSpPr/>
+          <p:nvPr/>
+        </p:nvSpPr>
+        <p:spPr>
+          <a:xfrm>
+            <a:off x="7635240" y="2788920"/>
+            <a:ext cx="3474720" cy="1536192"/>
           </a:xfrm>
           <a:prstGeom prst="roundRect">
             <a:avLst>
-              <a:gd name="adj" fmla="val 6316"/>
+              <a:gd name="adj" fmla="val 7143"/>
             </a:avLst>
           </a:prstGeom>
           <a:solidFill>
+            <a:srgbClr val="FFFFFF">
+              <a:alpha val="88000"/>
+            </a:srgbClr>
+          </a:solidFill>
+          <a:ln w="12700">
+            <a:solidFill>
+              <a:srgbClr val="D6E8F2"/>
+            </a:solidFill>
+            <a:prstDash val="solid"/>
+          </a:ln>
+        </p:spPr>
+      </p:sp>
+      <p:sp>
+        <p:nvSpPr>
+          <p:cNvPr id="14" name="Shape 12"/>
+          <p:cNvSpPr/>
+          <p:nvPr/>
+        </p:nvSpPr>
+        <p:spPr>
+          <a:xfrm>
+            <a:off x="8138160" y="3474720"/>
+            <a:ext cx="256032" cy="411480"/>
+          </a:xfrm>
+          <a:prstGeom prst="rect">
+            <a:avLst/>
+          </a:prstGeom>
+          <a:solidFill>
+            <a:srgbClr val="0068B7"/>
+          </a:solidFill>
+          <a:ln w="12700">
+            <a:solidFill>
+              <a:srgbClr val="0068B7"/>
+            </a:solidFill>
+            <a:prstDash val="solid"/>
+          </a:ln>
+        </p:spPr>
+      </p:sp>
+      <p:sp>
+        <p:nvSpPr>
+          <p:cNvPr id="15" name="Shape 13"/>
+          <p:cNvSpPr/>
+          <p:nvPr/>
+        </p:nvSpPr>
+        <p:spPr>
+          <a:xfrm>
+            <a:off x="8577072" y="3172968"/>
+            <a:ext cx="256032" cy="713232"/>
+          </a:xfrm>
+          <a:prstGeom prst="rect">
+            <a:avLst/>
+          </a:prstGeom>
+          <a:solidFill>
+            <a:srgbClr val="2F8A28"/>
+          </a:solidFill>
+          <a:ln w="12700">
+            <a:solidFill>
+              <a:srgbClr val="2F8A28"/>
+            </a:solidFill>
+            <a:prstDash val="solid"/>
+          </a:ln>
+        </p:spPr>
+      </p:sp>
+      <p:sp>
+        <p:nvSpPr>
+          <p:cNvPr id="16" name="Shape 14"/>
+          <p:cNvSpPr/>
+          <p:nvPr/>
+        </p:nvSpPr>
+        <p:spPr>
+          <a:xfrm>
+            <a:off x="9015984" y="2880360"/>
+            <a:ext cx="256032" cy="1005840"/>
+          </a:xfrm>
+          <a:prstGeom prst="rect">
+            <a:avLst/>
+          </a:prstGeom>
+          <a:solidFill>
+            <a:srgbClr val="D69A2D"/>
+          </a:solidFill>
+          <a:ln w="12700">
+            <a:solidFill>
+              <a:srgbClr val="D69A2D"/>
+            </a:solidFill>
+            <a:prstDash val="solid"/>
+          </a:ln>
+        </p:spPr>
+      </p:sp>
+      <p:sp>
+        <p:nvSpPr>
+          <p:cNvPr id="17" name="Shape 15"/>
+          <p:cNvSpPr/>
+          <p:nvPr/>
+        </p:nvSpPr>
+        <p:spPr>
+          <a:xfrm>
+            <a:off x="9454896" y="3319272"/>
+            <a:ext cx="256032" cy="566928"/>
+          </a:xfrm>
+          <a:prstGeom prst="rect">
+            <a:avLst/>
+          </a:prstGeom>
+          <a:solidFill>
+            <a:srgbClr val="6A4CA3"/>
+          </a:solidFill>
+          <a:ln w="12700">
+            <a:solidFill>
+              <a:srgbClr val="6A4CA3"/>
+            </a:solidFill>
+            <a:prstDash val="solid"/>
+          </a:ln>
+        </p:spPr>
+      </p:sp>
+      <p:sp>
+        <p:nvSpPr>
+          <p:cNvPr id="18" name="Shape 16"/>
+          <p:cNvSpPr/>
+          <p:nvPr/>
+        </p:nvSpPr>
+        <p:spPr>
+          <a:xfrm>
+            <a:off x="8019288" y="3886200"/>
+            <a:ext cx="2706624" cy="0"/>
+          </a:xfrm>
+          <a:prstGeom prst="line">
+            <a:avLst/>
+          </a:prstGeom>
+          <a:noFill/>
+          <a:ln w="15240">
+            <a:solidFill>
+              <a:srgbClr val="003A63"/>
+            </a:solidFill>
+            <a:prstDash val="solid"/>
+          </a:ln>
+        </p:spPr>
+      </p:sp>
+      <p:sp>
+        <p:nvSpPr>
+          <p:cNvPr id="19" name="Text 17"/>
+          <p:cNvSpPr/>
+          <p:nvPr/>
+        </p:nvSpPr>
+        <p:spPr>
+          <a:xfrm>
+            <a:off x="7863840" y="3017520"/>
+            <a:ext cx="3017520" cy="201168"/>
+          </a:xfrm>
+          <a:prstGeom prst="rect">
+            <a:avLst/>
+          </a:prstGeom>
+          <a:noFill/>
+          <a:ln/>
+        </p:spPr>
+        <p:txBody>
+          <a:bodyPr wrap="square" lIns="0" tIns="0" rIns="0" bIns="0" rtlCol="0" anchor="ctr"/>
+          <a:lstStyle/>
+          <a:p>
+            <a:pPr algn="ctr" indent="0" marL="0">
+              <a:buNone/>
+            </a:pPr>
+            <a:r>
+              <a:rPr lang="en-US" sz="1050" b="1" dirty="0">
+                <a:solidFill>
+                  <a:srgbClr val="003A63"/>
+                </a:solidFill>
+                <a:latin typeface="Aptos" pitchFamily="34" charset="0"/>
+                <a:ea typeface="Aptos" pitchFamily="34" charset="-122"/>
+                <a:cs typeface="Aptos" pitchFamily="34" charset="-120"/>
+              </a:rPr>
+              <a:t>Measure and monitor</a:t>
+            </a:r>
+            <a:endParaRPr lang="en-US" sz="1050" dirty="0"/>
+          </a:p>
+        </p:txBody>
+      </p:sp>
+      <p:sp>
+        <p:nvSpPr>
+          <p:cNvPr id="20" name="Shape 18"/>
+          <p:cNvSpPr/>
+          <p:nvPr/>
+        </p:nvSpPr>
+        <p:spPr>
+          <a:xfrm>
+            <a:off x="7635240" y="4498848"/>
+            <a:ext cx="3474720" cy="1143000"/>
+          </a:xfrm>
+          <a:prstGeom prst="roundRect">
+            <a:avLst>
+              <a:gd name="adj" fmla="val 9600"/>
+            </a:avLst>
+          </a:prstGeom>
+          <a:solidFill>
             <a:srgbClr val="EAF6F8"/>
           </a:solidFill>
           <a:ln w="12700">
@@ -5947,14 +6652,14 @@
       </p:sp>
       <p:sp>
         <p:nvSpPr>
-          <p:cNvPr id="16" name="Text 14"/>
-          <p:cNvSpPr/>
-          <p:nvPr/>
-        </p:nvSpPr>
-        <p:spPr>
-          <a:xfrm>
-            <a:off x="8074152" y="3666744"/>
-            <a:ext cx="2825496" cy="256032"/>
+          <p:cNvPr id="21" name="Text 19"/>
+          <p:cNvSpPr/>
+          <p:nvPr/>
+        </p:nvSpPr>
+        <p:spPr>
+          <a:xfrm>
+            <a:off x="7799832" y="4645152"/>
+            <a:ext cx="3145536" cy="256032"/>
           </a:xfrm>
           <a:prstGeom prst="rect">
             <a:avLst/>
@@ -5978,7 +6683,7 @@
                 <a:ea typeface="Aptos" pitchFamily="34" charset="-122"/>
                 <a:cs typeface="Aptos" pitchFamily="34" charset="-120"/>
               </a:rPr>
-              <a:t>Use this for</a:t>
+              <a:t>How to validate</a:t>
             </a:r>
             <a:endParaRPr lang="en-US" sz="1300" dirty="0"/>
           </a:p>
@@ -5986,14 +6691,14 @@
       </p:sp>
       <p:sp>
         <p:nvSpPr>
-          <p:cNvPr id="17" name="Text 15"/>
-          <p:cNvSpPr/>
-          <p:nvPr/>
-        </p:nvSpPr>
-        <p:spPr>
-          <a:xfrm>
-            <a:off x="8074152" y="4023360"/>
-            <a:ext cx="2825496" cy="1097280"/>
+          <p:cNvPr id="22" name="Text 20"/>
+          <p:cNvSpPr/>
+          <p:nvPr/>
+        </p:nvSpPr>
+        <p:spPr>
+          <a:xfrm>
+            <a:off x="7799832" y="5001768"/>
+            <a:ext cx="3145536" cy="502920"/>
           </a:xfrm>
           <a:prstGeom prst="rect">
             <a:avLst/>
@@ -6019,7 +6724,7 @@
                 <a:ea typeface="Aptos" pitchFamily="34" charset="-122"/>
                 <a:cs typeface="Aptos" pitchFamily="34" charset="-120"/>
               </a:rPr>
-              <a:t>Connect the concept to public health decisions, safeguards, documentation, or implementation work.</a:t>
+              <a:t>Connect the concept to data quality, model performance, validation evidence, monitoring measures, and decisions that remain under human control.</a:t>
             </a:r>
             <a:endParaRPr lang="en-US" sz="1550" dirty="0"/>
           </a:p>
@@ -6193,8 +6898,8 @@
         </p:nvSpPr>
         <p:spPr>
           <a:xfrm>
-            <a:off x="9966960" y="6537960"/>
-            <a:ext cx="1645920" cy="201168"/>
+            <a:off x="9646920" y="6537960"/>
+            <a:ext cx="1965960" cy="201168"/>
           </a:xfrm>
           <a:prstGeom prst="rect">
             <a:avLst/>
@@ -6218,7 +6923,7 @@
                 <a:ea typeface="Aptos" pitchFamily="34" charset="-122"/>
                 <a:cs typeface="Aptos" pitchFamily="34" charset="-120"/>
               </a:rPr>
-              <a:t>Â© Paula Soper</a:t>
+              <a:t>Copyright Paula Soper</a:t>
             </a:r>
             <a:endParaRPr lang="en-US" sz="800" dirty="0"/>
           </a:p>
@@ -6265,77 +6970,13 @@
       </p:sp>
       <p:sp>
         <p:nvSpPr>
-          <p:cNvPr id="8" name="Shape 6"/>
+          <p:cNvPr id="8" name="Text 6"/>
           <p:cNvSpPr/>
           <p:nvPr/>
         </p:nvSpPr>
         <p:spPr>
           <a:xfrm>
             <a:off x="640080" y="658368"/>
-            <a:ext cx="420624" cy="420624"/>
-          </a:xfrm>
-          <a:prstGeom prst="ellipse">
-            <a:avLst/>
-          </a:prstGeom>
-          <a:solidFill>
-            <a:srgbClr val="0068B7"/>
-          </a:solidFill>
-          <a:ln w="12700">
-            <a:solidFill>
-              <a:srgbClr val="0068B7"/>
-            </a:solidFill>
-            <a:prstDash val="solid"/>
-          </a:ln>
-        </p:spPr>
-      </p:sp>
-      <p:sp>
-        <p:nvSpPr>
-          <p:cNvPr id="9" name="Text 7"/>
-          <p:cNvSpPr/>
-          <p:nvPr/>
-        </p:nvSpPr>
-        <p:spPr>
-          <a:xfrm>
-            <a:off x="640080" y="731520"/>
-            <a:ext cx="420624" cy="164592"/>
-          </a:xfrm>
-          <a:prstGeom prst="rect">
-            <a:avLst/>
-          </a:prstGeom>
-          <a:noFill/>
-          <a:ln/>
-        </p:spPr>
-        <p:txBody>
-          <a:bodyPr wrap="square" lIns="0" tIns="0" rIns="0" bIns="0" rtlCol="0" anchor="ctr"/>
-          <a:lstStyle/>
-          <a:p>
-            <a:pPr algn="ctr" indent="0" marL="0">
-              <a:buNone/>
-            </a:pPr>
-            <a:r>
-              <a:rPr lang="en-US" sz="1100" b="1" dirty="0">
-                <a:solidFill>
-                  <a:srgbClr val="FFFFFF"/>
-                </a:solidFill>
-                <a:latin typeface="Aptos" pitchFamily="34" charset="0"/>
-                <a:ea typeface="Aptos" pitchFamily="34" charset="-122"/>
-                <a:cs typeface="Aptos" pitchFamily="34" charset="-120"/>
-              </a:rPr>
-              <a:t>8</a:t>
-            </a:r>
-            <a:endParaRPr lang="en-US" sz="1100" dirty="0"/>
-          </a:p>
-        </p:txBody>
-      </p:sp>
-      <p:sp>
-        <p:nvSpPr>
-          <p:cNvPr id="10" name="Text 8"/>
-          <p:cNvSpPr/>
-          <p:nvPr/>
-        </p:nvSpPr>
-        <p:spPr>
-          <a:xfrm>
-            <a:off x="640080" y="621792"/>
             <a:ext cx="10881360" cy="713232"/>
           </a:xfrm>
           <a:prstGeom prst="rect">
@@ -6370,14 +7011,14 @@
       </p:sp>
       <p:sp>
         <p:nvSpPr>
-          <p:cNvPr id="11" name="Text 9"/>
+          <p:cNvPr id="9" name="Text 7"/>
           <p:cNvSpPr/>
           <p:nvPr/>
         </p:nvSpPr>
         <p:spPr>
           <a:xfrm>
             <a:off x="868680" y="1508760"/>
-            <a:ext cx="6537960" cy="4160520"/>
+            <a:ext cx="6309360" cy="4160520"/>
           </a:xfrm>
           <a:prstGeom prst="rect">
             <a:avLst/>
@@ -6436,18 +7077,18 @@
       </p:sp>
       <p:sp>
         <p:nvSpPr>
-          <p:cNvPr id="12" name="Shape 10"/>
-          <p:cNvSpPr/>
-          <p:nvPr/>
-        </p:nvSpPr>
-        <p:spPr>
-          <a:xfrm>
-            <a:off x="7909560" y="1417320"/>
-            <a:ext cx="3154680" cy="1828800"/>
+          <p:cNvPr id="10" name="Shape 8"/>
+          <p:cNvSpPr/>
+          <p:nvPr/>
+        </p:nvSpPr>
+        <p:spPr>
+          <a:xfrm>
+            <a:off x="7635240" y="1325880"/>
+            <a:ext cx="3474720" cy="1325880"/>
           </a:xfrm>
           <a:prstGeom prst="roundRect">
             <a:avLst>
-              <a:gd name="adj" fmla="val 6000"/>
+              <a:gd name="adj" fmla="val 8276"/>
             </a:avLst>
           </a:prstGeom>
           <a:solidFill>
@@ -6463,14 +7104,14 @@
       </p:sp>
       <p:sp>
         <p:nvSpPr>
-          <p:cNvPr id="13" name="Text 11"/>
-          <p:cNvSpPr/>
-          <p:nvPr/>
-        </p:nvSpPr>
-        <p:spPr>
-          <a:xfrm>
-            <a:off x="8074152" y="1563624"/>
-            <a:ext cx="2825496" cy="256032"/>
+          <p:cNvPr id="11" name="Text 9"/>
+          <p:cNvSpPr/>
+          <p:nvPr/>
+        </p:nvSpPr>
+        <p:spPr>
+          <a:xfrm>
+            <a:off x="7799832" y="1472184"/>
+            <a:ext cx="3145536" cy="256032"/>
           </a:xfrm>
           <a:prstGeom prst="rect">
             <a:avLst/>
@@ -6494,7 +7135,7 @@
                 <a:ea typeface="Aptos" pitchFamily="34" charset="-122"/>
                 <a:cs typeface="Aptos" pitchFamily="34" charset="-120"/>
               </a:rPr>
-              <a:t>Key idea</a:t>
+              <a:t>Data decision</a:t>
             </a:r>
             <a:endParaRPr lang="en-US" sz="1300" dirty="0"/>
           </a:p>
@@ -6502,14 +7143,14 @@
       </p:sp>
       <p:sp>
         <p:nvSpPr>
-          <p:cNvPr id="14" name="Text 12"/>
-          <p:cNvSpPr/>
-          <p:nvPr/>
-        </p:nvSpPr>
-        <p:spPr>
-          <a:xfrm>
-            <a:off x="8074152" y="1920240"/>
-            <a:ext cx="2825496" cy="1188720"/>
+          <p:cNvPr id="12" name="Text 10"/>
+          <p:cNvSpPr/>
+          <p:nvPr/>
+        </p:nvSpPr>
+        <p:spPr>
+          <a:xfrm>
+            <a:off x="7799832" y="1828800"/>
+            <a:ext cx="3145536" cy="685800"/>
           </a:xfrm>
           <a:prstGeom prst="rect">
             <a:avLst/>
@@ -6543,21 +7184,212 @@
       </p:sp>
       <p:sp>
         <p:nvSpPr>
-          <p:cNvPr id="15" name="Shape 13"/>
-          <p:cNvSpPr/>
-          <p:nvPr/>
-        </p:nvSpPr>
-        <p:spPr>
-          <a:xfrm>
-            <a:off x="7909560" y="3520440"/>
-            <a:ext cx="3154680" cy="1737360"/>
+          <p:cNvPr id="13" name="Shape 11"/>
+          <p:cNvSpPr/>
+          <p:nvPr/>
+        </p:nvSpPr>
+        <p:spPr>
+          <a:xfrm>
+            <a:off x="7635240" y="2788920"/>
+            <a:ext cx="3474720" cy="1536192"/>
           </a:xfrm>
           <a:prstGeom prst="roundRect">
             <a:avLst>
-              <a:gd name="adj" fmla="val 6316"/>
+              <a:gd name="adj" fmla="val 7143"/>
             </a:avLst>
           </a:prstGeom>
           <a:solidFill>
+            <a:srgbClr val="FFFFFF">
+              <a:alpha val="88000"/>
+            </a:srgbClr>
+          </a:solidFill>
+          <a:ln w="12700">
+            <a:solidFill>
+              <a:srgbClr val="D6E8F2"/>
+            </a:solidFill>
+            <a:prstDash val="solid"/>
+          </a:ln>
+        </p:spPr>
+      </p:sp>
+      <p:sp>
+        <p:nvSpPr>
+          <p:cNvPr id="14" name="Shape 12"/>
+          <p:cNvSpPr/>
+          <p:nvPr/>
+        </p:nvSpPr>
+        <p:spPr>
+          <a:xfrm>
+            <a:off x="8138160" y="3474720"/>
+            <a:ext cx="256032" cy="411480"/>
+          </a:xfrm>
+          <a:prstGeom prst="rect">
+            <a:avLst/>
+          </a:prstGeom>
+          <a:solidFill>
+            <a:srgbClr val="0068B7"/>
+          </a:solidFill>
+          <a:ln w="12700">
+            <a:solidFill>
+              <a:srgbClr val="0068B7"/>
+            </a:solidFill>
+            <a:prstDash val="solid"/>
+          </a:ln>
+        </p:spPr>
+      </p:sp>
+      <p:sp>
+        <p:nvSpPr>
+          <p:cNvPr id="15" name="Shape 13"/>
+          <p:cNvSpPr/>
+          <p:nvPr/>
+        </p:nvSpPr>
+        <p:spPr>
+          <a:xfrm>
+            <a:off x="8577072" y="3172968"/>
+            <a:ext cx="256032" cy="713232"/>
+          </a:xfrm>
+          <a:prstGeom prst="rect">
+            <a:avLst/>
+          </a:prstGeom>
+          <a:solidFill>
+            <a:srgbClr val="2F8A28"/>
+          </a:solidFill>
+          <a:ln w="12700">
+            <a:solidFill>
+              <a:srgbClr val="2F8A28"/>
+            </a:solidFill>
+            <a:prstDash val="solid"/>
+          </a:ln>
+        </p:spPr>
+      </p:sp>
+      <p:sp>
+        <p:nvSpPr>
+          <p:cNvPr id="16" name="Shape 14"/>
+          <p:cNvSpPr/>
+          <p:nvPr/>
+        </p:nvSpPr>
+        <p:spPr>
+          <a:xfrm>
+            <a:off x="9015984" y="2880360"/>
+            <a:ext cx="256032" cy="1005840"/>
+          </a:xfrm>
+          <a:prstGeom prst="rect">
+            <a:avLst/>
+          </a:prstGeom>
+          <a:solidFill>
+            <a:srgbClr val="D69A2D"/>
+          </a:solidFill>
+          <a:ln w="12700">
+            <a:solidFill>
+              <a:srgbClr val="D69A2D"/>
+            </a:solidFill>
+            <a:prstDash val="solid"/>
+          </a:ln>
+        </p:spPr>
+      </p:sp>
+      <p:sp>
+        <p:nvSpPr>
+          <p:cNvPr id="17" name="Shape 15"/>
+          <p:cNvSpPr/>
+          <p:nvPr/>
+        </p:nvSpPr>
+        <p:spPr>
+          <a:xfrm>
+            <a:off x="9454896" y="3319272"/>
+            <a:ext cx="256032" cy="566928"/>
+          </a:xfrm>
+          <a:prstGeom prst="rect">
+            <a:avLst/>
+          </a:prstGeom>
+          <a:solidFill>
+            <a:srgbClr val="6A4CA3"/>
+          </a:solidFill>
+          <a:ln w="12700">
+            <a:solidFill>
+              <a:srgbClr val="6A4CA3"/>
+            </a:solidFill>
+            <a:prstDash val="solid"/>
+          </a:ln>
+        </p:spPr>
+      </p:sp>
+      <p:sp>
+        <p:nvSpPr>
+          <p:cNvPr id="18" name="Shape 16"/>
+          <p:cNvSpPr/>
+          <p:nvPr/>
+        </p:nvSpPr>
+        <p:spPr>
+          <a:xfrm>
+            <a:off x="8019288" y="3886200"/>
+            <a:ext cx="2706624" cy="0"/>
+          </a:xfrm>
+          <a:prstGeom prst="line">
+            <a:avLst/>
+          </a:prstGeom>
+          <a:noFill/>
+          <a:ln w="15240">
+            <a:solidFill>
+              <a:srgbClr val="003A63"/>
+            </a:solidFill>
+            <a:prstDash val="solid"/>
+          </a:ln>
+        </p:spPr>
+      </p:sp>
+      <p:sp>
+        <p:nvSpPr>
+          <p:cNvPr id="19" name="Text 17"/>
+          <p:cNvSpPr/>
+          <p:nvPr/>
+        </p:nvSpPr>
+        <p:spPr>
+          <a:xfrm>
+            <a:off x="7863840" y="3017520"/>
+            <a:ext cx="3017520" cy="201168"/>
+          </a:xfrm>
+          <a:prstGeom prst="rect">
+            <a:avLst/>
+          </a:prstGeom>
+          <a:noFill/>
+          <a:ln/>
+        </p:spPr>
+        <p:txBody>
+          <a:bodyPr wrap="square" lIns="0" tIns="0" rIns="0" bIns="0" rtlCol="0" anchor="ctr"/>
+          <a:lstStyle/>
+          <a:p>
+            <a:pPr algn="ctr" indent="0" marL="0">
+              <a:buNone/>
+            </a:pPr>
+            <a:r>
+              <a:rPr lang="en-US" sz="1050" b="1" dirty="0">
+                <a:solidFill>
+                  <a:srgbClr val="003A63"/>
+                </a:solidFill>
+                <a:latin typeface="Aptos" pitchFamily="34" charset="0"/>
+                <a:ea typeface="Aptos" pitchFamily="34" charset="-122"/>
+                <a:cs typeface="Aptos" pitchFamily="34" charset="-120"/>
+              </a:rPr>
+              <a:t>Measure and monitor</a:t>
+            </a:r>
+            <a:endParaRPr lang="en-US" sz="1050" dirty="0"/>
+          </a:p>
+        </p:txBody>
+      </p:sp>
+      <p:sp>
+        <p:nvSpPr>
+          <p:cNvPr id="20" name="Shape 18"/>
+          <p:cNvSpPr/>
+          <p:nvPr/>
+        </p:nvSpPr>
+        <p:spPr>
+          <a:xfrm>
+            <a:off x="7635240" y="4498848"/>
+            <a:ext cx="3474720" cy="1143000"/>
+          </a:xfrm>
+          <a:prstGeom prst="roundRect">
+            <a:avLst>
+              <a:gd name="adj" fmla="val 9600"/>
+            </a:avLst>
+          </a:prstGeom>
+          <a:solidFill>
             <a:srgbClr val="EAF6F8"/>
           </a:solidFill>
           <a:ln w="12700">
@@ -6570,14 +7402,14 @@
       </p:sp>
       <p:sp>
         <p:nvSpPr>
-          <p:cNvPr id="16" name="Text 14"/>
-          <p:cNvSpPr/>
-          <p:nvPr/>
-        </p:nvSpPr>
-        <p:spPr>
-          <a:xfrm>
-            <a:off x="8074152" y="3666744"/>
-            <a:ext cx="2825496" cy="256032"/>
+          <p:cNvPr id="21" name="Text 19"/>
+          <p:cNvSpPr/>
+          <p:nvPr/>
+        </p:nvSpPr>
+        <p:spPr>
+          <a:xfrm>
+            <a:off x="7799832" y="4645152"/>
+            <a:ext cx="3145536" cy="256032"/>
           </a:xfrm>
           <a:prstGeom prst="rect">
             <a:avLst/>
@@ -6601,7 +7433,7 @@
                 <a:ea typeface="Aptos" pitchFamily="34" charset="-122"/>
                 <a:cs typeface="Aptos" pitchFamily="34" charset="-120"/>
               </a:rPr>
-              <a:t>Use this for</a:t>
+              <a:t>How to validate</a:t>
             </a:r>
             <a:endParaRPr lang="en-US" sz="1300" dirty="0"/>
           </a:p>
@@ -6609,14 +7441,14 @@
       </p:sp>
       <p:sp>
         <p:nvSpPr>
-          <p:cNvPr id="17" name="Text 15"/>
-          <p:cNvSpPr/>
-          <p:nvPr/>
-        </p:nvSpPr>
-        <p:spPr>
-          <a:xfrm>
-            <a:off x="8074152" y="4023360"/>
-            <a:ext cx="2825496" cy="1097280"/>
+          <p:cNvPr id="22" name="Text 20"/>
+          <p:cNvSpPr/>
+          <p:nvPr/>
+        </p:nvSpPr>
+        <p:spPr>
+          <a:xfrm>
+            <a:off x="7799832" y="5001768"/>
+            <a:ext cx="3145536" cy="502920"/>
           </a:xfrm>
           <a:prstGeom prst="rect">
             <a:avLst/>
@@ -6642,7 +7474,7 @@
                 <a:ea typeface="Aptos" pitchFamily="34" charset="-122"/>
                 <a:cs typeface="Aptos" pitchFamily="34" charset="-120"/>
               </a:rPr>
-              <a:t>Connect the concept to public health decisions, safeguards, documentation, or implementation work.</a:t>
+              <a:t>Connect the concept to data quality, model performance, validation evidence, monitoring measures, and decisions that remain under human control.</a:t>
             </a:r>
             <a:endParaRPr lang="en-US" sz="1550" dirty="0"/>
           </a:p>
@@ -6816,8 +7648,8 @@
         </p:nvSpPr>
         <p:spPr>
           <a:xfrm>
-            <a:off x="9966960" y="6537960"/>
-            <a:ext cx="1645920" cy="201168"/>
+            <a:off x="9646920" y="6537960"/>
+            <a:ext cx="1965960" cy="201168"/>
           </a:xfrm>
           <a:prstGeom prst="rect">
             <a:avLst/>
@@ -6841,7 +7673,7 @@
                 <a:ea typeface="Aptos" pitchFamily="34" charset="-122"/>
                 <a:cs typeface="Aptos" pitchFamily="34" charset="-120"/>
               </a:rPr>
-              <a:t>Â© Paula Soper</a:t>
+              <a:t>Copyright Paula Soper</a:t>
             </a:r>
             <a:endParaRPr lang="en-US" sz="800" dirty="0"/>
           </a:p>
@@ -6936,7 +7768,7 @@
         <p:spPr>
           <a:xfrm>
             <a:off x="868680" y="1508760"/>
-            <a:ext cx="6537960" cy="4160520"/>
+            <a:ext cx="6309360" cy="4160520"/>
           </a:xfrm>
           <a:prstGeom prst="rect">
             <a:avLst/>
@@ -6987,12 +7819,12 @@
         </p:nvSpPr>
         <p:spPr>
           <a:xfrm>
-            <a:off x="7909560" y="1417320"/>
-            <a:ext cx="3154680" cy="1828800"/>
+            <a:off x="7635240" y="1325880"/>
+            <a:ext cx="3474720" cy="1325880"/>
           </a:xfrm>
           <a:prstGeom prst="roundRect">
             <a:avLst>
-              <a:gd name="adj" fmla="val 6000"/>
+              <a:gd name="adj" fmla="val 8276"/>
             </a:avLst>
           </a:prstGeom>
           <a:solidFill>
@@ -7014,8 +7846,8 @@
         </p:nvSpPr>
         <p:spPr>
           <a:xfrm>
-            <a:off x="8074152" y="1563624"/>
-            <a:ext cx="2825496" cy="256032"/>
+            <a:off x="7799832" y="1472184"/>
+            <a:ext cx="3145536" cy="256032"/>
           </a:xfrm>
           <a:prstGeom prst="rect">
             <a:avLst/>
@@ -7039,7 +7871,7 @@
                 <a:ea typeface="Aptos" pitchFamily="34" charset="-122"/>
                 <a:cs typeface="Aptos" pitchFamily="34" charset="-120"/>
               </a:rPr>
-              <a:t>Key idea</a:t>
+              <a:t>Data decision</a:t>
             </a:r>
             <a:endParaRPr lang="en-US" sz="1300" dirty="0"/>
           </a:p>
@@ -7053,8 +7885,8 @@
         </p:nvSpPr>
         <p:spPr>
           <a:xfrm>
-            <a:off x="8074152" y="1920240"/>
-            <a:ext cx="2825496" cy="1188720"/>
+            <a:off x="7799832" y="1828800"/>
+            <a:ext cx="3145536" cy="685800"/>
           </a:xfrm>
           <a:prstGeom prst="rect">
             <a:avLst/>
@@ -7094,15 +7926,206 @@
         </p:nvSpPr>
         <p:spPr>
           <a:xfrm>
-            <a:off x="7909560" y="3520440"/>
-            <a:ext cx="3154680" cy="1737360"/>
+            <a:off x="7635240" y="2788920"/>
+            <a:ext cx="3474720" cy="1536192"/>
           </a:xfrm>
           <a:prstGeom prst="roundRect">
             <a:avLst>
-              <a:gd name="adj" fmla="val 6316"/>
+              <a:gd name="adj" fmla="val 7143"/>
             </a:avLst>
           </a:prstGeom>
           <a:solidFill>
+            <a:srgbClr val="FFFFFF">
+              <a:alpha val="88000"/>
+            </a:srgbClr>
+          </a:solidFill>
+          <a:ln w="12700">
+            <a:solidFill>
+              <a:srgbClr val="D6E8F2"/>
+            </a:solidFill>
+            <a:prstDash val="solid"/>
+          </a:ln>
+        </p:spPr>
+      </p:sp>
+      <p:sp>
+        <p:nvSpPr>
+          <p:cNvPr id="14" name="Shape 12"/>
+          <p:cNvSpPr/>
+          <p:nvPr/>
+        </p:nvSpPr>
+        <p:spPr>
+          <a:xfrm>
+            <a:off x="8138160" y="3474720"/>
+            <a:ext cx="256032" cy="411480"/>
+          </a:xfrm>
+          <a:prstGeom prst="rect">
+            <a:avLst/>
+          </a:prstGeom>
+          <a:solidFill>
+            <a:srgbClr val="0068B7"/>
+          </a:solidFill>
+          <a:ln w="12700">
+            <a:solidFill>
+              <a:srgbClr val="0068B7"/>
+            </a:solidFill>
+            <a:prstDash val="solid"/>
+          </a:ln>
+        </p:spPr>
+      </p:sp>
+      <p:sp>
+        <p:nvSpPr>
+          <p:cNvPr id="15" name="Shape 13"/>
+          <p:cNvSpPr/>
+          <p:nvPr/>
+        </p:nvSpPr>
+        <p:spPr>
+          <a:xfrm>
+            <a:off x="8577072" y="3172968"/>
+            <a:ext cx="256032" cy="713232"/>
+          </a:xfrm>
+          <a:prstGeom prst="rect">
+            <a:avLst/>
+          </a:prstGeom>
+          <a:solidFill>
+            <a:srgbClr val="2F8A28"/>
+          </a:solidFill>
+          <a:ln w="12700">
+            <a:solidFill>
+              <a:srgbClr val="2F8A28"/>
+            </a:solidFill>
+            <a:prstDash val="solid"/>
+          </a:ln>
+        </p:spPr>
+      </p:sp>
+      <p:sp>
+        <p:nvSpPr>
+          <p:cNvPr id="16" name="Shape 14"/>
+          <p:cNvSpPr/>
+          <p:nvPr/>
+        </p:nvSpPr>
+        <p:spPr>
+          <a:xfrm>
+            <a:off x="9015984" y="2880360"/>
+            <a:ext cx="256032" cy="1005840"/>
+          </a:xfrm>
+          <a:prstGeom prst="rect">
+            <a:avLst/>
+          </a:prstGeom>
+          <a:solidFill>
+            <a:srgbClr val="D69A2D"/>
+          </a:solidFill>
+          <a:ln w="12700">
+            <a:solidFill>
+              <a:srgbClr val="D69A2D"/>
+            </a:solidFill>
+            <a:prstDash val="solid"/>
+          </a:ln>
+        </p:spPr>
+      </p:sp>
+      <p:sp>
+        <p:nvSpPr>
+          <p:cNvPr id="17" name="Shape 15"/>
+          <p:cNvSpPr/>
+          <p:nvPr/>
+        </p:nvSpPr>
+        <p:spPr>
+          <a:xfrm>
+            <a:off x="9454896" y="3319272"/>
+            <a:ext cx="256032" cy="566928"/>
+          </a:xfrm>
+          <a:prstGeom prst="rect">
+            <a:avLst/>
+          </a:prstGeom>
+          <a:solidFill>
+            <a:srgbClr val="6A4CA3"/>
+          </a:solidFill>
+          <a:ln w="12700">
+            <a:solidFill>
+              <a:srgbClr val="6A4CA3"/>
+            </a:solidFill>
+            <a:prstDash val="solid"/>
+          </a:ln>
+        </p:spPr>
+      </p:sp>
+      <p:sp>
+        <p:nvSpPr>
+          <p:cNvPr id="18" name="Shape 16"/>
+          <p:cNvSpPr/>
+          <p:nvPr/>
+        </p:nvSpPr>
+        <p:spPr>
+          <a:xfrm>
+            <a:off x="8019288" y="3886200"/>
+            <a:ext cx="2706624" cy="0"/>
+          </a:xfrm>
+          <a:prstGeom prst="line">
+            <a:avLst/>
+          </a:prstGeom>
+          <a:noFill/>
+          <a:ln w="15240">
+            <a:solidFill>
+              <a:srgbClr val="003A63"/>
+            </a:solidFill>
+            <a:prstDash val="solid"/>
+          </a:ln>
+        </p:spPr>
+      </p:sp>
+      <p:sp>
+        <p:nvSpPr>
+          <p:cNvPr id="19" name="Text 17"/>
+          <p:cNvSpPr/>
+          <p:nvPr/>
+        </p:nvSpPr>
+        <p:spPr>
+          <a:xfrm>
+            <a:off x="7863840" y="3017520"/>
+            <a:ext cx="3017520" cy="201168"/>
+          </a:xfrm>
+          <a:prstGeom prst="rect">
+            <a:avLst/>
+          </a:prstGeom>
+          <a:noFill/>
+          <a:ln/>
+        </p:spPr>
+        <p:txBody>
+          <a:bodyPr wrap="square" lIns="0" tIns="0" rIns="0" bIns="0" rtlCol="0" anchor="ctr"/>
+          <a:lstStyle/>
+          <a:p>
+            <a:pPr algn="ctr" indent="0" marL="0">
+              <a:buNone/>
+            </a:pPr>
+            <a:r>
+              <a:rPr lang="en-US" sz="1050" b="1" dirty="0">
+                <a:solidFill>
+                  <a:srgbClr val="003A63"/>
+                </a:solidFill>
+                <a:latin typeface="Aptos" pitchFamily="34" charset="0"/>
+                <a:ea typeface="Aptos" pitchFamily="34" charset="-122"/>
+                <a:cs typeface="Aptos" pitchFamily="34" charset="-120"/>
+              </a:rPr>
+              <a:t>Measure and monitor</a:t>
+            </a:r>
+            <a:endParaRPr lang="en-US" sz="1050" dirty="0"/>
+          </a:p>
+        </p:txBody>
+      </p:sp>
+      <p:sp>
+        <p:nvSpPr>
+          <p:cNvPr id="20" name="Shape 18"/>
+          <p:cNvSpPr/>
+          <p:nvPr/>
+        </p:nvSpPr>
+        <p:spPr>
+          <a:xfrm>
+            <a:off x="7635240" y="4498848"/>
+            <a:ext cx="3474720" cy="1143000"/>
+          </a:xfrm>
+          <a:prstGeom prst="roundRect">
+            <a:avLst>
+              <a:gd name="adj" fmla="val 9600"/>
+            </a:avLst>
+          </a:prstGeom>
+          <a:solidFill>
             <a:srgbClr val="EAF6F8"/>
           </a:solidFill>
           <a:ln w="12700">
@@ -7115,14 +8138,14 @@
       </p:sp>
       <p:sp>
         <p:nvSpPr>
-          <p:cNvPr id="14" name="Text 12"/>
-          <p:cNvSpPr/>
-          <p:nvPr/>
-        </p:nvSpPr>
-        <p:spPr>
-          <a:xfrm>
-            <a:off x="8074152" y="3666744"/>
-            <a:ext cx="2825496" cy="256032"/>
+          <p:cNvPr id="21" name="Text 19"/>
+          <p:cNvSpPr/>
+          <p:nvPr/>
+        </p:nvSpPr>
+        <p:spPr>
+          <a:xfrm>
+            <a:off x="7799832" y="4645152"/>
+            <a:ext cx="3145536" cy="256032"/>
           </a:xfrm>
           <a:prstGeom prst="rect">
             <a:avLst/>
@@ -7146,7 +8169,7 @@
                 <a:ea typeface="Aptos" pitchFamily="34" charset="-122"/>
                 <a:cs typeface="Aptos" pitchFamily="34" charset="-120"/>
               </a:rPr>
-              <a:t>Use this for</a:t>
+              <a:t>How to validate</a:t>
             </a:r>
             <a:endParaRPr lang="en-US" sz="1300" dirty="0"/>
           </a:p>
@@ -7154,14 +8177,14 @@
       </p:sp>
       <p:sp>
         <p:nvSpPr>
-          <p:cNvPr id="15" name="Text 13"/>
-          <p:cNvSpPr/>
-          <p:nvPr/>
-        </p:nvSpPr>
-        <p:spPr>
-          <a:xfrm>
-            <a:off x="8074152" y="4023360"/>
-            <a:ext cx="2825496" cy="1097280"/>
+          <p:cNvPr id="22" name="Text 20"/>
+          <p:cNvSpPr/>
+          <p:nvPr/>
+        </p:nvSpPr>
+        <p:spPr>
+          <a:xfrm>
+            <a:off x="7799832" y="5001768"/>
+            <a:ext cx="3145536" cy="502920"/>
           </a:xfrm>
           <a:prstGeom prst="rect">
             <a:avLst/>
@@ -7187,7 +8210,7 @@
                 <a:ea typeface="Aptos" pitchFamily="34" charset="-122"/>
                 <a:cs typeface="Aptos" pitchFamily="34" charset="-120"/>
               </a:rPr>
-              <a:t>Connect the concept to public health decisions, safeguards, documentation, or implementation work.</a:t>
+              <a:t>Connect the concept to data quality, model performance, validation evidence, monitoring measures, and decisions that remain under human control.</a:t>
             </a:r>
             <a:endParaRPr lang="en-US" sz="1550" dirty="0"/>
           </a:p>
@@ -7361,8 +8384,8 @@
         </p:nvSpPr>
         <p:spPr>
           <a:xfrm>
-            <a:off x="9966960" y="6537960"/>
-            <a:ext cx="1645920" cy="201168"/>
+            <a:off x="9646920" y="6537960"/>
+            <a:ext cx="1965960" cy="201168"/>
           </a:xfrm>
           <a:prstGeom prst="rect">
             <a:avLst/>
@@ -7386,7 +8409,7 @@
                 <a:ea typeface="Aptos" pitchFamily="34" charset="-122"/>
                 <a:cs typeface="Aptos" pitchFamily="34" charset="-120"/>
               </a:rPr>
-              <a:t>Â© Paula Soper</a:t>
+              <a:t>Copyright Paula Soper</a:t>
             </a:r>
             <a:endParaRPr lang="en-US" sz="800" dirty="0"/>
           </a:p>
@@ -7433,77 +8456,13 @@
       </p:sp>
       <p:sp>
         <p:nvSpPr>
-          <p:cNvPr id="8" name="Shape 6"/>
+          <p:cNvPr id="8" name="Text 6"/>
           <p:cNvSpPr/>
           <p:nvPr/>
         </p:nvSpPr>
         <p:spPr>
           <a:xfrm>
             <a:off x="640080" y="658368"/>
-            <a:ext cx="420624" cy="420624"/>
-          </a:xfrm>
-          <a:prstGeom prst="ellipse">
-            <a:avLst/>
-          </a:prstGeom>
-          <a:solidFill>
-            <a:srgbClr val="0068B7"/>
-          </a:solidFill>
-          <a:ln w="12700">
-            <a:solidFill>
-              <a:srgbClr val="0068B7"/>
-            </a:solidFill>
-            <a:prstDash val="solid"/>
-          </a:ln>
-        </p:spPr>
-      </p:sp>
-      <p:sp>
-        <p:nvSpPr>
-          <p:cNvPr id="9" name="Text 7"/>
-          <p:cNvSpPr/>
-          <p:nvPr/>
-        </p:nvSpPr>
-        <p:spPr>
-          <a:xfrm>
-            <a:off x="640080" y="731520"/>
-            <a:ext cx="420624" cy="164592"/>
-          </a:xfrm>
-          <a:prstGeom prst="rect">
-            <a:avLst/>
-          </a:prstGeom>
-          <a:noFill/>
-          <a:ln/>
-        </p:spPr>
-        <p:txBody>
-          <a:bodyPr wrap="square" lIns="0" tIns="0" rIns="0" bIns="0" rtlCol="0" anchor="ctr"/>
-          <a:lstStyle/>
-          <a:p>
-            <a:pPr algn="ctr" indent="0" marL="0">
-              <a:buNone/>
-            </a:pPr>
-            <a:r>
-              <a:rPr lang="en-US" sz="1100" b="1" dirty="0">
-                <a:solidFill>
-                  <a:srgbClr val="FFFFFF"/>
-                </a:solidFill>
-                <a:latin typeface="Aptos" pitchFamily="34" charset="0"/>
-                <a:ea typeface="Aptos" pitchFamily="34" charset="-122"/>
-                <a:cs typeface="Aptos" pitchFamily="34" charset="-120"/>
-              </a:rPr>
-              <a:t>9</a:t>
-            </a:r>
-            <a:endParaRPr lang="en-US" sz="1100" dirty="0"/>
-          </a:p>
-        </p:txBody>
-      </p:sp>
-      <p:sp>
-        <p:nvSpPr>
-          <p:cNvPr id="10" name="Text 8"/>
-          <p:cNvSpPr/>
-          <p:nvPr/>
-        </p:nvSpPr>
-        <p:spPr>
-          <a:xfrm>
-            <a:off x="640080" y="621792"/>
             <a:ext cx="10881360" cy="713232"/>
           </a:xfrm>
           <a:prstGeom prst="rect">
@@ -7538,14 +8497,14 @@
       </p:sp>
       <p:sp>
         <p:nvSpPr>
-          <p:cNvPr id="11" name="Text 9"/>
+          <p:cNvPr id="9" name="Text 7"/>
           <p:cNvSpPr/>
           <p:nvPr/>
         </p:nvSpPr>
         <p:spPr>
           <a:xfrm>
             <a:off x="868680" y="1508760"/>
-            <a:ext cx="6537960" cy="4160520"/>
+            <a:ext cx="6309360" cy="4160520"/>
           </a:xfrm>
           <a:prstGeom prst="rect">
             <a:avLst/>
@@ -7604,18 +8563,18 @@
       </p:sp>
       <p:sp>
         <p:nvSpPr>
-          <p:cNvPr id="12" name="Shape 10"/>
-          <p:cNvSpPr/>
-          <p:nvPr/>
-        </p:nvSpPr>
-        <p:spPr>
-          <a:xfrm>
-            <a:off x="7909560" y="1417320"/>
-            <a:ext cx="3154680" cy="1828800"/>
+          <p:cNvPr id="10" name="Shape 8"/>
+          <p:cNvSpPr/>
+          <p:nvPr/>
+        </p:nvSpPr>
+        <p:spPr>
+          <a:xfrm>
+            <a:off x="7635240" y="1325880"/>
+            <a:ext cx="3474720" cy="1325880"/>
           </a:xfrm>
           <a:prstGeom prst="roundRect">
             <a:avLst>
-              <a:gd name="adj" fmla="val 6000"/>
+              <a:gd name="adj" fmla="val 8276"/>
             </a:avLst>
           </a:prstGeom>
           <a:solidFill>
@@ -7631,14 +8590,14 @@
       </p:sp>
       <p:sp>
         <p:nvSpPr>
-          <p:cNvPr id="13" name="Text 11"/>
-          <p:cNvSpPr/>
-          <p:nvPr/>
-        </p:nvSpPr>
-        <p:spPr>
-          <a:xfrm>
-            <a:off x="8074152" y="1563624"/>
-            <a:ext cx="2825496" cy="256032"/>
+          <p:cNvPr id="11" name="Text 9"/>
+          <p:cNvSpPr/>
+          <p:nvPr/>
+        </p:nvSpPr>
+        <p:spPr>
+          <a:xfrm>
+            <a:off x="7799832" y="1472184"/>
+            <a:ext cx="3145536" cy="256032"/>
           </a:xfrm>
           <a:prstGeom prst="rect">
             <a:avLst/>
@@ -7662,7 +8621,7 @@
                 <a:ea typeface="Aptos" pitchFamily="34" charset="-122"/>
                 <a:cs typeface="Aptos" pitchFamily="34" charset="-120"/>
               </a:rPr>
-              <a:t>Key idea</a:t>
+              <a:t>Data decision</a:t>
             </a:r>
             <a:endParaRPr lang="en-US" sz="1300" dirty="0"/>
           </a:p>
@@ -7670,14 +8629,14 @@
       </p:sp>
       <p:sp>
         <p:nvSpPr>
-          <p:cNvPr id="14" name="Text 12"/>
-          <p:cNvSpPr/>
-          <p:nvPr/>
-        </p:nvSpPr>
-        <p:spPr>
-          <a:xfrm>
-            <a:off x="8074152" y="1920240"/>
-            <a:ext cx="2825496" cy="1188720"/>
+          <p:cNvPr id="12" name="Text 10"/>
+          <p:cNvSpPr/>
+          <p:nvPr/>
+        </p:nvSpPr>
+        <p:spPr>
+          <a:xfrm>
+            <a:off x="7799832" y="1828800"/>
+            <a:ext cx="3145536" cy="685800"/>
           </a:xfrm>
           <a:prstGeom prst="rect">
             <a:avLst/>
@@ -7711,21 +8670,212 @@
       </p:sp>
       <p:sp>
         <p:nvSpPr>
-          <p:cNvPr id="15" name="Shape 13"/>
-          <p:cNvSpPr/>
-          <p:nvPr/>
-        </p:nvSpPr>
-        <p:spPr>
-          <a:xfrm>
-            <a:off x="7909560" y="3520440"/>
-            <a:ext cx="3154680" cy="1737360"/>
+          <p:cNvPr id="13" name="Shape 11"/>
+          <p:cNvSpPr/>
+          <p:nvPr/>
+        </p:nvSpPr>
+        <p:spPr>
+          <a:xfrm>
+            <a:off x="7635240" y="2788920"/>
+            <a:ext cx="3474720" cy="1536192"/>
           </a:xfrm>
           <a:prstGeom prst="roundRect">
             <a:avLst>
-              <a:gd name="adj" fmla="val 6316"/>
+              <a:gd name="adj" fmla="val 7143"/>
             </a:avLst>
           </a:prstGeom>
           <a:solidFill>
+            <a:srgbClr val="FFFFFF">
+              <a:alpha val="88000"/>
+            </a:srgbClr>
+          </a:solidFill>
+          <a:ln w="12700">
+            <a:solidFill>
+              <a:srgbClr val="D6E8F2"/>
+            </a:solidFill>
+            <a:prstDash val="solid"/>
+          </a:ln>
+        </p:spPr>
+      </p:sp>
+      <p:sp>
+        <p:nvSpPr>
+          <p:cNvPr id="14" name="Shape 12"/>
+          <p:cNvSpPr/>
+          <p:nvPr/>
+        </p:nvSpPr>
+        <p:spPr>
+          <a:xfrm>
+            <a:off x="8138160" y="3474720"/>
+            <a:ext cx="256032" cy="411480"/>
+          </a:xfrm>
+          <a:prstGeom prst="rect">
+            <a:avLst/>
+          </a:prstGeom>
+          <a:solidFill>
+            <a:srgbClr val="0068B7"/>
+          </a:solidFill>
+          <a:ln w="12700">
+            <a:solidFill>
+              <a:srgbClr val="0068B7"/>
+            </a:solidFill>
+            <a:prstDash val="solid"/>
+          </a:ln>
+        </p:spPr>
+      </p:sp>
+      <p:sp>
+        <p:nvSpPr>
+          <p:cNvPr id="15" name="Shape 13"/>
+          <p:cNvSpPr/>
+          <p:nvPr/>
+        </p:nvSpPr>
+        <p:spPr>
+          <a:xfrm>
+            <a:off x="8577072" y="3172968"/>
+            <a:ext cx="256032" cy="713232"/>
+          </a:xfrm>
+          <a:prstGeom prst="rect">
+            <a:avLst/>
+          </a:prstGeom>
+          <a:solidFill>
+            <a:srgbClr val="2F8A28"/>
+          </a:solidFill>
+          <a:ln w="12700">
+            <a:solidFill>
+              <a:srgbClr val="2F8A28"/>
+            </a:solidFill>
+            <a:prstDash val="solid"/>
+          </a:ln>
+        </p:spPr>
+      </p:sp>
+      <p:sp>
+        <p:nvSpPr>
+          <p:cNvPr id="16" name="Shape 14"/>
+          <p:cNvSpPr/>
+          <p:nvPr/>
+        </p:nvSpPr>
+        <p:spPr>
+          <a:xfrm>
+            <a:off x="9015984" y="2880360"/>
+            <a:ext cx="256032" cy="1005840"/>
+          </a:xfrm>
+          <a:prstGeom prst="rect">
+            <a:avLst/>
+          </a:prstGeom>
+          <a:solidFill>
+            <a:srgbClr val="D69A2D"/>
+          </a:solidFill>
+          <a:ln w="12700">
+            <a:solidFill>
+              <a:srgbClr val="D69A2D"/>
+            </a:solidFill>
+            <a:prstDash val="solid"/>
+          </a:ln>
+        </p:spPr>
+      </p:sp>
+      <p:sp>
+        <p:nvSpPr>
+          <p:cNvPr id="17" name="Shape 15"/>
+          <p:cNvSpPr/>
+          <p:nvPr/>
+        </p:nvSpPr>
+        <p:spPr>
+          <a:xfrm>
+            <a:off x="9454896" y="3319272"/>
+            <a:ext cx="256032" cy="566928"/>
+          </a:xfrm>
+          <a:prstGeom prst="rect">
+            <a:avLst/>
+          </a:prstGeom>
+          <a:solidFill>
+            <a:srgbClr val="6A4CA3"/>
+          </a:solidFill>
+          <a:ln w="12700">
+            <a:solidFill>
+              <a:srgbClr val="6A4CA3"/>
+            </a:solidFill>
+            <a:prstDash val="solid"/>
+          </a:ln>
+        </p:spPr>
+      </p:sp>
+      <p:sp>
+        <p:nvSpPr>
+          <p:cNvPr id="18" name="Shape 16"/>
+          <p:cNvSpPr/>
+          <p:nvPr/>
+        </p:nvSpPr>
+        <p:spPr>
+          <a:xfrm>
+            <a:off x="8019288" y="3886200"/>
+            <a:ext cx="2706624" cy="0"/>
+          </a:xfrm>
+          <a:prstGeom prst="line">
+            <a:avLst/>
+          </a:prstGeom>
+          <a:noFill/>
+          <a:ln w="15240">
+            <a:solidFill>
+              <a:srgbClr val="003A63"/>
+            </a:solidFill>
+            <a:prstDash val="solid"/>
+          </a:ln>
+        </p:spPr>
+      </p:sp>
+      <p:sp>
+        <p:nvSpPr>
+          <p:cNvPr id="19" name="Text 17"/>
+          <p:cNvSpPr/>
+          <p:nvPr/>
+        </p:nvSpPr>
+        <p:spPr>
+          <a:xfrm>
+            <a:off x="7863840" y="3017520"/>
+            <a:ext cx="3017520" cy="201168"/>
+          </a:xfrm>
+          <a:prstGeom prst="rect">
+            <a:avLst/>
+          </a:prstGeom>
+          <a:noFill/>
+          <a:ln/>
+        </p:spPr>
+        <p:txBody>
+          <a:bodyPr wrap="square" lIns="0" tIns="0" rIns="0" bIns="0" rtlCol="0" anchor="ctr"/>
+          <a:lstStyle/>
+          <a:p>
+            <a:pPr algn="ctr" indent="0" marL="0">
+              <a:buNone/>
+            </a:pPr>
+            <a:r>
+              <a:rPr lang="en-US" sz="1050" b="1" dirty="0">
+                <a:solidFill>
+                  <a:srgbClr val="003A63"/>
+                </a:solidFill>
+                <a:latin typeface="Aptos" pitchFamily="34" charset="0"/>
+                <a:ea typeface="Aptos" pitchFamily="34" charset="-122"/>
+                <a:cs typeface="Aptos" pitchFamily="34" charset="-120"/>
+              </a:rPr>
+              <a:t>Measure and monitor</a:t>
+            </a:r>
+            <a:endParaRPr lang="en-US" sz="1050" dirty="0"/>
+          </a:p>
+        </p:txBody>
+      </p:sp>
+      <p:sp>
+        <p:nvSpPr>
+          <p:cNvPr id="20" name="Shape 18"/>
+          <p:cNvSpPr/>
+          <p:nvPr/>
+        </p:nvSpPr>
+        <p:spPr>
+          <a:xfrm>
+            <a:off x="7635240" y="4498848"/>
+            <a:ext cx="3474720" cy="1143000"/>
+          </a:xfrm>
+          <a:prstGeom prst="roundRect">
+            <a:avLst>
+              <a:gd name="adj" fmla="val 9600"/>
+            </a:avLst>
+          </a:prstGeom>
+          <a:solidFill>
             <a:srgbClr val="EAF6F8"/>
           </a:solidFill>
           <a:ln w="12700">
@@ -7738,14 +8888,14 @@
       </p:sp>
       <p:sp>
         <p:nvSpPr>
-          <p:cNvPr id="16" name="Text 14"/>
-          <p:cNvSpPr/>
-          <p:nvPr/>
-        </p:nvSpPr>
-        <p:spPr>
-          <a:xfrm>
-            <a:off x="8074152" y="3666744"/>
-            <a:ext cx="2825496" cy="256032"/>
+          <p:cNvPr id="21" name="Text 19"/>
+          <p:cNvSpPr/>
+          <p:nvPr/>
+        </p:nvSpPr>
+        <p:spPr>
+          <a:xfrm>
+            <a:off x="7799832" y="4645152"/>
+            <a:ext cx="3145536" cy="256032"/>
           </a:xfrm>
           <a:prstGeom prst="rect">
             <a:avLst/>
@@ -7769,7 +8919,7 @@
                 <a:ea typeface="Aptos" pitchFamily="34" charset="-122"/>
                 <a:cs typeface="Aptos" pitchFamily="34" charset="-120"/>
               </a:rPr>
-              <a:t>Use this for</a:t>
+              <a:t>How to validate</a:t>
             </a:r>
             <a:endParaRPr lang="en-US" sz="1300" dirty="0"/>
           </a:p>
@@ -7777,14 +8927,14 @@
       </p:sp>
       <p:sp>
         <p:nvSpPr>
-          <p:cNvPr id="17" name="Text 15"/>
-          <p:cNvSpPr/>
-          <p:nvPr/>
-        </p:nvSpPr>
-        <p:spPr>
-          <a:xfrm>
-            <a:off x="8074152" y="4023360"/>
-            <a:ext cx="2825496" cy="1097280"/>
+          <p:cNvPr id="22" name="Text 20"/>
+          <p:cNvSpPr/>
+          <p:nvPr/>
+        </p:nvSpPr>
+        <p:spPr>
+          <a:xfrm>
+            <a:off x="7799832" y="5001768"/>
+            <a:ext cx="3145536" cy="502920"/>
           </a:xfrm>
           <a:prstGeom prst="rect">
             <a:avLst/>
@@ -7810,7 +8960,7 @@
                 <a:ea typeface="Aptos" pitchFamily="34" charset="-122"/>
                 <a:cs typeface="Aptos" pitchFamily="34" charset="-120"/>
               </a:rPr>
-              <a:t>Connect the concept to public health decisions, safeguards, documentation, or implementation work.</a:t>
+              <a:t>Use the assignment to test whether you can explain the concept, apply it to a realistic public health situation, and identify what would need review before the work moves forward.</a:t>
             </a:r>
             <a:endParaRPr lang="en-US" sz="1550" dirty="0"/>
           </a:p>
@@ -7984,8 +9134,8 @@
         </p:nvSpPr>
         <p:spPr>
           <a:xfrm>
-            <a:off x="9966960" y="6537960"/>
-            <a:ext cx="1645920" cy="201168"/>
+            <a:off x="9646920" y="6537960"/>
+            <a:ext cx="1965960" cy="201168"/>
           </a:xfrm>
           <a:prstGeom prst="rect">
             <a:avLst/>
@@ -8009,7 +9159,7 @@
                 <a:ea typeface="Aptos" pitchFamily="34" charset="-122"/>
                 <a:cs typeface="Aptos" pitchFamily="34" charset="-120"/>
               </a:rPr>
-              <a:t>Â© Paula Soper</a:t>
+              <a:t>Copyright Paula Soper</a:t>
             </a:r>
             <a:endParaRPr lang="en-US" sz="800" dirty="0"/>
           </a:p>
@@ -8056,77 +9206,13 @@
       </p:sp>
       <p:sp>
         <p:nvSpPr>
-          <p:cNvPr id="8" name="Shape 6"/>
+          <p:cNvPr id="8" name="Text 6"/>
           <p:cNvSpPr/>
           <p:nvPr/>
         </p:nvSpPr>
         <p:spPr>
           <a:xfrm>
             <a:off x="640080" y="658368"/>
-            <a:ext cx="420624" cy="420624"/>
-          </a:xfrm>
-          <a:prstGeom prst="ellipse">
-            <a:avLst/>
-          </a:prstGeom>
-          <a:solidFill>
-            <a:srgbClr val="0068B7"/>
-          </a:solidFill>
-          <a:ln w="12700">
-            <a:solidFill>
-              <a:srgbClr val="0068B7"/>
-            </a:solidFill>
-            <a:prstDash val="solid"/>
-          </a:ln>
-        </p:spPr>
-      </p:sp>
-      <p:sp>
-        <p:nvSpPr>
-          <p:cNvPr id="9" name="Text 7"/>
-          <p:cNvSpPr/>
-          <p:nvPr/>
-        </p:nvSpPr>
-        <p:spPr>
-          <a:xfrm>
-            <a:off x="640080" y="731520"/>
-            <a:ext cx="420624" cy="164592"/>
-          </a:xfrm>
-          <a:prstGeom prst="rect">
-            <a:avLst/>
-          </a:prstGeom>
-          <a:noFill/>
-          <a:ln/>
-        </p:spPr>
-        <p:txBody>
-          <a:bodyPr wrap="square" lIns="0" tIns="0" rIns="0" bIns="0" rtlCol="0" anchor="ctr"/>
-          <a:lstStyle/>
-          <a:p>
-            <a:pPr algn="ctr" indent="0" marL="0">
-              <a:buNone/>
-            </a:pPr>
-            <a:r>
-              <a:rPr lang="en-US" sz="1100" b="1" dirty="0">
-                <a:solidFill>
-                  <a:srgbClr val="FFFFFF"/>
-                </a:solidFill>
-                <a:latin typeface="Aptos" pitchFamily="34" charset="0"/>
-                <a:ea typeface="Aptos" pitchFamily="34" charset="-122"/>
-                <a:cs typeface="Aptos" pitchFamily="34" charset="-120"/>
-              </a:rPr>
-              <a:t>10</a:t>
-            </a:r>
-            <a:endParaRPr lang="en-US" sz="1100" dirty="0"/>
-          </a:p>
-        </p:txBody>
-      </p:sp>
-      <p:sp>
-        <p:nvSpPr>
-          <p:cNvPr id="10" name="Text 8"/>
-          <p:cNvSpPr/>
-          <p:nvPr/>
-        </p:nvSpPr>
-        <p:spPr>
-          <a:xfrm>
-            <a:off x="640080" y="621792"/>
             <a:ext cx="10881360" cy="713232"/>
           </a:xfrm>
           <a:prstGeom prst="rect">
@@ -8161,14 +9247,14 @@
       </p:sp>
       <p:sp>
         <p:nvSpPr>
-          <p:cNvPr id="11" name="Text 9"/>
+          <p:cNvPr id="9" name="Text 7"/>
           <p:cNvSpPr/>
           <p:nvPr/>
         </p:nvSpPr>
         <p:spPr>
           <a:xfrm>
             <a:off x="868680" y="1508760"/>
-            <a:ext cx="6537960" cy="4160520"/>
+            <a:ext cx="6309360" cy="4160520"/>
           </a:xfrm>
           <a:prstGeom prst="rect">
             <a:avLst/>
@@ -8227,18 +9313,18 @@
       </p:sp>
       <p:sp>
         <p:nvSpPr>
-          <p:cNvPr id="12" name="Shape 10"/>
-          <p:cNvSpPr/>
-          <p:nvPr/>
-        </p:nvSpPr>
-        <p:spPr>
-          <a:xfrm>
-            <a:off x="7909560" y="1417320"/>
-            <a:ext cx="3154680" cy="1828800"/>
+          <p:cNvPr id="10" name="Shape 8"/>
+          <p:cNvSpPr/>
+          <p:nvPr/>
+        </p:nvSpPr>
+        <p:spPr>
+          <a:xfrm>
+            <a:off x="7635240" y="1325880"/>
+            <a:ext cx="3474720" cy="1325880"/>
           </a:xfrm>
           <a:prstGeom prst="roundRect">
             <a:avLst>
-              <a:gd name="adj" fmla="val 6000"/>
+              <a:gd name="adj" fmla="val 8276"/>
             </a:avLst>
           </a:prstGeom>
           <a:solidFill>
@@ -8254,14 +9340,14 @@
       </p:sp>
       <p:sp>
         <p:nvSpPr>
-          <p:cNvPr id="13" name="Text 11"/>
-          <p:cNvSpPr/>
-          <p:nvPr/>
-        </p:nvSpPr>
-        <p:spPr>
-          <a:xfrm>
-            <a:off x="8074152" y="1563624"/>
-            <a:ext cx="2825496" cy="256032"/>
+          <p:cNvPr id="11" name="Text 9"/>
+          <p:cNvSpPr/>
+          <p:nvPr/>
+        </p:nvSpPr>
+        <p:spPr>
+          <a:xfrm>
+            <a:off x="7799832" y="1472184"/>
+            <a:ext cx="3145536" cy="256032"/>
           </a:xfrm>
           <a:prstGeom prst="rect">
             <a:avLst/>
@@ -8285,7 +9371,7 @@
                 <a:ea typeface="Aptos" pitchFamily="34" charset="-122"/>
                 <a:cs typeface="Aptos" pitchFamily="34" charset="-120"/>
               </a:rPr>
-              <a:t>Key idea</a:t>
+              <a:t>Data decision</a:t>
             </a:r>
             <a:endParaRPr lang="en-US" sz="1300" dirty="0"/>
           </a:p>
@@ -8293,14 +9379,14 @@
       </p:sp>
       <p:sp>
         <p:nvSpPr>
-          <p:cNvPr id="14" name="Text 12"/>
-          <p:cNvSpPr/>
-          <p:nvPr/>
-        </p:nvSpPr>
-        <p:spPr>
-          <a:xfrm>
-            <a:off x="8074152" y="1920240"/>
-            <a:ext cx="2825496" cy="1188720"/>
+          <p:cNvPr id="12" name="Text 10"/>
+          <p:cNvSpPr/>
+          <p:nvPr/>
+        </p:nvSpPr>
+        <p:spPr>
+          <a:xfrm>
+            <a:off x="7799832" y="1828800"/>
+            <a:ext cx="3145536" cy="685800"/>
           </a:xfrm>
           <a:prstGeom prst="rect">
             <a:avLst/>
@@ -8334,21 +9420,212 @@
       </p:sp>
       <p:sp>
         <p:nvSpPr>
-          <p:cNvPr id="15" name="Shape 13"/>
-          <p:cNvSpPr/>
-          <p:nvPr/>
-        </p:nvSpPr>
-        <p:spPr>
-          <a:xfrm>
-            <a:off x="7909560" y="3520440"/>
-            <a:ext cx="3154680" cy="1737360"/>
+          <p:cNvPr id="13" name="Shape 11"/>
+          <p:cNvSpPr/>
+          <p:nvPr/>
+        </p:nvSpPr>
+        <p:spPr>
+          <a:xfrm>
+            <a:off x="7635240" y="2788920"/>
+            <a:ext cx="3474720" cy="1536192"/>
           </a:xfrm>
           <a:prstGeom prst="roundRect">
             <a:avLst>
-              <a:gd name="adj" fmla="val 6316"/>
+              <a:gd name="adj" fmla="val 7143"/>
             </a:avLst>
           </a:prstGeom>
           <a:solidFill>
+            <a:srgbClr val="FFFFFF">
+              <a:alpha val="88000"/>
+            </a:srgbClr>
+          </a:solidFill>
+          <a:ln w="12700">
+            <a:solidFill>
+              <a:srgbClr val="D6E8F2"/>
+            </a:solidFill>
+            <a:prstDash val="solid"/>
+          </a:ln>
+        </p:spPr>
+      </p:sp>
+      <p:sp>
+        <p:nvSpPr>
+          <p:cNvPr id="14" name="Shape 12"/>
+          <p:cNvSpPr/>
+          <p:nvPr/>
+        </p:nvSpPr>
+        <p:spPr>
+          <a:xfrm>
+            <a:off x="8138160" y="3474720"/>
+            <a:ext cx="256032" cy="411480"/>
+          </a:xfrm>
+          <a:prstGeom prst="rect">
+            <a:avLst/>
+          </a:prstGeom>
+          <a:solidFill>
+            <a:srgbClr val="0068B7"/>
+          </a:solidFill>
+          <a:ln w="12700">
+            <a:solidFill>
+              <a:srgbClr val="0068B7"/>
+            </a:solidFill>
+            <a:prstDash val="solid"/>
+          </a:ln>
+        </p:spPr>
+      </p:sp>
+      <p:sp>
+        <p:nvSpPr>
+          <p:cNvPr id="15" name="Shape 13"/>
+          <p:cNvSpPr/>
+          <p:nvPr/>
+        </p:nvSpPr>
+        <p:spPr>
+          <a:xfrm>
+            <a:off x="8577072" y="3172968"/>
+            <a:ext cx="256032" cy="713232"/>
+          </a:xfrm>
+          <a:prstGeom prst="rect">
+            <a:avLst/>
+          </a:prstGeom>
+          <a:solidFill>
+            <a:srgbClr val="2F8A28"/>
+          </a:solidFill>
+          <a:ln w="12700">
+            <a:solidFill>
+              <a:srgbClr val="2F8A28"/>
+            </a:solidFill>
+            <a:prstDash val="solid"/>
+          </a:ln>
+        </p:spPr>
+      </p:sp>
+      <p:sp>
+        <p:nvSpPr>
+          <p:cNvPr id="16" name="Shape 14"/>
+          <p:cNvSpPr/>
+          <p:nvPr/>
+        </p:nvSpPr>
+        <p:spPr>
+          <a:xfrm>
+            <a:off x="9015984" y="2880360"/>
+            <a:ext cx="256032" cy="1005840"/>
+          </a:xfrm>
+          <a:prstGeom prst="rect">
+            <a:avLst/>
+          </a:prstGeom>
+          <a:solidFill>
+            <a:srgbClr val="D69A2D"/>
+          </a:solidFill>
+          <a:ln w="12700">
+            <a:solidFill>
+              <a:srgbClr val="D69A2D"/>
+            </a:solidFill>
+            <a:prstDash val="solid"/>
+          </a:ln>
+        </p:spPr>
+      </p:sp>
+      <p:sp>
+        <p:nvSpPr>
+          <p:cNvPr id="17" name="Shape 15"/>
+          <p:cNvSpPr/>
+          <p:nvPr/>
+        </p:nvSpPr>
+        <p:spPr>
+          <a:xfrm>
+            <a:off x="9454896" y="3319272"/>
+            <a:ext cx="256032" cy="566928"/>
+          </a:xfrm>
+          <a:prstGeom prst="rect">
+            <a:avLst/>
+          </a:prstGeom>
+          <a:solidFill>
+            <a:srgbClr val="6A4CA3"/>
+          </a:solidFill>
+          <a:ln w="12700">
+            <a:solidFill>
+              <a:srgbClr val="6A4CA3"/>
+            </a:solidFill>
+            <a:prstDash val="solid"/>
+          </a:ln>
+        </p:spPr>
+      </p:sp>
+      <p:sp>
+        <p:nvSpPr>
+          <p:cNvPr id="18" name="Shape 16"/>
+          <p:cNvSpPr/>
+          <p:nvPr/>
+        </p:nvSpPr>
+        <p:spPr>
+          <a:xfrm>
+            <a:off x="8019288" y="3886200"/>
+            <a:ext cx="2706624" cy="0"/>
+          </a:xfrm>
+          <a:prstGeom prst="line">
+            <a:avLst/>
+          </a:prstGeom>
+          <a:noFill/>
+          <a:ln w="15240">
+            <a:solidFill>
+              <a:srgbClr val="003A63"/>
+            </a:solidFill>
+            <a:prstDash val="solid"/>
+          </a:ln>
+        </p:spPr>
+      </p:sp>
+      <p:sp>
+        <p:nvSpPr>
+          <p:cNvPr id="19" name="Text 17"/>
+          <p:cNvSpPr/>
+          <p:nvPr/>
+        </p:nvSpPr>
+        <p:spPr>
+          <a:xfrm>
+            <a:off x="7863840" y="3017520"/>
+            <a:ext cx="3017520" cy="201168"/>
+          </a:xfrm>
+          <a:prstGeom prst="rect">
+            <a:avLst/>
+          </a:prstGeom>
+          <a:noFill/>
+          <a:ln/>
+        </p:spPr>
+        <p:txBody>
+          <a:bodyPr wrap="square" lIns="0" tIns="0" rIns="0" bIns="0" rtlCol="0" anchor="ctr"/>
+          <a:lstStyle/>
+          <a:p>
+            <a:pPr algn="ctr" indent="0" marL="0">
+              <a:buNone/>
+            </a:pPr>
+            <a:r>
+              <a:rPr lang="en-US" sz="1050" b="1" dirty="0">
+                <a:solidFill>
+                  <a:srgbClr val="003A63"/>
+                </a:solidFill>
+                <a:latin typeface="Aptos" pitchFamily="34" charset="0"/>
+                <a:ea typeface="Aptos" pitchFamily="34" charset="-122"/>
+                <a:cs typeface="Aptos" pitchFamily="34" charset="-120"/>
+              </a:rPr>
+              <a:t>Measure and monitor</a:t>
+            </a:r>
+            <a:endParaRPr lang="en-US" sz="1050" dirty="0"/>
+          </a:p>
+        </p:txBody>
+      </p:sp>
+      <p:sp>
+        <p:nvSpPr>
+          <p:cNvPr id="20" name="Shape 18"/>
+          <p:cNvSpPr/>
+          <p:nvPr/>
+        </p:nvSpPr>
+        <p:spPr>
+          <a:xfrm>
+            <a:off x="7635240" y="4498848"/>
+            <a:ext cx="3474720" cy="1143000"/>
+          </a:xfrm>
+          <a:prstGeom prst="roundRect">
+            <a:avLst>
+              <a:gd name="adj" fmla="val 9600"/>
+            </a:avLst>
+          </a:prstGeom>
+          <a:solidFill>
             <a:srgbClr val="EAF6F8"/>
           </a:solidFill>
           <a:ln w="12700">
@@ -8361,14 +9638,14 @@
       </p:sp>
       <p:sp>
         <p:nvSpPr>
-          <p:cNvPr id="16" name="Text 14"/>
-          <p:cNvSpPr/>
-          <p:nvPr/>
-        </p:nvSpPr>
-        <p:spPr>
-          <a:xfrm>
-            <a:off x="8074152" y="3666744"/>
-            <a:ext cx="2825496" cy="256032"/>
+          <p:cNvPr id="21" name="Text 19"/>
+          <p:cNvSpPr/>
+          <p:nvPr/>
+        </p:nvSpPr>
+        <p:spPr>
+          <a:xfrm>
+            <a:off x="7799832" y="4645152"/>
+            <a:ext cx="3145536" cy="256032"/>
           </a:xfrm>
           <a:prstGeom prst="rect">
             <a:avLst/>
@@ -8392,7 +9669,7 @@
                 <a:ea typeface="Aptos" pitchFamily="34" charset="-122"/>
                 <a:cs typeface="Aptos" pitchFamily="34" charset="-120"/>
               </a:rPr>
-              <a:t>Use this for</a:t>
+              <a:t>How to validate</a:t>
             </a:r>
             <a:endParaRPr lang="en-US" sz="1300" dirty="0"/>
           </a:p>
@@ -8400,14 +9677,14 @@
       </p:sp>
       <p:sp>
         <p:nvSpPr>
-          <p:cNvPr id="17" name="Text 15"/>
-          <p:cNvSpPr/>
-          <p:nvPr/>
-        </p:nvSpPr>
-        <p:spPr>
-          <a:xfrm>
-            <a:off x="8074152" y="4023360"/>
-            <a:ext cx="2825496" cy="1097280"/>
+          <p:cNvPr id="22" name="Text 20"/>
+          <p:cNvSpPr/>
+          <p:nvPr/>
+        </p:nvSpPr>
+        <p:spPr>
+          <a:xfrm>
+            <a:off x="7799832" y="5001768"/>
+            <a:ext cx="3145536" cy="502920"/>
           </a:xfrm>
           <a:prstGeom prst="rect">
             <a:avLst/>
@@ -8433,7 +9710,7 @@
                 <a:ea typeface="Aptos" pitchFamily="34" charset="-122"/>
                 <a:cs typeface="Aptos" pitchFamily="34" charset="-120"/>
               </a:rPr>
-              <a:t>Connect the concept to public health decisions, safeguards, documentation, or implementation work.</a:t>
+              <a:t>Connect the concept to data quality, model performance, validation evidence, monitoring measures, and decisions that remain under human control.</a:t>
             </a:r>
             <a:endParaRPr lang="en-US" sz="1550" dirty="0"/>
           </a:p>
@@ -8607,8 +9884,8 @@
         </p:nvSpPr>
         <p:spPr>
           <a:xfrm>
-            <a:off x="9966960" y="6537960"/>
-            <a:ext cx="1645920" cy="201168"/>
+            <a:off x="9646920" y="6537960"/>
+            <a:ext cx="1965960" cy="201168"/>
           </a:xfrm>
           <a:prstGeom prst="rect">
             <a:avLst/>
@@ -8632,7 +9909,7 @@
                 <a:ea typeface="Aptos" pitchFamily="34" charset="-122"/>
                 <a:cs typeface="Aptos" pitchFamily="34" charset="-120"/>
               </a:rPr>
-              <a:t>Â© Paula Soper</a:t>
+              <a:t>Copyright Paula Soper</a:t>
             </a:r>
             <a:endParaRPr lang="en-US" sz="800" dirty="0"/>
           </a:p>
@@ -8727,7 +10004,7 @@
         <p:spPr>
           <a:xfrm>
             <a:off x="868680" y="1508760"/>
-            <a:ext cx="6537960" cy="4160520"/>
+            <a:ext cx="6309360" cy="4160520"/>
           </a:xfrm>
           <a:prstGeom prst="rect">
             <a:avLst/>
@@ -8764,12 +10041,12 @@
         </p:nvSpPr>
         <p:spPr>
           <a:xfrm>
-            <a:off x="7909560" y="1417320"/>
-            <a:ext cx="3154680" cy="1828800"/>
+            <a:off x="7635240" y="1325880"/>
+            <a:ext cx="3474720" cy="1325880"/>
           </a:xfrm>
           <a:prstGeom prst="roundRect">
             <a:avLst>
-              <a:gd name="adj" fmla="val 6000"/>
+              <a:gd name="adj" fmla="val 8276"/>
             </a:avLst>
           </a:prstGeom>
           <a:solidFill>
@@ -8791,8 +10068,8 @@
         </p:nvSpPr>
         <p:spPr>
           <a:xfrm>
-            <a:off x="8074152" y="1563624"/>
-            <a:ext cx="2825496" cy="256032"/>
+            <a:off x="7799832" y="1472184"/>
+            <a:ext cx="3145536" cy="256032"/>
           </a:xfrm>
           <a:prstGeom prst="rect">
             <a:avLst/>
@@ -8816,7 +10093,7 @@
                 <a:ea typeface="Aptos" pitchFamily="34" charset="-122"/>
                 <a:cs typeface="Aptos" pitchFamily="34" charset="-120"/>
               </a:rPr>
-              <a:t>Key idea</a:t>
+              <a:t>Data decision</a:t>
             </a:r>
             <a:endParaRPr lang="en-US" sz="1300" dirty="0"/>
           </a:p>
@@ -8830,8 +10107,8 @@
         </p:nvSpPr>
         <p:spPr>
           <a:xfrm>
-            <a:off x="8074152" y="1920240"/>
-            <a:ext cx="2825496" cy="1188720"/>
+            <a:off x="7799832" y="1828800"/>
+            <a:ext cx="3145536" cy="685800"/>
           </a:xfrm>
           <a:prstGeom prst="rect">
             <a:avLst/>
@@ -8871,15 +10148,206 @@
         </p:nvSpPr>
         <p:spPr>
           <a:xfrm>
-            <a:off x="7909560" y="3520440"/>
-            <a:ext cx="3154680" cy="1737360"/>
+            <a:off x="7635240" y="2788920"/>
+            <a:ext cx="3474720" cy="1536192"/>
           </a:xfrm>
           <a:prstGeom prst="roundRect">
             <a:avLst>
-              <a:gd name="adj" fmla="val 6316"/>
+              <a:gd name="adj" fmla="val 7143"/>
             </a:avLst>
           </a:prstGeom>
           <a:solidFill>
+            <a:srgbClr val="FFFFFF">
+              <a:alpha val="88000"/>
+            </a:srgbClr>
+          </a:solidFill>
+          <a:ln w="12700">
+            <a:solidFill>
+              <a:srgbClr val="D6E8F2"/>
+            </a:solidFill>
+            <a:prstDash val="solid"/>
+          </a:ln>
+        </p:spPr>
+      </p:sp>
+      <p:sp>
+        <p:nvSpPr>
+          <p:cNvPr id="14" name="Shape 12"/>
+          <p:cNvSpPr/>
+          <p:nvPr/>
+        </p:nvSpPr>
+        <p:spPr>
+          <a:xfrm>
+            <a:off x="8138160" y="3474720"/>
+            <a:ext cx="256032" cy="411480"/>
+          </a:xfrm>
+          <a:prstGeom prst="rect">
+            <a:avLst/>
+          </a:prstGeom>
+          <a:solidFill>
+            <a:srgbClr val="0068B7"/>
+          </a:solidFill>
+          <a:ln w="12700">
+            <a:solidFill>
+              <a:srgbClr val="0068B7"/>
+            </a:solidFill>
+            <a:prstDash val="solid"/>
+          </a:ln>
+        </p:spPr>
+      </p:sp>
+      <p:sp>
+        <p:nvSpPr>
+          <p:cNvPr id="15" name="Shape 13"/>
+          <p:cNvSpPr/>
+          <p:nvPr/>
+        </p:nvSpPr>
+        <p:spPr>
+          <a:xfrm>
+            <a:off x="8577072" y="3172968"/>
+            <a:ext cx="256032" cy="713232"/>
+          </a:xfrm>
+          <a:prstGeom prst="rect">
+            <a:avLst/>
+          </a:prstGeom>
+          <a:solidFill>
+            <a:srgbClr val="2F8A28"/>
+          </a:solidFill>
+          <a:ln w="12700">
+            <a:solidFill>
+              <a:srgbClr val="2F8A28"/>
+            </a:solidFill>
+            <a:prstDash val="solid"/>
+          </a:ln>
+        </p:spPr>
+      </p:sp>
+      <p:sp>
+        <p:nvSpPr>
+          <p:cNvPr id="16" name="Shape 14"/>
+          <p:cNvSpPr/>
+          <p:nvPr/>
+        </p:nvSpPr>
+        <p:spPr>
+          <a:xfrm>
+            <a:off x="9015984" y="2880360"/>
+            <a:ext cx="256032" cy="1005840"/>
+          </a:xfrm>
+          <a:prstGeom prst="rect">
+            <a:avLst/>
+          </a:prstGeom>
+          <a:solidFill>
+            <a:srgbClr val="D69A2D"/>
+          </a:solidFill>
+          <a:ln w="12700">
+            <a:solidFill>
+              <a:srgbClr val="D69A2D"/>
+            </a:solidFill>
+            <a:prstDash val="solid"/>
+          </a:ln>
+        </p:spPr>
+      </p:sp>
+      <p:sp>
+        <p:nvSpPr>
+          <p:cNvPr id="17" name="Shape 15"/>
+          <p:cNvSpPr/>
+          <p:nvPr/>
+        </p:nvSpPr>
+        <p:spPr>
+          <a:xfrm>
+            <a:off x="9454896" y="3319272"/>
+            <a:ext cx="256032" cy="566928"/>
+          </a:xfrm>
+          <a:prstGeom prst="rect">
+            <a:avLst/>
+          </a:prstGeom>
+          <a:solidFill>
+            <a:srgbClr val="6A4CA3"/>
+          </a:solidFill>
+          <a:ln w="12700">
+            <a:solidFill>
+              <a:srgbClr val="6A4CA3"/>
+            </a:solidFill>
+            <a:prstDash val="solid"/>
+          </a:ln>
+        </p:spPr>
+      </p:sp>
+      <p:sp>
+        <p:nvSpPr>
+          <p:cNvPr id="18" name="Shape 16"/>
+          <p:cNvSpPr/>
+          <p:nvPr/>
+        </p:nvSpPr>
+        <p:spPr>
+          <a:xfrm>
+            <a:off x="8019288" y="3886200"/>
+            <a:ext cx="2706624" cy="0"/>
+          </a:xfrm>
+          <a:prstGeom prst="line">
+            <a:avLst/>
+          </a:prstGeom>
+          <a:noFill/>
+          <a:ln w="15240">
+            <a:solidFill>
+              <a:srgbClr val="003A63"/>
+            </a:solidFill>
+            <a:prstDash val="solid"/>
+          </a:ln>
+        </p:spPr>
+      </p:sp>
+      <p:sp>
+        <p:nvSpPr>
+          <p:cNvPr id="19" name="Text 17"/>
+          <p:cNvSpPr/>
+          <p:nvPr/>
+        </p:nvSpPr>
+        <p:spPr>
+          <a:xfrm>
+            <a:off x="7863840" y="3017520"/>
+            <a:ext cx="3017520" cy="201168"/>
+          </a:xfrm>
+          <a:prstGeom prst="rect">
+            <a:avLst/>
+          </a:prstGeom>
+          <a:noFill/>
+          <a:ln/>
+        </p:spPr>
+        <p:txBody>
+          <a:bodyPr wrap="square" lIns="0" tIns="0" rIns="0" bIns="0" rtlCol="0" anchor="ctr"/>
+          <a:lstStyle/>
+          <a:p>
+            <a:pPr algn="ctr" indent="0" marL="0">
+              <a:buNone/>
+            </a:pPr>
+            <a:r>
+              <a:rPr lang="en-US" sz="1050" b="1" dirty="0">
+                <a:solidFill>
+                  <a:srgbClr val="003A63"/>
+                </a:solidFill>
+                <a:latin typeface="Aptos" pitchFamily="34" charset="0"/>
+                <a:ea typeface="Aptos" pitchFamily="34" charset="-122"/>
+                <a:cs typeface="Aptos" pitchFamily="34" charset="-120"/>
+              </a:rPr>
+              <a:t>Measure and monitor</a:t>
+            </a:r>
+            <a:endParaRPr lang="en-US" sz="1050" dirty="0"/>
+          </a:p>
+        </p:txBody>
+      </p:sp>
+      <p:sp>
+        <p:nvSpPr>
+          <p:cNvPr id="20" name="Shape 18"/>
+          <p:cNvSpPr/>
+          <p:nvPr/>
+        </p:nvSpPr>
+        <p:spPr>
+          <a:xfrm>
+            <a:off x="7635240" y="4498848"/>
+            <a:ext cx="3474720" cy="1143000"/>
+          </a:xfrm>
+          <a:prstGeom prst="roundRect">
+            <a:avLst>
+              <a:gd name="adj" fmla="val 9600"/>
+            </a:avLst>
+          </a:prstGeom>
+          <a:solidFill>
             <a:srgbClr val="EAF6F8"/>
           </a:solidFill>
           <a:ln w="12700">
@@ -8892,14 +10360,14 @@
       </p:sp>
       <p:sp>
         <p:nvSpPr>
-          <p:cNvPr id="14" name="Text 12"/>
-          <p:cNvSpPr/>
-          <p:nvPr/>
-        </p:nvSpPr>
-        <p:spPr>
-          <a:xfrm>
-            <a:off x="8074152" y="3666744"/>
-            <a:ext cx="2825496" cy="256032"/>
+          <p:cNvPr id="21" name="Text 19"/>
+          <p:cNvSpPr/>
+          <p:nvPr/>
+        </p:nvSpPr>
+        <p:spPr>
+          <a:xfrm>
+            <a:off x="7799832" y="4645152"/>
+            <a:ext cx="3145536" cy="256032"/>
           </a:xfrm>
           <a:prstGeom prst="rect">
             <a:avLst/>
@@ -8923,7 +10391,7 @@
                 <a:ea typeface="Aptos" pitchFamily="34" charset="-122"/>
                 <a:cs typeface="Aptos" pitchFamily="34" charset="-120"/>
               </a:rPr>
-              <a:t>Use this for</a:t>
+              <a:t>How to validate</a:t>
             </a:r>
             <a:endParaRPr lang="en-US" sz="1300" dirty="0"/>
           </a:p>
@@ -8931,14 +10399,14 @@
       </p:sp>
       <p:sp>
         <p:nvSpPr>
-          <p:cNvPr id="15" name="Text 13"/>
-          <p:cNvSpPr/>
-          <p:nvPr/>
-        </p:nvSpPr>
-        <p:spPr>
-          <a:xfrm>
-            <a:off x="8074152" y="4023360"/>
-            <a:ext cx="2825496" cy="1097280"/>
+          <p:cNvPr id="22" name="Text 20"/>
+          <p:cNvSpPr/>
+          <p:nvPr/>
+        </p:nvSpPr>
+        <p:spPr>
+          <a:xfrm>
+            <a:off x="7799832" y="5001768"/>
+            <a:ext cx="3145536" cy="502920"/>
           </a:xfrm>
           <a:prstGeom prst="rect">
             <a:avLst/>
@@ -8964,7 +10432,7 @@
                 <a:ea typeface="Aptos" pitchFamily="34" charset="-122"/>
                 <a:cs typeface="Aptos" pitchFamily="34" charset="-120"/>
               </a:rPr>
-              <a:t>Connect the concept to public health decisions, safeguards, documentation, or implementation work.</a:t>
+              <a:t>Connect the concept to data quality, model performance, validation evidence, monitoring measures, and decisions that remain under human control.</a:t>
             </a:r>
             <a:endParaRPr lang="en-US" sz="1550" dirty="0"/>
           </a:p>
@@ -9138,8 +10606,8 @@
         </p:nvSpPr>
         <p:spPr>
           <a:xfrm>
-            <a:off x="9966960" y="6537960"/>
-            <a:ext cx="1645920" cy="201168"/>
+            <a:off x="9646920" y="6537960"/>
+            <a:ext cx="1965960" cy="201168"/>
           </a:xfrm>
           <a:prstGeom prst="rect">
             <a:avLst/>
@@ -9163,7 +10631,7 @@
                 <a:ea typeface="Aptos" pitchFamily="34" charset="-122"/>
                 <a:cs typeface="Aptos" pitchFamily="34" charset="-120"/>
               </a:rPr>
-              <a:t>Â© Paula Soper</a:t>
+              <a:t>Copyright Paula Soper</a:t>
             </a:r>
             <a:endParaRPr lang="en-US" sz="800" dirty="0"/>
           </a:p>
@@ -9526,46 +10994,7 @@
       </p:sp>
       <p:sp>
         <p:nvSpPr>
-          <p:cNvPr id="15" name="Text 13"/>
-          <p:cNvSpPr/>
-          <p:nvPr/>
-        </p:nvSpPr>
-        <p:spPr>
-          <a:xfrm>
-            <a:off x="8695944" y="3941064"/>
-            <a:ext cx="201168" cy="256032"/>
-          </a:xfrm>
-          <a:prstGeom prst="rect">
-            <a:avLst/>
-          </a:prstGeom>
-          <a:noFill/>
-          <a:ln/>
-        </p:spPr>
-        <p:txBody>
-          <a:bodyPr wrap="square" lIns="0" tIns="0" rIns="0" bIns="0" rtlCol="0" anchor="ctr"/>
-          <a:lstStyle/>
-          <a:p>
-            <a:pPr algn="ctr" indent="0" marL="0">
-              <a:buNone/>
-            </a:pPr>
-            <a:r>
-              <a:rPr lang="en-US" sz="1800" b="1" dirty="0">
-                <a:solidFill>
-                  <a:srgbClr val="0068B7"/>
-                </a:solidFill>
-                <a:latin typeface="Aptos" pitchFamily="34" charset="0"/>
-                <a:ea typeface="Aptos" pitchFamily="34" charset="-122"/>
-                <a:cs typeface="Aptos" pitchFamily="34" charset="-120"/>
-              </a:rPr>
-              <a:t>â†’</a:t>
-            </a:r>
-            <a:endParaRPr lang="en-US" sz="1800" dirty="0"/>
-          </a:p>
-        </p:txBody>
-      </p:sp>
-      <p:sp>
-        <p:nvSpPr>
-          <p:cNvPr id="16" name="Shape 14"/>
+          <p:cNvPr id="15" name="Shape 13"/>
           <p:cNvSpPr/>
           <p:nvPr/>
         </p:nvSpPr>
@@ -9592,7 +11021,7 @@
       </p:sp>
       <p:sp>
         <p:nvSpPr>
-          <p:cNvPr id="17" name="Text 15"/>
+          <p:cNvPr id="16" name="Text 14"/>
           <p:cNvSpPr/>
           <p:nvPr/>
         </p:nvSpPr>
@@ -9633,46 +11062,7 @@
       </p:sp>
       <p:sp>
         <p:nvSpPr>
-          <p:cNvPr id="18" name="Text 16"/>
-          <p:cNvSpPr/>
-          <p:nvPr/>
-        </p:nvSpPr>
-        <p:spPr>
-          <a:xfrm>
-            <a:off x="9985248" y="3941064"/>
-            <a:ext cx="201168" cy="256032"/>
-          </a:xfrm>
-          <a:prstGeom prst="rect">
-            <a:avLst/>
-          </a:prstGeom>
-          <a:noFill/>
-          <a:ln/>
-        </p:spPr>
-        <p:txBody>
-          <a:bodyPr wrap="square" lIns="0" tIns="0" rIns="0" bIns="0" rtlCol="0" anchor="ctr"/>
-          <a:lstStyle/>
-          <a:p>
-            <a:pPr algn="ctr" indent="0" marL="0">
-              <a:buNone/>
-            </a:pPr>
-            <a:r>
-              <a:rPr lang="en-US" sz="1800" b="1" dirty="0">
-                <a:solidFill>
-                  <a:srgbClr val="0068B7"/>
-                </a:solidFill>
-                <a:latin typeface="Aptos" pitchFamily="34" charset="0"/>
-                <a:ea typeface="Aptos" pitchFamily="34" charset="-122"/>
-                <a:cs typeface="Aptos" pitchFamily="34" charset="-120"/>
-              </a:rPr>
-              <a:t>â†’</a:t>
-            </a:r>
-            <a:endParaRPr lang="en-US" sz="1800" dirty="0"/>
-          </a:p>
-        </p:txBody>
-      </p:sp>
-      <p:sp>
-        <p:nvSpPr>
-          <p:cNvPr id="19" name="Shape 17"/>
+          <p:cNvPr id="17" name="Shape 15"/>
           <p:cNvSpPr/>
           <p:nvPr/>
         </p:nvSpPr>
@@ -9699,7 +11089,7 @@
       </p:sp>
       <p:sp>
         <p:nvSpPr>
-          <p:cNvPr id="20" name="Text 18"/>
+          <p:cNvPr id="18" name="Text 16"/>
           <p:cNvSpPr/>
           <p:nvPr/>
         </p:nvSpPr>
@@ -9906,8 +11296,8 @@
         </p:nvSpPr>
         <p:spPr>
           <a:xfrm>
-            <a:off x="9966960" y="6537960"/>
-            <a:ext cx="1645920" cy="201168"/>
+            <a:off x="9646920" y="6537960"/>
+            <a:ext cx="1965960" cy="201168"/>
           </a:xfrm>
           <a:prstGeom prst="rect">
             <a:avLst/>
@@ -9931,7 +11321,7 @@
                 <a:ea typeface="Aptos" pitchFamily="34" charset="-122"/>
                 <a:cs typeface="Aptos" pitchFamily="34" charset="-120"/>
               </a:rPr>
-              <a:t>Â© Paula Soper</a:t>
+              <a:t>Copyright Paula Soper</a:t>
             </a:r>
             <a:endParaRPr lang="en-US" sz="800" dirty="0"/>
           </a:p>
@@ -9978,77 +11368,13 @@
       </p:sp>
       <p:sp>
         <p:nvSpPr>
-          <p:cNvPr id="8" name="Shape 6"/>
+          <p:cNvPr id="8" name="Text 6"/>
           <p:cNvSpPr/>
           <p:nvPr/>
         </p:nvSpPr>
         <p:spPr>
           <a:xfrm>
             <a:off x="640080" y="658368"/>
-            <a:ext cx="420624" cy="420624"/>
-          </a:xfrm>
-          <a:prstGeom prst="ellipse">
-            <a:avLst/>
-          </a:prstGeom>
-          <a:solidFill>
-            <a:srgbClr val="0068B7"/>
-          </a:solidFill>
-          <a:ln w="12700">
-            <a:solidFill>
-              <a:srgbClr val="0068B7"/>
-            </a:solidFill>
-            <a:prstDash val="solid"/>
-          </a:ln>
-        </p:spPr>
-      </p:sp>
-      <p:sp>
-        <p:nvSpPr>
-          <p:cNvPr id="9" name="Text 7"/>
-          <p:cNvSpPr/>
-          <p:nvPr/>
-        </p:nvSpPr>
-        <p:spPr>
-          <a:xfrm>
-            <a:off x="640080" y="731520"/>
-            <a:ext cx="420624" cy="164592"/>
-          </a:xfrm>
-          <a:prstGeom prst="rect">
-            <a:avLst/>
-          </a:prstGeom>
-          <a:noFill/>
-          <a:ln/>
-        </p:spPr>
-        <p:txBody>
-          <a:bodyPr wrap="square" lIns="0" tIns="0" rIns="0" bIns="0" rtlCol="0" anchor="ctr"/>
-          <a:lstStyle/>
-          <a:p>
-            <a:pPr algn="ctr" indent="0" marL="0">
-              <a:buNone/>
-            </a:pPr>
-            <a:r>
-              <a:rPr lang="en-US" sz="1100" b="1" dirty="0">
-                <a:solidFill>
-                  <a:srgbClr val="FFFFFF"/>
-                </a:solidFill>
-                <a:latin typeface="Aptos" pitchFamily="34" charset="0"/>
-                <a:ea typeface="Aptos" pitchFamily="34" charset="-122"/>
-                <a:cs typeface="Aptos" pitchFamily="34" charset="-120"/>
-              </a:rPr>
-              <a:t>11</a:t>
-            </a:r>
-            <a:endParaRPr lang="en-US" sz="1100" dirty="0"/>
-          </a:p>
-        </p:txBody>
-      </p:sp>
-      <p:sp>
-        <p:nvSpPr>
-          <p:cNvPr id="10" name="Text 8"/>
-          <p:cNvSpPr/>
-          <p:nvPr/>
-        </p:nvSpPr>
-        <p:spPr>
-          <a:xfrm>
-            <a:off x="640080" y="621792"/>
             <a:ext cx="10881360" cy="713232"/>
           </a:xfrm>
           <a:prstGeom prst="rect">
@@ -10083,14 +11409,14 @@
       </p:sp>
       <p:sp>
         <p:nvSpPr>
-          <p:cNvPr id="11" name="Text 9"/>
+          <p:cNvPr id="9" name="Text 7"/>
           <p:cNvSpPr/>
           <p:nvPr/>
         </p:nvSpPr>
         <p:spPr>
           <a:xfrm>
             <a:off x="868680" y="1508760"/>
-            <a:ext cx="6537960" cy="4160520"/>
+            <a:ext cx="6309360" cy="4160520"/>
           </a:xfrm>
           <a:prstGeom prst="rect">
             <a:avLst/>
@@ -10149,18 +11475,18 @@
       </p:sp>
       <p:sp>
         <p:nvSpPr>
-          <p:cNvPr id="12" name="Shape 10"/>
-          <p:cNvSpPr/>
-          <p:nvPr/>
-        </p:nvSpPr>
-        <p:spPr>
-          <a:xfrm>
-            <a:off x="7909560" y="1417320"/>
-            <a:ext cx="3154680" cy="1828800"/>
+          <p:cNvPr id="10" name="Shape 8"/>
+          <p:cNvSpPr/>
+          <p:nvPr/>
+        </p:nvSpPr>
+        <p:spPr>
+          <a:xfrm>
+            <a:off x="7635240" y="1325880"/>
+            <a:ext cx="3474720" cy="1325880"/>
           </a:xfrm>
           <a:prstGeom prst="roundRect">
             <a:avLst>
-              <a:gd name="adj" fmla="val 6000"/>
+              <a:gd name="adj" fmla="val 8276"/>
             </a:avLst>
           </a:prstGeom>
           <a:solidFill>
@@ -10176,14 +11502,14 @@
       </p:sp>
       <p:sp>
         <p:nvSpPr>
-          <p:cNvPr id="13" name="Text 11"/>
-          <p:cNvSpPr/>
-          <p:nvPr/>
-        </p:nvSpPr>
-        <p:spPr>
-          <a:xfrm>
-            <a:off x="8074152" y="1563624"/>
-            <a:ext cx="2825496" cy="256032"/>
+          <p:cNvPr id="11" name="Text 9"/>
+          <p:cNvSpPr/>
+          <p:nvPr/>
+        </p:nvSpPr>
+        <p:spPr>
+          <a:xfrm>
+            <a:off x="7799832" y="1472184"/>
+            <a:ext cx="3145536" cy="256032"/>
           </a:xfrm>
           <a:prstGeom prst="rect">
             <a:avLst/>
@@ -10207,7 +11533,7 @@
                 <a:ea typeface="Aptos" pitchFamily="34" charset="-122"/>
                 <a:cs typeface="Aptos" pitchFamily="34" charset="-120"/>
               </a:rPr>
-              <a:t>Key idea</a:t>
+              <a:t>Data decision</a:t>
             </a:r>
             <a:endParaRPr lang="en-US" sz="1300" dirty="0"/>
           </a:p>
@@ -10215,14 +11541,14 @@
       </p:sp>
       <p:sp>
         <p:nvSpPr>
-          <p:cNvPr id="14" name="Text 12"/>
-          <p:cNvSpPr/>
-          <p:nvPr/>
-        </p:nvSpPr>
-        <p:spPr>
-          <a:xfrm>
-            <a:off x="8074152" y="1920240"/>
-            <a:ext cx="2825496" cy="1188720"/>
+          <p:cNvPr id="12" name="Text 10"/>
+          <p:cNvSpPr/>
+          <p:nvPr/>
+        </p:nvSpPr>
+        <p:spPr>
+          <a:xfrm>
+            <a:off x="7799832" y="1828800"/>
+            <a:ext cx="3145536" cy="685800"/>
           </a:xfrm>
           <a:prstGeom prst="rect">
             <a:avLst/>
@@ -10256,21 +11582,212 @@
       </p:sp>
       <p:sp>
         <p:nvSpPr>
-          <p:cNvPr id="15" name="Shape 13"/>
-          <p:cNvSpPr/>
-          <p:nvPr/>
-        </p:nvSpPr>
-        <p:spPr>
-          <a:xfrm>
-            <a:off x="7909560" y="3520440"/>
-            <a:ext cx="3154680" cy="1737360"/>
+          <p:cNvPr id="13" name="Shape 11"/>
+          <p:cNvSpPr/>
+          <p:nvPr/>
+        </p:nvSpPr>
+        <p:spPr>
+          <a:xfrm>
+            <a:off x="7635240" y="2788920"/>
+            <a:ext cx="3474720" cy="1536192"/>
           </a:xfrm>
           <a:prstGeom prst="roundRect">
             <a:avLst>
-              <a:gd name="adj" fmla="val 6316"/>
+              <a:gd name="adj" fmla="val 7143"/>
             </a:avLst>
           </a:prstGeom>
           <a:solidFill>
+            <a:srgbClr val="FFFFFF">
+              <a:alpha val="88000"/>
+            </a:srgbClr>
+          </a:solidFill>
+          <a:ln w="12700">
+            <a:solidFill>
+              <a:srgbClr val="D6E8F2"/>
+            </a:solidFill>
+            <a:prstDash val="solid"/>
+          </a:ln>
+        </p:spPr>
+      </p:sp>
+      <p:sp>
+        <p:nvSpPr>
+          <p:cNvPr id="14" name="Shape 12"/>
+          <p:cNvSpPr/>
+          <p:nvPr/>
+        </p:nvSpPr>
+        <p:spPr>
+          <a:xfrm>
+            <a:off x="8138160" y="3474720"/>
+            <a:ext cx="256032" cy="411480"/>
+          </a:xfrm>
+          <a:prstGeom prst="rect">
+            <a:avLst/>
+          </a:prstGeom>
+          <a:solidFill>
+            <a:srgbClr val="0068B7"/>
+          </a:solidFill>
+          <a:ln w="12700">
+            <a:solidFill>
+              <a:srgbClr val="0068B7"/>
+            </a:solidFill>
+            <a:prstDash val="solid"/>
+          </a:ln>
+        </p:spPr>
+      </p:sp>
+      <p:sp>
+        <p:nvSpPr>
+          <p:cNvPr id="15" name="Shape 13"/>
+          <p:cNvSpPr/>
+          <p:nvPr/>
+        </p:nvSpPr>
+        <p:spPr>
+          <a:xfrm>
+            <a:off x="8577072" y="3172968"/>
+            <a:ext cx="256032" cy="713232"/>
+          </a:xfrm>
+          <a:prstGeom prst="rect">
+            <a:avLst/>
+          </a:prstGeom>
+          <a:solidFill>
+            <a:srgbClr val="2F8A28"/>
+          </a:solidFill>
+          <a:ln w="12700">
+            <a:solidFill>
+              <a:srgbClr val="2F8A28"/>
+            </a:solidFill>
+            <a:prstDash val="solid"/>
+          </a:ln>
+        </p:spPr>
+      </p:sp>
+      <p:sp>
+        <p:nvSpPr>
+          <p:cNvPr id="16" name="Shape 14"/>
+          <p:cNvSpPr/>
+          <p:nvPr/>
+        </p:nvSpPr>
+        <p:spPr>
+          <a:xfrm>
+            <a:off x="9015984" y="2880360"/>
+            <a:ext cx="256032" cy="1005840"/>
+          </a:xfrm>
+          <a:prstGeom prst="rect">
+            <a:avLst/>
+          </a:prstGeom>
+          <a:solidFill>
+            <a:srgbClr val="D69A2D"/>
+          </a:solidFill>
+          <a:ln w="12700">
+            <a:solidFill>
+              <a:srgbClr val="D69A2D"/>
+            </a:solidFill>
+            <a:prstDash val="solid"/>
+          </a:ln>
+        </p:spPr>
+      </p:sp>
+      <p:sp>
+        <p:nvSpPr>
+          <p:cNvPr id="17" name="Shape 15"/>
+          <p:cNvSpPr/>
+          <p:nvPr/>
+        </p:nvSpPr>
+        <p:spPr>
+          <a:xfrm>
+            <a:off x="9454896" y="3319272"/>
+            <a:ext cx="256032" cy="566928"/>
+          </a:xfrm>
+          <a:prstGeom prst="rect">
+            <a:avLst/>
+          </a:prstGeom>
+          <a:solidFill>
+            <a:srgbClr val="6A4CA3"/>
+          </a:solidFill>
+          <a:ln w="12700">
+            <a:solidFill>
+              <a:srgbClr val="6A4CA3"/>
+            </a:solidFill>
+            <a:prstDash val="solid"/>
+          </a:ln>
+        </p:spPr>
+      </p:sp>
+      <p:sp>
+        <p:nvSpPr>
+          <p:cNvPr id="18" name="Shape 16"/>
+          <p:cNvSpPr/>
+          <p:nvPr/>
+        </p:nvSpPr>
+        <p:spPr>
+          <a:xfrm>
+            <a:off x="8019288" y="3886200"/>
+            <a:ext cx="2706624" cy="0"/>
+          </a:xfrm>
+          <a:prstGeom prst="line">
+            <a:avLst/>
+          </a:prstGeom>
+          <a:noFill/>
+          <a:ln w="15240">
+            <a:solidFill>
+              <a:srgbClr val="003A63"/>
+            </a:solidFill>
+            <a:prstDash val="solid"/>
+          </a:ln>
+        </p:spPr>
+      </p:sp>
+      <p:sp>
+        <p:nvSpPr>
+          <p:cNvPr id="19" name="Text 17"/>
+          <p:cNvSpPr/>
+          <p:nvPr/>
+        </p:nvSpPr>
+        <p:spPr>
+          <a:xfrm>
+            <a:off x="7863840" y="3017520"/>
+            <a:ext cx="3017520" cy="201168"/>
+          </a:xfrm>
+          <a:prstGeom prst="rect">
+            <a:avLst/>
+          </a:prstGeom>
+          <a:noFill/>
+          <a:ln/>
+        </p:spPr>
+        <p:txBody>
+          <a:bodyPr wrap="square" lIns="0" tIns="0" rIns="0" bIns="0" rtlCol="0" anchor="ctr"/>
+          <a:lstStyle/>
+          <a:p>
+            <a:pPr algn="ctr" indent="0" marL="0">
+              <a:buNone/>
+            </a:pPr>
+            <a:r>
+              <a:rPr lang="en-US" sz="1050" b="1" dirty="0">
+                <a:solidFill>
+                  <a:srgbClr val="003A63"/>
+                </a:solidFill>
+                <a:latin typeface="Aptos" pitchFamily="34" charset="0"/>
+                <a:ea typeface="Aptos" pitchFamily="34" charset="-122"/>
+                <a:cs typeface="Aptos" pitchFamily="34" charset="-120"/>
+              </a:rPr>
+              <a:t>Measure and monitor</a:t>
+            </a:r>
+            <a:endParaRPr lang="en-US" sz="1050" dirty="0"/>
+          </a:p>
+        </p:txBody>
+      </p:sp>
+      <p:sp>
+        <p:nvSpPr>
+          <p:cNvPr id="20" name="Shape 18"/>
+          <p:cNvSpPr/>
+          <p:nvPr/>
+        </p:nvSpPr>
+        <p:spPr>
+          <a:xfrm>
+            <a:off x="7635240" y="4498848"/>
+            <a:ext cx="3474720" cy="1143000"/>
+          </a:xfrm>
+          <a:prstGeom prst="roundRect">
+            <a:avLst>
+              <a:gd name="adj" fmla="val 9600"/>
+            </a:avLst>
+          </a:prstGeom>
+          <a:solidFill>
             <a:srgbClr val="EAF6F8"/>
           </a:solidFill>
           <a:ln w="12700">
@@ -10283,14 +11800,14 @@
       </p:sp>
       <p:sp>
         <p:nvSpPr>
-          <p:cNvPr id="16" name="Text 14"/>
-          <p:cNvSpPr/>
-          <p:nvPr/>
-        </p:nvSpPr>
-        <p:spPr>
-          <a:xfrm>
-            <a:off x="8074152" y="3666744"/>
-            <a:ext cx="2825496" cy="256032"/>
+          <p:cNvPr id="21" name="Text 19"/>
+          <p:cNvSpPr/>
+          <p:nvPr/>
+        </p:nvSpPr>
+        <p:spPr>
+          <a:xfrm>
+            <a:off x="7799832" y="4645152"/>
+            <a:ext cx="3145536" cy="256032"/>
           </a:xfrm>
           <a:prstGeom prst="rect">
             <a:avLst/>
@@ -10314,7 +11831,7 @@
                 <a:ea typeface="Aptos" pitchFamily="34" charset="-122"/>
                 <a:cs typeface="Aptos" pitchFamily="34" charset="-120"/>
               </a:rPr>
-              <a:t>Use this for</a:t>
+              <a:t>How to validate</a:t>
             </a:r>
             <a:endParaRPr lang="en-US" sz="1300" dirty="0"/>
           </a:p>
@@ -10322,14 +11839,14 @@
       </p:sp>
       <p:sp>
         <p:nvSpPr>
-          <p:cNvPr id="17" name="Text 15"/>
-          <p:cNvSpPr/>
-          <p:nvPr/>
-        </p:nvSpPr>
-        <p:spPr>
-          <a:xfrm>
-            <a:off x="8074152" y="4023360"/>
-            <a:ext cx="2825496" cy="1097280"/>
+          <p:cNvPr id="22" name="Text 20"/>
+          <p:cNvSpPr/>
+          <p:nvPr/>
+        </p:nvSpPr>
+        <p:spPr>
+          <a:xfrm>
+            <a:off x="7799832" y="5001768"/>
+            <a:ext cx="3145536" cy="502920"/>
           </a:xfrm>
           <a:prstGeom prst="rect">
             <a:avLst/>
@@ -10355,7 +11872,7 @@
                 <a:ea typeface="Aptos" pitchFamily="34" charset="-122"/>
                 <a:cs typeface="Aptos" pitchFamily="34" charset="-120"/>
               </a:rPr>
-              <a:t>Connect the concept to public health decisions, safeguards, documentation, or implementation work.</a:t>
+              <a:t>Use the assignment to test whether you can explain the concept, apply it to a realistic public health situation, and identify what would need review before the work moves forward.</a:t>
             </a:r>
             <a:endParaRPr lang="en-US" sz="1550" dirty="0"/>
           </a:p>
@@ -10529,8 +12046,8 @@
         </p:nvSpPr>
         <p:spPr>
           <a:xfrm>
-            <a:off x="9966960" y="6537960"/>
-            <a:ext cx="1645920" cy="201168"/>
+            <a:off x="9646920" y="6537960"/>
+            <a:ext cx="1965960" cy="201168"/>
           </a:xfrm>
           <a:prstGeom prst="rect">
             <a:avLst/>
@@ -10554,7 +12071,7 @@
                 <a:ea typeface="Aptos" pitchFamily="34" charset="-122"/>
                 <a:cs typeface="Aptos" pitchFamily="34" charset="-120"/>
               </a:rPr>
-              <a:t>Â© Paula Soper</a:t>
+              <a:t>Copyright Paula Soper</a:t>
             </a:r>
             <a:endParaRPr lang="en-US" sz="800" dirty="0"/>
           </a:p>
@@ -10601,77 +12118,13 @@
       </p:sp>
       <p:sp>
         <p:nvSpPr>
-          <p:cNvPr id="8" name="Shape 6"/>
+          <p:cNvPr id="8" name="Text 6"/>
           <p:cNvSpPr/>
           <p:nvPr/>
         </p:nvSpPr>
         <p:spPr>
           <a:xfrm>
             <a:off x="640080" y="658368"/>
-            <a:ext cx="420624" cy="420624"/>
-          </a:xfrm>
-          <a:prstGeom prst="ellipse">
-            <a:avLst/>
-          </a:prstGeom>
-          <a:solidFill>
-            <a:srgbClr val="0068B7"/>
-          </a:solidFill>
-          <a:ln w="12700">
-            <a:solidFill>
-              <a:srgbClr val="0068B7"/>
-            </a:solidFill>
-            <a:prstDash val="solid"/>
-          </a:ln>
-        </p:spPr>
-      </p:sp>
-      <p:sp>
-        <p:nvSpPr>
-          <p:cNvPr id="9" name="Text 7"/>
-          <p:cNvSpPr/>
-          <p:nvPr/>
-        </p:nvSpPr>
-        <p:spPr>
-          <a:xfrm>
-            <a:off x="640080" y="731520"/>
-            <a:ext cx="420624" cy="164592"/>
-          </a:xfrm>
-          <a:prstGeom prst="rect">
-            <a:avLst/>
-          </a:prstGeom>
-          <a:noFill/>
-          <a:ln/>
-        </p:spPr>
-        <p:txBody>
-          <a:bodyPr wrap="square" lIns="0" tIns="0" rIns="0" bIns="0" rtlCol="0" anchor="ctr"/>
-          <a:lstStyle/>
-          <a:p>
-            <a:pPr algn="ctr" indent="0" marL="0">
-              <a:buNone/>
-            </a:pPr>
-            <a:r>
-              <a:rPr lang="en-US" sz="1100" b="1" dirty="0">
-                <a:solidFill>
-                  <a:srgbClr val="FFFFFF"/>
-                </a:solidFill>
-                <a:latin typeface="Aptos" pitchFamily="34" charset="0"/>
-                <a:ea typeface="Aptos" pitchFamily="34" charset="-122"/>
-                <a:cs typeface="Aptos" pitchFamily="34" charset="-120"/>
-              </a:rPr>
-              <a:t>12</a:t>
-            </a:r>
-            <a:endParaRPr lang="en-US" sz="1100" dirty="0"/>
-          </a:p>
-        </p:txBody>
-      </p:sp>
-      <p:sp>
-        <p:nvSpPr>
-          <p:cNvPr id="10" name="Text 8"/>
-          <p:cNvSpPr/>
-          <p:nvPr/>
-        </p:nvSpPr>
-        <p:spPr>
-          <a:xfrm>
-            <a:off x="640080" y="621792"/>
             <a:ext cx="10881360" cy="713232"/>
           </a:xfrm>
           <a:prstGeom prst="rect">
@@ -10706,14 +12159,14 @@
       </p:sp>
       <p:sp>
         <p:nvSpPr>
-          <p:cNvPr id="11" name="Text 9"/>
+          <p:cNvPr id="9" name="Text 7"/>
           <p:cNvSpPr/>
           <p:nvPr/>
         </p:nvSpPr>
         <p:spPr>
           <a:xfrm>
             <a:off x="868680" y="1508760"/>
-            <a:ext cx="6537960" cy="4160520"/>
+            <a:ext cx="6309360" cy="4160520"/>
           </a:xfrm>
           <a:prstGeom prst="rect">
             <a:avLst/>
@@ -10772,18 +12225,18 @@
       </p:sp>
       <p:sp>
         <p:nvSpPr>
-          <p:cNvPr id="12" name="Shape 10"/>
-          <p:cNvSpPr/>
-          <p:nvPr/>
-        </p:nvSpPr>
-        <p:spPr>
-          <a:xfrm>
-            <a:off x="7909560" y="1417320"/>
-            <a:ext cx="3154680" cy="1828800"/>
+          <p:cNvPr id="10" name="Shape 8"/>
+          <p:cNvSpPr/>
+          <p:nvPr/>
+        </p:nvSpPr>
+        <p:spPr>
+          <a:xfrm>
+            <a:off x="7635240" y="1325880"/>
+            <a:ext cx="3474720" cy="1325880"/>
           </a:xfrm>
           <a:prstGeom prst="roundRect">
             <a:avLst>
-              <a:gd name="adj" fmla="val 6000"/>
+              <a:gd name="adj" fmla="val 8276"/>
             </a:avLst>
           </a:prstGeom>
           <a:solidFill>
@@ -10799,14 +12252,14 @@
       </p:sp>
       <p:sp>
         <p:nvSpPr>
-          <p:cNvPr id="13" name="Text 11"/>
-          <p:cNvSpPr/>
-          <p:nvPr/>
-        </p:nvSpPr>
-        <p:spPr>
-          <a:xfrm>
-            <a:off x="8074152" y="1563624"/>
-            <a:ext cx="2825496" cy="256032"/>
+          <p:cNvPr id="11" name="Text 9"/>
+          <p:cNvSpPr/>
+          <p:nvPr/>
+        </p:nvSpPr>
+        <p:spPr>
+          <a:xfrm>
+            <a:off x="7799832" y="1472184"/>
+            <a:ext cx="3145536" cy="256032"/>
           </a:xfrm>
           <a:prstGeom prst="rect">
             <a:avLst/>
@@ -10830,7 +12283,7 @@
                 <a:ea typeface="Aptos" pitchFamily="34" charset="-122"/>
                 <a:cs typeface="Aptos" pitchFamily="34" charset="-120"/>
               </a:rPr>
-              <a:t>Key idea</a:t>
+              <a:t>Data decision</a:t>
             </a:r>
             <a:endParaRPr lang="en-US" sz="1300" dirty="0"/>
           </a:p>
@@ -10838,14 +12291,14 @@
       </p:sp>
       <p:sp>
         <p:nvSpPr>
-          <p:cNvPr id="14" name="Text 12"/>
-          <p:cNvSpPr/>
-          <p:nvPr/>
-        </p:nvSpPr>
-        <p:spPr>
-          <a:xfrm>
-            <a:off x="8074152" y="1920240"/>
-            <a:ext cx="2825496" cy="1188720"/>
+          <p:cNvPr id="12" name="Text 10"/>
+          <p:cNvSpPr/>
+          <p:nvPr/>
+        </p:nvSpPr>
+        <p:spPr>
+          <a:xfrm>
+            <a:off x="7799832" y="1828800"/>
+            <a:ext cx="3145536" cy="685800"/>
           </a:xfrm>
           <a:prstGeom prst="rect">
             <a:avLst/>
@@ -10879,21 +12332,212 @@
       </p:sp>
       <p:sp>
         <p:nvSpPr>
-          <p:cNvPr id="15" name="Shape 13"/>
-          <p:cNvSpPr/>
-          <p:nvPr/>
-        </p:nvSpPr>
-        <p:spPr>
-          <a:xfrm>
-            <a:off x="7909560" y="3520440"/>
-            <a:ext cx="3154680" cy="1737360"/>
+          <p:cNvPr id="13" name="Shape 11"/>
+          <p:cNvSpPr/>
+          <p:nvPr/>
+        </p:nvSpPr>
+        <p:spPr>
+          <a:xfrm>
+            <a:off x="7635240" y="2788920"/>
+            <a:ext cx="3474720" cy="1536192"/>
           </a:xfrm>
           <a:prstGeom prst="roundRect">
             <a:avLst>
-              <a:gd name="adj" fmla="val 6316"/>
+              <a:gd name="adj" fmla="val 7143"/>
             </a:avLst>
           </a:prstGeom>
           <a:solidFill>
+            <a:srgbClr val="FFFFFF">
+              <a:alpha val="88000"/>
+            </a:srgbClr>
+          </a:solidFill>
+          <a:ln w="12700">
+            <a:solidFill>
+              <a:srgbClr val="D6E8F2"/>
+            </a:solidFill>
+            <a:prstDash val="solid"/>
+          </a:ln>
+        </p:spPr>
+      </p:sp>
+      <p:sp>
+        <p:nvSpPr>
+          <p:cNvPr id="14" name="Shape 12"/>
+          <p:cNvSpPr/>
+          <p:nvPr/>
+        </p:nvSpPr>
+        <p:spPr>
+          <a:xfrm>
+            <a:off x="8138160" y="3474720"/>
+            <a:ext cx="256032" cy="411480"/>
+          </a:xfrm>
+          <a:prstGeom prst="rect">
+            <a:avLst/>
+          </a:prstGeom>
+          <a:solidFill>
+            <a:srgbClr val="0068B7"/>
+          </a:solidFill>
+          <a:ln w="12700">
+            <a:solidFill>
+              <a:srgbClr val="0068B7"/>
+            </a:solidFill>
+            <a:prstDash val="solid"/>
+          </a:ln>
+        </p:spPr>
+      </p:sp>
+      <p:sp>
+        <p:nvSpPr>
+          <p:cNvPr id="15" name="Shape 13"/>
+          <p:cNvSpPr/>
+          <p:nvPr/>
+        </p:nvSpPr>
+        <p:spPr>
+          <a:xfrm>
+            <a:off x="8577072" y="3172968"/>
+            <a:ext cx="256032" cy="713232"/>
+          </a:xfrm>
+          <a:prstGeom prst="rect">
+            <a:avLst/>
+          </a:prstGeom>
+          <a:solidFill>
+            <a:srgbClr val="2F8A28"/>
+          </a:solidFill>
+          <a:ln w="12700">
+            <a:solidFill>
+              <a:srgbClr val="2F8A28"/>
+            </a:solidFill>
+            <a:prstDash val="solid"/>
+          </a:ln>
+        </p:spPr>
+      </p:sp>
+      <p:sp>
+        <p:nvSpPr>
+          <p:cNvPr id="16" name="Shape 14"/>
+          <p:cNvSpPr/>
+          <p:nvPr/>
+        </p:nvSpPr>
+        <p:spPr>
+          <a:xfrm>
+            <a:off x="9015984" y="2880360"/>
+            <a:ext cx="256032" cy="1005840"/>
+          </a:xfrm>
+          <a:prstGeom prst="rect">
+            <a:avLst/>
+          </a:prstGeom>
+          <a:solidFill>
+            <a:srgbClr val="D69A2D"/>
+          </a:solidFill>
+          <a:ln w="12700">
+            <a:solidFill>
+              <a:srgbClr val="D69A2D"/>
+            </a:solidFill>
+            <a:prstDash val="solid"/>
+          </a:ln>
+        </p:spPr>
+      </p:sp>
+      <p:sp>
+        <p:nvSpPr>
+          <p:cNvPr id="17" name="Shape 15"/>
+          <p:cNvSpPr/>
+          <p:nvPr/>
+        </p:nvSpPr>
+        <p:spPr>
+          <a:xfrm>
+            <a:off x="9454896" y="3319272"/>
+            <a:ext cx="256032" cy="566928"/>
+          </a:xfrm>
+          <a:prstGeom prst="rect">
+            <a:avLst/>
+          </a:prstGeom>
+          <a:solidFill>
+            <a:srgbClr val="6A4CA3"/>
+          </a:solidFill>
+          <a:ln w="12700">
+            <a:solidFill>
+              <a:srgbClr val="6A4CA3"/>
+            </a:solidFill>
+            <a:prstDash val="solid"/>
+          </a:ln>
+        </p:spPr>
+      </p:sp>
+      <p:sp>
+        <p:nvSpPr>
+          <p:cNvPr id="18" name="Shape 16"/>
+          <p:cNvSpPr/>
+          <p:nvPr/>
+        </p:nvSpPr>
+        <p:spPr>
+          <a:xfrm>
+            <a:off x="8019288" y="3886200"/>
+            <a:ext cx="2706624" cy="0"/>
+          </a:xfrm>
+          <a:prstGeom prst="line">
+            <a:avLst/>
+          </a:prstGeom>
+          <a:noFill/>
+          <a:ln w="15240">
+            <a:solidFill>
+              <a:srgbClr val="003A63"/>
+            </a:solidFill>
+            <a:prstDash val="solid"/>
+          </a:ln>
+        </p:spPr>
+      </p:sp>
+      <p:sp>
+        <p:nvSpPr>
+          <p:cNvPr id="19" name="Text 17"/>
+          <p:cNvSpPr/>
+          <p:nvPr/>
+        </p:nvSpPr>
+        <p:spPr>
+          <a:xfrm>
+            <a:off x="7863840" y="3017520"/>
+            <a:ext cx="3017520" cy="201168"/>
+          </a:xfrm>
+          <a:prstGeom prst="rect">
+            <a:avLst/>
+          </a:prstGeom>
+          <a:noFill/>
+          <a:ln/>
+        </p:spPr>
+        <p:txBody>
+          <a:bodyPr wrap="square" lIns="0" tIns="0" rIns="0" bIns="0" rtlCol="0" anchor="ctr"/>
+          <a:lstStyle/>
+          <a:p>
+            <a:pPr algn="ctr" indent="0" marL="0">
+              <a:buNone/>
+            </a:pPr>
+            <a:r>
+              <a:rPr lang="en-US" sz="1050" b="1" dirty="0">
+                <a:solidFill>
+                  <a:srgbClr val="003A63"/>
+                </a:solidFill>
+                <a:latin typeface="Aptos" pitchFamily="34" charset="0"/>
+                <a:ea typeface="Aptos" pitchFamily="34" charset="-122"/>
+                <a:cs typeface="Aptos" pitchFamily="34" charset="-120"/>
+              </a:rPr>
+              <a:t>Measure and monitor</a:t>
+            </a:r>
+            <a:endParaRPr lang="en-US" sz="1050" dirty="0"/>
+          </a:p>
+        </p:txBody>
+      </p:sp>
+      <p:sp>
+        <p:nvSpPr>
+          <p:cNvPr id="20" name="Shape 18"/>
+          <p:cNvSpPr/>
+          <p:nvPr/>
+        </p:nvSpPr>
+        <p:spPr>
+          <a:xfrm>
+            <a:off x="7635240" y="4498848"/>
+            <a:ext cx="3474720" cy="1143000"/>
+          </a:xfrm>
+          <a:prstGeom prst="roundRect">
+            <a:avLst>
+              <a:gd name="adj" fmla="val 9600"/>
+            </a:avLst>
+          </a:prstGeom>
+          <a:solidFill>
             <a:srgbClr val="EAF6F8"/>
           </a:solidFill>
           <a:ln w="12700">
@@ -10906,14 +12550,14 @@
       </p:sp>
       <p:sp>
         <p:nvSpPr>
-          <p:cNvPr id="16" name="Text 14"/>
-          <p:cNvSpPr/>
-          <p:nvPr/>
-        </p:nvSpPr>
-        <p:spPr>
-          <a:xfrm>
-            <a:off x="8074152" y="3666744"/>
-            <a:ext cx="2825496" cy="256032"/>
+          <p:cNvPr id="21" name="Text 19"/>
+          <p:cNvSpPr/>
+          <p:nvPr/>
+        </p:nvSpPr>
+        <p:spPr>
+          <a:xfrm>
+            <a:off x="7799832" y="4645152"/>
+            <a:ext cx="3145536" cy="256032"/>
           </a:xfrm>
           <a:prstGeom prst="rect">
             <a:avLst/>
@@ -10937,7 +12581,7 @@
                 <a:ea typeface="Aptos" pitchFamily="34" charset="-122"/>
                 <a:cs typeface="Aptos" pitchFamily="34" charset="-120"/>
               </a:rPr>
-              <a:t>Use this for</a:t>
+              <a:t>How to validate</a:t>
             </a:r>
             <a:endParaRPr lang="en-US" sz="1300" dirty="0"/>
           </a:p>
@@ -10945,14 +12589,14 @@
       </p:sp>
       <p:sp>
         <p:nvSpPr>
-          <p:cNvPr id="17" name="Text 15"/>
-          <p:cNvSpPr/>
-          <p:nvPr/>
-        </p:nvSpPr>
-        <p:spPr>
-          <a:xfrm>
-            <a:off x="8074152" y="4023360"/>
-            <a:ext cx="2825496" cy="1097280"/>
+          <p:cNvPr id="22" name="Text 20"/>
+          <p:cNvSpPr/>
+          <p:nvPr/>
+        </p:nvSpPr>
+        <p:spPr>
+          <a:xfrm>
+            <a:off x="7799832" y="5001768"/>
+            <a:ext cx="3145536" cy="502920"/>
           </a:xfrm>
           <a:prstGeom prst="rect">
             <a:avLst/>
@@ -10978,7 +12622,7 @@
                 <a:ea typeface="Aptos" pitchFamily="34" charset="-122"/>
                 <a:cs typeface="Aptos" pitchFamily="34" charset="-120"/>
               </a:rPr>
-              <a:t>Connect the concept to public health decisions, safeguards, documentation, or implementation work.</a:t>
+              <a:t>Use the assignment to test whether you can explain the concept, apply it to a realistic public health situation, and identify what would need review before the work moves forward.</a:t>
             </a:r>
             <a:endParaRPr lang="en-US" sz="1550" dirty="0"/>
           </a:p>
@@ -11152,8 +12796,8 @@
         </p:nvSpPr>
         <p:spPr>
           <a:xfrm>
-            <a:off x="9966960" y="6537960"/>
-            <a:ext cx="1645920" cy="201168"/>
+            <a:off x="9646920" y="6537960"/>
+            <a:ext cx="1965960" cy="201168"/>
           </a:xfrm>
           <a:prstGeom prst="rect">
             <a:avLst/>
@@ -11177,7 +12821,7 @@
                 <a:ea typeface="Aptos" pitchFamily="34" charset="-122"/>
                 <a:cs typeface="Aptos" pitchFamily="34" charset="-120"/>
               </a:rPr>
-              <a:t>Â© Paula Soper</a:t>
+              <a:t>Copyright Paula Soper</a:t>
             </a:r>
             <a:endParaRPr lang="en-US" sz="800" dirty="0"/>
           </a:p>
@@ -11224,77 +12868,13 @@
       </p:sp>
       <p:sp>
         <p:nvSpPr>
-          <p:cNvPr id="8" name="Shape 6"/>
+          <p:cNvPr id="8" name="Text 6"/>
           <p:cNvSpPr/>
           <p:nvPr/>
         </p:nvSpPr>
         <p:spPr>
           <a:xfrm>
             <a:off x="640080" y="658368"/>
-            <a:ext cx="420624" cy="420624"/>
-          </a:xfrm>
-          <a:prstGeom prst="ellipse">
-            <a:avLst/>
-          </a:prstGeom>
-          <a:solidFill>
-            <a:srgbClr val="0068B7"/>
-          </a:solidFill>
-          <a:ln w="12700">
-            <a:solidFill>
-              <a:srgbClr val="0068B7"/>
-            </a:solidFill>
-            <a:prstDash val="solid"/>
-          </a:ln>
-        </p:spPr>
-      </p:sp>
-      <p:sp>
-        <p:nvSpPr>
-          <p:cNvPr id="9" name="Text 7"/>
-          <p:cNvSpPr/>
-          <p:nvPr/>
-        </p:nvSpPr>
-        <p:spPr>
-          <a:xfrm>
-            <a:off x="640080" y="731520"/>
-            <a:ext cx="420624" cy="164592"/>
-          </a:xfrm>
-          <a:prstGeom prst="rect">
-            <a:avLst/>
-          </a:prstGeom>
-          <a:noFill/>
-          <a:ln/>
-        </p:spPr>
-        <p:txBody>
-          <a:bodyPr wrap="square" lIns="0" tIns="0" rIns="0" bIns="0" rtlCol="0" anchor="ctr"/>
-          <a:lstStyle/>
-          <a:p>
-            <a:pPr algn="ctr" indent="0" marL="0">
-              <a:buNone/>
-            </a:pPr>
-            <a:r>
-              <a:rPr lang="en-US" sz="1100" b="1" dirty="0">
-                <a:solidFill>
-                  <a:srgbClr val="FFFFFF"/>
-                </a:solidFill>
-                <a:latin typeface="Aptos" pitchFamily="34" charset="0"/>
-                <a:ea typeface="Aptos" pitchFamily="34" charset="-122"/>
-                <a:cs typeface="Aptos" pitchFamily="34" charset="-120"/>
-              </a:rPr>
-              <a:t>13</a:t>
-            </a:r>
-            <a:endParaRPr lang="en-US" sz="1100" dirty="0"/>
-          </a:p>
-        </p:txBody>
-      </p:sp>
-      <p:sp>
-        <p:nvSpPr>
-          <p:cNvPr id="10" name="Text 8"/>
-          <p:cNvSpPr/>
-          <p:nvPr/>
-        </p:nvSpPr>
-        <p:spPr>
-          <a:xfrm>
-            <a:off x="640080" y="621792"/>
             <a:ext cx="10881360" cy="713232"/>
           </a:xfrm>
           <a:prstGeom prst="rect">
@@ -11329,14 +12909,14 @@
       </p:sp>
       <p:sp>
         <p:nvSpPr>
-          <p:cNvPr id="11" name="Text 9"/>
+          <p:cNvPr id="9" name="Text 7"/>
           <p:cNvSpPr/>
           <p:nvPr/>
         </p:nvSpPr>
         <p:spPr>
           <a:xfrm>
             <a:off x="868680" y="1508760"/>
-            <a:ext cx="6537960" cy="4160520"/>
+            <a:ext cx="6309360" cy="4160520"/>
           </a:xfrm>
           <a:prstGeom prst="rect">
             <a:avLst/>
@@ -11395,18 +12975,18 @@
       </p:sp>
       <p:sp>
         <p:nvSpPr>
-          <p:cNvPr id="12" name="Shape 10"/>
-          <p:cNvSpPr/>
-          <p:nvPr/>
-        </p:nvSpPr>
-        <p:spPr>
-          <a:xfrm>
-            <a:off x="7909560" y="1417320"/>
-            <a:ext cx="3154680" cy="1828800"/>
+          <p:cNvPr id="10" name="Shape 8"/>
+          <p:cNvSpPr/>
+          <p:nvPr/>
+        </p:nvSpPr>
+        <p:spPr>
+          <a:xfrm>
+            <a:off x="7635240" y="1325880"/>
+            <a:ext cx="3474720" cy="1325880"/>
           </a:xfrm>
           <a:prstGeom prst="roundRect">
             <a:avLst>
-              <a:gd name="adj" fmla="val 6000"/>
+              <a:gd name="adj" fmla="val 8276"/>
             </a:avLst>
           </a:prstGeom>
           <a:solidFill>
@@ -11422,14 +13002,14 @@
       </p:sp>
       <p:sp>
         <p:nvSpPr>
-          <p:cNvPr id="13" name="Text 11"/>
-          <p:cNvSpPr/>
-          <p:nvPr/>
-        </p:nvSpPr>
-        <p:spPr>
-          <a:xfrm>
-            <a:off x="8074152" y="1563624"/>
-            <a:ext cx="2825496" cy="256032"/>
+          <p:cNvPr id="11" name="Text 9"/>
+          <p:cNvSpPr/>
+          <p:nvPr/>
+        </p:nvSpPr>
+        <p:spPr>
+          <a:xfrm>
+            <a:off x="7799832" y="1472184"/>
+            <a:ext cx="3145536" cy="256032"/>
           </a:xfrm>
           <a:prstGeom prst="rect">
             <a:avLst/>
@@ -11453,7 +13033,7 @@
                 <a:ea typeface="Aptos" pitchFamily="34" charset="-122"/>
                 <a:cs typeface="Aptos" pitchFamily="34" charset="-120"/>
               </a:rPr>
-              <a:t>Key idea</a:t>
+              <a:t>Data decision</a:t>
             </a:r>
             <a:endParaRPr lang="en-US" sz="1300" dirty="0"/>
           </a:p>
@@ -11461,14 +13041,14 @@
       </p:sp>
       <p:sp>
         <p:nvSpPr>
-          <p:cNvPr id="14" name="Text 12"/>
-          <p:cNvSpPr/>
-          <p:nvPr/>
-        </p:nvSpPr>
-        <p:spPr>
-          <a:xfrm>
-            <a:off x="8074152" y="1920240"/>
-            <a:ext cx="2825496" cy="1188720"/>
+          <p:cNvPr id="12" name="Text 10"/>
+          <p:cNvSpPr/>
+          <p:nvPr/>
+        </p:nvSpPr>
+        <p:spPr>
+          <a:xfrm>
+            <a:off x="7799832" y="1828800"/>
+            <a:ext cx="3145536" cy="685800"/>
           </a:xfrm>
           <a:prstGeom prst="rect">
             <a:avLst/>
@@ -11502,21 +13082,212 @@
       </p:sp>
       <p:sp>
         <p:nvSpPr>
-          <p:cNvPr id="15" name="Shape 13"/>
-          <p:cNvSpPr/>
-          <p:nvPr/>
-        </p:nvSpPr>
-        <p:spPr>
-          <a:xfrm>
-            <a:off x="7909560" y="3520440"/>
-            <a:ext cx="3154680" cy="1737360"/>
+          <p:cNvPr id="13" name="Shape 11"/>
+          <p:cNvSpPr/>
+          <p:nvPr/>
+        </p:nvSpPr>
+        <p:spPr>
+          <a:xfrm>
+            <a:off x="7635240" y="2788920"/>
+            <a:ext cx="3474720" cy="1536192"/>
           </a:xfrm>
           <a:prstGeom prst="roundRect">
             <a:avLst>
-              <a:gd name="adj" fmla="val 6316"/>
+              <a:gd name="adj" fmla="val 7143"/>
             </a:avLst>
           </a:prstGeom>
           <a:solidFill>
+            <a:srgbClr val="FFFFFF">
+              <a:alpha val="88000"/>
+            </a:srgbClr>
+          </a:solidFill>
+          <a:ln w="12700">
+            <a:solidFill>
+              <a:srgbClr val="D6E8F2"/>
+            </a:solidFill>
+            <a:prstDash val="solid"/>
+          </a:ln>
+        </p:spPr>
+      </p:sp>
+      <p:sp>
+        <p:nvSpPr>
+          <p:cNvPr id="14" name="Shape 12"/>
+          <p:cNvSpPr/>
+          <p:nvPr/>
+        </p:nvSpPr>
+        <p:spPr>
+          <a:xfrm>
+            <a:off x="8138160" y="3474720"/>
+            <a:ext cx="256032" cy="411480"/>
+          </a:xfrm>
+          <a:prstGeom prst="rect">
+            <a:avLst/>
+          </a:prstGeom>
+          <a:solidFill>
+            <a:srgbClr val="0068B7"/>
+          </a:solidFill>
+          <a:ln w="12700">
+            <a:solidFill>
+              <a:srgbClr val="0068B7"/>
+            </a:solidFill>
+            <a:prstDash val="solid"/>
+          </a:ln>
+        </p:spPr>
+      </p:sp>
+      <p:sp>
+        <p:nvSpPr>
+          <p:cNvPr id="15" name="Shape 13"/>
+          <p:cNvSpPr/>
+          <p:nvPr/>
+        </p:nvSpPr>
+        <p:spPr>
+          <a:xfrm>
+            <a:off x="8577072" y="3172968"/>
+            <a:ext cx="256032" cy="713232"/>
+          </a:xfrm>
+          <a:prstGeom prst="rect">
+            <a:avLst/>
+          </a:prstGeom>
+          <a:solidFill>
+            <a:srgbClr val="2F8A28"/>
+          </a:solidFill>
+          <a:ln w="12700">
+            <a:solidFill>
+              <a:srgbClr val="2F8A28"/>
+            </a:solidFill>
+            <a:prstDash val="solid"/>
+          </a:ln>
+        </p:spPr>
+      </p:sp>
+      <p:sp>
+        <p:nvSpPr>
+          <p:cNvPr id="16" name="Shape 14"/>
+          <p:cNvSpPr/>
+          <p:nvPr/>
+        </p:nvSpPr>
+        <p:spPr>
+          <a:xfrm>
+            <a:off x="9015984" y="2880360"/>
+            <a:ext cx="256032" cy="1005840"/>
+          </a:xfrm>
+          <a:prstGeom prst="rect">
+            <a:avLst/>
+          </a:prstGeom>
+          <a:solidFill>
+            <a:srgbClr val="D69A2D"/>
+          </a:solidFill>
+          <a:ln w="12700">
+            <a:solidFill>
+              <a:srgbClr val="D69A2D"/>
+            </a:solidFill>
+            <a:prstDash val="solid"/>
+          </a:ln>
+        </p:spPr>
+      </p:sp>
+      <p:sp>
+        <p:nvSpPr>
+          <p:cNvPr id="17" name="Shape 15"/>
+          <p:cNvSpPr/>
+          <p:nvPr/>
+        </p:nvSpPr>
+        <p:spPr>
+          <a:xfrm>
+            <a:off x="9454896" y="3319272"/>
+            <a:ext cx="256032" cy="566928"/>
+          </a:xfrm>
+          <a:prstGeom prst="rect">
+            <a:avLst/>
+          </a:prstGeom>
+          <a:solidFill>
+            <a:srgbClr val="6A4CA3"/>
+          </a:solidFill>
+          <a:ln w="12700">
+            <a:solidFill>
+              <a:srgbClr val="6A4CA3"/>
+            </a:solidFill>
+            <a:prstDash val="solid"/>
+          </a:ln>
+        </p:spPr>
+      </p:sp>
+      <p:sp>
+        <p:nvSpPr>
+          <p:cNvPr id="18" name="Shape 16"/>
+          <p:cNvSpPr/>
+          <p:nvPr/>
+        </p:nvSpPr>
+        <p:spPr>
+          <a:xfrm>
+            <a:off x="8019288" y="3886200"/>
+            <a:ext cx="2706624" cy="0"/>
+          </a:xfrm>
+          <a:prstGeom prst="line">
+            <a:avLst/>
+          </a:prstGeom>
+          <a:noFill/>
+          <a:ln w="15240">
+            <a:solidFill>
+              <a:srgbClr val="003A63"/>
+            </a:solidFill>
+            <a:prstDash val="solid"/>
+          </a:ln>
+        </p:spPr>
+      </p:sp>
+      <p:sp>
+        <p:nvSpPr>
+          <p:cNvPr id="19" name="Text 17"/>
+          <p:cNvSpPr/>
+          <p:nvPr/>
+        </p:nvSpPr>
+        <p:spPr>
+          <a:xfrm>
+            <a:off x="7863840" y="3017520"/>
+            <a:ext cx="3017520" cy="201168"/>
+          </a:xfrm>
+          <a:prstGeom prst="rect">
+            <a:avLst/>
+          </a:prstGeom>
+          <a:noFill/>
+          <a:ln/>
+        </p:spPr>
+        <p:txBody>
+          <a:bodyPr wrap="square" lIns="0" tIns="0" rIns="0" bIns="0" rtlCol="0" anchor="ctr"/>
+          <a:lstStyle/>
+          <a:p>
+            <a:pPr algn="ctr" indent="0" marL="0">
+              <a:buNone/>
+            </a:pPr>
+            <a:r>
+              <a:rPr lang="en-US" sz="1050" b="1" dirty="0">
+                <a:solidFill>
+                  <a:srgbClr val="003A63"/>
+                </a:solidFill>
+                <a:latin typeface="Aptos" pitchFamily="34" charset="0"/>
+                <a:ea typeface="Aptos" pitchFamily="34" charset="-122"/>
+                <a:cs typeface="Aptos" pitchFamily="34" charset="-120"/>
+              </a:rPr>
+              <a:t>Measure and monitor</a:t>
+            </a:r>
+            <a:endParaRPr lang="en-US" sz="1050" dirty="0"/>
+          </a:p>
+        </p:txBody>
+      </p:sp>
+      <p:sp>
+        <p:nvSpPr>
+          <p:cNvPr id="20" name="Shape 18"/>
+          <p:cNvSpPr/>
+          <p:nvPr/>
+        </p:nvSpPr>
+        <p:spPr>
+          <a:xfrm>
+            <a:off x="7635240" y="4498848"/>
+            <a:ext cx="3474720" cy="1143000"/>
+          </a:xfrm>
+          <a:prstGeom prst="roundRect">
+            <a:avLst>
+              <a:gd name="adj" fmla="val 9600"/>
+            </a:avLst>
+          </a:prstGeom>
+          <a:solidFill>
             <a:srgbClr val="EAF6F8"/>
           </a:solidFill>
           <a:ln w="12700">
@@ -11529,14 +13300,14 @@
       </p:sp>
       <p:sp>
         <p:nvSpPr>
-          <p:cNvPr id="16" name="Text 14"/>
-          <p:cNvSpPr/>
-          <p:nvPr/>
-        </p:nvSpPr>
-        <p:spPr>
-          <a:xfrm>
-            <a:off x="8074152" y="3666744"/>
-            <a:ext cx="2825496" cy="256032"/>
+          <p:cNvPr id="21" name="Text 19"/>
+          <p:cNvSpPr/>
+          <p:nvPr/>
+        </p:nvSpPr>
+        <p:spPr>
+          <a:xfrm>
+            <a:off x="7799832" y="4645152"/>
+            <a:ext cx="3145536" cy="256032"/>
           </a:xfrm>
           <a:prstGeom prst="rect">
             <a:avLst/>
@@ -11560,7 +13331,7 @@
                 <a:ea typeface="Aptos" pitchFamily="34" charset="-122"/>
                 <a:cs typeface="Aptos" pitchFamily="34" charset="-120"/>
               </a:rPr>
-              <a:t>Use this for</a:t>
+              <a:t>How to validate</a:t>
             </a:r>
             <a:endParaRPr lang="en-US" sz="1300" dirty="0"/>
           </a:p>
@@ -11568,14 +13339,14 @@
       </p:sp>
       <p:sp>
         <p:nvSpPr>
-          <p:cNvPr id="17" name="Text 15"/>
-          <p:cNvSpPr/>
-          <p:nvPr/>
-        </p:nvSpPr>
-        <p:spPr>
-          <a:xfrm>
-            <a:off x="8074152" y="4023360"/>
-            <a:ext cx="2825496" cy="1097280"/>
+          <p:cNvPr id="22" name="Text 20"/>
+          <p:cNvSpPr/>
+          <p:nvPr/>
+        </p:nvSpPr>
+        <p:spPr>
+          <a:xfrm>
+            <a:off x="7799832" y="5001768"/>
+            <a:ext cx="3145536" cy="502920"/>
           </a:xfrm>
           <a:prstGeom prst="rect">
             <a:avLst/>
@@ -11601,7 +13372,7 @@
                 <a:ea typeface="Aptos" pitchFamily="34" charset="-122"/>
                 <a:cs typeface="Aptos" pitchFamily="34" charset="-120"/>
               </a:rPr>
-              <a:t>Connect the concept to public health decisions, safeguards, documentation, or implementation work.</a:t>
+              <a:t>Connect the concept to data quality, model performance, validation evidence, monitoring measures, and decisions that remain under human control.</a:t>
             </a:r>
             <a:endParaRPr lang="en-US" sz="1550" dirty="0"/>
           </a:p>
@@ -11775,8 +13546,8 @@
         </p:nvSpPr>
         <p:spPr>
           <a:xfrm>
-            <a:off x="9966960" y="6537960"/>
-            <a:ext cx="1645920" cy="201168"/>
+            <a:off x="9646920" y="6537960"/>
+            <a:ext cx="1965960" cy="201168"/>
           </a:xfrm>
           <a:prstGeom prst="rect">
             <a:avLst/>
@@ -11800,7 +13571,7 @@
                 <a:ea typeface="Aptos" pitchFamily="34" charset="-122"/>
                 <a:cs typeface="Aptos" pitchFamily="34" charset="-120"/>
               </a:rPr>
-              <a:t>Â© Paula Soper</a:t>
+              <a:t>Copyright Paula Soper</a:t>
             </a:r>
             <a:endParaRPr lang="en-US" sz="800" dirty="0"/>
           </a:p>
@@ -12143,46 +13914,7 @@
       </p:sp>
       <p:sp>
         <p:nvSpPr>
-          <p:cNvPr id="15" name="Text 13"/>
-          <p:cNvSpPr/>
-          <p:nvPr/>
-        </p:nvSpPr>
-        <p:spPr>
-          <a:xfrm>
-            <a:off x="8817864" y="4187952"/>
-            <a:ext cx="201168" cy="256032"/>
-          </a:xfrm>
-          <a:prstGeom prst="rect">
-            <a:avLst/>
-          </a:prstGeom>
-          <a:noFill/>
-          <a:ln/>
-        </p:spPr>
-        <p:txBody>
-          <a:bodyPr wrap="square" lIns="0" tIns="0" rIns="0" bIns="0" rtlCol="0" anchor="ctr"/>
-          <a:lstStyle/>
-          <a:p>
-            <a:pPr algn="ctr" indent="0" marL="0">
-              <a:buNone/>
-            </a:pPr>
-            <a:r>
-              <a:rPr lang="en-US" sz="1800" b="1" dirty="0">
-                <a:solidFill>
-                  <a:srgbClr val="0068B7"/>
-                </a:solidFill>
-                <a:latin typeface="Aptos" pitchFamily="34" charset="0"/>
-                <a:ea typeface="Aptos" pitchFamily="34" charset="-122"/>
-                <a:cs typeface="Aptos" pitchFamily="34" charset="-120"/>
-              </a:rPr>
-              <a:t>â†’</a:t>
-            </a:r>
-            <a:endParaRPr lang="en-US" sz="1800" dirty="0"/>
-          </a:p>
-        </p:txBody>
-      </p:sp>
-      <p:sp>
-        <p:nvSpPr>
-          <p:cNvPr id="16" name="Shape 14"/>
+          <p:cNvPr id="15" name="Shape 13"/>
           <p:cNvSpPr/>
           <p:nvPr/>
         </p:nvSpPr>
@@ -12209,7 +13941,7 @@
       </p:sp>
       <p:sp>
         <p:nvSpPr>
-          <p:cNvPr id="17" name="Text 15"/>
+          <p:cNvPr id="16" name="Text 14"/>
           <p:cNvSpPr/>
           <p:nvPr/>
         </p:nvSpPr>
@@ -12250,46 +13982,7 @@
       </p:sp>
       <p:sp>
         <p:nvSpPr>
-          <p:cNvPr id="18" name="Text 16"/>
-          <p:cNvSpPr/>
-          <p:nvPr/>
-        </p:nvSpPr>
-        <p:spPr>
-          <a:xfrm>
-            <a:off x="10046208" y="4187952"/>
-            <a:ext cx="201168" cy="256032"/>
-          </a:xfrm>
-          <a:prstGeom prst="rect">
-            <a:avLst/>
-          </a:prstGeom>
-          <a:noFill/>
-          <a:ln/>
-        </p:spPr>
-        <p:txBody>
-          <a:bodyPr wrap="square" lIns="0" tIns="0" rIns="0" bIns="0" rtlCol="0" anchor="ctr"/>
-          <a:lstStyle/>
-          <a:p>
-            <a:pPr algn="ctr" indent="0" marL="0">
-              <a:buNone/>
-            </a:pPr>
-            <a:r>
-              <a:rPr lang="en-US" sz="1800" b="1" dirty="0">
-                <a:solidFill>
-                  <a:srgbClr val="0068B7"/>
-                </a:solidFill>
-                <a:latin typeface="Aptos" pitchFamily="34" charset="0"/>
-                <a:ea typeface="Aptos" pitchFamily="34" charset="-122"/>
-                <a:cs typeface="Aptos" pitchFamily="34" charset="-120"/>
-              </a:rPr>
-              <a:t>â†’</a:t>
-            </a:r>
-            <a:endParaRPr lang="en-US" sz="1800" dirty="0"/>
-          </a:p>
-        </p:txBody>
-      </p:sp>
-      <p:sp>
-        <p:nvSpPr>
-          <p:cNvPr id="19" name="Shape 17"/>
+          <p:cNvPr id="17" name="Shape 15"/>
           <p:cNvSpPr/>
           <p:nvPr/>
         </p:nvSpPr>
@@ -12316,7 +14009,7 @@
       </p:sp>
       <p:sp>
         <p:nvSpPr>
-          <p:cNvPr id="20" name="Text 18"/>
+          <p:cNvPr id="18" name="Text 16"/>
           <p:cNvSpPr/>
           <p:nvPr/>
         </p:nvSpPr>
@@ -12523,8 +14216,8 @@
         </p:nvSpPr>
         <p:spPr>
           <a:xfrm>
-            <a:off x="9966960" y="6537960"/>
-            <a:ext cx="1645920" cy="201168"/>
+            <a:off x="9646920" y="6537960"/>
+            <a:ext cx="1965960" cy="201168"/>
           </a:xfrm>
           <a:prstGeom prst="rect">
             <a:avLst/>
@@ -12548,7 +14241,7 @@
                 <a:ea typeface="Aptos" pitchFamily="34" charset="-122"/>
                 <a:cs typeface="Aptos" pitchFamily="34" charset="-120"/>
               </a:rPr>
-              <a:t>Â© Paula Soper</a:t>
+              <a:t>Copyright Paula Soper</a:t>
             </a:r>
             <a:endParaRPr lang="en-US" sz="800" dirty="0"/>
           </a:p>
@@ -12891,46 +14584,7 @@
       </p:sp>
       <p:sp>
         <p:nvSpPr>
-          <p:cNvPr id="15" name="Text 13"/>
-          <p:cNvSpPr/>
-          <p:nvPr/>
-        </p:nvSpPr>
-        <p:spPr>
-          <a:xfrm>
-            <a:off x="8817864" y="4187952"/>
-            <a:ext cx="201168" cy="256032"/>
-          </a:xfrm>
-          <a:prstGeom prst="rect">
-            <a:avLst/>
-          </a:prstGeom>
-          <a:noFill/>
-          <a:ln/>
-        </p:spPr>
-        <p:txBody>
-          <a:bodyPr wrap="square" lIns="0" tIns="0" rIns="0" bIns="0" rtlCol="0" anchor="ctr"/>
-          <a:lstStyle/>
-          <a:p>
-            <a:pPr algn="ctr" indent="0" marL="0">
-              <a:buNone/>
-            </a:pPr>
-            <a:r>
-              <a:rPr lang="en-US" sz="1800" b="1" dirty="0">
-                <a:solidFill>
-                  <a:srgbClr val="0068B7"/>
-                </a:solidFill>
-                <a:latin typeface="Aptos" pitchFamily="34" charset="0"/>
-                <a:ea typeface="Aptos" pitchFamily="34" charset="-122"/>
-                <a:cs typeface="Aptos" pitchFamily="34" charset="-120"/>
-              </a:rPr>
-              <a:t>â†’</a:t>
-            </a:r>
-            <a:endParaRPr lang="en-US" sz="1800" dirty="0"/>
-          </a:p>
-        </p:txBody>
-      </p:sp>
-      <p:sp>
-        <p:nvSpPr>
-          <p:cNvPr id="16" name="Shape 14"/>
+          <p:cNvPr id="15" name="Shape 13"/>
           <p:cNvSpPr/>
           <p:nvPr/>
         </p:nvSpPr>
@@ -12957,7 +14611,7 @@
       </p:sp>
       <p:sp>
         <p:nvSpPr>
-          <p:cNvPr id="17" name="Text 15"/>
+          <p:cNvPr id="16" name="Text 14"/>
           <p:cNvSpPr/>
           <p:nvPr/>
         </p:nvSpPr>
@@ -12998,46 +14652,7 @@
       </p:sp>
       <p:sp>
         <p:nvSpPr>
-          <p:cNvPr id="18" name="Text 16"/>
-          <p:cNvSpPr/>
-          <p:nvPr/>
-        </p:nvSpPr>
-        <p:spPr>
-          <a:xfrm>
-            <a:off x="10046208" y="4187952"/>
-            <a:ext cx="201168" cy="256032"/>
-          </a:xfrm>
-          <a:prstGeom prst="rect">
-            <a:avLst/>
-          </a:prstGeom>
-          <a:noFill/>
-          <a:ln/>
-        </p:spPr>
-        <p:txBody>
-          <a:bodyPr wrap="square" lIns="0" tIns="0" rIns="0" bIns="0" rtlCol="0" anchor="ctr"/>
-          <a:lstStyle/>
-          <a:p>
-            <a:pPr algn="ctr" indent="0" marL="0">
-              <a:buNone/>
-            </a:pPr>
-            <a:r>
-              <a:rPr lang="en-US" sz="1800" b="1" dirty="0">
-                <a:solidFill>
-                  <a:srgbClr val="0068B7"/>
-                </a:solidFill>
-                <a:latin typeface="Aptos" pitchFamily="34" charset="0"/>
-                <a:ea typeface="Aptos" pitchFamily="34" charset="-122"/>
-                <a:cs typeface="Aptos" pitchFamily="34" charset="-120"/>
-              </a:rPr>
-              <a:t>â†’</a:t>
-            </a:r>
-            <a:endParaRPr lang="en-US" sz="1800" dirty="0"/>
-          </a:p>
-        </p:txBody>
-      </p:sp>
-      <p:sp>
-        <p:nvSpPr>
-          <p:cNvPr id="19" name="Shape 17"/>
+          <p:cNvPr id="17" name="Shape 15"/>
           <p:cNvSpPr/>
           <p:nvPr/>
         </p:nvSpPr>
@@ -13064,7 +14679,7 @@
       </p:sp>
       <p:sp>
         <p:nvSpPr>
-          <p:cNvPr id="20" name="Text 18"/>
+          <p:cNvPr id="18" name="Text 16"/>
           <p:cNvSpPr/>
           <p:nvPr/>
         </p:nvSpPr>
@@ -13271,8 +14886,8 @@
         </p:nvSpPr>
         <p:spPr>
           <a:xfrm>
-            <a:off x="9966960" y="6537960"/>
-            <a:ext cx="1645920" cy="201168"/>
+            <a:off x="9646920" y="6537960"/>
+            <a:ext cx="1965960" cy="201168"/>
           </a:xfrm>
           <a:prstGeom prst="rect">
             <a:avLst/>
@@ -13296,7 +14911,7 @@
                 <a:ea typeface="Aptos" pitchFamily="34" charset="-122"/>
                 <a:cs typeface="Aptos" pitchFamily="34" charset="-120"/>
               </a:rPr>
-              <a:t>Â© Paula Soper</a:t>
+              <a:t>Copyright Paula Soper</a:t>
             </a:r>
             <a:endParaRPr lang="en-US" sz="800" dirty="0"/>
           </a:p>
@@ -13343,77 +14958,13 @@
       </p:sp>
       <p:sp>
         <p:nvSpPr>
-          <p:cNvPr id="8" name="Shape 6"/>
+          <p:cNvPr id="8" name="Text 6"/>
           <p:cNvSpPr/>
           <p:nvPr/>
         </p:nvSpPr>
         <p:spPr>
           <a:xfrm>
             <a:off x="640080" y="658368"/>
-            <a:ext cx="420624" cy="420624"/>
-          </a:xfrm>
-          <a:prstGeom prst="ellipse">
-            <a:avLst/>
-          </a:prstGeom>
-          <a:solidFill>
-            <a:srgbClr val="0068B7"/>
-          </a:solidFill>
-          <a:ln w="12700">
-            <a:solidFill>
-              <a:srgbClr val="0068B7"/>
-            </a:solidFill>
-            <a:prstDash val="solid"/>
-          </a:ln>
-        </p:spPr>
-      </p:sp>
-      <p:sp>
-        <p:nvSpPr>
-          <p:cNvPr id="9" name="Text 7"/>
-          <p:cNvSpPr/>
-          <p:nvPr/>
-        </p:nvSpPr>
-        <p:spPr>
-          <a:xfrm>
-            <a:off x="640080" y="731520"/>
-            <a:ext cx="420624" cy="164592"/>
-          </a:xfrm>
-          <a:prstGeom prst="rect">
-            <a:avLst/>
-          </a:prstGeom>
-          <a:noFill/>
-          <a:ln/>
-        </p:spPr>
-        <p:txBody>
-          <a:bodyPr wrap="square" lIns="0" tIns="0" rIns="0" bIns="0" rtlCol="0" anchor="ctr"/>
-          <a:lstStyle/>
-          <a:p>
-            <a:pPr algn="ctr" indent="0" marL="0">
-              <a:buNone/>
-            </a:pPr>
-            <a:r>
-              <a:rPr lang="en-US" sz="1100" b="1" dirty="0">
-                <a:solidFill>
-                  <a:srgbClr val="FFFFFF"/>
-                </a:solidFill>
-                <a:latin typeface="Aptos" pitchFamily="34" charset="0"/>
-                <a:ea typeface="Aptos" pitchFamily="34" charset="-122"/>
-                <a:cs typeface="Aptos" pitchFamily="34" charset="-120"/>
-              </a:rPr>
-              <a:t>1</a:t>
-            </a:r>
-            <a:endParaRPr lang="en-US" sz="1100" dirty="0"/>
-          </a:p>
-        </p:txBody>
-      </p:sp>
-      <p:sp>
-        <p:nvSpPr>
-          <p:cNvPr id="10" name="Text 8"/>
-          <p:cNvSpPr/>
-          <p:nvPr/>
-        </p:nvSpPr>
-        <p:spPr>
-          <a:xfrm>
-            <a:off x="640080" y="621792"/>
             <a:ext cx="10881360" cy="713232"/>
           </a:xfrm>
           <a:prstGeom prst="rect">
@@ -13448,14 +14999,14 @@
       </p:sp>
       <p:sp>
         <p:nvSpPr>
-          <p:cNvPr id="11" name="Text 9"/>
+          <p:cNvPr id="9" name="Text 7"/>
           <p:cNvSpPr/>
           <p:nvPr/>
         </p:nvSpPr>
         <p:spPr>
           <a:xfrm>
             <a:off x="868680" y="1508760"/>
-            <a:ext cx="6537960" cy="4160520"/>
+            <a:ext cx="6309360" cy="4160520"/>
           </a:xfrm>
           <a:prstGeom prst="rect">
             <a:avLst/>
@@ -13514,18 +15065,18 @@
       </p:sp>
       <p:sp>
         <p:nvSpPr>
-          <p:cNvPr id="12" name="Shape 10"/>
-          <p:cNvSpPr/>
-          <p:nvPr/>
-        </p:nvSpPr>
-        <p:spPr>
-          <a:xfrm>
-            <a:off x="7909560" y="1417320"/>
-            <a:ext cx="3154680" cy="1828800"/>
+          <p:cNvPr id="10" name="Shape 8"/>
+          <p:cNvSpPr/>
+          <p:nvPr/>
+        </p:nvSpPr>
+        <p:spPr>
+          <a:xfrm>
+            <a:off x="7635240" y="1325880"/>
+            <a:ext cx="3474720" cy="1325880"/>
           </a:xfrm>
           <a:prstGeom prst="roundRect">
             <a:avLst>
-              <a:gd name="adj" fmla="val 6000"/>
+              <a:gd name="adj" fmla="val 8276"/>
             </a:avLst>
           </a:prstGeom>
           <a:solidFill>
@@ -13541,14 +15092,14 @@
       </p:sp>
       <p:sp>
         <p:nvSpPr>
-          <p:cNvPr id="13" name="Text 11"/>
-          <p:cNvSpPr/>
-          <p:nvPr/>
-        </p:nvSpPr>
-        <p:spPr>
-          <a:xfrm>
-            <a:off x="8074152" y="1563624"/>
-            <a:ext cx="2825496" cy="256032"/>
+          <p:cNvPr id="11" name="Text 9"/>
+          <p:cNvSpPr/>
+          <p:nvPr/>
+        </p:nvSpPr>
+        <p:spPr>
+          <a:xfrm>
+            <a:off x="7799832" y="1472184"/>
+            <a:ext cx="3145536" cy="256032"/>
           </a:xfrm>
           <a:prstGeom prst="rect">
             <a:avLst/>
@@ -13572,7 +15123,7 @@
                 <a:ea typeface="Aptos" pitchFamily="34" charset="-122"/>
                 <a:cs typeface="Aptos" pitchFamily="34" charset="-120"/>
               </a:rPr>
-              <a:t>Key idea</a:t>
+              <a:t>Data decision</a:t>
             </a:r>
             <a:endParaRPr lang="en-US" sz="1300" dirty="0"/>
           </a:p>
@@ -13580,14 +15131,14 @@
       </p:sp>
       <p:sp>
         <p:nvSpPr>
-          <p:cNvPr id="14" name="Text 12"/>
-          <p:cNvSpPr/>
-          <p:nvPr/>
-        </p:nvSpPr>
-        <p:spPr>
-          <a:xfrm>
-            <a:off x="8074152" y="1920240"/>
-            <a:ext cx="2825496" cy="1188720"/>
+          <p:cNvPr id="12" name="Text 10"/>
+          <p:cNvSpPr/>
+          <p:nvPr/>
+        </p:nvSpPr>
+        <p:spPr>
+          <a:xfrm>
+            <a:off x="7799832" y="1828800"/>
+            <a:ext cx="3145536" cy="685800"/>
           </a:xfrm>
           <a:prstGeom prst="rect">
             <a:avLst/>
@@ -13621,21 +15172,212 @@
       </p:sp>
       <p:sp>
         <p:nvSpPr>
-          <p:cNvPr id="15" name="Shape 13"/>
-          <p:cNvSpPr/>
-          <p:nvPr/>
-        </p:nvSpPr>
-        <p:spPr>
-          <a:xfrm>
-            <a:off x="7909560" y="3520440"/>
-            <a:ext cx="3154680" cy="1737360"/>
+          <p:cNvPr id="13" name="Shape 11"/>
+          <p:cNvSpPr/>
+          <p:nvPr/>
+        </p:nvSpPr>
+        <p:spPr>
+          <a:xfrm>
+            <a:off x="7635240" y="2788920"/>
+            <a:ext cx="3474720" cy="1536192"/>
           </a:xfrm>
           <a:prstGeom prst="roundRect">
             <a:avLst>
-              <a:gd name="adj" fmla="val 6316"/>
+              <a:gd name="adj" fmla="val 7143"/>
             </a:avLst>
           </a:prstGeom>
           <a:solidFill>
+            <a:srgbClr val="FFFFFF">
+              <a:alpha val="88000"/>
+            </a:srgbClr>
+          </a:solidFill>
+          <a:ln w="12700">
+            <a:solidFill>
+              <a:srgbClr val="D6E8F2"/>
+            </a:solidFill>
+            <a:prstDash val="solid"/>
+          </a:ln>
+        </p:spPr>
+      </p:sp>
+      <p:sp>
+        <p:nvSpPr>
+          <p:cNvPr id="14" name="Shape 12"/>
+          <p:cNvSpPr/>
+          <p:nvPr/>
+        </p:nvSpPr>
+        <p:spPr>
+          <a:xfrm>
+            <a:off x="8138160" y="3474720"/>
+            <a:ext cx="256032" cy="411480"/>
+          </a:xfrm>
+          <a:prstGeom prst="rect">
+            <a:avLst/>
+          </a:prstGeom>
+          <a:solidFill>
+            <a:srgbClr val="0068B7"/>
+          </a:solidFill>
+          <a:ln w="12700">
+            <a:solidFill>
+              <a:srgbClr val="0068B7"/>
+            </a:solidFill>
+            <a:prstDash val="solid"/>
+          </a:ln>
+        </p:spPr>
+      </p:sp>
+      <p:sp>
+        <p:nvSpPr>
+          <p:cNvPr id="15" name="Shape 13"/>
+          <p:cNvSpPr/>
+          <p:nvPr/>
+        </p:nvSpPr>
+        <p:spPr>
+          <a:xfrm>
+            <a:off x="8577072" y="3172968"/>
+            <a:ext cx="256032" cy="713232"/>
+          </a:xfrm>
+          <a:prstGeom prst="rect">
+            <a:avLst/>
+          </a:prstGeom>
+          <a:solidFill>
+            <a:srgbClr val="2F8A28"/>
+          </a:solidFill>
+          <a:ln w="12700">
+            <a:solidFill>
+              <a:srgbClr val="2F8A28"/>
+            </a:solidFill>
+            <a:prstDash val="solid"/>
+          </a:ln>
+        </p:spPr>
+      </p:sp>
+      <p:sp>
+        <p:nvSpPr>
+          <p:cNvPr id="16" name="Shape 14"/>
+          <p:cNvSpPr/>
+          <p:nvPr/>
+        </p:nvSpPr>
+        <p:spPr>
+          <a:xfrm>
+            <a:off x="9015984" y="2880360"/>
+            <a:ext cx="256032" cy="1005840"/>
+          </a:xfrm>
+          <a:prstGeom prst="rect">
+            <a:avLst/>
+          </a:prstGeom>
+          <a:solidFill>
+            <a:srgbClr val="D69A2D"/>
+          </a:solidFill>
+          <a:ln w="12700">
+            <a:solidFill>
+              <a:srgbClr val="D69A2D"/>
+            </a:solidFill>
+            <a:prstDash val="solid"/>
+          </a:ln>
+        </p:spPr>
+      </p:sp>
+      <p:sp>
+        <p:nvSpPr>
+          <p:cNvPr id="17" name="Shape 15"/>
+          <p:cNvSpPr/>
+          <p:nvPr/>
+        </p:nvSpPr>
+        <p:spPr>
+          <a:xfrm>
+            <a:off x="9454896" y="3319272"/>
+            <a:ext cx="256032" cy="566928"/>
+          </a:xfrm>
+          <a:prstGeom prst="rect">
+            <a:avLst/>
+          </a:prstGeom>
+          <a:solidFill>
+            <a:srgbClr val="6A4CA3"/>
+          </a:solidFill>
+          <a:ln w="12700">
+            <a:solidFill>
+              <a:srgbClr val="6A4CA3"/>
+            </a:solidFill>
+            <a:prstDash val="solid"/>
+          </a:ln>
+        </p:spPr>
+      </p:sp>
+      <p:sp>
+        <p:nvSpPr>
+          <p:cNvPr id="18" name="Shape 16"/>
+          <p:cNvSpPr/>
+          <p:nvPr/>
+        </p:nvSpPr>
+        <p:spPr>
+          <a:xfrm>
+            <a:off x="8019288" y="3886200"/>
+            <a:ext cx="2706624" cy="0"/>
+          </a:xfrm>
+          <a:prstGeom prst="line">
+            <a:avLst/>
+          </a:prstGeom>
+          <a:noFill/>
+          <a:ln w="15240">
+            <a:solidFill>
+              <a:srgbClr val="003A63"/>
+            </a:solidFill>
+            <a:prstDash val="solid"/>
+          </a:ln>
+        </p:spPr>
+      </p:sp>
+      <p:sp>
+        <p:nvSpPr>
+          <p:cNvPr id="19" name="Text 17"/>
+          <p:cNvSpPr/>
+          <p:nvPr/>
+        </p:nvSpPr>
+        <p:spPr>
+          <a:xfrm>
+            <a:off x="7863840" y="3017520"/>
+            <a:ext cx="3017520" cy="201168"/>
+          </a:xfrm>
+          <a:prstGeom prst="rect">
+            <a:avLst/>
+          </a:prstGeom>
+          <a:noFill/>
+          <a:ln/>
+        </p:spPr>
+        <p:txBody>
+          <a:bodyPr wrap="square" lIns="0" tIns="0" rIns="0" bIns="0" rtlCol="0" anchor="ctr"/>
+          <a:lstStyle/>
+          <a:p>
+            <a:pPr algn="ctr" indent="0" marL="0">
+              <a:buNone/>
+            </a:pPr>
+            <a:r>
+              <a:rPr lang="en-US" sz="1050" b="1" dirty="0">
+                <a:solidFill>
+                  <a:srgbClr val="003A63"/>
+                </a:solidFill>
+                <a:latin typeface="Aptos" pitchFamily="34" charset="0"/>
+                <a:ea typeface="Aptos" pitchFamily="34" charset="-122"/>
+                <a:cs typeface="Aptos" pitchFamily="34" charset="-120"/>
+              </a:rPr>
+              <a:t>Measure and monitor</a:t>
+            </a:r>
+            <a:endParaRPr lang="en-US" sz="1050" dirty="0"/>
+          </a:p>
+        </p:txBody>
+      </p:sp>
+      <p:sp>
+        <p:nvSpPr>
+          <p:cNvPr id="20" name="Shape 18"/>
+          <p:cNvSpPr/>
+          <p:nvPr/>
+        </p:nvSpPr>
+        <p:spPr>
+          <a:xfrm>
+            <a:off x="7635240" y="4498848"/>
+            <a:ext cx="3474720" cy="1143000"/>
+          </a:xfrm>
+          <a:prstGeom prst="roundRect">
+            <a:avLst>
+              <a:gd name="adj" fmla="val 9600"/>
+            </a:avLst>
+          </a:prstGeom>
+          <a:solidFill>
             <a:srgbClr val="EAF6F8"/>
           </a:solidFill>
           <a:ln w="12700">
@@ -13648,14 +15390,14 @@
       </p:sp>
       <p:sp>
         <p:nvSpPr>
-          <p:cNvPr id="16" name="Text 14"/>
-          <p:cNvSpPr/>
-          <p:nvPr/>
-        </p:nvSpPr>
-        <p:spPr>
-          <a:xfrm>
-            <a:off x="8074152" y="3666744"/>
-            <a:ext cx="2825496" cy="256032"/>
+          <p:cNvPr id="21" name="Text 19"/>
+          <p:cNvSpPr/>
+          <p:nvPr/>
+        </p:nvSpPr>
+        <p:spPr>
+          <a:xfrm>
+            <a:off x="7799832" y="4645152"/>
+            <a:ext cx="3145536" cy="256032"/>
           </a:xfrm>
           <a:prstGeom prst="rect">
             <a:avLst/>
@@ -13679,7 +15421,7 @@
                 <a:ea typeface="Aptos" pitchFamily="34" charset="-122"/>
                 <a:cs typeface="Aptos" pitchFamily="34" charset="-120"/>
               </a:rPr>
-              <a:t>Use this for</a:t>
+              <a:t>How to validate</a:t>
             </a:r>
             <a:endParaRPr lang="en-US" sz="1300" dirty="0"/>
           </a:p>
@@ -13687,14 +15429,14 @@
       </p:sp>
       <p:sp>
         <p:nvSpPr>
-          <p:cNvPr id="17" name="Text 15"/>
-          <p:cNvSpPr/>
-          <p:nvPr/>
-        </p:nvSpPr>
-        <p:spPr>
-          <a:xfrm>
-            <a:off x="8074152" y="4023360"/>
-            <a:ext cx="2825496" cy="1097280"/>
+          <p:cNvPr id="22" name="Text 20"/>
+          <p:cNvSpPr/>
+          <p:nvPr/>
+        </p:nvSpPr>
+        <p:spPr>
+          <a:xfrm>
+            <a:off x="7799832" y="5001768"/>
+            <a:ext cx="3145536" cy="502920"/>
           </a:xfrm>
           <a:prstGeom prst="rect">
             <a:avLst/>
@@ -13720,7 +15462,7 @@
                 <a:ea typeface="Aptos" pitchFamily="34" charset="-122"/>
                 <a:cs typeface="Aptos" pitchFamily="34" charset="-120"/>
               </a:rPr>
-              <a:t>Connect the concept to public health decisions, safeguards, documentation, or implementation work.</a:t>
+              <a:t>Use the assignment to test whether you can explain the concept, apply it to a realistic public health situation, and identify what would need review before the work moves forward.</a:t>
             </a:r>
             <a:endParaRPr lang="en-US" sz="1550" dirty="0"/>
           </a:p>
@@ -13894,8 +15636,8 @@
         </p:nvSpPr>
         <p:spPr>
           <a:xfrm>
-            <a:off x="9966960" y="6537960"/>
-            <a:ext cx="1645920" cy="201168"/>
+            <a:off x="9646920" y="6537960"/>
+            <a:ext cx="1965960" cy="201168"/>
           </a:xfrm>
           <a:prstGeom prst="rect">
             <a:avLst/>
@@ -13919,7 +15661,7 @@
                 <a:ea typeface="Aptos" pitchFamily="34" charset="-122"/>
                 <a:cs typeface="Aptos" pitchFamily="34" charset="-120"/>
               </a:rPr>
-              <a:t>Â© Paula Soper</a:t>
+              <a:t>Copyright Paula Soper</a:t>
             </a:r>
             <a:endParaRPr lang="en-US" sz="800" dirty="0"/>
           </a:p>
@@ -14014,7 +15756,7 @@
         <p:spPr>
           <a:xfrm>
             <a:off x="868680" y="1508760"/>
-            <a:ext cx="6537960" cy="4160520"/>
+            <a:ext cx="6309360" cy="4160520"/>
           </a:xfrm>
           <a:prstGeom prst="rect">
             <a:avLst/>
@@ -14051,12 +15793,12 @@
         </p:nvSpPr>
         <p:spPr>
           <a:xfrm>
-            <a:off x="7909560" y="1417320"/>
-            <a:ext cx="3154680" cy="1828800"/>
+            <a:off x="7635240" y="1325880"/>
+            <a:ext cx="3474720" cy="1325880"/>
           </a:xfrm>
           <a:prstGeom prst="roundRect">
             <a:avLst>
-              <a:gd name="adj" fmla="val 6000"/>
+              <a:gd name="adj" fmla="val 8276"/>
             </a:avLst>
           </a:prstGeom>
           <a:solidFill>
@@ -14078,8 +15820,8 @@
         </p:nvSpPr>
         <p:spPr>
           <a:xfrm>
-            <a:off x="8074152" y="1563624"/>
-            <a:ext cx="2825496" cy="256032"/>
+            <a:off x="7799832" y="1472184"/>
+            <a:ext cx="3145536" cy="256032"/>
           </a:xfrm>
           <a:prstGeom prst="rect">
             <a:avLst/>
@@ -14103,7 +15845,7 @@
                 <a:ea typeface="Aptos" pitchFamily="34" charset="-122"/>
                 <a:cs typeface="Aptos" pitchFamily="34" charset="-120"/>
               </a:rPr>
-              <a:t>Key idea</a:t>
+              <a:t>Data decision</a:t>
             </a:r>
             <a:endParaRPr lang="en-US" sz="1300" dirty="0"/>
           </a:p>
@@ -14117,8 +15859,8 @@
         </p:nvSpPr>
         <p:spPr>
           <a:xfrm>
-            <a:off x="8074152" y="1920240"/>
-            <a:ext cx="2825496" cy="1188720"/>
+            <a:off x="7799832" y="1828800"/>
+            <a:ext cx="3145536" cy="685800"/>
           </a:xfrm>
           <a:prstGeom prst="rect">
             <a:avLst/>
@@ -14158,15 +15900,206 @@
         </p:nvSpPr>
         <p:spPr>
           <a:xfrm>
-            <a:off x="7909560" y="3520440"/>
-            <a:ext cx="3154680" cy="1737360"/>
+            <a:off x="7635240" y="2788920"/>
+            <a:ext cx="3474720" cy="1536192"/>
           </a:xfrm>
           <a:prstGeom prst="roundRect">
             <a:avLst>
-              <a:gd name="adj" fmla="val 6316"/>
+              <a:gd name="adj" fmla="val 7143"/>
             </a:avLst>
           </a:prstGeom>
           <a:solidFill>
+            <a:srgbClr val="FFFFFF">
+              <a:alpha val="88000"/>
+            </a:srgbClr>
+          </a:solidFill>
+          <a:ln w="12700">
+            <a:solidFill>
+              <a:srgbClr val="D6E8F2"/>
+            </a:solidFill>
+            <a:prstDash val="solid"/>
+          </a:ln>
+        </p:spPr>
+      </p:sp>
+      <p:sp>
+        <p:nvSpPr>
+          <p:cNvPr id="14" name="Shape 12"/>
+          <p:cNvSpPr/>
+          <p:nvPr/>
+        </p:nvSpPr>
+        <p:spPr>
+          <a:xfrm>
+            <a:off x="8138160" y="3474720"/>
+            <a:ext cx="256032" cy="411480"/>
+          </a:xfrm>
+          <a:prstGeom prst="rect">
+            <a:avLst/>
+          </a:prstGeom>
+          <a:solidFill>
+            <a:srgbClr val="0068B7"/>
+          </a:solidFill>
+          <a:ln w="12700">
+            <a:solidFill>
+              <a:srgbClr val="0068B7"/>
+            </a:solidFill>
+            <a:prstDash val="solid"/>
+          </a:ln>
+        </p:spPr>
+      </p:sp>
+      <p:sp>
+        <p:nvSpPr>
+          <p:cNvPr id="15" name="Shape 13"/>
+          <p:cNvSpPr/>
+          <p:nvPr/>
+        </p:nvSpPr>
+        <p:spPr>
+          <a:xfrm>
+            <a:off x="8577072" y="3172968"/>
+            <a:ext cx="256032" cy="713232"/>
+          </a:xfrm>
+          <a:prstGeom prst="rect">
+            <a:avLst/>
+          </a:prstGeom>
+          <a:solidFill>
+            <a:srgbClr val="2F8A28"/>
+          </a:solidFill>
+          <a:ln w="12700">
+            <a:solidFill>
+              <a:srgbClr val="2F8A28"/>
+            </a:solidFill>
+            <a:prstDash val="solid"/>
+          </a:ln>
+        </p:spPr>
+      </p:sp>
+      <p:sp>
+        <p:nvSpPr>
+          <p:cNvPr id="16" name="Shape 14"/>
+          <p:cNvSpPr/>
+          <p:nvPr/>
+        </p:nvSpPr>
+        <p:spPr>
+          <a:xfrm>
+            <a:off x="9015984" y="2880360"/>
+            <a:ext cx="256032" cy="1005840"/>
+          </a:xfrm>
+          <a:prstGeom prst="rect">
+            <a:avLst/>
+          </a:prstGeom>
+          <a:solidFill>
+            <a:srgbClr val="D69A2D"/>
+          </a:solidFill>
+          <a:ln w="12700">
+            <a:solidFill>
+              <a:srgbClr val="D69A2D"/>
+            </a:solidFill>
+            <a:prstDash val="solid"/>
+          </a:ln>
+        </p:spPr>
+      </p:sp>
+      <p:sp>
+        <p:nvSpPr>
+          <p:cNvPr id="17" name="Shape 15"/>
+          <p:cNvSpPr/>
+          <p:nvPr/>
+        </p:nvSpPr>
+        <p:spPr>
+          <a:xfrm>
+            <a:off x="9454896" y="3319272"/>
+            <a:ext cx="256032" cy="566928"/>
+          </a:xfrm>
+          <a:prstGeom prst="rect">
+            <a:avLst/>
+          </a:prstGeom>
+          <a:solidFill>
+            <a:srgbClr val="6A4CA3"/>
+          </a:solidFill>
+          <a:ln w="12700">
+            <a:solidFill>
+              <a:srgbClr val="6A4CA3"/>
+            </a:solidFill>
+            <a:prstDash val="solid"/>
+          </a:ln>
+        </p:spPr>
+      </p:sp>
+      <p:sp>
+        <p:nvSpPr>
+          <p:cNvPr id="18" name="Shape 16"/>
+          <p:cNvSpPr/>
+          <p:nvPr/>
+        </p:nvSpPr>
+        <p:spPr>
+          <a:xfrm>
+            <a:off x="8019288" y="3886200"/>
+            <a:ext cx="2706624" cy="0"/>
+          </a:xfrm>
+          <a:prstGeom prst="line">
+            <a:avLst/>
+          </a:prstGeom>
+          <a:noFill/>
+          <a:ln w="15240">
+            <a:solidFill>
+              <a:srgbClr val="003A63"/>
+            </a:solidFill>
+            <a:prstDash val="solid"/>
+          </a:ln>
+        </p:spPr>
+      </p:sp>
+      <p:sp>
+        <p:nvSpPr>
+          <p:cNvPr id="19" name="Text 17"/>
+          <p:cNvSpPr/>
+          <p:nvPr/>
+        </p:nvSpPr>
+        <p:spPr>
+          <a:xfrm>
+            <a:off x="7863840" y="3017520"/>
+            <a:ext cx="3017520" cy="201168"/>
+          </a:xfrm>
+          <a:prstGeom prst="rect">
+            <a:avLst/>
+          </a:prstGeom>
+          <a:noFill/>
+          <a:ln/>
+        </p:spPr>
+        <p:txBody>
+          <a:bodyPr wrap="square" lIns="0" tIns="0" rIns="0" bIns="0" rtlCol="0" anchor="ctr"/>
+          <a:lstStyle/>
+          <a:p>
+            <a:pPr algn="ctr" indent="0" marL="0">
+              <a:buNone/>
+            </a:pPr>
+            <a:r>
+              <a:rPr lang="en-US" sz="1050" b="1" dirty="0">
+                <a:solidFill>
+                  <a:srgbClr val="003A63"/>
+                </a:solidFill>
+                <a:latin typeface="Aptos" pitchFamily="34" charset="0"/>
+                <a:ea typeface="Aptos" pitchFamily="34" charset="-122"/>
+                <a:cs typeface="Aptos" pitchFamily="34" charset="-120"/>
+              </a:rPr>
+              <a:t>Measure and monitor</a:t>
+            </a:r>
+            <a:endParaRPr lang="en-US" sz="1050" dirty="0"/>
+          </a:p>
+        </p:txBody>
+      </p:sp>
+      <p:sp>
+        <p:nvSpPr>
+          <p:cNvPr id="20" name="Shape 18"/>
+          <p:cNvSpPr/>
+          <p:nvPr/>
+        </p:nvSpPr>
+        <p:spPr>
+          <a:xfrm>
+            <a:off x="7635240" y="4498848"/>
+            <a:ext cx="3474720" cy="1143000"/>
+          </a:xfrm>
+          <a:prstGeom prst="roundRect">
+            <a:avLst>
+              <a:gd name="adj" fmla="val 9600"/>
+            </a:avLst>
+          </a:prstGeom>
+          <a:solidFill>
             <a:srgbClr val="EAF6F8"/>
           </a:solidFill>
           <a:ln w="12700">
@@ -14179,14 +16112,14 @@
       </p:sp>
       <p:sp>
         <p:nvSpPr>
-          <p:cNvPr id="14" name="Text 12"/>
-          <p:cNvSpPr/>
-          <p:nvPr/>
-        </p:nvSpPr>
-        <p:spPr>
-          <a:xfrm>
-            <a:off x="8074152" y="3666744"/>
-            <a:ext cx="2825496" cy="256032"/>
+          <p:cNvPr id="21" name="Text 19"/>
+          <p:cNvSpPr/>
+          <p:nvPr/>
+        </p:nvSpPr>
+        <p:spPr>
+          <a:xfrm>
+            <a:off x="7799832" y="4645152"/>
+            <a:ext cx="3145536" cy="256032"/>
           </a:xfrm>
           <a:prstGeom prst="rect">
             <a:avLst/>
@@ -14210,7 +16143,7 @@
                 <a:ea typeface="Aptos" pitchFamily="34" charset="-122"/>
                 <a:cs typeface="Aptos" pitchFamily="34" charset="-120"/>
               </a:rPr>
-              <a:t>Use this for</a:t>
+              <a:t>How to validate</a:t>
             </a:r>
             <a:endParaRPr lang="en-US" sz="1300" dirty="0"/>
           </a:p>
@@ -14218,14 +16151,14 @@
       </p:sp>
       <p:sp>
         <p:nvSpPr>
-          <p:cNvPr id="15" name="Text 13"/>
-          <p:cNvSpPr/>
-          <p:nvPr/>
-        </p:nvSpPr>
-        <p:spPr>
-          <a:xfrm>
-            <a:off x="8074152" y="4023360"/>
-            <a:ext cx="2825496" cy="1097280"/>
+          <p:cNvPr id="22" name="Text 20"/>
+          <p:cNvSpPr/>
+          <p:nvPr/>
+        </p:nvSpPr>
+        <p:spPr>
+          <a:xfrm>
+            <a:off x="7799832" y="5001768"/>
+            <a:ext cx="3145536" cy="502920"/>
           </a:xfrm>
           <a:prstGeom prst="rect">
             <a:avLst/>
@@ -14251,7 +16184,7 @@
                 <a:ea typeface="Aptos" pitchFamily="34" charset="-122"/>
                 <a:cs typeface="Aptos" pitchFamily="34" charset="-120"/>
               </a:rPr>
-              <a:t>Connect the concept to public health decisions, safeguards, documentation, or implementation work.</a:t>
+              <a:t>Use the assignment to test whether you can explain the concept, apply it to a realistic public health situation, and identify what would need review before the work moves forward.</a:t>
             </a:r>
             <a:endParaRPr lang="en-US" sz="1550" dirty="0"/>
           </a:p>
@@ -14425,8 +16358,8 @@
         </p:nvSpPr>
         <p:spPr>
           <a:xfrm>
-            <a:off x="9966960" y="6537960"/>
-            <a:ext cx="1645920" cy="201168"/>
+            <a:off x="9646920" y="6537960"/>
+            <a:ext cx="1965960" cy="201168"/>
           </a:xfrm>
           <a:prstGeom prst="rect">
             <a:avLst/>
@@ -14450,7 +16383,7 @@
                 <a:ea typeface="Aptos" pitchFamily="34" charset="-122"/>
                 <a:cs typeface="Aptos" pitchFamily="34" charset="-120"/>
               </a:rPr>
-              <a:t>Â© Paula Soper</a:t>
+              <a:t>Copyright Paula Soper</a:t>
             </a:r>
             <a:endParaRPr lang="en-US" sz="800" dirty="0"/>
           </a:p>
@@ -14497,77 +16430,13 @@
       </p:sp>
       <p:sp>
         <p:nvSpPr>
-          <p:cNvPr id="8" name="Shape 6"/>
+          <p:cNvPr id="8" name="Text 6"/>
           <p:cNvSpPr/>
           <p:nvPr/>
         </p:nvSpPr>
         <p:spPr>
           <a:xfrm>
             <a:off x="640080" y="658368"/>
-            <a:ext cx="420624" cy="420624"/>
-          </a:xfrm>
-          <a:prstGeom prst="ellipse">
-            <a:avLst/>
-          </a:prstGeom>
-          <a:solidFill>
-            <a:srgbClr val="0068B7"/>
-          </a:solidFill>
-          <a:ln w="12700">
-            <a:solidFill>
-              <a:srgbClr val="0068B7"/>
-            </a:solidFill>
-            <a:prstDash val="solid"/>
-          </a:ln>
-        </p:spPr>
-      </p:sp>
-      <p:sp>
-        <p:nvSpPr>
-          <p:cNvPr id="9" name="Text 7"/>
-          <p:cNvSpPr/>
-          <p:nvPr/>
-        </p:nvSpPr>
-        <p:spPr>
-          <a:xfrm>
-            <a:off x="640080" y="731520"/>
-            <a:ext cx="420624" cy="164592"/>
-          </a:xfrm>
-          <a:prstGeom prst="rect">
-            <a:avLst/>
-          </a:prstGeom>
-          <a:noFill/>
-          <a:ln/>
-        </p:spPr>
-        <p:txBody>
-          <a:bodyPr wrap="square" lIns="0" tIns="0" rIns="0" bIns="0" rtlCol="0" anchor="ctr"/>
-          <a:lstStyle/>
-          <a:p>
-            <a:pPr algn="ctr" indent="0" marL="0">
-              <a:buNone/>
-            </a:pPr>
-            <a:r>
-              <a:rPr lang="en-US" sz="1100" b="1" dirty="0">
-                <a:solidFill>
-                  <a:srgbClr val="FFFFFF"/>
-                </a:solidFill>
-                <a:latin typeface="Aptos" pitchFamily="34" charset="0"/>
-                <a:ea typeface="Aptos" pitchFamily="34" charset="-122"/>
-                <a:cs typeface="Aptos" pitchFamily="34" charset="-120"/>
-              </a:rPr>
-              <a:t>2</a:t>
-            </a:r>
-            <a:endParaRPr lang="en-US" sz="1100" dirty="0"/>
-          </a:p>
-        </p:txBody>
-      </p:sp>
-      <p:sp>
-        <p:nvSpPr>
-          <p:cNvPr id="10" name="Text 8"/>
-          <p:cNvSpPr/>
-          <p:nvPr/>
-        </p:nvSpPr>
-        <p:spPr>
-          <a:xfrm>
-            <a:off x="640080" y="621792"/>
             <a:ext cx="10881360" cy="713232"/>
           </a:xfrm>
           <a:prstGeom prst="rect">
@@ -14602,14 +16471,14 @@
       </p:sp>
       <p:sp>
         <p:nvSpPr>
-          <p:cNvPr id="11" name="Text 9"/>
+          <p:cNvPr id="9" name="Text 7"/>
           <p:cNvSpPr/>
           <p:nvPr/>
         </p:nvSpPr>
         <p:spPr>
           <a:xfrm>
             <a:off x="868680" y="1508760"/>
-            <a:ext cx="6537960" cy="4160520"/>
+            <a:ext cx="6309360" cy="4160520"/>
           </a:xfrm>
           <a:prstGeom prst="rect">
             <a:avLst/>
@@ -14668,18 +16537,18 @@
       </p:sp>
       <p:sp>
         <p:nvSpPr>
-          <p:cNvPr id="12" name="Shape 10"/>
-          <p:cNvSpPr/>
-          <p:nvPr/>
-        </p:nvSpPr>
-        <p:spPr>
-          <a:xfrm>
-            <a:off x="7909560" y="1417320"/>
-            <a:ext cx="3154680" cy="1828800"/>
+          <p:cNvPr id="10" name="Shape 8"/>
+          <p:cNvSpPr/>
+          <p:nvPr/>
+        </p:nvSpPr>
+        <p:spPr>
+          <a:xfrm>
+            <a:off x="7635240" y="1325880"/>
+            <a:ext cx="3474720" cy="1325880"/>
           </a:xfrm>
           <a:prstGeom prst="roundRect">
             <a:avLst>
-              <a:gd name="adj" fmla="val 6000"/>
+              <a:gd name="adj" fmla="val 8276"/>
             </a:avLst>
           </a:prstGeom>
           <a:solidFill>
@@ -14695,14 +16564,14 @@
       </p:sp>
       <p:sp>
         <p:nvSpPr>
-          <p:cNvPr id="13" name="Text 11"/>
-          <p:cNvSpPr/>
-          <p:nvPr/>
-        </p:nvSpPr>
-        <p:spPr>
-          <a:xfrm>
-            <a:off x="8074152" y="1563624"/>
-            <a:ext cx="2825496" cy="256032"/>
+          <p:cNvPr id="11" name="Text 9"/>
+          <p:cNvSpPr/>
+          <p:nvPr/>
+        </p:nvSpPr>
+        <p:spPr>
+          <a:xfrm>
+            <a:off x="7799832" y="1472184"/>
+            <a:ext cx="3145536" cy="256032"/>
           </a:xfrm>
           <a:prstGeom prst="rect">
             <a:avLst/>
@@ -14726,7 +16595,7 @@
                 <a:ea typeface="Aptos" pitchFamily="34" charset="-122"/>
                 <a:cs typeface="Aptos" pitchFamily="34" charset="-120"/>
               </a:rPr>
-              <a:t>Key idea</a:t>
+              <a:t>Data decision</a:t>
             </a:r>
             <a:endParaRPr lang="en-US" sz="1300" dirty="0"/>
           </a:p>
@@ -14734,14 +16603,14 @@
       </p:sp>
       <p:sp>
         <p:nvSpPr>
-          <p:cNvPr id="14" name="Text 12"/>
-          <p:cNvSpPr/>
-          <p:nvPr/>
-        </p:nvSpPr>
-        <p:spPr>
-          <a:xfrm>
-            <a:off x="8074152" y="1920240"/>
-            <a:ext cx="2825496" cy="1188720"/>
+          <p:cNvPr id="12" name="Text 10"/>
+          <p:cNvSpPr/>
+          <p:nvPr/>
+        </p:nvSpPr>
+        <p:spPr>
+          <a:xfrm>
+            <a:off x="7799832" y="1828800"/>
+            <a:ext cx="3145536" cy="685800"/>
           </a:xfrm>
           <a:prstGeom prst="rect">
             <a:avLst/>
@@ -14775,21 +16644,212 @@
       </p:sp>
       <p:sp>
         <p:nvSpPr>
-          <p:cNvPr id="15" name="Shape 13"/>
-          <p:cNvSpPr/>
-          <p:nvPr/>
-        </p:nvSpPr>
-        <p:spPr>
-          <a:xfrm>
-            <a:off x="7909560" y="3520440"/>
-            <a:ext cx="3154680" cy="1737360"/>
+          <p:cNvPr id="13" name="Shape 11"/>
+          <p:cNvSpPr/>
+          <p:nvPr/>
+        </p:nvSpPr>
+        <p:spPr>
+          <a:xfrm>
+            <a:off x="7635240" y="2788920"/>
+            <a:ext cx="3474720" cy="1536192"/>
           </a:xfrm>
           <a:prstGeom prst="roundRect">
             <a:avLst>
-              <a:gd name="adj" fmla="val 6316"/>
+              <a:gd name="adj" fmla="val 7143"/>
             </a:avLst>
           </a:prstGeom>
           <a:solidFill>
+            <a:srgbClr val="FFFFFF">
+              <a:alpha val="88000"/>
+            </a:srgbClr>
+          </a:solidFill>
+          <a:ln w="12700">
+            <a:solidFill>
+              <a:srgbClr val="D6E8F2"/>
+            </a:solidFill>
+            <a:prstDash val="solid"/>
+          </a:ln>
+        </p:spPr>
+      </p:sp>
+      <p:sp>
+        <p:nvSpPr>
+          <p:cNvPr id="14" name="Shape 12"/>
+          <p:cNvSpPr/>
+          <p:nvPr/>
+        </p:nvSpPr>
+        <p:spPr>
+          <a:xfrm>
+            <a:off x="8138160" y="3474720"/>
+            <a:ext cx="256032" cy="411480"/>
+          </a:xfrm>
+          <a:prstGeom prst="rect">
+            <a:avLst/>
+          </a:prstGeom>
+          <a:solidFill>
+            <a:srgbClr val="0068B7"/>
+          </a:solidFill>
+          <a:ln w="12700">
+            <a:solidFill>
+              <a:srgbClr val="0068B7"/>
+            </a:solidFill>
+            <a:prstDash val="solid"/>
+          </a:ln>
+        </p:spPr>
+      </p:sp>
+      <p:sp>
+        <p:nvSpPr>
+          <p:cNvPr id="15" name="Shape 13"/>
+          <p:cNvSpPr/>
+          <p:nvPr/>
+        </p:nvSpPr>
+        <p:spPr>
+          <a:xfrm>
+            <a:off x="8577072" y="3172968"/>
+            <a:ext cx="256032" cy="713232"/>
+          </a:xfrm>
+          <a:prstGeom prst="rect">
+            <a:avLst/>
+          </a:prstGeom>
+          <a:solidFill>
+            <a:srgbClr val="2F8A28"/>
+          </a:solidFill>
+          <a:ln w="12700">
+            <a:solidFill>
+              <a:srgbClr val="2F8A28"/>
+            </a:solidFill>
+            <a:prstDash val="solid"/>
+          </a:ln>
+        </p:spPr>
+      </p:sp>
+      <p:sp>
+        <p:nvSpPr>
+          <p:cNvPr id="16" name="Shape 14"/>
+          <p:cNvSpPr/>
+          <p:nvPr/>
+        </p:nvSpPr>
+        <p:spPr>
+          <a:xfrm>
+            <a:off x="9015984" y="2880360"/>
+            <a:ext cx="256032" cy="1005840"/>
+          </a:xfrm>
+          <a:prstGeom prst="rect">
+            <a:avLst/>
+          </a:prstGeom>
+          <a:solidFill>
+            <a:srgbClr val="D69A2D"/>
+          </a:solidFill>
+          <a:ln w="12700">
+            <a:solidFill>
+              <a:srgbClr val="D69A2D"/>
+            </a:solidFill>
+            <a:prstDash val="solid"/>
+          </a:ln>
+        </p:spPr>
+      </p:sp>
+      <p:sp>
+        <p:nvSpPr>
+          <p:cNvPr id="17" name="Shape 15"/>
+          <p:cNvSpPr/>
+          <p:nvPr/>
+        </p:nvSpPr>
+        <p:spPr>
+          <a:xfrm>
+            <a:off x="9454896" y="3319272"/>
+            <a:ext cx="256032" cy="566928"/>
+          </a:xfrm>
+          <a:prstGeom prst="rect">
+            <a:avLst/>
+          </a:prstGeom>
+          <a:solidFill>
+            <a:srgbClr val="6A4CA3"/>
+          </a:solidFill>
+          <a:ln w="12700">
+            <a:solidFill>
+              <a:srgbClr val="6A4CA3"/>
+            </a:solidFill>
+            <a:prstDash val="solid"/>
+          </a:ln>
+        </p:spPr>
+      </p:sp>
+      <p:sp>
+        <p:nvSpPr>
+          <p:cNvPr id="18" name="Shape 16"/>
+          <p:cNvSpPr/>
+          <p:nvPr/>
+        </p:nvSpPr>
+        <p:spPr>
+          <a:xfrm>
+            <a:off x="8019288" y="3886200"/>
+            <a:ext cx="2706624" cy="0"/>
+          </a:xfrm>
+          <a:prstGeom prst="line">
+            <a:avLst/>
+          </a:prstGeom>
+          <a:noFill/>
+          <a:ln w="15240">
+            <a:solidFill>
+              <a:srgbClr val="003A63"/>
+            </a:solidFill>
+            <a:prstDash val="solid"/>
+          </a:ln>
+        </p:spPr>
+      </p:sp>
+      <p:sp>
+        <p:nvSpPr>
+          <p:cNvPr id="19" name="Text 17"/>
+          <p:cNvSpPr/>
+          <p:nvPr/>
+        </p:nvSpPr>
+        <p:spPr>
+          <a:xfrm>
+            <a:off x="7863840" y="3017520"/>
+            <a:ext cx="3017520" cy="201168"/>
+          </a:xfrm>
+          <a:prstGeom prst="rect">
+            <a:avLst/>
+          </a:prstGeom>
+          <a:noFill/>
+          <a:ln/>
+        </p:spPr>
+        <p:txBody>
+          <a:bodyPr wrap="square" lIns="0" tIns="0" rIns="0" bIns="0" rtlCol="0" anchor="ctr"/>
+          <a:lstStyle/>
+          <a:p>
+            <a:pPr algn="ctr" indent="0" marL="0">
+              <a:buNone/>
+            </a:pPr>
+            <a:r>
+              <a:rPr lang="en-US" sz="1050" b="1" dirty="0">
+                <a:solidFill>
+                  <a:srgbClr val="003A63"/>
+                </a:solidFill>
+                <a:latin typeface="Aptos" pitchFamily="34" charset="0"/>
+                <a:ea typeface="Aptos" pitchFamily="34" charset="-122"/>
+                <a:cs typeface="Aptos" pitchFamily="34" charset="-120"/>
+              </a:rPr>
+              <a:t>Measure and monitor</a:t>
+            </a:r>
+            <a:endParaRPr lang="en-US" sz="1050" dirty="0"/>
+          </a:p>
+        </p:txBody>
+      </p:sp>
+      <p:sp>
+        <p:nvSpPr>
+          <p:cNvPr id="20" name="Shape 18"/>
+          <p:cNvSpPr/>
+          <p:nvPr/>
+        </p:nvSpPr>
+        <p:spPr>
+          <a:xfrm>
+            <a:off x="7635240" y="4498848"/>
+            <a:ext cx="3474720" cy="1143000"/>
+          </a:xfrm>
+          <a:prstGeom prst="roundRect">
+            <a:avLst>
+              <a:gd name="adj" fmla="val 9600"/>
+            </a:avLst>
+          </a:prstGeom>
+          <a:solidFill>
             <a:srgbClr val="EAF6F8"/>
           </a:solidFill>
           <a:ln w="12700">
@@ -14802,14 +16862,14 @@
       </p:sp>
       <p:sp>
         <p:nvSpPr>
-          <p:cNvPr id="16" name="Text 14"/>
-          <p:cNvSpPr/>
-          <p:nvPr/>
-        </p:nvSpPr>
-        <p:spPr>
-          <a:xfrm>
-            <a:off x="8074152" y="3666744"/>
-            <a:ext cx="2825496" cy="256032"/>
+          <p:cNvPr id="21" name="Text 19"/>
+          <p:cNvSpPr/>
+          <p:nvPr/>
+        </p:nvSpPr>
+        <p:spPr>
+          <a:xfrm>
+            <a:off x="7799832" y="4645152"/>
+            <a:ext cx="3145536" cy="256032"/>
           </a:xfrm>
           <a:prstGeom prst="rect">
             <a:avLst/>
@@ -14833,7 +16893,7 @@
                 <a:ea typeface="Aptos" pitchFamily="34" charset="-122"/>
                 <a:cs typeface="Aptos" pitchFamily="34" charset="-120"/>
               </a:rPr>
-              <a:t>Use this for</a:t>
+              <a:t>How to validate</a:t>
             </a:r>
             <a:endParaRPr lang="en-US" sz="1300" dirty="0"/>
           </a:p>
@@ -14841,14 +16901,14 @@
       </p:sp>
       <p:sp>
         <p:nvSpPr>
-          <p:cNvPr id="17" name="Text 15"/>
-          <p:cNvSpPr/>
-          <p:nvPr/>
-        </p:nvSpPr>
-        <p:spPr>
-          <a:xfrm>
-            <a:off x="8074152" y="4023360"/>
-            <a:ext cx="2825496" cy="1097280"/>
+          <p:cNvPr id="22" name="Text 20"/>
+          <p:cNvSpPr/>
+          <p:nvPr/>
+        </p:nvSpPr>
+        <p:spPr>
+          <a:xfrm>
+            <a:off x="7799832" y="5001768"/>
+            <a:ext cx="3145536" cy="502920"/>
           </a:xfrm>
           <a:prstGeom prst="rect">
             <a:avLst/>
@@ -14874,7 +16934,7 @@
                 <a:ea typeface="Aptos" pitchFamily="34" charset="-122"/>
                 <a:cs typeface="Aptos" pitchFamily="34" charset="-120"/>
               </a:rPr>
-              <a:t>Connect the concept to public health decisions, safeguards, documentation, or implementation work.</a:t>
+              <a:t>Connect the concept to data quality, model performance, validation evidence, monitoring measures, and decisions that remain under human control.</a:t>
             </a:r>
             <a:endParaRPr lang="en-US" sz="1550" dirty="0"/>
           </a:p>
@@ -15048,8 +17108,8 @@
         </p:nvSpPr>
         <p:spPr>
           <a:xfrm>
-            <a:off x="9966960" y="6537960"/>
-            <a:ext cx="1645920" cy="201168"/>
+            <a:off x="9646920" y="6537960"/>
+            <a:ext cx="1965960" cy="201168"/>
           </a:xfrm>
           <a:prstGeom prst="rect">
             <a:avLst/>
@@ -15073,7 +17133,7 @@
                 <a:ea typeface="Aptos" pitchFamily="34" charset="-122"/>
                 <a:cs typeface="Aptos" pitchFamily="34" charset="-120"/>
               </a:rPr>
-              <a:t>Â© Paula Soper</a:t>
+              <a:t>Copyright Paula Soper</a:t>
             </a:r>
             <a:endParaRPr lang="en-US" sz="800" dirty="0"/>
           </a:p>
@@ -15120,77 +17180,13 @@
       </p:sp>
       <p:sp>
         <p:nvSpPr>
-          <p:cNvPr id="8" name="Shape 6"/>
+          <p:cNvPr id="8" name="Text 6"/>
           <p:cNvSpPr/>
           <p:nvPr/>
         </p:nvSpPr>
         <p:spPr>
           <a:xfrm>
             <a:off x="640080" y="658368"/>
-            <a:ext cx="420624" cy="420624"/>
-          </a:xfrm>
-          <a:prstGeom prst="ellipse">
-            <a:avLst/>
-          </a:prstGeom>
-          <a:solidFill>
-            <a:srgbClr val="0068B7"/>
-          </a:solidFill>
-          <a:ln w="12700">
-            <a:solidFill>
-              <a:srgbClr val="0068B7"/>
-            </a:solidFill>
-            <a:prstDash val="solid"/>
-          </a:ln>
-        </p:spPr>
-      </p:sp>
-      <p:sp>
-        <p:nvSpPr>
-          <p:cNvPr id="9" name="Text 7"/>
-          <p:cNvSpPr/>
-          <p:nvPr/>
-        </p:nvSpPr>
-        <p:spPr>
-          <a:xfrm>
-            <a:off x="640080" y="731520"/>
-            <a:ext cx="420624" cy="164592"/>
-          </a:xfrm>
-          <a:prstGeom prst="rect">
-            <a:avLst/>
-          </a:prstGeom>
-          <a:noFill/>
-          <a:ln/>
-        </p:spPr>
-        <p:txBody>
-          <a:bodyPr wrap="square" lIns="0" tIns="0" rIns="0" bIns="0" rtlCol="0" anchor="ctr"/>
-          <a:lstStyle/>
-          <a:p>
-            <a:pPr algn="ctr" indent="0" marL="0">
-              <a:buNone/>
-            </a:pPr>
-            <a:r>
-              <a:rPr lang="en-US" sz="1100" b="1" dirty="0">
-                <a:solidFill>
-                  <a:srgbClr val="FFFFFF"/>
-                </a:solidFill>
-                <a:latin typeface="Aptos" pitchFamily="34" charset="0"/>
-                <a:ea typeface="Aptos" pitchFamily="34" charset="-122"/>
-                <a:cs typeface="Aptos" pitchFamily="34" charset="-120"/>
-              </a:rPr>
-              <a:t>3</a:t>
-            </a:r>
-            <a:endParaRPr lang="en-US" sz="1100" dirty="0"/>
-          </a:p>
-        </p:txBody>
-      </p:sp>
-      <p:sp>
-        <p:nvSpPr>
-          <p:cNvPr id="10" name="Text 8"/>
-          <p:cNvSpPr/>
-          <p:nvPr/>
-        </p:nvSpPr>
-        <p:spPr>
-          <a:xfrm>
-            <a:off x="640080" y="621792"/>
             <a:ext cx="10881360" cy="713232"/>
           </a:xfrm>
           <a:prstGeom prst="rect">
@@ -15225,14 +17221,14 @@
       </p:sp>
       <p:sp>
         <p:nvSpPr>
-          <p:cNvPr id="11" name="Text 9"/>
+          <p:cNvPr id="9" name="Text 7"/>
           <p:cNvSpPr/>
           <p:nvPr/>
         </p:nvSpPr>
         <p:spPr>
           <a:xfrm>
             <a:off x="868680" y="1508760"/>
-            <a:ext cx="6537960" cy="4160520"/>
+            <a:ext cx="6309360" cy="4160520"/>
           </a:xfrm>
           <a:prstGeom prst="rect">
             <a:avLst/>
@@ -15291,18 +17287,18 @@
       </p:sp>
       <p:sp>
         <p:nvSpPr>
-          <p:cNvPr id="12" name="Shape 10"/>
-          <p:cNvSpPr/>
-          <p:nvPr/>
-        </p:nvSpPr>
-        <p:spPr>
-          <a:xfrm>
-            <a:off x="7909560" y="1417320"/>
-            <a:ext cx="3154680" cy="1828800"/>
+          <p:cNvPr id="10" name="Shape 8"/>
+          <p:cNvSpPr/>
+          <p:nvPr/>
+        </p:nvSpPr>
+        <p:spPr>
+          <a:xfrm>
+            <a:off x="7635240" y="1325880"/>
+            <a:ext cx="3474720" cy="1325880"/>
           </a:xfrm>
           <a:prstGeom prst="roundRect">
             <a:avLst>
-              <a:gd name="adj" fmla="val 6000"/>
+              <a:gd name="adj" fmla="val 8276"/>
             </a:avLst>
           </a:prstGeom>
           <a:solidFill>
@@ -15318,14 +17314,14 @@
       </p:sp>
       <p:sp>
         <p:nvSpPr>
-          <p:cNvPr id="13" name="Text 11"/>
-          <p:cNvSpPr/>
-          <p:nvPr/>
-        </p:nvSpPr>
-        <p:spPr>
-          <a:xfrm>
-            <a:off x="8074152" y="1563624"/>
-            <a:ext cx="2825496" cy="256032"/>
+          <p:cNvPr id="11" name="Text 9"/>
+          <p:cNvSpPr/>
+          <p:nvPr/>
+        </p:nvSpPr>
+        <p:spPr>
+          <a:xfrm>
+            <a:off x="7799832" y="1472184"/>
+            <a:ext cx="3145536" cy="256032"/>
           </a:xfrm>
           <a:prstGeom prst="rect">
             <a:avLst/>
@@ -15349,7 +17345,7 @@
                 <a:ea typeface="Aptos" pitchFamily="34" charset="-122"/>
                 <a:cs typeface="Aptos" pitchFamily="34" charset="-120"/>
               </a:rPr>
-              <a:t>Key idea</a:t>
+              <a:t>Data decision</a:t>
             </a:r>
             <a:endParaRPr lang="en-US" sz="1300" dirty="0"/>
           </a:p>
@@ -15357,14 +17353,14 @@
       </p:sp>
       <p:sp>
         <p:nvSpPr>
-          <p:cNvPr id="14" name="Text 12"/>
-          <p:cNvSpPr/>
-          <p:nvPr/>
-        </p:nvSpPr>
-        <p:spPr>
-          <a:xfrm>
-            <a:off x="8074152" y="1920240"/>
-            <a:ext cx="2825496" cy="1188720"/>
+          <p:cNvPr id="12" name="Text 10"/>
+          <p:cNvSpPr/>
+          <p:nvPr/>
+        </p:nvSpPr>
+        <p:spPr>
+          <a:xfrm>
+            <a:off x="7799832" y="1828800"/>
+            <a:ext cx="3145536" cy="685800"/>
           </a:xfrm>
           <a:prstGeom prst="rect">
             <a:avLst/>
@@ -15398,21 +17394,212 @@
       </p:sp>
       <p:sp>
         <p:nvSpPr>
-          <p:cNvPr id="15" name="Shape 13"/>
-          <p:cNvSpPr/>
-          <p:nvPr/>
-        </p:nvSpPr>
-        <p:spPr>
-          <a:xfrm>
-            <a:off x="7909560" y="3520440"/>
-            <a:ext cx="3154680" cy="1737360"/>
+          <p:cNvPr id="13" name="Shape 11"/>
+          <p:cNvSpPr/>
+          <p:nvPr/>
+        </p:nvSpPr>
+        <p:spPr>
+          <a:xfrm>
+            <a:off x="7635240" y="2788920"/>
+            <a:ext cx="3474720" cy="1536192"/>
           </a:xfrm>
           <a:prstGeom prst="roundRect">
             <a:avLst>
-              <a:gd name="adj" fmla="val 6316"/>
+              <a:gd name="adj" fmla="val 7143"/>
             </a:avLst>
           </a:prstGeom>
           <a:solidFill>
+            <a:srgbClr val="FFFFFF">
+              <a:alpha val="88000"/>
+            </a:srgbClr>
+          </a:solidFill>
+          <a:ln w="12700">
+            <a:solidFill>
+              <a:srgbClr val="D6E8F2"/>
+            </a:solidFill>
+            <a:prstDash val="solid"/>
+          </a:ln>
+        </p:spPr>
+      </p:sp>
+      <p:sp>
+        <p:nvSpPr>
+          <p:cNvPr id="14" name="Shape 12"/>
+          <p:cNvSpPr/>
+          <p:nvPr/>
+        </p:nvSpPr>
+        <p:spPr>
+          <a:xfrm>
+            <a:off x="8138160" y="3474720"/>
+            <a:ext cx="256032" cy="411480"/>
+          </a:xfrm>
+          <a:prstGeom prst="rect">
+            <a:avLst/>
+          </a:prstGeom>
+          <a:solidFill>
+            <a:srgbClr val="0068B7"/>
+          </a:solidFill>
+          <a:ln w="12700">
+            <a:solidFill>
+              <a:srgbClr val="0068B7"/>
+            </a:solidFill>
+            <a:prstDash val="solid"/>
+          </a:ln>
+        </p:spPr>
+      </p:sp>
+      <p:sp>
+        <p:nvSpPr>
+          <p:cNvPr id="15" name="Shape 13"/>
+          <p:cNvSpPr/>
+          <p:nvPr/>
+        </p:nvSpPr>
+        <p:spPr>
+          <a:xfrm>
+            <a:off x="8577072" y="3172968"/>
+            <a:ext cx="256032" cy="713232"/>
+          </a:xfrm>
+          <a:prstGeom prst="rect">
+            <a:avLst/>
+          </a:prstGeom>
+          <a:solidFill>
+            <a:srgbClr val="2F8A28"/>
+          </a:solidFill>
+          <a:ln w="12700">
+            <a:solidFill>
+              <a:srgbClr val="2F8A28"/>
+            </a:solidFill>
+            <a:prstDash val="solid"/>
+          </a:ln>
+        </p:spPr>
+      </p:sp>
+      <p:sp>
+        <p:nvSpPr>
+          <p:cNvPr id="16" name="Shape 14"/>
+          <p:cNvSpPr/>
+          <p:nvPr/>
+        </p:nvSpPr>
+        <p:spPr>
+          <a:xfrm>
+            <a:off x="9015984" y="2880360"/>
+            <a:ext cx="256032" cy="1005840"/>
+          </a:xfrm>
+          <a:prstGeom prst="rect">
+            <a:avLst/>
+          </a:prstGeom>
+          <a:solidFill>
+            <a:srgbClr val="D69A2D"/>
+          </a:solidFill>
+          <a:ln w="12700">
+            <a:solidFill>
+              <a:srgbClr val="D69A2D"/>
+            </a:solidFill>
+            <a:prstDash val="solid"/>
+          </a:ln>
+        </p:spPr>
+      </p:sp>
+      <p:sp>
+        <p:nvSpPr>
+          <p:cNvPr id="17" name="Shape 15"/>
+          <p:cNvSpPr/>
+          <p:nvPr/>
+        </p:nvSpPr>
+        <p:spPr>
+          <a:xfrm>
+            <a:off x="9454896" y="3319272"/>
+            <a:ext cx="256032" cy="566928"/>
+          </a:xfrm>
+          <a:prstGeom prst="rect">
+            <a:avLst/>
+          </a:prstGeom>
+          <a:solidFill>
+            <a:srgbClr val="6A4CA3"/>
+          </a:solidFill>
+          <a:ln w="12700">
+            <a:solidFill>
+              <a:srgbClr val="6A4CA3"/>
+            </a:solidFill>
+            <a:prstDash val="solid"/>
+          </a:ln>
+        </p:spPr>
+      </p:sp>
+      <p:sp>
+        <p:nvSpPr>
+          <p:cNvPr id="18" name="Shape 16"/>
+          <p:cNvSpPr/>
+          <p:nvPr/>
+        </p:nvSpPr>
+        <p:spPr>
+          <a:xfrm>
+            <a:off x="8019288" y="3886200"/>
+            <a:ext cx="2706624" cy="0"/>
+          </a:xfrm>
+          <a:prstGeom prst="line">
+            <a:avLst/>
+          </a:prstGeom>
+          <a:noFill/>
+          <a:ln w="15240">
+            <a:solidFill>
+              <a:srgbClr val="003A63"/>
+            </a:solidFill>
+            <a:prstDash val="solid"/>
+          </a:ln>
+        </p:spPr>
+      </p:sp>
+      <p:sp>
+        <p:nvSpPr>
+          <p:cNvPr id="19" name="Text 17"/>
+          <p:cNvSpPr/>
+          <p:nvPr/>
+        </p:nvSpPr>
+        <p:spPr>
+          <a:xfrm>
+            <a:off x="7863840" y="3017520"/>
+            <a:ext cx="3017520" cy="201168"/>
+          </a:xfrm>
+          <a:prstGeom prst="rect">
+            <a:avLst/>
+          </a:prstGeom>
+          <a:noFill/>
+          <a:ln/>
+        </p:spPr>
+        <p:txBody>
+          <a:bodyPr wrap="square" lIns="0" tIns="0" rIns="0" bIns="0" rtlCol="0" anchor="ctr"/>
+          <a:lstStyle/>
+          <a:p>
+            <a:pPr algn="ctr" indent="0" marL="0">
+              <a:buNone/>
+            </a:pPr>
+            <a:r>
+              <a:rPr lang="en-US" sz="1050" b="1" dirty="0">
+                <a:solidFill>
+                  <a:srgbClr val="003A63"/>
+                </a:solidFill>
+                <a:latin typeface="Aptos" pitchFamily="34" charset="0"/>
+                <a:ea typeface="Aptos" pitchFamily="34" charset="-122"/>
+                <a:cs typeface="Aptos" pitchFamily="34" charset="-120"/>
+              </a:rPr>
+              <a:t>Measure and monitor</a:t>
+            </a:r>
+            <a:endParaRPr lang="en-US" sz="1050" dirty="0"/>
+          </a:p>
+        </p:txBody>
+      </p:sp>
+      <p:sp>
+        <p:nvSpPr>
+          <p:cNvPr id="20" name="Shape 18"/>
+          <p:cNvSpPr/>
+          <p:nvPr/>
+        </p:nvSpPr>
+        <p:spPr>
+          <a:xfrm>
+            <a:off x="7635240" y="4498848"/>
+            <a:ext cx="3474720" cy="1143000"/>
+          </a:xfrm>
+          <a:prstGeom prst="roundRect">
+            <a:avLst>
+              <a:gd name="adj" fmla="val 9600"/>
+            </a:avLst>
+          </a:prstGeom>
+          <a:solidFill>
             <a:srgbClr val="EAF6F8"/>
           </a:solidFill>
           <a:ln w="12700">
@@ -15425,14 +17612,14 @@
       </p:sp>
       <p:sp>
         <p:nvSpPr>
-          <p:cNvPr id="16" name="Text 14"/>
-          <p:cNvSpPr/>
-          <p:nvPr/>
-        </p:nvSpPr>
-        <p:spPr>
-          <a:xfrm>
-            <a:off x="8074152" y="3666744"/>
-            <a:ext cx="2825496" cy="256032"/>
+          <p:cNvPr id="21" name="Text 19"/>
+          <p:cNvSpPr/>
+          <p:nvPr/>
+        </p:nvSpPr>
+        <p:spPr>
+          <a:xfrm>
+            <a:off x="7799832" y="4645152"/>
+            <a:ext cx="3145536" cy="256032"/>
           </a:xfrm>
           <a:prstGeom prst="rect">
             <a:avLst/>
@@ -15456,7 +17643,7 @@
                 <a:ea typeface="Aptos" pitchFamily="34" charset="-122"/>
                 <a:cs typeface="Aptos" pitchFamily="34" charset="-120"/>
               </a:rPr>
-              <a:t>Use this for</a:t>
+              <a:t>How to validate</a:t>
             </a:r>
             <a:endParaRPr lang="en-US" sz="1300" dirty="0"/>
           </a:p>
@@ -15464,14 +17651,14 @@
       </p:sp>
       <p:sp>
         <p:nvSpPr>
-          <p:cNvPr id="17" name="Text 15"/>
-          <p:cNvSpPr/>
-          <p:nvPr/>
-        </p:nvSpPr>
-        <p:spPr>
-          <a:xfrm>
-            <a:off x="8074152" y="4023360"/>
-            <a:ext cx="2825496" cy="1097280"/>
+          <p:cNvPr id="22" name="Text 20"/>
+          <p:cNvSpPr/>
+          <p:nvPr/>
+        </p:nvSpPr>
+        <p:spPr>
+          <a:xfrm>
+            <a:off x="7799832" y="5001768"/>
+            <a:ext cx="3145536" cy="502920"/>
           </a:xfrm>
           <a:prstGeom prst="rect">
             <a:avLst/>
@@ -15497,7 +17684,7 @@
                 <a:ea typeface="Aptos" pitchFamily="34" charset="-122"/>
                 <a:cs typeface="Aptos" pitchFamily="34" charset="-120"/>
               </a:rPr>
-              <a:t>Connect the concept to public health decisions, safeguards, documentation, or implementation work.</a:t>
+              <a:t>Connect the concept to data quality, model performance, validation evidence, monitoring measures, and decisions that remain under human control.</a:t>
             </a:r>
             <a:endParaRPr lang="en-US" sz="1550" dirty="0"/>
           </a:p>
@@ -15671,8 +17858,8 @@
         </p:nvSpPr>
         <p:spPr>
           <a:xfrm>
-            <a:off x="9966960" y="6537960"/>
-            <a:ext cx="1645920" cy="201168"/>
+            <a:off x="9646920" y="6537960"/>
+            <a:ext cx="1965960" cy="201168"/>
           </a:xfrm>
           <a:prstGeom prst="rect">
             <a:avLst/>
@@ -15696,7 +17883,7 @@
                 <a:ea typeface="Aptos" pitchFamily="34" charset="-122"/>
                 <a:cs typeface="Aptos" pitchFamily="34" charset="-120"/>
               </a:rPr>
-              <a:t>Â© Paula Soper</a:t>
+              <a:t>Copyright Paula Soper</a:t>
             </a:r>
             <a:endParaRPr lang="en-US" sz="800" dirty="0"/>
           </a:p>
@@ -15743,77 +17930,13 @@
       </p:sp>
       <p:sp>
         <p:nvSpPr>
-          <p:cNvPr id="8" name="Shape 6"/>
+          <p:cNvPr id="8" name="Text 6"/>
           <p:cNvSpPr/>
           <p:nvPr/>
         </p:nvSpPr>
         <p:spPr>
           <a:xfrm>
             <a:off x="640080" y="658368"/>
-            <a:ext cx="420624" cy="420624"/>
-          </a:xfrm>
-          <a:prstGeom prst="ellipse">
-            <a:avLst/>
-          </a:prstGeom>
-          <a:solidFill>
-            <a:srgbClr val="0068B7"/>
-          </a:solidFill>
-          <a:ln w="12700">
-            <a:solidFill>
-              <a:srgbClr val="0068B7"/>
-            </a:solidFill>
-            <a:prstDash val="solid"/>
-          </a:ln>
-        </p:spPr>
-      </p:sp>
-      <p:sp>
-        <p:nvSpPr>
-          <p:cNvPr id="9" name="Text 7"/>
-          <p:cNvSpPr/>
-          <p:nvPr/>
-        </p:nvSpPr>
-        <p:spPr>
-          <a:xfrm>
-            <a:off x="640080" y="731520"/>
-            <a:ext cx="420624" cy="164592"/>
-          </a:xfrm>
-          <a:prstGeom prst="rect">
-            <a:avLst/>
-          </a:prstGeom>
-          <a:noFill/>
-          <a:ln/>
-        </p:spPr>
-        <p:txBody>
-          <a:bodyPr wrap="square" lIns="0" tIns="0" rIns="0" bIns="0" rtlCol="0" anchor="ctr"/>
-          <a:lstStyle/>
-          <a:p>
-            <a:pPr algn="ctr" indent="0" marL="0">
-              <a:buNone/>
-            </a:pPr>
-            <a:r>
-              <a:rPr lang="en-US" sz="1100" b="1" dirty="0">
-                <a:solidFill>
-                  <a:srgbClr val="FFFFFF"/>
-                </a:solidFill>
-                <a:latin typeface="Aptos" pitchFamily="34" charset="0"/>
-                <a:ea typeface="Aptos" pitchFamily="34" charset="-122"/>
-                <a:cs typeface="Aptos" pitchFamily="34" charset="-120"/>
-              </a:rPr>
-              <a:t>4</a:t>
-            </a:r>
-            <a:endParaRPr lang="en-US" sz="1100" dirty="0"/>
-          </a:p>
-        </p:txBody>
-      </p:sp>
-      <p:sp>
-        <p:nvSpPr>
-          <p:cNvPr id="10" name="Text 8"/>
-          <p:cNvSpPr/>
-          <p:nvPr/>
-        </p:nvSpPr>
-        <p:spPr>
-          <a:xfrm>
-            <a:off x="640080" y="621792"/>
             <a:ext cx="10881360" cy="713232"/>
           </a:xfrm>
           <a:prstGeom prst="rect">
@@ -15848,14 +17971,14 @@
       </p:sp>
       <p:sp>
         <p:nvSpPr>
-          <p:cNvPr id="11" name="Text 9"/>
+          <p:cNvPr id="9" name="Text 7"/>
           <p:cNvSpPr/>
           <p:nvPr/>
         </p:nvSpPr>
         <p:spPr>
           <a:xfrm>
             <a:off x="868680" y="1508760"/>
-            <a:ext cx="6537960" cy="4160520"/>
+            <a:ext cx="6309360" cy="4160520"/>
           </a:xfrm>
           <a:prstGeom prst="rect">
             <a:avLst/>
@@ -15914,18 +18037,18 @@
       </p:sp>
       <p:sp>
         <p:nvSpPr>
-          <p:cNvPr id="12" name="Shape 10"/>
-          <p:cNvSpPr/>
-          <p:nvPr/>
-        </p:nvSpPr>
-        <p:spPr>
-          <a:xfrm>
-            <a:off x="7909560" y="1417320"/>
-            <a:ext cx="3154680" cy="1828800"/>
+          <p:cNvPr id="10" name="Shape 8"/>
+          <p:cNvSpPr/>
+          <p:nvPr/>
+        </p:nvSpPr>
+        <p:spPr>
+          <a:xfrm>
+            <a:off x="7635240" y="1325880"/>
+            <a:ext cx="3474720" cy="1325880"/>
           </a:xfrm>
           <a:prstGeom prst="roundRect">
             <a:avLst>
-              <a:gd name="adj" fmla="val 6000"/>
+              <a:gd name="adj" fmla="val 8276"/>
             </a:avLst>
           </a:prstGeom>
           <a:solidFill>
@@ -15941,14 +18064,14 @@
       </p:sp>
       <p:sp>
         <p:nvSpPr>
-          <p:cNvPr id="13" name="Text 11"/>
-          <p:cNvSpPr/>
-          <p:nvPr/>
-        </p:nvSpPr>
-        <p:spPr>
-          <a:xfrm>
-            <a:off x="8074152" y="1563624"/>
-            <a:ext cx="2825496" cy="256032"/>
+          <p:cNvPr id="11" name="Text 9"/>
+          <p:cNvSpPr/>
+          <p:nvPr/>
+        </p:nvSpPr>
+        <p:spPr>
+          <a:xfrm>
+            <a:off x="7799832" y="1472184"/>
+            <a:ext cx="3145536" cy="256032"/>
           </a:xfrm>
           <a:prstGeom prst="rect">
             <a:avLst/>
@@ -15972,7 +18095,7 @@
                 <a:ea typeface="Aptos" pitchFamily="34" charset="-122"/>
                 <a:cs typeface="Aptos" pitchFamily="34" charset="-120"/>
               </a:rPr>
-              <a:t>Key idea</a:t>
+              <a:t>Data decision</a:t>
             </a:r>
             <a:endParaRPr lang="en-US" sz="1300" dirty="0"/>
           </a:p>
@@ -15980,14 +18103,14 @@
       </p:sp>
       <p:sp>
         <p:nvSpPr>
-          <p:cNvPr id="14" name="Text 12"/>
-          <p:cNvSpPr/>
-          <p:nvPr/>
-        </p:nvSpPr>
-        <p:spPr>
-          <a:xfrm>
-            <a:off x="8074152" y="1920240"/>
-            <a:ext cx="2825496" cy="1188720"/>
+          <p:cNvPr id="12" name="Text 10"/>
+          <p:cNvSpPr/>
+          <p:nvPr/>
+        </p:nvSpPr>
+        <p:spPr>
+          <a:xfrm>
+            <a:off x="7799832" y="1828800"/>
+            <a:ext cx="3145536" cy="685800"/>
           </a:xfrm>
           <a:prstGeom prst="rect">
             <a:avLst/>
@@ -16021,21 +18144,212 @@
       </p:sp>
       <p:sp>
         <p:nvSpPr>
-          <p:cNvPr id="15" name="Shape 13"/>
-          <p:cNvSpPr/>
-          <p:nvPr/>
-        </p:nvSpPr>
-        <p:spPr>
-          <a:xfrm>
-            <a:off x="7909560" y="3520440"/>
-            <a:ext cx="3154680" cy="1737360"/>
+          <p:cNvPr id="13" name="Shape 11"/>
+          <p:cNvSpPr/>
+          <p:nvPr/>
+        </p:nvSpPr>
+        <p:spPr>
+          <a:xfrm>
+            <a:off x="7635240" y="2788920"/>
+            <a:ext cx="3474720" cy="1536192"/>
           </a:xfrm>
           <a:prstGeom prst="roundRect">
             <a:avLst>
-              <a:gd name="adj" fmla="val 6316"/>
+              <a:gd name="adj" fmla="val 7143"/>
             </a:avLst>
           </a:prstGeom>
           <a:solidFill>
+            <a:srgbClr val="FFFFFF">
+              <a:alpha val="88000"/>
+            </a:srgbClr>
+          </a:solidFill>
+          <a:ln w="12700">
+            <a:solidFill>
+              <a:srgbClr val="D6E8F2"/>
+            </a:solidFill>
+            <a:prstDash val="solid"/>
+          </a:ln>
+        </p:spPr>
+      </p:sp>
+      <p:sp>
+        <p:nvSpPr>
+          <p:cNvPr id="14" name="Shape 12"/>
+          <p:cNvSpPr/>
+          <p:nvPr/>
+        </p:nvSpPr>
+        <p:spPr>
+          <a:xfrm>
+            <a:off x="8138160" y="3474720"/>
+            <a:ext cx="256032" cy="411480"/>
+          </a:xfrm>
+          <a:prstGeom prst="rect">
+            <a:avLst/>
+          </a:prstGeom>
+          <a:solidFill>
+            <a:srgbClr val="0068B7"/>
+          </a:solidFill>
+          <a:ln w="12700">
+            <a:solidFill>
+              <a:srgbClr val="0068B7"/>
+            </a:solidFill>
+            <a:prstDash val="solid"/>
+          </a:ln>
+        </p:spPr>
+      </p:sp>
+      <p:sp>
+        <p:nvSpPr>
+          <p:cNvPr id="15" name="Shape 13"/>
+          <p:cNvSpPr/>
+          <p:nvPr/>
+        </p:nvSpPr>
+        <p:spPr>
+          <a:xfrm>
+            <a:off x="8577072" y="3172968"/>
+            <a:ext cx="256032" cy="713232"/>
+          </a:xfrm>
+          <a:prstGeom prst="rect">
+            <a:avLst/>
+          </a:prstGeom>
+          <a:solidFill>
+            <a:srgbClr val="2F8A28"/>
+          </a:solidFill>
+          <a:ln w="12700">
+            <a:solidFill>
+              <a:srgbClr val="2F8A28"/>
+            </a:solidFill>
+            <a:prstDash val="solid"/>
+          </a:ln>
+        </p:spPr>
+      </p:sp>
+      <p:sp>
+        <p:nvSpPr>
+          <p:cNvPr id="16" name="Shape 14"/>
+          <p:cNvSpPr/>
+          <p:nvPr/>
+        </p:nvSpPr>
+        <p:spPr>
+          <a:xfrm>
+            <a:off x="9015984" y="2880360"/>
+            <a:ext cx="256032" cy="1005840"/>
+          </a:xfrm>
+          <a:prstGeom prst="rect">
+            <a:avLst/>
+          </a:prstGeom>
+          <a:solidFill>
+            <a:srgbClr val="D69A2D"/>
+          </a:solidFill>
+          <a:ln w="12700">
+            <a:solidFill>
+              <a:srgbClr val="D69A2D"/>
+            </a:solidFill>
+            <a:prstDash val="solid"/>
+          </a:ln>
+        </p:spPr>
+      </p:sp>
+      <p:sp>
+        <p:nvSpPr>
+          <p:cNvPr id="17" name="Shape 15"/>
+          <p:cNvSpPr/>
+          <p:nvPr/>
+        </p:nvSpPr>
+        <p:spPr>
+          <a:xfrm>
+            <a:off x="9454896" y="3319272"/>
+            <a:ext cx="256032" cy="566928"/>
+          </a:xfrm>
+          <a:prstGeom prst="rect">
+            <a:avLst/>
+          </a:prstGeom>
+          <a:solidFill>
+            <a:srgbClr val="6A4CA3"/>
+          </a:solidFill>
+          <a:ln w="12700">
+            <a:solidFill>
+              <a:srgbClr val="6A4CA3"/>
+            </a:solidFill>
+            <a:prstDash val="solid"/>
+          </a:ln>
+        </p:spPr>
+      </p:sp>
+      <p:sp>
+        <p:nvSpPr>
+          <p:cNvPr id="18" name="Shape 16"/>
+          <p:cNvSpPr/>
+          <p:nvPr/>
+        </p:nvSpPr>
+        <p:spPr>
+          <a:xfrm>
+            <a:off x="8019288" y="3886200"/>
+            <a:ext cx="2706624" cy="0"/>
+          </a:xfrm>
+          <a:prstGeom prst="line">
+            <a:avLst/>
+          </a:prstGeom>
+          <a:noFill/>
+          <a:ln w="15240">
+            <a:solidFill>
+              <a:srgbClr val="003A63"/>
+            </a:solidFill>
+            <a:prstDash val="solid"/>
+          </a:ln>
+        </p:spPr>
+      </p:sp>
+      <p:sp>
+        <p:nvSpPr>
+          <p:cNvPr id="19" name="Text 17"/>
+          <p:cNvSpPr/>
+          <p:nvPr/>
+        </p:nvSpPr>
+        <p:spPr>
+          <a:xfrm>
+            <a:off x="7863840" y="3017520"/>
+            <a:ext cx="3017520" cy="201168"/>
+          </a:xfrm>
+          <a:prstGeom prst="rect">
+            <a:avLst/>
+          </a:prstGeom>
+          <a:noFill/>
+          <a:ln/>
+        </p:spPr>
+        <p:txBody>
+          <a:bodyPr wrap="square" lIns="0" tIns="0" rIns="0" bIns="0" rtlCol="0" anchor="ctr"/>
+          <a:lstStyle/>
+          <a:p>
+            <a:pPr algn="ctr" indent="0" marL="0">
+              <a:buNone/>
+            </a:pPr>
+            <a:r>
+              <a:rPr lang="en-US" sz="1050" b="1" dirty="0">
+                <a:solidFill>
+                  <a:srgbClr val="003A63"/>
+                </a:solidFill>
+                <a:latin typeface="Aptos" pitchFamily="34" charset="0"/>
+                <a:ea typeface="Aptos" pitchFamily="34" charset="-122"/>
+                <a:cs typeface="Aptos" pitchFamily="34" charset="-120"/>
+              </a:rPr>
+              <a:t>Measure and monitor</a:t>
+            </a:r>
+            <a:endParaRPr lang="en-US" sz="1050" dirty="0"/>
+          </a:p>
+        </p:txBody>
+      </p:sp>
+      <p:sp>
+        <p:nvSpPr>
+          <p:cNvPr id="20" name="Shape 18"/>
+          <p:cNvSpPr/>
+          <p:nvPr/>
+        </p:nvSpPr>
+        <p:spPr>
+          <a:xfrm>
+            <a:off x="7635240" y="4498848"/>
+            <a:ext cx="3474720" cy="1143000"/>
+          </a:xfrm>
+          <a:prstGeom prst="roundRect">
+            <a:avLst>
+              <a:gd name="adj" fmla="val 9600"/>
+            </a:avLst>
+          </a:prstGeom>
+          <a:solidFill>
             <a:srgbClr val="EAF6F8"/>
           </a:solidFill>
           <a:ln w="12700">
@@ -16048,14 +18362,14 @@
       </p:sp>
       <p:sp>
         <p:nvSpPr>
-          <p:cNvPr id="16" name="Text 14"/>
-          <p:cNvSpPr/>
-          <p:nvPr/>
-        </p:nvSpPr>
-        <p:spPr>
-          <a:xfrm>
-            <a:off x="8074152" y="3666744"/>
-            <a:ext cx="2825496" cy="256032"/>
+          <p:cNvPr id="21" name="Text 19"/>
+          <p:cNvSpPr/>
+          <p:nvPr/>
+        </p:nvSpPr>
+        <p:spPr>
+          <a:xfrm>
+            <a:off x="7799832" y="4645152"/>
+            <a:ext cx="3145536" cy="256032"/>
           </a:xfrm>
           <a:prstGeom prst="rect">
             <a:avLst/>
@@ -16079,7 +18393,7 @@
                 <a:ea typeface="Aptos" pitchFamily="34" charset="-122"/>
                 <a:cs typeface="Aptos" pitchFamily="34" charset="-120"/>
               </a:rPr>
-              <a:t>Use this for</a:t>
+              <a:t>How to validate</a:t>
             </a:r>
             <a:endParaRPr lang="en-US" sz="1300" dirty="0"/>
           </a:p>
@@ -16087,14 +18401,14 @@
       </p:sp>
       <p:sp>
         <p:nvSpPr>
-          <p:cNvPr id="17" name="Text 15"/>
-          <p:cNvSpPr/>
-          <p:nvPr/>
-        </p:nvSpPr>
-        <p:spPr>
-          <a:xfrm>
-            <a:off x="8074152" y="4023360"/>
-            <a:ext cx="2825496" cy="1097280"/>
+          <p:cNvPr id="22" name="Text 20"/>
+          <p:cNvSpPr/>
+          <p:nvPr/>
+        </p:nvSpPr>
+        <p:spPr>
+          <a:xfrm>
+            <a:off x="7799832" y="5001768"/>
+            <a:ext cx="3145536" cy="502920"/>
           </a:xfrm>
           <a:prstGeom prst="rect">
             <a:avLst/>
@@ -16120,7 +18434,7 @@
                 <a:ea typeface="Aptos" pitchFamily="34" charset="-122"/>
                 <a:cs typeface="Aptos" pitchFamily="34" charset="-120"/>
               </a:rPr>
-              <a:t>Connect the concept to public health decisions, safeguards, documentation, or implementation work.</a:t>
+              <a:t>Connect the concept to data quality, model performance, validation evidence, monitoring measures, and decisions that remain under human control.</a:t>
             </a:r>
             <a:endParaRPr lang="en-US" sz="1550" dirty="0"/>
           </a:p>

--- a/downloads/presentations/modules/anl-310.pptx
+++ b/downloads/presentations/modules/anl-310.pptx
@@ -3525,13 +3525,11 @@
             </a:avLst>
           </a:prstGeom>
           <a:solidFill>
-            <a:srgbClr val="FFFFFF">
-              <a:alpha val="88000"/>
-            </a:srgbClr>
+            <a:srgbClr val="FFFFFF"/>
           </a:solidFill>
           <a:ln w="12700">
             <a:solidFill>
-              <a:srgbClr val="D6E8F2"/>
+              <a:srgbClr val="B9D7E6"/>
             </a:solidFill>
             <a:prstDash val="solid"/>
           </a:ln>
@@ -3539,169 +3537,112 @@
       </p:sp>
       <p:sp>
         <p:nvSpPr>
-          <p:cNvPr id="14" name="Shape 12"/>
-          <p:cNvSpPr/>
-          <p:nvPr/>
-        </p:nvSpPr>
-        <p:spPr>
-          <a:xfrm>
-            <a:off x="8138160" y="3474720"/>
-            <a:ext cx="256032" cy="411480"/>
-          </a:xfrm>
-          <a:prstGeom prst="rect">
-            <a:avLst/>
-          </a:prstGeom>
-          <a:solidFill>
-            <a:srgbClr val="0068B7"/>
-          </a:solidFill>
-          <a:ln w="12700">
-            <a:solidFill>
-              <a:srgbClr val="0068B7"/>
-            </a:solidFill>
-            <a:prstDash val="solid"/>
-          </a:ln>
-        </p:spPr>
-      </p:sp>
-      <p:sp>
-        <p:nvSpPr>
-          <p:cNvPr id="15" name="Shape 13"/>
-          <p:cNvSpPr/>
-          <p:nvPr/>
-        </p:nvSpPr>
-        <p:spPr>
-          <a:xfrm>
-            <a:off x="8577072" y="3172968"/>
-            <a:ext cx="256032" cy="713232"/>
-          </a:xfrm>
-          <a:prstGeom prst="rect">
-            <a:avLst/>
-          </a:prstGeom>
-          <a:solidFill>
-            <a:srgbClr val="2F8A28"/>
-          </a:solidFill>
-          <a:ln w="12700">
-            <a:solidFill>
-              <a:srgbClr val="2F8A28"/>
-            </a:solidFill>
-            <a:prstDash val="solid"/>
-          </a:ln>
-        </p:spPr>
+          <p:cNvPr id="14" name="Text 12"/>
+          <p:cNvSpPr/>
+          <p:nvPr/>
+        </p:nvSpPr>
+        <p:spPr>
+          <a:xfrm>
+            <a:off x="7799832" y="2935224"/>
+            <a:ext cx="3145536" cy="256032"/>
+          </a:xfrm>
+          <a:prstGeom prst="rect">
+            <a:avLst/>
+          </a:prstGeom>
+          <a:noFill/>
+          <a:ln/>
+        </p:spPr>
+        <p:txBody>
+          <a:bodyPr wrap="square" lIns="0" tIns="0" rIns="0" bIns="0" rtlCol="0" anchor="ctr"/>
+          <a:lstStyle/>
+          <a:p>
+            <a:pPr indent="0" marL="0">
+              <a:buNone/>
+            </a:pPr>
+            <a:r>
+              <a:rPr lang="en-US" sz="1300" b="1" dirty="0">
+                <a:solidFill>
+                  <a:srgbClr val="0068B7"/>
+                </a:solidFill>
+                <a:latin typeface="Aptos" pitchFamily="34" charset="0"/>
+                <a:ea typeface="Aptos" pitchFamily="34" charset="-122"/>
+                <a:cs typeface="Aptos" pitchFamily="34" charset="-120"/>
+              </a:rPr>
+              <a:t>Concept checkpoints</a:t>
+            </a:r>
+            <a:endParaRPr lang="en-US" sz="1300" dirty="0"/>
+          </a:p>
+        </p:txBody>
+      </p:sp>
+      <p:sp>
+        <p:nvSpPr>
+          <p:cNvPr id="15" name="Text 13"/>
+          <p:cNvSpPr/>
+          <p:nvPr/>
+        </p:nvSpPr>
+        <p:spPr>
+          <a:xfrm>
+            <a:off x="7818120" y="3300984"/>
+            <a:ext cx="3090672" cy="877824"/>
+          </a:xfrm>
+          <a:prstGeom prst="rect">
+            <a:avLst/>
+          </a:prstGeom>
+          <a:noFill/>
+          <a:ln/>
+        </p:spPr>
+        <p:txBody>
+          <a:bodyPr wrap="square" lIns="254" tIns="254" rIns="254" bIns="254" rtlCol="0" anchor="t">
+            <a:normAutofit/>
+          </a:bodyPr>
+          <a:lstStyle/>
+          <a:p>
+            <a:r>
+              <a:rPr lang="en-US" sz="1380" dirty="0">
+                <a:solidFill>
+                  <a:srgbClr val="17364A"/>
+                </a:solidFill>
+                <a:latin typeface="Aptos" pitchFamily="34" charset="0"/>
+                <a:ea typeface="Aptos" pitchFamily="34" charset="-122"/>
+                <a:cs typeface="Aptos" pitchFamily="34" charset="-120"/>
+              </a:rPr>
+              <a:t>A brainstormed outline, internal draft, public advisory, case summary, policy synthesis,.</a:t>
+            </a:r>
+            <a:endParaRPr lang="en-US" sz="1380" dirty="0"/>
+          </a:p>
+          <a:p>
+            <a:r>
+              <a:rPr lang="en-US" sz="1380" dirty="0">
+                <a:solidFill>
+                  <a:srgbClr val="17364A"/>
+                </a:solidFill>
+                <a:latin typeface="Aptos" pitchFamily="34" charset="0"/>
+                <a:ea typeface="Aptos" pitchFamily="34" charset="-122"/>
+                <a:cs typeface="Aptos" pitchFamily="34" charset="-120"/>
+              </a:rPr>
+              <a:t>Factuality review requires comparison to source material.</a:t>
+            </a:r>
+            <a:endParaRPr lang="en-US" sz="1380" dirty="0"/>
+          </a:p>
+          <a:p>
+            <a:r>
+              <a:rPr lang="en-US" sz="1380" dirty="0">
+                <a:solidFill>
+                  <a:srgbClr val="17364A"/>
+                </a:solidFill>
+                <a:latin typeface="Aptos" pitchFamily="34" charset="0"/>
+                <a:ea typeface="Aptos" pitchFamily="34" charset="-122"/>
+                <a:cs typeface="Aptos" pitchFamily="34" charset="-120"/>
+              </a:rPr>
+              <a:t>Reviewers should check names, dates, numbers, conditions, legal requirements,.</a:t>
+            </a:r>
+            <a:endParaRPr lang="en-US" sz="1380" dirty="0"/>
+          </a:p>
+        </p:txBody>
       </p:sp>
       <p:sp>
         <p:nvSpPr>
           <p:cNvPr id="16" name="Shape 14"/>
-          <p:cNvSpPr/>
-          <p:nvPr/>
-        </p:nvSpPr>
-        <p:spPr>
-          <a:xfrm>
-            <a:off x="9015984" y="2880360"/>
-            <a:ext cx="256032" cy="1005840"/>
-          </a:xfrm>
-          <a:prstGeom prst="rect">
-            <a:avLst/>
-          </a:prstGeom>
-          <a:solidFill>
-            <a:srgbClr val="D69A2D"/>
-          </a:solidFill>
-          <a:ln w="12700">
-            <a:solidFill>
-              <a:srgbClr val="D69A2D"/>
-            </a:solidFill>
-            <a:prstDash val="solid"/>
-          </a:ln>
-        </p:spPr>
-      </p:sp>
-      <p:sp>
-        <p:nvSpPr>
-          <p:cNvPr id="17" name="Shape 15"/>
-          <p:cNvSpPr/>
-          <p:nvPr/>
-        </p:nvSpPr>
-        <p:spPr>
-          <a:xfrm>
-            <a:off x="9454896" y="3319272"/>
-            <a:ext cx="256032" cy="566928"/>
-          </a:xfrm>
-          <a:prstGeom prst="rect">
-            <a:avLst/>
-          </a:prstGeom>
-          <a:solidFill>
-            <a:srgbClr val="6A4CA3"/>
-          </a:solidFill>
-          <a:ln w="12700">
-            <a:solidFill>
-              <a:srgbClr val="6A4CA3"/>
-            </a:solidFill>
-            <a:prstDash val="solid"/>
-          </a:ln>
-        </p:spPr>
-      </p:sp>
-      <p:sp>
-        <p:nvSpPr>
-          <p:cNvPr id="18" name="Shape 16"/>
-          <p:cNvSpPr/>
-          <p:nvPr/>
-        </p:nvSpPr>
-        <p:spPr>
-          <a:xfrm>
-            <a:off x="8019288" y="3886200"/>
-            <a:ext cx="2706624" cy="0"/>
-          </a:xfrm>
-          <a:prstGeom prst="line">
-            <a:avLst/>
-          </a:prstGeom>
-          <a:noFill/>
-          <a:ln w="15240">
-            <a:solidFill>
-              <a:srgbClr val="003A63"/>
-            </a:solidFill>
-            <a:prstDash val="solid"/>
-          </a:ln>
-        </p:spPr>
-      </p:sp>
-      <p:sp>
-        <p:nvSpPr>
-          <p:cNvPr id="19" name="Text 17"/>
-          <p:cNvSpPr/>
-          <p:nvPr/>
-        </p:nvSpPr>
-        <p:spPr>
-          <a:xfrm>
-            <a:off x="7863840" y="3017520"/>
-            <a:ext cx="3017520" cy="201168"/>
-          </a:xfrm>
-          <a:prstGeom prst="rect">
-            <a:avLst/>
-          </a:prstGeom>
-          <a:noFill/>
-          <a:ln/>
-        </p:spPr>
-        <p:txBody>
-          <a:bodyPr wrap="square" lIns="0" tIns="0" rIns="0" bIns="0" rtlCol="0" anchor="ctr"/>
-          <a:lstStyle/>
-          <a:p>
-            <a:pPr algn="ctr" indent="0" marL="0">
-              <a:buNone/>
-            </a:pPr>
-            <a:r>
-              <a:rPr lang="en-US" sz="1050" b="1" dirty="0">
-                <a:solidFill>
-                  <a:srgbClr val="003A63"/>
-                </a:solidFill>
-                <a:latin typeface="Aptos" pitchFamily="34" charset="0"/>
-                <a:ea typeface="Aptos" pitchFamily="34" charset="-122"/>
-                <a:cs typeface="Aptos" pitchFamily="34" charset="-120"/>
-              </a:rPr>
-              <a:t>Measure and monitor</a:t>
-            </a:r>
-            <a:endParaRPr lang="en-US" sz="1050" dirty="0"/>
-          </a:p>
-        </p:txBody>
-      </p:sp>
-      <p:sp>
-        <p:nvSpPr>
-          <p:cNvPr id="20" name="Shape 18"/>
           <p:cNvSpPr/>
           <p:nvPr/>
         </p:nvSpPr>
@@ -3728,7 +3669,7 @@
       </p:sp>
       <p:sp>
         <p:nvSpPr>
-          <p:cNvPr id="21" name="Text 19"/>
+          <p:cNvPr id="17" name="Text 15"/>
           <p:cNvSpPr/>
           <p:nvPr/>
         </p:nvSpPr>
@@ -3767,7 +3708,7 @@
       </p:sp>
       <p:sp>
         <p:nvSpPr>
-          <p:cNvPr id="22" name="Text 20"/>
+          <p:cNvPr id="18" name="Text 16"/>
           <p:cNvSpPr/>
           <p:nvPr/>
         </p:nvSpPr>
@@ -4275,13 +4216,11 @@
             </a:avLst>
           </a:prstGeom>
           <a:solidFill>
-            <a:srgbClr val="FFFFFF">
-              <a:alpha val="88000"/>
-            </a:srgbClr>
+            <a:srgbClr val="FFFFFF"/>
           </a:solidFill>
           <a:ln w="12700">
             <a:solidFill>
-              <a:srgbClr val="D6E8F2"/>
+              <a:srgbClr val="B9D7E6"/>
             </a:solidFill>
             <a:prstDash val="solid"/>
           </a:ln>
@@ -4289,169 +4228,112 @@
       </p:sp>
       <p:sp>
         <p:nvSpPr>
-          <p:cNvPr id="14" name="Shape 12"/>
-          <p:cNvSpPr/>
-          <p:nvPr/>
-        </p:nvSpPr>
-        <p:spPr>
-          <a:xfrm>
-            <a:off x="8138160" y="3474720"/>
-            <a:ext cx="256032" cy="411480"/>
-          </a:xfrm>
-          <a:prstGeom prst="rect">
-            <a:avLst/>
-          </a:prstGeom>
-          <a:solidFill>
-            <a:srgbClr val="0068B7"/>
-          </a:solidFill>
-          <a:ln w="12700">
-            <a:solidFill>
-              <a:srgbClr val="0068B7"/>
-            </a:solidFill>
-            <a:prstDash val="solid"/>
-          </a:ln>
-        </p:spPr>
-      </p:sp>
-      <p:sp>
-        <p:nvSpPr>
-          <p:cNvPr id="15" name="Shape 13"/>
-          <p:cNvSpPr/>
-          <p:nvPr/>
-        </p:nvSpPr>
-        <p:spPr>
-          <a:xfrm>
-            <a:off x="8577072" y="3172968"/>
-            <a:ext cx="256032" cy="713232"/>
-          </a:xfrm>
-          <a:prstGeom prst="rect">
-            <a:avLst/>
-          </a:prstGeom>
-          <a:solidFill>
-            <a:srgbClr val="2F8A28"/>
-          </a:solidFill>
-          <a:ln w="12700">
-            <a:solidFill>
-              <a:srgbClr val="2F8A28"/>
-            </a:solidFill>
-            <a:prstDash val="solid"/>
-          </a:ln>
-        </p:spPr>
+          <p:cNvPr id="14" name="Text 12"/>
+          <p:cNvSpPr/>
+          <p:nvPr/>
+        </p:nvSpPr>
+        <p:spPr>
+          <a:xfrm>
+            <a:off x="7799832" y="2935224"/>
+            <a:ext cx="3145536" cy="256032"/>
+          </a:xfrm>
+          <a:prstGeom prst="rect">
+            <a:avLst/>
+          </a:prstGeom>
+          <a:noFill/>
+          <a:ln/>
+        </p:spPr>
+        <p:txBody>
+          <a:bodyPr wrap="square" lIns="0" tIns="0" rIns="0" bIns="0" rtlCol="0" anchor="ctr"/>
+          <a:lstStyle/>
+          <a:p>
+            <a:pPr indent="0" marL="0">
+              <a:buNone/>
+            </a:pPr>
+            <a:r>
+              <a:rPr lang="en-US" sz="1300" b="1" dirty="0">
+                <a:solidFill>
+                  <a:srgbClr val="0068B7"/>
+                </a:solidFill>
+                <a:latin typeface="Aptos" pitchFamily="34" charset="0"/>
+                <a:ea typeface="Aptos" pitchFamily="34" charset="-122"/>
+                <a:cs typeface="Aptos" pitchFamily="34" charset="-120"/>
+              </a:rPr>
+              <a:t>Concept checkpoints</a:t>
+            </a:r>
+            <a:endParaRPr lang="en-US" sz="1300" dirty="0"/>
+          </a:p>
+        </p:txBody>
+      </p:sp>
+      <p:sp>
+        <p:nvSpPr>
+          <p:cNvPr id="15" name="Text 13"/>
+          <p:cNvSpPr/>
+          <p:nvPr/>
+        </p:nvSpPr>
+        <p:spPr>
+          <a:xfrm>
+            <a:off x="7818120" y="3300984"/>
+            <a:ext cx="3090672" cy="877824"/>
+          </a:xfrm>
+          <a:prstGeom prst="rect">
+            <a:avLst/>
+          </a:prstGeom>
+          <a:noFill/>
+          <a:ln/>
+        </p:spPr>
+        <p:txBody>
+          <a:bodyPr wrap="square" lIns="254" tIns="254" rIns="254" bIns="254" rtlCol="0" anchor="t">
+            <a:normAutofit/>
+          </a:bodyPr>
+          <a:lstStyle/>
+          <a:p>
+            <a:r>
+              <a:rPr lang="en-US" sz="1380" dirty="0">
+                <a:solidFill>
+                  <a:srgbClr val="17364A"/>
+                </a:solidFill>
+                <a:latin typeface="Aptos" pitchFamily="34" charset="0"/>
+                <a:ea typeface="Aptos" pitchFamily="34" charset="-122"/>
+                <a:cs typeface="Aptos" pitchFamily="34" charset="-120"/>
+              </a:rPr>
+              <a:t>Reviewers should assess reading level, language access, disability accessibility, cultural.</a:t>
+            </a:r>
+            <a:endParaRPr lang="en-US" sz="1380" dirty="0"/>
+          </a:p>
+          <a:p>
+            <a:r>
+              <a:rPr lang="en-US" sz="1380" dirty="0">
+                <a:solidFill>
+                  <a:srgbClr val="17364A"/>
+                </a:solidFill>
+                <a:latin typeface="Aptos" pitchFamily="34" charset="0"/>
+                <a:ea typeface="Aptos" pitchFamily="34" charset="-122"/>
+                <a:cs typeface="Aptos" pitchFamily="34" charset="-120"/>
+              </a:rPr>
+              <a:t>Translation or multilingual adaptation should include review by qualified humans when used.</a:t>
+            </a:r>
+            <a:endParaRPr lang="en-US" sz="1380" dirty="0"/>
+          </a:p>
+          <a:p>
+            <a:r>
+              <a:rPr lang="en-US" sz="1380" dirty="0">
+                <a:solidFill>
+                  <a:srgbClr val="17364A"/>
+                </a:solidFill>
+                <a:latin typeface="Aptos" pitchFamily="34" charset="0"/>
+                <a:ea typeface="Aptos" pitchFamily="34" charset="-122"/>
+                <a:cs typeface="Aptos" pitchFamily="34" charset="-120"/>
+              </a:rPr>
+              <a:t>Documentation should be proportionate to risk.</a:t>
+            </a:r>
+            <a:endParaRPr lang="en-US" sz="1380" dirty="0"/>
+          </a:p>
+        </p:txBody>
       </p:sp>
       <p:sp>
         <p:nvSpPr>
           <p:cNvPr id="16" name="Shape 14"/>
-          <p:cNvSpPr/>
-          <p:nvPr/>
-        </p:nvSpPr>
-        <p:spPr>
-          <a:xfrm>
-            <a:off x="9015984" y="2880360"/>
-            <a:ext cx="256032" cy="1005840"/>
-          </a:xfrm>
-          <a:prstGeom prst="rect">
-            <a:avLst/>
-          </a:prstGeom>
-          <a:solidFill>
-            <a:srgbClr val="D69A2D"/>
-          </a:solidFill>
-          <a:ln w="12700">
-            <a:solidFill>
-              <a:srgbClr val="D69A2D"/>
-            </a:solidFill>
-            <a:prstDash val="solid"/>
-          </a:ln>
-        </p:spPr>
-      </p:sp>
-      <p:sp>
-        <p:nvSpPr>
-          <p:cNvPr id="17" name="Shape 15"/>
-          <p:cNvSpPr/>
-          <p:nvPr/>
-        </p:nvSpPr>
-        <p:spPr>
-          <a:xfrm>
-            <a:off x="9454896" y="3319272"/>
-            <a:ext cx="256032" cy="566928"/>
-          </a:xfrm>
-          <a:prstGeom prst="rect">
-            <a:avLst/>
-          </a:prstGeom>
-          <a:solidFill>
-            <a:srgbClr val="6A4CA3"/>
-          </a:solidFill>
-          <a:ln w="12700">
-            <a:solidFill>
-              <a:srgbClr val="6A4CA3"/>
-            </a:solidFill>
-            <a:prstDash val="solid"/>
-          </a:ln>
-        </p:spPr>
-      </p:sp>
-      <p:sp>
-        <p:nvSpPr>
-          <p:cNvPr id="18" name="Shape 16"/>
-          <p:cNvSpPr/>
-          <p:nvPr/>
-        </p:nvSpPr>
-        <p:spPr>
-          <a:xfrm>
-            <a:off x="8019288" y="3886200"/>
-            <a:ext cx="2706624" cy="0"/>
-          </a:xfrm>
-          <a:prstGeom prst="line">
-            <a:avLst/>
-          </a:prstGeom>
-          <a:noFill/>
-          <a:ln w="15240">
-            <a:solidFill>
-              <a:srgbClr val="003A63"/>
-            </a:solidFill>
-            <a:prstDash val="solid"/>
-          </a:ln>
-        </p:spPr>
-      </p:sp>
-      <p:sp>
-        <p:nvSpPr>
-          <p:cNvPr id="19" name="Text 17"/>
-          <p:cNvSpPr/>
-          <p:nvPr/>
-        </p:nvSpPr>
-        <p:spPr>
-          <a:xfrm>
-            <a:off x="7863840" y="3017520"/>
-            <a:ext cx="3017520" cy="201168"/>
-          </a:xfrm>
-          <a:prstGeom prst="rect">
-            <a:avLst/>
-          </a:prstGeom>
-          <a:noFill/>
-          <a:ln/>
-        </p:spPr>
-        <p:txBody>
-          <a:bodyPr wrap="square" lIns="0" tIns="0" rIns="0" bIns="0" rtlCol="0" anchor="ctr"/>
-          <a:lstStyle/>
-          <a:p>
-            <a:pPr algn="ctr" indent="0" marL="0">
-              <a:buNone/>
-            </a:pPr>
-            <a:r>
-              <a:rPr lang="en-US" sz="1050" b="1" dirty="0">
-                <a:solidFill>
-                  <a:srgbClr val="003A63"/>
-                </a:solidFill>
-                <a:latin typeface="Aptos" pitchFamily="34" charset="0"/>
-                <a:ea typeface="Aptos" pitchFamily="34" charset="-122"/>
-                <a:cs typeface="Aptos" pitchFamily="34" charset="-120"/>
-              </a:rPr>
-              <a:t>Measure and monitor</a:t>
-            </a:r>
-            <a:endParaRPr lang="en-US" sz="1050" dirty="0"/>
-          </a:p>
-        </p:txBody>
-      </p:sp>
-      <p:sp>
-        <p:nvSpPr>
-          <p:cNvPr id="20" name="Shape 18"/>
           <p:cNvSpPr/>
           <p:nvPr/>
         </p:nvSpPr>
@@ -4478,7 +4360,7 @@
       </p:sp>
       <p:sp>
         <p:nvSpPr>
-          <p:cNvPr id="21" name="Text 19"/>
+          <p:cNvPr id="17" name="Text 15"/>
           <p:cNvSpPr/>
           <p:nvPr/>
         </p:nvSpPr>
@@ -4517,7 +4399,7 @@
       </p:sp>
       <p:sp>
         <p:nvSpPr>
-          <p:cNvPr id="22" name="Text 20"/>
+          <p:cNvPr id="18" name="Text 16"/>
           <p:cNvSpPr/>
           <p:nvPr/>
         </p:nvSpPr>
@@ -5025,13 +4907,11 @@
             </a:avLst>
           </a:prstGeom>
           <a:solidFill>
-            <a:srgbClr val="FFFFFF">
-              <a:alpha val="88000"/>
-            </a:srgbClr>
+            <a:srgbClr val="FFFFFF"/>
           </a:solidFill>
           <a:ln w="12700">
             <a:solidFill>
-              <a:srgbClr val="D6E8F2"/>
+              <a:srgbClr val="B9D7E6"/>
             </a:solidFill>
             <a:prstDash val="solid"/>
           </a:ln>
@@ -5039,26 +4919,42 @@
       </p:sp>
       <p:sp>
         <p:nvSpPr>
-          <p:cNvPr id="14" name="Shape 12"/>
-          <p:cNvSpPr/>
-          <p:nvPr/>
-        </p:nvSpPr>
-        <p:spPr>
-          <a:xfrm>
-            <a:off x="8046720" y="3108960"/>
-            <a:ext cx="2651760" cy="896112"/>
-          </a:xfrm>
-          <a:prstGeom prst="arc">
-            <a:avLst/>
-          </a:prstGeom>
-          <a:noFill/>
-          <a:ln w="25400">
-            <a:solidFill>
-              <a:srgbClr val="0068B7"/>
-            </a:solidFill>
-            <a:prstDash val="solid"/>
-          </a:ln>
-        </p:spPr>
+          <p:cNvPr id="14" name="Text 12"/>
+          <p:cNvSpPr/>
+          <p:nvPr/>
+        </p:nvSpPr>
+        <p:spPr>
+          <a:xfrm>
+            <a:off x="7799832" y="2935224"/>
+            <a:ext cx="3145536" cy="256032"/>
+          </a:xfrm>
+          <a:prstGeom prst="rect">
+            <a:avLst/>
+          </a:prstGeom>
+          <a:noFill/>
+          <a:ln/>
+        </p:spPr>
+        <p:txBody>
+          <a:bodyPr wrap="square" lIns="0" tIns="0" rIns="0" bIns="0" rtlCol="0" anchor="ctr"/>
+          <a:lstStyle/>
+          <a:p>
+            <a:pPr indent="0" marL="0">
+              <a:buNone/>
+            </a:pPr>
+            <a:r>
+              <a:rPr lang="en-US" sz="1300" b="1" dirty="0">
+                <a:solidFill>
+                  <a:srgbClr val="0068B7"/>
+                </a:solidFill>
+                <a:latin typeface="Aptos" pitchFamily="34" charset="0"/>
+                <a:ea typeface="Aptos" pitchFamily="34" charset="-122"/>
+                <a:cs typeface="Aptos" pitchFamily="34" charset="-120"/>
+              </a:rPr>
+              <a:t>Concept checkpoints</a:t>
+            </a:r>
+            <a:endParaRPr lang="en-US" sz="1300" dirty="0"/>
+          </a:p>
+        </p:txBody>
       </p:sp>
       <p:sp>
         <p:nvSpPr>
@@ -5068,102 +4964,67 @@
         </p:nvSpPr>
         <p:spPr>
           <a:xfrm>
-            <a:off x="7909560" y="3099816"/>
-            <a:ext cx="2926080" cy="256032"/>
-          </a:xfrm>
-          <a:prstGeom prst="rect">
-            <a:avLst/>
-          </a:prstGeom>
-          <a:noFill/>
-          <a:ln/>
-        </p:spPr>
-        <p:txBody>
-          <a:bodyPr wrap="square" lIns="0" tIns="0" rIns="0" bIns="0" rtlCol="0" anchor="ctr"/>
-          <a:lstStyle/>
-          <a:p>
-            <a:pPr algn="ctr" indent="0" marL="0">
-              <a:buNone/>
-            </a:pPr>
-            <a:r>
-              <a:rPr lang="en-US" sz="1500" b="1" dirty="0">
-                <a:solidFill>
-                  <a:srgbClr val="003A63"/>
-                </a:solidFill>
-                <a:latin typeface="Aptos" pitchFamily="34" charset="0"/>
-                <a:ea typeface="Aptos" pitchFamily="34" charset="-122"/>
-                <a:cs typeface="Aptos" pitchFamily="34" charset="-120"/>
-              </a:rPr>
-              <a:t>Risk</a:t>
-            </a:r>
-            <a:endParaRPr lang="en-US" sz="1500" dirty="0"/>
+            <a:off x="7818120" y="3300984"/>
+            <a:ext cx="3090672" cy="877824"/>
+          </a:xfrm>
+          <a:prstGeom prst="rect">
+            <a:avLst/>
+          </a:prstGeom>
+          <a:noFill/>
+          <a:ln/>
+        </p:spPr>
+        <p:txBody>
+          <a:bodyPr wrap="square" lIns="254" tIns="254" rIns="254" bIns="254" rtlCol="0" anchor="t">
+            <a:normAutofit/>
+          </a:bodyPr>
+          <a:lstStyle/>
+          <a:p>
+            <a:r>
+              <a:rPr lang="en-US" sz="1380" dirty="0">
+                <a:solidFill>
+                  <a:srgbClr val="17364A"/>
+                </a:solidFill>
+                <a:latin typeface="Aptos" pitchFamily="34" charset="0"/>
+                <a:ea typeface="Aptos" pitchFamily="34" charset="-122"/>
+                <a:cs typeface="Aptos" pitchFamily="34" charset="-120"/>
+              </a:rPr>
+              <a:t>Omitted caveats.</a:t>
+            </a:r>
+            <a:endParaRPr lang="en-US" sz="1380" dirty="0"/>
+          </a:p>
+          <a:p>
+            <a:r>
+              <a:rPr lang="en-US" sz="1380" dirty="0">
+                <a:solidFill>
+                  <a:srgbClr val="17364A"/>
+                </a:solidFill>
+                <a:latin typeface="Aptos" pitchFamily="34" charset="0"/>
+                <a:ea typeface="Aptos" pitchFamily="34" charset="-122"/>
+                <a:cs typeface="Aptos" pitchFamily="34" charset="-120"/>
+              </a:rPr>
+              <a:t>AI may simplify uncertainty away.</a:t>
+            </a:r>
+            <a:endParaRPr lang="en-US" sz="1380" dirty="0"/>
+          </a:p>
+          <a:p>
+            <a:r>
+              <a:rPr lang="en-US" sz="1380" dirty="0">
+                <a:solidFill>
+                  <a:srgbClr val="17364A"/>
+                </a:solidFill>
+                <a:latin typeface="Aptos" pitchFamily="34" charset="0"/>
+                <a:ea typeface="Aptos" pitchFamily="34" charset="-122"/>
+                <a:cs typeface="Aptos" pitchFamily="34" charset="-120"/>
+              </a:rPr>
+              <a:t>Guardrails include completeness review and required caveat checks.</a:t>
+            </a:r>
+            <a:endParaRPr lang="en-US" sz="1380" dirty="0"/>
           </a:p>
         </p:txBody>
       </p:sp>
       <p:sp>
         <p:nvSpPr>
           <p:cNvPr id="16" name="Shape 14"/>
-          <p:cNvSpPr/>
-          <p:nvPr/>
-        </p:nvSpPr>
-        <p:spPr>
-          <a:xfrm>
-            <a:off x="8366760" y="3639312"/>
-            <a:ext cx="2011680" cy="0"/>
-          </a:xfrm>
-          <a:prstGeom prst="line">
-            <a:avLst/>
-          </a:prstGeom>
-          <a:noFill/>
-          <a:ln w="63500">
-            <a:solidFill>
-              <a:srgbClr val="2F8A28"/>
-            </a:solidFill>
-            <a:prstDash val="solid"/>
-          </a:ln>
-        </p:spPr>
-      </p:sp>
-      <p:sp>
-        <p:nvSpPr>
-          <p:cNvPr id="17" name="Text 15"/>
-          <p:cNvSpPr/>
-          <p:nvPr/>
-        </p:nvSpPr>
-        <p:spPr>
-          <a:xfrm>
-            <a:off x="7909560" y="3849624"/>
-            <a:ext cx="2926080" cy="164592"/>
-          </a:xfrm>
-          <a:prstGeom prst="rect">
-            <a:avLst/>
-          </a:prstGeom>
-          <a:noFill/>
-          <a:ln/>
-        </p:spPr>
-        <p:txBody>
-          <a:bodyPr wrap="square" lIns="0" tIns="0" rIns="0" bIns="0" rtlCol="0" anchor="ctr"/>
-          <a:lstStyle/>
-          <a:p>
-            <a:pPr algn="ctr" indent="0" marL="0">
-              <a:buNone/>
-            </a:pPr>
-            <a:r>
-              <a:rPr lang="en-US" sz="900" dirty="0">
-                <a:solidFill>
-                  <a:srgbClr val="003A63"/>
-                </a:solidFill>
-                <a:latin typeface="Aptos" pitchFamily="34" charset="0"/>
-                <a:ea typeface="Aptos" pitchFamily="34" charset="-122"/>
-                <a:cs typeface="Aptos" pitchFamily="34" charset="-120"/>
-              </a:rPr>
-              <a:t>Human review</a:t>
-            </a:r>
-            <a:endParaRPr lang="en-US" sz="900" dirty="0"/>
-          </a:p>
-        </p:txBody>
-      </p:sp>
-      <p:sp>
-        <p:nvSpPr>
-          <p:cNvPr id="18" name="Shape 16"/>
           <p:cNvSpPr/>
           <p:nvPr/>
         </p:nvSpPr>
@@ -5190,7 +5051,7 @@
       </p:sp>
       <p:sp>
         <p:nvSpPr>
-          <p:cNvPr id="19" name="Text 17"/>
+          <p:cNvPr id="17" name="Text 15"/>
           <p:cNvSpPr/>
           <p:nvPr/>
         </p:nvSpPr>
@@ -5229,7 +5090,7 @@
       </p:sp>
       <p:sp>
         <p:nvSpPr>
-          <p:cNvPr id="20" name="Text 18"/>
+          <p:cNvPr id="18" name="Text 16"/>
           <p:cNvSpPr/>
           <p:nvPr/>
         </p:nvSpPr>
@@ -5737,13 +5598,11 @@
             </a:avLst>
           </a:prstGeom>
           <a:solidFill>
-            <a:srgbClr val="FFFFFF">
-              <a:alpha val="88000"/>
-            </a:srgbClr>
+            <a:srgbClr val="FFFFFF"/>
           </a:solidFill>
           <a:ln w="12700">
             <a:solidFill>
-              <a:srgbClr val="D6E8F2"/>
+              <a:srgbClr val="B9D7E6"/>
             </a:solidFill>
             <a:prstDash val="solid"/>
           </a:ln>
@@ -5751,26 +5610,42 @@
       </p:sp>
       <p:sp>
         <p:nvSpPr>
-          <p:cNvPr id="14" name="Shape 12"/>
-          <p:cNvSpPr/>
-          <p:nvPr/>
-        </p:nvSpPr>
-        <p:spPr>
-          <a:xfrm>
-            <a:off x="8046720" y="3108960"/>
-            <a:ext cx="2651760" cy="896112"/>
-          </a:xfrm>
-          <a:prstGeom prst="arc">
-            <a:avLst/>
-          </a:prstGeom>
-          <a:noFill/>
-          <a:ln w="25400">
-            <a:solidFill>
-              <a:srgbClr val="0068B7"/>
-            </a:solidFill>
-            <a:prstDash val="solid"/>
-          </a:ln>
-        </p:spPr>
+          <p:cNvPr id="14" name="Text 12"/>
+          <p:cNvSpPr/>
+          <p:nvPr/>
+        </p:nvSpPr>
+        <p:spPr>
+          <a:xfrm>
+            <a:off x="7799832" y="2935224"/>
+            <a:ext cx="3145536" cy="256032"/>
+          </a:xfrm>
+          <a:prstGeom prst="rect">
+            <a:avLst/>
+          </a:prstGeom>
+          <a:noFill/>
+          <a:ln/>
+        </p:spPr>
+        <p:txBody>
+          <a:bodyPr wrap="square" lIns="0" tIns="0" rIns="0" bIns="0" rtlCol="0" anchor="ctr"/>
+          <a:lstStyle/>
+          <a:p>
+            <a:pPr indent="0" marL="0">
+              <a:buNone/>
+            </a:pPr>
+            <a:r>
+              <a:rPr lang="en-US" sz="1300" b="1" dirty="0">
+                <a:solidFill>
+                  <a:srgbClr val="0068B7"/>
+                </a:solidFill>
+                <a:latin typeface="Aptos" pitchFamily="34" charset="0"/>
+                <a:ea typeface="Aptos" pitchFamily="34" charset="-122"/>
+                <a:cs typeface="Aptos" pitchFamily="34" charset="-120"/>
+              </a:rPr>
+              <a:t>Concept checkpoints</a:t>
+            </a:r>
+            <a:endParaRPr lang="en-US" sz="1300" dirty="0"/>
+          </a:p>
+        </p:txBody>
       </p:sp>
       <p:sp>
         <p:nvSpPr>
@@ -5780,102 +5655,67 @@
         </p:nvSpPr>
         <p:spPr>
           <a:xfrm>
-            <a:off x="7909560" y="3099816"/>
-            <a:ext cx="2926080" cy="256032"/>
-          </a:xfrm>
-          <a:prstGeom prst="rect">
-            <a:avLst/>
-          </a:prstGeom>
-          <a:noFill/>
-          <a:ln/>
-        </p:spPr>
-        <p:txBody>
-          <a:bodyPr wrap="square" lIns="0" tIns="0" rIns="0" bIns="0" rtlCol="0" anchor="ctr"/>
-          <a:lstStyle/>
-          <a:p>
-            <a:pPr algn="ctr" indent="0" marL="0">
-              <a:buNone/>
-            </a:pPr>
-            <a:r>
-              <a:rPr lang="en-US" sz="1500" b="1" dirty="0">
-                <a:solidFill>
-                  <a:srgbClr val="003A63"/>
-                </a:solidFill>
-                <a:latin typeface="Aptos" pitchFamily="34" charset="0"/>
-                <a:ea typeface="Aptos" pitchFamily="34" charset="-122"/>
-                <a:cs typeface="Aptos" pitchFamily="34" charset="-120"/>
-              </a:rPr>
-              <a:t>Risk</a:t>
-            </a:r>
-            <a:endParaRPr lang="en-US" sz="1500" dirty="0"/>
+            <a:off x="7818120" y="3300984"/>
+            <a:ext cx="3090672" cy="877824"/>
+          </a:xfrm>
+          <a:prstGeom prst="rect">
+            <a:avLst/>
+          </a:prstGeom>
+          <a:noFill/>
+          <a:ln/>
+        </p:spPr>
+        <p:txBody>
+          <a:bodyPr wrap="square" lIns="254" tIns="254" rIns="254" bIns="254" rtlCol="0" anchor="t">
+            <a:normAutofit/>
+          </a:bodyPr>
+          <a:lstStyle/>
+          <a:p>
+            <a:r>
+              <a:rPr lang="en-US" sz="1380" dirty="0">
+                <a:solidFill>
+                  <a:srgbClr val="17364A"/>
+                </a:solidFill>
+                <a:latin typeface="Aptos" pitchFamily="34" charset="0"/>
+                <a:ea typeface="Aptos" pitchFamily="34" charset="-122"/>
+                <a:cs typeface="Aptos" pitchFamily="34" charset="-120"/>
+              </a:rPr>
+              <a:t>Privacy exposure.</a:t>
+            </a:r>
+            <a:endParaRPr lang="en-US" sz="1380" dirty="0"/>
+          </a:p>
+          <a:p>
+            <a:r>
+              <a:rPr lang="en-US" sz="1380" dirty="0">
+                <a:solidFill>
+                  <a:srgbClr val="17364A"/>
+                </a:solidFill>
+                <a:latin typeface="Aptos" pitchFamily="34" charset="0"/>
+                <a:ea typeface="Aptos" pitchFamily="34" charset="-122"/>
+                <a:cs typeface="Aptos" pitchFamily="34" charset="-120"/>
+              </a:rPr>
+              <a:t>Prompts or outputs may include sensitive data.</a:t>
+            </a:r>
+            <a:endParaRPr lang="en-US" sz="1380" dirty="0"/>
+          </a:p>
+          <a:p>
+            <a:r>
+              <a:rPr lang="en-US" sz="1380" dirty="0">
+                <a:solidFill>
+                  <a:srgbClr val="17364A"/>
+                </a:solidFill>
+                <a:latin typeface="Aptos" pitchFamily="34" charset="0"/>
+                <a:ea typeface="Aptos" pitchFamily="34" charset="-122"/>
+                <a:cs typeface="Aptos" pitchFamily="34" charset="-120"/>
+              </a:rPr>
+              <a:t>Guardrails include approved tools, data-use tiers, redaction, access controls, and records.</a:t>
+            </a:r>
+            <a:endParaRPr lang="en-US" sz="1380" dirty="0"/>
           </a:p>
         </p:txBody>
       </p:sp>
       <p:sp>
         <p:nvSpPr>
           <p:cNvPr id="16" name="Shape 14"/>
-          <p:cNvSpPr/>
-          <p:nvPr/>
-        </p:nvSpPr>
-        <p:spPr>
-          <a:xfrm>
-            <a:off x="8366760" y="3639312"/>
-            <a:ext cx="2011680" cy="0"/>
-          </a:xfrm>
-          <a:prstGeom prst="line">
-            <a:avLst/>
-          </a:prstGeom>
-          <a:noFill/>
-          <a:ln w="63500">
-            <a:solidFill>
-              <a:srgbClr val="2F8A28"/>
-            </a:solidFill>
-            <a:prstDash val="solid"/>
-          </a:ln>
-        </p:spPr>
-      </p:sp>
-      <p:sp>
-        <p:nvSpPr>
-          <p:cNvPr id="17" name="Text 15"/>
-          <p:cNvSpPr/>
-          <p:nvPr/>
-        </p:nvSpPr>
-        <p:spPr>
-          <a:xfrm>
-            <a:off x="7909560" y="3849624"/>
-            <a:ext cx="2926080" cy="164592"/>
-          </a:xfrm>
-          <a:prstGeom prst="rect">
-            <a:avLst/>
-          </a:prstGeom>
-          <a:noFill/>
-          <a:ln/>
-        </p:spPr>
-        <p:txBody>
-          <a:bodyPr wrap="square" lIns="0" tIns="0" rIns="0" bIns="0" rtlCol="0" anchor="ctr"/>
-          <a:lstStyle/>
-          <a:p>
-            <a:pPr algn="ctr" indent="0" marL="0">
-              <a:buNone/>
-            </a:pPr>
-            <a:r>
-              <a:rPr lang="en-US" sz="900" dirty="0">
-                <a:solidFill>
-                  <a:srgbClr val="003A63"/>
-                </a:solidFill>
-                <a:latin typeface="Aptos" pitchFamily="34" charset="0"/>
-                <a:ea typeface="Aptos" pitchFamily="34" charset="-122"/>
-                <a:cs typeface="Aptos" pitchFamily="34" charset="-120"/>
-              </a:rPr>
-              <a:t>Human review</a:t>
-            </a:r>
-            <a:endParaRPr lang="en-US" sz="900" dirty="0"/>
-          </a:p>
-        </p:txBody>
-      </p:sp>
-      <p:sp>
-        <p:nvSpPr>
-          <p:cNvPr id="18" name="Shape 16"/>
           <p:cNvSpPr/>
           <p:nvPr/>
         </p:nvSpPr>
@@ -5902,7 +5742,7 @@
       </p:sp>
       <p:sp>
         <p:nvSpPr>
-          <p:cNvPr id="19" name="Text 17"/>
+          <p:cNvPr id="17" name="Text 15"/>
           <p:cNvSpPr/>
           <p:nvPr/>
         </p:nvSpPr>
@@ -5941,7 +5781,7 @@
       </p:sp>
       <p:sp>
         <p:nvSpPr>
-          <p:cNvPr id="20" name="Text 18"/>
+          <p:cNvPr id="18" name="Text 16"/>
           <p:cNvSpPr/>
           <p:nvPr/>
         </p:nvSpPr>
@@ -6449,13 +6289,11 @@
             </a:avLst>
           </a:prstGeom>
           <a:solidFill>
-            <a:srgbClr val="FFFFFF">
-              <a:alpha val="88000"/>
-            </a:srgbClr>
+            <a:srgbClr val="FFFFFF"/>
           </a:solidFill>
           <a:ln w="12700">
             <a:solidFill>
-              <a:srgbClr val="D6E8F2"/>
+              <a:srgbClr val="B9D7E6"/>
             </a:solidFill>
             <a:prstDash val="solid"/>
           </a:ln>
@@ -6463,169 +6301,112 @@
       </p:sp>
       <p:sp>
         <p:nvSpPr>
-          <p:cNvPr id="14" name="Shape 12"/>
-          <p:cNvSpPr/>
-          <p:nvPr/>
-        </p:nvSpPr>
-        <p:spPr>
-          <a:xfrm>
-            <a:off x="8138160" y="3474720"/>
-            <a:ext cx="256032" cy="411480"/>
-          </a:xfrm>
-          <a:prstGeom prst="rect">
-            <a:avLst/>
-          </a:prstGeom>
-          <a:solidFill>
-            <a:srgbClr val="0068B7"/>
-          </a:solidFill>
-          <a:ln w="12700">
-            <a:solidFill>
-              <a:srgbClr val="0068B7"/>
-            </a:solidFill>
-            <a:prstDash val="solid"/>
-          </a:ln>
-        </p:spPr>
-      </p:sp>
-      <p:sp>
-        <p:nvSpPr>
-          <p:cNvPr id="15" name="Shape 13"/>
-          <p:cNvSpPr/>
-          <p:nvPr/>
-        </p:nvSpPr>
-        <p:spPr>
-          <a:xfrm>
-            <a:off x="8577072" y="3172968"/>
-            <a:ext cx="256032" cy="713232"/>
-          </a:xfrm>
-          <a:prstGeom prst="rect">
-            <a:avLst/>
-          </a:prstGeom>
-          <a:solidFill>
-            <a:srgbClr val="2F8A28"/>
-          </a:solidFill>
-          <a:ln w="12700">
-            <a:solidFill>
-              <a:srgbClr val="2F8A28"/>
-            </a:solidFill>
-            <a:prstDash val="solid"/>
-          </a:ln>
-        </p:spPr>
+          <p:cNvPr id="14" name="Text 12"/>
+          <p:cNvSpPr/>
+          <p:nvPr/>
+        </p:nvSpPr>
+        <p:spPr>
+          <a:xfrm>
+            <a:off x="7799832" y="2935224"/>
+            <a:ext cx="3145536" cy="256032"/>
+          </a:xfrm>
+          <a:prstGeom prst="rect">
+            <a:avLst/>
+          </a:prstGeom>
+          <a:noFill/>
+          <a:ln/>
+        </p:spPr>
+        <p:txBody>
+          <a:bodyPr wrap="square" lIns="0" tIns="0" rIns="0" bIns="0" rtlCol="0" anchor="ctr"/>
+          <a:lstStyle/>
+          <a:p>
+            <a:pPr indent="0" marL="0">
+              <a:buNone/>
+            </a:pPr>
+            <a:r>
+              <a:rPr lang="en-US" sz="1300" b="1" dirty="0">
+                <a:solidFill>
+                  <a:srgbClr val="0068B7"/>
+                </a:solidFill>
+                <a:latin typeface="Aptos" pitchFamily="34" charset="0"/>
+                <a:ea typeface="Aptos" pitchFamily="34" charset="-122"/>
+                <a:cs typeface="Aptos" pitchFamily="34" charset="-120"/>
+              </a:rPr>
+              <a:t>Concept checkpoints</a:t>
+            </a:r>
+            <a:endParaRPr lang="en-US" sz="1300" dirty="0"/>
+          </a:p>
+        </p:txBody>
+      </p:sp>
+      <p:sp>
+        <p:nvSpPr>
+          <p:cNvPr id="15" name="Text 13"/>
+          <p:cNvSpPr/>
+          <p:nvPr/>
+        </p:nvSpPr>
+        <p:spPr>
+          <a:xfrm>
+            <a:off x="7818120" y="3300984"/>
+            <a:ext cx="3090672" cy="877824"/>
+          </a:xfrm>
+          <a:prstGeom prst="rect">
+            <a:avLst/>
+          </a:prstGeom>
+          <a:noFill/>
+          <a:ln/>
+        </p:spPr>
+        <p:txBody>
+          <a:bodyPr wrap="square" lIns="254" tIns="254" rIns="254" bIns="254" rtlCol="0" anchor="t">
+            <a:normAutofit/>
+          </a:bodyPr>
+          <a:lstStyle/>
+          <a:p>
+            <a:r>
+              <a:rPr lang="en-US" sz="1380" dirty="0">
+                <a:solidFill>
+                  <a:srgbClr val="17364A"/>
+                </a:solidFill>
+                <a:latin typeface="Aptos" pitchFamily="34" charset="0"/>
+                <a:ea typeface="Aptos" pitchFamily="34" charset="-122"/>
+                <a:cs typeface="Aptos" pitchFamily="34" charset="-120"/>
+              </a:rPr>
+              <a:t>Generative AI output evaluation applies to drafting, summarization, classification,.</a:t>
+            </a:r>
+            <a:endParaRPr lang="en-US" sz="1380" dirty="0"/>
+          </a:p>
+          <a:p>
+            <a:r>
+              <a:rPr lang="en-US" sz="1380" dirty="0">
+                <a:solidFill>
+                  <a:srgbClr val="17364A"/>
+                </a:solidFill>
+                <a:latin typeface="Aptos" pitchFamily="34" charset="0"/>
+                <a:ea typeface="Aptos" pitchFamily="34" charset="-122"/>
+                <a:cs typeface="Aptos" pitchFamily="34" charset="-120"/>
+              </a:rPr>
+              <a:t>It is also relevant to RAG and agentic workflows because generated text may summarize.</a:t>
+            </a:r>
+            <a:endParaRPr lang="en-US" sz="1380" dirty="0"/>
+          </a:p>
+          <a:p>
+            <a:r>
+              <a:rPr lang="en-US" sz="1380" dirty="0">
+                <a:solidFill>
+                  <a:srgbClr val="17364A"/>
+                </a:solidFill>
+                <a:latin typeface="Aptos" pitchFamily="34" charset="0"/>
+                <a:ea typeface="Aptos" pitchFamily="34" charset="-122"/>
+                <a:cs typeface="Aptos" pitchFamily="34" charset="-120"/>
+              </a:rPr>
+              <a:t>The strongest approach is to create rubrics for specific output types.</a:t>
+            </a:r>
+            <a:endParaRPr lang="en-US" sz="1380" dirty="0"/>
+          </a:p>
+        </p:txBody>
       </p:sp>
       <p:sp>
         <p:nvSpPr>
           <p:cNvPr id="16" name="Shape 14"/>
-          <p:cNvSpPr/>
-          <p:nvPr/>
-        </p:nvSpPr>
-        <p:spPr>
-          <a:xfrm>
-            <a:off x="9015984" y="2880360"/>
-            <a:ext cx="256032" cy="1005840"/>
-          </a:xfrm>
-          <a:prstGeom prst="rect">
-            <a:avLst/>
-          </a:prstGeom>
-          <a:solidFill>
-            <a:srgbClr val="D69A2D"/>
-          </a:solidFill>
-          <a:ln w="12700">
-            <a:solidFill>
-              <a:srgbClr val="D69A2D"/>
-            </a:solidFill>
-            <a:prstDash val="solid"/>
-          </a:ln>
-        </p:spPr>
-      </p:sp>
-      <p:sp>
-        <p:nvSpPr>
-          <p:cNvPr id="17" name="Shape 15"/>
-          <p:cNvSpPr/>
-          <p:nvPr/>
-        </p:nvSpPr>
-        <p:spPr>
-          <a:xfrm>
-            <a:off x="9454896" y="3319272"/>
-            <a:ext cx="256032" cy="566928"/>
-          </a:xfrm>
-          <a:prstGeom prst="rect">
-            <a:avLst/>
-          </a:prstGeom>
-          <a:solidFill>
-            <a:srgbClr val="6A4CA3"/>
-          </a:solidFill>
-          <a:ln w="12700">
-            <a:solidFill>
-              <a:srgbClr val="6A4CA3"/>
-            </a:solidFill>
-            <a:prstDash val="solid"/>
-          </a:ln>
-        </p:spPr>
-      </p:sp>
-      <p:sp>
-        <p:nvSpPr>
-          <p:cNvPr id="18" name="Shape 16"/>
-          <p:cNvSpPr/>
-          <p:nvPr/>
-        </p:nvSpPr>
-        <p:spPr>
-          <a:xfrm>
-            <a:off x="8019288" y="3886200"/>
-            <a:ext cx="2706624" cy="0"/>
-          </a:xfrm>
-          <a:prstGeom prst="line">
-            <a:avLst/>
-          </a:prstGeom>
-          <a:noFill/>
-          <a:ln w="15240">
-            <a:solidFill>
-              <a:srgbClr val="003A63"/>
-            </a:solidFill>
-            <a:prstDash val="solid"/>
-          </a:ln>
-        </p:spPr>
-      </p:sp>
-      <p:sp>
-        <p:nvSpPr>
-          <p:cNvPr id="19" name="Text 17"/>
-          <p:cNvSpPr/>
-          <p:nvPr/>
-        </p:nvSpPr>
-        <p:spPr>
-          <a:xfrm>
-            <a:off x="7863840" y="3017520"/>
-            <a:ext cx="3017520" cy="201168"/>
-          </a:xfrm>
-          <a:prstGeom prst="rect">
-            <a:avLst/>
-          </a:prstGeom>
-          <a:noFill/>
-          <a:ln/>
-        </p:spPr>
-        <p:txBody>
-          <a:bodyPr wrap="square" lIns="0" tIns="0" rIns="0" bIns="0" rtlCol="0" anchor="ctr"/>
-          <a:lstStyle/>
-          <a:p>
-            <a:pPr algn="ctr" indent="0" marL="0">
-              <a:buNone/>
-            </a:pPr>
-            <a:r>
-              <a:rPr lang="en-US" sz="1050" b="1" dirty="0">
-                <a:solidFill>
-                  <a:srgbClr val="003A63"/>
-                </a:solidFill>
-                <a:latin typeface="Aptos" pitchFamily="34" charset="0"/>
-                <a:ea typeface="Aptos" pitchFamily="34" charset="-122"/>
-                <a:cs typeface="Aptos" pitchFamily="34" charset="-120"/>
-              </a:rPr>
-              <a:t>Measure and monitor</a:t>
-            </a:r>
-            <a:endParaRPr lang="en-US" sz="1050" dirty="0"/>
-          </a:p>
-        </p:txBody>
-      </p:sp>
-      <p:sp>
-        <p:nvSpPr>
-          <p:cNvPr id="20" name="Shape 18"/>
           <p:cNvSpPr/>
           <p:nvPr/>
         </p:nvSpPr>
@@ -6652,7 +6433,7 @@
       </p:sp>
       <p:sp>
         <p:nvSpPr>
-          <p:cNvPr id="21" name="Text 19"/>
+          <p:cNvPr id="17" name="Text 15"/>
           <p:cNvSpPr/>
           <p:nvPr/>
         </p:nvSpPr>
@@ -6691,7 +6472,7 @@
       </p:sp>
       <p:sp>
         <p:nvSpPr>
-          <p:cNvPr id="22" name="Text 20"/>
+          <p:cNvPr id="18" name="Text 16"/>
           <p:cNvSpPr/>
           <p:nvPr/>
         </p:nvSpPr>
@@ -7199,13 +6980,11 @@
             </a:avLst>
           </a:prstGeom>
           <a:solidFill>
-            <a:srgbClr val="FFFFFF">
-              <a:alpha val="88000"/>
-            </a:srgbClr>
+            <a:srgbClr val="FFFFFF"/>
           </a:solidFill>
           <a:ln w="12700">
             <a:solidFill>
-              <a:srgbClr val="D6E8F2"/>
+              <a:srgbClr val="B9D7E6"/>
             </a:solidFill>
             <a:prstDash val="solid"/>
           </a:ln>
@@ -7213,169 +6992,112 @@
       </p:sp>
       <p:sp>
         <p:nvSpPr>
-          <p:cNvPr id="14" name="Shape 12"/>
-          <p:cNvSpPr/>
-          <p:nvPr/>
-        </p:nvSpPr>
-        <p:spPr>
-          <a:xfrm>
-            <a:off x="8138160" y="3474720"/>
-            <a:ext cx="256032" cy="411480"/>
-          </a:xfrm>
-          <a:prstGeom prst="rect">
-            <a:avLst/>
-          </a:prstGeom>
-          <a:solidFill>
-            <a:srgbClr val="0068B7"/>
-          </a:solidFill>
-          <a:ln w="12700">
-            <a:solidFill>
-              <a:srgbClr val="0068B7"/>
-            </a:solidFill>
-            <a:prstDash val="solid"/>
-          </a:ln>
-        </p:spPr>
-      </p:sp>
-      <p:sp>
-        <p:nvSpPr>
-          <p:cNvPr id="15" name="Shape 13"/>
-          <p:cNvSpPr/>
-          <p:nvPr/>
-        </p:nvSpPr>
-        <p:spPr>
-          <a:xfrm>
-            <a:off x="8577072" y="3172968"/>
-            <a:ext cx="256032" cy="713232"/>
-          </a:xfrm>
-          <a:prstGeom prst="rect">
-            <a:avLst/>
-          </a:prstGeom>
-          <a:solidFill>
-            <a:srgbClr val="2F8A28"/>
-          </a:solidFill>
-          <a:ln w="12700">
-            <a:solidFill>
-              <a:srgbClr val="2F8A28"/>
-            </a:solidFill>
-            <a:prstDash val="solid"/>
-          </a:ln>
-        </p:spPr>
+          <p:cNvPr id="14" name="Text 12"/>
+          <p:cNvSpPr/>
+          <p:nvPr/>
+        </p:nvSpPr>
+        <p:spPr>
+          <a:xfrm>
+            <a:off x="7799832" y="2935224"/>
+            <a:ext cx="3145536" cy="256032"/>
+          </a:xfrm>
+          <a:prstGeom prst="rect">
+            <a:avLst/>
+          </a:prstGeom>
+          <a:noFill/>
+          <a:ln/>
+        </p:spPr>
+        <p:txBody>
+          <a:bodyPr wrap="square" lIns="0" tIns="0" rIns="0" bIns="0" rtlCol="0" anchor="ctr"/>
+          <a:lstStyle/>
+          <a:p>
+            <a:pPr indent="0" marL="0">
+              <a:buNone/>
+            </a:pPr>
+            <a:r>
+              <a:rPr lang="en-US" sz="1300" b="1" dirty="0">
+                <a:solidFill>
+                  <a:srgbClr val="0068B7"/>
+                </a:solidFill>
+                <a:latin typeface="Aptos" pitchFamily="34" charset="0"/>
+                <a:ea typeface="Aptos" pitchFamily="34" charset="-122"/>
+                <a:cs typeface="Aptos" pitchFamily="34" charset="-120"/>
+              </a:rPr>
+              <a:t>Concept checkpoints</a:t>
+            </a:r>
+            <a:endParaRPr lang="en-US" sz="1300" dirty="0"/>
+          </a:p>
+        </p:txBody>
+      </p:sp>
+      <p:sp>
+        <p:nvSpPr>
+          <p:cNvPr id="15" name="Text 13"/>
+          <p:cNvSpPr/>
+          <p:nvPr/>
+        </p:nvSpPr>
+        <p:spPr>
+          <a:xfrm>
+            <a:off x="7818120" y="3300984"/>
+            <a:ext cx="3090672" cy="877824"/>
+          </a:xfrm>
+          <a:prstGeom prst="rect">
+            <a:avLst/>
+          </a:prstGeom>
+          <a:noFill/>
+          <a:ln/>
+        </p:spPr>
+        <p:txBody>
+          <a:bodyPr wrap="square" lIns="254" tIns="254" rIns="254" bIns="254" rtlCol="0" anchor="t">
+            <a:normAutofit/>
+          </a:bodyPr>
+          <a:lstStyle/>
+          <a:p>
+            <a:r>
+              <a:rPr lang="en-US" sz="1380" dirty="0">
+                <a:solidFill>
+                  <a:srgbClr val="17364A"/>
+                </a:solidFill>
+                <a:latin typeface="Aptos" pitchFamily="34" charset="0"/>
+                <a:ea typeface="Aptos" pitchFamily="34" charset="-122"/>
+                <a:cs typeface="Aptos" pitchFamily="34" charset="-120"/>
+              </a:rPr>
+              <a:t>What type of generative AI output is being evaluated?</a:t>
+            </a:r>
+            <a:endParaRPr lang="en-US" sz="1380" dirty="0"/>
+          </a:p>
+          <a:p>
+            <a:r>
+              <a:rPr lang="en-US" sz="1380" dirty="0">
+                <a:solidFill>
+                  <a:srgbClr val="17364A"/>
+                </a:solidFill>
+                <a:latin typeface="Aptos" pitchFamily="34" charset="0"/>
+                <a:ea typeface="Aptos" pitchFamily="34" charset="-122"/>
+                <a:cs typeface="Aptos" pitchFamily="34" charset="-120"/>
+              </a:rPr>
+              <a:t>What source material should be used to verify the output?</a:t>
+            </a:r>
+            <a:endParaRPr lang="en-US" sz="1380" dirty="0"/>
+          </a:p>
+          <a:p>
+            <a:r>
+              <a:rPr lang="en-US" sz="1380" dirty="0">
+                <a:solidFill>
+                  <a:srgbClr val="17364A"/>
+                </a:solidFill>
+                <a:latin typeface="Aptos" pitchFamily="34" charset="0"/>
+                <a:ea typeface="Aptos" pitchFamily="34" charset="-122"/>
+                <a:cs typeface="Aptos" pitchFamily="34" charset="-120"/>
+              </a:rPr>
+              <a:t>What errors or omissions would be most harmful?</a:t>
+            </a:r>
+            <a:endParaRPr lang="en-US" sz="1380" dirty="0"/>
+          </a:p>
+        </p:txBody>
       </p:sp>
       <p:sp>
         <p:nvSpPr>
           <p:cNvPr id="16" name="Shape 14"/>
-          <p:cNvSpPr/>
-          <p:nvPr/>
-        </p:nvSpPr>
-        <p:spPr>
-          <a:xfrm>
-            <a:off x="9015984" y="2880360"/>
-            <a:ext cx="256032" cy="1005840"/>
-          </a:xfrm>
-          <a:prstGeom prst="rect">
-            <a:avLst/>
-          </a:prstGeom>
-          <a:solidFill>
-            <a:srgbClr val="D69A2D"/>
-          </a:solidFill>
-          <a:ln w="12700">
-            <a:solidFill>
-              <a:srgbClr val="D69A2D"/>
-            </a:solidFill>
-            <a:prstDash val="solid"/>
-          </a:ln>
-        </p:spPr>
-      </p:sp>
-      <p:sp>
-        <p:nvSpPr>
-          <p:cNvPr id="17" name="Shape 15"/>
-          <p:cNvSpPr/>
-          <p:nvPr/>
-        </p:nvSpPr>
-        <p:spPr>
-          <a:xfrm>
-            <a:off x="9454896" y="3319272"/>
-            <a:ext cx="256032" cy="566928"/>
-          </a:xfrm>
-          <a:prstGeom prst="rect">
-            <a:avLst/>
-          </a:prstGeom>
-          <a:solidFill>
-            <a:srgbClr val="6A4CA3"/>
-          </a:solidFill>
-          <a:ln w="12700">
-            <a:solidFill>
-              <a:srgbClr val="6A4CA3"/>
-            </a:solidFill>
-            <a:prstDash val="solid"/>
-          </a:ln>
-        </p:spPr>
-      </p:sp>
-      <p:sp>
-        <p:nvSpPr>
-          <p:cNvPr id="18" name="Shape 16"/>
-          <p:cNvSpPr/>
-          <p:nvPr/>
-        </p:nvSpPr>
-        <p:spPr>
-          <a:xfrm>
-            <a:off x="8019288" y="3886200"/>
-            <a:ext cx="2706624" cy="0"/>
-          </a:xfrm>
-          <a:prstGeom prst="line">
-            <a:avLst/>
-          </a:prstGeom>
-          <a:noFill/>
-          <a:ln w="15240">
-            <a:solidFill>
-              <a:srgbClr val="003A63"/>
-            </a:solidFill>
-            <a:prstDash val="solid"/>
-          </a:ln>
-        </p:spPr>
-      </p:sp>
-      <p:sp>
-        <p:nvSpPr>
-          <p:cNvPr id="19" name="Text 17"/>
-          <p:cNvSpPr/>
-          <p:nvPr/>
-        </p:nvSpPr>
-        <p:spPr>
-          <a:xfrm>
-            <a:off x="7863840" y="3017520"/>
-            <a:ext cx="3017520" cy="201168"/>
-          </a:xfrm>
-          <a:prstGeom prst="rect">
-            <a:avLst/>
-          </a:prstGeom>
-          <a:noFill/>
-          <a:ln/>
-        </p:spPr>
-        <p:txBody>
-          <a:bodyPr wrap="square" lIns="0" tIns="0" rIns="0" bIns="0" rtlCol="0" anchor="ctr"/>
-          <a:lstStyle/>
-          <a:p>
-            <a:pPr algn="ctr" indent="0" marL="0">
-              <a:buNone/>
-            </a:pPr>
-            <a:r>
-              <a:rPr lang="en-US" sz="1050" b="1" dirty="0">
-                <a:solidFill>
-                  <a:srgbClr val="003A63"/>
-                </a:solidFill>
-                <a:latin typeface="Aptos" pitchFamily="34" charset="0"/>
-                <a:ea typeface="Aptos" pitchFamily="34" charset="-122"/>
-                <a:cs typeface="Aptos" pitchFamily="34" charset="-120"/>
-              </a:rPr>
-              <a:t>Measure and monitor</a:t>
-            </a:r>
-            <a:endParaRPr lang="en-US" sz="1050" dirty="0"/>
-          </a:p>
-        </p:txBody>
-      </p:sp>
-      <p:sp>
-        <p:nvSpPr>
-          <p:cNvPr id="20" name="Shape 18"/>
           <p:cNvSpPr/>
           <p:nvPr/>
         </p:nvSpPr>
@@ -7402,7 +7124,7 @@
       </p:sp>
       <p:sp>
         <p:nvSpPr>
-          <p:cNvPr id="21" name="Text 19"/>
+          <p:cNvPr id="17" name="Text 15"/>
           <p:cNvSpPr/>
           <p:nvPr/>
         </p:nvSpPr>
@@ -7441,7 +7163,7 @@
       </p:sp>
       <p:sp>
         <p:nvSpPr>
-          <p:cNvPr id="22" name="Text 20"/>
+          <p:cNvPr id="18" name="Text 16"/>
           <p:cNvSpPr/>
           <p:nvPr/>
         </p:nvSpPr>
@@ -7935,13 +7657,11 @@
             </a:avLst>
           </a:prstGeom>
           <a:solidFill>
-            <a:srgbClr val="FFFFFF">
-              <a:alpha val="88000"/>
-            </a:srgbClr>
+            <a:srgbClr val="FFFFFF"/>
           </a:solidFill>
           <a:ln w="12700">
             <a:solidFill>
-              <a:srgbClr val="D6E8F2"/>
+              <a:srgbClr val="B9D7E6"/>
             </a:solidFill>
             <a:prstDash val="solid"/>
           </a:ln>
@@ -7949,169 +7669,98 @@
       </p:sp>
       <p:sp>
         <p:nvSpPr>
-          <p:cNvPr id="14" name="Shape 12"/>
-          <p:cNvSpPr/>
-          <p:nvPr/>
-        </p:nvSpPr>
-        <p:spPr>
-          <a:xfrm>
-            <a:off x="8138160" y="3474720"/>
-            <a:ext cx="256032" cy="411480"/>
-          </a:xfrm>
-          <a:prstGeom prst="rect">
-            <a:avLst/>
-          </a:prstGeom>
-          <a:solidFill>
-            <a:srgbClr val="0068B7"/>
-          </a:solidFill>
-          <a:ln w="12700">
-            <a:solidFill>
-              <a:srgbClr val="0068B7"/>
-            </a:solidFill>
-            <a:prstDash val="solid"/>
-          </a:ln>
-        </p:spPr>
-      </p:sp>
-      <p:sp>
-        <p:nvSpPr>
-          <p:cNvPr id="15" name="Shape 13"/>
-          <p:cNvSpPr/>
-          <p:nvPr/>
-        </p:nvSpPr>
-        <p:spPr>
-          <a:xfrm>
-            <a:off x="8577072" y="3172968"/>
-            <a:ext cx="256032" cy="713232"/>
-          </a:xfrm>
-          <a:prstGeom prst="rect">
-            <a:avLst/>
-          </a:prstGeom>
-          <a:solidFill>
-            <a:srgbClr val="2F8A28"/>
-          </a:solidFill>
-          <a:ln w="12700">
-            <a:solidFill>
-              <a:srgbClr val="2F8A28"/>
-            </a:solidFill>
-            <a:prstDash val="solid"/>
-          </a:ln>
-        </p:spPr>
+          <p:cNvPr id="14" name="Text 12"/>
+          <p:cNvSpPr/>
+          <p:nvPr/>
+        </p:nvSpPr>
+        <p:spPr>
+          <a:xfrm>
+            <a:off x="7799832" y="2935224"/>
+            <a:ext cx="3145536" cy="256032"/>
+          </a:xfrm>
+          <a:prstGeom prst="rect">
+            <a:avLst/>
+          </a:prstGeom>
+          <a:noFill/>
+          <a:ln/>
+        </p:spPr>
+        <p:txBody>
+          <a:bodyPr wrap="square" lIns="0" tIns="0" rIns="0" bIns="0" rtlCol="0" anchor="ctr"/>
+          <a:lstStyle/>
+          <a:p>
+            <a:pPr indent="0" marL="0">
+              <a:buNone/>
+            </a:pPr>
+            <a:r>
+              <a:rPr lang="en-US" sz="1300" b="1" dirty="0">
+                <a:solidFill>
+                  <a:srgbClr val="0068B7"/>
+                </a:solidFill>
+                <a:latin typeface="Aptos" pitchFamily="34" charset="0"/>
+                <a:ea typeface="Aptos" pitchFamily="34" charset="-122"/>
+                <a:cs typeface="Aptos" pitchFamily="34" charset="-120"/>
+              </a:rPr>
+              <a:t>Concept checkpoints</a:t>
+            </a:r>
+            <a:endParaRPr lang="en-US" sz="1300" dirty="0"/>
+          </a:p>
+        </p:txBody>
+      </p:sp>
+      <p:sp>
+        <p:nvSpPr>
+          <p:cNvPr id="15" name="Text 13"/>
+          <p:cNvSpPr/>
+          <p:nvPr/>
+        </p:nvSpPr>
+        <p:spPr>
+          <a:xfrm>
+            <a:off x="7818120" y="3300984"/>
+            <a:ext cx="3090672" cy="877824"/>
+          </a:xfrm>
+          <a:prstGeom prst="rect">
+            <a:avLst/>
+          </a:prstGeom>
+          <a:noFill/>
+          <a:ln/>
+        </p:spPr>
+        <p:txBody>
+          <a:bodyPr wrap="square" lIns="254" tIns="254" rIns="254" bIns="254" rtlCol="0" anchor="t">
+            <a:normAutofit/>
+          </a:bodyPr>
+          <a:lstStyle/>
+          <a:p>
+            <a:r>
+              <a:rPr lang="en-US" sz="1380" dirty="0">
+                <a:solidFill>
+                  <a:srgbClr val="17364A"/>
+                </a:solidFill>
+                <a:latin typeface="Aptos" pitchFamily="34" charset="0"/>
+                <a:ea typeface="Aptos" pitchFamily="34" charset="-122"/>
+                <a:cs typeface="Aptos" pitchFamily="34" charset="-120"/>
+              </a:rPr>
+              <a:t>What review criteria are needed for equity, accessibility, language, and tone?</a:t>
+            </a:r>
+            <a:endParaRPr lang="en-US" sz="1380" dirty="0"/>
+          </a:p>
+          <a:p>
+            <a:r>
+              <a:rPr lang="en-US" sz="1380" dirty="0">
+                <a:solidFill>
+                  <a:srgbClr val="17364A"/>
+                </a:solidFill>
+                <a:latin typeface="Aptos" pitchFamily="34" charset="0"/>
+                <a:ea typeface="Aptos" pitchFamily="34" charset="-122"/>
+                <a:cs typeface="Aptos" pitchFamily="34" charset="-120"/>
+              </a:rPr>
+              <a:t>What documentation is required before the output can be used?</a:t>
+            </a:r>
+            <a:endParaRPr lang="en-US" sz="1380" dirty="0"/>
+          </a:p>
+        </p:txBody>
       </p:sp>
       <p:sp>
         <p:nvSpPr>
           <p:cNvPr id="16" name="Shape 14"/>
-          <p:cNvSpPr/>
-          <p:nvPr/>
-        </p:nvSpPr>
-        <p:spPr>
-          <a:xfrm>
-            <a:off x="9015984" y="2880360"/>
-            <a:ext cx="256032" cy="1005840"/>
-          </a:xfrm>
-          <a:prstGeom prst="rect">
-            <a:avLst/>
-          </a:prstGeom>
-          <a:solidFill>
-            <a:srgbClr val="D69A2D"/>
-          </a:solidFill>
-          <a:ln w="12700">
-            <a:solidFill>
-              <a:srgbClr val="D69A2D"/>
-            </a:solidFill>
-            <a:prstDash val="solid"/>
-          </a:ln>
-        </p:spPr>
-      </p:sp>
-      <p:sp>
-        <p:nvSpPr>
-          <p:cNvPr id="17" name="Shape 15"/>
-          <p:cNvSpPr/>
-          <p:nvPr/>
-        </p:nvSpPr>
-        <p:spPr>
-          <a:xfrm>
-            <a:off x="9454896" y="3319272"/>
-            <a:ext cx="256032" cy="566928"/>
-          </a:xfrm>
-          <a:prstGeom prst="rect">
-            <a:avLst/>
-          </a:prstGeom>
-          <a:solidFill>
-            <a:srgbClr val="6A4CA3"/>
-          </a:solidFill>
-          <a:ln w="12700">
-            <a:solidFill>
-              <a:srgbClr val="6A4CA3"/>
-            </a:solidFill>
-            <a:prstDash val="solid"/>
-          </a:ln>
-        </p:spPr>
-      </p:sp>
-      <p:sp>
-        <p:nvSpPr>
-          <p:cNvPr id="18" name="Shape 16"/>
-          <p:cNvSpPr/>
-          <p:nvPr/>
-        </p:nvSpPr>
-        <p:spPr>
-          <a:xfrm>
-            <a:off x="8019288" y="3886200"/>
-            <a:ext cx="2706624" cy="0"/>
-          </a:xfrm>
-          <a:prstGeom prst="line">
-            <a:avLst/>
-          </a:prstGeom>
-          <a:noFill/>
-          <a:ln w="15240">
-            <a:solidFill>
-              <a:srgbClr val="003A63"/>
-            </a:solidFill>
-            <a:prstDash val="solid"/>
-          </a:ln>
-        </p:spPr>
-      </p:sp>
-      <p:sp>
-        <p:nvSpPr>
-          <p:cNvPr id="19" name="Text 17"/>
-          <p:cNvSpPr/>
-          <p:nvPr/>
-        </p:nvSpPr>
-        <p:spPr>
-          <a:xfrm>
-            <a:off x="7863840" y="3017520"/>
-            <a:ext cx="3017520" cy="201168"/>
-          </a:xfrm>
-          <a:prstGeom prst="rect">
-            <a:avLst/>
-          </a:prstGeom>
-          <a:noFill/>
-          <a:ln/>
-        </p:spPr>
-        <p:txBody>
-          <a:bodyPr wrap="square" lIns="0" tIns="0" rIns="0" bIns="0" rtlCol="0" anchor="ctr"/>
-          <a:lstStyle/>
-          <a:p>
-            <a:pPr algn="ctr" indent="0" marL="0">
-              <a:buNone/>
-            </a:pPr>
-            <a:r>
-              <a:rPr lang="en-US" sz="1050" b="1" dirty="0">
-                <a:solidFill>
-                  <a:srgbClr val="003A63"/>
-                </a:solidFill>
-                <a:latin typeface="Aptos" pitchFamily="34" charset="0"/>
-                <a:ea typeface="Aptos" pitchFamily="34" charset="-122"/>
-                <a:cs typeface="Aptos" pitchFamily="34" charset="-120"/>
-              </a:rPr>
-              <a:t>Measure and monitor</a:t>
-            </a:r>
-            <a:endParaRPr lang="en-US" sz="1050" dirty="0"/>
-          </a:p>
-        </p:txBody>
-      </p:sp>
-      <p:sp>
-        <p:nvSpPr>
-          <p:cNvPr id="20" name="Shape 18"/>
           <p:cNvSpPr/>
           <p:nvPr/>
         </p:nvSpPr>
@@ -8138,7 +7787,7 @@
       </p:sp>
       <p:sp>
         <p:nvSpPr>
-          <p:cNvPr id="21" name="Text 19"/>
+          <p:cNvPr id="17" name="Text 15"/>
           <p:cNvSpPr/>
           <p:nvPr/>
         </p:nvSpPr>
@@ -8177,7 +7826,7 @@
       </p:sp>
       <p:sp>
         <p:nvSpPr>
-          <p:cNvPr id="22" name="Text 20"/>
+          <p:cNvPr id="18" name="Text 16"/>
           <p:cNvSpPr/>
           <p:nvPr/>
         </p:nvSpPr>
@@ -8685,13 +8334,11 @@
             </a:avLst>
           </a:prstGeom>
           <a:solidFill>
-            <a:srgbClr val="FFFFFF">
-              <a:alpha val="88000"/>
-            </a:srgbClr>
+            <a:srgbClr val="FFFFFF"/>
           </a:solidFill>
           <a:ln w="12700">
             <a:solidFill>
-              <a:srgbClr val="D6E8F2"/>
+              <a:srgbClr val="B9D7E6"/>
             </a:solidFill>
             <a:prstDash val="solid"/>
           </a:ln>
@@ -8699,169 +8346,98 @@
       </p:sp>
       <p:sp>
         <p:nvSpPr>
-          <p:cNvPr id="14" name="Shape 12"/>
-          <p:cNvSpPr/>
-          <p:nvPr/>
-        </p:nvSpPr>
-        <p:spPr>
-          <a:xfrm>
-            <a:off x="8138160" y="3474720"/>
-            <a:ext cx="256032" cy="411480"/>
-          </a:xfrm>
-          <a:prstGeom prst="rect">
-            <a:avLst/>
-          </a:prstGeom>
-          <a:solidFill>
-            <a:srgbClr val="0068B7"/>
-          </a:solidFill>
-          <a:ln w="12700">
-            <a:solidFill>
-              <a:srgbClr val="0068B7"/>
-            </a:solidFill>
-            <a:prstDash val="solid"/>
-          </a:ln>
-        </p:spPr>
-      </p:sp>
-      <p:sp>
-        <p:nvSpPr>
-          <p:cNvPr id="15" name="Shape 13"/>
-          <p:cNvSpPr/>
-          <p:nvPr/>
-        </p:nvSpPr>
-        <p:spPr>
-          <a:xfrm>
-            <a:off x="8577072" y="3172968"/>
-            <a:ext cx="256032" cy="713232"/>
-          </a:xfrm>
-          <a:prstGeom prst="rect">
-            <a:avLst/>
-          </a:prstGeom>
-          <a:solidFill>
-            <a:srgbClr val="2F8A28"/>
-          </a:solidFill>
-          <a:ln w="12700">
-            <a:solidFill>
-              <a:srgbClr val="2F8A28"/>
-            </a:solidFill>
-            <a:prstDash val="solid"/>
-          </a:ln>
-        </p:spPr>
+          <p:cNvPr id="14" name="Text 12"/>
+          <p:cNvSpPr/>
+          <p:nvPr/>
+        </p:nvSpPr>
+        <p:spPr>
+          <a:xfrm>
+            <a:off x="7799832" y="2935224"/>
+            <a:ext cx="3145536" cy="256032"/>
+          </a:xfrm>
+          <a:prstGeom prst="rect">
+            <a:avLst/>
+          </a:prstGeom>
+          <a:noFill/>
+          <a:ln/>
+        </p:spPr>
+        <p:txBody>
+          <a:bodyPr wrap="square" lIns="0" tIns="0" rIns="0" bIns="0" rtlCol="0" anchor="ctr"/>
+          <a:lstStyle/>
+          <a:p>
+            <a:pPr indent="0" marL="0">
+              <a:buNone/>
+            </a:pPr>
+            <a:r>
+              <a:rPr lang="en-US" sz="1300" b="1" dirty="0">
+                <a:solidFill>
+                  <a:srgbClr val="0068B7"/>
+                </a:solidFill>
+                <a:latin typeface="Aptos" pitchFamily="34" charset="0"/>
+                <a:ea typeface="Aptos" pitchFamily="34" charset="-122"/>
+                <a:cs typeface="Aptos" pitchFamily="34" charset="-120"/>
+              </a:rPr>
+              <a:t>Concept checkpoints</a:t>
+            </a:r>
+            <a:endParaRPr lang="en-US" sz="1300" dirty="0"/>
+          </a:p>
+        </p:txBody>
+      </p:sp>
+      <p:sp>
+        <p:nvSpPr>
+          <p:cNvPr id="15" name="Text 13"/>
+          <p:cNvSpPr/>
+          <p:nvPr/>
+        </p:nvSpPr>
+        <p:spPr>
+          <a:xfrm>
+            <a:off x="7818120" y="3300984"/>
+            <a:ext cx="3090672" cy="877824"/>
+          </a:xfrm>
+          <a:prstGeom prst="rect">
+            <a:avLst/>
+          </a:prstGeom>
+          <a:noFill/>
+          <a:ln/>
+        </p:spPr>
+        <p:txBody>
+          <a:bodyPr wrap="square" lIns="254" tIns="254" rIns="254" bIns="254" rtlCol="0" anchor="t">
+            <a:normAutofit/>
+          </a:bodyPr>
+          <a:lstStyle/>
+          <a:p>
+            <a:r>
+              <a:rPr lang="en-US" sz="1380" dirty="0">
+                <a:solidFill>
+                  <a:srgbClr val="17364A"/>
+                </a:solidFill>
+                <a:latin typeface="Aptos" pitchFamily="34" charset="0"/>
+                <a:ea typeface="Aptos" pitchFamily="34" charset="-122"/>
+                <a:cs typeface="Aptos" pitchFamily="34" charset="-120"/>
+              </a:rPr>
+              <a:t>Include intended use, source verification, factuality, completeness, unsupported claims,.</a:t>
+            </a:r>
+            <a:endParaRPr lang="en-US" sz="1380" dirty="0"/>
+          </a:p>
+          <a:p>
+            <a:r>
+              <a:rPr lang="en-US" sz="1380" dirty="0">
+                <a:solidFill>
+                  <a:srgbClr val="17364A"/>
+                </a:solidFill>
+                <a:latin typeface="Aptos" pitchFamily="34" charset="0"/>
+                <a:ea typeface="Aptos" pitchFamily="34" charset="-122"/>
+                <a:cs typeface="Aptos" pitchFamily="34" charset="-120"/>
+              </a:rPr>
+              <a:t>Then apply the rubric to a sample AI-generated output and document whether the output.</a:t>
+            </a:r>
+            <a:endParaRPr lang="en-US" sz="1380" dirty="0"/>
+          </a:p>
+        </p:txBody>
       </p:sp>
       <p:sp>
         <p:nvSpPr>
           <p:cNvPr id="16" name="Shape 14"/>
-          <p:cNvSpPr/>
-          <p:nvPr/>
-        </p:nvSpPr>
-        <p:spPr>
-          <a:xfrm>
-            <a:off x="9015984" y="2880360"/>
-            <a:ext cx="256032" cy="1005840"/>
-          </a:xfrm>
-          <a:prstGeom prst="rect">
-            <a:avLst/>
-          </a:prstGeom>
-          <a:solidFill>
-            <a:srgbClr val="D69A2D"/>
-          </a:solidFill>
-          <a:ln w="12700">
-            <a:solidFill>
-              <a:srgbClr val="D69A2D"/>
-            </a:solidFill>
-            <a:prstDash val="solid"/>
-          </a:ln>
-        </p:spPr>
-      </p:sp>
-      <p:sp>
-        <p:nvSpPr>
-          <p:cNvPr id="17" name="Shape 15"/>
-          <p:cNvSpPr/>
-          <p:nvPr/>
-        </p:nvSpPr>
-        <p:spPr>
-          <a:xfrm>
-            <a:off x="9454896" y="3319272"/>
-            <a:ext cx="256032" cy="566928"/>
-          </a:xfrm>
-          <a:prstGeom prst="rect">
-            <a:avLst/>
-          </a:prstGeom>
-          <a:solidFill>
-            <a:srgbClr val="6A4CA3"/>
-          </a:solidFill>
-          <a:ln w="12700">
-            <a:solidFill>
-              <a:srgbClr val="6A4CA3"/>
-            </a:solidFill>
-            <a:prstDash val="solid"/>
-          </a:ln>
-        </p:spPr>
-      </p:sp>
-      <p:sp>
-        <p:nvSpPr>
-          <p:cNvPr id="18" name="Shape 16"/>
-          <p:cNvSpPr/>
-          <p:nvPr/>
-        </p:nvSpPr>
-        <p:spPr>
-          <a:xfrm>
-            <a:off x="8019288" y="3886200"/>
-            <a:ext cx="2706624" cy="0"/>
-          </a:xfrm>
-          <a:prstGeom prst="line">
-            <a:avLst/>
-          </a:prstGeom>
-          <a:noFill/>
-          <a:ln w="15240">
-            <a:solidFill>
-              <a:srgbClr val="003A63"/>
-            </a:solidFill>
-            <a:prstDash val="solid"/>
-          </a:ln>
-        </p:spPr>
-      </p:sp>
-      <p:sp>
-        <p:nvSpPr>
-          <p:cNvPr id="19" name="Text 17"/>
-          <p:cNvSpPr/>
-          <p:nvPr/>
-        </p:nvSpPr>
-        <p:spPr>
-          <a:xfrm>
-            <a:off x="7863840" y="3017520"/>
-            <a:ext cx="3017520" cy="201168"/>
-          </a:xfrm>
-          <a:prstGeom prst="rect">
-            <a:avLst/>
-          </a:prstGeom>
-          <a:noFill/>
-          <a:ln/>
-        </p:spPr>
-        <p:txBody>
-          <a:bodyPr wrap="square" lIns="0" tIns="0" rIns="0" bIns="0" rtlCol="0" anchor="ctr"/>
-          <a:lstStyle/>
-          <a:p>
-            <a:pPr algn="ctr" indent="0" marL="0">
-              <a:buNone/>
-            </a:pPr>
-            <a:r>
-              <a:rPr lang="en-US" sz="1050" b="1" dirty="0">
-                <a:solidFill>
-                  <a:srgbClr val="003A63"/>
-                </a:solidFill>
-                <a:latin typeface="Aptos" pitchFamily="34" charset="0"/>
-                <a:ea typeface="Aptos" pitchFamily="34" charset="-122"/>
-                <a:cs typeface="Aptos" pitchFamily="34" charset="-120"/>
-              </a:rPr>
-              <a:t>Measure and monitor</a:t>
-            </a:r>
-            <a:endParaRPr lang="en-US" sz="1050" dirty="0"/>
-          </a:p>
-        </p:txBody>
-      </p:sp>
-      <p:sp>
-        <p:nvSpPr>
-          <p:cNvPr id="20" name="Shape 18"/>
           <p:cNvSpPr/>
           <p:nvPr/>
         </p:nvSpPr>
@@ -8888,7 +8464,7 @@
       </p:sp>
       <p:sp>
         <p:nvSpPr>
-          <p:cNvPr id="21" name="Text 19"/>
+          <p:cNvPr id="17" name="Text 15"/>
           <p:cNvSpPr/>
           <p:nvPr/>
         </p:nvSpPr>
@@ -8927,7 +8503,7 @@
       </p:sp>
       <p:sp>
         <p:nvSpPr>
-          <p:cNvPr id="22" name="Text 20"/>
+          <p:cNvPr id="18" name="Text 16"/>
           <p:cNvSpPr/>
           <p:nvPr/>
         </p:nvSpPr>
@@ -9435,13 +9011,11 @@
             </a:avLst>
           </a:prstGeom>
           <a:solidFill>
-            <a:srgbClr val="FFFFFF">
-              <a:alpha val="88000"/>
-            </a:srgbClr>
+            <a:srgbClr val="FFFFFF"/>
           </a:solidFill>
           <a:ln w="12700">
             <a:solidFill>
-              <a:srgbClr val="D6E8F2"/>
+              <a:srgbClr val="B9D7E6"/>
             </a:solidFill>
             <a:prstDash val="solid"/>
           </a:ln>
@@ -9449,169 +9023,112 @@
       </p:sp>
       <p:sp>
         <p:nvSpPr>
-          <p:cNvPr id="14" name="Shape 12"/>
-          <p:cNvSpPr/>
-          <p:nvPr/>
-        </p:nvSpPr>
-        <p:spPr>
-          <a:xfrm>
-            <a:off x="8138160" y="3474720"/>
-            <a:ext cx="256032" cy="411480"/>
-          </a:xfrm>
-          <a:prstGeom prst="rect">
-            <a:avLst/>
-          </a:prstGeom>
-          <a:solidFill>
-            <a:srgbClr val="0068B7"/>
-          </a:solidFill>
-          <a:ln w="12700">
-            <a:solidFill>
-              <a:srgbClr val="0068B7"/>
-            </a:solidFill>
-            <a:prstDash val="solid"/>
-          </a:ln>
-        </p:spPr>
-      </p:sp>
-      <p:sp>
-        <p:nvSpPr>
-          <p:cNvPr id="15" name="Shape 13"/>
-          <p:cNvSpPr/>
-          <p:nvPr/>
-        </p:nvSpPr>
-        <p:spPr>
-          <a:xfrm>
-            <a:off x="8577072" y="3172968"/>
-            <a:ext cx="256032" cy="713232"/>
-          </a:xfrm>
-          <a:prstGeom prst="rect">
-            <a:avLst/>
-          </a:prstGeom>
-          <a:solidFill>
-            <a:srgbClr val="2F8A28"/>
-          </a:solidFill>
-          <a:ln w="12700">
-            <a:solidFill>
-              <a:srgbClr val="2F8A28"/>
-            </a:solidFill>
-            <a:prstDash val="solid"/>
-          </a:ln>
-        </p:spPr>
+          <p:cNvPr id="14" name="Text 12"/>
+          <p:cNvSpPr/>
+          <p:nvPr/>
+        </p:nvSpPr>
+        <p:spPr>
+          <a:xfrm>
+            <a:off x="7799832" y="2935224"/>
+            <a:ext cx="3145536" cy="256032"/>
+          </a:xfrm>
+          <a:prstGeom prst="rect">
+            <a:avLst/>
+          </a:prstGeom>
+          <a:noFill/>
+          <a:ln/>
+        </p:spPr>
+        <p:txBody>
+          <a:bodyPr wrap="square" lIns="0" tIns="0" rIns="0" bIns="0" rtlCol="0" anchor="ctr"/>
+          <a:lstStyle/>
+          <a:p>
+            <a:pPr indent="0" marL="0">
+              <a:buNone/>
+            </a:pPr>
+            <a:r>
+              <a:rPr lang="en-US" sz="1300" b="1" dirty="0">
+                <a:solidFill>
+                  <a:srgbClr val="0068B7"/>
+                </a:solidFill>
+                <a:latin typeface="Aptos" pitchFamily="34" charset="0"/>
+                <a:ea typeface="Aptos" pitchFamily="34" charset="-122"/>
+                <a:cs typeface="Aptos" pitchFamily="34" charset="-120"/>
+              </a:rPr>
+              <a:t>Concept checkpoints</a:t>
+            </a:r>
+            <a:endParaRPr lang="en-US" sz="1300" dirty="0"/>
+          </a:p>
+        </p:txBody>
+      </p:sp>
+      <p:sp>
+        <p:nvSpPr>
+          <p:cNvPr id="15" name="Text 13"/>
+          <p:cNvSpPr/>
+          <p:nvPr/>
+        </p:nvSpPr>
+        <p:spPr>
+          <a:xfrm>
+            <a:off x="7818120" y="3300984"/>
+            <a:ext cx="3090672" cy="877824"/>
+          </a:xfrm>
+          <a:prstGeom prst="rect">
+            <a:avLst/>
+          </a:prstGeom>
+          <a:noFill/>
+          <a:ln/>
+        </p:spPr>
+        <p:txBody>
+          <a:bodyPr wrap="square" lIns="254" tIns="254" rIns="254" bIns="254" rtlCol="0" anchor="t">
+            <a:normAutofit/>
+          </a:bodyPr>
+          <a:lstStyle/>
+          <a:p>
+            <a:r>
+              <a:rPr lang="en-US" sz="1380" dirty="0">
+                <a:solidFill>
+                  <a:srgbClr val="17364A"/>
+                </a:solidFill>
+                <a:latin typeface="Aptos" pitchFamily="34" charset="0"/>
+                <a:ea typeface="Aptos" pitchFamily="34" charset="-122"/>
+                <a:cs typeface="Aptos" pitchFamily="34" charset="-120"/>
+              </a:rPr>
+              <a:t>Generative AI output evaluation rubric</a:t>
+            </a:r>
+            <a:endParaRPr lang="en-US" sz="1380" dirty="0"/>
+          </a:p>
+          <a:p>
+            <a:r>
+              <a:rPr lang="en-US" sz="1380" dirty="0">
+                <a:solidFill>
+                  <a:srgbClr val="17364A"/>
+                </a:solidFill>
+                <a:latin typeface="Aptos" pitchFamily="34" charset="0"/>
+                <a:ea typeface="Aptos" pitchFamily="34" charset="-122"/>
+                <a:cs typeface="Aptos" pitchFamily="34" charset="-120"/>
+              </a:rPr>
+              <a:t>Completed sample review</a:t>
+            </a:r>
+            <a:endParaRPr lang="en-US" sz="1380" dirty="0"/>
+          </a:p>
+          <a:p>
+            <a:r>
+              <a:rPr lang="en-US" sz="1380" dirty="0">
+                <a:solidFill>
+                  <a:srgbClr val="17364A"/>
+                </a:solidFill>
+                <a:latin typeface="Aptos" pitchFamily="34" charset="0"/>
+                <a:ea typeface="Aptos" pitchFamily="34" charset="-122"/>
+                <a:cs typeface="Aptos" pitchFamily="34" charset="-120"/>
+              </a:rPr>
+              <a:t>Source verification notes</a:t>
+            </a:r>
+            <a:endParaRPr lang="en-US" sz="1380" dirty="0"/>
+          </a:p>
+        </p:txBody>
       </p:sp>
       <p:sp>
         <p:nvSpPr>
           <p:cNvPr id="16" name="Shape 14"/>
-          <p:cNvSpPr/>
-          <p:nvPr/>
-        </p:nvSpPr>
-        <p:spPr>
-          <a:xfrm>
-            <a:off x="9015984" y="2880360"/>
-            <a:ext cx="256032" cy="1005840"/>
-          </a:xfrm>
-          <a:prstGeom prst="rect">
-            <a:avLst/>
-          </a:prstGeom>
-          <a:solidFill>
-            <a:srgbClr val="D69A2D"/>
-          </a:solidFill>
-          <a:ln w="12700">
-            <a:solidFill>
-              <a:srgbClr val="D69A2D"/>
-            </a:solidFill>
-            <a:prstDash val="solid"/>
-          </a:ln>
-        </p:spPr>
-      </p:sp>
-      <p:sp>
-        <p:nvSpPr>
-          <p:cNvPr id="17" name="Shape 15"/>
-          <p:cNvSpPr/>
-          <p:nvPr/>
-        </p:nvSpPr>
-        <p:spPr>
-          <a:xfrm>
-            <a:off x="9454896" y="3319272"/>
-            <a:ext cx="256032" cy="566928"/>
-          </a:xfrm>
-          <a:prstGeom prst="rect">
-            <a:avLst/>
-          </a:prstGeom>
-          <a:solidFill>
-            <a:srgbClr val="6A4CA3"/>
-          </a:solidFill>
-          <a:ln w="12700">
-            <a:solidFill>
-              <a:srgbClr val="6A4CA3"/>
-            </a:solidFill>
-            <a:prstDash val="solid"/>
-          </a:ln>
-        </p:spPr>
-      </p:sp>
-      <p:sp>
-        <p:nvSpPr>
-          <p:cNvPr id="18" name="Shape 16"/>
-          <p:cNvSpPr/>
-          <p:nvPr/>
-        </p:nvSpPr>
-        <p:spPr>
-          <a:xfrm>
-            <a:off x="8019288" y="3886200"/>
-            <a:ext cx="2706624" cy="0"/>
-          </a:xfrm>
-          <a:prstGeom prst="line">
-            <a:avLst/>
-          </a:prstGeom>
-          <a:noFill/>
-          <a:ln w="15240">
-            <a:solidFill>
-              <a:srgbClr val="003A63"/>
-            </a:solidFill>
-            <a:prstDash val="solid"/>
-          </a:ln>
-        </p:spPr>
-      </p:sp>
-      <p:sp>
-        <p:nvSpPr>
-          <p:cNvPr id="19" name="Text 17"/>
-          <p:cNvSpPr/>
-          <p:nvPr/>
-        </p:nvSpPr>
-        <p:spPr>
-          <a:xfrm>
-            <a:off x="7863840" y="3017520"/>
-            <a:ext cx="3017520" cy="201168"/>
-          </a:xfrm>
-          <a:prstGeom prst="rect">
-            <a:avLst/>
-          </a:prstGeom>
-          <a:noFill/>
-          <a:ln/>
-        </p:spPr>
-        <p:txBody>
-          <a:bodyPr wrap="square" lIns="0" tIns="0" rIns="0" bIns="0" rtlCol="0" anchor="ctr"/>
-          <a:lstStyle/>
-          <a:p>
-            <a:pPr algn="ctr" indent="0" marL="0">
-              <a:buNone/>
-            </a:pPr>
-            <a:r>
-              <a:rPr lang="en-US" sz="1050" b="1" dirty="0">
-                <a:solidFill>
-                  <a:srgbClr val="003A63"/>
-                </a:solidFill>
-                <a:latin typeface="Aptos" pitchFamily="34" charset="0"/>
-                <a:ea typeface="Aptos" pitchFamily="34" charset="-122"/>
-                <a:cs typeface="Aptos" pitchFamily="34" charset="-120"/>
-              </a:rPr>
-              <a:t>Measure and monitor</a:t>
-            </a:r>
-            <a:endParaRPr lang="en-US" sz="1050" dirty="0"/>
-          </a:p>
-        </p:txBody>
-      </p:sp>
-      <p:sp>
-        <p:nvSpPr>
-          <p:cNvPr id="20" name="Shape 18"/>
           <p:cNvSpPr/>
           <p:nvPr/>
         </p:nvSpPr>
@@ -9638,7 +9155,7 @@
       </p:sp>
       <p:sp>
         <p:nvSpPr>
-          <p:cNvPr id="21" name="Text 19"/>
+          <p:cNvPr id="17" name="Text 15"/>
           <p:cNvSpPr/>
           <p:nvPr/>
         </p:nvSpPr>
@@ -9677,7 +9194,7 @@
       </p:sp>
       <p:sp>
         <p:nvSpPr>
-          <p:cNvPr id="22" name="Text 20"/>
+          <p:cNvPr id="18" name="Text 16"/>
           <p:cNvSpPr/>
           <p:nvPr/>
         </p:nvSpPr>
@@ -10157,13 +9674,11 @@
             </a:avLst>
           </a:prstGeom>
           <a:solidFill>
-            <a:srgbClr val="FFFFFF">
-              <a:alpha val="88000"/>
-            </a:srgbClr>
+            <a:srgbClr val="FFFFFF"/>
           </a:solidFill>
           <a:ln w="12700">
             <a:solidFill>
-              <a:srgbClr val="D6E8F2"/>
+              <a:srgbClr val="B9D7E6"/>
             </a:solidFill>
             <a:prstDash val="solid"/>
           </a:ln>
@@ -10171,169 +9686,84 @@
       </p:sp>
       <p:sp>
         <p:nvSpPr>
-          <p:cNvPr id="14" name="Shape 12"/>
-          <p:cNvSpPr/>
-          <p:nvPr/>
-        </p:nvSpPr>
-        <p:spPr>
-          <a:xfrm>
-            <a:off x="8138160" y="3474720"/>
-            <a:ext cx="256032" cy="411480"/>
-          </a:xfrm>
-          <a:prstGeom prst="rect">
-            <a:avLst/>
-          </a:prstGeom>
-          <a:solidFill>
-            <a:srgbClr val="0068B7"/>
-          </a:solidFill>
-          <a:ln w="12700">
-            <a:solidFill>
-              <a:srgbClr val="0068B7"/>
-            </a:solidFill>
-            <a:prstDash val="solid"/>
-          </a:ln>
-        </p:spPr>
-      </p:sp>
-      <p:sp>
-        <p:nvSpPr>
-          <p:cNvPr id="15" name="Shape 13"/>
-          <p:cNvSpPr/>
-          <p:nvPr/>
-        </p:nvSpPr>
-        <p:spPr>
-          <a:xfrm>
-            <a:off x="8577072" y="3172968"/>
-            <a:ext cx="256032" cy="713232"/>
-          </a:xfrm>
-          <a:prstGeom prst="rect">
-            <a:avLst/>
-          </a:prstGeom>
-          <a:solidFill>
-            <a:srgbClr val="2F8A28"/>
-          </a:solidFill>
-          <a:ln w="12700">
-            <a:solidFill>
-              <a:srgbClr val="2F8A28"/>
-            </a:solidFill>
-            <a:prstDash val="solid"/>
-          </a:ln>
-        </p:spPr>
+          <p:cNvPr id="14" name="Text 12"/>
+          <p:cNvSpPr/>
+          <p:nvPr/>
+        </p:nvSpPr>
+        <p:spPr>
+          <a:xfrm>
+            <a:off x="7799832" y="2935224"/>
+            <a:ext cx="3145536" cy="256032"/>
+          </a:xfrm>
+          <a:prstGeom prst="rect">
+            <a:avLst/>
+          </a:prstGeom>
+          <a:noFill/>
+          <a:ln/>
+        </p:spPr>
+        <p:txBody>
+          <a:bodyPr wrap="square" lIns="0" tIns="0" rIns="0" bIns="0" rtlCol="0" anchor="ctr"/>
+          <a:lstStyle/>
+          <a:p>
+            <a:pPr indent="0" marL="0">
+              <a:buNone/>
+            </a:pPr>
+            <a:r>
+              <a:rPr lang="en-US" sz="1300" b="1" dirty="0">
+                <a:solidFill>
+                  <a:srgbClr val="0068B7"/>
+                </a:solidFill>
+                <a:latin typeface="Aptos" pitchFamily="34" charset="0"/>
+                <a:ea typeface="Aptos" pitchFamily="34" charset="-122"/>
+                <a:cs typeface="Aptos" pitchFamily="34" charset="-120"/>
+              </a:rPr>
+              <a:t>Concept checkpoints</a:t>
+            </a:r>
+            <a:endParaRPr lang="en-US" sz="1300" dirty="0"/>
+          </a:p>
+        </p:txBody>
+      </p:sp>
+      <p:sp>
+        <p:nvSpPr>
+          <p:cNvPr id="15" name="Text 13"/>
+          <p:cNvSpPr/>
+          <p:nvPr/>
+        </p:nvSpPr>
+        <p:spPr>
+          <a:xfrm>
+            <a:off x="7818120" y="3300984"/>
+            <a:ext cx="3090672" cy="877824"/>
+          </a:xfrm>
+          <a:prstGeom prst="rect">
+            <a:avLst/>
+          </a:prstGeom>
+          <a:noFill/>
+          <a:ln/>
+        </p:spPr>
+        <p:txBody>
+          <a:bodyPr wrap="square" lIns="254" tIns="254" rIns="254" bIns="254" rtlCol="0" anchor="t">
+            <a:normAutofit/>
+          </a:bodyPr>
+          <a:lstStyle/>
+          <a:p>
+            <a:r>
+              <a:rPr lang="en-US" sz="1380" dirty="0">
+                <a:solidFill>
+                  <a:srgbClr val="17364A"/>
+                </a:solidFill>
+                <a:latin typeface="Aptos" pitchFamily="34" charset="0"/>
+                <a:ea typeface="Aptos" pitchFamily="34" charset="-122"/>
+                <a:cs typeface="Aptos" pitchFamily="34" charset="-120"/>
+              </a:rPr>
+              <a:t>Approval or escalation documentation</a:t>
+            </a:r>
+            <a:endParaRPr lang="en-US" sz="1380" dirty="0"/>
+          </a:p>
+        </p:txBody>
       </p:sp>
       <p:sp>
         <p:nvSpPr>
           <p:cNvPr id="16" name="Shape 14"/>
-          <p:cNvSpPr/>
-          <p:nvPr/>
-        </p:nvSpPr>
-        <p:spPr>
-          <a:xfrm>
-            <a:off x="9015984" y="2880360"/>
-            <a:ext cx="256032" cy="1005840"/>
-          </a:xfrm>
-          <a:prstGeom prst="rect">
-            <a:avLst/>
-          </a:prstGeom>
-          <a:solidFill>
-            <a:srgbClr val="D69A2D"/>
-          </a:solidFill>
-          <a:ln w="12700">
-            <a:solidFill>
-              <a:srgbClr val="D69A2D"/>
-            </a:solidFill>
-            <a:prstDash val="solid"/>
-          </a:ln>
-        </p:spPr>
-      </p:sp>
-      <p:sp>
-        <p:nvSpPr>
-          <p:cNvPr id="17" name="Shape 15"/>
-          <p:cNvSpPr/>
-          <p:nvPr/>
-        </p:nvSpPr>
-        <p:spPr>
-          <a:xfrm>
-            <a:off x="9454896" y="3319272"/>
-            <a:ext cx="256032" cy="566928"/>
-          </a:xfrm>
-          <a:prstGeom prst="rect">
-            <a:avLst/>
-          </a:prstGeom>
-          <a:solidFill>
-            <a:srgbClr val="6A4CA3"/>
-          </a:solidFill>
-          <a:ln w="12700">
-            <a:solidFill>
-              <a:srgbClr val="6A4CA3"/>
-            </a:solidFill>
-            <a:prstDash val="solid"/>
-          </a:ln>
-        </p:spPr>
-      </p:sp>
-      <p:sp>
-        <p:nvSpPr>
-          <p:cNvPr id="18" name="Shape 16"/>
-          <p:cNvSpPr/>
-          <p:nvPr/>
-        </p:nvSpPr>
-        <p:spPr>
-          <a:xfrm>
-            <a:off x="8019288" y="3886200"/>
-            <a:ext cx="2706624" cy="0"/>
-          </a:xfrm>
-          <a:prstGeom prst="line">
-            <a:avLst/>
-          </a:prstGeom>
-          <a:noFill/>
-          <a:ln w="15240">
-            <a:solidFill>
-              <a:srgbClr val="003A63"/>
-            </a:solidFill>
-            <a:prstDash val="solid"/>
-          </a:ln>
-        </p:spPr>
-      </p:sp>
-      <p:sp>
-        <p:nvSpPr>
-          <p:cNvPr id="19" name="Text 17"/>
-          <p:cNvSpPr/>
-          <p:nvPr/>
-        </p:nvSpPr>
-        <p:spPr>
-          <a:xfrm>
-            <a:off x="7863840" y="3017520"/>
-            <a:ext cx="3017520" cy="201168"/>
-          </a:xfrm>
-          <a:prstGeom prst="rect">
-            <a:avLst/>
-          </a:prstGeom>
-          <a:noFill/>
-          <a:ln/>
-        </p:spPr>
-        <p:txBody>
-          <a:bodyPr wrap="square" lIns="0" tIns="0" rIns="0" bIns="0" rtlCol="0" anchor="ctr"/>
-          <a:lstStyle/>
-          <a:p>
-            <a:pPr algn="ctr" indent="0" marL="0">
-              <a:buNone/>
-            </a:pPr>
-            <a:r>
-              <a:rPr lang="en-US" sz="1050" b="1" dirty="0">
-                <a:solidFill>
-                  <a:srgbClr val="003A63"/>
-                </a:solidFill>
-                <a:latin typeface="Aptos" pitchFamily="34" charset="0"/>
-                <a:ea typeface="Aptos" pitchFamily="34" charset="-122"/>
-                <a:cs typeface="Aptos" pitchFamily="34" charset="-120"/>
-              </a:rPr>
-              <a:t>Measure and monitor</a:t>
-            </a:r>
-            <a:endParaRPr lang="en-US" sz="1050" dirty="0"/>
-          </a:p>
-        </p:txBody>
-      </p:sp>
-      <p:sp>
-        <p:nvSpPr>
-          <p:cNvPr id="20" name="Shape 18"/>
           <p:cNvSpPr/>
           <p:nvPr/>
         </p:nvSpPr>
@@ -10360,7 +9790,7 @@
       </p:sp>
       <p:sp>
         <p:nvSpPr>
-          <p:cNvPr id="21" name="Text 19"/>
+          <p:cNvPr id="17" name="Text 15"/>
           <p:cNvSpPr/>
           <p:nvPr/>
         </p:nvSpPr>
@@ -10399,7 +9829,7 @@
       </p:sp>
       <p:sp>
         <p:nvSpPr>
-          <p:cNvPr id="22" name="Text 20"/>
+          <p:cNvPr id="18" name="Text 16"/>
           <p:cNvSpPr/>
           <p:nvPr/>
         </p:nvSpPr>
@@ -10932,20 +10362,20 @@
         </p:nvSpPr>
         <p:spPr>
           <a:xfrm>
-            <a:off x="7635240" y="3730752"/>
-            <a:ext cx="1033272" cy="749808"/>
+            <a:off x="7909560" y="3675888"/>
+            <a:ext cx="3154680" cy="1691640"/>
           </a:xfrm>
           <a:prstGeom prst="roundRect">
             <a:avLst>
-              <a:gd name="adj" fmla="val 14634"/>
+              <a:gd name="adj" fmla="val 6486"/>
             </a:avLst>
           </a:prstGeom>
           <a:solidFill>
-            <a:srgbClr val="0068B7"/>
+            <a:srgbClr val="FFFFFF"/>
           </a:solidFill>
           <a:ln w="12700">
             <a:solidFill>
-              <a:srgbClr val="0068B7"/>
+              <a:srgbClr val="B9D7E6"/>
             </a:solidFill>
             <a:prstDash val="solid"/>
           </a:ln>
@@ -10959,172 +10389,100 @@
         </p:nvSpPr>
         <p:spPr>
           <a:xfrm>
-            <a:off x="7708392" y="3922776"/>
-            <a:ext cx="886968" cy="310896"/>
-          </a:xfrm>
-          <a:prstGeom prst="rect">
-            <a:avLst/>
-          </a:prstGeom>
-          <a:noFill/>
-          <a:ln/>
-        </p:spPr>
-        <p:txBody>
-          <a:bodyPr wrap="square" lIns="0" tIns="0" rIns="0" bIns="0" rtlCol="0" anchor="ctr">
+            <a:off x="8074152" y="3822192"/>
+            <a:ext cx="2825496" cy="256032"/>
+          </a:xfrm>
+          <a:prstGeom prst="rect">
+            <a:avLst/>
+          </a:prstGeom>
+          <a:noFill/>
+          <a:ln/>
+        </p:spPr>
+        <p:txBody>
+          <a:bodyPr wrap="square" lIns="0" tIns="0" rIns="0" bIns="0" rtlCol="0" anchor="ctr"/>
+          <a:lstStyle/>
+          <a:p>
+            <a:pPr indent="0" marL="0">
+              <a:buNone/>
+            </a:pPr>
+            <a:r>
+              <a:rPr lang="en-US" sz="1300" b="1" dirty="0">
+                <a:solidFill>
+                  <a:srgbClr val="0068B7"/>
+                </a:solidFill>
+                <a:latin typeface="Aptos" pitchFamily="34" charset="0"/>
+                <a:ea typeface="Aptos" pitchFamily="34" charset="-122"/>
+                <a:cs typeface="Aptos" pitchFamily="34" charset="-120"/>
+              </a:rPr>
+              <a:t>Learning sequence</a:t>
+            </a:r>
+            <a:endParaRPr lang="en-US" sz="1300" dirty="0"/>
+          </a:p>
+        </p:txBody>
+      </p:sp>
+      <p:sp>
+        <p:nvSpPr>
+          <p:cNvPr id="15" name="Text 13"/>
+          <p:cNvSpPr/>
+          <p:nvPr/>
+        </p:nvSpPr>
+        <p:spPr>
+          <a:xfrm>
+            <a:off x="8092440" y="4187952"/>
+            <a:ext cx="2770632" cy="1033272"/>
+          </a:xfrm>
+          <a:prstGeom prst="rect">
+            <a:avLst/>
+          </a:prstGeom>
+          <a:noFill/>
+          <a:ln/>
+        </p:spPr>
+        <p:txBody>
+          <a:bodyPr wrap="square" lIns="254" tIns="254" rIns="254" bIns="254" rtlCol="0" anchor="t">
             <a:normAutofit/>
           </a:bodyPr>
           <a:lstStyle/>
           <a:p>
-            <a:pPr algn="ctr" indent="0" marL="0">
-              <a:buNone/>
-            </a:pPr>
-            <a:r>
-              <a:rPr lang="en-US" sz="1500" b="1" dirty="0">
-                <a:solidFill>
-                  <a:srgbClr val="FFFFFF"/>
-                </a:solidFill>
-                <a:latin typeface="Aptos" pitchFamily="34" charset="0"/>
-                <a:ea typeface="Aptos" pitchFamily="34" charset="-122"/>
-                <a:cs typeface="Aptos" pitchFamily="34" charset="-120"/>
-              </a:rPr>
-              <a:t>Learn</a:t>
-            </a:r>
-            <a:endParaRPr lang="en-US" sz="1500" dirty="0"/>
-          </a:p>
-        </p:txBody>
-      </p:sp>
-      <p:sp>
-        <p:nvSpPr>
-          <p:cNvPr id="15" name="Shape 13"/>
-          <p:cNvSpPr/>
-          <p:nvPr/>
-        </p:nvSpPr>
-        <p:spPr>
-          <a:xfrm>
-            <a:off x="8924544" y="3730752"/>
-            <a:ext cx="1033272" cy="749808"/>
-          </a:xfrm>
-          <a:prstGeom prst="roundRect">
-            <a:avLst>
-              <a:gd name="adj" fmla="val 14634"/>
-            </a:avLst>
-          </a:prstGeom>
-          <a:solidFill>
-            <a:srgbClr val="2F8A28"/>
-          </a:solidFill>
-          <a:ln w="12700">
-            <a:solidFill>
-              <a:srgbClr val="2F8A28"/>
-            </a:solidFill>
-            <a:prstDash val="solid"/>
-          </a:ln>
-        </p:spPr>
-      </p:sp>
-      <p:sp>
-        <p:nvSpPr>
-          <p:cNvPr id="16" name="Text 14"/>
-          <p:cNvSpPr/>
-          <p:nvPr/>
-        </p:nvSpPr>
-        <p:spPr>
-          <a:xfrm>
-            <a:off x="8997696" y="3922776"/>
-            <a:ext cx="886968" cy="310896"/>
-          </a:xfrm>
-          <a:prstGeom prst="rect">
-            <a:avLst/>
-          </a:prstGeom>
-          <a:noFill/>
-          <a:ln/>
-        </p:spPr>
-        <p:txBody>
-          <a:bodyPr wrap="square" lIns="0" tIns="0" rIns="0" bIns="0" rtlCol="0" anchor="ctr">
-            <a:normAutofit/>
-          </a:bodyPr>
-          <a:lstStyle/>
-          <a:p>
-            <a:pPr algn="ctr" indent="0" marL="0">
-              <a:buNone/>
-            </a:pPr>
-            <a:r>
-              <a:rPr lang="en-US" sz="1500" b="1" dirty="0">
-                <a:solidFill>
-                  <a:srgbClr val="FFFFFF"/>
-                </a:solidFill>
-                <a:latin typeface="Aptos" pitchFamily="34" charset="0"/>
-                <a:ea typeface="Aptos" pitchFamily="34" charset="-122"/>
-                <a:cs typeface="Aptos" pitchFamily="34" charset="-120"/>
-              </a:rPr>
-              <a:t>Apply</a:t>
-            </a:r>
-            <a:endParaRPr lang="en-US" sz="1500" dirty="0"/>
-          </a:p>
-        </p:txBody>
-      </p:sp>
-      <p:sp>
-        <p:nvSpPr>
-          <p:cNvPr id="17" name="Shape 15"/>
-          <p:cNvSpPr/>
-          <p:nvPr/>
-        </p:nvSpPr>
-        <p:spPr>
-          <a:xfrm>
-            <a:off x="10213848" y="3730752"/>
-            <a:ext cx="1033272" cy="749808"/>
-          </a:xfrm>
-          <a:prstGeom prst="roundRect">
-            <a:avLst>
-              <a:gd name="adj" fmla="val 14634"/>
-            </a:avLst>
-          </a:prstGeom>
-          <a:solidFill>
-            <a:srgbClr val="6A4CA3"/>
-          </a:solidFill>
-          <a:ln w="12700">
-            <a:solidFill>
-              <a:srgbClr val="6A4CA3"/>
-            </a:solidFill>
-            <a:prstDash val="solid"/>
-          </a:ln>
-        </p:spPr>
-      </p:sp>
-      <p:sp>
-        <p:nvSpPr>
-          <p:cNvPr id="18" name="Text 16"/>
-          <p:cNvSpPr/>
-          <p:nvPr/>
-        </p:nvSpPr>
-        <p:spPr>
-          <a:xfrm>
-            <a:off x="10287000" y="3922776"/>
-            <a:ext cx="886968" cy="310896"/>
-          </a:xfrm>
-          <a:prstGeom prst="rect">
-            <a:avLst/>
-          </a:prstGeom>
-          <a:noFill/>
-          <a:ln/>
-        </p:spPr>
-        <p:txBody>
-          <a:bodyPr wrap="square" lIns="0" tIns="0" rIns="0" bIns="0" rtlCol="0" anchor="ctr">
-            <a:normAutofit/>
-          </a:bodyPr>
-          <a:lstStyle/>
-          <a:p>
-            <a:pPr algn="ctr" indent="0" marL="0">
-              <a:buNone/>
-            </a:pPr>
-            <a:r>
-              <a:rPr lang="en-US" sz="1500" b="1" dirty="0">
-                <a:solidFill>
-                  <a:srgbClr val="FFFFFF"/>
-                </a:solidFill>
-                <a:latin typeface="Aptos" pitchFamily="34" charset="0"/>
-                <a:ea typeface="Aptos" pitchFamily="34" charset="-122"/>
-                <a:cs typeface="Aptos" pitchFamily="34" charset="-120"/>
-              </a:rPr>
-              <a:t>Document</a:t>
-            </a:r>
-            <a:endParaRPr lang="en-US" sz="1500" dirty="0"/>
+            <a:r>
+              <a:rPr lang="en-US" sz="1380" dirty="0">
+                <a:solidFill>
+                  <a:srgbClr val="17364A"/>
+                </a:solidFill>
+                <a:latin typeface="Aptos" pitchFamily="34" charset="0"/>
+                <a:ea typeface="Aptos" pitchFamily="34" charset="-122"/>
+                <a:cs typeface="Aptos" pitchFamily="34" charset="-120"/>
+              </a:rPr>
+              <a:t>Read the module for shared vocabulary and context.</a:t>
+            </a:r>
+            <a:endParaRPr lang="en-US" sz="1380" dirty="0"/>
+          </a:p>
+          <a:p>
+            <a:r>
+              <a:rPr lang="en-US" sz="1380" dirty="0">
+                <a:solidFill>
+                  <a:srgbClr val="17364A"/>
+                </a:solidFill>
+                <a:latin typeface="Aptos" pitchFamily="34" charset="0"/>
+                <a:ea typeface="Aptos" pitchFamily="34" charset="-122"/>
+                <a:cs typeface="Aptos" pitchFamily="34" charset="-120"/>
+              </a:rPr>
+              <a:t>Complete the practical exercise to apply the concept.</a:t>
+            </a:r>
+            <a:endParaRPr lang="en-US" sz="1380" dirty="0"/>
+          </a:p>
+          <a:p>
+            <a:r>
+              <a:rPr lang="en-US" sz="1380" dirty="0">
+                <a:solidFill>
+                  <a:srgbClr val="17364A"/>
+                </a:solidFill>
+                <a:latin typeface="Aptos" pitchFamily="34" charset="0"/>
+                <a:ea typeface="Aptos" pitchFamily="34" charset="-122"/>
+                <a:cs typeface="Aptos" pitchFamily="34" charset="-120"/>
+              </a:rPr>
+              <a:t>Use the notes and references for deeper review.</a:t>
+            </a:r>
+            <a:endParaRPr lang="en-US" sz="1380" dirty="0"/>
           </a:p>
         </p:txBody>
       </p:sp>
@@ -11597,13 +10955,11 @@
             </a:avLst>
           </a:prstGeom>
           <a:solidFill>
-            <a:srgbClr val="FFFFFF">
-              <a:alpha val="88000"/>
-            </a:srgbClr>
+            <a:srgbClr val="FFFFFF"/>
           </a:solidFill>
           <a:ln w="12700">
             <a:solidFill>
-              <a:srgbClr val="D6E8F2"/>
+              <a:srgbClr val="B9D7E6"/>
             </a:solidFill>
             <a:prstDash val="solid"/>
           </a:ln>
@@ -11611,169 +10967,112 @@
       </p:sp>
       <p:sp>
         <p:nvSpPr>
-          <p:cNvPr id="14" name="Shape 12"/>
-          <p:cNvSpPr/>
-          <p:nvPr/>
-        </p:nvSpPr>
-        <p:spPr>
-          <a:xfrm>
-            <a:off x="8138160" y="3474720"/>
-            <a:ext cx="256032" cy="411480"/>
-          </a:xfrm>
-          <a:prstGeom prst="rect">
-            <a:avLst/>
-          </a:prstGeom>
-          <a:solidFill>
-            <a:srgbClr val="0068B7"/>
-          </a:solidFill>
-          <a:ln w="12700">
-            <a:solidFill>
-              <a:srgbClr val="0068B7"/>
-            </a:solidFill>
-            <a:prstDash val="solid"/>
-          </a:ln>
-        </p:spPr>
-      </p:sp>
-      <p:sp>
-        <p:nvSpPr>
-          <p:cNvPr id="15" name="Shape 13"/>
-          <p:cNvSpPr/>
-          <p:nvPr/>
-        </p:nvSpPr>
-        <p:spPr>
-          <a:xfrm>
-            <a:off x="8577072" y="3172968"/>
-            <a:ext cx="256032" cy="713232"/>
-          </a:xfrm>
-          <a:prstGeom prst="rect">
-            <a:avLst/>
-          </a:prstGeom>
-          <a:solidFill>
-            <a:srgbClr val="2F8A28"/>
-          </a:solidFill>
-          <a:ln w="12700">
-            <a:solidFill>
-              <a:srgbClr val="2F8A28"/>
-            </a:solidFill>
-            <a:prstDash val="solid"/>
-          </a:ln>
-        </p:spPr>
+          <p:cNvPr id="14" name="Text 12"/>
+          <p:cNvSpPr/>
+          <p:nvPr/>
+        </p:nvSpPr>
+        <p:spPr>
+          <a:xfrm>
+            <a:off x="7799832" y="2935224"/>
+            <a:ext cx="3145536" cy="256032"/>
+          </a:xfrm>
+          <a:prstGeom prst="rect">
+            <a:avLst/>
+          </a:prstGeom>
+          <a:noFill/>
+          <a:ln/>
+        </p:spPr>
+        <p:txBody>
+          <a:bodyPr wrap="square" lIns="0" tIns="0" rIns="0" bIns="0" rtlCol="0" anchor="ctr"/>
+          <a:lstStyle/>
+          <a:p>
+            <a:pPr indent="0" marL="0">
+              <a:buNone/>
+            </a:pPr>
+            <a:r>
+              <a:rPr lang="en-US" sz="1300" b="1" dirty="0">
+                <a:solidFill>
+                  <a:srgbClr val="0068B7"/>
+                </a:solidFill>
+                <a:latin typeface="Aptos" pitchFamily="34" charset="0"/>
+                <a:ea typeface="Aptos" pitchFamily="34" charset="-122"/>
+                <a:cs typeface="Aptos" pitchFamily="34" charset="-120"/>
+              </a:rPr>
+              <a:t>Concept checkpoints</a:t>
+            </a:r>
+            <a:endParaRPr lang="en-US" sz="1300" dirty="0"/>
+          </a:p>
+        </p:txBody>
+      </p:sp>
+      <p:sp>
+        <p:nvSpPr>
+          <p:cNvPr id="15" name="Text 13"/>
+          <p:cNvSpPr/>
+          <p:nvPr/>
+        </p:nvSpPr>
+        <p:spPr>
+          <a:xfrm>
+            <a:off x="7818120" y="3300984"/>
+            <a:ext cx="3090672" cy="877824"/>
+          </a:xfrm>
+          <a:prstGeom prst="rect">
+            <a:avLst/>
+          </a:prstGeom>
+          <a:noFill/>
+          <a:ln/>
+        </p:spPr>
+        <p:txBody>
+          <a:bodyPr wrap="square" lIns="254" tIns="254" rIns="254" bIns="254" rtlCol="0" anchor="t">
+            <a:normAutofit/>
+          </a:bodyPr>
+          <a:lstStyle/>
+          <a:p>
+            <a:r>
+              <a:rPr lang="en-US" sz="1380" dirty="0">
+                <a:solidFill>
+                  <a:srgbClr val="17364A"/>
+                </a:solidFill>
+                <a:latin typeface="Aptos" pitchFamily="34" charset="0"/>
+                <a:ea typeface="Aptos" pitchFamily="34" charset="-122"/>
+                <a:cs typeface="Aptos" pitchFamily="34" charset="-120"/>
+              </a:rPr>
+              <a:t>Generative AI output evaluation rubric</a:t>
+            </a:r>
+            <a:endParaRPr lang="en-US" sz="1380" dirty="0"/>
+          </a:p>
+          <a:p>
+            <a:r>
+              <a:rPr lang="en-US" sz="1380" dirty="0">
+                <a:solidFill>
+                  <a:srgbClr val="17364A"/>
+                </a:solidFill>
+                <a:latin typeface="Aptos" pitchFamily="34" charset="0"/>
+                <a:ea typeface="Aptos" pitchFamily="34" charset="-122"/>
+                <a:cs typeface="Aptos" pitchFamily="34" charset="-120"/>
+              </a:rPr>
+              <a:t>Completed sample review</a:t>
+            </a:r>
+            <a:endParaRPr lang="en-US" sz="1380" dirty="0"/>
+          </a:p>
+          <a:p>
+            <a:r>
+              <a:rPr lang="en-US" sz="1380" dirty="0">
+                <a:solidFill>
+                  <a:srgbClr val="17364A"/>
+                </a:solidFill>
+                <a:latin typeface="Aptos" pitchFamily="34" charset="0"/>
+                <a:ea typeface="Aptos" pitchFamily="34" charset="-122"/>
+                <a:cs typeface="Aptos" pitchFamily="34" charset="-120"/>
+              </a:rPr>
+              <a:t>Source verification notes</a:t>
+            </a:r>
+            <a:endParaRPr lang="en-US" sz="1380" dirty="0"/>
+          </a:p>
+        </p:txBody>
       </p:sp>
       <p:sp>
         <p:nvSpPr>
           <p:cNvPr id="16" name="Shape 14"/>
-          <p:cNvSpPr/>
-          <p:nvPr/>
-        </p:nvSpPr>
-        <p:spPr>
-          <a:xfrm>
-            <a:off x="9015984" y="2880360"/>
-            <a:ext cx="256032" cy="1005840"/>
-          </a:xfrm>
-          <a:prstGeom prst="rect">
-            <a:avLst/>
-          </a:prstGeom>
-          <a:solidFill>
-            <a:srgbClr val="D69A2D"/>
-          </a:solidFill>
-          <a:ln w="12700">
-            <a:solidFill>
-              <a:srgbClr val="D69A2D"/>
-            </a:solidFill>
-            <a:prstDash val="solid"/>
-          </a:ln>
-        </p:spPr>
-      </p:sp>
-      <p:sp>
-        <p:nvSpPr>
-          <p:cNvPr id="17" name="Shape 15"/>
-          <p:cNvSpPr/>
-          <p:nvPr/>
-        </p:nvSpPr>
-        <p:spPr>
-          <a:xfrm>
-            <a:off x="9454896" y="3319272"/>
-            <a:ext cx="256032" cy="566928"/>
-          </a:xfrm>
-          <a:prstGeom prst="rect">
-            <a:avLst/>
-          </a:prstGeom>
-          <a:solidFill>
-            <a:srgbClr val="6A4CA3"/>
-          </a:solidFill>
-          <a:ln w="12700">
-            <a:solidFill>
-              <a:srgbClr val="6A4CA3"/>
-            </a:solidFill>
-            <a:prstDash val="solid"/>
-          </a:ln>
-        </p:spPr>
-      </p:sp>
-      <p:sp>
-        <p:nvSpPr>
-          <p:cNvPr id="18" name="Shape 16"/>
-          <p:cNvSpPr/>
-          <p:nvPr/>
-        </p:nvSpPr>
-        <p:spPr>
-          <a:xfrm>
-            <a:off x="8019288" y="3886200"/>
-            <a:ext cx="2706624" cy="0"/>
-          </a:xfrm>
-          <a:prstGeom prst="line">
-            <a:avLst/>
-          </a:prstGeom>
-          <a:noFill/>
-          <a:ln w="15240">
-            <a:solidFill>
-              <a:srgbClr val="003A63"/>
-            </a:solidFill>
-            <a:prstDash val="solid"/>
-          </a:ln>
-        </p:spPr>
-      </p:sp>
-      <p:sp>
-        <p:nvSpPr>
-          <p:cNvPr id="19" name="Text 17"/>
-          <p:cNvSpPr/>
-          <p:nvPr/>
-        </p:nvSpPr>
-        <p:spPr>
-          <a:xfrm>
-            <a:off x="7863840" y="3017520"/>
-            <a:ext cx="3017520" cy="201168"/>
-          </a:xfrm>
-          <a:prstGeom prst="rect">
-            <a:avLst/>
-          </a:prstGeom>
-          <a:noFill/>
-          <a:ln/>
-        </p:spPr>
-        <p:txBody>
-          <a:bodyPr wrap="square" lIns="0" tIns="0" rIns="0" bIns="0" rtlCol="0" anchor="ctr"/>
-          <a:lstStyle/>
-          <a:p>
-            <a:pPr algn="ctr" indent="0" marL="0">
-              <a:buNone/>
-            </a:pPr>
-            <a:r>
-              <a:rPr lang="en-US" sz="1050" b="1" dirty="0">
-                <a:solidFill>
-                  <a:srgbClr val="003A63"/>
-                </a:solidFill>
-                <a:latin typeface="Aptos" pitchFamily="34" charset="0"/>
-                <a:ea typeface="Aptos" pitchFamily="34" charset="-122"/>
-                <a:cs typeface="Aptos" pitchFamily="34" charset="-120"/>
-              </a:rPr>
-              <a:t>Measure and monitor</a:t>
-            </a:r>
-            <a:endParaRPr lang="en-US" sz="1050" dirty="0"/>
-          </a:p>
-        </p:txBody>
-      </p:sp>
-      <p:sp>
-        <p:nvSpPr>
-          <p:cNvPr id="20" name="Shape 18"/>
           <p:cNvSpPr/>
           <p:nvPr/>
         </p:nvSpPr>
@@ -11800,7 +11099,7 @@
       </p:sp>
       <p:sp>
         <p:nvSpPr>
-          <p:cNvPr id="21" name="Text 19"/>
+          <p:cNvPr id="17" name="Text 15"/>
           <p:cNvSpPr/>
           <p:nvPr/>
         </p:nvSpPr>
@@ -11839,7 +11138,7 @@
       </p:sp>
       <p:sp>
         <p:nvSpPr>
-          <p:cNvPr id="22" name="Text 20"/>
+          <p:cNvPr id="18" name="Text 16"/>
           <p:cNvSpPr/>
           <p:nvPr/>
         </p:nvSpPr>
@@ -12347,13 +11646,11 @@
             </a:avLst>
           </a:prstGeom>
           <a:solidFill>
-            <a:srgbClr val="FFFFFF">
-              <a:alpha val="88000"/>
-            </a:srgbClr>
+            <a:srgbClr val="FFFFFF"/>
           </a:solidFill>
           <a:ln w="12700">
             <a:solidFill>
-              <a:srgbClr val="D6E8F2"/>
+              <a:srgbClr val="B9D7E6"/>
             </a:solidFill>
             <a:prstDash val="solid"/>
           </a:ln>
@@ -12361,169 +11658,112 @@
       </p:sp>
       <p:sp>
         <p:nvSpPr>
-          <p:cNvPr id="14" name="Shape 12"/>
-          <p:cNvSpPr/>
-          <p:nvPr/>
-        </p:nvSpPr>
-        <p:spPr>
-          <a:xfrm>
-            <a:off x="8138160" y="3474720"/>
-            <a:ext cx="256032" cy="411480"/>
-          </a:xfrm>
-          <a:prstGeom prst="rect">
-            <a:avLst/>
-          </a:prstGeom>
-          <a:solidFill>
-            <a:srgbClr val="0068B7"/>
-          </a:solidFill>
-          <a:ln w="12700">
-            <a:solidFill>
-              <a:srgbClr val="0068B7"/>
-            </a:solidFill>
-            <a:prstDash val="solid"/>
-          </a:ln>
-        </p:spPr>
-      </p:sp>
-      <p:sp>
-        <p:nvSpPr>
-          <p:cNvPr id="15" name="Shape 13"/>
-          <p:cNvSpPr/>
-          <p:nvPr/>
-        </p:nvSpPr>
-        <p:spPr>
-          <a:xfrm>
-            <a:off x="8577072" y="3172968"/>
-            <a:ext cx="256032" cy="713232"/>
-          </a:xfrm>
-          <a:prstGeom prst="rect">
-            <a:avLst/>
-          </a:prstGeom>
-          <a:solidFill>
-            <a:srgbClr val="2F8A28"/>
-          </a:solidFill>
-          <a:ln w="12700">
-            <a:solidFill>
-              <a:srgbClr val="2F8A28"/>
-            </a:solidFill>
-            <a:prstDash val="solid"/>
-          </a:ln>
-        </p:spPr>
+          <p:cNvPr id="14" name="Text 12"/>
+          <p:cNvSpPr/>
+          <p:nvPr/>
+        </p:nvSpPr>
+        <p:spPr>
+          <a:xfrm>
+            <a:off x="7799832" y="2935224"/>
+            <a:ext cx="3145536" cy="256032"/>
+          </a:xfrm>
+          <a:prstGeom prst="rect">
+            <a:avLst/>
+          </a:prstGeom>
+          <a:noFill/>
+          <a:ln/>
+        </p:spPr>
+        <p:txBody>
+          <a:bodyPr wrap="square" lIns="0" tIns="0" rIns="0" bIns="0" rtlCol="0" anchor="ctr"/>
+          <a:lstStyle/>
+          <a:p>
+            <a:pPr indent="0" marL="0">
+              <a:buNone/>
+            </a:pPr>
+            <a:r>
+              <a:rPr lang="en-US" sz="1300" b="1" dirty="0">
+                <a:solidFill>
+                  <a:srgbClr val="0068B7"/>
+                </a:solidFill>
+                <a:latin typeface="Aptos" pitchFamily="34" charset="0"/>
+                <a:ea typeface="Aptos" pitchFamily="34" charset="-122"/>
+                <a:cs typeface="Aptos" pitchFamily="34" charset="-120"/>
+              </a:rPr>
+              <a:t>Concept checkpoints</a:t>
+            </a:r>
+            <a:endParaRPr lang="en-US" sz="1300" dirty="0"/>
+          </a:p>
+        </p:txBody>
+      </p:sp>
+      <p:sp>
+        <p:nvSpPr>
+          <p:cNvPr id="15" name="Text 13"/>
+          <p:cNvSpPr/>
+          <p:nvPr/>
+        </p:nvSpPr>
+        <p:spPr>
+          <a:xfrm>
+            <a:off x="7818120" y="3300984"/>
+            <a:ext cx="3090672" cy="877824"/>
+          </a:xfrm>
+          <a:prstGeom prst="rect">
+            <a:avLst/>
+          </a:prstGeom>
+          <a:noFill/>
+          <a:ln/>
+        </p:spPr>
+        <p:txBody>
+          <a:bodyPr wrap="square" lIns="254" tIns="254" rIns="254" bIns="254" rtlCol="0" anchor="t">
+            <a:normAutofit/>
+          </a:bodyPr>
+          <a:lstStyle/>
+          <a:p>
+            <a:r>
+              <a:rPr lang="en-US" sz="1380" dirty="0">
+                <a:solidFill>
+                  <a:srgbClr val="17364A"/>
+                </a:solidFill>
+                <a:latin typeface="Aptos" pitchFamily="34" charset="0"/>
+                <a:ea typeface="Aptos" pitchFamily="34" charset="-122"/>
+                <a:cs typeface="Aptos" pitchFamily="34" charset="-120"/>
+              </a:rPr>
+              <a:t>1.</a:t>
+            </a:r>
+            <a:endParaRPr lang="en-US" sz="1380" dirty="0"/>
+          </a:p>
+          <a:p>
+            <a:r>
+              <a:rPr lang="en-US" sz="1380" dirty="0">
+                <a:solidFill>
+                  <a:srgbClr val="17364A"/>
+                </a:solidFill>
+                <a:latin typeface="Aptos" pitchFamily="34" charset="0"/>
+                <a:ea typeface="Aptos" pitchFamily="34" charset="-122"/>
+                <a:cs typeface="Aptos" pitchFamily="34" charset="-120"/>
+              </a:rPr>
+              <a:t>Why is fluency not enough to trust a generative AI output?</a:t>
+            </a:r>
+            <a:endParaRPr lang="en-US" sz="1380" dirty="0"/>
+          </a:p>
+          <a:p>
+            <a:r>
+              <a:rPr lang="en-US" sz="1380" dirty="0">
+                <a:solidFill>
+                  <a:srgbClr val="17364A"/>
+                </a:solidFill>
+                <a:latin typeface="Aptos" pitchFamily="34" charset="0"/>
+                <a:ea typeface="Aptos" pitchFamily="34" charset="-122"/>
+                <a:cs typeface="Aptos" pitchFamily="34" charset="-120"/>
+              </a:rPr>
+              <a:t>2.</a:t>
+            </a:r>
+            <a:endParaRPr lang="en-US" sz="1380" dirty="0"/>
+          </a:p>
+        </p:txBody>
       </p:sp>
       <p:sp>
         <p:nvSpPr>
           <p:cNvPr id="16" name="Shape 14"/>
-          <p:cNvSpPr/>
-          <p:nvPr/>
-        </p:nvSpPr>
-        <p:spPr>
-          <a:xfrm>
-            <a:off x="9015984" y="2880360"/>
-            <a:ext cx="256032" cy="1005840"/>
-          </a:xfrm>
-          <a:prstGeom prst="rect">
-            <a:avLst/>
-          </a:prstGeom>
-          <a:solidFill>
-            <a:srgbClr val="D69A2D"/>
-          </a:solidFill>
-          <a:ln w="12700">
-            <a:solidFill>
-              <a:srgbClr val="D69A2D"/>
-            </a:solidFill>
-            <a:prstDash val="solid"/>
-          </a:ln>
-        </p:spPr>
-      </p:sp>
-      <p:sp>
-        <p:nvSpPr>
-          <p:cNvPr id="17" name="Shape 15"/>
-          <p:cNvSpPr/>
-          <p:nvPr/>
-        </p:nvSpPr>
-        <p:spPr>
-          <a:xfrm>
-            <a:off x="9454896" y="3319272"/>
-            <a:ext cx="256032" cy="566928"/>
-          </a:xfrm>
-          <a:prstGeom prst="rect">
-            <a:avLst/>
-          </a:prstGeom>
-          <a:solidFill>
-            <a:srgbClr val="6A4CA3"/>
-          </a:solidFill>
-          <a:ln w="12700">
-            <a:solidFill>
-              <a:srgbClr val="6A4CA3"/>
-            </a:solidFill>
-            <a:prstDash val="solid"/>
-          </a:ln>
-        </p:spPr>
-      </p:sp>
-      <p:sp>
-        <p:nvSpPr>
-          <p:cNvPr id="18" name="Shape 16"/>
-          <p:cNvSpPr/>
-          <p:nvPr/>
-        </p:nvSpPr>
-        <p:spPr>
-          <a:xfrm>
-            <a:off x="8019288" y="3886200"/>
-            <a:ext cx="2706624" cy="0"/>
-          </a:xfrm>
-          <a:prstGeom prst="line">
-            <a:avLst/>
-          </a:prstGeom>
-          <a:noFill/>
-          <a:ln w="15240">
-            <a:solidFill>
-              <a:srgbClr val="003A63"/>
-            </a:solidFill>
-            <a:prstDash val="solid"/>
-          </a:ln>
-        </p:spPr>
-      </p:sp>
-      <p:sp>
-        <p:nvSpPr>
-          <p:cNvPr id="19" name="Text 17"/>
-          <p:cNvSpPr/>
-          <p:nvPr/>
-        </p:nvSpPr>
-        <p:spPr>
-          <a:xfrm>
-            <a:off x="7863840" y="3017520"/>
-            <a:ext cx="3017520" cy="201168"/>
-          </a:xfrm>
-          <a:prstGeom prst="rect">
-            <a:avLst/>
-          </a:prstGeom>
-          <a:noFill/>
-          <a:ln/>
-        </p:spPr>
-        <p:txBody>
-          <a:bodyPr wrap="square" lIns="0" tIns="0" rIns="0" bIns="0" rtlCol="0" anchor="ctr"/>
-          <a:lstStyle/>
-          <a:p>
-            <a:pPr algn="ctr" indent="0" marL="0">
-              <a:buNone/>
-            </a:pPr>
-            <a:r>
-              <a:rPr lang="en-US" sz="1050" b="1" dirty="0">
-                <a:solidFill>
-                  <a:srgbClr val="003A63"/>
-                </a:solidFill>
-                <a:latin typeface="Aptos" pitchFamily="34" charset="0"/>
-                <a:ea typeface="Aptos" pitchFamily="34" charset="-122"/>
-                <a:cs typeface="Aptos" pitchFamily="34" charset="-120"/>
-              </a:rPr>
-              <a:t>Measure and monitor</a:t>
-            </a:r>
-            <a:endParaRPr lang="en-US" sz="1050" dirty="0"/>
-          </a:p>
-        </p:txBody>
-      </p:sp>
-      <p:sp>
-        <p:nvSpPr>
-          <p:cNvPr id="20" name="Shape 18"/>
           <p:cNvSpPr/>
           <p:nvPr/>
         </p:nvSpPr>
@@ -12550,7 +11790,7 @@
       </p:sp>
       <p:sp>
         <p:nvSpPr>
-          <p:cNvPr id="21" name="Text 19"/>
+          <p:cNvPr id="17" name="Text 15"/>
           <p:cNvSpPr/>
           <p:nvPr/>
         </p:nvSpPr>
@@ -12589,7 +11829,7 @@
       </p:sp>
       <p:sp>
         <p:nvSpPr>
-          <p:cNvPr id="22" name="Text 20"/>
+          <p:cNvPr id="18" name="Text 16"/>
           <p:cNvSpPr/>
           <p:nvPr/>
         </p:nvSpPr>
@@ -13097,13 +12337,11 @@
             </a:avLst>
           </a:prstGeom>
           <a:solidFill>
-            <a:srgbClr val="FFFFFF">
-              <a:alpha val="88000"/>
-            </a:srgbClr>
+            <a:srgbClr val="FFFFFF"/>
           </a:solidFill>
           <a:ln w="12700">
             <a:solidFill>
-              <a:srgbClr val="D6E8F2"/>
+              <a:srgbClr val="B9D7E6"/>
             </a:solidFill>
             <a:prstDash val="solid"/>
           </a:ln>
@@ -13111,169 +12349,98 @@
       </p:sp>
       <p:sp>
         <p:nvSpPr>
-          <p:cNvPr id="14" name="Shape 12"/>
-          <p:cNvSpPr/>
-          <p:nvPr/>
-        </p:nvSpPr>
-        <p:spPr>
-          <a:xfrm>
-            <a:off x="8138160" y="3474720"/>
-            <a:ext cx="256032" cy="411480"/>
-          </a:xfrm>
-          <a:prstGeom prst="rect">
-            <a:avLst/>
-          </a:prstGeom>
-          <a:solidFill>
-            <a:srgbClr val="0068B7"/>
-          </a:solidFill>
-          <a:ln w="12700">
-            <a:solidFill>
-              <a:srgbClr val="0068B7"/>
-            </a:solidFill>
-            <a:prstDash val="solid"/>
-          </a:ln>
-        </p:spPr>
-      </p:sp>
-      <p:sp>
-        <p:nvSpPr>
-          <p:cNvPr id="15" name="Shape 13"/>
-          <p:cNvSpPr/>
-          <p:nvPr/>
-        </p:nvSpPr>
-        <p:spPr>
-          <a:xfrm>
-            <a:off x="8577072" y="3172968"/>
-            <a:ext cx="256032" cy="713232"/>
-          </a:xfrm>
-          <a:prstGeom prst="rect">
-            <a:avLst/>
-          </a:prstGeom>
-          <a:solidFill>
-            <a:srgbClr val="2F8A28"/>
-          </a:solidFill>
-          <a:ln w="12700">
-            <a:solidFill>
-              <a:srgbClr val="2F8A28"/>
-            </a:solidFill>
-            <a:prstDash val="solid"/>
-          </a:ln>
-        </p:spPr>
+          <p:cNvPr id="14" name="Text 12"/>
+          <p:cNvSpPr/>
+          <p:nvPr/>
+        </p:nvSpPr>
+        <p:spPr>
+          <a:xfrm>
+            <a:off x="7799832" y="2935224"/>
+            <a:ext cx="3145536" cy="256032"/>
+          </a:xfrm>
+          <a:prstGeom prst="rect">
+            <a:avLst/>
+          </a:prstGeom>
+          <a:noFill/>
+          <a:ln/>
+        </p:spPr>
+        <p:txBody>
+          <a:bodyPr wrap="square" lIns="0" tIns="0" rIns="0" bIns="0" rtlCol="0" anchor="ctr"/>
+          <a:lstStyle/>
+          <a:p>
+            <a:pPr indent="0" marL="0">
+              <a:buNone/>
+            </a:pPr>
+            <a:r>
+              <a:rPr lang="en-US" sz="1300" b="1" dirty="0">
+                <a:solidFill>
+                  <a:srgbClr val="0068B7"/>
+                </a:solidFill>
+                <a:latin typeface="Aptos" pitchFamily="34" charset="0"/>
+                <a:ea typeface="Aptos" pitchFamily="34" charset="-122"/>
+                <a:cs typeface="Aptos" pitchFamily="34" charset="-120"/>
+              </a:rPr>
+              <a:t>Concept checkpoints</a:t>
+            </a:r>
+            <a:endParaRPr lang="en-US" sz="1300" dirty="0"/>
+          </a:p>
+        </p:txBody>
+      </p:sp>
+      <p:sp>
+        <p:nvSpPr>
+          <p:cNvPr id="15" name="Text 13"/>
+          <p:cNvSpPr/>
+          <p:nvPr/>
+        </p:nvSpPr>
+        <p:spPr>
+          <a:xfrm>
+            <a:off x="7818120" y="3300984"/>
+            <a:ext cx="3090672" cy="877824"/>
+          </a:xfrm>
+          <a:prstGeom prst="rect">
+            <a:avLst/>
+          </a:prstGeom>
+          <a:noFill/>
+          <a:ln/>
+        </p:spPr>
+        <p:txBody>
+          <a:bodyPr wrap="square" lIns="254" tIns="254" rIns="254" bIns="254" rtlCol="0" anchor="t">
+            <a:normAutofit/>
+          </a:bodyPr>
+          <a:lstStyle/>
+          <a:p>
+            <a:r>
+              <a:rPr lang="en-US" sz="1380" dirty="0">
+                <a:solidFill>
+                  <a:srgbClr val="17364A"/>
+                </a:solidFill>
+                <a:latin typeface="Aptos" pitchFamily="34" charset="0"/>
+                <a:ea typeface="Aptos" pitchFamily="34" charset="-122"/>
+                <a:cs typeface="Aptos" pitchFamily="34" charset="-120"/>
+              </a:rPr>
+              <a:t>NIST Artificial Intelligence Risk Management Framework:.</a:t>
+            </a:r>
+            <a:endParaRPr lang="en-US" sz="1380" dirty="0"/>
+          </a:p>
+          <a:p>
+            <a:r>
+              <a:rPr lang="en-US" sz="1380" dirty="0">
+                <a:solidFill>
+                  <a:srgbClr val="17364A"/>
+                </a:solidFill>
+                <a:latin typeface="Aptos" pitchFamily="34" charset="0"/>
+                <a:ea typeface="Aptos" pitchFamily="34" charset="-122"/>
+                <a:cs typeface="Aptos" pitchFamily="34" charset="-120"/>
+              </a:rPr>
+              <a:t>WHO Guidance on Large Multi-Modal Models:.</a:t>
+            </a:r>
+            <a:endParaRPr lang="en-US" sz="1380" dirty="0"/>
+          </a:p>
+        </p:txBody>
       </p:sp>
       <p:sp>
         <p:nvSpPr>
           <p:cNvPr id="16" name="Shape 14"/>
-          <p:cNvSpPr/>
-          <p:nvPr/>
-        </p:nvSpPr>
-        <p:spPr>
-          <a:xfrm>
-            <a:off x="9015984" y="2880360"/>
-            <a:ext cx="256032" cy="1005840"/>
-          </a:xfrm>
-          <a:prstGeom prst="rect">
-            <a:avLst/>
-          </a:prstGeom>
-          <a:solidFill>
-            <a:srgbClr val="D69A2D"/>
-          </a:solidFill>
-          <a:ln w="12700">
-            <a:solidFill>
-              <a:srgbClr val="D69A2D"/>
-            </a:solidFill>
-            <a:prstDash val="solid"/>
-          </a:ln>
-        </p:spPr>
-      </p:sp>
-      <p:sp>
-        <p:nvSpPr>
-          <p:cNvPr id="17" name="Shape 15"/>
-          <p:cNvSpPr/>
-          <p:nvPr/>
-        </p:nvSpPr>
-        <p:spPr>
-          <a:xfrm>
-            <a:off x="9454896" y="3319272"/>
-            <a:ext cx="256032" cy="566928"/>
-          </a:xfrm>
-          <a:prstGeom prst="rect">
-            <a:avLst/>
-          </a:prstGeom>
-          <a:solidFill>
-            <a:srgbClr val="6A4CA3"/>
-          </a:solidFill>
-          <a:ln w="12700">
-            <a:solidFill>
-              <a:srgbClr val="6A4CA3"/>
-            </a:solidFill>
-            <a:prstDash val="solid"/>
-          </a:ln>
-        </p:spPr>
-      </p:sp>
-      <p:sp>
-        <p:nvSpPr>
-          <p:cNvPr id="18" name="Shape 16"/>
-          <p:cNvSpPr/>
-          <p:nvPr/>
-        </p:nvSpPr>
-        <p:spPr>
-          <a:xfrm>
-            <a:off x="8019288" y="3886200"/>
-            <a:ext cx="2706624" cy="0"/>
-          </a:xfrm>
-          <a:prstGeom prst="line">
-            <a:avLst/>
-          </a:prstGeom>
-          <a:noFill/>
-          <a:ln w="15240">
-            <a:solidFill>
-              <a:srgbClr val="003A63"/>
-            </a:solidFill>
-            <a:prstDash val="solid"/>
-          </a:ln>
-        </p:spPr>
-      </p:sp>
-      <p:sp>
-        <p:nvSpPr>
-          <p:cNvPr id="19" name="Text 17"/>
-          <p:cNvSpPr/>
-          <p:nvPr/>
-        </p:nvSpPr>
-        <p:spPr>
-          <a:xfrm>
-            <a:off x="7863840" y="3017520"/>
-            <a:ext cx="3017520" cy="201168"/>
-          </a:xfrm>
-          <a:prstGeom prst="rect">
-            <a:avLst/>
-          </a:prstGeom>
-          <a:noFill/>
-          <a:ln/>
-        </p:spPr>
-        <p:txBody>
-          <a:bodyPr wrap="square" lIns="0" tIns="0" rIns="0" bIns="0" rtlCol="0" anchor="ctr"/>
-          <a:lstStyle/>
-          <a:p>
-            <a:pPr algn="ctr" indent="0" marL="0">
-              <a:buNone/>
-            </a:pPr>
-            <a:r>
-              <a:rPr lang="en-US" sz="1050" b="1" dirty="0">
-                <a:solidFill>
-                  <a:srgbClr val="003A63"/>
-                </a:solidFill>
-                <a:latin typeface="Aptos" pitchFamily="34" charset="0"/>
-                <a:ea typeface="Aptos" pitchFamily="34" charset="-122"/>
-                <a:cs typeface="Aptos" pitchFamily="34" charset="-120"/>
-              </a:rPr>
-              <a:t>Measure and monitor</a:t>
-            </a:r>
-            <a:endParaRPr lang="en-US" sz="1050" dirty="0"/>
-          </a:p>
-        </p:txBody>
-      </p:sp>
-      <p:sp>
-        <p:nvSpPr>
-          <p:cNvPr id="20" name="Shape 18"/>
           <p:cNvSpPr/>
           <p:nvPr/>
         </p:nvSpPr>
@@ -13300,7 +12467,7 @@
       </p:sp>
       <p:sp>
         <p:nvSpPr>
-          <p:cNvPr id="21" name="Text 19"/>
+          <p:cNvPr id="17" name="Text 15"/>
           <p:cNvSpPr/>
           <p:nvPr/>
         </p:nvSpPr>
@@ -13339,7 +12506,7 @@
       </p:sp>
       <p:sp>
         <p:nvSpPr>
-          <p:cNvPr id="22" name="Text 20"/>
+          <p:cNvPr id="18" name="Text 16"/>
           <p:cNvSpPr/>
           <p:nvPr/>
         </p:nvSpPr>
@@ -13852,20 +13019,20 @@
         </p:nvSpPr>
         <p:spPr>
           <a:xfrm>
-            <a:off x="7818120" y="3977640"/>
-            <a:ext cx="972312" cy="749808"/>
+            <a:off x="8046720" y="3794760"/>
+            <a:ext cx="3063240" cy="1600200"/>
           </a:xfrm>
           <a:prstGeom prst="roundRect">
             <a:avLst>
-              <a:gd name="adj" fmla="val 14634"/>
+              <a:gd name="adj" fmla="val 6857"/>
             </a:avLst>
           </a:prstGeom>
           <a:solidFill>
-            <a:srgbClr val="0068B7"/>
+            <a:srgbClr val="FFFFFF"/>
           </a:solidFill>
           <a:ln w="12700">
             <a:solidFill>
-              <a:srgbClr val="0068B7"/>
+              <a:srgbClr val="B9D7E6"/>
             </a:solidFill>
             <a:prstDash val="solid"/>
           </a:ln>
@@ -13879,172 +13046,100 @@
         </p:nvSpPr>
         <p:spPr>
           <a:xfrm>
-            <a:off x="7891272" y="4169664"/>
-            <a:ext cx="826008" cy="310896"/>
-          </a:xfrm>
-          <a:prstGeom prst="rect">
-            <a:avLst/>
-          </a:prstGeom>
-          <a:noFill/>
-          <a:ln/>
-        </p:spPr>
-        <p:txBody>
-          <a:bodyPr wrap="square" lIns="0" tIns="0" rIns="0" bIns="0" rtlCol="0" anchor="ctr">
+            <a:off x="8211312" y="3941064"/>
+            <a:ext cx="2734056" cy="256032"/>
+          </a:xfrm>
+          <a:prstGeom prst="rect">
+            <a:avLst/>
+          </a:prstGeom>
+          <a:noFill/>
+          <a:ln/>
+        </p:spPr>
+        <p:txBody>
+          <a:bodyPr wrap="square" lIns="0" tIns="0" rIns="0" bIns="0" rtlCol="0" anchor="ctr"/>
+          <a:lstStyle/>
+          <a:p>
+            <a:pPr indent="0" marL="0">
+              <a:buNone/>
+            </a:pPr>
+            <a:r>
+              <a:rPr lang="en-US" sz="1300" b="1" dirty="0">
+                <a:solidFill>
+                  <a:srgbClr val="0068B7"/>
+                </a:solidFill>
+                <a:latin typeface="Aptos" pitchFamily="34" charset="0"/>
+                <a:ea typeface="Aptos" pitchFamily="34" charset="-122"/>
+                <a:cs typeface="Aptos" pitchFamily="34" charset="-120"/>
+              </a:rPr>
+              <a:t>Use the play links to</a:t>
+            </a:r>
+            <a:endParaRPr lang="en-US" sz="1300" dirty="0"/>
+          </a:p>
+        </p:txBody>
+      </p:sp>
+      <p:sp>
+        <p:nvSpPr>
+          <p:cNvPr id="15" name="Text 13"/>
+          <p:cNvSpPr/>
+          <p:nvPr/>
+        </p:nvSpPr>
+        <p:spPr>
+          <a:xfrm>
+            <a:off x="8229600" y="4306824"/>
+            <a:ext cx="2679192" cy="941832"/>
+          </a:xfrm>
+          <a:prstGeom prst="rect">
+            <a:avLst/>
+          </a:prstGeom>
+          <a:noFill/>
+          <a:ln/>
+        </p:spPr>
+        <p:txBody>
+          <a:bodyPr wrap="square" lIns="254" tIns="254" rIns="254" bIns="254" rtlCol="0" anchor="t">
             <a:normAutofit/>
           </a:bodyPr>
           <a:lstStyle/>
           <a:p>
-            <a:pPr algn="ctr" indent="0" marL="0">
-              <a:buNone/>
-            </a:pPr>
-            <a:r>
-              <a:rPr lang="en-US" sz="1500" b="1" dirty="0">
-                <a:solidFill>
-                  <a:srgbClr val="FFFFFF"/>
-                </a:solidFill>
-                <a:latin typeface="Aptos" pitchFamily="34" charset="0"/>
-                <a:ea typeface="Aptos" pitchFamily="34" charset="-122"/>
-                <a:cs typeface="Aptos" pitchFamily="34" charset="-120"/>
-              </a:rPr>
-              <a:t>Lesson</a:t>
-            </a:r>
-            <a:endParaRPr lang="en-US" sz="1500" dirty="0"/>
-          </a:p>
-        </p:txBody>
-      </p:sp>
-      <p:sp>
-        <p:nvSpPr>
-          <p:cNvPr id="15" name="Shape 13"/>
-          <p:cNvSpPr/>
-          <p:nvPr/>
-        </p:nvSpPr>
-        <p:spPr>
-          <a:xfrm>
-            <a:off x="9046464" y="3977640"/>
-            <a:ext cx="972312" cy="749808"/>
-          </a:xfrm>
-          <a:prstGeom prst="roundRect">
-            <a:avLst>
-              <a:gd name="adj" fmla="val 14634"/>
-            </a:avLst>
-          </a:prstGeom>
-          <a:solidFill>
-            <a:srgbClr val="2F8A28"/>
-          </a:solidFill>
-          <a:ln w="12700">
-            <a:solidFill>
-              <a:srgbClr val="2F8A28"/>
-            </a:solidFill>
-            <a:prstDash val="solid"/>
-          </a:ln>
-        </p:spPr>
-      </p:sp>
-      <p:sp>
-        <p:nvSpPr>
-          <p:cNvPr id="16" name="Text 14"/>
-          <p:cNvSpPr/>
-          <p:nvPr/>
-        </p:nvSpPr>
-        <p:spPr>
-          <a:xfrm>
-            <a:off x="9119616" y="4169664"/>
-            <a:ext cx="826008" cy="310896"/>
-          </a:xfrm>
-          <a:prstGeom prst="rect">
-            <a:avLst/>
-          </a:prstGeom>
-          <a:noFill/>
-          <a:ln/>
-        </p:spPr>
-        <p:txBody>
-          <a:bodyPr wrap="square" lIns="0" tIns="0" rIns="0" bIns="0" rtlCol="0" anchor="ctr">
-            <a:normAutofit/>
-          </a:bodyPr>
-          <a:lstStyle/>
-          <a:p>
-            <a:pPr algn="ctr" indent="0" marL="0">
-              <a:buNone/>
-            </a:pPr>
-            <a:r>
-              <a:rPr lang="en-US" sz="1500" b="1" dirty="0">
-                <a:solidFill>
-                  <a:srgbClr val="FFFFFF"/>
-                </a:solidFill>
-                <a:latin typeface="Aptos" pitchFamily="34" charset="0"/>
-                <a:ea typeface="Aptos" pitchFamily="34" charset="-122"/>
-                <a:cs typeface="Aptos" pitchFamily="34" charset="-120"/>
-              </a:rPr>
-              <a:t>Plays</a:t>
-            </a:r>
-            <a:endParaRPr lang="en-US" sz="1500" dirty="0"/>
-          </a:p>
-        </p:txBody>
-      </p:sp>
-      <p:sp>
-        <p:nvSpPr>
-          <p:cNvPr id="17" name="Shape 15"/>
-          <p:cNvSpPr/>
-          <p:nvPr/>
-        </p:nvSpPr>
-        <p:spPr>
-          <a:xfrm>
-            <a:off x="10274808" y="3977640"/>
-            <a:ext cx="972312" cy="749808"/>
-          </a:xfrm>
-          <a:prstGeom prst="roundRect">
-            <a:avLst>
-              <a:gd name="adj" fmla="val 14634"/>
-            </a:avLst>
-          </a:prstGeom>
-          <a:solidFill>
-            <a:srgbClr val="6A4CA3"/>
-          </a:solidFill>
-          <a:ln w="12700">
-            <a:solidFill>
-              <a:srgbClr val="6A4CA3"/>
-            </a:solidFill>
-            <a:prstDash val="solid"/>
-          </a:ln>
-        </p:spPr>
-      </p:sp>
-      <p:sp>
-        <p:nvSpPr>
-          <p:cNvPr id="18" name="Text 16"/>
-          <p:cNvSpPr/>
-          <p:nvPr/>
-        </p:nvSpPr>
-        <p:spPr>
-          <a:xfrm>
-            <a:off x="10347960" y="4169664"/>
-            <a:ext cx="826008" cy="310896"/>
-          </a:xfrm>
-          <a:prstGeom prst="rect">
-            <a:avLst/>
-          </a:prstGeom>
-          <a:noFill/>
-          <a:ln/>
-        </p:spPr>
-        <p:txBody>
-          <a:bodyPr wrap="square" lIns="0" tIns="0" rIns="0" bIns="0" rtlCol="0" anchor="ctr">
-            <a:normAutofit/>
-          </a:bodyPr>
-          <a:lstStyle/>
-          <a:p>
-            <a:pPr algn="ctr" indent="0" marL="0">
-              <a:buNone/>
-            </a:pPr>
-            <a:r>
-              <a:rPr lang="en-US" sz="1500" b="1" dirty="0">
-                <a:solidFill>
-                  <a:srgbClr val="FFFFFF"/>
-                </a:solidFill>
-                <a:latin typeface="Aptos" pitchFamily="34" charset="0"/>
-                <a:ea typeface="Aptos" pitchFamily="34" charset="-122"/>
-                <a:cs typeface="Aptos" pitchFamily="34" charset="-120"/>
-              </a:rPr>
-              <a:t>Action</a:t>
-            </a:r>
-            <a:endParaRPr lang="en-US" sz="1500" dirty="0"/>
+            <a:r>
+              <a:rPr lang="en-US" sz="1380" dirty="0">
+                <a:solidFill>
+                  <a:srgbClr val="17364A"/>
+                </a:solidFill>
+                <a:latin typeface="Aptos" pitchFamily="34" charset="0"/>
+                <a:ea typeface="Aptos" pitchFamily="34" charset="-122"/>
+                <a:cs typeface="Aptos" pitchFamily="34" charset="-120"/>
+              </a:rPr>
+              <a:t>Locate the decision point in the playbook sequence.</a:t>
+            </a:r>
+            <a:endParaRPr lang="en-US" sz="1380" dirty="0"/>
+          </a:p>
+          <a:p>
+            <a:r>
+              <a:rPr lang="en-US" sz="1380" dirty="0">
+                <a:solidFill>
+                  <a:srgbClr val="17364A"/>
+                </a:solidFill>
+                <a:latin typeface="Aptos" pitchFamily="34" charset="0"/>
+                <a:ea typeface="Aptos" pitchFamily="34" charset="-122"/>
+                <a:cs typeface="Aptos" pitchFamily="34" charset="-120"/>
+              </a:rPr>
+              <a:t>Identify who should participate in the work.</a:t>
+            </a:r>
+            <a:endParaRPr lang="en-US" sz="1380" dirty="0"/>
+          </a:p>
+          <a:p>
+            <a:r>
+              <a:rPr lang="en-US" sz="1380" dirty="0">
+                <a:solidFill>
+                  <a:srgbClr val="17364A"/>
+                </a:solidFill>
+                <a:latin typeface="Aptos" pitchFamily="34" charset="0"/>
+                <a:ea typeface="Aptos" pitchFamily="34" charset="-122"/>
+                <a:cs typeface="Aptos" pitchFamily="34" charset="-120"/>
+              </a:rPr>
+              <a:t>Document the review, approval, or implementation step.</a:t>
+            </a:r>
+            <a:endParaRPr lang="en-US" sz="1380" dirty="0"/>
           </a:p>
         </p:txBody>
       </p:sp>
@@ -14522,20 +13617,20 @@
         </p:nvSpPr>
         <p:spPr>
           <a:xfrm>
-            <a:off x="7818120" y="3977640"/>
-            <a:ext cx="972312" cy="749808"/>
+            <a:off x="8046720" y="3794760"/>
+            <a:ext cx="3063240" cy="1600200"/>
           </a:xfrm>
           <a:prstGeom prst="roundRect">
             <a:avLst>
-              <a:gd name="adj" fmla="val 14634"/>
+              <a:gd name="adj" fmla="val 6857"/>
             </a:avLst>
           </a:prstGeom>
           <a:solidFill>
-            <a:srgbClr val="0068B7"/>
+            <a:srgbClr val="FFFFFF"/>
           </a:solidFill>
           <a:ln w="12700">
             <a:solidFill>
-              <a:srgbClr val="0068B7"/>
+              <a:srgbClr val="B9D7E6"/>
             </a:solidFill>
             <a:prstDash val="solid"/>
           </a:ln>
@@ -14549,172 +13644,100 @@
         </p:nvSpPr>
         <p:spPr>
           <a:xfrm>
-            <a:off x="7891272" y="4169664"/>
-            <a:ext cx="826008" cy="310896"/>
-          </a:xfrm>
-          <a:prstGeom prst="rect">
-            <a:avLst/>
-          </a:prstGeom>
-          <a:noFill/>
-          <a:ln/>
-        </p:spPr>
-        <p:txBody>
-          <a:bodyPr wrap="square" lIns="0" tIns="0" rIns="0" bIns="0" rtlCol="0" anchor="ctr">
+            <a:off x="8211312" y="3941064"/>
+            <a:ext cx="2734056" cy="256032"/>
+          </a:xfrm>
+          <a:prstGeom prst="rect">
+            <a:avLst/>
+          </a:prstGeom>
+          <a:noFill/>
+          <a:ln/>
+        </p:spPr>
+        <p:txBody>
+          <a:bodyPr wrap="square" lIns="0" tIns="0" rIns="0" bIns="0" rtlCol="0" anchor="ctr"/>
+          <a:lstStyle/>
+          <a:p>
+            <a:pPr indent="0" marL="0">
+              <a:buNone/>
+            </a:pPr>
+            <a:r>
+              <a:rPr lang="en-US" sz="1300" b="1" dirty="0">
+                <a:solidFill>
+                  <a:srgbClr val="0068B7"/>
+                </a:solidFill>
+                <a:latin typeface="Aptos" pitchFamily="34" charset="0"/>
+                <a:ea typeface="Aptos" pitchFamily="34" charset="-122"/>
+                <a:cs typeface="Aptos" pitchFamily="34" charset="-120"/>
+              </a:rPr>
+              <a:t>Tool selection cues</a:t>
+            </a:r>
+            <a:endParaRPr lang="en-US" sz="1300" dirty="0"/>
+          </a:p>
+        </p:txBody>
+      </p:sp>
+      <p:sp>
+        <p:nvSpPr>
+          <p:cNvPr id="15" name="Text 13"/>
+          <p:cNvSpPr/>
+          <p:nvPr/>
+        </p:nvSpPr>
+        <p:spPr>
+          <a:xfrm>
+            <a:off x="8229600" y="4306824"/>
+            <a:ext cx="2679192" cy="941832"/>
+          </a:xfrm>
+          <a:prstGeom prst="rect">
+            <a:avLst/>
+          </a:prstGeom>
+          <a:noFill/>
+          <a:ln/>
+        </p:spPr>
+        <p:txBody>
+          <a:bodyPr wrap="square" lIns="254" tIns="254" rIns="254" bIns="254" rtlCol="0" anchor="t">
             <a:normAutofit/>
           </a:bodyPr>
           <a:lstStyle/>
           <a:p>
-            <a:pPr algn="ctr" indent="0" marL="0">
-              <a:buNone/>
-            </a:pPr>
-            <a:r>
-              <a:rPr lang="en-US" sz="1500" b="1" dirty="0">
-                <a:solidFill>
-                  <a:srgbClr val="FFFFFF"/>
-                </a:solidFill>
-                <a:latin typeface="Aptos" pitchFamily="34" charset="0"/>
-                <a:ea typeface="Aptos" pitchFamily="34" charset="-122"/>
-                <a:cs typeface="Aptos" pitchFamily="34" charset="-120"/>
-              </a:rPr>
-              <a:t>Concept</a:t>
-            </a:r>
-            <a:endParaRPr lang="en-US" sz="1500" dirty="0"/>
-          </a:p>
-        </p:txBody>
-      </p:sp>
-      <p:sp>
-        <p:nvSpPr>
-          <p:cNvPr id="15" name="Shape 13"/>
-          <p:cNvSpPr/>
-          <p:nvPr/>
-        </p:nvSpPr>
-        <p:spPr>
-          <a:xfrm>
-            <a:off x="9046464" y="3977640"/>
-            <a:ext cx="972312" cy="749808"/>
-          </a:xfrm>
-          <a:prstGeom prst="roundRect">
-            <a:avLst>
-              <a:gd name="adj" fmla="val 14634"/>
-            </a:avLst>
-          </a:prstGeom>
-          <a:solidFill>
-            <a:srgbClr val="2F8A28"/>
-          </a:solidFill>
-          <a:ln w="12700">
-            <a:solidFill>
-              <a:srgbClr val="2F8A28"/>
-            </a:solidFill>
-            <a:prstDash val="solid"/>
-          </a:ln>
-        </p:spPr>
-      </p:sp>
-      <p:sp>
-        <p:nvSpPr>
-          <p:cNvPr id="16" name="Text 14"/>
-          <p:cNvSpPr/>
-          <p:nvPr/>
-        </p:nvSpPr>
-        <p:spPr>
-          <a:xfrm>
-            <a:off x="9119616" y="4169664"/>
-            <a:ext cx="826008" cy="310896"/>
-          </a:xfrm>
-          <a:prstGeom prst="rect">
-            <a:avLst/>
-          </a:prstGeom>
-          <a:noFill/>
-          <a:ln/>
-        </p:spPr>
-        <p:txBody>
-          <a:bodyPr wrap="square" lIns="0" tIns="0" rIns="0" bIns="0" rtlCol="0" anchor="ctr">
-            <a:normAutofit/>
-          </a:bodyPr>
-          <a:lstStyle/>
-          <a:p>
-            <a:pPr algn="ctr" indent="0" marL="0">
-              <a:buNone/>
-            </a:pPr>
-            <a:r>
-              <a:rPr lang="en-US" sz="1500" b="1" dirty="0">
-                <a:solidFill>
-                  <a:srgbClr val="FFFFFF"/>
-                </a:solidFill>
-                <a:latin typeface="Aptos" pitchFamily="34" charset="0"/>
-                <a:ea typeface="Aptos" pitchFamily="34" charset="-122"/>
-                <a:cs typeface="Aptos" pitchFamily="34" charset="-120"/>
-              </a:rPr>
-              <a:t>Tool</a:t>
-            </a:r>
-            <a:endParaRPr lang="en-US" sz="1500" dirty="0"/>
-          </a:p>
-        </p:txBody>
-      </p:sp>
-      <p:sp>
-        <p:nvSpPr>
-          <p:cNvPr id="17" name="Shape 15"/>
-          <p:cNvSpPr/>
-          <p:nvPr/>
-        </p:nvSpPr>
-        <p:spPr>
-          <a:xfrm>
-            <a:off x="10274808" y="3977640"/>
-            <a:ext cx="972312" cy="749808"/>
-          </a:xfrm>
-          <a:prstGeom prst="roundRect">
-            <a:avLst>
-              <a:gd name="adj" fmla="val 14634"/>
-            </a:avLst>
-          </a:prstGeom>
-          <a:solidFill>
-            <a:srgbClr val="D69A2D"/>
-          </a:solidFill>
-          <a:ln w="12700">
-            <a:solidFill>
-              <a:srgbClr val="D69A2D"/>
-            </a:solidFill>
-            <a:prstDash val="solid"/>
-          </a:ln>
-        </p:spPr>
-      </p:sp>
-      <p:sp>
-        <p:nvSpPr>
-          <p:cNvPr id="18" name="Text 16"/>
-          <p:cNvSpPr/>
-          <p:nvPr/>
-        </p:nvSpPr>
-        <p:spPr>
-          <a:xfrm>
-            <a:off x="10347960" y="4169664"/>
-            <a:ext cx="826008" cy="310896"/>
-          </a:xfrm>
-          <a:prstGeom prst="rect">
-            <a:avLst/>
-          </a:prstGeom>
-          <a:noFill/>
-          <a:ln/>
-        </p:spPr>
-        <p:txBody>
-          <a:bodyPr wrap="square" lIns="0" tIns="0" rIns="0" bIns="0" rtlCol="0" anchor="ctr">
-            <a:normAutofit/>
-          </a:bodyPr>
-          <a:lstStyle/>
-          <a:p>
-            <a:pPr algn="ctr" indent="0" marL="0">
-              <a:buNone/>
-            </a:pPr>
-            <a:r>
-              <a:rPr lang="en-US" sz="1500" b="1" dirty="0">
-                <a:solidFill>
-                  <a:srgbClr val="FFFFFF"/>
-                </a:solidFill>
-                <a:latin typeface="Aptos" pitchFamily="34" charset="0"/>
-                <a:ea typeface="Aptos" pitchFamily="34" charset="-122"/>
-                <a:cs typeface="Aptos" pitchFamily="34" charset="-120"/>
-              </a:rPr>
-              <a:t>Artifact</a:t>
-            </a:r>
-            <a:endParaRPr lang="en-US" sz="1500" dirty="0"/>
+            <a:r>
+              <a:rPr lang="en-US" sz="1380" dirty="0">
+                <a:solidFill>
+                  <a:srgbClr val="17364A"/>
+                </a:solidFill>
+                <a:latin typeface="Aptos" pitchFamily="34" charset="0"/>
+                <a:ea typeface="Aptos" pitchFamily="34" charset="-122"/>
+                <a:cs typeface="Aptos" pitchFamily="34" charset="-120"/>
+              </a:rPr>
+              <a:t>Use a tool when no comparable local process exists.</a:t>
+            </a:r>
+            <a:endParaRPr lang="en-US" sz="1380" dirty="0"/>
+          </a:p>
+          <a:p>
+            <a:r>
+              <a:rPr lang="en-US" sz="1380" dirty="0">
+                <a:solidFill>
+                  <a:srgbClr val="17364A"/>
+                </a:solidFill>
+                <a:latin typeface="Aptos" pitchFamily="34" charset="0"/>
+                <a:ea typeface="Aptos" pitchFamily="34" charset="-122"/>
+                <a:cs typeface="Aptos" pitchFamily="34" charset="-120"/>
+              </a:rPr>
+              <a:t>Adapt existing department templates when they already fit the purpose.</a:t>
+            </a:r>
+            <a:endParaRPr lang="en-US" sz="1380" dirty="0"/>
+          </a:p>
+          <a:p>
+            <a:r>
+              <a:rPr lang="en-US" sz="1380" dirty="0">
+                <a:solidFill>
+                  <a:srgbClr val="17364A"/>
+                </a:solidFill>
+                <a:latin typeface="Aptos" pitchFamily="34" charset="0"/>
+                <a:ea typeface="Aptos" pitchFamily="34" charset="-122"/>
+                <a:cs typeface="Aptos" pitchFamily="34" charset="-120"/>
+              </a:rPr>
+              <a:t>Save the completed artifact as evidence of the decision.</a:t>
+            </a:r>
+            <a:endParaRPr lang="en-US" sz="1380" dirty="0"/>
           </a:p>
         </p:txBody>
       </p:sp>
@@ -15187,13 +14210,11 @@
             </a:avLst>
           </a:prstGeom>
           <a:solidFill>
-            <a:srgbClr val="FFFFFF">
-              <a:alpha val="88000"/>
-            </a:srgbClr>
+            <a:srgbClr val="FFFFFF"/>
           </a:solidFill>
           <a:ln w="12700">
             <a:solidFill>
-              <a:srgbClr val="D6E8F2"/>
+              <a:srgbClr val="B9D7E6"/>
             </a:solidFill>
             <a:prstDash val="solid"/>
           </a:ln>
@@ -15201,169 +14222,98 @@
       </p:sp>
       <p:sp>
         <p:nvSpPr>
-          <p:cNvPr id="14" name="Shape 12"/>
-          <p:cNvSpPr/>
-          <p:nvPr/>
-        </p:nvSpPr>
-        <p:spPr>
-          <a:xfrm>
-            <a:off x="8138160" y="3474720"/>
-            <a:ext cx="256032" cy="411480"/>
-          </a:xfrm>
-          <a:prstGeom prst="rect">
-            <a:avLst/>
-          </a:prstGeom>
-          <a:solidFill>
-            <a:srgbClr val="0068B7"/>
-          </a:solidFill>
-          <a:ln w="12700">
-            <a:solidFill>
-              <a:srgbClr val="0068B7"/>
-            </a:solidFill>
-            <a:prstDash val="solid"/>
-          </a:ln>
-        </p:spPr>
-      </p:sp>
-      <p:sp>
-        <p:nvSpPr>
-          <p:cNvPr id="15" name="Shape 13"/>
-          <p:cNvSpPr/>
-          <p:nvPr/>
-        </p:nvSpPr>
-        <p:spPr>
-          <a:xfrm>
-            <a:off x="8577072" y="3172968"/>
-            <a:ext cx="256032" cy="713232"/>
-          </a:xfrm>
-          <a:prstGeom prst="rect">
-            <a:avLst/>
-          </a:prstGeom>
-          <a:solidFill>
-            <a:srgbClr val="2F8A28"/>
-          </a:solidFill>
-          <a:ln w="12700">
-            <a:solidFill>
-              <a:srgbClr val="2F8A28"/>
-            </a:solidFill>
-            <a:prstDash val="solid"/>
-          </a:ln>
-        </p:spPr>
+          <p:cNvPr id="14" name="Text 12"/>
+          <p:cNvSpPr/>
+          <p:nvPr/>
+        </p:nvSpPr>
+        <p:spPr>
+          <a:xfrm>
+            <a:off x="7799832" y="2935224"/>
+            <a:ext cx="3145536" cy="256032"/>
+          </a:xfrm>
+          <a:prstGeom prst="rect">
+            <a:avLst/>
+          </a:prstGeom>
+          <a:noFill/>
+          <a:ln/>
+        </p:spPr>
+        <p:txBody>
+          <a:bodyPr wrap="square" lIns="0" tIns="0" rIns="0" bIns="0" rtlCol="0" anchor="ctr"/>
+          <a:lstStyle/>
+          <a:p>
+            <a:pPr indent="0" marL="0">
+              <a:buNone/>
+            </a:pPr>
+            <a:r>
+              <a:rPr lang="en-US" sz="1300" b="1" dirty="0">
+                <a:solidFill>
+                  <a:srgbClr val="0068B7"/>
+                </a:solidFill>
+                <a:latin typeface="Aptos" pitchFamily="34" charset="0"/>
+                <a:ea typeface="Aptos" pitchFamily="34" charset="-122"/>
+                <a:cs typeface="Aptos" pitchFamily="34" charset="-120"/>
+              </a:rPr>
+              <a:t>Concept checkpoints</a:t>
+            </a:r>
+            <a:endParaRPr lang="en-US" sz="1300" dirty="0"/>
+          </a:p>
+        </p:txBody>
+      </p:sp>
+      <p:sp>
+        <p:nvSpPr>
+          <p:cNvPr id="15" name="Text 13"/>
+          <p:cNvSpPr/>
+          <p:nvPr/>
+        </p:nvSpPr>
+        <p:spPr>
+          <a:xfrm>
+            <a:off x="7818120" y="3300984"/>
+            <a:ext cx="3090672" cy="877824"/>
+          </a:xfrm>
+          <a:prstGeom prst="rect">
+            <a:avLst/>
+          </a:prstGeom>
+          <a:noFill/>
+          <a:ln/>
+        </p:spPr>
+        <p:txBody>
+          <a:bodyPr wrap="square" lIns="254" tIns="254" rIns="254" bIns="254" rtlCol="0" anchor="t">
+            <a:normAutofit/>
+          </a:bodyPr>
+          <a:lstStyle/>
+          <a:p>
+            <a:r>
+              <a:rPr lang="en-US" sz="1380" dirty="0">
+                <a:solidFill>
+                  <a:srgbClr val="17364A"/>
+                </a:solidFill>
+                <a:latin typeface="Aptos" pitchFamily="34" charset="0"/>
+                <a:ea typeface="Aptos" pitchFamily="34" charset="-122"/>
+                <a:cs typeface="Aptos" pitchFamily="34" charset="-120"/>
+              </a:rPr>
+              <a:t>Design review criteria for different output types, including summaries, drafts,.</a:t>
+            </a:r>
+            <a:endParaRPr lang="en-US" sz="1380" dirty="0"/>
+          </a:p>
+          <a:p>
+            <a:r>
+              <a:rPr lang="en-US" sz="1380" dirty="0">
+                <a:solidFill>
+                  <a:srgbClr val="17364A"/>
+                </a:solidFill>
+                <a:latin typeface="Aptos" pitchFamily="34" charset="0"/>
+                <a:ea typeface="Aptos" pitchFamily="34" charset="-122"/>
+                <a:cs typeface="Aptos" pitchFamily="34" charset="-120"/>
+              </a:rPr>
+              <a:t>Apply stronger review requirements for sensitive, public-facing, or consequential outputs.</a:t>
+            </a:r>
+            <a:endParaRPr lang="en-US" sz="1380" dirty="0"/>
+          </a:p>
+        </p:txBody>
       </p:sp>
       <p:sp>
         <p:nvSpPr>
           <p:cNvPr id="16" name="Shape 14"/>
-          <p:cNvSpPr/>
-          <p:nvPr/>
-        </p:nvSpPr>
-        <p:spPr>
-          <a:xfrm>
-            <a:off x="9015984" y="2880360"/>
-            <a:ext cx="256032" cy="1005840"/>
-          </a:xfrm>
-          <a:prstGeom prst="rect">
-            <a:avLst/>
-          </a:prstGeom>
-          <a:solidFill>
-            <a:srgbClr val="D69A2D"/>
-          </a:solidFill>
-          <a:ln w="12700">
-            <a:solidFill>
-              <a:srgbClr val="D69A2D"/>
-            </a:solidFill>
-            <a:prstDash val="solid"/>
-          </a:ln>
-        </p:spPr>
-      </p:sp>
-      <p:sp>
-        <p:nvSpPr>
-          <p:cNvPr id="17" name="Shape 15"/>
-          <p:cNvSpPr/>
-          <p:nvPr/>
-        </p:nvSpPr>
-        <p:spPr>
-          <a:xfrm>
-            <a:off x="9454896" y="3319272"/>
-            <a:ext cx="256032" cy="566928"/>
-          </a:xfrm>
-          <a:prstGeom prst="rect">
-            <a:avLst/>
-          </a:prstGeom>
-          <a:solidFill>
-            <a:srgbClr val="6A4CA3"/>
-          </a:solidFill>
-          <a:ln w="12700">
-            <a:solidFill>
-              <a:srgbClr val="6A4CA3"/>
-            </a:solidFill>
-            <a:prstDash val="solid"/>
-          </a:ln>
-        </p:spPr>
-      </p:sp>
-      <p:sp>
-        <p:nvSpPr>
-          <p:cNvPr id="18" name="Shape 16"/>
-          <p:cNvSpPr/>
-          <p:nvPr/>
-        </p:nvSpPr>
-        <p:spPr>
-          <a:xfrm>
-            <a:off x="8019288" y="3886200"/>
-            <a:ext cx="2706624" cy="0"/>
-          </a:xfrm>
-          <a:prstGeom prst="line">
-            <a:avLst/>
-          </a:prstGeom>
-          <a:noFill/>
-          <a:ln w="15240">
-            <a:solidFill>
-              <a:srgbClr val="003A63"/>
-            </a:solidFill>
-            <a:prstDash val="solid"/>
-          </a:ln>
-        </p:spPr>
-      </p:sp>
-      <p:sp>
-        <p:nvSpPr>
-          <p:cNvPr id="19" name="Text 17"/>
-          <p:cNvSpPr/>
-          <p:nvPr/>
-        </p:nvSpPr>
-        <p:spPr>
-          <a:xfrm>
-            <a:off x="7863840" y="3017520"/>
-            <a:ext cx="3017520" cy="201168"/>
-          </a:xfrm>
-          <a:prstGeom prst="rect">
-            <a:avLst/>
-          </a:prstGeom>
-          <a:noFill/>
-          <a:ln/>
-        </p:spPr>
-        <p:txBody>
-          <a:bodyPr wrap="square" lIns="0" tIns="0" rIns="0" bIns="0" rtlCol="0" anchor="ctr"/>
-          <a:lstStyle/>
-          <a:p>
-            <a:pPr algn="ctr" indent="0" marL="0">
-              <a:buNone/>
-            </a:pPr>
-            <a:r>
-              <a:rPr lang="en-US" sz="1050" b="1" dirty="0">
-                <a:solidFill>
-                  <a:srgbClr val="003A63"/>
-                </a:solidFill>
-                <a:latin typeface="Aptos" pitchFamily="34" charset="0"/>
-                <a:ea typeface="Aptos" pitchFamily="34" charset="-122"/>
-                <a:cs typeface="Aptos" pitchFamily="34" charset="-120"/>
-              </a:rPr>
-              <a:t>Measure and monitor</a:t>
-            </a:r>
-            <a:endParaRPr lang="en-US" sz="1050" dirty="0"/>
-          </a:p>
-        </p:txBody>
-      </p:sp>
-      <p:sp>
-        <p:nvSpPr>
-          <p:cNvPr id="20" name="Shape 18"/>
           <p:cNvSpPr/>
           <p:nvPr/>
         </p:nvSpPr>
@@ -15390,7 +14340,7 @@
       </p:sp>
       <p:sp>
         <p:nvSpPr>
-          <p:cNvPr id="21" name="Text 19"/>
+          <p:cNvPr id="17" name="Text 15"/>
           <p:cNvSpPr/>
           <p:nvPr/>
         </p:nvSpPr>
@@ -15429,7 +14379,7 @@
       </p:sp>
       <p:sp>
         <p:nvSpPr>
-          <p:cNvPr id="22" name="Text 20"/>
+          <p:cNvPr id="18" name="Text 16"/>
           <p:cNvSpPr/>
           <p:nvPr/>
         </p:nvSpPr>
@@ -15909,13 +14859,11 @@
             </a:avLst>
           </a:prstGeom>
           <a:solidFill>
-            <a:srgbClr val="FFFFFF">
-              <a:alpha val="88000"/>
-            </a:srgbClr>
+            <a:srgbClr val="FFFFFF"/>
           </a:solidFill>
           <a:ln w="12700">
             <a:solidFill>
-              <a:srgbClr val="D6E8F2"/>
+              <a:srgbClr val="B9D7E6"/>
             </a:solidFill>
             <a:prstDash val="solid"/>
           </a:ln>
@@ -15923,169 +14871,84 @@
       </p:sp>
       <p:sp>
         <p:nvSpPr>
-          <p:cNvPr id="14" name="Shape 12"/>
-          <p:cNvSpPr/>
-          <p:nvPr/>
-        </p:nvSpPr>
-        <p:spPr>
-          <a:xfrm>
-            <a:off x="8138160" y="3474720"/>
-            <a:ext cx="256032" cy="411480"/>
-          </a:xfrm>
-          <a:prstGeom prst="rect">
-            <a:avLst/>
-          </a:prstGeom>
-          <a:solidFill>
-            <a:srgbClr val="0068B7"/>
-          </a:solidFill>
-          <a:ln w="12700">
-            <a:solidFill>
-              <a:srgbClr val="0068B7"/>
-            </a:solidFill>
-            <a:prstDash val="solid"/>
-          </a:ln>
-        </p:spPr>
-      </p:sp>
-      <p:sp>
-        <p:nvSpPr>
-          <p:cNvPr id="15" name="Shape 13"/>
-          <p:cNvSpPr/>
-          <p:nvPr/>
-        </p:nvSpPr>
-        <p:spPr>
-          <a:xfrm>
-            <a:off x="8577072" y="3172968"/>
-            <a:ext cx="256032" cy="713232"/>
-          </a:xfrm>
-          <a:prstGeom prst="rect">
-            <a:avLst/>
-          </a:prstGeom>
-          <a:solidFill>
-            <a:srgbClr val="2F8A28"/>
-          </a:solidFill>
-          <a:ln w="12700">
-            <a:solidFill>
-              <a:srgbClr val="2F8A28"/>
-            </a:solidFill>
-            <a:prstDash val="solid"/>
-          </a:ln>
-        </p:spPr>
+          <p:cNvPr id="14" name="Text 12"/>
+          <p:cNvSpPr/>
+          <p:nvPr/>
+        </p:nvSpPr>
+        <p:spPr>
+          <a:xfrm>
+            <a:off x="7799832" y="2935224"/>
+            <a:ext cx="3145536" cy="256032"/>
+          </a:xfrm>
+          <a:prstGeom prst="rect">
+            <a:avLst/>
+          </a:prstGeom>
+          <a:noFill/>
+          <a:ln/>
+        </p:spPr>
+        <p:txBody>
+          <a:bodyPr wrap="square" lIns="0" tIns="0" rIns="0" bIns="0" rtlCol="0" anchor="ctr"/>
+          <a:lstStyle/>
+          <a:p>
+            <a:pPr indent="0" marL="0">
+              <a:buNone/>
+            </a:pPr>
+            <a:r>
+              <a:rPr lang="en-US" sz="1300" b="1" dirty="0">
+                <a:solidFill>
+                  <a:srgbClr val="0068B7"/>
+                </a:solidFill>
+                <a:latin typeface="Aptos" pitchFamily="34" charset="0"/>
+                <a:ea typeface="Aptos" pitchFamily="34" charset="-122"/>
+                <a:cs typeface="Aptos" pitchFamily="34" charset="-120"/>
+              </a:rPr>
+              <a:t>Concept checkpoints</a:t>
+            </a:r>
+            <a:endParaRPr lang="en-US" sz="1300" dirty="0"/>
+          </a:p>
+        </p:txBody>
+      </p:sp>
+      <p:sp>
+        <p:nvSpPr>
+          <p:cNvPr id="15" name="Text 13"/>
+          <p:cNvSpPr/>
+          <p:nvPr/>
+        </p:nvSpPr>
+        <p:spPr>
+          <a:xfrm>
+            <a:off x="7818120" y="3300984"/>
+            <a:ext cx="3090672" cy="877824"/>
+          </a:xfrm>
+          <a:prstGeom prst="rect">
+            <a:avLst/>
+          </a:prstGeom>
+          <a:noFill/>
+          <a:ln/>
+        </p:spPr>
+        <p:txBody>
+          <a:bodyPr wrap="square" lIns="254" tIns="254" rIns="254" bIns="254" rtlCol="0" anchor="t">
+            <a:normAutofit/>
+          </a:bodyPr>
+          <a:lstStyle/>
+          <a:p>
+            <a:r>
+              <a:rPr lang="en-US" sz="1380" dirty="0">
+                <a:solidFill>
+                  <a:srgbClr val="17364A"/>
+                </a:solidFill>
+                <a:latin typeface="Aptos" pitchFamily="34" charset="0"/>
+                <a:ea typeface="Aptos" pitchFamily="34" charset="-122"/>
+                <a:cs typeface="Aptos" pitchFamily="34" charset="-120"/>
+              </a:rPr>
+              <a:t>Produce a generative AI output evaluation rubric.</a:t>
+            </a:r>
+            <a:endParaRPr lang="en-US" sz="1380" dirty="0"/>
+          </a:p>
+        </p:txBody>
       </p:sp>
       <p:sp>
         <p:nvSpPr>
           <p:cNvPr id="16" name="Shape 14"/>
-          <p:cNvSpPr/>
-          <p:nvPr/>
-        </p:nvSpPr>
-        <p:spPr>
-          <a:xfrm>
-            <a:off x="9015984" y="2880360"/>
-            <a:ext cx="256032" cy="1005840"/>
-          </a:xfrm>
-          <a:prstGeom prst="rect">
-            <a:avLst/>
-          </a:prstGeom>
-          <a:solidFill>
-            <a:srgbClr val="D69A2D"/>
-          </a:solidFill>
-          <a:ln w="12700">
-            <a:solidFill>
-              <a:srgbClr val="D69A2D"/>
-            </a:solidFill>
-            <a:prstDash val="solid"/>
-          </a:ln>
-        </p:spPr>
-      </p:sp>
-      <p:sp>
-        <p:nvSpPr>
-          <p:cNvPr id="17" name="Shape 15"/>
-          <p:cNvSpPr/>
-          <p:nvPr/>
-        </p:nvSpPr>
-        <p:spPr>
-          <a:xfrm>
-            <a:off x="9454896" y="3319272"/>
-            <a:ext cx="256032" cy="566928"/>
-          </a:xfrm>
-          <a:prstGeom prst="rect">
-            <a:avLst/>
-          </a:prstGeom>
-          <a:solidFill>
-            <a:srgbClr val="6A4CA3"/>
-          </a:solidFill>
-          <a:ln w="12700">
-            <a:solidFill>
-              <a:srgbClr val="6A4CA3"/>
-            </a:solidFill>
-            <a:prstDash val="solid"/>
-          </a:ln>
-        </p:spPr>
-      </p:sp>
-      <p:sp>
-        <p:nvSpPr>
-          <p:cNvPr id="18" name="Shape 16"/>
-          <p:cNvSpPr/>
-          <p:nvPr/>
-        </p:nvSpPr>
-        <p:spPr>
-          <a:xfrm>
-            <a:off x="8019288" y="3886200"/>
-            <a:ext cx="2706624" cy="0"/>
-          </a:xfrm>
-          <a:prstGeom prst="line">
-            <a:avLst/>
-          </a:prstGeom>
-          <a:noFill/>
-          <a:ln w="15240">
-            <a:solidFill>
-              <a:srgbClr val="003A63"/>
-            </a:solidFill>
-            <a:prstDash val="solid"/>
-          </a:ln>
-        </p:spPr>
-      </p:sp>
-      <p:sp>
-        <p:nvSpPr>
-          <p:cNvPr id="19" name="Text 17"/>
-          <p:cNvSpPr/>
-          <p:nvPr/>
-        </p:nvSpPr>
-        <p:spPr>
-          <a:xfrm>
-            <a:off x="7863840" y="3017520"/>
-            <a:ext cx="3017520" cy="201168"/>
-          </a:xfrm>
-          <a:prstGeom prst="rect">
-            <a:avLst/>
-          </a:prstGeom>
-          <a:noFill/>
-          <a:ln/>
-        </p:spPr>
-        <p:txBody>
-          <a:bodyPr wrap="square" lIns="0" tIns="0" rIns="0" bIns="0" rtlCol="0" anchor="ctr"/>
-          <a:lstStyle/>
-          <a:p>
-            <a:pPr algn="ctr" indent="0" marL="0">
-              <a:buNone/>
-            </a:pPr>
-            <a:r>
-              <a:rPr lang="en-US" sz="1050" b="1" dirty="0">
-                <a:solidFill>
-                  <a:srgbClr val="003A63"/>
-                </a:solidFill>
-                <a:latin typeface="Aptos" pitchFamily="34" charset="0"/>
-                <a:ea typeface="Aptos" pitchFamily="34" charset="-122"/>
-                <a:cs typeface="Aptos" pitchFamily="34" charset="-120"/>
-              </a:rPr>
-              <a:t>Measure and monitor</a:t>
-            </a:r>
-            <a:endParaRPr lang="en-US" sz="1050" dirty="0"/>
-          </a:p>
-        </p:txBody>
-      </p:sp>
-      <p:sp>
-        <p:nvSpPr>
-          <p:cNvPr id="20" name="Shape 18"/>
           <p:cNvSpPr/>
           <p:nvPr/>
         </p:nvSpPr>
@@ -16112,7 +14975,7 @@
       </p:sp>
       <p:sp>
         <p:nvSpPr>
-          <p:cNvPr id="21" name="Text 19"/>
+          <p:cNvPr id="17" name="Text 15"/>
           <p:cNvSpPr/>
           <p:nvPr/>
         </p:nvSpPr>
@@ -16151,7 +15014,7 @@
       </p:sp>
       <p:sp>
         <p:nvSpPr>
-          <p:cNvPr id="22" name="Text 20"/>
+          <p:cNvPr id="18" name="Text 16"/>
           <p:cNvSpPr/>
           <p:nvPr/>
         </p:nvSpPr>
@@ -16659,13 +15522,11 @@
             </a:avLst>
           </a:prstGeom>
           <a:solidFill>
-            <a:srgbClr val="FFFFFF">
-              <a:alpha val="88000"/>
-            </a:srgbClr>
+            <a:srgbClr val="FFFFFF"/>
           </a:solidFill>
           <a:ln w="12700">
             <a:solidFill>
-              <a:srgbClr val="D6E8F2"/>
+              <a:srgbClr val="B9D7E6"/>
             </a:solidFill>
             <a:prstDash val="solid"/>
           </a:ln>
@@ -16673,169 +15534,112 @@
       </p:sp>
       <p:sp>
         <p:nvSpPr>
-          <p:cNvPr id="14" name="Shape 12"/>
-          <p:cNvSpPr/>
-          <p:nvPr/>
-        </p:nvSpPr>
-        <p:spPr>
-          <a:xfrm>
-            <a:off x="8138160" y="3474720"/>
-            <a:ext cx="256032" cy="411480"/>
-          </a:xfrm>
-          <a:prstGeom prst="rect">
-            <a:avLst/>
-          </a:prstGeom>
-          <a:solidFill>
-            <a:srgbClr val="0068B7"/>
-          </a:solidFill>
-          <a:ln w="12700">
-            <a:solidFill>
-              <a:srgbClr val="0068B7"/>
-            </a:solidFill>
-            <a:prstDash val="solid"/>
-          </a:ln>
-        </p:spPr>
-      </p:sp>
-      <p:sp>
-        <p:nvSpPr>
-          <p:cNvPr id="15" name="Shape 13"/>
-          <p:cNvSpPr/>
-          <p:nvPr/>
-        </p:nvSpPr>
-        <p:spPr>
-          <a:xfrm>
-            <a:off x="8577072" y="3172968"/>
-            <a:ext cx="256032" cy="713232"/>
-          </a:xfrm>
-          <a:prstGeom prst="rect">
-            <a:avLst/>
-          </a:prstGeom>
-          <a:solidFill>
-            <a:srgbClr val="2F8A28"/>
-          </a:solidFill>
-          <a:ln w="12700">
-            <a:solidFill>
-              <a:srgbClr val="2F8A28"/>
-            </a:solidFill>
-            <a:prstDash val="solid"/>
-          </a:ln>
-        </p:spPr>
+          <p:cNvPr id="14" name="Text 12"/>
+          <p:cNvSpPr/>
+          <p:nvPr/>
+        </p:nvSpPr>
+        <p:spPr>
+          <a:xfrm>
+            <a:off x="7799832" y="2935224"/>
+            <a:ext cx="3145536" cy="256032"/>
+          </a:xfrm>
+          <a:prstGeom prst="rect">
+            <a:avLst/>
+          </a:prstGeom>
+          <a:noFill/>
+          <a:ln/>
+        </p:spPr>
+        <p:txBody>
+          <a:bodyPr wrap="square" lIns="0" tIns="0" rIns="0" bIns="0" rtlCol="0" anchor="ctr"/>
+          <a:lstStyle/>
+          <a:p>
+            <a:pPr indent="0" marL="0">
+              <a:buNone/>
+            </a:pPr>
+            <a:r>
+              <a:rPr lang="en-US" sz="1300" b="1" dirty="0">
+                <a:solidFill>
+                  <a:srgbClr val="0068B7"/>
+                </a:solidFill>
+                <a:latin typeface="Aptos" pitchFamily="34" charset="0"/>
+                <a:ea typeface="Aptos" pitchFamily="34" charset="-122"/>
+                <a:cs typeface="Aptos" pitchFamily="34" charset="-120"/>
+              </a:rPr>
+              <a:t>Concept checkpoints</a:t>
+            </a:r>
+            <a:endParaRPr lang="en-US" sz="1300" dirty="0"/>
+          </a:p>
+        </p:txBody>
+      </p:sp>
+      <p:sp>
+        <p:nvSpPr>
+          <p:cNvPr id="15" name="Text 13"/>
+          <p:cNvSpPr/>
+          <p:nvPr/>
+        </p:nvSpPr>
+        <p:spPr>
+          <a:xfrm>
+            <a:off x="7818120" y="3300984"/>
+            <a:ext cx="3090672" cy="877824"/>
+          </a:xfrm>
+          <a:prstGeom prst="rect">
+            <a:avLst/>
+          </a:prstGeom>
+          <a:noFill/>
+          <a:ln/>
+        </p:spPr>
+        <p:txBody>
+          <a:bodyPr wrap="square" lIns="254" tIns="254" rIns="254" bIns="254" rtlCol="0" anchor="t">
+            <a:normAutofit/>
+          </a:bodyPr>
+          <a:lstStyle/>
+          <a:p>
+            <a:r>
+              <a:rPr lang="en-US" sz="1380" dirty="0">
+                <a:solidFill>
+                  <a:srgbClr val="17364A"/>
+                </a:solidFill>
+                <a:latin typeface="Aptos" pitchFamily="34" charset="0"/>
+                <a:ea typeface="Aptos" pitchFamily="34" charset="-122"/>
+                <a:cs typeface="Aptos" pitchFamily="34" charset="-120"/>
+              </a:rPr>
+              <a:t>Generative AI can draft, summarize, translate, classify, explain, and synthesize.</a:t>
+            </a:r>
+            <a:endParaRPr lang="en-US" sz="1380" dirty="0"/>
+          </a:p>
+          <a:p>
+            <a:r>
+              <a:rPr lang="en-US" sz="1380" dirty="0">
+                <a:solidFill>
+                  <a:srgbClr val="17364A"/>
+                </a:solidFill>
+                <a:latin typeface="Aptos" pitchFamily="34" charset="0"/>
+                <a:ea typeface="Aptos" pitchFamily="34" charset="-122"/>
+                <a:cs typeface="Aptos" pitchFamily="34" charset="-120"/>
+              </a:rPr>
+              <a:t>In public health, generated content may affect case review, public communication, policy.</a:t>
+            </a:r>
+            <a:endParaRPr lang="en-US" sz="1380" dirty="0"/>
+          </a:p>
+          <a:p>
+            <a:r>
+              <a:rPr lang="en-US" sz="1380" dirty="0">
+                <a:solidFill>
+                  <a:srgbClr val="17364A"/>
+                </a:solidFill>
+                <a:latin typeface="Aptos" pitchFamily="34" charset="0"/>
+                <a:ea typeface="Aptos" pitchFamily="34" charset="-122"/>
+                <a:cs typeface="Aptos" pitchFamily="34" charset="-120"/>
+              </a:rPr>
+              <a:t>This module teaches learners how to evaluate generative AI outputs using structured review.</a:t>
+            </a:r>
+            <a:endParaRPr lang="en-US" sz="1380" dirty="0"/>
+          </a:p>
+        </p:txBody>
       </p:sp>
       <p:sp>
         <p:nvSpPr>
           <p:cNvPr id="16" name="Shape 14"/>
-          <p:cNvSpPr/>
-          <p:nvPr/>
-        </p:nvSpPr>
-        <p:spPr>
-          <a:xfrm>
-            <a:off x="9015984" y="2880360"/>
-            <a:ext cx="256032" cy="1005840"/>
-          </a:xfrm>
-          <a:prstGeom prst="rect">
-            <a:avLst/>
-          </a:prstGeom>
-          <a:solidFill>
-            <a:srgbClr val="D69A2D"/>
-          </a:solidFill>
-          <a:ln w="12700">
-            <a:solidFill>
-              <a:srgbClr val="D69A2D"/>
-            </a:solidFill>
-            <a:prstDash val="solid"/>
-          </a:ln>
-        </p:spPr>
-      </p:sp>
-      <p:sp>
-        <p:nvSpPr>
-          <p:cNvPr id="17" name="Shape 15"/>
-          <p:cNvSpPr/>
-          <p:nvPr/>
-        </p:nvSpPr>
-        <p:spPr>
-          <a:xfrm>
-            <a:off x="9454896" y="3319272"/>
-            <a:ext cx="256032" cy="566928"/>
-          </a:xfrm>
-          <a:prstGeom prst="rect">
-            <a:avLst/>
-          </a:prstGeom>
-          <a:solidFill>
-            <a:srgbClr val="6A4CA3"/>
-          </a:solidFill>
-          <a:ln w="12700">
-            <a:solidFill>
-              <a:srgbClr val="6A4CA3"/>
-            </a:solidFill>
-            <a:prstDash val="solid"/>
-          </a:ln>
-        </p:spPr>
-      </p:sp>
-      <p:sp>
-        <p:nvSpPr>
-          <p:cNvPr id="18" name="Shape 16"/>
-          <p:cNvSpPr/>
-          <p:nvPr/>
-        </p:nvSpPr>
-        <p:spPr>
-          <a:xfrm>
-            <a:off x="8019288" y="3886200"/>
-            <a:ext cx="2706624" cy="0"/>
-          </a:xfrm>
-          <a:prstGeom prst="line">
-            <a:avLst/>
-          </a:prstGeom>
-          <a:noFill/>
-          <a:ln w="15240">
-            <a:solidFill>
-              <a:srgbClr val="003A63"/>
-            </a:solidFill>
-            <a:prstDash val="solid"/>
-          </a:ln>
-        </p:spPr>
-      </p:sp>
-      <p:sp>
-        <p:nvSpPr>
-          <p:cNvPr id="19" name="Text 17"/>
-          <p:cNvSpPr/>
-          <p:nvPr/>
-        </p:nvSpPr>
-        <p:spPr>
-          <a:xfrm>
-            <a:off x="7863840" y="3017520"/>
-            <a:ext cx="3017520" cy="201168"/>
-          </a:xfrm>
-          <a:prstGeom prst="rect">
-            <a:avLst/>
-          </a:prstGeom>
-          <a:noFill/>
-          <a:ln/>
-        </p:spPr>
-        <p:txBody>
-          <a:bodyPr wrap="square" lIns="0" tIns="0" rIns="0" bIns="0" rtlCol="0" anchor="ctr"/>
-          <a:lstStyle/>
-          <a:p>
-            <a:pPr algn="ctr" indent="0" marL="0">
-              <a:buNone/>
-            </a:pPr>
-            <a:r>
-              <a:rPr lang="en-US" sz="1050" b="1" dirty="0">
-                <a:solidFill>
-                  <a:srgbClr val="003A63"/>
-                </a:solidFill>
-                <a:latin typeface="Aptos" pitchFamily="34" charset="0"/>
-                <a:ea typeface="Aptos" pitchFamily="34" charset="-122"/>
-                <a:cs typeface="Aptos" pitchFamily="34" charset="-120"/>
-              </a:rPr>
-              <a:t>Measure and monitor</a:t>
-            </a:r>
-            <a:endParaRPr lang="en-US" sz="1050" dirty="0"/>
-          </a:p>
-        </p:txBody>
-      </p:sp>
-      <p:sp>
-        <p:nvSpPr>
-          <p:cNvPr id="20" name="Shape 18"/>
           <p:cNvSpPr/>
           <p:nvPr/>
         </p:nvSpPr>
@@ -16862,7 +15666,7 @@
       </p:sp>
       <p:sp>
         <p:nvSpPr>
-          <p:cNvPr id="21" name="Text 19"/>
+          <p:cNvPr id="17" name="Text 15"/>
           <p:cNvSpPr/>
           <p:nvPr/>
         </p:nvSpPr>
@@ -16901,7 +15705,7 @@
       </p:sp>
       <p:sp>
         <p:nvSpPr>
-          <p:cNvPr id="22" name="Text 20"/>
+          <p:cNvPr id="18" name="Text 16"/>
           <p:cNvSpPr/>
           <p:nvPr/>
         </p:nvSpPr>
@@ -17409,13 +16213,11 @@
             </a:avLst>
           </a:prstGeom>
           <a:solidFill>
-            <a:srgbClr val="FFFFFF">
-              <a:alpha val="88000"/>
-            </a:srgbClr>
+            <a:srgbClr val="FFFFFF"/>
           </a:solidFill>
           <a:ln w="12700">
             <a:solidFill>
-              <a:srgbClr val="D6E8F2"/>
+              <a:srgbClr val="B9D7E6"/>
             </a:solidFill>
             <a:prstDash val="solid"/>
           </a:ln>
@@ -17423,169 +16225,112 @@
       </p:sp>
       <p:sp>
         <p:nvSpPr>
-          <p:cNvPr id="14" name="Shape 12"/>
-          <p:cNvSpPr/>
-          <p:nvPr/>
-        </p:nvSpPr>
-        <p:spPr>
-          <a:xfrm>
-            <a:off x="8138160" y="3474720"/>
-            <a:ext cx="256032" cy="411480"/>
-          </a:xfrm>
-          <a:prstGeom prst="rect">
-            <a:avLst/>
-          </a:prstGeom>
-          <a:solidFill>
-            <a:srgbClr val="0068B7"/>
-          </a:solidFill>
-          <a:ln w="12700">
-            <a:solidFill>
-              <a:srgbClr val="0068B7"/>
-            </a:solidFill>
-            <a:prstDash val="solid"/>
-          </a:ln>
-        </p:spPr>
-      </p:sp>
-      <p:sp>
-        <p:nvSpPr>
-          <p:cNvPr id="15" name="Shape 13"/>
-          <p:cNvSpPr/>
-          <p:nvPr/>
-        </p:nvSpPr>
-        <p:spPr>
-          <a:xfrm>
-            <a:off x="8577072" y="3172968"/>
-            <a:ext cx="256032" cy="713232"/>
-          </a:xfrm>
-          <a:prstGeom prst="rect">
-            <a:avLst/>
-          </a:prstGeom>
-          <a:solidFill>
-            <a:srgbClr val="2F8A28"/>
-          </a:solidFill>
-          <a:ln w="12700">
-            <a:solidFill>
-              <a:srgbClr val="2F8A28"/>
-            </a:solidFill>
-            <a:prstDash val="solid"/>
-          </a:ln>
-        </p:spPr>
+          <p:cNvPr id="14" name="Text 12"/>
+          <p:cNvSpPr/>
+          <p:nvPr/>
+        </p:nvSpPr>
+        <p:spPr>
+          <a:xfrm>
+            <a:off x="7799832" y="2935224"/>
+            <a:ext cx="3145536" cy="256032"/>
+          </a:xfrm>
+          <a:prstGeom prst="rect">
+            <a:avLst/>
+          </a:prstGeom>
+          <a:noFill/>
+          <a:ln/>
+        </p:spPr>
+        <p:txBody>
+          <a:bodyPr wrap="square" lIns="0" tIns="0" rIns="0" bIns="0" rtlCol="0" anchor="ctr"/>
+          <a:lstStyle/>
+          <a:p>
+            <a:pPr indent="0" marL="0">
+              <a:buNone/>
+            </a:pPr>
+            <a:r>
+              <a:rPr lang="en-US" sz="1300" b="1" dirty="0">
+                <a:solidFill>
+                  <a:srgbClr val="0068B7"/>
+                </a:solidFill>
+                <a:latin typeface="Aptos" pitchFamily="34" charset="0"/>
+                <a:ea typeface="Aptos" pitchFamily="34" charset="-122"/>
+                <a:cs typeface="Aptos" pitchFamily="34" charset="-120"/>
+              </a:rPr>
+              <a:t>Concept checkpoints</a:t>
+            </a:r>
+            <a:endParaRPr lang="en-US" sz="1300" dirty="0"/>
+          </a:p>
+        </p:txBody>
+      </p:sp>
+      <p:sp>
+        <p:nvSpPr>
+          <p:cNvPr id="15" name="Text 13"/>
+          <p:cNvSpPr/>
+          <p:nvPr/>
+        </p:nvSpPr>
+        <p:spPr>
+          <a:xfrm>
+            <a:off x="7818120" y="3300984"/>
+            <a:ext cx="3090672" cy="877824"/>
+          </a:xfrm>
+          <a:prstGeom prst="rect">
+            <a:avLst/>
+          </a:prstGeom>
+          <a:noFill/>
+          <a:ln/>
+        </p:spPr>
+        <p:txBody>
+          <a:bodyPr wrap="square" lIns="254" tIns="254" rIns="254" bIns="254" rtlCol="0" anchor="t">
+            <a:normAutofit/>
+          </a:bodyPr>
+          <a:lstStyle/>
+          <a:p>
+            <a:r>
+              <a:rPr lang="en-US" sz="1380" dirty="0">
+                <a:solidFill>
+                  <a:srgbClr val="17364A"/>
+                </a:solidFill>
+                <a:latin typeface="Aptos" pitchFamily="34" charset="0"/>
+                <a:ea typeface="Aptos" pitchFamily="34" charset="-122"/>
+                <a:cs typeface="Aptos" pitchFamily="34" charset="-120"/>
+              </a:rPr>
+              <a:t>Staff may use it to summarize guidance, draft meeting notes, simplify technical language,.</a:t>
+            </a:r>
+            <a:endParaRPr lang="en-US" sz="1380" dirty="0"/>
+          </a:p>
+          <a:p>
+            <a:r>
+              <a:rPr lang="en-US" sz="1380" dirty="0">
+                <a:solidFill>
+                  <a:srgbClr val="17364A"/>
+                </a:solidFill>
+                <a:latin typeface="Aptos" pitchFamily="34" charset="0"/>
+                <a:ea typeface="Aptos" pitchFamily="34" charset="-122"/>
+                <a:cs typeface="Aptos" pitchFamily="34" charset="-120"/>
+              </a:rPr>
+              <a:t>The same capabilities create risk.</a:t>
+            </a:r>
+            <a:endParaRPr lang="en-US" sz="1380" dirty="0"/>
+          </a:p>
+          <a:p>
+            <a:r>
+              <a:rPr lang="en-US" sz="1380" dirty="0">
+                <a:solidFill>
+                  <a:srgbClr val="17364A"/>
+                </a:solidFill>
+                <a:latin typeface="Aptos" pitchFamily="34" charset="0"/>
+                <a:ea typeface="Aptos" pitchFamily="34" charset="-122"/>
+                <a:cs typeface="Aptos" pitchFamily="34" charset="-120"/>
+              </a:rPr>
+              <a:t>Generative AI can invent facts, omit caveats, misstate guidance, flatten uncertainty, or.</a:t>
+            </a:r>
+            <a:endParaRPr lang="en-US" sz="1380" dirty="0"/>
+          </a:p>
+        </p:txBody>
       </p:sp>
       <p:sp>
         <p:nvSpPr>
           <p:cNvPr id="16" name="Shape 14"/>
-          <p:cNvSpPr/>
-          <p:nvPr/>
-        </p:nvSpPr>
-        <p:spPr>
-          <a:xfrm>
-            <a:off x="9015984" y="2880360"/>
-            <a:ext cx="256032" cy="1005840"/>
-          </a:xfrm>
-          <a:prstGeom prst="rect">
-            <a:avLst/>
-          </a:prstGeom>
-          <a:solidFill>
-            <a:srgbClr val="D69A2D"/>
-          </a:solidFill>
-          <a:ln w="12700">
-            <a:solidFill>
-              <a:srgbClr val="D69A2D"/>
-            </a:solidFill>
-            <a:prstDash val="solid"/>
-          </a:ln>
-        </p:spPr>
-      </p:sp>
-      <p:sp>
-        <p:nvSpPr>
-          <p:cNvPr id="17" name="Shape 15"/>
-          <p:cNvSpPr/>
-          <p:nvPr/>
-        </p:nvSpPr>
-        <p:spPr>
-          <a:xfrm>
-            <a:off x="9454896" y="3319272"/>
-            <a:ext cx="256032" cy="566928"/>
-          </a:xfrm>
-          <a:prstGeom prst="rect">
-            <a:avLst/>
-          </a:prstGeom>
-          <a:solidFill>
-            <a:srgbClr val="6A4CA3"/>
-          </a:solidFill>
-          <a:ln w="12700">
-            <a:solidFill>
-              <a:srgbClr val="6A4CA3"/>
-            </a:solidFill>
-            <a:prstDash val="solid"/>
-          </a:ln>
-        </p:spPr>
-      </p:sp>
-      <p:sp>
-        <p:nvSpPr>
-          <p:cNvPr id="18" name="Shape 16"/>
-          <p:cNvSpPr/>
-          <p:nvPr/>
-        </p:nvSpPr>
-        <p:spPr>
-          <a:xfrm>
-            <a:off x="8019288" y="3886200"/>
-            <a:ext cx="2706624" cy="0"/>
-          </a:xfrm>
-          <a:prstGeom prst="line">
-            <a:avLst/>
-          </a:prstGeom>
-          <a:noFill/>
-          <a:ln w="15240">
-            <a:solidFill>
-              <a:srgbClr val="003A63"/>
-            </a:solidFill>
-            <a:prstDash val="solid"/>
-          </a:ln>
-        </p:spPr>
-      </p:sp>
-      <p:sp>
-        <p:nvSpPr>
-          <p:cNvPr id="19" name="Text 17"/>
-          <p:cNvSpPr/>
-          <p:nvPr/>
-        </p:nvSpPr>
-        <p:spPr>
-          <a:xfrm>
-            <a:off x="7863840" y="3017520"/>
-            <a:ext cx="3017520" cy="201168"/>
-          </a:xfrm>
-          <a:prstGeom prst="rect">
-            <a:avLst/>
-          </a:prstGeom>
-          <a:noFill/>
-          <a:ln/>
-        </p:spPr>
-        <p:txBody>
-          <a:bodyPr wrap="square" lIns="0" tIns="0" rIns="0" bIns="0" rtlCol="0" anchor="ctr"/>
-          <a:lstStyle/>
-          <a:p>
-            <a:pPr algn="ctr" indent="0" marL="0">
-              <a:buNone/>
-            </a:pPr>
-            <a:r>
-              <a:rPr lang="en-US" sz="1050" b="1" dirty="0">
-                <a:solidFill>
-                  <a:srgbClr val="003A63"/>
-                </a:solidFill>
-                <a:latin typeface="Aptos" pitchFamily="34" charset="0"/>
-                <a:ea typeface="Aptos" pitchFamily="34" charset="-122"/>
-                <a:cs typeface="Aptos" pitchFamily="34" charset="-120"/>
-              </a:rPr>
-              <a:t>Measure and monitor</a:t>
-            </a:r>
-            <a:endParaRPr lang="en-US" sz="1050" dirty="0"/>
-          </a:p>
-        </p:txBody>
-      </p:sp>
-      <p:sp>
-        <p:nvSpPr>
-          <p:cNvPr id="20" name="Shape 18"/>
           <p:cNvSpPr/>
           <p:nvPr/>
         </p:nvSpPr>
@@ -17612,7 +16357,7 @@
       </p:sp>
       <p:sp>
         <p:nvSpPr>
-          <p:cNvPr id="21" name="Text 19"/>
+          <p:cNvPr id="17" name="Text 15"/>
           <p:cNvSpPr/>
           <p:nvPr/>
         </p:nvSpPr>
@@ -17651,7 +16396,7 @@
       </p:sp>
       <p:sp>
         <p:nvSpPr>
-          <p:cNvPr id="22" name="Text 20"/>
+          <p:cNvPr id="18" name="Text 16"/>
           <p:cNvSpPr/>
           <p:nvPr/>
         </p:nvSpPr>
@@ -18159,13 +16904,11 @@
             </a:avLst>
           </a:prstGeom>
           <a:solidFill>
-            <a:srgbClr val="FFFFFF">
-              <a:alpha val="88000"/>
-            </a:srgbClr>
+            <a:srgbClr val="FFFFFF"/>
           </a:solidFill>
           <a:ln w="12700">
             <a:solidFill>
-              <a:srgbClr val="D6E8F2"/>
+              <a:srgbClr val="B9D7E6"/>
             </a:solidFill>
             <a:prstDash val="solid"/>
           </a:ln>
@@ -18173,169 +16916,112 @@
       </p:sp>
       <p:sp>
         <p:nvSpPr>
-          <p:cNvPr id="14" name="Shape 12"/>
-          <p:cNvSpPr/>
-          <p:nvPr/>
-        </p:nvSpPr>
-        <p:spPr>
-          <a:xfrm>
-            <a:off x="8138160" y="3474720"/>
-            <a:ext cx="256032" cy="411480"/>
-          </a:xfrm>
-          <a:prstGeom prst="rect">
-            <a:avLst/>
-          </a:prstGeom>
-          <a:solidFill>
-            <a:srgbClr val="0068B7"/>
-          </a:solidFill>
-          <a:ln w="12700">
-            <a:solidFill>
-              <a:srgbClr val="0068B7"/>
-            </a:solidFill>
-            <a:prstDash val="solid"/>
-          </a:ln>
-        </p:spPr>
-      </p:sp>
-      <p:sp>
-        <p:nvSpPr>
-          <p:cNvPr id="15" name="Shape 13"/>
-          <p:cNvSpPr/>
-          <p:nvPr/>
-        </p:nvSpPr>
-        <p:spPr>
-          <a:xfrm>
-            <a:off x="8577072" y="3172968"/>
-            <a:ext cx="256032" cy="713232"/>
-          </a:xfrm>
-          <a:prstGeom prst="rect">
-            <a:avLst/>
-          </a:prstGeom>
-          <a:solidFill>
-            <a:srgbClr val="2F8A28"/>
-          </a:solidFill>
-          <a:ln w="12700">
-            <a:solidFill>
-              <a:srgbClr val="2F8A28"/>
-            </a:solidFill>
-            <a:prstDash val="solid"/>
-          </a:ln>
-        </p:spPr>
+          <p:cNvPr id="14" name="Text 12"/>
+          <p:cNvSpPr/>
+          <p:nvPr/>
+        </p:nvSpPr>
+        <p:spPr>
+          <a:xfrm>
+            <a:off x="7799832" y="2935224"/>
+            <a:ext cx="3145536" cy="256032"/>
+          </a:xfrm>
+          <a:prstGeom prst="rect">
+            <a:avLst/>
+          </a:prstGeom>
+          <a:noFill/>
+          <a:ln/>
+        </p:spPr>
+        <p:txBody>
+          <a:bodyPr wrap="square" lIns="0" tIns="0" rIns="0" bIns="0" rtlCol="0" anchor="ctr"/>
+          <a:lstStyle/>
+          <a:p>
+            <a:pPr indent="0" marL="0">
+              <a:buNone/>
+            </a:pPr>
+            <a:r>
+              <a:rPr lang="en-US" sz="1300" b="1" dirty="0">
+                <a:solidFill>
+                  <a:srgbClr val="0068B7"/>
+                </a:solidFill>
+                <a:latin typeface="Aptos" pitchFamily="34" charset="0"/>
+                <a:ea typeface="Aptos" pitchFamily="34" charset="-122"/>
+                <a:cs typeface="Aptos" pitchFamily="34" charset="-120"/>
+              </a:rPr>
+              <a:t>Concept checkpoints</a:t>
+            </a:r>
+            <a:endParaRPr lang="en-US" sz="1300" dirty="0"/>
+          </a:p>
+        </p:txBody>
+      </p:sp>
+      <p:sp>
+        <p:nvSpPr>
+          <p:cNvPr id="15" name="Text 13"/>
+          <p:cNvSpPr/>
+          <p:nvPr/>
+        </p:nvSpPr>
+        <p:spPr>
+          <a:xfrm>
+            <a:off x="7818120" y="3300984"/>
+            <a:ext cx="3090672" cy="877824"/>
+          </a:xfrm>
+          <a:prstGeom prst="rect">
+            <a:avLst/>
+          </a:prstGeom>
+          <a:noFill/>
+          <a:ln/>
+        </p:spPr>
+        <p:txBody>
+          <a:bodyPr wrap="square" lIns="254" tIns="254" rIns="254" bIns="254" rtlCol="0" anchor="t">
+            <a:normAutofit/>
+          </a:bodyPr>
+          <a:lstStyle/>
+          <a:p>
+            <a:r>
+              <a:rPr lang="en-US" sz="1380" dirty="0">
+                <a:solidFill>
+                  <a:srgbClr val="17364A"/>
+                </a:solidFill>
+                <a:latin typeface="Aptos" pitchFamily="34" charset="0"/>
+                <a:ea typeface="Aptos" pitchFamily="34" charset="-122"/>
+                <a:cs typeface="Aptos" pitchFamily="34" charset="-120"/>
+              </a:rPr>
+              <a:t>A communications team may use generative AI to draft a plain-language public message about.</a:t>
+            </a:r>
+            <a:endParaRPr lang="en-US" sz="1380" dirty="0"/>
+          </a:p>
+          <a:p>
+            <a:r>
+              <a:rPr lang="en-US" sz="1380" dirty="0">
+                <a:solidFill>
+                  <a:srgbClr val="17364A"/>
+                </a:solidFill>
+                <a:latin typeface="Aptos" pitchFamily="34" charset="0"/>
+                <a:ea typeface="Aptos" pitchFamily="34" charset="-122"/>
+                <a:cs typeface="Aptos" pitchFamily="34" charset="-120"/>
+              </a:rPr>
+              <a:t>The draft may be clear and readable, but reviewers must check whether the numbers are.</a:t>
+            </a:r>
+            <a:endParaRPr lang="en-US" sz="1380" dirty="0"/>
+          </a:p>
+          <a:p>
+            <a:r>
+              <a:rPr lang="en-US" sz="1380" dirty="0">
+                <a:solidFill>
+                  <a:srgbClr val="17364A"/>
+                </a:solidFill>
+                <a:latin typeface="Aptos" pitchFamily="34" charset="0"/>
+                <a:ea typeface="Aptos" pitchFamily="34" charset="-122"/>
+                <a:cs typeface="Aptos" pitchFamily="34" charset="-120"/>
+              </a:rPr>
+              <a:t>The summary must be checked against source notes because a missed exposure, incorrect.</a:t>
+            </a:r>
+            <a:endParaRPr lang="en-US" sz="1380" dirty="0"/>
+          </a:p>
+        </p:txBody>
       </p:sp>
       <p:sp>
         <p:nvSpPr>
           <p:cNvPr id="16" name="Shape 14"/>
-          <p:cNvSpPr/>
-          <p:nvPr/>
-        </p:nvSpPr>
-        <p:spPr>
-          <a:xfrm>
-            <a:off x="9015984" y="2880360"/>
-            <a:ext cx="256032" cy="1005840"/>
-          </a:xfrm>
-          <a:prstGeom prst="rect">
-            <a:avLst/>
-          </a:prstGeom>
-          <a:solidFill>
-            <a:srgbClr val="D69A2D"/>
-          </a:solidFill>
-          <a:ln w="12700">
-            <a:solidFill>
-              <a:srgbClr val="D69A2D"/>
-            </a:solidFill>
-            <a:prstDash val="solid"/>
-          </a:ln>
-        </p:spPr>
-      </p:sp>
-      <p:sp>
-        <p:nvSpPr>
-          <p:cNvPr id="17" name="Shape 15"/>
-          <p:cNvSpPr/>
-          <p:nvPr/>
-        </p:nvSpPr>
-        <p:spPr>
-          <a:xfrm>
-            <a:off x="9454896" y="3319272"/>
-            <a:ext cx="256032" cy="566928"/>
-          </a:xfrm>
-          <a:prstGeom prst="rect">
-            <a:avLst/>
-          </a:prstGeom>
-          <a:solidFill>
-            <a:srgbClr val="6A4CA3"/>
-          </a:solidFill>
-          <a:ln w="12700">
-            <a:solidFill>
-              <a:srgbClr val="6A4CA3"/>
-            </a:solidFill>
-            <a:prstDash val="solid"/>
-          </a:ln>
-        </p:spPr>
-      </p:sp>
-      <p:sp>
-        <p:nvSpPr>
-          <p:cNvPr id="18" name="Shape 16"/>
-          <p:cNvSpPr/>
-          <p:nvPr/>
-        </p:nvSpPr>
-        <p:spPr>
-          <a:xfrm>
-            <a:off x="8019288" y="3886200"/>
-            <a:ext cx="2706624" cy="0"/>
-          </a:xfrm>
-          <a:prstGeom prst="line">
-            <a:avLst/>
-          </a:prstGeom>
-          <a:noFill/>
-          <a:ln w="15240">
-            <a:solidFill>
-              <a:srgbClr val="003A63"/>
-            </a:solidFill>
-            <a:prstDash val="solid"/>
-          </a:ln>
-        </p:spPr>
-      </p:sp>
-      <p:sp>
-        <p:nvSpPr>
-          <p:cNvPr id="19" name="Text 17"/>
-          <p:cNvSpPr/>
-          <p:nvPr/>
-        </p:nvSpPr>
-        <p:spPr>
-          <a:xfrm>
-            <a:off x="7863840" y="3017520"/>
-            <a:ext cx="3017520" cy="201168"/>
-          </a:xfrm>
-          <a:prstGeom prst="rect">
-            <a:avLst/>
-          </a:prstGeom>
-          <a:noFill/>
-          <a:ln/>
-        </p:spPr>
-        <p:txBody>
-          <a:bodyPr wrap="square" lIns="0" tIns="0" rIns="0" bIns="0" rtlCol="0" anchor="ctr"/>
-          <a:lstStyle/>
-          <a:p>
-            <a:pPr algn="ctr" indent="0" marL="0">
-              <a:buNone/>
-            </a:pPr>
-            <a:r>
-              <a:rPr lang="en-US" sz="1050" b="1" dirty="0">
-                <a:solidFill>
-                  <a:srgbClr val="003A63"/>
-                </a:solidFill>
-                <a:latin typeface="Aptos" pitchFamily="34" charset="0"/>
-                <a:ea typeface="Aptos" pitchFamily="34" charset="-122"/>
-                <a:cs typeface="Aptos" pitchFamily="34" charset="-120"/>
-              </a:rPr>
-              <a:t>Measure and monitor</a:t>
-            </a:r>
-            <a:endParaRPr lang="en-US" sz="1050" dirty="0"/>
-          </a:p>
-        </p:txBody>
-      </p:sp>
-      <p:sp>
-        <p:nvSpPr>
-          <p:cNvPr id="20" name="Shape 18"/>
           <p:cNvSpPr/>
           <p:nvPr/>
         </p:nvSpPr>
@@ -18362,7 +17048,7 @@
       </p:sp>
       <p:sp>
         <p:nvSpPr>
-          <p:cNvPr id="21" name="Text 19"/>
+          <p:cNvPr id="17" name="Text 15"/>
           <p:cNvSpPr/>
           <p:nvPr/>
         </p:nvSpPr>
@@ -18401,7 +17087,7 @@
       </p:sp>
       <p:sp>
         <p:nvSpPr>
-          <p:cNvPr id="22" name="Text 20"/>
+          <p:cNvPr id="18" name="Text 16"/>
           <p:cNvSpPr/>
           <p:nvPr/>
         </p:nvSpPr>

--- a/downloads/presentations/modules/anl-310.pptx
+++ b/downloads/presentations/modules/anl-310.pptx
@@ -3353,49 +3353,58 @@
           <a:ln/>
         </p:spPr>
         <p:txBody>
-          <a:bodyPr wrap="square" lIns="635" tIns="635" rIns="635" bIns="635" rtlCol="0" anchor="t">
+          <a:bodyPr wrap="square" lIns="1016" tIns="1016" rIns="1016" bIns="1016" rtlCol="0" anchor="t">
             <a:normAutofit/>
           </a:bodyPr>
           <a:lstStyle/>
           <a:p>
+            <a:pPr indent="0" marL="0">
+              <a:buNone/>
+            </a:pPr>
             <a:r>
               <a:rPr lang="en-US" sz="2100" dirty="0">
                 <a:solidFill>
-                  <a:srgbClr val="17364A"/>
-                </a:solidFill>
-                <a:latin typeface="Aptos" pitchFamily="34" charset="0"/>
-                <a:ea typeface="Aptos" pitchFamily="34" charset="-122"/>
-                <a:cs typeface="Aptos" pitchFamily="34" charset="-120"/>
-              </a:rPr>
-              <a:t>Generative AI evaluation should begin with intended use.</a:t>
+                  <a:srgbClr val="003A63"/>
+                </a:solidFill>
+                <a:latin typeface="Aptos" pitchFamily="34" charset="0"/>
+                <a:ea typeface="Aptos" pitchFamily="34" charset="-122"/>
+                <a:cs typeface="Aptos" pitchFamily="34" charset="-120"/>
+              </a:rPr>
+              <a:t>• Generative AI evaluation should begin with intended use.</a:t>
             </a:r>
             <a:endParaRPr lang="en-US" sz="2100" dirty="0"/>
           </a:p>
           <a:p>
+            <a:pPr indent="0" marL="0">
+              <a:buNone/>
+            </a:pPr>
             <a:r>
               <a:rPr lang="en-US" sz="2100" dirty="0">
                 <a:solidFill>
-                  <a:srgbClr val="17364A"/>
-                </a:solidFill>
-                <a:latin typeface="Aptos" pitchFamily="34" charset="0"/>
-                <a:ea typeface="Aptos" pitchFamily="34" charset="-122"/>
-                <a:cs typeface="Aptos" pitchFamily="34" charset="-120"/>
-              </a:rPr>
-              <a:t>A brainstormed outline, internal draft, public advisory, case summary, policy synthesis, or operational.</a:t>
+                  <a:srgbClr val="003A63"/>
+                </a:solidFill>
+                <a:latin typeface="Aptos" pitchFamily="34" charset="0"/>
+                <a:ea typeface="Aptos" pitchFamily="34" charset="-122"/>
+                <a:cs typeface="Aptos" pitchFamily="34" charset="-120"/>
+              </a:rPr>
+              <a:t>• A brainstormed outline, internal draft, public advisory, case summary, policy synthesis, or.</a:t>
             </a:r>
             <a:endParaRPr lang="en-US" sz="2100" dirty="0"/>
           </a:p>
           <a:p>
+            <a:pPr indent="0" marL="0">
+              <a:buNone/>
+            </a:pPr>
             <a:r>
               <a:rPr lang="en-US" sz="2100" dirty="0">
                 <a:solidFill>
-                  <a:srgbClr val="17364A"/>
-                </a:solidFill>
-                <a:latin typeface="Aptos" pitchFamily="34" charset="0"/>
-                <a:ea typeface="Aptos" pitchFamily="34" charset="-122"/>
-                <a:cs typeface="Aptos" pitchFamily="34" charset="-120"/>
-              </a:rPr>
-              <a:t>The more sensitive, public-facing, or consequential the use, the stronger the review should be.</a:t>
+                  <a:srgbClr val="003A63"/>
+                </a:solidFill>
+                <a:latin typeface="Aptos" pitchFamily="34" charset="0"/>
+                <a:ea typeface="Aptos" pitchFamily="34" charset="-122"/>
+                <a:cs typeface="Aptos" pitchFamily="34" charset="-120"/>
+              </a:rPr>
+              <a:t>• The more sensitive, public-facing, or consequential the use, the stronger the review should be.</a:t>
             </a:r>
             <a:endParaRPr lang="en-US" sz="2100" dirty="0"/>
           </a:p>
@@ -3475,17 +3484,17 @@
         </p:nvSpPr>
         <p:spPr>
           <a:xfrm>
-            <a:off x="7799832" y="1828800"/>
-            <a:ext cx="3145536" cy="685800"/>
-          </a:xfrm>
-          <a:prstGeom prst="rect">
-            <a:avLst/>
-          </a:prstGeom>
-          <a:noFill/>
-          <a:ln/>
-        </p:spPr>
-        <p:txBody>
-          <a:bodyPr wrap="square" lIns="0" tIns="0" rIns="0" bIns="0" rtlCol="0" anchor="t">
+            <a:off x="7799832" y="1801368"/>
+            <a:ext cx="3145536" cy="758952"/>
+          </a:xfrm>
+          <a:prstGeom prst="rect">
+            <a:avLst/>
+          </a:prstGeom>
+          <a:noFill/>
+          <a:ln/>
+        </p:spPr>
+        <p:txBody>
+          <a:bodyPr wrap="square" lIns="254" tIns="254" rIns="254" bIns="254" rtlCol="0" anchor="t">
             <a:normAutofit/>
           </a:bodyPr>
           <a:lstStyle/>
@@ -3494,7 +3503,7 @@
               <a:buNone/>
             </a:pPr>
             <a:r>
-              <a:rPr lang="en-US" sz="1550" dirty="0">
+              <a:rPr lang="en-US" sz="1320" dirty="0">
                 <a:solidFill>
                   <a:srgbClr val="17364A"/>
                 </a:solidFill>
@@ -3504,7 +3513,7 @@
               </a:rPr>
               <a:t>Generative AI evaluation should begin with intended use.</a:t>
             </a:r>
-            <a:endParaRPr lang="en-US" sz="1550" dirty="0"/>
+            <a:endParaRPr lang="en-US" sz="1320" dirty="0"/>
           </a:p>
         </p:txBody>
       </p:sp>
@@ -3592,13 +3601,16 @@
           <a:ln/>
         </p:spPr>
         <p:txBody>
-          <a:bodyPr wrap="square" lIns="254" tIns="254" rIns="254" bIns="254" rtlCol="0" anchor="t">
+          <a:bodyPr wrap="square" lIns="508" tIns="508" rIns="508" bIns="508" rtlCol="0" anchor="t">
             <a:normAutofit/>
           </a:bodyPr>
           <a:lstStyle/>
           <a:p>
-            <a:r>
-              <a:rPr lang="en-US" sz="1380" dirty="0">
+            <a:pPr indent="0" marL="0">
+              <a:buNone/>
+            </a:pPr>
+            <a:r>
+              <a:rPr lang="en-US" sz="1220" dirty="0">
                 <a:solidFill>
                   <a:srgbClr val="17364A"/>
                 </a:solidFill>
@@ -3606,13 +3618,16 @@
                 <a:ea typeface="Aptos" pitchFamily="34" charset="-122"/>
                 <a:cs typeface="Aptos" pitchFamily="34" charset="-120"/>
               </a:rPr>
-              <a:t>A brainstormed outline, internal draft, public advisory, case summary, policy synthesis,.</a:t>
-            </a:r>
-            <a:endParaRPr lang="en-US" sz="1380" dirty="0"/>
-          </a:p>
-          <a:p>
-            <a:r>
-              <a:rPr lang="en-US" sz="1380" dirty="0">
+              <a:t>A brainstormed outline, internal draft, public advisory, case.</a:t>
+            </a:r>
+            <a:endParaRPr lang="en-US" sz="1220" dirty="0"/>
+          </a:p>
+          <a:p>
+            <a:pPr indent="0" marL="0">
+              <a:buNone/>
+            </a:pPr>
+            <a:r>
+              <a:rPr lang="en-US" sz="1220" dirty="0">
                 <a:solidFill>
                   <a:srgbClr val="17364A"/>
                 </a:solidFill>
@@ -3622,11 +3637,14 @@
               </a:rPr>
               <a:t>Factuality review requires comparison to source material.</a:t>
             </a:r>
-            <a:endParaRPr lang="en-US" sz="1380" dirty="0"/>
-          </a:p>
-          <a:p>
-            <a:r>
-              <a:rPr lang="en-US" sz="1380" dirty="0">
+            <a:endParaRPr lang="en-US" sz="1220" dirty="0"/>
+          </a:p>
+          <a:p>
+            <a:pPr indent="0" marL="0">
+              <a:buNone/>
+            </a:pPr>
+            <a:r>
+              <a:rPr lang="en-US" sz="1220" dirty="0">
                 <a:solidFill>
                   <a:srgbClr val="17364A"/>
                 </a:solidFill>
@@ -3634,9 +3652,9 @@
                 <a:ea typeface="Aptos" pitchFamily="34" charset="-122"/>
                 <a:cs typeface="Aptos" pitchFamily="34" charset="-120"/>
               </a:rPr>
-              <a:t>Reviewers should check names, dates, numbers, conditions, legal requirements,.</a:t>
-            </a:r>
-            <a:endParaRPr lang="en-US" sz="1380" dirty="0"/>
+              <a:t>Reviewers should check names, dates, numbers, conditions, legal.</a:t>
+            </a:r>
+            <a:endParaRPr lang="en-US" sz="1220" dirty="0"/>
           </a:p>
         </p:txBody>
       </p:sp>
@@ -3714,17 +3732,17 @@
         </p:nvSpPr>
         <p:spPr>
           <a:xfrm>
-            <a:off x="7799832" y="5001768"/>
-            <a:ext cx="3145536" cy="502920"/>
-          </a:xfrm>
-          <a:prstGeom prst="rect">
-            <a:avLst/>
-          </a:prstGeom>
-          <a:noFill/>
-          <a:ln/>
-        </p:spPr>
-        <p:txBody>
-          <a:bodyPr wrap="square" lIns="0" tIns="0" rIns="0" bIns="0" rtlCol="0" anchor="t">
+            <a:off x="7799832" y="4974336"/>
+            <a:ext cx="3145536" cy="576072"/>
+          </a:xfrm>
+          <a:prstGeom prst="rect">
+            <a:avLst/>
+          </a:prstGeom>
+          <a:noFill/>
+          <a:ln/>
+        </p:spPr>
+        <p:txBody>
+          <a:bodyPr wrap="square" lIns="254" tIns="254" rIns="254" bIns="254" rtlCol="0" anchor="t">
             <a:normAutofit/>
           </a:bodyPr>
           <a:lstStyle/>
@@ -3733,7 +3751,7 @@
               <a:buNone/>
             </a:pPr>
             <a:r>
-              <a:rPr lang="en-US" sz="1550" dirty="0">
+              <a:rPr lang="en-US" sz="1320" dirty="0">
                 <a:solidFill>
                   <a:srgbClr val="17364A"/>
                 </a:solidFill>
@@ -3741,9 +3759,9 @@
                 <a:ea typeface="Aptos" pitchFamily="34" charset="-122"/>
                 <a:cs typeface="Aptos" pitchFamily="34" charset="-120"/>
               </a:rPr>
-              <a:t>Connect the concept to data quality, model performance, validation evidence, monitoring measures, and decisions that remain under human control.</a:t>
-            </a:r>
-            <a:endParaRPr lang="en-US" sz="1550" dirty="0"/>
+              <a:t>Connect the concept to data quality, model performance, validation evidence, monitoring measures, and decisions that.</a:t>
+            </a:r>
+            <a:endParaRPr lang="en-US" sz="1320" dirty="0"/>
           </a:p>
         </p:txBody>
       </p:sp>
@@ -4044,49 +4062,58 @@
           <a:ln/>
         </p:spPr>
         <p:txBody>
-          <a:bodyPr wrap="square" lIns="635" tIns="635" rIns="635" bIns="635" rtlCol="0" anchor="t">
+          <a:bodyPr wrap="square" lIns="1016" tIns="1016" rIns="1016" bIns="1016" rtlCol="0" anchor="t">
             <a:normAutofit/>
           </a:bodyPr>
           <a:lstStyle/>
           <a:p>
+            <a:pPr indent="0" marL="0">
+              <a:buNone/>
+            </a:pPr>
             <a:r>
               <a:rPr lang="en-US" sz="2100" dirty="0">
                 <a:solidFill>
-                  <a:srgbClr val="17364A"/>
-                </a:solidFill>
-                <a:latin typeface="Aptos" pitchFamily="34" charset="0"/>
-                <a:ea typeface="Aptos" pitchFamily="34" charset="-122"/>
-                <a:cs typeface="Aptos" pitchFamily="34" charset="-120"/>
-              </a:rPr>
-              <a:t>Equity and accessibility review should be included when outputs affect staff, partners, or the public.</a:t>
+                  <a:srgbClr val="003A63"/>
+                </a:solidFill>
+                <a:latin typeface="Aptos" pitchFamily="34" charset="0"/>
+                <a:ea typeface="Aptos" pitchFamily="34" charset="-122"/>
+                <a:cs typeface="Aptos" pitchFamily="34" charset="-120"/>
+              </a:rPr>
+              <a:t>• Equity and accessibility review should be included when outputs affect staff, partners, or the.</a:t>
             </a:r>
             <a:endParaRPr lang="en-US" sz="2100" dirty="0"/>
           </a:p>
           <a:p>
+            <a:pPr indent="0" marL="0">
+              <a:buNone/>
+            </a:pPr>
             <a:r>
               <a:rPr lang="en-US" sz="2100" dirty="0">
                 <a:solidFill>
-                  <a:srgbClr val="17364A"/>
-                </a:solidFill>
-                <a:latin typeface="Aptos" pitchFamily="34" charset="0"/>
-                <a:ea typeface="Aptos" pitchFamily="34" charset="-122"/>
-                <a:cs typeface="Aptos" pitchFamily="34" charset="-120"/>
-              </a:rPr>
-              <a:t>Reviewers should assess reading level, language access, disability accessibility, cultural context,.</a:t>
+                  <a:srgbClr val="003A63"/>
+                </a:solidFill>
+                <a:latin typeface="Aptos" pitchFamily="34" charset="0"/>
+                <a:ea typeface="Aptos" pitchFamily="34" charset="-122"/>
+                <a:cs typeface="Aptos" pitchFamily="34" charset="-120"/>
+              </a:rPr>
+              <a:t>• Reviewers should assess reading level, language access, disability accessibility, cultural.</a:t>
             </a:r>
             <a:endParaRPr lang="en-US" sz="2100" dirty="0"/>
           </a:p>
           <a:p>
+            <a:pPr indent="0" marL="0">
+              <a:buNone/>
+            </a:pPr>
             <a:r>
               <a:rPr lang="en-US" sz="2100" dirty="0">
                 <a:solidFill>
-                  <a:srgbClr val="17364A"/>
-                </a:solidFill>
-                <a:latin typeface="Aptos" pitchFamily="34" charset="0"/>
-                <a:ea typeface="Aptos" pitchFamily="34" charset="-122"/>
-                <a:cs typeface="Aptos" pitchFamily="34" charset="-120"/>
-              </a:rPr>
-              <a:t>Translation or multilingual adaptation should include review by qualified humans when used for.</a:t>
+                  <a:srgbClr val="003A63"/>
+                </a:solidFill>
+                <a:latin typeface="Aptos" pitchFamily="34" charset="0"/>
+                <a:ea typeface="Aptos" pitchFamily="34" charset="-122"/>
+                <a:cs typeface="Aptos" pitchFamily="34" charset="-120"/>
+              </a:rPr>
+              <a:t>• Translation or multilingual adaptation should include review by qualified humans when used for.</a:t>
             </a:r>
             <a:endParaRPr lang="en-US" sz="2100" dirty="0"/>
           </a:p>
@@ -4166,17 +4193,17 @@
         </p:nvSpPr>
         <p:spPr>
           <a:xfrm>
-            <a:off x="7799832" y="1828800"/>
-            <a:ext cx="3145536" cy="685800"/>
-          </a:xfrm>
-          <a:prstGeom prst="rect">
-            <a:avLst/>
-          </a:prstGeom>
-          <a:noFill/>
-          <a:ln/>
-        </p:spPr>
-        <p:txBody>
-          <a:bodyPr wrap="square" lIns="0" tIns="0" rIns="0" bIns="0" rtlCol="0" anchor="t">
+            <a:off x="7799832" y="1801368"/>
+            <a:ext cx="3145536" cy="758952"/>
+          </a:xfrm>
+          <a:prstGeom prst="rect">
+            <a:avLst/>
+          </a:prstGeom>
+          <a:noFill/>
+          <a:ln/>
+        </p:spPr>
+        <p:txBody>
+          <a:bodyPr wrap="square" lIns="254" tIns="254" rIns="254" bIns="254" rtlCol="0" anchor="t">
             <a:normAutofit/>
           </a:bodyPr>
           <a:lstStyle/>
@@ -4185,7 +4212,7 @@
               <a:buNone/>
             </a:pPr>
             <a:r>
-              <a:rPr lang="en-US" sz="1550" dirty="0">
+              <a:rPr lang="en-US" sz="1320" dirty="0">
                 <a:solidFill>
                   <a:srgbClr val="17364A"/>
                 </a:solidFill>
@@ -4195,7 +4222,7 @@
               </a:rPr>
               <a:t>Equity and accessibility review should be included when outputs affect staff, partners, or the public.</a:t>
             </a:r>
-            <a:endParaRPr lang="en-US" sz="1550" dirty="0"/>
+            <a:endParaRPr lang="en-US" sz="1320" dirty="0"/>
           </a:p>
         </p:txBody>
       </p:sp>
@@ -4283,13 +4310,16 @@
           <a:ln/>
         </p:spPr>
         <p:txBody>
-          <a:bodyPr wrap="square" lIns="254" tIns="254" rIns="254" bIns="254" rtlCol="0" anchor="t">
+          <a:bodyPr wrap="square" lIns="508" tIns="508" rIns="508" bIns="508" rtlCol="0" anchor="t">
             <a:normAutofit/>
           </a:bodyPr>
           <a:lstStyle/>
           <a:p>
-            <a:r>
-              <a:rPr lang="en-US" sz="1380" dirty="0">
+            <a:pPr indent="0" marL="0">
+              <a:buNone/>
+            </a:pPr>
+            <a:r>
+              <a:rPr lang="en-US" sz="1220" dirty="0">
                 <a:solidFill>
                   <a:srgbClr val="17364A"/>
                 </a:solidFill>
@@ -4297,13 +4327,16 @@
                 <a:ea typeface="Aptos" pitchFamily="34" charset="-122"/>
                 <a:cs typeface="Aptos" pitchFamily="34" charset="-120"/>
               </a:rPr>
-              <a:t>Reviewers should assess reading level, language access, disability accessibility, cultural.</a:t>
-            </a:r>
-            <a:endParaRPr lang="en-US" sz="1380" dirty="0"/>
-          </a:p>
-          <a:p>
-            <a:r>
-              <a:rPr lang="en-US" sz="1380" dirty="0">
+              <a:t>Reviewers should assess reading level, language access, disability.</a:t>
+            </a:r>
+            <a:endParaRPr lang="en-US" sz="1220" dirty="0"/>
+          </a:p>
+          <a:p>
+            <a:pPr indent="0" marL="0">
+              <a:buNone/>
+            </a:pPr>
+            <a:r>
+              <a:rPr lang="en-US" sz="1220" dirty="0">
                 <a:solidFill>
                   <a:srgbClr val="17364A"/>
                 </a:solidFill>
@@ -4311,13 +4344,16 @@
                 <a:ea typeface="Aptos" pitchFamily="34" charset="-122"/>
                 <a:cs typeface="Aptos" pitchFamily="34" charset="-120"/>
               </a:rPr>
-              <a:t>Translation or multilingual adaptation should include review by qualified humans when used.</a:t>
-            </a:r>
-            <a:endParaRPr lang="en-US" sz="1380" dirty="0"/>
-          </a:p>
-          <a:p>
-            <a:r>
-              <a:rPr lang="en-US" sz="1380" dirty="0">
+              <a:t>Translation or multilingual adaptation should include review by.</a:t>
+            </a:r>
+            <a:endParaRPr lang="en-US" sz="1220" dirty="0"/>
+          </a:p>
+          <a:p>
+            <a:pPr indent="0" marL="0">
+              <a:buNone/>
+            </a:pPr>
+            <a:r>
+              <a:rPr lang="en-US" sz="1220" dirty="0">
                 <a:solidFill>
                   <a:srgbClr val="17364A"/>
                 </a:solidFill>
@@ -4327,7 +4363,7 @@
               </a:rPr>
               <a:t>Documentation should be proportionate to risk.</a:t>
             </a:r>
-            <a:endParaRPr lang="en-US" sz="1380" dirty="0"/>
+            <a:endParaRPr lang="en-US" sz="1220" dirty="0"/>
           </a:p>
         </p:txBody>
       </p:sp>
@@ -4405,17 +4441,17 @@
         </p:nvSpPr>
         <p:spPr>
           <a:xfrm>
-            <a:off x="7799832" y="5001768"/>
-            <a:ext cx="3145536" cy="502920"/>
-          </a:xfrm>
-          <a:prstGeom prst="rect">
-            <a:avLst/>
-          </a:prstGeom>
-          <a:noFill/>
-          <a:ln/>
-        </p:spPr>
-        <p:txBody>
-          <a:bodyPr wrap="square" lIns="0" tIns="0" rIns="0" bIns="0" rtlCol="0" anchor="t">
+            <a:off x="7799832" y="4974336"/>
+            <a:ext cx="3145536" cy="576072"/>
+          </a:xfrm>
+          <a:prstGeom prst="rect">
+            <a:avLst/>
+          </a:prstGeom>
+          <a:noFill/>
+          <a:ln/>
+        </p:spPr>
+        <p:txBody>
+          <a:bodyPr wrap="square" lIns="254" tIns="254" rIns="254" bIns="254" rtlCol="0" anchor="t">
             <a:normAutofit/>
           </a:bodyPr>
           <a:lstStyle/>
@@ -4424,7 +4460,7 @@
               <a:buNone/>
             </a:pPr>
             <a:r>
-              <a:rPr lang="en-US" sz="1550" dirty="0">
+              <a:rPr lang="en-US" sz="1320" dirty="0">
                 <a:solidFill>
                   <a:srgbClr val="17364A"/>
                 </a:solidFill>
@@ -4432,9 +4468,9 @@
                 <a:ea typeface="Aptos" pitchFamily="34" charset="-122"/>
                 <a:cs typeface="Aptos" pitchFamily="34" charset="-120"/>
               </a:rPr>
-              <a:t>Connect the concept to data quality, model performance, validation evidence, monitoring measures, and decisions that remain under human control.</a:t>
-            </a:r>
-            <a:endParaRPr lang="en-US" sz="1550" dirty="0"/>
+              <a:t>Connect the concept to data quality, model performance, validation evidence, monitoring measures, and decisions that.</a:t>
+            </a:r>
+            <a:endParaRPr lang="en-US" sz="1320" dirty="0"/>
           </a:p>
         </p:txBody>
       </p:sp>
@@ -4735,49 +4771,58 @@
           <a:ln/>
         </p:spPr>
         <p:txBody>
-          <a:bodyPr wrap="square" lIns="635" tIns="635" rIns="635" bIns="635" rtlCol="0" anchor="t">
+          <a:bodyPr wrap="square" lIns="1016" tIns="1016" rIns="1016" bIns="1016" rtlCol="0" anchor="t">
             <a:normAutofit/>
           </a:bodyPr>
           <a:lstStyle/>
           <a:p>
+            <a:pPr indent="0" marL="0">
+              <a:buNone/>
+            </a:pPr>
             <a:r>
               <a:rPr lang="en-US" sz="2100" dirty="0">
                 <a:solidFill>
-                  <a:srgbClr val="17364A"/>
-                </a:solidFill>
-                <a:latin typeface="Aptos" pitchFamily="34" charset="0"/>
-                <a:ea typeface="Aptos" pitchFamily="34" charset="-122"/>
-                <a:cs typeface="Aptos" pitchFamily="34" charset="-120"/>
-              </a:rPr>
-              <a:t>Fluent but false outputs.</a:t>
+                  <a:srgbClr val="003A63"/>
+                </a:solidFill>
+                <a:latin typeface="Aptos" pitchFamily="34" charset="0"/>
+                <a:ea typeface="Aptos" pitchFamily="34" charset="-122"/>
+                <a:cs typeface="Aptos" pitchFamily="34" charset="-120"/>
+              </a:rPr>
+              <a:t>• Fluent but false outputs.</a:t>
             </a:r>
             <a:endParaRPr lang="en-US" sz="2100" dirty="0"/>
           </a:p>
           <a:p>
+            <a:pPr indent="0" marL="0">
+              <a:buNone/>
+            </a:pPr>
             <a:r>
               <a:rPr lang="en-US" sz="2100" dirty="0">
                 <a:solidFill>
-                  <a:srgbClr val="17364A"/>
-                </a:solidFill>
-                <a:latin typeface="Aptos" pitchFamily="34" charset="0"/>
-                <a:ea typeface="Aptos" pitchFamily="34" charset="-122"/>
-                <a:cs typeface="Aptos" pitchFamily="34" charset="-120"/>
-              </a:rPr>
-              <a:t>A polished output may contain unsupported claims.</a:t>
+                  <a:srgbClr val="003A63"/>
+                </a:solidFill>
+                <a:latin typeface="Aptos" pitchFamily="34" charset="0"/>
+                <a:ea typeface="Aptos" pitchFamily="34" charset="-122"/>
+                <a:cs typeface="Aptos" pitchFamily="34" charset="-120"/>
+              </a:rPr>
+              <a:t>• A polished output may contain unsupported claims.</a:t>
             </a:r>
             <a:endParaRPr lang="en-US" sz="2100" dirty="0"/>
           </a:p>
           <a:p>
+            <a:pPr indent="0" marL="0">
+              <a:buNone/>
+            </a:pPr>
             <a:r>
               <a:rPr lang="en-US" sz="2100" dirty="0">
                 <a:solidFill>
-                  <a:srgbClr val="17364A"/>
-                </a:solidFill>
-                <a:latin typeface="Aptos" pitchFamily="34" charset="0"/>
-                <a:ea typeface="Aptos" pitchFamily="34" charset="-122"/>
-                <a:cs typeface="Aptos" pitchFamily="34" charset="-120"/>
-              </a:rPr>
-              <a:t>Guardrails include source checking, citations, and reviewer signoff.</a:t>
+                  <a:srgbClr val="003A63"/>
+                </a:solidFill>
+                <a:latin typeface="Aptos" pitchFamily="34" charset="0"/>
+                <a:ea typeface="Aptos" pitchFamily="34" charset="-122"/>
+                <a:cs typeface="Aptos" pitchFamily="34" charset="-120"/>
+              </a:rPr>
+              <a:t>• Guardrails include source checking, citations, and reviewer signoff.</a:t>
             </a:r>
             <a:endParaRPr lang="en-US" sz="2100" dirty="0"/>
           </a:p>
@@ -4857,17 +4902,17 @@
         </p:nvSpPr>
         <p:spPr>
           <a:xfrm>
-            <a:off x="7799832" y="1828800"/>
-            <a:ext cx="3145536" cy="685800"/>
-          </a:xfrm>
-          <a:prstGeom prst="rect">
-            <a:avLst/>
-          </a:prstGeom>
-          <a:noFill/>
-          <a:ln/>
-        </p:spPr>
-        <p:txBody>
-          <a:bodyPr wrap="square" lIns="0" tIns="0" rIns="0" bIns="0" rtlCol="0" anchor="t">
+            <a:off x="7799832" y="1801368"/>
+            <a:ext cx="3145536" cy="758952"/>
+          </a:xfrm>
+          <a:prstGeom prst="rect">
+            <a:avLst/>
+          </a:prstGeom>
+          <a:noFill/>
+          <a:ln/>
+        </p:spPr>
+        <p:txBody>
+          <a:bodyPr wrap="square" lIns="254" tIns="254" rIns="254" bIns="254" rtlCol="0" anchor="t">
             <a:normAutofit/>
           </a:bodyPr>
           <a:lstStyle/>
@@ -4876,7 +4921,7 @@
               <a:buNone/>
             </a:pPr>
             <a:r>
-              <a:rPr lang="en-US" sz="1550" dirty="0">
+              <a:rPr lang="en-US" sz="1320" dirty="0">
                 <a:solidFill>
                   <a:srgbClr val="17364A"/>
                 </a:solidFill>
@@ -4886,7 +4931,7 @@
               </a:rPr>
               <a:t>Fluent but false outputs.</a:t>
             </a:r>
-            <a:endParaRPr lang="en-US" sz="1550" dirty="0"/>
+            <a:endParaRPr lang="en-US" sz="1320" dirty="0"/>
           </a:p>
         </p:txBody>
       </p:sp>
@@ -4974,13 +5019,16 @@
           <a:ln/>
         </p:spPr>
         <p:txBody>
-          <a:bodyPr wrap="square" lIns="254" tIns="254" rIns="254" bIns="254" rtlCol="0" anchor="t">
+          <a:bodyPr wrap="square" lIns="508" tIns="508" rIns="508" bIns="508" rtlCol="0" anchor="t">
             <a:normAutofit/>
           </a:bodyPr>
           <a:lstStyle/>
           <a:p>
-            <a:r>
-              <a:rPr lang="en-US" sz="1380" dirty="0">
+            <a:pPr indent="0" marL="0">
+              <a:buNone/>
+            </a:pPr>
+            <a:r>
+              <a:rPr lang="en-US" sz="1220" dirty="0">
                 <a:solidFill>
                   <a:srgbClr val="17364A"/>
                 </a:solidFill>
@@ -4990,11 +5038,14 @@
               </a:rPr>
               <a:t>Omitted caveats.</a:t>
             </a:r>
-            <a:endParaRPr lang="en-US" sz="1380" dirty="0"/>
-          </a:p>
-          <a:p>
-            <a:r>
-              <a:rPr lang="en-US" sz="1380" dirty="0">
+            <a:endParaRPr lang="en-US" sz="1220" dirty="0"/>
+          </a:p>
+          <a:p>
+            <a:pPr indent="0" marL="0">
+              <a:buNone/>
+            </a:pPr>
+            <a:r>
+              <a:rPr lang="en-US" sz="1220" dirty="0">
                 <a:solidFill>
                   <a:srgbClr val="17364A"/>
                 </a:solidFill>
@@ -5004,11 +5055,14 @@
               </a:rPr>
               <a:t>AI may simplify uncertainty away.</a:t>
             </a:r>
-            <a:endParaRPr lang="en-US" sz="1380" dirty="0"/>
-          </a:p>
-          <a:p>
-            <a:r>
-              <a:rPr lang="en-US" sz="1380" dirty="0">
+            <a:endParaRPr lang="en-US" sz="1220" dirty="0"/>
+          </a:p>
+          <a:p>
+            <a:pPr indent="0" marL="0">
+              <a:buNone/>
+            </a:pPr>
+            <a:r>
+              <a:rPr lang="en-US" sz="1220" dirty="0">
                 <a:solidFill>
                   <a:srgbClr val="17364A"/>
                 </a:solidFill>
@@ -5018,7 +5072,7 @@
               </a:rPr>
               <a:t>Guardrails include completeness review and required caveat checks.</a:t>
             </a:r>
-            <a:endParaRPr lang="en-US" sz="1380" dirty="0"/>
+            <a:endParaRPr lang="en-US" sz="1220" dirty="0"/>
           </a:p>
         </p:txBody>
       </p:sp>
@@ -5096,17 +5150,17 @@
         </p:nvSpPr>
         <p:spPr>
           <a:xfrm>
-            <a:off x="7799832" y="5001768"/>
-            <a:ext cx="3145536" cy="502920"/>
-          </a:xfrm>
-          <a:prstGeom prst="rect">
-            <a:avLst/>
-          </a:prstGeom>
-          <a:noFill/>
-          <a:ln/>
-        </p:spPr>
-        <p:txBody>
-          <a:bodyPr wrap="square" lIns="0" tIns="0" rIns="0" bIns="0" rtlCol="0" anchor="t">
+            <a:off x="7799832" y="4974336"/>
+            <a:ext cx="3145536" cy="576072"/>
+          </a:xfrm>
+          <a:prstGeom prst="rect">
+            <a:avLst/>
+          </a:prstGeom>
+          <a:noFill/>
+          <a:ln/>
+        </p:spPr>
+        <p:txBody>
+          <a:bodyPr wrap="square" lIns="254" tIns="254" rIns="254" bIns="254" rtlCol="0" anchor="t">
             <a:normAutofit/>
           </a:bodyPr>
           <a:lstStyle/>
@@ -5115,7 +5169,7 @@
               <a:buNone/>
             </a:pPr>
             <a:r>
-              <a:rPr lang="en-US" sz="1550" dirty="0">
+              <a:rPr lang="en-US" sz="1320" dirty="0">
                 <a:solidFill>
                   <a:srgbClr val="17364A"/>
                 </a:solidFill>
@@ -5123,9 +5177,9 @@
                 <a:ea typeface="Aptos" pitchFamily="34" charset="-122"/>
                 <a:cs typeface="Aptos" pitchFamily="34" charset="-120"/>
               </a:rPr>
-              <a:t>Identify what could go wrong, who could be affected, what safeguards are needed, and what evidence should be reviewed before use expands.</a:t>
-            </a:r>
-            <a:endParaRPr lang="en-US" sz="1550" dirty="0"/>
+              <a:t>Identify what could go wrong, who could be affected, what safeguards are needed, and what evidence should be reviewed.</a:t>
+            </a:r>
+            <a:endParaRPr lang="en-US" sz="1320" dirty="0"/>
           </a:p>
         </p:txBody>
       </p:sp>
@@ -5426,49 +5480,58 @@
           <a:ln/>
         </p:spPr>
         <p:txBody>
-          <a:bodyPr wrap="square" lIns="635" tIns="635" rIns="635" bIns="635" rtlCol="0" anchor="t">
+          <a:bodyPr wrap="square" lIns="1016" tIns="1016" rIns="1016" bIns="1016" rtlCol="0" anchor="t">
             <a:normAutofit/>
           </a:bodyPr>
           <a:lstStyle/>
           <a:p>
+            <a:pPr indent="0" marL="0">
+              <a:buNone/>
+            </a:pPr>
             <a:r>
               <a:rPr lang="en-US" sz="2100" dirty="0">
                 <a:solidFill>
-                  <a:srgbClr val="17364A"/>
-                </a:solidFill>
-                <a:latin typeface="Aptos" pitchFamily="34" charset="0"/>
-                <a:ea typeface="Aptos" pitchFamily="34" charset="-122"/>
-                <a:cs typeface="Aptos" pitchFamily="34" charset="-120"/>
-              </a:rPr>
-              <a:t>Privacy exposure.</a:t>
+                  <a:srgbClr val="003A63"/>
+                </a:solidFill>
+                <a:latin typeface="Aptos" pitchFamily="34" charset="0"/>
+                <a:ea typeface="Aptos" pitchFamily="34" charset="-122"/>
+                <a:cs typeface="Aptos" pitchFamily="34" charset="-120"/>
+              </a:rPr>
+              <a:t>• Privacy exposure.</a:t>
             </a:r>
             <a:endParaRPr lang="en-US" sz="2100" dirty="0"/>
           </a:p>
           <a:p>
+            <a:pPr indent="0" marL="0">
+              <a:buNone/>
+            </a:pPr>
             <a:r>
               <a:rPr lang="en-US" sz="2100" dirty="0">
                 <a:solidFill>
-                  <a:srgbClr val="17364A"/>
-                </a:solidFill>
-                <a:latin typeface="Aptos" pitchFamily="34" charset="0"/>
-                <a:ea typeface="Aptos" pitchFamily="34" charset="-122"/>
-                <a:cs typeface="Aptos" pitchFamily="34" charset="-120"/>
-              </a:rPr>
-              <a:t>Prompts or outputs may include sensitive data.</a:t>
+                  <a:srgbClr val="003A63"/>
+                </a:solidFill>
+                <a:latin typeface="Aptos" pitchFamily="34" charset="0"/>
+                <a:ea typeface="Aptos" pitchFamily="34" charset="-122"/>
+                <a:cs typeface="Aptos" pitchFamily="34" charset="-120"/>
+              </a:rPr>
+              <a:t>• Prompts or outputs may include sensitive data.</a:t>
             </a:r>
             <a:endParaRPr lang="en-US" sz="2100" dirty="0"/>
           </a:p>
           <a:p>
+            <a:pPr indent="0" marL="0">
+              <a:buNone/>
+            </a:pPr>
             <a:r>
               <a:rPr lang="en-US" sz="2100" dirty="0">
                 <a:solidFill>
-                  <a:srgbClr val="17364A"/>
-                </a:solidFill>
-                <a:latin typeface="Aptos" pitchFamily="34" charset="0"/>
-                <a:ea typeface="Aptos" pitchFamily="34" charset="-122"/>
-                <a:cs typeface="Aptos" pitchFamily="34" charset="-120"/>
-              </a:rPr>
-              <a:t>Guardrails include approved tools, data-use tiers, redaction, access controls, and records guidance.</a:t>
+                  <a:srgbClr val="003A63"/>
+                </a:solidFill>
+                <a:latin typeface="Aptos" pitchFamily="34" charset="0"/>
+                <a:ea typeface="Aptos" pitchFamily="34" charset="-122"/>
+                <a:cs typeface="Aptos" pitchFamily="34" charset="-120"/>
+              </a:rPr>
+              <a:t>• Guardrails include approved tools, data-use tiers, redaction, access controls, and records.</a:t>
             </a:r>
             <a:endParaRPr lang="en-US" sz="2100" dirty="0"/>
           </a:p>
@@ -5548,17 +5611,17 @@
         </p:nvSpPr>
         <p:spPr>
           <a:xfrm>
-            <a:off x="7799832" y="1828800"/>
-            <a:ext cx="3145536" cy="685800"/>
-          </a:xfrm>
-          <a:prstGeom prst="rect">
-            <a:avLst/>
-          </a:prstGeom>
-          <a:noFill/>
-          <a:ln/>
-        </p:spPr>
-        <p:txBody>
-          <a:bodyPr wrap="square" lIns="0" tIns="0" rIns="0" bIns="0" rtlCol="0" anchor="t">
+            <a:off x="7799832" y="1801368"/>
+            <a:ext cx="3145536" cy="758952"/>
+          </a:xfrm>
+          <a:prstGeom prst="rect">
+            <a:avLst/>
+          </a:prstGeom>
+          <a:noFill/>
+          <a:ln/>
+        </p:spPr>
+        <p:txBody>
+          <a:bodyPr wrap="square" lIns="254" tIns="254" rIns="254" bIns="254" rtlCol="0" anchor="t">
             <a:normAutofit/>
           </a:bodyPr>
           <a:lstStyle/>
@@ -5567,7 +5630,7 @@
               <a:buNone/>
             </a:pPr>
             <a:r>
-              <a:rPr lang="en-US" sz="1550" dirty="0">
+              <a:rPr lang="en-US" sz="1320" dirty="0">
                 <a:solidFill>
                   <a:srgbClr val="17364A"/>
                 </a:solidFill>
@@ -5577,7 +5640,7 @@
               </a:rPr>
               <a:t>Privacy exposure.</a:t>
             </a:r>
-            <a:endParaRPr lang="en-US" sz="1550" dirty="0"/>
+            <a:endParaRPr lang="en-US" sz="1320" dirty="0"/>
           </a:p>
         </p:txBody>
       </p:sp>
@@ -5665,13 +5728,16 @@
           <a:ln/>
         </p:spPr>
         <p:txBody>
-          <a:bodyPr wrap="square" lIns="254" tIns="254" rIns="254" bIns="254" rtlCol="0" anchor="t">
+          <a:bodyPr wrap="square" lIns="508" tIns="508" rIns="508" bIns="508" rtlCol="0" anchor="t">
             <a:normAutofit/>
           </a:bodyPr>
           <a:lstStyle/>
           <a:p>
-            <a:r>
-              <a:rPr lang="en-US" sz="1380" dirty="0">
+            <a:pPr indent="0" marL="0">
+              <a:buNone/>
+            </a:pPr>
+            <a:r>
+              <a:rPr lang="en-US" sz="1220" dirty="0">
                 <a:solidFill>
                   <a:srgbClr val="17364A"/>
                 </a:solidFill>
@@ -5681,11 +5747,14 @@
               </a:rPr>
               <a:t>Privacy exposure.</a:t>
             </a:r>
-            <a:endParaRPr lang="en-US" sz="1380" dirty="0"/>
-          </a:p>
-          <a:p>
-            <a:r>
-              <a:rPr lang="en-US" sz="1380" dirty="0">
+            <a:endParaRPr lang="en-US" sz="1220" dirty="0"/>
+          </a:p>
+          <a:p>
+            <a:pPr indent="0" marL="0">
+              <a:buNone/>
+            </a:pPr>
+            <a:r>
+              <a:rPr lang="en-US" sz="1220" dirty="0">
                 <a:solidFill>
                   <a:srgbClr val="17364A"/>
                 </a:solidFill>
@@ -5695,11 +5764,14 @@
               </a:rPr>
               <a:t>Prompts or outputs may include sensitive data.</a:t>
             </a:r>
-            <a:endParaRPr lang="en-US" sz="1380" dirty="0"/>
-          </a:p>
-          <a:p>
-            <a:r>
-              <a:rPr lang="en-US" sz="1380" dirty="0">
+            <a:endParaRPr lang="en-US" sz="1220" dirty="0"/>
+          </a:p>
+          <a:p>
+            <a:pPr indent="0" marL="0">
+              <a:buNone/>
+            </a:pPr>
+            <a:r>
+              <a:rPr lang="en-US" sz="1220" dirty="0">
                 <a:solidFill>
                   <a:srgbClr val="17364A"/>
                 </a:solidFill>
@@ -5707,9 +5779,9 @@
                 <a:ea typeface="Aptos" pitchFamily="34" charset="-122"/>
                 <a:cs typeface="Aptos" pitchFamily="34" charset="-120"/>
               </a:rPr>
-              <a:t>Guardrails include approved tools, data-use tiers, redaction, access controls, and records.</a:t>
-            </a:r>
-            <a:endParaRPr lang="en-US" sz="1380" dirty="0"/>
+              <a:t>Guardrails include approved tools, data-use tiers, redaction,.</a:t>
+            </a:r>
+            <a:endParaRPr lang="en-US" sz="1220" dirty="0"/>
           </a:p>
         </p:txBody>
       </p:sp>
@@ -5787,17 +5859,17 @@
         </p:nvSpPr>
         <p:spPr>
           <a:xfrm>
-            <a:off x="7799832" y="5001768"/>
-            <a:ext cx="3145536" cy="502920"/>
-          </a:xfrm>
-          <a:prstGeom prst="rect">
-            <a:avLst/>
-          </a:prstGeom>
-          <a:noFill/>
-          <a:ln/>
-        </p:spPr>
-        <p:txBody>
-          <a:bodyPr wrap="square" lIns="0" tIns="0" rIns="0" bIns="0" rtlCol="0" anchor="t">
+            <a:off x="7799832" y="4974336"/>
+            <a:ext cx="3145536" cy="576072"/>
+          </a:xfrm>
+          <a:prstGeom prst="rect">
+            <a:avLst/>
+          </a:prstGeom>
+          <a:noFill/>
+          <a:ln/>
+        </p:spPr>
+        <p:txBody>
+          <a:bodyPr wrap="square" lIns="254" tIns="254" rIns="254" bIns="254" rtlCol="0" anchor="t">
             <a:normAutofit/>
           </a:bodyPr>
           <a:lstStyle/>
@@ -5806,7 +5878,7 @@
               <a:buNone/>
             </a:pPr>
             <a:r>
-              <a:rPr lang="en-US" sz="1550" dirty="0">
+              <a:rPr lang="en-US" sz="1320" dirty="0">
                 <a:solidFill>
                   <a:srgbClr val="17364A"/>
                 </a:solidFill>
@@ -5814,9 +5886,9 @@
                 <a:ea typeface="Aptos" pitchFamily="34" charset="-122"/>
                 <a:cs typeface="Aptos" pitchFamily="34" charset="-120"/>
               </a:rPr>
-              <a:t>Identify what could go wrong, who could be affected, what safeguards are needed, and what evidence should be reviewed before use expands.</a:t>
-            </a:r>
-            <a:endParaRPr lang="en-US" sz="1550" dirty="0"/>
+              <a:t>Identify what could go wrong, who could be affected, what safeguards are needed, and what evidence should be reviewed.</a:t>
+            </a:r>
+            <a:endParaRPr lang="en-US" sz="1320" dirty="0"/>
           </a:p>
         </p:txBody>
       </p:sp>
@@ -6117,49 +6189,58 @@
           <a:ln/>
         </p:spPr>
         <p:txBody>
-          <a:bodyPr wrap="square" lIns="635" tIns="635" rIns="635" bIns="635" rtlCol="0" anchor="t">
+          <a:bodyPr wrap="square" lIns="1016" tIns="1016" rIns="1016" bIns="1016" rtlCol="0" anchor="t">
             <a:normAutofit/>
           </a:bodyPr>
           <a:lstStyle/>
           <a:p>
+            <a:pPr indent="0" marL="0">
+              <a:buNone/>
+            </a:pPr>
             <a:r>
               <a:rPr lang="en-US" sz="2100" dirty="0">
                 <a:solidFill>
-                  <a:srgbClr val="17364A"/>
-                </a:solidFill>
-                <a:latin typeface="Aptos" pitchFamily="34" charset="0"/>
-                <a:ea typeface="Aptos" pitchFamily="34" charset="-122"/>
-                <a:cs typeface="Aptos" pitchFamily="34" charset="-120"/>
-              </a:rPr>
-              <a:t>Generative AI output evaluation applies to drafting, summarization, classification, translation, code.</a:t>
+                  <a:srgbClr val="003A63"/>
+                </a:solidFill>
+                <a:latin typeface="Aptos" pitchFamily="34" charset="0"/>
+                <a:ea typeface="Aptos" pitchFamily="34" charset="-122"/>
+                <a:cs typeface="Aptos" pitchFamily="34" charset="-120"/>
+              </a:rPr>
+              <a:t>• Generative AI output evaluation applies to drafting, summarization, classification,.</a:t>
             </a:r>
             <a:endParaRPr lang="en-US" sz="2100" dirty="0"/>
           </a:p>
           <a:p>
+            <a:pPr indent="0" marL="0">
+              <a:buNone/>
+            </a:pPr>
             <a:r>
               <a:rPr lang="en-US" sz="2100" dirty="0">
                 <a:solidFill>
-                  <a:srgbClr val="17364A"/>
-                </a:solidFill>
-                <a:latin typeface="Aptos" pitchFamily="34" charset="0"/>
-                <a:ea typeface="Aptos" pitchFamily="34" charset="-122"/>
-                <a:cs typeface="Aptos" pitchFamily="34" charset="-120"/>
-              </a:rPr>
-              <a:t>It is also relevant to RAG and agentic workflows because generated text may summarize retrieved sources.</a:t>
+                  <a:srgbClr val="003A63"/>
+                </a:solidFill>
+                <a:latin typeface="Aptos" pitchFamily="34" charset="0"/>
+                <a:ea typeface="Aptos" pitchFamily="34" charset="-122"/>
+                <a:cs typeface="Aptos" pitchFamily="34" charset="-120"/>
+              </a:rPr>
+              <a:t>• It is also relevant to RAG and agentic workflows because generated text may summarize.</a:t>
             </a:r>
             <a:endParaRPr lang="en-US" sz="2100" dirty="0"/>
           </a:p>
           <a:p>
+            <a:pPr indent="0" marL="0">
+              <a:buNone/>
+            </a:pPr>
             <a:r>
               <a:rPr lang="en-US" sz="2100" dirty="0">
                 <a:solidFill>
-                  <a:srgbClr val="17364A"/>
-                </a:solidFill>
-                <a:latin typeface="Aptos" pitchFamily="34" charset="0"/>
-                <a:ea typeface="Aptos" pitchFamily="34" charset="-122"/>
-                <a:cs typeface="Aptos" pitchFamily="34" charset="-120"/>
-              </a:rPr>
-              <a:t>Evaluation should be built into workflow design, not added after deployment.</a:t>
+                  <a:srgbClr val="003A63"/>
+                </a:solidFill>
+                <a:latin typeface="Aptos" pitchFamily="34" charset="0"/>
+                <a:ea typeface="Aptos" pitchFamily="34" charset="-122"/>
+                <a:cs typeface="Aptos" pitchFamily="34" charset="-120"/>
+              </a:rPr>
+              <a:t>• Evaluation should be built into workflow design, not added after deployment.</a:t>
             </a:r>
             <a:endParaRPr lang="en-US" sz="2100" dirty="0"/>
           </a:p>
@@ -6239,17 +6320,17 @@
         </p:nvSpPr>
         <p:spPr>
           <a:xfrm>
-            <a:off x="7799832" y="1828800"/>
-            <a:ext cx="3145536" cy="685800"/>
-          </a:xfrm>
-          <a:prstGeom prst="rect">
-            <a:avLst/>
-          </a:prstGeom>
-          <a:noFill/>
-          <a:ln/>
-        </p:spPr>
-        <p:txBody>
-          <a:bodyPr wrap="square" lIns="0" tIns="0" rIns="0" bIns="0" rtlCol="0" anchor="t">
+            <a:off x="7799832" y="1801368"/>
+            <a:ext cx="3145536" cy="758952"/>
+          </a:xfrm>
+          <a:prstGeom prst="rect">
+            <a:avLst/>
+          </a:prstGeom>
+          <a:noFill/>
+          <a:ln/>
+        </p:spPr>
+        <p:txBody>
+          <a:bodyPr wrap="square" lIns="254" tIns="254" rIns="254" bIns="254" rtlCol="0" anchor="t">
             <a:normAutofit/>
           </a:bodyPr>
           <a:lstStyle/>
@@ -6258,7 +6339,7 @@
               <a:buNone/>
             </a:pPr>
             <a:r>
-              <a:rPr lang="en-US" sz="1550" dirty="0">
+              <a:rPr lang="en-US" sz="1320" dirty="0">
                 <a:solidFill>
                   <a:srgbClr val="17364A"/>
                 </a:solidFill>
@@ -6268,7 +6349,7 @@
               </a:rPr>
               <a:t>Generative AI output evaluation applies to drafting, summarization, classification, translation, code.</a:t>
             </a:r>
-            <a:endParaRPr lang="en-US" sz="1550" dirty="0"/>
+            <a:endParaRPr lang="en-US" sz="1320" dirty="0"/>
           </a:p>
         </p:txBody>
       </p:sp>
@@ -6356,13 +6437,16 @@
           <a:ln/>
         </p:spPr>
         <p:txBody>
-          <a:bodyPr wrap="square" lIns="254" tIns="254" rIns="254" bIns="254" rtlCol="0" anchor="t">
+          <a:bodyPr wrap="square" lIns="508" tIns="508" rIns="508" bIns="508" rtlCol="0" anchor="t">
             <a:normAutofit/>
           </a:bodyPr>
           <a:lstStyle/>
           <a:p>
-            <a:r>
-              <a:rPr lang="en-US" sz="1380" dirty="0">
+            <a:pPr indent="0" marL="0">
+              <a:buNone/>
+            </a:pPr>
+            <a:r>
+              <a:rPr lang="en-US" sz="1220" dirty="0">
                 <a:solidFill>
                   <a:srgbClr val="17364A"/>
                 </a:solidFill>
@@ -6370,13 +6454,16 @@
                 <a:ea typeface="Aptos" pitchFamily="34" charset="-122"/>
                 <a:cs typeface="Aptos" pitchFamily="34" charset="-120"/>
               </a:rPr>
-              <a:t>Generative AI output evaluation applies to drafting, summarization, classification,.</a:t>
-            </a:r>
-            <a:endParaRPr lang="en-US" sz="1380" dirty="0"/>
-          </a:p>
-          <a:p>
-            <a:r>
-              <a:rPr lang="en-US" sz="1380" dirty="0">
+              <a:t>Generative AI output evaluation applies to drafting,.</a:t>
+            </a:r>
+            <a:endParaRPr lang="en-US" sz="1220" dirty="0"/>
+          </a:p>
+          <a:p>
+            <a:pPr indent="0" marL="0">
+              <a:buNone/>
+            </a:pPr>
+            <a:r>
+              <a:rPr lang="en-US" sz="1220" dirty="0">
                 <a:solidFill>
                   <a:srgbClr val="17364A"/>
                 </a:solidFill>
@@ -6384,13 +6471,16 @@
                 <a:ea typeface="Aptos" pitchFamily="34" charset="-122"/>
                 <a:cs typeface="Aptos" pitchFamily="34" charset="-120"/>
               </a:rPr>
-              <a:t>It is also relevant to RAG and agentic workflows because generated text may summarize.</a:t>
-            </a:r>
-            <a:endParaRPr lang="en-US" sz="1380" dirty="0"/>
-          </a:p>
-          <a:p>
-            <a:r>
-              <a:rPr lang="en-US" sz="1380" dirty="0">
+              <a:t>It is also relevant to RAG and agentic workflows because generated.</a:t>
+            </a:r>
+            <a:endParaRPr lang="en-US" sz="1220" dirty="0"/>
+          </a:p>
+          <a:p>
+            <a:pPr indent="0" marL="0">
+              <a:buNone/>
+            </a:pPr>
+            <a:r>
+              <a:rPr lang="en-US" sz="1220" dirty="0">
                 <a:solidFill>
                   <a:srgbClr val="17364A"/>
                 </a:solidFill>
@@ -6398,9 +6488,9 @@
                 <a:ea typeface="Aptos" pitchFamily="34" charset="-122"/>
                 <a:cs typeface="Aptos" pitchFamily="34" charset="-120"/>
               </a:rPr>
-              <a:t>The strongest approach is to create rubrics for specific output types.</a:t>
-            </a:r>
-            <a:endParaRPr lang="en-US" sz="1380" dirty="0"/>
+              <a:t>The strongest approach is to create rubrics for specific output.</a:t>
+            </a:r>
+            <a:endParaRPr lang="en-US" sz="1220" dirty="0"/>
           </a:p>
         </p:txBody>
       </p:sp>
@@ -6478,17 +6568,17 @@
         </p:nvSpPr>
         <p:spPr>
           <a:xfrm>
-            <a:off x="7799832" y="5001768"/>
-            <a:ext cx="3145536" cy="502920"/>
-          </a:xfrm>
-          <a:prstGeom prst="rect">
-            <a:avLst/>
-          </a:prstGeom>
-          <a:noFill/>
-          <a:ln/>
-        </p:spPr>
-        <p:txBody>
-          <a:bodyPr wrap="square" lIns="0" tIns="0" rIns="0" bIns="0" rtlCol="0" anchor="t">
+            <a:off x="7799832" y="4974336"/>
+            <a:ext cx="3145536" cy="576072"/>
+          </a:xfrm>
+          <a:prstGeom prst="rect">
+            <a:avLst/>
+          </a:prstGeom>
+          <a:noFill/>
+          <a:ln/>
+        </p:spPr>
+        <p:txBody>
+          <a:bodyPr wrap="square" lIns="254" tIns="254" rIns="254" bIns="254" rtlCol="0" anchor="t">
             <a:normAutofit/>
           </a:bodyPr>
           <a:lstStyle/>
@@ -6497,7 +6587,7 @@
               <a:buNone/>
             </a:pPr>
             <a:r>
-              <a:rPr lang="en-US" sz="1550" dirty="0">
+              <a:rPr lang="en-US" sz="1320" dirty="0">
                 <a:solidFill>
                   <a:srgbClr val="17364A"/>
                 </a:solidFill>
@@ -6505,9 +6595,9 @@
                 <a:ea typeface="Aptos" pitchFamily="34" charset="-122"/>
                 <a:cs typeface="Aptos" pitchFamily="34" charset="-120"/>
               </a:rPr>
-              <a:t>Connect the concept to data quality, model performance, validation evidence, monitoring measures, and decisions that remain under human control.</a:t>
-            </a:r>
-            <a:endParaRPr lang="en-US" sz="1550" dirty="0"/>
+              <a:t>Connect the concept to data quality, model performance, validation evidence, monitoring measures, and decisions that.</a:t>
+            </a:r>
+            <a:endParaRPr lang="en-US" sz="1320" dirty="0"/>
           </a:p>
         </p:txBody>
       </p:sp>
@@ -6808,49 +6898,58 @@
           <a:ln/>
         </p:spPr>
         <p:txBody>
-          <a:bodyPr wrap="square" lIns="635" tIns="635" rIns="635" bIns="635" rtlCol="0" anchor="t">
+          <a:bodyPr wrap="square" lIns="1016" tIns="1016" rIns="1016" bIns="1016" rtlCol="0" anchor="t">
             <a:normAutofit/>
           </a:bodyPr>
           <a:lstStyle/>
           <a:p>
+            <a:pPr indent="0" marL="0">
+              <a:buNone/>
+            </a:pPr>
             <a:r>
               <a:rPr lang="en-US" sz="2100" dirty="0">
                 <a:solidFill>
-                  <a:srgbClr val="17364A"/>
-                </a:solidFill>
-                <a:latin typeface="Aptos" pitchFamily="34" charset="0"/>
-                <a:ea typeface="Aptos" pitchFamily="34" charset="-122"/>
-                <a:cs typeface="Aptos" pitchFamily="34" charset="-120"/>
-              </a:rPr>
-              <a:t>What type of generative AI output is being evaluated?</a:t>
+                  <a:srgbClr val="003A63"/>
+                </a:solidFill>
+                <a:latin typeface="Aptos" pitchFamily="34" charset="0"/>
+                <a:ea typeface="Aptos" pitchFamily="34" charset="-122"/>
+                <a:cs typeface="Aptos" pitchFamily="34" charset="-120"/>
+              </a:rPr>
+              <a:t>• What type of generative AI output is being evaluated?</a:t>
             </a:r>
             <a:endParaRPr lang="en-US" sz="2100" dirty="0"/>
           </a:p>
           <a:p>
+            <a:pPr indent="0" marL="0">
+              <a:buNone/>
+            </a:pPr>
             <a:r>
               <a:rPr lang="en-US" sz="2100" dirty="0">
                 <a:solidFill>
-                  <a:srgbClr val="17364A"/>
-                </a:solidFill>
-                <a:latin typeface="Aptos" pitchFamily="34" charset="0"/>
-                <a:ea typeface="Aptos" pitchFamily="34" charset="-122"/>
-                <a:cs typeface="Aptos" pitchFamily="34" charset="-120"/>
-              </a:rPr>
-              <a:t>What source material should be used to verify the output?</a:t>
+                  <a:srgbClr val="003A63"/>
+                </a:solidFill>
+                <a:latin typeface="Aptos" pitchFamily="34" charset="0"/>
+                <a:ea typeface="Aptos" pitchFamily="34" charset="-122"/>
+                <a:cs typeface="Aptos" pitchFamily="34" charset="-120"/>
+              </a:rPr>
+              <a:t>• What source material should be used to verify the output?</a:t>
             </a:r>
             <a:endParaRPr lang="en-US" sz="2100" dirty="0"/>
           </a:p>
           <a:p>
+            <a:pPr indent="0" marL="0">
+              <a:buNone/>
+            </a:pPr>
             <a:r>
               <a:rPr lang="en-US" sz="2100" dirty="0">
                 <a:solidFill>
-                  <a:srgbClr val="17364A"/>
-                </a:solidFill>
-                <a:latin typeface="Aptos" pitchFamily="34" charset="0"/>
-                <a:ea typeface="Aptos" pitchFamily="34" charset="-122"/>
-                <a:cs typeface="Aptos" pitchFamily="34" charset="-120"/>
-              </a:rPr>
-              <a:t>What errors or omissions would be most harmful?</a:t>
+                  <a:srgbClr val="003A63"/>
+                </a:solidFill>
+                <a:latin typeface="Aptos" pitchFamily="34" charset="0"/>
+                <a:ea typeface="Aptos" pitchFamily="34" charset="-122"/>
+                <a:cs typeface="Aptos" pitchFamily="34" charset="-120"/>
+              </a:rPr>
+              <a:t>• What errors or omissions would be most harmful?</a:t>
             </a:r>
             <a:endParaRPr lang="en-US" sz="2100" dirty="0"/>
           </a:p>
@@ -6930,17 +7029,17 @@
         </p:nvSpPr>
         <p:spPr>
           <a:xfrm>
-            <a:off x="7799832" y="1828800"/>
-            <a:ext cx="3145536" cy="685800"/>
-          </a:xfrm>
-          <a:prstGeom prst="rect">
-            <a:avLst/>
-          </a:prstGeom>
-          <a:noFill/>
-          <a:ln/>
-        </p:spPr>
-        <p:txBody>
-          <a:bodyPr wrap="square" lIns="0" tIns="0" rIns="0" bIns="0" rtlCol="0" anchor="t">
+            <a:off x="7799832" y="1801368"/>
+            <a:ext cx="3145536" cy="758952"/>
+          </a:xfrm>
+          <a:prstGeom prst="rect">
+            <a:avLst/>
+          </a:prstGeom>
+          <a:noFill/>
+          <a:ln/>
+        </p:spPr>
+        <p:txBody>
+          <a:bodyPr wrap="square" lIns="254" tIns="254" rIns="254" bIns="254" rtlCol="0" anchor="t">
             <a:normAutofit/>
           </a:bodyPr>
           <a:lstStyle/>
@@ -6949,7 +7048,7 @@
               <a:buNone/>
             </a:pPr>
             <a:r>
-              <a:rPr lang="en-US" sz="1550" dirty="0">
+              <a:rPr lang="en-US" sz="1320" dirty="0">
                 <a:solidFill>
                   <a:srgbClr val="17364A"/>
                 </a:solidFill>
@@ -6959,7 +7058,7 @@
               </a:rPr>
               <a:t>What type of generative AI output is being evaluated?</a:t>
             </a:r>
-            <a:endParaRPr lang="en-US" sz="1550" dirty="0"/>
+            <a:endParaRPr lang="en-US" sz="1320" dirty="0"/>
           </a:p>
         </p:txBody>
       </p:sp>
@@ -7047,13 +7146,16 @@
           <a:ln/>
         </p:spPr>
         <p:txBody>
-          <a:bodyPr wrap="square" lIns="254" tIns="254" rIns="254" bIns="254" rtlCol="0" anchor="t">
+          <a:bodyPr wrap="square" lIns="508" tIns="508" rIns="508" bIns="508" rtlCol="0" anchor="t">
             <a:normAutofit/>
           </a:bodyPr>
           <a:lstStyle/>
           <a:p>
-            <a:r>
-              <a:rPr lang="en-US" sz="1380" dirty="0">
+            <a:pPr indent="0" marL="0">
+              <a:buNone/>
+            </a:pPr>
+            <a:r>
+              <a:rPr lang="en-US" sz="1220" dirty="0">
                 <a:solidFill>
                   <a:srgbClr val="17364A"/>
                 </a:solidFill>
@@ -7063,11 +7165,14 @@
               </a:rPr>
               <a:t>What type of generative AI output is being evaluated?</a:t>
             </a:r>
-            <a:endParaRPr lang="en-US" sz="1380" dirty="0"/>
-          </a:p>
-          <a:p>
-            <a:r>
-              <a:rPr lang="en-US" sz="1380" dirty="0">
+            <a:endParaRPr lang="en-US" sz="1220" dirty="0"/>
+          </a:p>
+          <a:p>
+            <a:pPr indent="0" marL="0">
+              <a:buNone/>
+            </a:pPr>
+            <a:r>
+              <a:rPr lang="en-US" sz="1220" dirty="0">
                 <a:solidFill>
                   <a:srgbClr val="17364A"/>
                 </a:solidFill>
@@ -7077,11 +7182,14 @@
               </a:rPr>
               <a:t>What source material should be used to verify the output?</a:t>
             </a:r>
-            <a:endParaRPr lang="en-US" sz="1380" dirty="0"/>
-          </a:p>
-          <a:p>
-            <a:r>
-              <a:rPr lang="en-US" sz="1380" dirty="0">
+            <a:endParaRPr lang="en-US" sz="1220" dirty="0"/>
+          </a:p>
+          <a:p>
+            <a:pPr indent="0" marL="0">
+              <a:buNone/>
+            </a:pPr>
+            <a:r>
+              <a:rPr lang="en-US" sz="1220" dirty="0">
                 <a:solidFill>
                   <a:srgbClr val="17364A"/>
                 </a:solidFill>
@@ -7091,7 +7199,7 @@
               </a:rPr>
               <a:t>What errors or omissions would be most harmful?</a:t>
             </a:r>
-            <a:endParaRPr lang="en-US" sz="1380" dirty="0"/>
+            <a:endParaRPr lang="en-US" sz="1220" dirty="0"/>
           </a:p>
         </p:txBody>
       </p:sp>
@@ -7169,17 +7277,17 @@
         </p:nvSpPr>
         <p:spPr>
           <a:xfrm>
-            <a:off x="7799832" y="5001768"/>
-            <a:ext cx="3145536" cy="502920"/>
-          </a:xfrm>
-          <a:prstGeom prst="rect">
-            <a:avLst/>
-          </a:prstGeom>
-          <a:noFill/>
-          <a:ln/>
-        </p:spPr>
-        <p:txBody>
-          <a:bodyPr wrap="square" lIns="0" tIns="0" rIns="0" bIns="0" rtlCol="0" anchor="t">
+            <a:off x="7799832" y="4974336"/>
+            <a:ext cx="3145536" cy="576072"/>
+          </a:xfrm>
+          <a:prstGeom prst="rect">
+            <a:avLst/>
+          </a:prstGeom>
+          <a:noFill/>
+          <a:ln/>
+        </p:spPr>
+        <p:txBody>
+          <a:bodyPr wrap="square" lIns="254" tIns="254" rIns="254" bIns="254" rtlCol="0" anchor="t">
             <a:normAutofit/>
           </a:bodyPr>
           <a:lstStyle/>
@@ -7188,7 +7296,7 @@
               <a:buNone/>
             </a:pPr>
             <a:r>
-              <a:rPr lang="en-US" sz="1550" dirty="0">
+              <a:rPr lang="en-US" sz="1320" dirty="0">
                 <a:solidFill>
                   <a:srgbClr val="17364A"/>
                 </a:solidFill>
@@ -7196,9 +7304,9 @@
                 <a:ea typeface="Aptos" pitchFamily="34" charset="-122"/>
                 <a:cs typeface="Aptos" pitchFamily="34" charset="-120"/>
               </a:rPr>
-              <a:t>Connect the concept to data quality, model performance, validation evidence, monitoring measures, and decisions that remain under human control.</a:t>
-            </a:r>
-            <a:endParaRPr lang="en-US" sz="1550" dirty="0"/>
+              <a:t>Connect the concept to data quality, model performance, validation evidence, monitoring measures, and decisions that.</a:t>
+            </a:r>
+            <a:endParaRPr lang="en-US" sz="1320" dirty="0"/>
           </a:p>
         </p:txBody>
       </p:sp>
@@ -7499,35 +7607,41 @@
           <a:ln/>
         </p:spPr>
         <p:txBody>
-          <a:bodyPr wrap="square" lIns="635" tIns="635" rIns="635" bIns="635" rtlCol="0" anchor="t">
+          <a:bodyPr wrap="square" lIns="1016" tIns="1016" rIns="1016" bIns="1016" rtlCol="0" anchor="t">
             <a:normAutofit/>
           </a:bodyPr>
           <a:lstStyle/>
           <a:p>
+            <a:pPr indent="0" marL="0">
+              <a:buNone/>
+            </a:pPr>
             <a:r>
               <a:rPr lang="en-US" sz="2100" dirty="0">
                 <a:solidFill>
-                  <a:srgbClr val="17364A"/>
-                </a:solidFill>
-                <a:latin typeface="Aptos" pitchFamily="34" charset="0"/>
-                <a:ea typeface="Aptos" pitchFamily="34" charset="-122"/>
-                <a:cs typeface="Aptos" pitchFamily="34" charset="-120"/>
-              </a:rPr>
-              <a:t>What review criteria are needed for equity, accessibility, language, and tone?</a:t>
+                  <a:srgbClr val="003A63"/>
+                </a:solidFill>
+                <a:latin typeface="Aptos" pitchFamily="34" charset="0"/>
+                <a:ea typeface="Aptos" pitchFamily="34" charset="-122"/>
+                <a:cs typeface="Aptos" pitchFamily="34" charset="-120"/>
+              </a:rPr>
+              <a:t>• What review criteria are needed for equity, accessibility, language, and tone?</a:t>
             </a:r>
             <a:endParaRPr lang="en-US" sz="2100" dirty="0"/>
           </a:p>
           <a:p>
+            <a:pPr indent="0" marL="0">
+              <a:buNone/>
+            </a:pPr>
             <a:r>
               <a:rPr lang="en-US" sz="2100" dirty="0">
                 <a:solidFill>
-                  <a:srgbClr val="17364A"/>
-                </a:solidFill>
-                <a:latin typeface="Aptos" pitchFamily="34" charset="0"/>
-                <a:ea typeface="Aptos" pitchFamily="34" charset="-122"/>
-                <a:cs typeface="Aptos" pitchFamily="34" charset="-120"/>
-              </a:rPr>
-              <a:t>What documentation is required before the output can be used?</a:t>
+                  <a:srgbClr val="003A63"/>
+                </a:solidFill>
+                <a:latin typeface="Aptos" pitchFamily="34" charset="0"/>
+                <a:ea typeface="Aptos" pitchFamily="34" charset="-122"/>
+                <a:cs typeface="Aptos" pitchFamily="34" charset="-120"/>
+              </a:rPr>
+              <a:t>• What documentation is required before the output can be used?</a:t>
             </a:r>
             <a:endParaRPr lang="en-US" sz="2100" dirty="0"/>
           </a:p>
@@ -7607,17 +7721,17 @@
         </p:nvSpPr>
         <p:spPr>
           <a:xfrm>
-            <a:off x="7799832" y="1828800"/>
-            <a:ext cx="3145536" cy="685800"/>
-          </a:xfrm>
-          <a:prstGeom prst="rect">
-            <a:avLst/>
-          </a:prstGeom>
-          <a:noFill/>
-          <a:ln/>
-        </p:spPr>
-        <p:txBody>
-          <a:bodyPr wrap="square" lIns="0" tIns="0" rIns="0" bIns="0" rtlCol="0" anchor="t">
+            <a:off x="7799832" y="1801368"/>
+            <a:ext cx="3145536" cy="758952"/>
+          </a:xfrm>
+          <a:prstGeom prst="rect">
+            <a:avLst/>
+          </a:prstGeom>
+          <a:noFill/>
+          <a:ln/>
+        </p:spPr>
+        <p:txBody>
+          <a:bodyPr wrap="square" lIns="254" tIns="254" rIns="254" bIns="254" rtlCol="0" anchor="t">
             <a:normAutofit/>
           </a:bodyPr>
           <a:lstStyle/>
@@ -7626,7 +7740,7 @@
               <a:buNone/>
             </a:pPr>
             <a:r>
-              <a:rPr lang="en-US" sz="1550" dirty="0">
+              <a:rPr lang="en-US" sz="1320" dirty="0">
                 <a:solidFill>
                   <a:srgbClr val="17364A"/>
                 </a:solidFill>
@@ -7636,7 +7750,7 @@
               </a:rPr>
               <a:t>What review criteria are needed for equity, accessibility, language, and tone?</a:t>
             </a:r>
-            <a:endParaRPr lang="en-US" sz="1550" dirty="0"/>
+            <a:endParaRPr lang="en-US" sz="1320" dirty="0"/>
           </a:p>
         </p:txBody>
       </p:sp>
@@ -7724,13 +7838,16 @@
           <a:ln/>
         </p:spPr>
         <p:txBody>
-          <a:bodyPr wrap="square" lIns="254" tIns="254" rIns="254" bIns="254" rtlCol="0" anchor="t">
+          <a:bodyPr wrap="square" lIns="508" tIns="508" rIns="508" bIns="508" rtlCol="0" anchor="t">
             <a:normAutofit/>
           </a:bodyPr>
           <a:lstStyle/>
           <a:p>
-            <a:r>
-              <a:rPr lang="en-US" sz="1380" dirty="0">
+            <a:pPr indent="0" marL="0">
+              <a:buNone/>
+            </a:pPr>
+            <a:r>
+              <a:rPr lang="en-US" sz="1220" dirty="0">
                 <a:solidFill>
                   <a:srgbClr val="17364A"/>
                 </a:solidFill>
@@ -7738,13 +7855,16 @@
                 <a:ea typeface="Aptos" pitchFamily="34" charset="-122"/>
                 <a:cs typeface="Aptos" pitchFamily="34" charset="-120"/>
               </a:rPr>
-              <a:t>What review criteria are needed for equity, accessibility, language, and tone?</a:t>
-            </a:r>
-            <a:endParaRPr lang="en-US" sz="1380" dirty="0"/>
-          </a:p>
-          <a:p>
-            <a:r>
-              <a:rPr lang="en-US" sz="1380" dirty="0">
+              <a:t>What review criteria are needed for equity, accessibility,.</a:t>
+            </a:r>
+            <a:endParaRPr lang="en-US" sz="1220" dirty="0"/>
+          </a:p>
+          <a:p>
+            <a:pPr indent="0" marL="0">
+              <a:buNone/>
+            </a:pPr>
+            <a:r>
+              <a:rPr lang="en-US" sz="1220" dirty="0">
                 <a:solidFill>
                   <a:srgbClr val="17364A"/>
                 </a:solidFill>
@@ -7754,7 +7874,7 @@
               </a:rPr>
               <a:t>What documentation is required before the output can be used?</a:t>
             </a:r>
-            <a:endParaRPr lang="en-US" sz="1380" dirty="0"/>
+            <a:endParaRPr lang="en-US" sz="1220" dirty="0"/>
           </a:p>
         </p:txBody>
       </p:sp>
@@ -7832,17 +7952,17 @@
         </p:nvSpPr>
         <p:spPr>
           <a:xfrm>
-            <a:off x="7799832" y="5001768"/>
-            <a:ext cx="3145536" cy="502920"/>
-          </a:xfrm>
-          <a:prstGeom prst="rect">
-            <a:avLst/>
-          </a:prstGeom>
-          <a:noFill/>
-          <a:ln/>
-        </p:spPr>
-        <p:txBody>
-          <a:bodyPr wrap="square" lIns="0" tIns="0" rIns="0" bIns="0" rtlCol="0" anchor="t">
+            <a:off x="7799832" y="4974336"/>
+            <a:ext cx="3145536" cy="576072"/>
+          </a:xfrm>
+          <a:prstGeom prst="rect">
+            <a:avLst/>
+          </a:prstGeom>
+          <a:noFill/>
+          <a:ln/>
+        </p:spPr>
+        <p:txBody>
+          <a:bodyPr wrap="square" lIns="254" tIns="254" rIns="254" bIns="254" rtlCol="0" anchor="t">
             <a:normAutofit/>
           </a:bodyPr>
           <a:lstStyle/>
@@ -7851,7 +7971,7 @@
               <a:buNone/>
             </a:pPr>
             <a:r>
-              <a:rPr lang="en-US" sz="1550" dirty="0">
+              <a:rPr lang="en-US" sz="1320" dirty="0">
                 <a:solidFill>
                   <a:srgbClr val="17364A"/>
                 </a:solidFill>
@@ -7859,9 +7979,9 @@
                 <a:ea typeface="Aptos" pitchFamily="34" charset="-122"/>
                 <a:cs typeface="Aptos" pitchFamily="34" charset="-120"/>
               </a:rPr>
-              <a:t>Connect the concept to data quality, model performance, validation evidence, monitoring measures, and decisions that remain under human control.</a:t>
-            </a:r>
-            <a:endParaRPr lang="en-US" sz="1550" dirty="0"/>
+              <a:t>Connect the concept to data quality, model performance, validation evidence, monitoring measures, and decisions that.</a:t>
+            </a:r>
+            <a:endParaRPr lang="en-US" sz="1320" dirty="0"/>
           </a:p>
         </p:txBody>
       </p:sp>
@@ -8162,49 +8282,58 @@
           <a:ln/>
         </p:spPr>
         <p:txBody>
-          <a:bodyPr wrap="square" lIns="635" tIns="635" rIns="635" bIns="635" rtlCol="0" anchor="t">
+          <a:bodyPr wrap="square" lIns="1016" tIns="1016" rIns="1016" bIns="1016" rtlCol="0" anchor="t">
             <a:normAutofit/>
           </a:bodyPr>
           <a:lstStyle/>
           <a:p>
+            <a:pPr indent="0" marL="0">
+              <a:buNone/>
+            </a:pPr>
             <a:r>
               <a:rPr lang="en-US" sz="2100" dirty="0">
                 <a:solidFill>
-                  <a:srgbClr val="17364A"/>
-                </a:solidFill>
-                <a:latin typeface="Aptos" pitchFamily="34" charset="0"/>
-                <a:ea typeface="Aptos" pitchFamily="34" charset="-122"/>
-                <a:cs typeface="Aptos" pitchFamily="34" charset="-120"/>
-              </a:rPr>
-              <a:t>Create a generative AI output evaluation rubric for one public health use case.</a:t>
+                  <a:srgbClr val="003A63"/>
+                </a:solidFill>
+                <a:latin typeface="Aptos" pitchFamily="34" charset="0"/>
+                <a:ea typeface="Aptos" pitchFamily="34" charset="-122"/>
+                <a:cs typeface="Aptos" pitchFamily="34" charset="-120"/>
+              </a:rPr>
+              <a:t>• Create a generative AI output evaluation rubric for one public health use case.</a:t>
             </a:r>
             <a:endParaRPr lang="en-US" sz="2100" dirty="0"/>
           </a:p>
           <a:p>
+            <a:pPr indent="0" marL="0">
+              <a:buNone/>
+            </a:pPr>
             <a:r>
               <a:rPr lang="en-US" sz="2100" dirty="0">
                 <a:solidFill>
-                  <a:srgbClr val="17364A"/>
-                </a:solidFill>
-                <a:latin typeface="Aptos" pitchFamily="34" charset="0"/>
-                <a:ea typeface="Aptos" pitchFamily="34" charset="-122"/>
-                <a:cs typeface="Aptos" pitchFamily="34" charset="-120"/>
-              </a:rPr>
-              <a:t>Include intended use, source verification, factuality, completeness, unsupported claims, omissions,.</a:t>
+                  <a:srgbClr val="003A63"/>
+                </a:solidFill>
+                <a:latin typeface="Aptos" pitchFamily="34" charset="0"/>
+                <a:ea typeface="Aptos" pitchFamily="34" charset="-122"/>
+                <a:cs typeface="Aptos" pitchFamily="34" charset="-120"/>
+              </a:rPr>
+              <a:t>• Include intended use, source verification, factuality, completeness, unsupported claims,.</a:t>
             </a:r>
             <a:endParaRPr lang="en-US" sz="2100" dirty="0"/>
           </a:p>
           <a:p>
+            <a:pPr indent="0" marL="0">
+              <a:buNone/>
+            </a:pPr>
             <a:r>
               <a:rPr lang="en-US" sz="2100" dirty="0">
                 <a:solidFill>
-                  <a:srgbClr val="17364A"/>
-                </a:solidFill>
-                <a:latin typeface="Aptos" pitchFamily="34" charset="0"/>
-                <a:ea typeface="Aptos" pitchFamily="34" charset="-122"/>
-                <a:cs typeface="Aptos" pitchFamily="34" charset="-120"/>
-              </a:rPr>
-              <a:t>Then apply the rubric to a sample AI-generated output and document whether the output should be.</a:t>
+                  <a:srgbClr val="003A63"/>
+                </a:solidFill>
+                <a:latin typeface="Aptos" pitchFamily="34" charset="0"/>
+                <a:ea typeface="Aptos" pitchFamily="34" charset="-122"/>
+                <a:cs typeface="Aptos" pitchFamily="34" charset="-120"/>
+              </a:rPr>
+              <a:t>• Then apply the rubric to a sample AI-generated output and document whether the output should be.</a:t>
             </a:r>
             <a:endParaRPr lang="en-US" sz="2100" dirty="0"/>
           </a:p>
@@ -8284,17 +8413,17 @@
         </p:nvSpPr>
         <p:spPr>
           <a:xfrm>
-            <a:off x="7799832" y="1828800"/>
-            <a:ext cx="3145536" cy="685800"/>
-          </a:xfrm>
-          <a:prstGeom prst="rect">
-            <a:avLst/>
-          </a:prstGeom>
-          <a:noFill/>
-          <a:ln/>
-        </p:spPr>
-        <p:txBody>
-          <a:bodyPr wrap="square" lIns="0" tIns="0" rIns="0" bIns="0" rtlCol="0" anchor="t">
+            <a:off x="7799832" y="1801368"/>
+            <a:ext cx="3145536" cy="758952"/>
+          </a:xfrm>
+          <a:prstGeom prst="rect">
+            <a:avLst/>
+          </a:prstGeom>
+          <a:noFill/>
+          <a:ln/>
+        </p:spPr>
+        <p:txBody>
+          <a:bodyPr wrap="square" lIns="254" tIns="254" rIns="254" bIns="254" rtlCol="0" anchor="t">
             <a:normAutofit/>
           </a:bodyPr>
           <a:lstStyle/>
@@ -8303,7 +8432,7 @@
               <a:buNone/>
             </a:pPr>
             <a:r>
-              <a:rPr lang="en-US" sz="1550" dirty="0">
+              <a:rPr lang="en-US" sz="1320" dirty="0">
                 <a:solidFill>
                   <a:srgbClr val="17364A"/>
                 </a:solidFill>
@@ -8313,7 +8442,7 @@
               </a:rPr>
               <a:t>Create a generative AI output evaluation rubric for one public health use case.</a:t>
             </a:r>
-            <a:endParaRPr lang="en-US" sz="1550" dirty="0"/>
+            <a:endParaRPr lang="en-US" sz="1320" dirty="0"/>
           </a:p>
         </p:txBody>
       </p:sp>
@@ -8401,13 +8530,16 @@
           <a:ln/>
         </p:spPr>
         <p:txBody>
-          <a:bodyPr wrap="square" lIns="254" tIns="254" rIns="254" bIns="254" rtlCol="0" anchor="t">
+          <a:bodyPr wrap="square" lIns="508" tIns="508" rIns="508" bIns="508" rtlCol="0" anchor="t">
             <a:normAutofit/>
           </a:bodyPr>
           <a:lstStyle/>
           <a:p>
-            <a:r>
-              <a:rPr lang="en-US" sz="1380" dirty="0">
+            <a:pPr indent="0" marL="0">
+              <a:buNone/>
+            </a:pPr>
+            <a:r>
+              <a:rPr lang="en-US" sz="1220" dirty="0">
                 <a:solidFill>
                   <a:srgbClr val="17364A"/>
                 </a:solidFill>
@@ -8415,13 +8547,16 @@
                 <a:ea typeface="Aptos" pitchFamily="34" charset="-122"/>
                 <a:cs typeface="Aptos" pitchFamily="34" charset="-120"/>
               </a:rPr>
-              <a:t>Include intended use, source verification, factuality, completeness, unsupported claims,.</a:t>
-            </a:r>
-            <a:endParaRPr lang="en-US" sz="1380" dirty="0"/>
-          </a:p>
-          <a:p>
-            <a:r>
-              <a:rPr lang="en-US" sz="1380" dirty="0">
+              <a:t>Include intended use, source verification, factuality,.</a:t>
+            </a:r>
+            <a:endParaRPr lang="en-US" sz="1220" dirty="0"/>
+          </a:p>
+          <a:p>
+            <a:pPr indent="0" marL="0">
+              <a:buNone/>
+            </a:pPr>
+            <a:r>
+              <a:rPr lang="en-US" sz="1220" dirty="0">
                 <a:solidFill>
                   <a:srgbClr val="17364A"/>
                 </a:solidFill>
@@ -8429,9 +8564,9 @@
                 <a:ea typeface="Aptos" pitchFamily="34" charset="-122"/>
                 <a:cs typeface="Aptos" pitchFamily="34" charset="-120"/>
               </a:rPr>
-              <a:t>Then apply the rubric to a sample AI-generated output and document whether the output.</a:t>
-            </a:r>
-            <a:endParaRPr lang="en-US" sz="1380" dirty="0"/>
+              <a:t>Then apply the rubric to a sample AI-generated output and document.</a:t>
+            </a:r>
+            <a:endParaRPr lang="en-US" sz="1220" dirty="0"/>
           </a:p>
         </p:txBody>
       </p:sp>
@@ -8509,17 +8644,17 @@
         </p:nvSpPr>
         <p:spPr>
           <a:xfrm>
-            <a:off x="7799832" y="5001768"/>
-            <a:ext cx="3145536" cy="502920"/>
-          </a:xfrm>
-          <a:prstGeom prst="rect">
-            <a:avLst/>
-          </a:prstGeom>
-          <a:noFill/>
-          <a:ln/>
-        </p:spPr>
-        <p:txBody>
-          <a:bodyPr wrap="square" lIns="0" tIns="0" rIns="0" bIns="0" rtlCol="0" anchor="t">
+            <a:off x="7799832" y="4974336"/>
+            <a:ext cx="3145536" cy="576072"/>
+          </a:xfrm>
+          <a:prstGeom prst="rect">
+            <a:avLst/>
+          </a:prstGeom>
+          <a:noFill/>
+          <a:ln/>
+        </p:spPr>
+        <p:txBody>
+          <a:bodyPr wrap="square" lIns="254" tIns="254" rIns="254" bIns="254" rtlCol="0" anchor="t">
             <a:normAutofit/>
           </a:bodyPr>
           <a:lstStyle/>
@@ -8528,7 +8663,7 @@
               <a:buNone/>
             </a:pPr>
             <a:r>
-              <a:rPr lang="en-US" sz="1550" dirty="0">
+              <a:rPr lang="en-US" sz="1320" dirty="0">
                 <a:solidFill>
                   <a:srgbClr val="17364A"/>
                 </a:solidFill>
@@ -8536,9 +8671,9 @@
                 <a:ea typeface="Aptos" pitchFamily="34" charset="-122"/>
                 <a:cs typeface="Aptos" pitchFamily="34" charset="-120"/>
               </a:rPr>
-              <a:t>Use the assignment to test whether you can explain the concept, apply it to a realistic public health situation, and identify what would need review before the work moves forward.</a:t>
-            </a:r>
-            <a:endParaRPr lang="en-US" sz="1550" dirty="0"/>
+              <a:t>Use the assignment to test whether you can explain the concept, apply it to a realistic public health situation, and.</a:t>
+            </a:r>
+            <a:endParaRPr lang="en-US" sz="1320" dirty="0"/>
           </a:p>
         </p:txBody>
       </p:sp>
@@ -8839,49 +8974,58 @@
           <a:ln/>
         </p:spPr>
         <p:txBody>
-          <a:bodyPr wrap="square" lIns="635" tIns="635" rIns="635" bIns="635" rtlCol="0" anchor="t">
+          <a:bodyPr wrap="square" lIns="1016" tIns="1016" rIns="1016" bIns="1016" rtlCol="0" anchor="t">
             <a:normAutofit/>
           </a:bodyPr>
           <a:lstStyle/>
           <a:p>
+            <a:pPr indent="0" marL="0">
+              <a:buNone/>
+            </a:pPr>
             <a:r>
               <a:rPr lang="en-US" sz="2100" dirty="0">
                 <a:solidFill>
-                  <a:srgbClr val="17364A"/>
-                </a:solidFill>
-                <a:latin typeface="Aptos" pitchFamily="34" charset="0"/>
-                <a:ea typeface="Aptos" pitchFamily="34" charset="-122"/>
-                <a:cs typeface="Aptos" pitchFamily="34" charset="-120"/>
-              </a:rPr>
-              <a:t>Generative AI output evaluation rubric</a:t>
+                  <a:srgbClr val="003A63"/>
+                </a:solidFill>
+                <a:latin typeface="Aptos" pitchFamily="34" charset="0"/>
+                <a:ea typeface="Aptos" pitchFamily="34" charset="-122"/>
+                <a:cs typeface="Aptos" pitchFamily="34" charset="-120"/>
+              </a:rPr>
+              <a:t>• Generative AI output evaluation rubric</a:t>
             </a:r>
             <a:endParaRPr lang="en-US" sz="2100" dirty="0"/>
           </a:p>
           <a:p>
+            <a:pPr indent="0" marL="0">
+              <a:buNone/>
+            </a:pPr>
             <a:r>
               <a:rPr lang="en-US" sz="2100" dirty="0">
                 <a:solidFill>
-                  <a:srgbClr val="17364A"/>
-                </a:solidFill>
-                <a:latin typeface="Aptos" pitchFamily="34" charset="0"/>
-                <a:ea typeface="Aptos" pitchFamily="34" charset="-122"/>
-                <a:cs typeface="Aptos" pitchFamily="34" charset="-120"/>
-              </a:rPr>
-              <a:t>Completed sample review</a:t>
+                  <a:srgbClr val="003A63"/>
+                </a:solidFill>
+                <a:latin typeface="Aptos" pitchFamily="34" charset="0"/>
+                <a:ea typeface="Aptos" pitchFamily="34" charset="-122"/>
+                <a:cs typeface="Aptos" pitchFamily="34" charset="-120"/>
+              </a:rPr>
+              <a:t>• Completed sample review</a:t>
             </a:r>
             <a:endParaRPr lang="en-US" sz="2100" dirty="0"/>
           </a:p>
           <a:p>
+            <a:pPr indent="0" marL="0">
+              <a:buNone/>
+            </a:pPr>
             <a:r>
               <a:rPr lang="en-US" sz="2100" dirty="0">
                 <a:solidFill>
-                  <a:srgbClr val="17364A"/>
-                </a:solidFill>
-                <a:latin typeface="Aptos" pitchFamily="34" charset="0"/>
-                <a:ea typeface="Aptos" pitchFamily="34" charset="-122"/>
-                <a:cs typeface="Aptos" pitchFamily="34" charset="-120"/>
-              </a:rPr>
-              <a:t>Source verification notes</a:t>
+                  <a:srgbClr val="003A63"/>
+                </a:solidFill>
+                <a:latin typeface="Aptos" pitchFamily="34" charset="0"/>
+                <a:ea typeface="Aptos" pitchFamily="34" charset="-122"/>
+                <a:cs typeface="Aptos" pitchFamily="34" charset="-120"/>
+              </a:rPr>
+              <a:t>• Source verification notes</a:t>
             </a:r>
             <a:endParaRPr lang="en-US" sz="2100" dirty="0"/>
           </a:p>
@@ -8961,17 +9105,17 @@
         </p:nvSpPr>
         <p:spPr>
           <a:xfrm>
-            <a:off x="7799832" y="1828800"/>
-            <a:ext cx="3145536" cy="685800"/>
-          </a:xfrm>
-          <a:prstGeom prst="rect">
-            <a:avLst/>
-          </a:prstGeom>
-          <a:noFill/>
-          <a:ln/>
-        </p:spPr>
-        <p:txBody>
-          <a:bodyPr wrap="square" lIns="0" tIns="0" rIns="0" bIns="0" rtlCol="0" anchor="t">
+            <a:off x="7799832" y="1801368"/>
+            <a:ext cx="3145536" cy="758952"/>
+          </a:xfrm>
+          <a:prstGeom prst="rect">
+            <a:avLst/>
+          </a:prstGeom>
+          <a:noFill/>
+          <a:ln/>
+        </p:spPr>
+        <p:txBody>
+          <a:bodyPr wrap="square" lIns="254" tIns="254" rIns="254" bIns="254" rtlCol="0" anchor="t">
             <a:normAutofit/>
           </a:bodyPr>
           <a:lstStyle/>
@@ -8980,7 +9124,7 @@
               <a:buNone/>
             </a:pPr>
             <a:r>
-              <a:rPr lang="en-US" sz="1550" dirty="0">
+              <a:rPr lang="en-US" sz="1320" dirty="0">
                 <a:solidFill>
                   <a:srgbClr val="17364A"/>
                 </a:solidFill>
@@ -8990,7 +9134,7 @@
               </a:rPr>
               <a:t>Generative AI output evaluation rubric</a:t>
             </a:r>
-            <a:endParaRPr lang="en-US" sz="1550" dirty="0"/>
+            <a:endParaRPr lang="en-US" sz="1320" dirty="0"/>
           </a:p>
         </p:txBody>
       </p:sp>
@@ -9078,13 +9222,16 @@
           <a:ln/>
         </p:spPr>
         <p:txBody>
-          <a:bodyPr wrap="square" lIns="254" tIns="254" rIns="254" bIns="254" rtlCol="0" anchor="t">
+          <a:bodyPr wrap="square" lIns="508" tIns="508" rIns="508" bIns="508" rtlCol="0" anchor="t">
             <a:normAutofit/>
           </a:bodyPr>
           <a:lstStyle/>
           <a:p>
-            <a:r>
-              <a:rPr lang="en-US" sz="1380" dirty="0">
+            <a:pPr indent="0" marL="0">
+              <a:buNone/>
+            </a:pPr>
+            <a:r>
+              <a:rPr lang="en-US" sz="1220" dirty="0">
                 <a:solidFill>
                   <a:srgbClr val="17364A"/>
                 </a:solidFill>
@@ -9094,11 +9241,14 @@
               </a:rPr>
               <a:t>Generative AI output evaluation rubric</a:t>
             </a:r>
-            <a:endParaRPr lang="en-US" sz="1380" dirty="0"/>
-          </a:p>
-          <a:p>
-            <a:r>
-              <a:rPr lang="en-US" sz="1380" dirty="0">
+            <a:endParaRPr lang="en-US" sz="1220" dirty="0"/>
+          </a:p>
+          <a:p>
+            <a:pPr indent="0" marL="0">
+              <a:buNone/>
+            </a:pPr>
+            <a:r>
+              <a:rPr lang="en-US" sz="1220" dirty="0">
                 <a:solidFill>
                   <a:srgbClr val="17364A"/>
                 </a:solidFill>
@@ -9108,11 +9258,14 @@
               </a:rPr>
               <a:t>Completed sample review</a:t>
             </a:r>
-            <a:endParaRPr lang="en-US" sz="1380" dirty="0"/>
-          </a:p>
-          <a:p>
-            <a:r>
-              <a:rPr lang="en-US" sz="1380" dirty="0">
+            <a:endParaRPr lang="en-US" sz="1220" dirty="0"/>
+          </a:p>
+          <a:p>
+            <a:pPr indent="0" marL="0">
+              <a:buNone/>
+            </a:pPr>
+            <a:r>
+              <a:rPr lang="en-US" sz="1220" dirty="0">
                 <a:solidFill>
                   <a:srgbClr val="17364A"/>
                 </a:solidFill>
@@ -9122,7 +9275,7 @@
               </a:rPr>
               <a:t>Source verification notes</a:t>
             </a:r>
-            <a:endParaRPr lang="en-US" sz="1380" dirty="0"/>
+            <a:endParaRPr lang="en-US" sz="1220" dirty="0"/>
           </a:p>
         </p:txBody>
       </p:sp>
@@ -9200,17 +9353,17 @@
         </p:nvSpPr>
         <p:spPr>
           <a:xfrm>
-            <a:off x="7799832" y="5001768"/>
-            <a:ext cx="3145536" cy="502920"/>
-          </a:xfrm>
-          <a:prstGeom prst="rect">
-            <a:avLst/>
-          </a:prstGeom>
-          <a:noFill/>
-          <a:ln/>
-        </p:spPr>
-        <p:txBody>
-          <a:bodyPr wrap="square" lIns="0" tIns="0" rIns="0" bIns="0" rtlCol="0" anchor="t">
+            <a:off x="7799832" y="4974336"/>
+            <a:ext cx="3145536" cy="576072"/>
+          </a:xfrm>
+          <a:prstGeom prst="rect">
+            <a:avLst/>
+          </a:prstGeom>
+          <a:noFill/>
+          <a:ln/>
+        </p:spPr>
+        <p:txBody>
+          <a:bodyPr wrap="square" lIns="254" tIns="254" rIns="254" bIns="254" rtlCol="0" anchor="t">
             <a:normAutofit/>
           </a:bodyPr>
           <a:lstStyle/>
@@ -9219,7 +9372,7 @@
               <a:buNone/>
             </a:pPr>
             <a:r>
-              <a:rPr lang="en-US" sz="1550" dirty="0">
+              <a:rPr lang="en-US" sz="1320" dirty="0">
                 <a:solidFill>
                   <a:srgbClr val="17364A"/>
                 </a:solidFill>
@@ -9227,9 +9380,9 @@
                 <a:ea typeface="Aptos" pitchFamily="34" charset="-122"/>
                 <a:cs typeface="Aptos" pitchFamily="34" charset="-120"/>
               </a:rPr>
-              <a:t>Connect the concept to data quality, model performance, validation evidence, monitoring measures, and decisions that remain under human control.</a:t>
-            </a:r>
-            <a:endParaRPr lang="en-US" sz="1550" dirty="0"/>
+              <a:t>Connect the concept to data quality, model performance, validation evidence, monitoring measures, and decisions that.</a:t>
+            </a:r>
+            <a:endParaRPr lang="en-US" sz="1320" dirty="0"/>
           </a:p>
         </p:txBody>
       </p:sp>
@@ -9530,21 +9683,24 @@
           <a:ln/>
         </p:spPr>
         <p:txBody>
-          <a:bodyPr wrap="square" lIns="635" tIns="635" rIns="635" bIns="635" rtlCol="0" anchor="t">
+          <a:bodyPr wrap="square" lIns="1016" tIns="1016" rIns="1016" bIns="1016" rtlCol="0" anchor="t">
             <a:normAutofit/>
           </a:bodyPr>
           <a:lstStyle/>
           <a:p>
+            <a:pPr indent="0" marL="0">
+              <a:buNone/>
+            </a:pPr>
             <a:r>
               <a:rPr lang="en-US" sz="2100" dirty="0">
                 <a:solidFill>
-                  <a:srgbClr val="17364A"/>
-                </a:solidFill>
-                <a:latin typeface="Aptos" pitchFamily="34" charset="0"/>
-                <a:ea typeface="Aptos" pitchFamily="34" charset="-122"/>
-                <a:cs typeface="Aptos" pitchFamily="34" charset="-120"/>
-              </a:rPr>
-              <a:t>Approval or escalation documentation</a:t>
+                  <a:srgbClr val="003A63"/>
+                </a:solidFill>
+                <a:latin typeface="Aptos" pitchFamily="34" charset="0"/>
+                <a:ea typeface="Aptos" pitchFamily="34" charset="-122"/>
+                <a:cs typeface="Aptos" pitchFamily="34" charset="-120"/>
+              </a:rPr>
+              <a:t>• Approval or escalation documentation</a:t>
             </a:r>
             <a:endParaRPr lang="en-US" sz="2100" dirty="0"/>
           </a:p>
@@ -9624,17 +9780,17 @@
         </p:nvSpPr>
         <p:spPr>
           <a:xfrm>
-            <a:off x="7799832" y="1828800"/>
-            <a:ext cx="3145536" cy="685800"/>
-          </a:xfrm>
-          <a:prstGeom prst="rect">
-            <a:avLst/>
-          </a:prstGeom>
-          <a:noFill/>
-          <a:ln/>
-        </p:spPr>
-        <p:txBody>
-          <a:bodyPr wrap="square" lIns="0" tIns="0" rIns="0" bIns="0" rtlCol="0" anchor="t">
+            <a:off x="7799832" y="1801368"/>
+            <a:ext cx="3145536" cy="758952"/>
+          </a:xfrm>
+          <a:prstGeom prst="rect">
+            <a:avLst/>
+          </a:prstGeom>
+          <a:noFill/>
+          <a:ln/>
+        </p:spPr>
+        <p:txBody>
+          <a:bodyPr wrap="square" lIns="254" tIns="254" rIns="254" bIns="254" rtlCol="0" anchor="t">
             <a:normAutofit/>
           </a:bodyPr>
           <a:lstStyle/>
@@ -9643,7 +9799,7 @@
               <a:buNone/>
             </a:pPr>
             <a:r>
-              <a:rPr lang="en-US" sz="1550" dirty="0">
+              <a:rPr lang="en-US" sz="1320" dirty="0">
                 <a:solidFill>
                   <a:srgbClr val="17364A"/>
                 </a:solidFill>
@@ -9653,7 +9809,7 @@
               </a:rPr>
               <a:t>Approval or escalation documentation</a:t>
             </a:r>
-            <a:endParaRPr lang="en-US" sz="1550" dirty="0"/>
+            <a:endParaRPr lang="en-US" sz="1320" dirty="0"/>
           </a:p>
         </p:txBody>
       </p:sp>
@@ -9741,13 +9897,16 @@
           <a:ln/>
         </p:spPr>
         <p:txBody>
-          <a:bodyPr wrap="square" lIns="254" tIns="254" rIns="254" bIns="254" rtlCol="0" anchor="t">
+          <a:bodyPr wrap="square" lIns="508" tIns="508" rIns="508" bIns="508" rtlCol="0" anchor="t">
             <a:normAutofit/>
           </a:bodyPr>
           <a:lstStyle/>
           <a:p>
-            <a:r>
-              <a:rPr lang="en-US" sz="1380" dirty="0">
+            <a:pPr indent="0" marL="0">
+              <a:buNone/>
+            </a:pPr>
+            <a:r>
+              <a:rPr lang="en-US" sz="1220" dirty="0">
                 <a:solidFill>
                   <a:srgbClr val="17364A"/>
                 </a:solidFill>
@@ -9757,7 +9916,7 @@
               </a:rPr>
               <a:t>Approval or escalation documentation</a:t>
             </a:r>
-            <a:endParaRPr lang="en-US" sz="1380" dirty="0"/>
+            <a:endParaRPr lang="en-US" sz="1220" dirty="0"/>
           </a:p>
         </p:txBody>
       </p:sp>
@@ -9835,17 +9994,17 @@
         </p:nvSpPr>
         <p:spPr>
           <a:xfrm>
-            <a:off x="7799832" y="5001768"/>
-            <a:ext cx="3145536" cy="502920"/>
-          </a:xfrm>
-          <a:prstGeom prst="rect">
-            <a:avLst/>
-          </a:prstGeom>
-          <a:noFill/>
-          <a:ln/>
-        </p:spPr>
-        <p:txBody>
-          <a:bodyPr wrap="square" lIns="0" tIns="0" rIns="0" bIns="0" rtlCol="0" anchor="t">
+            <a:off x="7799832" y="4974336"/>
+            <a:ext cx="3145536" cy="576072"/>
+          </a:xfrm>
+          <a:prstGeom prst="rect">
+            <a:avLst/>
+          </a:prstGeom>
+          <a:noFill/>
+          <a:ln/>
+        </p:spPr>
+        <p:txBody>
+          <a:bodyPr wrap="square" lIns="254" tIns="254" rIns="254" bIns="254" rtlCol="0" anchor="t">
             <a:normAutofit/>
           </a:bodyPr>
           <a:lstStyle/>
@@ -9854,7 +10013,7 @@
               <a:buNone/>
             </a:pPr>
             <a:r>
-              <a:rPr lang="en-US" sz="1550" dirty="0">
+              <a:rPr lang="en-US" sz="1320" dirty="0">
                 <a:solidFill>
                   <a:srgbClr val="17364A"/>
                 </a:solidFill>
@@ -9862,9 +10021,9 @@
                 <a:ea typeface="Aptos" pitchFamily="34" charset="-122"/>
                 <a:cs typeface="Aptos" pitchFamily="34" charset="-120"/>
               </a:rPr>
-              <a:t>Connect the concept to data quality, model performance, validation evidence, monitoring measures, and decisions that remain under human control.</a:t>
-            </a:r>
-            <a:endParaRPr lang="en-US" sz="1550" dirty="0"/>
+              <a:t>Connect the concept to data quality, model performance, validation evidence, monitoring measures, and decisions that.</a:t>
+            </a:r>
+            <a:endParaRPr lang="en-US" sz="1320" dirty="0"/>
           </a:p>
         </p:txBody>
       </p:sp>
@@ -10165,49 +10324,58 @@
           <a:ln/>
         </p:spPr>
         <p:txBody>
-          <a:bodyPr wrap="square" lIns="635" tIns="635" rIns="635" bIns="635" rtlCol="0" anchor="t">
+          <a:bodyPr wrap="square" lIns="1016" tIns="1016" rIns="1016" bIns="1016" rtlCol="0" anchor="t">
             <a:normAutofit/>
           </a:bodyPr>
           <a:lstStyle/>
           <a:p>
+            <a:pPr indent="0" marL="0">
+              <a:buNone/>
+            </a:pPr>
             <a:r>
               <a:rPr lang="en-US" sz="2100" dirty="0">
                 <a:solidFill>
-                  <a:srgbClr val="17364A"/>
-                </a:solidFill>
-                <a:latin typeface="Aptos" pitchFamily="34" charset="0"/>
-                <a:ea typeface="Aptos" pitchFamily="34" charset="-122"/>
-                <a:cs typeface="Aptos" pitchFamily="34" charset="-120"/>
-              </a:rPr>
-              <a:t>Generative AI can draft, summarize, translate, classify, explain, and synthesize information, but its outputs.</a:t>
+                  <a:srgbClr val="003A63"/>
+                </a:solidFill>
+                <a:latin typeface="Aptos" pitchFamily="34" charset="0"/>
+                <a:ea typeface="Aptos" pitchFamily="34" charset="-122"/>
+                <a:cs typeface="Aptos" pitchFamily="34" charset="-120"/>
+              </a:rPr>
+              <a:t>• Generative AI can draft, summarize, translate, classify, explain, and synthesize information,.</a:t>
             </a:r>
             <a:endParaRPr lang="en-US" sz="2100" dirty="0"/>
           </a:p>
           <a:p>
+            <a:pPr indent="0" marL="0">
+              <a:buNone/>
+            </a:pPr>
             <a:r>
               <a:rPr lang="en-US" sz="2100" dirty="0">
                 <a:solidFill>
-                  <a:srgbClr val="17364A"/>
-                </a:solidFill>
-                <a:latin typeface="Aptos" pitchFamily="34" charset="0"/>
-                <a:ea typeface="Aptos" pitchFamily="34" charset="-122"/>
-                <a:cs typeface="Aptos" pitchFamily="34" charset="-120"/>
-              </a:rPr>
-              <a:t>In public health, generated content may affect case review, public communication, policy interpretation,.</a:t>
+                  <a:srgbClr val="003A63"/>
+                </a:solidFill>
+                <a:latin typeface="Aptos" pitchFamily="34" charset="0"/>
+                <a:ea typeface="Aptos" pitchFamily="34" charset="-122"/>
+                <a:cs typeface="Aptos" pitchFamily="34" charset="-120"/>
+              </a:rPr>
+              <a:t>• In public health, generated content may affect case review, public communication, policy.</a:t>
             </a:r>
             <a:endParaRPr lang="en-US" sz="2100" dirty="0"/>
           </a:p>
           <a:p>
+            <a:pPr indent="0" marL="0">
+              <a:buNone/>
+            </a:pPr>
             <a:r>
               <a:rPr lang="en-US" sz="2100" dirty="0">
                 <a:solidFill>
-                  <a:srgbClr val="17364A"/>
-                </a:solidFill>
-                <a:latin typeface="Aptos" pitchFamily="34" charset="0"/>
-                <a:ea typeface="Aptos" pitchFamily="34" charset="-122"/>
-                <a:cs typeface="Aptos" pitchFamily="34" charset="-120"/>
-              </a:rPr>
-              <a:t>Fluent writing does not guarantee accuracy, completeness, appropriateness, or safety.</a:t>
+                  <a:srgbClr val="003A63"/>
+                </a:solidFill>
+                <a:latin typeface="Aptos" pitchFamily="34" charset="0"/>
+                <a:ea typeface="Aptos" pitchFamily="34" charset="-122"/>
+                <a:cs typeface="Aptos" pitchFamily="34" charset="-120"/>
+              </a:rPr>
+              <a:t>• Fluent writing does not guarantee accuracy, completeness, appropriateness, or safety.</a:t>
             </a:r>
             <a:endParaRPr lang="en-US" sz="2100" dirty="0"/>
           </a:p>
@@ -10287,17 +10455,17 @@
         </p:nvSpPr>
         <p:spPr>
           <a:xfrm>
-            <a:off x="8074152" y="1920240"/>
-            <a:ext cx="2825496" cy="1280160"/>
-          </a:xfrm>
-          <a:prstGeom prst="rect">
-            <a:avLst/>
-          </a:prstGeom>
-          <a:noFill/>
-          <a:ln/>
-        </p:spPr>
-        <p:txBody>
-          <a:bodyPr wrap="square" lIns="0" tIns="0" rIns="0" bIns="0" rtlCol="0" anchor="t">
+            <a:off x="8074152" y="1892808"/>
+            <a:ext cx="2825496" cy="1353312"/>
+          </a:xfrm>
+          <a:prstGeom prst="rect">
+            <a:avLst/>
+          </a:prstGeom>
+          <a:noFill/>
+          <a:ln/>
+        </p:spPr>
+        <p:txBody>
+          <a:bodyPr wrap="square" lIns="254" tIns="254" rIns="254" bIns="254" rtlCol="0" anchor="t">
             <a:normAutofit/>
           </a:bodyPr>
           <a:lstStyle/>
@@ -10306,7 +10474,7 @@
               <a:buNone/>
             </a:pPr>
             <a:r>
-              <a:rPr lang="en-US" sz="1550" dirty="0">
+              <a:rPr lang="en-US" sz="1320" dirty="0">
                 <a:solidFill>
                   <a:srgbClr val="17364A"/>
                 </a:solidFill>
@@ -10314,43 +10482,9 @@
                 <a:ea typeface="Aptos" pitchFamily="34" charset="-122"/>
                 <a:cs typeface="Aptos" pitchFamily="34" charset="-120"/>
               </a:rPr>
-              <a:t>Level: intermediate/practitioner</a:t>
-            </a:r>
-            <a:endParaRPr lang="en-US" sz="1550" dirty="0"/>
-          </a:p>
-          <a:p>
-            <a:pPr indent="0" marL="0">
-              <a:buNone/>
-            </a:pPr>
-            <a:r>
-              <a:rPr lang="en-US" sz="1550" dirty="0">
-                <a:solidFill>
-                  <a:srgbClr val="17364A"/>
-                </a:solidFill>
-                <a:latin typeface="Aptos" pitchFamily="34" charset="0"/>
-                <a:ea typeface="Aptos" pitchFamily="34" charset="-122"/>
-                <a:cs typeface="Aptos" pitchFamily="34" charset="-120"/>
-              </a:rPr>
-              <a:t>Primary track: Analytics and Modeling Track</a:t>
-            </a:r>
-            <a:endParaRPr lang="en-US" sz="1550" dirty="0"/>
-          </a:p>
-          <a:p>
-            <a:pPr indent="0" marL="0">
-              <a:buNone/>
-            </a:pPr>
-            <a:r>
-              <a:rPr lang="en-US" sz="1550" dirty="0">
-                <a:solidFill>
-                  <a:srgbClr val="17364A"/>
-                </a:solidFill>
-                <a:latin typeface="Aptos" pitchFamily="34" charset="0"/>
-                <a:ea typeface="Aptos" pitchFamily="34" charset="-122"/>
-                <a:cs typeface="Aptos" pitchFamily="34" charset="-120"/>
-              </a:rPr>
-              <a:t>Appears in tracks: analytics-modeling</a:t>
-            </a:r>
-            <a:endParaRPr lang="en-US" sz="1550" dirty="0"/>
+              <a:t>Level: intermediate/practitioner Primary track: Analytics and Modeling Track Appears in tracks: analytics-modeling</a:t>
+            </a:r>
+            <a:endParaRPr lang="en-US" sz="1320" dirty="0"/>
           </a:p>
         </p:txBody>
       </p:sp>
@@ -10438,13 +10572,16 @@
           <a:ln/>
         </p:spPr>
         <p:txBody>
-          <a:bodyPr wrap="square" lIns="254" tIns="254" rIns="254" bIns="254" rtlCol="0" anchor="t">
+          <a:bodyPr wrap="square" lIns="508" tIns="508" rIns="508" bIns="508" rtlCol="0" anchor="t">
             <a:normAutofit/>
           </a:bodyPr>
           <a:lstStyle/>
           <a:p>
-            <a:r>
-              <a:rPr lang="en-US" sz="1380" dirty="0">
+            <a:pPr indent="0" marL="0">
+              <a:buNone/>
+            </a:pPr>
+            <a:r>
+              <a:rPr lang="en-US" sz="1220" dirty="0">
                 <a:solidFill>
                   <a:srgbClr val="17364A"/>
                 </a:solidFill>
@@ -10454,11 +10591,14 @@
               </a:rPr>
               <a:t>Read the module for shared vocabulary and context.</a:t>
             </a:r>
-            <a:endParaRPr lang="en-US" sz="1380" dirty="0"/>
-          </a:p>
-          <a:p>
-            <a:r>
-              <a:rPr lang="en-US" sz="1380" dirty="0">
+            <a:endParaRPr lang="en-US" sz="1220" dirty="0"/>
+          </a:p>
+          <a:p>
+            <a:pPr indent="0" marL="0">
+              <a:buNone/>
+            </a:pPr>
+            <a:r>
+              <a:rPr lang="en-US" sz="1220" dirty="0">
                 <a:solidFill>
                   <a:srgbClr val="17364A"/>
                 </a:solidFill>
@@ -10468,11 +10608,14 @@
               </a:rPr>
               <a:t>Complete the practical exercise to apply the concept.</a:t>
             </a:r>
-            <a:endParaRPr lang="en-US" sz="1380" dirty="0"/>
-          </a:p>
-          <a:p>
-            <a:r>
-              <a:rPr lang="en-US" sz="1380" dirty="0">
+            <a:endParaRPr lang="en-US" sz="1220" dirty="0"/>
+          </a:p>
+          <a:p>
+            <a:pPr indent="0" marL="0">
+              <a:buNone/>
+            </a:pPr>
+            <a:r>
+              <a:rPr lang="en-US" sz="1220" dirty="0">
                 <a:solidFill>
                   <a:srgbClr val="17364A"/>
                 </a:solidFill>
@@ -10482,7 +10625,7 @@
               </a:rPr>
               <a:t>Use the notes and references for deeper review.</a:t>
             </a:r>
-            <a:endParaRPr lang="en-US" sz="1380" dirty="0"/>
+            <a:endParaRPr lang="en-US" sz="1220" dirty="0"/>
           </a:p>
         </p:txBody>
       </p:sp>
@@ -10783,49 +10926,58 @@
           <a:ln/>
         </p:spPr>
         <p:txBody>
-          <a:bodyPr wrap="square" lIns="635" tIns="635" rIns="635" bIns="635" rtlCol="0" anchor="t">
+          <a:bodyPr wrap="square" lIns="1016" tIns="1016" rIns="1016" bIns="1016" rtlCol="0" anchor="t">
             <a:normAutofit/>
           </a:bodyPr>
           <a:lstStyle/>
           <a:p>
+            <a:pPr indent="0" marL="0">
+              <a:buNone/>
+            </a:pPr>
             <a:r>
               <a:rPr lang="en-US" sz="2100" dirty="0">
                 <a:solidFill>
-                  <a:srgbClr val="17364A"/>
-                </a:solidFill>
-                <a:latin typeface="Aptos" pitchFamily="34" charset="0"/>
-                <a:ea typeface="Aptos" pitchFamily="34" charset="-122"/>
-                <a:cs typeface="Aptos" pitchFamily="34" charset="-120"/>
-              </a:rPr>
-              <a:t>Generative AI output evaluation rubric</a:t>
+                  <a:srgbClr val="003A63"/>
+                </a:solidFill>
+                <a:latin typeface="Aptos" pitchFamily="34" charset="0"/>
+                <a:ea typeface="Aptos" pitchFamily="34" charset="-122"/>
+                <a:cs typeface="Aptos" pitchFamily="34" charset="-120"/>
+              </a:rPr>
+              <a:t>• Generative AI output evaluation rubric</a:t>
             </a:r>
             <a:endParaRPr lang="en-US" sz="2100" dirty="0"/>
           </a:p>
           <a:p>
+            <a:pPr indent="0" marL="0">
+              <a:buNone/>
+            </a:pPr>
             <a:r>
               <a:rPr lang="en-US" sz="2100" dirty="0">
                 <a:solidFill>
-                  <a:srgbClr val="17364A"/>
-                </a:solidFill>
-                <a:latin typeface="Aptos" pitchFamily="34" charset="0"/>
-                <a:ea typeface="Aptos" pitchFamily="34" charset="-122"/>
-                <a:cs typeface="Aptos" pitchFamily="34" charset="-120"/>
-              </a:rPr>
-              <a:t>Completed sample review</a:t>
+                  <a:srgbClr val="003A63"/>
+                </a:solidFill>
+                <a:latin typeface="Aptos" pitchFamily="34" charset="0"/>
+                <a:ea typeface="Aptos" pitchFamily="34" charset="-122"/>
+                <a:cs typeface="Aptos" pitchFamily="34" charset="-120"/>
+              </a:rPr>
+              <a:t>• Completed sample review</a:t>
             </a:r>
             <a:endParaRPr lang="en-US" sz="2100" dirty="0"/>
           </a:p>
           <a:p>
+            <a:pPr indent="0" marL="0">
+              <a:buNone/>
+            </a:pPr>
             <a:r>
               <a:rPr lang="en-US" sz="2100" dirty="0">
                 <a:solidFill>
-                  <a:srgbClr val="17364A"/>
-                </a:solidFill>
-                <a:latin typeface="Aptos" pitchFamily="34" charset="0"/>
-                <a:ea typeface="Aptos" pitchFamily="34" charset="-122"/>
-                <a:cs typeface="Aptos" pitchFamily="34" charset="-120"/>
-              </a:rPr>
-              <a:t>Source verification notes</a:t>
+                  <a:srgbClr val="003A63"/>
+                </a:solidFill>
+                <a:latin typeface="Aptos" pitchFamily="34" charset="0"/>
+                <a:ea typeface="Aptos" pitchFamily="34" charset="-122"/>
+                <a:cs typeface="Aptos" pitchFamily="34" charset="-120"/>
+              </a:rPr>
+              <a:t>• Source verification notes</a:t>
             </a:r>
             <a:endParaRPr lang="en-US" sz="2100" dirty="0"/>
           </a:p>
@@ -10905,17 +11057,17 @@
         </p:nvSpPr>
         <p:spPr>
           <a:xfrm>
-            <a:off x="7799832" y="1828800"/>
-            <a:ext cx="3145536" cy="685800"/>
-          </a:xfrm>
-          <a:prstGeom prst="rect">
-            <a:avLst/>
-          </a:prstGeom>
-          <a:noFill/>
-          <a:ln/>
-        </p:spPr>
-        <p:txBody>
-          <a:bodyPr wrap="square" lIns="0" tIns="0" rIns="0" bIns="0" rtlCol="0" anchor="t">
+            <a:off x="7799832" y="1801368"/>
+            <a:ext cx="3145536" cy="758952"/>
+          </a:xfrm>
+          <a:prstGeom prst="rect">
+            <a:avLst/>
+          </a:prstGeom>
+          <a:noFill/>
+          <a:ln/>
+        </p:spPr>
+        <p:txBody>
+          <a:bodyPr wrap="square" lIns="254" tIns="254" rIns="254" bIns="254" rtlCol="0" anchor="t">
             <a:normAutofit/>
           </a:bodyPr>
           <a:lstStyle/>
@@ -10924,7 +11076,7 @@
               <a:buNone/>
             </a:pPr>
             <a:r>
-              <a:rPr lang="en-US" sz="1550" dirty="0">
+              <a:rPr lang="en-US" sz="1320" dirty="0">
                 <a:solidFill>
                   <a:srgbClr val="17364A"/>
                 </a:solidFill>
@@ -10934,7 +11086,7 @@
               </a:rPr>
               <a:t>Generative AI output evaluation rubric</a:t>
             </a:r>
-            <a:endParaRPr lang="en-US" sz="1550" dirty="0"/>
+            <a:endParaRPr lang="en-US" sz="1320" dirty="0"/>
           </a:p>
         </p:txBody>
       </p:sp>
@@ -11022,13 +11174,16 @@
           <a:ln/>
         </p:spPr>
         <p:txBody>
-          <a:bodyPr wrap="square" lIns="254" tIns="254" rIns="254" bIns="254" rtlCol="0" anchor="t">
+          <a:bodyPr wrap="square" lIns="508" tIns="508" rIns="508" bIns="508" rtlCol="0" anchor="t">
             <a:normAutofit/>
           </a:bodyPr>
           <a:lstStyle/>
           <a:p>
-            <a:r>
-              <a:rPr lang="en-US" sz="1380" dirty="0">
+            <a:pPr indent="0" marL="0">
+              <a:buNone/>
+            </a:pPr>
+            <a:r>
+              <a:rPr lang="en-US" sz="1220" dirty="0">
                 <a:solidFill>
                   <a:srgbClr val="17364A"/>
                 </a:solidFill>
@@ -11038,11 +11193,14 @@
               </a:rPr>
               <a:t>Generative AI output evaluation rubric</a:t>
             </a:r>
-            <a:endParaRPr lang="en-US" sz="1380" dirty="0"/>
-          </a:p>
-          <a:p>
-            <a:r>
-              <a:rPr lang="en-US" sz="1380" dirty="0">
+            <a:endParaRPr lang="en-US" sz="1220" dirty="0"/>
+          </a:p>
+          <a:p>
+            <a:pPr indent="0" marL="0">
+              <a:buNone/>
+            </a:pPr>
+            <a:r>
+              <a:rPr lang="en-US" sz="1220" dirty="0">
                 <a:solidFill>
                   <a:srgbClr val="17364A"/>
                 </a:solidFill>
@@ -11052,11 +11210,14 @@
               </a:rPr>
               <a:t>Completed sample review</a:t>
             </a:r>
-            <a:endParaRPr lang="en-US" sz="1380" dirty="0"/>
-          </a:p>
-          <a:p>
-            <a:r>
-              <a:rPr lang="en-US" sz="1380" dirty="0">
+            <a:endParaRPr lang="en-US" sz="1220" dirty="0"/>
+          </a:p>
+          <a:p>
+            <a:pPr indent="0" marL="0">
+              <a:buNone/>
+            </a:pPr>
+            <a:r>
+              <a:rPr lang="en-US" sz="1220" dirty="0">
                 <a:solidFill>
                   <a:srgbClr val="17364A"/>
                 </a:solidFill>
@@ -11066,7 +11227,7 @@
               </a:rPr>
               <a:t>Source verification notes</a:t>
             </a:r>
-            <a:endParaRPr lang="en-US" sz="1380" dirty="0"/>
+            <a:endParaRPr lang="en-US" sz="1220" dirty="0"/>
           </a:p>
         </p:txBody>
       </p:sp>
@@ -11144,17 +11305,17 @@
         </p:nvSpPr>
         <p:spPr>
           <a:xfrm>
-            <a:off x="7799832" y="5001768"/>
-            <a:ext cx="3145536" cy="502920"/>
-          </a:xfrm>
-          <a:prstGeom prst="rect">
-            <a:avLst/>
-          </a:prstGeom>
-          <a:noFill/>
-          <a:ln/>
-        </p:spPr>
-        <p:txBody>
-          <a:bodyPr wrap="square" lIns="0" tIns="0" rIns="0" bIns="0" rtlCol="0" anchor="t">
+            <a:off x="7799832" y="4974336"/>
+            <a:ext cx="3145536" cy="576072"/>
+          </a:xfrm>
+          <a:prstGeom prst="rect">
+            <a:avLst/>
+          </a:prstGeom>
+          <a:noFill/>
+          <a:ln/>
+        </p:spPr>
+        <p:txBody>
+          <a:bodyPr wrap="square" lIns="254" tIns="254" rIns="254" bIns="254" rtlCol="0" anchor="t">
             <a:normAutofit/>
           </a:bodyPr>
           <a:lstStyle/>
@@ -11163,7 +11324,7 @@
               <a:buNone/>
             </a:pPr>
             <a:r>
-              <a:rPr lang="en-US" sz="1550" dirty="0">
+              <a:rPr lang="en-US" sz="1320" dirty="0">
                 <a:solidFill>
                   <a:srgbClr val="17364A"/>
                 </a:solidFill>
@@ -11171,9 +11332,9 @@
                 <a:ea typeface="Aptos" pitchFamily="34" charset="-122"/>
                 <a:cs typeface="Aptos" pitchFamily="34" charset="-120"/>
               </a:rPr>
-              <a:t>Use the assignment to test whether you can explain the concept, apply it to a realistic public health situation, and identify what would need review before the work moves forward.</a:t>
-            </a:r>
-            <a:endParaRPr lang="en-US" sz="1550" dirty="0"/>
+              <a:t>Use the assignment to test whether you can explain the concept, apply it to a realistic public health situation, and.</a:t>
+            </a:r>
+            <a:endParaRPr lang="en-US" sz="1320" dirty="0"/>
           </a:p>
         </p:txBody>
       </p:sp>
@@ -11474,49 +11635,58 @@
           <a:ln/>
         </p:spPr>
         <p:txBody>
-          <a:bodyPr wrap="square" lIns="635" tIns="635" rIns="635" bIns="635" rtlCol="0" anchor="t">
+          <a:bodyPr wrap="square" lIns="1016" tIns="1016" rIns="1016" bIns="1016" rtlCol="0" anchor="t">
             <a:normAutofit/>
           </a:bodyPr>
           <a:lstStyle/>
           <a:p>
+            <a:pPr indent="0" marL="0">
+              <a:buNone/>
+            </a:pPr>
             <a:r>
               <a:rPr lang="en-US" sz="2100" dirty="0">
                 <a:solidFill>
-                  <a:srgbClr val="17364A"/>
-                </a:solidFill>
-                <a:latin typeface="Aptos" pitchFamily="34" charset="0"/>
-                <a:ea typeface="Aptos" pitchFamily="34" charset="-122"/>
-                <a:cs typeface="Aptos" pitchFamily="34" charset="-120"/>
-              </a:rPr>
-              <a:t>1. Why is fluency not enough to trust a generative AI output?</a:t>
+                  <a:srgbClr val="003A63"/>
+                </a:solidFill>
+                <a:latin typeface="Aptos" pitchFamily="34" charset="0"/>
+                <a:ea typeface="Aptos" pitchFamily="34" charset="-122"/>
+                <a:cs typeface="Aptos" pitchFamily="34" charset="-120"/>
+              </a:rPr>
+              <a:t>• 1. Why is fluency not enough to trust a generative AI output?</a:t>
             </a:r>
             <a:endParaRPr lang="en-US" sz="2100" dirty="0"/>
           </a:p>
           <a:p>
+            <a:pPr indent="0" marL="0">
+              <a:buNone/>
+            </a:pPr>
             <a:r>
               <a:rPr lang="en-US" sz="2100" dirty="0">
                 <a:solidFill>
-                  <a:srgbClr val="17364A"/>
-                </a:solidFill>
-                <a:latin typeface="Aptos" pitchFamily="34" charset="0"/>
-                <a:ea typeface="Aptos" pitchFamily="34" charset="-122"/>
-                <a:cs typeface="Aptos" pitchFamily="34" charset="-120"/>
-              </a:rPr>
-              <a:t>2. What does grounding mean?</a:t>
+                  <a:srgbClr val="003A63"/>
+                </a:solidFill>
+                <a:latin typeface="Aptos" pitchFamily="34" charset="0"/>
+                <a:ea typeface="Aptos" pitchFamily="34" charset="-122"/>
+                <a:cs typeface="Aptos" pitchFamily="34" charset="-120"/>
+              </a:rPr>
+              <a:t>• 2. What does grounding mean?</a:t>
             </a:r>
             <a:endParaRPr lang="en-US" sz="2100" dirty="0"/>
           </a:p>
           <a:p>
+            <a:pPr indent="0" marL="0">
+              <a:buNone/>
+            </a:pPr>
             <a:r>
               <a:rPr lang="en-US" sz="2100" dirty="0">
                 <a:solidFill>
-                  <a:srgbClr val="17364A"/>
-                </a:solidFill>
-                <a:latin typeface="Aptos" pitchFamily="34" charset="0"/>
-                <a:ea typeface="Aptos" pitchFamily="34" charset="-122"/>
-                <a:cs typeface="Aptos" pitchFamily="34" charset="-120"/>
-              </a:rPr>
-              <a:t>3. Which issue can be as harmful as an incorrect statement?</a:t>
+                  <a:srgbClr val="003A63"/>
+                </a:solidFill>
+                <a:latin typeface="Aptos" pitchFamily="34" charset="0"/>
+                <a:ea typeface="Aptos" pitchFamily="34" charset="-122"/>
+                <a:cs typeface="Aptos" pitchFamily="34" charset="-120"/>
+              </a:rPr>
+              <a:t>• 3. Which issue can be as harmful as an incorrect statement?</a:t>
             </a:r>
             <a:endParaRPr lang="en-US" sz="2100" dirty="0"/>
           </a:p>
@@ -11596,17 +11766,17 @@
         </p:nvSpPr>
         <p:spPr>
           <a:xfrm>
-            <a:off x="7799832" y="1828800"/>
-            <a:ext cx="3145536" cy="685800"/>
-          </a:xfrm>
-          <a:prstGeom prst="rect">
-            <a:avLst/>
-          </a:prstGeom>
-          <a:noFill/>
-          <a:ln/>
-        </p:spPr>
-        <p:txBody>
-          <a:bodyPr wrap="square" lIns="0" tIns="0" rIns="0" bIns="0" rtlCol="0" anchor="t">
+            <a:off x="7799832" y="1801368"/>
+            <a:ext cx="3145536" cy="758952"/>
+          </a:xfrm>
+          <a:prstGeom prst="rect">
+            <a:avLst/>
+          </a:prstGeom>
+          <a:noFill/>
+          <a:ln/>
+        </p:spPr>
+        <p:txBody>
+          <a:bodyPr wrap="square" lIns="254" tIns="254" rIns="254" bIns="254" rtlCol="0" anchor="t">
             <a:normAutofit/>
           </a:bodyPr>
           <a:lstStyle/>
@@ -11615,7 +11785,7 @@
               <a:buNone/>
             </a:pPr>
             <a:r>
-              <a:rPr lang="en-US" sz="1550" dirty="0">
+              <a:rPr lang="en-US" sz="1320" dirty="0">
                 <a:solidFill>
                   <a:srgbClr val="17364A"/>
                 </a:solidFill>
@@ -11625,7 +11795,7 @@
               </a:rPr>
               <a:t>1. Why is fluency not enough to trust a generative AI output?</a:t>
             </a:r>
-            <a:endParaRPr lang="en-US" sz="1550" dirty="0"/>
+            <a:endParaRPr lang="en-US" sz="1320" dirty="0"/>
           </a:p>
         </p:txBody>
       </p:sp>
@@ -11713,13 +11883,16 @@
           <a:ln/>
         </p:spPr>
         <p:txBody>
-          <a:bodyPr wrap="square" lIns="254" tIns="254" rIns="254" bIns="254" rtlCol="0" anchor="t">
+          <a:bodyPr wrap="square" lIns="508" tIns="508" rIns="508" bIns="508" rtlCol="0" anchor="t">
             <a:normAutofit/>
           </a:bodyPr>
           <a:lstStyle/>
           <a:p>
-            <a:r>
-              <a:rPr lang="en-US" sz="1380" dirty="0">
+            <a:pPr indent="0" marL="0">
+              <a:buNone/>
+            </a:pPr>
+            <a:r>
+              <a:rPr lang="en-US" sz="1220" dirty="0">
                 <a:solidFill>
                   <a:srgbClr val="17364A"/>
                 </a:solidFill>
@@ -11729,11 +11902,14 @@
               </a:rPr>
               <a:t>1.</a:t>
             </a:r>
-            <a:endParaRPr lang="en-US" sz="1380" dirty="0"/>
-          </a:p>
-          <a:p>
-            <a:r>
-              <a:rPr lang="en-US" sz="1380" dirty="0">
+            <a:endParaRPr lang="en-US" sz="1220" dirty="0"/>
+          </a:p>
+          <a:p>
+            <a:pPr indent="0" marL="0">
+              <a:buNone/>
+            </a:pPr>
+            <a:r>
+              <a:rPr lang="en-US" sz="1220" dirty="0">
                 <a:solidFill>
                   <a:srgbClr val="17364A"/>
                 </a:solidFill>
@@ -11743,11 +11919,14 @@
               </a:rPr>
               <a:t>Why is fluency not enough to trust a generative AI output?</a:t>
             </a:r>
-            <a:endParaRPr lang="en-US" sz="1380" dirty="0"/>
-          </a:p>
-          <a:p>
-            <a:r>
-              <a:rPr lang="en-US" sz="1380" dirty="0">
+            <a:endParaRPr lang="en-US" sz="1220" dirty="0"/>
+          </a:p>
+          <a:p>
+            <a:pPr indent="0" marL="0">
+              <a:buNone/>
+            </a:pPr>
+            <a:r>
+              <a:rPr lang="en-US" sz="1220" dirty="0">
                 <a:solidFill>
                   <a:srgbClr val="17364A"/>
                 </a:solidFill>
@@ -11757,7 +11936,7 @@
               </a:rPr>
               <a:t>2.</a:t>
             </a:r>
-            <a:endParaRPr lang="en-US" sz="1380" dirty="0"/>
+            <a:endParaRPr lang="en-US" sz="1220" dirty="0"/>
           </a:p>
         </p:txBody>
       </p:sp>
@@ -11835,17 +12014,17 @@
         </p:nvSpPr>
         <p:spPr>
           <a:xfrm>
-            <a:off x="7799832" y="5001768"/>
-            <a:ext cx="3145536" cy="502920"/>
-          </a:xfrm>
-          <a:prstGeom prst="rect">
-            <a:avLst/>
-          </a:prstGeom>
-          <a:noFill/>
-          <a:ln/>
-        </p:spPr>
-        <p:txBody>
-          <a:bodyPr wrap="square" lIns="0" tIns="0" rIns="0" bIns="0" rtlCol="0" anchor="t">
+            <a:off x="7799832" y="4974336"/>
+            <a:ext cx="3145536" cy="576072"/>
+          </a:xfrm>
+          <a:prstGeom prst="rect">
+            <a:avLst/>
+          </a:prstGeom>
+          <a:noFill/>
+          <a:ln/>
+        </p:spPr>
+        <p:txBody>
+          <a:bodyPr wrap="square" lIns="254" tIns="254" rIns="254" bIns="254" rtlCol="0" anchor="t">
             <a:normAutofit/>
           </a:bodyPr>
           <a:lstStyle/>
@@ -11854,7 +12033,7 @@
               <a:buNone/>
             </a:pPr>
             <a:r>
-              <a:rPr lang="en-US" sz="1550" dirty="0">
+              <a:rPr lang="en-US" sz="1320" dirty="0">
                 <a:solidFill>
                   <a:srgbClr val="17364A"/>
                 </a:solidFill>
@@ -11862,9 +12041,9 @@
                 <a:ea typeface="Aptos" pitchFamily="34" charset="-122"/>
                 <a:cs typeface="Aptos" pitchFamily="34" charset="-120"/>
               </a:rPr>
-              <a:t>Use the assignment to test whether you can explain the concept, apply it to a realistic public health situation, and identify what would need review before the work moves forward.</a:t>
-            </a:r>
-            <a:endParaRPr lang="en-US" sz="1550" dirty="0"/>
+              <a:t>Use the assignment to test whether you can explain the concept, apply it to a realistic public health situation, and.</a:t>
+            </a:r>
+            <a:endParaRPr lang="en-US" sz="1320" dirty="0"/>
           </a:p>
         </p:txBody>
       </p:sp>
@@ -12165,49 +12344,58 @@
           <a:ln/>
         </p:spPr>
         <p:txBody>
-          <a:bodyPr wrap="square" lIns="635" tIns="635" rIns="635" bIns="635" rtlCol="0" anchor="t">
+          <a:bodyPr wrap="square" lIns="1016" tIns="1016" rIns="1016" bIns="1016" rtlCol="0" anchor="t">
             <a:normAutofit/>
           </a:bodyPr>
           <a:lstStyle/>
           <a:p>
+            <a:pPr indent="0" marL="0">
+              <a:buNone/>
+            </a:pPr>
             <a:r>
               <a:rPr lang="en-US" sz="2100" dirty="0">
                 <a:solidFill>
-                  <a:srgbClr val="17364A"/>
-                </a:solidFill>
-                <a:latin typeface="Aptos" pitchFamily="34" charset="0"/>
-                <a:ea typeface="Aptos" pitchFamily="34" charset="-122"/>
-                <a:cs typeface="Aptos" pitchFamily="34" charset="-120"/>
-              </a:rPr>
-              <a:t>NIST AI RMF Generative AI Profile:.</a:t>
+                  <a:srgbClr val="003A63"/>
+                </a:solidFill>
+                <a:latin typeface="Aptos" pitchFamily="34" charset="0"/>
+                <a:ea typeface="Aptos" pitchFamily="34" charset="-122"/>
+                <a:cs typeface="Aptos" pitchFamily="34" charset="-120"/>
+              </a:rPr>
+              <a:t>• NIST AI RMF Generative AI Profile:.</a:t>
             </a:r>
             <a:endParaRPr lang="en-US" sz="2100" dirty="0"/>
           </a:p>
           <a:p>
+            <a:pPr indent="0" marL="0">
+              <a:buNone/>
+            </a:pPr>
             <a:r>
               <a:rPr lang="en-US" sz="2100" dirty="0">
                 <a:solidFill>
-                  <a:srgbClr val="17364A"/>
-                </a:solidFill>
-                <a:latin typeface="Aptos" pitchFamily="34" charset="0"/>
-                <a:ea typeface="Aptos" pitchFamily="34" charset="-122"/>
-                <a:cs typeface="Aptos" pitchFamily="34" charset="-120"/>
-              </a:rPr>
-              <a:t>NIST Artificial Intelligence Risk Management Framework:.</a:t>
+                  <a:srgbClr val="003A63"/>
+                </a:solidFill>
+                <a:latin typeface="Aptos" pitchFamily="34" charset="0"/>
+                <a:ea typeface="Aptos" pitchFamily="34" charset="-122"/>
+                <a:cs typeface="Aptos" pitchFamily="34" charset="-120"/>
+              </a:rPr>
+              <a:t>• NIST Artificial Intelligence Risk Management Framework:.</a:t>
             </a:r>
             <a:endParaRPr lang="en-US" sz="2100" dirty="0"/>
           </a:p>
           <a:p>
+            <a:pPr indent="0" marL="0">
+              <a:buNone/>
+            </a:pPr>
             <a:r>
               <a:rPr lang="en-US" sz="2100" dirty="0">
                 <a:solidFill>
-                  <a:srgbClr val="17364A"/>
-                </a:solidFill>
-                <a:latin typeface="Aptos" pitchFamily="34" charset="0"/>
-                <a:ea typeface="Aptos" pitchFamily="34" charset="-122"/>
-                <a:cs typeface="Aptos" pitchFamily="34" charset="-120"/>
-              </a:rPr>
-              <a:t>OWASP Top 10 for Large Language Model Applications:.</a:t>
+                  <a:srgbClr val="003A63"/>
+                </a:solidFill>
+                <a:latin typeface="Aptos" pitchFamily="34" charset="0"/>
+                <a:ea typeface="Aptos" pitchFamily="34" charset="-122"/>
+                <a:cs typeface="Aptos" pitchFamily="34" charset="-120"/>
+              </a:rPr>
+              <a:t>• OWASP Top 10 for Large Language Model Applications:.</a:t>
             </a:r>
             <a:endParaRPr lang="en-US" sz="2100" dirty="0"/>
           </a:p>
@@ -12287,17 +12475,17 @@
         </p:nvSpPr>
         <p:spPr>
           <a:xfrm>
-            <a:off x="7799832" y="1828800"/>
-            <a:ext cx="3145536" cy="685800"/>
-          </a:xfrm>
-          <a:prstGeom prst="rect">
-            <a:avLst/>
-          </a:prstGeom>
-          <a:noFill/>
-          <a:ln/>
-        </p:spPr>
-        <p:txBody>
-          <a:bodyPr wrap="square" lIns="0" tIns="0" rIns="0" bIns="0" rtlCol="0" anchor="t">
+            <a:off x="7799832" y="1801368"/>
+            <a:ext cx="3145536" cy="758952"/>
+          </a:xfrm>
+          <a:prstGeom prst="rect">
+            <a:avLst/>
+          </a:prstGeom>
+          <a:noFill/>
+          <a:ln/>
+        </p:spPr>
+        <p:txBody>
+          <a:bodyPr wrap="square" lIns="254" tIns="254" rIns="254" bIns="254" rtlCol="0" anchor="t">
             <a:normAutofit/>
           </a:bodyPr>
           <a:lstStyle/>
@@ -12306,7 +12494,7 @@
               <a:buNone/>
             </a:pPr>
             <a:r>
-              <a:rPr lang="en-US" sz="1550" dirty="0">
+              <a:rPr lang="en-US" sz="1320" dirty="0">
                 <a:solidFill>
                   <a:srgbClr val="17364A"/>
                 </a:solidFill>
@@ -12316,7 +12504,7 @@
               </a:rPr>
               <a:t>NIST AI RMF Generative AI Profile:.</a:t>
             </a:r>
-            <a:endParaRPr lang="en-US" sz="1550" dirty="0"/>
+            <a:endParaRPr lang="en-US" sz="1320" dirty="0"/>
           </a:p>
         </p:txBody>
       </p:sp>
@@ -12404,13 +12592,16 @@
           <a:ln/>
         </p:spPr>
         <p:txBody>
-          <a:bodyPr wrap="square" lIns="254" tIns="254" rIns="254" bIns="254" rtlCol="0" anchor="t">
+          <a:bodyPr wrap="square" lIns="508" tIns="508" rIns="508" bIns="508" rtlCol="0" anchor="t">
             <a:normAutofit/>
           </a:bodyPr>
           <a:lstStyle/>
           <a:p>
-            <a:r>
-              <a:rPr lang="en-US" sz="1380" dirty="0">
+            <a:pPr indent="0" marL="0">
+              <a:buNone/>
+            </a:pPr>
+            <a:r>
+              <a:rPr lang="en-US" sz="1220" dirty="0">
                 <a:solidFill>
                   <a:srgbClr val="17364A"/>
                 </a:solidFill>
@@ -12420,11 +12611,14 @@
               </a:rPr>
               <a:t>NIST Artificial Intelligence Risk Management Framework:.</a:t>
             </a:r>
-            <a:endParaRPr lang="en-US" sz="1380" dirty="0"/>
-          </a:p>
-          <a:p>
-            <a:r>
-              <a:rPr lang="en-US" sz="1380" dirty="0">
+            <a:endParaRPr lang="en-US" sz="1220" dirty="0"/>
+          </a:p>
+          <a:p>
+            <a:pPr indent="0" marL="0">
+              <a:buNone/>
+            </a:pPr>
+            <a:r>
+              <a:rPr lang="en-US" sz="1220" dirty="0">
                 <a:solidFill>
                   <a:srgbClr val="17364A"/>
                 </a:solidFill>
@@ -12434,7 +12628,7 @@
               </a:rPr>
               <a:t>WHO Guidance on Large Multi-Modal Models:.</a:t>
             </a:r>
-            <a:endParaRPr lang="en-US" sz="1380" dirty="0"/>
+            <a:endParaRPr lang="en-US" sz="1220" dirty="0"/>
           </a:p>
         </p:txBody>
       </p:sp>
@@ -12512,17 +12706,17 @@
         </p:nvSpPr>
         <p:spPr>
           <a:xfrm>
-            <a:off x="7799832" y="5001768"/>
-            <a:ext cx="3145536" cy="502920"/>
-          </a:xfrm>
-          <a:prstGeom prst="rect">
-            <a:avLst/>
-          </a:prstGeom>
-          <a:noFill/>
-          <a:ln/>
-        </p:spPr>
-        <p:txBody>
-          <a:bodyPr wrap="square" lIns="0" tIns="0" rIns="0" bIns="0" rtlCol="0" anchor="t">
+            <a:off x="7799832" y="4974336"/>
+            <a:ext cx="3145536" cy="576072"/>
+          </a:xfrm>
+          <a:prstGeom prst="rect">
+            <a:avLst/>
+          </a:prstGeom>
+          <a:noFill/>
+          <a:ln/>
+        </p:spPr>
+        <p:txBody>
+          <a:bodyPr wrap="square" lIns="254" tIns="254" rIns="254" bIns="254" rtlCol="0" anchor="t">
             <a:normAutofit/>
           </a:bodyPr>
           <a:lstStyle/>
@@ -12531,7 +12725,7 @@
               <a:buNone/>
             </a:pPr>
             <a:r>
-              <a:rPr lang="en-US" sz="1550" dirty="0">
+              <a:rPr lang="en-US" sz="1320" dirty="0">
                 <a:solidFill>
                   <a:srgbClr val="17364A"/>
                 </a:solidFill>
@@ -12539,9 +12733,9 @@
                 <a:ea typeface="Aptos" pitchFamily="34" charset="-122"/>
                 <a:cs typeface="Aptos" pitchFamily="34" charset="-120"/>
               </a:rPr>
-              <a:t>Connect the concept to data quality, model performance, validation evidence, monitoring measures, and decisions that remain under human control.</a:t>
-            </a:r>
-            <a:endParaRPr lang="en-US" sz="1550" dirty="0"/>
+              <a:t>Connect the concept to data quality, model performance, validation evidence, monitoring measures, and decisions that.</a:t>
+            </a:r>
+            <a:endParaRPr lang="en-US" sz="1320" dirty="0"/>
           </a:p>
         </p:txBody>
       </p:sp>
@@ -12842,63 +13036,75 @@
           <a:ln/>
         </p:spPr>
         <p:txBody>
-          <a:bodyPr wrap="square" lIns="635" tIns="635" rIns="635" bIns="635" rtlCol="0" anchor="t">
+          <a:bodyPr wrap="square" lIns="1016" tIns="1016" rIns="1016" bIns="1016" rtlCol="0" anchor="t">
             <a:normAutofit/>
           </a:bodyPr>
           <a:lstStyle/>
           <a:p>
+            <a:pPr indent="0" marL="0">
+              <a:buNone/>
+            </a:pPr>
             <a:r>
               <a:rPr lang="en-US" sz="1900" dirty="0">
                 <a:solidFill>
-                  <a:srgbClr val="17364A"/>
-                </a:solidFill>
-                <a:latin typeface="Aptos" pitchFamily="34" charset="0"/>
-                <a:ea typeface="Aptos" pitchFamily="34" charset="-122"/>
-                <a:cs typeface="Aptos" pitchFamily="34" charset="-120"/>
-              </a:rPr>
-              <a:t>Play 4: Engage Stakeholders - This lesson informs Play 4 by helping learners connect the lesson topic to.</a:t>
+                  <a:srgbClr val="003A63"/>
+                </a:solidFill>
+                <a:latin typeface="Aptos" pitchFamily="34" charset="0"/>
+                <a:ea typeface="Aptos" pitchFamily="34" charset="-122"/>
+                <a:cs typeface="Aptos" pitchFamily="34" charset="-120"/>
+              </a:rPr>
+              <a:t>• Play 4: Engage Stakeholders - This lesson informs Play 4 by helping learners connect the.</a:t>
             </a:r>
             <a:endParaRPr lang="en-US" sz="1900" dirty="0"/>
           </a:p>
           <a:p>
+            <a:pPr indent="0" marL="0">
+              <a:buNone/>
+            </a:pPr>
             <a:r>
               <a:rPr lang="en-US" sz="1900" dirty="0">
                 <a:solidFill>
-                  <a:srgbClr val="17364A"/>
-                </a:solidFill>
-                <a:latin typeface="Aptos" pitchFamily="34" charset="0"/>
-                <a:ea typeface="Aptos" pitchFamily="34" charset="-122"/>
-                <a:cs typeface="Aptos" pitchFamily="34" charset="-120"/>
-              </a:rPr>
-              <a:t>Play 7: Prioritize Use Cases - This lesson informs Play 7 by helping learners connect the lesson topic to.</a:t>
+                  <a:srgbClr val="003A63"/>
+                </a:solidFill>
+                <a:latin typeface="Aptos" pitchFamily="34" charset="0"/>
+                <a:ea typeface="Aptos" pitchFamily="34" charset="-122"/>
+                <a:cs typeface="Aptos" pitchFamily="34" charset="-120"/>
+              </a:rPr>
+              <a:t>• Play 7: Prioritize Use Cases - This lesson informs Play 7 by helping learners connect the.</a:t>
             </a:r>
             <a:endParaRPr lang="en-US" sz="1900" dirty="0"/>
           </a:p>
           <a:p>
+            <a:pPr indent="0" marL="0">
+              <a:buNone/>
+            </a:pPr>
             <a:r>
               <a:rPr lang="en-US" sz="1900" dirty="0">
                 <a:solidFill>
-                  <a:srgbClr val="17364A"/>
-                </a:solidFill>
-                <a:latin typeface="Aptos" pitchFamily="34" charset="0"/>
-                <a:ea typeface="Aptos" pitchFamily="34" charset="-122"/>
-                <a:cs typeface="Aptos" pitchFamily="34" charset="-120"/>
-              </a:rPr>
-              <a:t>Play 1: Vision &amp; Guardrails - This lesson informs Play 1 by helping learners connect the lesson topic to.</a:t>
+                  <a:srgbClr val="003A63"/>
+                </a:solidFill>
+                <a:latin typeface="Aptos" pitchFamily="34" charset="0"/>
+                <a:ea typeface="Aptos" pitchFamily="34" charset="-122"/>
+                <a:cs typeface="Aptos" pitchFamily="34" charset="-120"/>
+              </a:rPr>
+              <a:t>• Play 1: Vision &amp; Guardrails - This lesson informs Play 1 by helping learners connect the.</a:t>
             </a:r>
             <a:endParaRPr lang="en-US" sz="1900" dirty="0"/>
           </a:p>
           <a:p>
+            <a:pPr indent="0" marL="0">
+              <a:buNone/>
+            </a:pPr>
             <a:r>
               <a:rPr lang="en-US" sz="1900" dirty="0">
                 <a:solidFill>
-                  <a:srgbClr val="17364A"/>
-                </a:solidFill>
-                <a:latin typeface="Aptos" pitchFamily="34" charset="0"/>
-                <a:ea typeface="Aptos" pitchFamily="34" charset="-122"/>
-                <a:cs typeface="Aptos" pitchFamily="34" charset="-120"/>
-              </a:rPr>
-              <a:t>Play 13: Monitor and Evaluate AI Systems - This lesson informs Play 13 by helping learners connect the.</a:t>
+                  <a:srgbClr val="003A63"/>
+                </a:solidFill>
+                <a:latin typeface="Aptos" pitchFamily="34" charset="0"/>
+                <a:ea typeface="Aptos" pitchFamily="34" charset="-122"/>
+                <a:cs typeface="Aptos" pitchFamily="34" charset="-120"/>
+              </a:rPr>
+              <a:t>• Play 13: Monitor and Evaluate AI Systems - This lesson informs Play 13 by helping learners.</a:t>
             </a:r>
             <a:endParaRPr lang="en-US" sz="1900" dirty="0"/>
           </a:p>
@@ -12978,17 +13184,17 @@
         </p:nvSpPr>
         <p:spPr>
           <a:xfrm>
-            <a:off x="8211312" y="1920240"/>
-            <a:ext cx="2734056" cy="1463040"/>
-          </a:xfrm>
-          <a:prstGeom prst="rect">
-            <a:avLst/>
-          </a:prstGeom>
-          <a:noFill/>
-          <a:ln/>
-        </p:spPr>
-        <p:txBody>
-          <a:bodyPr wrap="square" lIns="0" tIns="0" rIns="0" bIns="0" rtlCol="0" anchor="t">
+            <a:off x="8211312" y="1892808"/>
+            <a:ext cx="2734056" cy="1536192"/>
+          </a:xfrm>
+          <a:prstGeom prst="rect">
+            <a:avLst/>
+          </a:prstGeom>
+          <a:noFill/>
+          <a:ln/>
+        </p:spPr>
+        <p:txBody>
+          <a:bodyPr wrap="square" lIns="254" tIns="254" rIns="254" bIns="254" rtlCol="0" anchor="t">
             <a:normAutofit/>
           </a:bodyPr>
           <a:lstStyle/>
@@ -12997,7 +13203,7 @@
               <a:buNone/>
             </a:pPr>
             <a:r>
-              <a:rPr lang="en-US" sz="1550" dirty="0">
+              <a:rPr lang="en-US" sz="1320" dirty="0">
                 <a:solidFill>
                   <a:srgbClr val="17364A"/>
                 </a:solidFill>
@@ -13005,9 +13211,9 @@
                 <a:ea typeface="Aptos" pitchFamily="34" charset="-122"/>
                 <a:cs typeface="Aptos" pitchFamily="34" charset="-120"/>
               </a:rPr>
-              <a:t>Use the related plays to identify decisions, participants, timing, approvals, and documentation needed for responsible implementation.</a:t>
-            </a:r>
-            <a:endParaRPr lang="en-US" sz="1550" dirty="0"/>
+              <a:t>Use the related plays to identify decisions, participants, timing, approvals, and documentation needed for responsible.</a:t>
+            </a:r>
+            <a:endParaRPr lang="en-US" sz="1320" dirty="0"/>
           </a:p>
         </p:txBody>
       </p:sp>
@@ -13095,13 +13301,16 @@
           <a:ln/>
         </p:spPr>
         <p:txBody>
-          <a:bodyPr wrap="square" lIns="254" tIns="254" rIns="254" bIns="254" rtlCol="0" anchor="t">
+          <a:bodyPr wrap="square" lIns="508" tIns="508" rIns="508" bIns="508" rtlCol="0" anchor="t">
             <a:normAutofit/>
           </a:bodyPr>
           <a:lstStyle/>
           <a:p>
-            <a:r>
-              <a:rPr lang="en-US" sz="1380" dirty="0">
+            <a:pPr indent="0" marL="0">
+              <a:buNone/>
+            </a:pPr>
+            <a:r>
+              <a:rPr lang="en-US" sz="1220" dirty="0">
                 <a:solidFill>
                   <a:srgbClr val="17364A"/>
                 </a:solidFill>
@@ -13111,11 +13320,14 @@
               </a:rPr>
               <a:t>Locate the decision point in the playbook sequence.</a:t>
             </a:r>
-            <a:endParaRPr lang="en-US" sz="1380" dirty="0"/>
-          </a:p>
-          <a:p>
-            <a:r>
-              <a:rPr lang="en-US" sz="1380" dirty="0">
+            <a:endParaRPr lang="en-US" sz="1220" dirty="0"/>
+          </a:p>
+          <a:p>
+            <a:pPr indent="0" marL="0">
+              <a:buNone/>
+            </a:pPr>
+            <a:r>
+              <a:rPr lang="en-US" sz="1220" dirty="0">
                 <a:solidFill>
                   <a:srgbClr val="17364A"/>
                 </a:solidFill>
@@ -13125,11 +13337,14 @@
               </a:rPr>
               <a:t>Identify who should participate in the work.</a:t>
             </a:r>
-            <a:endParaRPr lang="en-US" sz="1380" dirty="0"/>
-          </a:p>
-          <a:p>
-            <a:r>
-              <a:rPr lang="en-US" sz="1380" dirty="0">
+            <a:endParaRPr lang="en-US" sz="1220" dirty="0"/>
+          </a:p>
+          <a:p>
+            <a:pPr indent="0" marL="0">
+              <a:buNone/>
+            </a:pPr>
+            <a:r>
+              <a:rPr lang="en-US" sz="1220" dirty="0">
                 <a:solidFill>
                   <a:srgbClr val="17364A"/>
                 </a:solidFill>
@@ -13139,7 +13354,7 @@
               </a:rPr>
               <a:t>Document the review, approval, or implementation step.</a:t>
             </a:r>
-            <a:endParaRPr lang="en-US" sz="1380" dirty="0"/>
+            <a:endParaRPr lang="en-US" sz="1220" dirty="0"/>
           </a:p>
         </p:txBody>
       </p:sp>
@@ -13440,63 +13655,75 @@
           <a:ln/>
         </p:spPr>
         <p:txBody>
-          <a:bodyPr wrap="square" lIns="635" tIns="635" rIns="635" bIns="635" rtlCol="0" anchor="t">
+          <a:bodyPr wrap="square" lIns="1016" tIns="1016" rIns="1016" bIns="1016" rtlCol="0" anchor="t">
             <a:normAutofit/>
           </a:bodyPr>
           <a:lstStyle/>
           <a:p>
+            <a:pPr indent="0" marL="0">
+              <a:buNone/>
+            </a:pPr>
             <a:r>
               <a:rPr lang="en-US" sz="1850" dirty="0">
                 <a:solidFill>
-                  <a:srgbClr val="17364A"/>
-                </a:solidFill>
-                <a:latin typeface="Aptos" pitchFamily="34" charset="0"/>
-                <a:ea typeface="Aptos" pitchFamily="34" charset="-122"/>
-                <a:cs typeface="Aptos" pitchFamily="34" charset="-120"/>
-              </a:rPr>
-              <a:t>Tool 1: AI Vision &amp; Principles Workshop (Workshop) - Use this tool to complete or strengthen the practical.</a:t>
+                  <a:srgbClr val="003A63"/>
+                </a:solidFill>
+                <a:latin typeface="Aptos" pitchFamily="34" charset="0"/>
+                <a:ea typeface="Aptos" pitchFamily="34" charset="-122"/>
+                <a:cs typeface="Aptos" pitchFamily="34" charset="-120"/>
+              </a:rPr>
+              <a:t>• Tool 1: AI Vision &amp; Principles Workshop (Workshop) - Use this tool to complete or strengthen.</a:t>
             </a:r>
             <a:endParaRPr lang="en-US" sz="1850" dirty="0"/>
           </a:p>
           <a:p>
+            <a:pPr indent="0" marL="0">
+              <a:buNone/>
+            </a:pPr>
             <a:r>
               <a:rPr lang="en-US" sz="1850" dirty="0">
                 <a:solidFill>
-                  <a:srgbClr val="17364A"/>
-                </a:solidFill>
-                <a:latin typeface="Aptos" pitchFamily="34" charset="0"/>
-                <a:ea typeface="Aptos" pitchFamily="34" charset="-122"/>
-                <a:cs typeface="Aptos" pitchFamily="34" charset="-120"/>
-              </a:rPr>
-              <a:t>Tool 3: Equity Impact Assessment Checklist (Checklist) - Use this tool to complete or strengthen the.</a:t>
+                  <a:srgbClr val="003A63"/>
+                </a:solidFill>
+                <a:latin typeface="Aptos" pitchFamily="34" charset="0"/>
+                <a:ea typeface="Aptos" pitchFamily="34" charset="-122"/>
+                <a:cs typeface="Aptos" pitchFamily="34" charset="-120"/>
+              </a:rPr>
+              <a:t>• Tool 3: Equity Impact Assessment Checklist (Checklist) - Use this tool to complete or.</a:t>
             </a:r>
             <a:endParaRPr lang="en-US" sz="1850" dirty="0"/>
           </a:p>
           <a:p>
+            <a:pPr indent="0" marL="0">
+              <a:buNone/>
+            </a:pPr>
             <a:r>
               <a:rPr lang="en-US" sz="1850" dirty="0">
                 <a:solidFill>
-                  <a:srgbClr val="17364A"/>
-                </a:solidFill>
-                <a:latin typeface="Aptos" pitchFamily="34" charset="0"/>
-                <a:ea typeface="Aptos" pitchFamily="34" charset="-122"/>
-                <a:cs typeface="Aptos" pitchFamily="34" charset="-120"/>
-              </a:rPr>
-              <a:t>Tool 20: Community Engagement Planning (Planning) - Use Community Engagement Planning to translate this.</a:t>
+                  <a:srgbClr val="003A63"/>
+                </a:solidFill>
+                <a:latin typeface="Aptos" pitchFamily="34" charset="0"/>
+                <a:ea typeface="Aptos" pitchFamily="34" charset="-122"/>
+                <a:cs typeface="Aptos" pitchFamily="34" charset="-120"/>
+              </a:rPr>
+              <a:t>• Tool 20: Community Engagement Planning (Planning) - Use Community Engagement Planning to.</a:t>
             </a:r>
             <a:endParaRPr lang="en-US" sz="1850" dirty="0"/>
           </a:p>
           <a:p>
+            <a:pPr indent="0" marL="0">
+              <a:buNone/>
+            </a:pPr>
             <a:r>
               <a:rPr lang="en-US" sz="1850" dirty="0">
                 <a:solidFill>
-                  <a:srgbClr val="17364A"/>
-                </a:solidFill>
-                <a:latin typeface="Aptos" pitchFamily="34" charset="0"/>
-                <a:ea typeface="Aptos" pitchFamily="34" charset="-122"/>
-                <a:cs typeface="Aptos" pitchFamily="34" charset="-120"/>
-              </a:rPr>
-              <a:t>Tool 21: Stakeholder Mapping &amp; RACI (Template) - Use Stakeholder Mapping &amp; RACI to translate this lesson.</a:t>
+                  <a:srgbClr val="003A63"/>
+                </a:solidFill>
+                <a:latin typeface="Aptos" pitchFamily="34" charset="0"/>
+                <a:ea typeface="Aptos" pitchFamily="34" charset="-122"/>
+                <a:cs typeface="Aptos" pitchFamily="34" charset="-120"/>
+              </a:rPr>
+              <a:t>• Tool 21: Stakeholder Mapping &amp; RACI (Template) - Use Stakeholder Mapping &amp; RACI to translate.</a:t>
             </a:r>
             <a:endParaRPr lang="en-US" sz="1850" dirty="0"/>
           </a:p>
@@ -13576,17 +13803,17 @@
         </p:nvSpPr>
         <p:spPr>
           <a:xfrm>
-            <a:off x="8211312" y="1920240"/>
-            <a:ext cx="2734056" cy="1463040"/>
-          </a:xfrm>
-          <a:prstGeom prst="rect">
-            <a:avLst/>
-          </a:prstGeom>
-          <a:noFill/>
-          <a:ln/>
-        </p:spPr>
-        <p:txBody>
-          <a:bodyPr wrap="square" lIns="0" tIns="0" rIns="0" bIns="0" rtlCol="0" anchor="t">
+            <a:off x="8211312" y="1892808"/>
+            <a:ext cx="2734056" cy="1536192"/>
+          </a:xfrm>
+          <a:prstGeom prst="rect">
+            <a:avLst/>
+          </a:prstGeom>
+          <a:noFill/>
+          <a:ln/>
+        </p:spPr>
+        <p:txBody>
+          <a:bodyPr wrap="square" lIns="254" tIns="254" rIns="254" bIns="254" rtlCol="0" anchor="t">
             <a:normAutofit/>
           </a:bodyPr>
           <a:lstStyle/>
@@ -13595,7 +13822,7 @@
               <a:buNone/>
             </a:pPr>
             <a:r>
-              <a:rPr lang="en-US" sz="1550" dirty="0">
+              <a:rPr lang="en-US" sz="1320" dirty="0">
                 <a:solidFill>
                   <a:srgbClr val="17364A"/>
                 </a:solidFill>
@@ -13603,9 +13830,9 @@
                 <a:ea typeface="Aptos" pitchFamily="34" charset="-122"/>
                 <a:cs typeface="Aptos" pitchFamily="34" charset="-120"/>
               </a:rPr>
-              <a:t>Use linked tools when your department needs a structured worksheet, template, checklist, review process, or documentation artifact.</a:t>
-            </a:r>
-            <a:endParaRPr lang="en-US" sz="1550" dirty="0"/>
+              <a:t>Use linked tools when your department needs a structured worksheet, template, checklist, review process, or.</a:t>
+            </a:r>
+            <a:endParaRPr lang="en-US" sz="1320" dirty="0"/>
           </a:p>
         </p:txBody>
       </p:sp>
@@ -13693,13 +13920,16 @@
           <a:ln/>
         </p:spPr>
         <p:txBody>
-          <a:bodyPr wrap="square" lIns="254" tIns="254" rIns="254" bIns="254" rtlCol="0" anchor="t">
+          <a:bodyPr wrap="square" lIns="508" tIns="508" rIns="508" bIns="508" rtlCol="0" anchor="t">
             <a:normAutofit/>
           </a:bodyPr>
           <a:lstStyle/>
           <a:p>
-            <a:r>
-              <a:rPr lang="en-US" sz="1380" dirty="0">
+            <a:pPr indent="0" marL="0">
+              <a:buNone/>
+            </a:pPr>
+            <a:r>
+              <a:rPr lang="en-US" sz="1220" dirty="0">
                 <a:solidFill>
                   <a:srgbClr val="17364A"/>
                 </a:solidFill>
@@ -13709,11 +13939,14 @@
               </a:rPr>
               <a:t>Use a tool when no comparable local process exists.</a:t>
             </a:r>
-            <a:endParaRPr lang="en-US" sz="1380" dirty="0"/>
-          </a:p>
-          <a:p>
-            <a:r>
-              <a:rPr lang="en-US" sz="1380" dirty="0">
+            <a:endParaRPr lang="en-US" sz="1220" dirty="0"/>
+          </a:p>
+          <a:p>
+            <a:pPr indent="0" marL="0">
+              <a:buNone/>
+            </a:pPr>
+            <a:r>
+              <a:rPr lang="en-US" sz="1220" dirty="0">
                 <a:solidFill>
                   <a:srgbClr val="17364A"/>
                 </a:solidFill>
@@ -13721,13 +13954,16 @@
                 <a:ea typeface="Aptos" pitchFamily="34" charset="-122"/>
                 <a:cs typeface="Aptos" pitchFamily="34" charset="-120"/>
               </a:rPr>
-              <a:t>Adapt existing department templates when they already fit the purpose.</a:t>
-            </a:r>
-            <a:endParaRPr lang="en-US" sz="1380" dirty="0"/>
-          </a:p>
-          <a:p>
-            <a:r>
-              <a:rPr lang="en-US" sz="1380" dirty="0">
+              <a:t>Adapt existing department templates when they already fit the.</a:t>
+            </a:r>
+            <a:endParaRPr lang="en-US" sz="1220" dirty="0"/>
+          </a:p>
+          <a:p>
+            <a:pPr indent="0" marL="0">
+              <a:buNone/>
+            </a:pPr>
+            <a:r>
+              <a:rPr lang="en-US" sz="1220" dirty="0">
                 <a:solidFill>
                   <a:srgbClr val="17364A"/>
                 </a:solidFill>
@@ -13737,7 +13973,7 @@
               </a:rPr>
               <a:t>Save the completed artifact as evidence of the decision.</a:t>
             </a:r>
-            <a:endParaRPr lang="en-US" sz="1380" dirty="0"/>
+            <a:endParaRPr lang="en-US" sz="1220" dirty="0"/>
           </a:p>
         </p:txBody>
       </p:sp>
@@ -14038,49 +14274,58 @@
           <a:ln/>
         </p:spPr>
         <p:txBody>
-          <a:bodyPr wrap="square" lIns="635" tIns="635" rIns="635" bIns="635" rtlCol="0" anchor="t">
+          <a:bodyPr wrap="square" lIns="1016" tIns="1016" rIns="1016" bIns="1016" rtlCol="0" anchor="t">
             <a:normAutofit/>
           </a:bodyPr>
           <a:lstStyle/>
           <a:p>
+            <a:pPr indent="0" marL="0">
+              <a:buNone/>
+            </a:pPr>
             <a:r>
               <a:rPr lang="en-US" sz="2100" dirty="0">
                 <a:solidFill>
-                  <a:srgbClr val="17364A"/>
-                </a:solidFill>
-                <a:latin typeface="Aptos" pitchFamily="34" charset="0"/>
-                <a:ea typeface="Aptos" pitchFamily="34" charset="-122"/>
-                <a:cs typeface="Aptos" pitchFamily="34" charset="-120"/>
-              </a:rPr>
-              <a:t>Explain why generative AI outputs require structured review before public health use.</a:t>
+                  <a:srgbClr val="003A63"/>
+                </a:solidFill>
+                <a:latin typeface="Aptos" pitchFamily="34" charset="0"/>
+                <a:ea typeface="Aptos" pitchFamily="34" charset="-122"/>
+                <a:cs typeface="Aptos" pitchFamily="34" charset="-120"/>
+              </a:rPr>
+              <a:t>• Explain why generative AI outputs require structured review before public health use.</a:t>
             </a:r>
             <a:endParaRPr lang="en-US" sz="2100" dirty="0"/>
           </a:p>
           <a:p>
+            <a:pPr indent="0" marL="0">
+              <a:buNone/>
+            </a:pPr>
             <a:r>
               <a:rPr lang="en-US" sz="2100" dirty="0">
                 <a:solidFill>
-                  <a:srgbClr val="17364A"/>
-                </a:solidFill>
-                <a:latin typeface="Aptos" pitchFamily="34" charset="0"/>
-                <a:ea typeface="Aptos" pitchFamily="34" charset="-122"/>
-                <a:cs typeface="Aptos" pitchFamily="34" charset="-120"/>
-              </a:rPr>
-              <a:t>Distinguish factuality, source grounding, completeness, relevance, tone, and accessibility.</a:t>
+                  <a:srgbClr val="003A63"/>
+                </a:solidFill>
+                <a:latin typeface="Aptos" pitchFamily="34" charset="0"/>
+                <a:ea typeface="Aptos" pitchFamily="34" charset="-122"/>
+                <a:cs typeface="Aptos" pitchFamily="34" charset="-120"/>
+              </a:rPr>
+              <a:t>• Distinguish factuality, source grounding, completeness, relevance, tone, and accessibility.</a:t>
             </a:r>
             <a:endParaRPr lang="en-US" sz="2100" dirty="0"/>
           </a:p>
           <a:p>
+            <a:pPr indent="0" marL="0">
+              <a:buNone/>
+            </a:pPr>
             <a:r>
               <a:rPr lang="en-US" sz="2100" dirty="0">
                 <a:solidFill>
-                  <a:srgbClr val="17364A"/>
-                </a:solidFill>
-                <a:latin typeface="Aptos" pitchFamily="34" charset="0"/>
-                <a:ea typeface="Aptos" pitchFamily="34" charset="-122"/>
-                <a:cs typeface="Aptos" pitchFamily="34" charset="-120"/>
-              </a:rPr>
-              <a:t>Identify hallucinations, omissions, unsupported claims, and misleading certainty.</a:t>
+                  <a:srgbClr val="003A63"/>
+                </a:solidFill>
+                <a:latin typeface="Aptos" pitchFamily="34" charset="0"/>
+                <a:ea typeface="Aptos" pitchFamily="34" charset="-122"/>
+                <a:cs typeface="Aptos" pitchFamily="34" charset="-120"/>
+              </a:rPr>
+              <a:t>• Identify hallucinations, omissions, unsupported claims, and misleading certainty.</a:t>
             </a:r>
             <a:endParaRPr lang="en-US" sz="2100" dirty="0"/>
           </a:p>
@@ -14160,17 +14405,17 @@
         </p:nvSpPr>
         <p:spPr>
           <a:xfrm>
-            <a:off x="7799832" y="1828800"/>
-            <a:ext cx="3145536" cy="685800"/>
-          </a:xfrm>
-          <a:prstGeom prst="rect">
-            <a:avLst/>
-          </a:prstGeom>
-          <a:noFill/>
-          <a:ln/>
-        </p:spPr>
-        <p:txBody>
-          <a:bodyPr wrap="square" lIns="0" tIns="0" rIns="0" bIns="0" rtlCol="0" anchor="t">
+            <a:off x="7799832" y="1801368"/>
+            <a:ext cx="3145536" cy="758952"/>
+          </a:xfrm>
+          <a:prstGeom prst="rect">
+            <a:avLst/>
+          </a:prstGeom>
+          <a:noFill/>
+          <a:ln/>
+        </p:spPr>
+        <p:txBody>
+          <a:bodyPr wrap="square" lIns="254" tIns="254" rIns="254" bIns="254" rtlCol="0" anchor="t">
             <a:normAutofit/>
           </a:bodyPr>
           <a:lstStyle/>
@@ -14179,7 +14424,7 @@
               <a:buNone/>
             </a:pPr>
             <a:r>
-              <a:rPr lang="en-US" sz="1550" dirty="0">
+              <a:rPr lang="en-US" sz="1320" dirty="0">
                 <a:solidFill>
                   <a:srgbClr val="17364A"/>
                 </a:solidFill>
@@ -14189,7 +14434,7 @@
               </a:rPr>
               <a:t>Explain why generative AI outputs require structured review before public health use.</a:t>
             </a:r>
-            <a:endParaRPr lang="en-US" sz="1550" dirty="0"/>
+            <a:endParaRPr lang="en-US" sz="1320" dirty="0"/>
           </a:p>
         </p:txBody>
       </p:sp>
@@ -14277,13 +14522,16 @@
           <a:ln/>
         </p:spPr>
         <p:txBody>
-          <a:bodyPr wrap="square" lIns="254" tIns="254" rIns="254" bIns="254" rtlCol="0" anchor="t">
+          <a:bodyPr wrap="square" lIns="508" tIns="508" rIns="508" bIns="508" rtlCol="0" anchor="t">
             <a:normAutofit/>
           </a:bodyPr>
           <a:lstStyle/>
           <a:p>
-            <a:r>
-              <a:rPr lang="en-US" sz="1380" dirty="0">
+            <a:pPr indent="0" marL="0">
+              <a:buNone/>
+            </a:pPr>
+            <a:r>
+              <a:rPr lang="en-US" sz="1220" dirty="0">
                 <a:solidFill>
                   <a:srgbClr val="17364A"/>
                 </a:solidFill>
@@ -14291,13 +14539,16 @@
                 <a:ea typeface="Aptos" pitchFamily="34" charset="-122"/>
                 <a:cs typeface="Aptos" pitchFamily="34" charset="-120"/>
               </a:rPr>
-              <a:t>Design review criteria for different output types, including summaries, drafts,.</a:t>
-            </a:r>
-            <a:endParaRPr lang="en-US" sz="1380" dirty="0"/>
-          </a:p>
-          <a:p>
-            <a:r>
-              <a:rPr lang="en-US" sz="1380" dirty="0">
+              <a:t>Design review criteria for different output types, including.</a:t>
+            </a:r>
+            <a:endParaRPr lang="en-US" sz="1220" dirty="0"/>
+          </a:p>
+          <a:p>
+            <a:pPr indent="0" marL="0">
+              <a:buNone/>
+            </a:pPr>
+            <a:r>
+              <a:rPr lang="en-US" sz="1220" dirty="0">
                 <a:solidFill>
                   <a:srgbClr val="17364A"/>
                 </a:solidFill>
@@ -14305,9 +14556,9 @@
                 <a:ea typeface="Aptos" pitchFamily="34" charset="-122"/>
                 <a:cs typeface="Aptos" pitchFamily="34" charset="-120"/>
               </a:rPr>
-              <a:t>Apply stronger review requirements for sensitive, public-facing, or consequential outputs.</a:t>
-            </a:r>
-            <a:endParaRPr lang="en-US" sz="1380" dirty="0"/>
+              <a:t>Apply stronger review requirements for sensitive, public-facing,.</a:t>
+            </a:r>
+            <a:endParaRPr lang="en-US" sz="1220" dirty="0"/>
           </a:p>
         </p:txBody>
       </p:sp>
@@ -14385,17 +14636,17 @@
         </p:nvSpPr>
         <p:spPr>
           <a:xfrm>
-            <a:off x="7799832" y="5001768"/>
-            <a:ext cx="3145536" cy="502920"/>
-          </a:xfrm>
-          <a:prstGeom prst="rect">
-            <a:avLst/>
-          </a:prstGeom>
-          <a:noFill/>
-          <a:ln/>
-        </p:spPr>
-        <p:txBody>
-          <a:bodyPr wrap="square" lIns="0" tIns="0" rIns="0" bIns="0" rtlCol="0" anchor="t">
+            <a:off x="7799832" y="4974336"/>
+            <a:ext cx="3145536" cy="576072"/>
+          </a:xfrm>
+          <a:prstGeom prst="rect">
+            <a:avLst/>
+          </a:prstGeom>
+          <a:noFill/>
+          <a:ln/>
+        </p:spPr>
+        <p:txBody>
+          <a:bodyPr wrap="square" lIns="254" tIns="254" rIns="254" bIns="254" rtlCol="0" anchor="t">
             <a:normAutofit/>
           </a:bodyPr>
           <a:lstStyle/>
@@ -14404,7 +14655,7 @@
               <a:buNone/>
             </a:pPr>
             <a:r>
-              <a:rPr lang="en-US" sz="1550" dirty="0">
+              <a:rPr lang="en-US" sz="1320" dirty="0">
                 <a:solidFill>
                   <a:srgbClr val="17364A"/>
                 </a:solidFill>
@@ -14412,9 +14663,9 @@
                 <a:ea typeface="Aptos" pitchFamily="34" charset="-122"/>
                 <a:cs typeface="Aptos" pitchFamily="34" charset="-120"/>
               </a:rPr>
-              <a:t>Use the assignment to test whether you can explain the concept, apply it to a realistic public health situation, and identify what would need review before the work moves forward.</a:t>
-            </a:r>
-            <a:endParaRPr lang="en-US" sz="1550" dirty="0"/>
+              <a:t>Use the assignment to test whether you can explain the concept, apply it to a realistic public health situation, and.</a:t>
+            </a:r>
+            <a:endParaRPr lang="en-US" sz="1320" dirty="0"/>
           </a:p>
         </p:txBody>
       </p:sp>
@@ -14715,21 +14966,24 @@
           <a:ln/>
         </p:spPr>
         <p:txBody>
-          <a:bodyPr wrap="square" lIns="635" tIns="635" rIns="635" bIns="635" rtlCol="0" anchor="t">
+          <a:bodyPr wrap="square" lIns="1016" tIns="1016" rIns="1016" bIns="1016" rtlCol="0" anchor="t">
             <a:normAutofit/>
           </a:bodyPr>
           <a:lstStyle/>
           <a:p>
+            <a:pPr indent="0" marL="0">
+              <a:buNone/>
+            </a:pPr>
             <a:r>
               <a:rPr lang="en-US" sz="2100" dirty="0">
                 <a:solidFill>
-                  <a:srgbClr val="17364A"/>
-                </a:solidFill>
-                <a:latin typeface="Aptos" pitchFamily="34" charset="0"/>
-                <a:ea typeface="Aptos" pitchFamily="34" charset="-122"/>
-                <a:cs typeface="Aptos" pitchFamily="34" charset="-120"/>
-              </a:rPr>
-              <a:t>Produce a generative AI output evaluation rubric.</a:t>
+                  <a:srgbClr val="003A63"/>
+                </a:solidFill>
+                <a:latin typeface="Aptos" pitchFamily="34" charset="0"/>
+                <a:ea typeface="Aptos" pitchFamily="34" charset="-122"/>
+                <a:cs typeface="Aptos" pitchFamily="34" charset="-120"/>
+              </a:rPr>
+              <a:t>• Produce a generative AI output evaluation rubric.</a:t>
             </a:r>
             <a:endParaRPr lang="en-US" sz="2100" dirty="0"/>
           </a:p>
@@ -14809,17 +15063,17 @@
         </p:nvSpPr>
         <p:spPr>
           <a:xfrm>
-            <a:off x="7799832" y="1828800"/>
-            <a:ext cx="3145536" cy="685800"/>
-          </a:xfrm>
-          <a:prstGeom prst="rect">
-            <a:avLst/>
-          </a:prstGeom>
-          <a:noFill/>
-          <a:ln/>
-        </p:spPr>
-        <p:txBody>
-          <a:bodyPr wrap="square" lIns="0" tIns="0" rIns="0" bIns="0" rtlCol="0" anchor="t">
+            <a:off x="7799832" y="1801368"/>
+            <a:ext cx="3145536" cy="758952"/>
+          </a:xfrm>
+          <a:prstGeom prst="rect">
+            <a:avLst/>
+          </a:prstGeom>
+          <a:noFill/>
+          <a:ln/>
+        </p:spPr>
+        <p:txBody>
+          <a:bodyPr wrap="square" lIns="254" tIns="254" rIns="254" bIns="254" rtlCol="0" anchor="t">
             <a:normAutofit/>
           </a:bodyPr>
           <a:lstStyle/>
@@ -14828,7 +15082,7 @@
               <a:buNone/>
             </a:pPr>
             <a:r>
-              <a:rPr lang="en-US" sz="1550" dirty="0">
+              <a:rPr lang="en-US" sz="1320" dirty="0">
                 <a:solidFill>
                   <a:srgbClr val="17364A"/>
                 </a:solidFill>
@@ -14838,7 +15092,7 @@
               </a:rPr>
               <a:t>Produce a generative AI output evaluation rubric.</a:t>
             </a:r>
-            <a:endParaRPr lang="en-US" sz="1550" dirty="0"/>
+            <a:endParaRPr lang="en-US" sz="1320" dirty="0"/>
           </a:p>
         </p:txBody>
       </p:sp>
@@ -14926,13 +15180,16 @@
           <a:ln/>
         </p:spPr>
         <p:txBody>
-          <a:bodyPr wrap="square" lIns="254" tIns="254" rIns="254" bIns="254" rtlCol="0" anchor="t">
+          <a:bodyPr wrap="square" lIns="508" tIns="508" rIns="508" bIns="508" rtlCol="0" anchor="t">
             <a:normAutofit/>
           </a:bodyPr>
           <a:lstStyle/>
           <a:p>
-            <a:r>
-              <a:rPr lang="en-US" sz="1380" dirty="0">
+            <a:pPr indent="0" marL="0">
+              <a:buNone/>
+            </a:pPr>
+            <a:r>
+              <a:rPr lang="en-US" sz="1220" dirty="0">
                 <a:solidFill>
                   <a:srgbClr val="17364A"/>
                 </a:solidFill>
@@ -14942,7 +15199,7 @@
               </a:rPr>
               <a:t>Produce a generative AI output evaluation rubric.</a:t>
             </a:r>
-            <a:endParaRPr lang="en-US" sz="1380" dirty="0"/>
+            <a:endParaRPr lang="en-US" sz="1220" dirty="0"/>
           </a:p>
         </p:txBody>
       </p:sp>
@@ -15020,17 +15277,17 @@
         </p:nvSpPr>
         <p:spPr>
           <a:xfrm>
-            <a:off x="7799832" y="5001768"/>
-            <a:ext cx="3145536" cy="502920"/>
-          </a:xfrm>
-          <a:prstGeom prst="rect">
-            <a:avLst/>
-          </a:prstGeom>
-          <a:noFill/>
-          <a:ln/>
-        </p:spPr>
-        <p:txBody>
-          <a:bodyPr wrap="square" lIns="0" tIns="0" rIns="0" bIns="0" rtlCol="0" anchor="t">
+            <a:off x="7799832" y="4974336"/>
+            <a:ext cx="3145536" cy="576072"/>
+          </a:xfrm>
+          <a:prstGeom prst="rect">
+            <a:avLst/>
+          </a:prstGeom>
+          <a:noFill/>
+          <a:ln/>
+        </p:spPr>
+        <p:txBody>
+          <a:bodyPr wrap="square" lIns="254" tIns="254" rIns="254" bIns="254" rtlCol="0" anchor="t">
             <a:normAutofit/>
           </a:bodyPr>
           <a:lstStyle/>
@@ -15039,7 +15296,7 @@
               <a:buNone/>
             </a:pPr>
             <a:r>
-              <a:rPr lang="en-US" sz="1550" dirty="0">
+              <a:rPr lang="en-US" sz="1320" dirty="0">
                 <a:solidFill>
                   <a:srgbClr val="17364A"/>
                 </a:solidFill>
@@ -15047,9 +15304,9 @@
                 <a:ea typeface="Aptos" pitchFamily="34" charset="-122"/>
                 <a:cs typeface="Aptos" pitchFamily="34" charset="-120"/>
               </a:rPr>
-              <a:t>Use the assignment to test whether you can explain the concept, apply it to a realistic public health situation, and identify what would need review before the work moves forward.</a:t>
-            </a:r>
-            <a:endParaRPr lang="en-US" sz="1550" dirty="0"/>
+              <a:t>Use the assignment to test whether you can explain the concept, apply it to a realistic public health situation, and.</a:t>
+            </a:r>
+            <a:endParaRPr lang="en-US" sz="1320" dirty="0"/>
           </a:p>
         </p:txBody>
       </p:sp>
@@ -15350,49 +15607,58 @@
           <a:ln/>
         </p:spPr>
         <p:txBody>
-          <a:bodyPr wrap="square" lIns="635" tIns="635" rIns="635" bIns="635" rtlCol="0" anchor="t">
+          <a:bodyPr wrap="square" lIns="1016" tIns="1016" rIns="1016" bIns="1016" rtlCol="0" anchor="t">
             <a:normAutofit/>
           </a:bodyPr>
           <a:lstStyle/>
           <a:p>
+            <a:pPr indent="0" marL="0">
+              <a:buNone/>
+            </a:pPr>
             <a:r>
               <a:rPr lang="en-US" sz="2100" dirty="0">
                 <a:solidFill>
-                  <a:srgbClr val="17364A"/>
-                </a:solidFill>
-                <a:latin typeface="Aptos" pitchFamily="34" charset="0"/>
-                <a:ea typeface="Aptos" pitchFamily="34" charset="-122"/>
-                <a:cs typeface="Aptos" pitchFamily="34" charset="-120"/>
-              </a:rPr>
-              <a:t>Generative AI can draft, summarize, translate, classify, explain, and synthesize information, but its.</a:t>
+                  <a:srgbClr val="003A63"/>
+                </a:solidFill>
+                <a:latin typeface="Aptos" pitchFamily="34" charset="0"/>
+                <a:ea typeface="Aptos" pitchFamily="34" charset="-122"/>
+                <a:cs typeface="Aptos" pitchFamily="34" charset="-120"/>
+              </a:rPr>
+              <a:t>• Generative AI can draft, summarize, translate, classify, explain, and synthesize information,.</a:t>
             </a:r>
             <a:endParaRPr lang="en-US" sz="2100" dirty="0"/>
           </a:p>
           <a:p>
+            <a:pPr indent="0" marL="0">
+              <a:buNone/>
+            </a:pPr>
             <a:r>
               <a:rPr lang="en-US" sz="2100" dirty="0">
                 <a:solidFill>
-                  <a:srgbClr val="17364A"/>
-                </a:solidFill>
-                <a:latin typeface="Aptos" pitchFamily="34" charset="0"/>
-                <a:ea typeface="Aptos" pitchFamily="34" charset="-122"/>
-                <a:cs typeface="Aptos" pitchFamily="34" charset="-120"/>
-              </a:rPr>
-              <a:t>In public health, generated content may affect case review, public communication, policy.</a:t>
+                  <a:srgbClr val="003A63"/>
+                </a:solidFill>
+                <a:latin typeface="Aptos" pitchFamily="34" charset="0"/>
+                <a:ea typeface="Aptos" pitchFamily="34" charset="-122"/>
+                <a:cs typeface="Aptos" pitchFamily="34" charset="-120"/>
+              </a:rPr>
+              <a:t>• In public health, generated content may affect case review, public communication, policy.</a:t>
             </a:r>
             <a:endParaRPr lang="en-US" sz="2100" dirty="0"/>
           </a:p>
           <a:p>
+            <a:pPr indent="0" marL="0">
+              <a:buNone/>
+            </a:pPr>
             <a:r>
               <a:rPr lang="en-US" sz="2100" dirty="0">
                 <a:solidFill>
-                  <a:srgbClr val="17364A"/>
-                </a:solidFill>
-                <a:latin typeface="Aptos" pitchFamily="34" charset="0"/>
-                <a:ea typeface="Aptos" pitchFamily="34" charset="-122"/>
-                <a:cs typeface="Aptos" pitchFamily="34" charset="-120"/>
-              </a:rPr>
-              <a:t>Fluent writing does not guarantee accuracy, completeness, appropriateness, or safety.</a:t>
+                  <a:srgbClr val="003A63"/>
+                </a:solidFill>
+                <a:latin typeface="Aptos" pitchFamily="34" charset="0"/>
+                <a:ea typeface="Aptos" pitchFamily="34" charset="-122"/>
+                <a:cs typeface="Aptos" pitchFamily="34" charset="-120"/>
+              </a:rPr>
+              <a:t>• Fluent writing does not guarantee accuracy, completeness, appropriateness, or safety.</a:t>
             </a:r>
             <a:endParaRPr lang="en-US" sz="2100" dirty="0"/>
           </a:p>
@@ -15472,17 +15738,17 @@
         </p:nvSpPr>
         <p:spPr>
           <a:xfrm>
-            <a:off x="7799832" y="1828800"/>
-            <a:ext cx="3145536" cy="685800"/>
-          </a:xfrm>
-          <a:prstGeom prst="rect">
-            <a:avLst/>
-          </a:prstGeom>
-          <a:noFill/>
-          <a:ln/>
-        </p:spPr>
-        <p:txBody>
-          <a:bodyPr wrap="square" lIns="0" tIns="0" rIns="0" bIns="0" rtlCol="0" anchor="t">
+            <a:off x="7799832" y="1801368"/>
+            <a:ext cx="3145536" cy="758952"/>
+          </a:xfrm>
+          <a:prstGeom prst="rect">
+            <a:avLst/>
+          </a:prstGeom>
+          <a:noFill/>
+          <a:ln/>
+        </p:spPr>
+        <p:txBody>
+          <a:bodyPr wrap="square" lIns="254" tIns="254" rIns="254" bIns="254" rtlCol="0" anchor="t">
             <a:normAutofit/>
           </a:bodyPr>
           <a:lstStyle/>
@@ -15491,7 +15757,7 @@
               <a:buNone/>
             </a:pPr>
             <a:r>
-              <a:rPr lang="en-US" sz="1550" dirty="0">
+              <a:rPr lang="en-US" sz="1320" dirty="0">
                 <a:solidFill>
                   <a:srgbClr val="17364A"/>
                 </a:solidFill>
@@ -15501,7 +15767,7 @@
               </a:rPr>
               <a:t>Generative AI can draft, summarize, translate, classify, explain, and synthesize information, but its.</a:t>
             </a:r>
-            <a:endParaRPr lang="en-US" sz="1550" dirty="0"/>
+            <a:endParaRPr lang="en-US" sz="1320" dirty="0"/>
           </a:p>
         </p:txBody>
       </p:sp>
@@ -15589,13 +15855,16 @@
           <a:ln/>
         </p:spPr>
         <p:txBody>
-          <a:bodyPr wrap="square" lIns="254" tIns="254" rIns="254" bIns="254" rtlCol="0" anchor="t">
+          <a:bodyPr wrap="square" lIns="508" tIns="508" rIns="508" bIns="508" rtlCol="0" anchor="t">
             <a:normAutofit/>
           </a:bodyPr>
           <a:lstStyle/>
           <a:p>
-            <a:r>
-              <a:rPr lang="en-US" sz="1380" dirty="0">
+            <a:pPr indent="0" marL="0">
+              <a:buNone/>
+            </a:pPr>
+            <a:r>
+              <a:rPr lang="en-US" sz="1220" dirty="0">
                 <a:solidFill>
                   <a:srgbClr val="17364A"/>
                 </a:solidFill>
@@ -15603,13 +15872,16 @@
                 <a:ea typeface="Aptos" pitchFamily="34" charset="-122"/>
                 <a:cs typeface="Aptos" pitchFamily="34" charset="-120"/>
               </a:rPr>
-              <a:t>Generative AI can draft, summarize, translate, classify, explain, and synthesize.</a:t>
-            </a:r>
-            <a:endParaRPr lang="en-US" sz="1380" dirty="0"/>
-          </a:p>
-          <a:p>
-            <a:r>
-              <a:rPr lang="en-US" sz="1380" dirty="0">
+              <a:t>Generative AI can draft, summarize, translate, classify, explain,.</a:t>
+            </a:r>
+            <a:endParaRPr lang="en-US" sz="1220" dirty="0"/>
+          </a:p>
+          <a:p>
+            <a:pPr indent="0" marL="0">
+              <a:buNone/>
+            </a:pPr>
+            <a:r>
+              <a:rPr lang="en-US" sz="1220" dirty="0">
                 <a:solidFill>
                   <a:srgbClr val="17364A"/>
                 </a:solidFill>
@@ -15617,13 +15889,16 @@
                 <a:ea typeface="Aptos" pitchFamily="34" charset="-122"/>
                 <a:cs typeface="Aptos" pitchFamily="34" charset="-120"/>
               </a:rPr>
-              <a:t>In public health, generated content may affect case review, public communication, policy.</a:t>
-            </a:r>
-            <a:endParaRPr lang="en-US" sz="1380" dirty="0"/>
-          </a:p>
-          <a:p>
-            <a:r>
-              <a:rPr lang="en-US" sz="1380" dirty="0">
+              <a:t>In public health, generated content may affect case review, public.</a:t>
+            </a:r>
+            <a:endParaRPr lang="en-US" sz="1220" dirty="0"/>
+          </a:p>
+          <a:p>
+            <a:pPr indent="0" marL="0">
+              <a:buNone/>
+            </a:pPr>
+            <a:r>
+              <a:rPr lang="en-US" sz="1220" dirty="0">
                 <a:solidFill>
                   <a:srgbClr val="17364A"/>
                 </a:solidFill>
@@ -15631,9 +15906,9 @@
                 <a:ea typeface="Aptos" pitchFamily="34" charset="-122"/>
                 <a:cs typeface="Aptos" pitchFamily="34" charset="-120"/>
               </a:rPr>
-              <a:t>This module teaches learners how to evaluate generative AI outputs using structured review.</a:t>
-            </a:r>
-            <a:endParaRPr lang="en-US" sz="1380" dirty="0"/>
+              <a:t>This module teaches learners how to evaluate generative AI outputs.</a:t>
+            </a:r>
+            <a:endParaRPr lang="en-US" sz="1220" dirty="0"/>
           </a:p>
         </p:txBody>
       </p:sp>
@@ -15711,17 +15986,17 @@
         </p:nvSpPr>
         <p:spPr>
           <a:xfrm>
-            <a:off x="7799832" y="5001768"/>
-            <a:ext cx="3145536" cy="502920"/>
-          </a:xfrm>
-          <a:prstGeom prst="rect">
-            <a:avLst/>
-          </a:prstGeom>
-          <a:noFill/>
-          <a:ln/>
-        </p:spPr>
-        <p:txBody>
-          <a:bodyPr wrap="square" lIns="0" tIns="0" rIns="0" bIns="0" rtlCol="0" anchor="t">
+            <a:off x="7799832" y="4974336"/>
+            <a:ext cx="3145536" cy="576072"/>
+          </a:xfrm>
+          <a:prstGeom prst="rect">
+            <a:avLst/>
+          </a:prstGeom>
+          <a:noFill/>
+          <a:ln/>
+        </p:spPr>
+        <p:txBody>
+          <a:bodyPr wrap="square" lIns="254" tIns="254" rIns="254" bIns="254" rtlCol="0" anchor="t">
             <a:normAutofit/>
           </a:bodyPr>
           <a:lstStyle/>
@@ -15730,7 +16005,7 @@
               <a:buNone/>
             </a:pPr>
             <a:r>
-              <a:rPr lang="en-US" sz="1550" dirty="0">
+              <a:rPr lang="en-US" sz="1320" dirty="0">
                 <a:solidFill>
                   <a:srgbClr val="17364A"/>
                 </a:solidFill>
@@ -15738,9 +16013,9 @@
                 <a:ea typeface="Aptos" pitchFamily="34" charset="-122"/>
                 <a:cs typeface="Aptos" pitchFamily="34" charset="-120"/>
               </a:rPr>
-              <a:t>Connect the concept to data quality, model performance, validation evidence, monitoring measures, and decisions that remain under human control.</a:t>
-            </a:r>
-            <a:endParaRPr lang="en-US" sz="1550" dirty="0"/>
+              <a:t>Connect the concept to data quality, model performance, validation evidence, monitoring measures, and decisions that.</a:t>
+            </a:r>
+            <a:endParaRPr lang="en-US" sz="1320" dirty="0"/>
           </a:p>
         </p:txBody>
       </p:sp>
@@ -16041,49 +16316,58 @@
           <a:ln/>
         </p:spPr>
         <p:txBody>
-          <a:bodyPr wrap="square" lIns="635" tIns="635" rIns="635" bIns="635" rtlCol="0" anchor="t">
+          <a:bodyPr wrap="square" lIns="1016" tIns="1016" rIns="1016" bIns="1016" rtlCol="0" anchor="t">
             <a:normAutofit/>
           </a:bodyPr>
           <a:lstStyle/>
           <a:p>
+            <a:pPr indent="0" marL="0">
+              <a:buNone/>
+            </a:pPr>
             <a:r>
               <a:rPr lang="en-US" sz="2100" dirty="0">
                 <a:solidFill>
-                  <a:srgbClr val="17364A"/>
-                </a:solidFill>
-                <a:latin typeface="Aptos" pitchFamily="34" charset="0"/>
-                <a:ea typeface="Aptos" pitchFamily="34" charset="-122"/>
-                <a:cs typeface="Aptos" pitchFamily="34" charset="-120"/>
-              </a:rPr>
-              <a:t>Generative AI matters for public health because it can reduce burden in text-heavy workflows.</a:t>
+                  <a:srgbClr val="003A63"/>
+                </a:solidFill>
+                <a:latin typeface="Aptos" pitchFamily="34" charset="0"/>
+                <a:ea typeface="Aptos" pitchFamily="34" charset="-122"/>
+                <a:cs typeface="Aptos" pitchFamily="34" charset="-120"/>
+              </a:rPr>
+              <a:t>• Generative AI matters for public health because it can reduce burden in text-heavy workflows.</a:t>
             </a:r>
             <a:endParaRPr lang="en-US" sz="2100" dirty="0"/>
           </a:p>
           <a:p>
+            <a:pPr indent="0" marL="0">
+              <a:buNone/>
+            </a:pPr>
             <a:r>
               <a:rPr lang="en-US" sz="2100" dirty="0">
                 <a:solidFill>
-                  <a:srgbClr val="17364A"/>
-                </a:solidFill>
-                <a:latin typeface="Aptos" pitchFamily="34" charset="0"/>
-                <a:ea typeface="Aptos" pitchFamily="34" charset="-122"/>
-                <a:cs typeface="Aptos" pitchFamily="34" charset="-120"/>
-              </a:rPr>
-              <a:t>Staff may use it to summarize guidance, draft meeting notes, simplify technical language, translate or.</a:t>
+                  <a:srgbClr val="003A63"/>
+                </a:solidFill>
+                <a:latin typeface="Aptos" pitchFamily="34" charset="0"/>
+                <a:ea typeface="Aptos" pitchFamily="34" charset="-122"/>
+                <a:cs typeface="Aptos" pitchFamily="34" charset="-120"/>
+              </a:rPr>
+              <a:t>• Staff may use it to summarize guidance, draft meeting notes, simplify technical language,.</a:t>
             </a:r>
             <a:endParaRPr lang="en-US" sz="2100" dirty="0"/>
           </a:p>
           <a:p>
+            <a:pPr indent="0" marL="0">
+              <a:buNone/>
+            </a:pPr>
             <a:r>
               <a:rPr lang="en-US" sz="2100" dirty="0">
                 <a:solidFill>
-                  <a:srgbClr val="17364A"/>
-                </a:solidFill>
-                <a:latin typeface="Aptos" pitchFamily="34" charset="0"/>
-                <a:ea typeface="Aptos" pitchFamily="34" charset="-122"/>
-                <a:cs typeface="Aptos" pitchFamily="34" charset="-120"/>
-              </a:rPr>
-              <a:t>These uses can be valuable when they save time and improve clarity.</a:t>
+                  <a:srgbClr val="003A63"/>
+                </a:solidFill>
+                <a:latin typeface="Aptos" pitchFamily="34" charset="0"/>
+                <a:ea typeface="Aptos" pitchFamily="34" charset="-122"/>
+                <a:cs typeface="Aptos" pitchFamily="34" charset="-120"/>
+              </a:rPr>
+              <a:t>• These uses can be valuable when they save time and improve clarity.</a:t>
             </a:r>
             <a:endParaRPr lang="en-US" sz="2100" dirty="0"/>
           </a:p>
@@ -16163,17 +16447,17 @@
         </p:nvSpPr>
         <p:spPr>
           <a:xfrm>
-            <a:off x="7799832" y="1828800"/>
-            <a:ext cx="3145536" cy="685800"/>
-          </a:xfrm>
-          <a:prstGeom prst="rect">
-            <a:avLst/>
-          </a:prstGeom>
-          <a:noFill/>
-          <a:ln/>
-        </p:spPr>
-        <p:txBody>
-          <a:bodyPr wrap="square" lIns="0" tIns="0" rIns="0" bIns="0" rtlCol="0" anchor="t">
+            <a:off x="7799832" y="1801368"/>
+            <a:ext cx="3145536" cy="758952"/>
+          </a:xfrm>
+          <a:prstGeom prst="rect">
+            <a:avLst/>
+          </a:prstGeom>
+          <a:noFill/>
+          <a:ln/>
+        </p:spPr>
+        <p:txBody>
+          <a:bodyPr wrap="square" lIns="254" tIns="254" rIns="254" bIns="254" rtlCol="0" anchor="t">
             <a:normAutofit/>
           </a:bodyPr>
           <a:lstStyle/>
@@ -16182,7 +16466,7 @@
               <a:buNone/>
             </a:pPr>
             <a:r>
-              <a:rPr lang="en-US" sz="1550" dirty="0">
+              <a:rPr lang="en-US" sz="1320" dirty="0">
                 <a:solidFill>
                   <a:srgbClr val="17364A"/>
                 </a:solidFill>
@@ -16192,7 +16476,7 @@
               </a:rPr>
               <a:t>Generative AI matters for public health because it can reduce burden in text-heavy workflows.</a:t>
             </a:r>
-            <a:endParaRPr lang="en-US" sz="1550" dirty="0"/>
+            <a:endParaRPr lang="en-US" sz="1320" dirty="0"/>
           </a:p>
         </p:txBody>
       </p:sp>
@@ -16280,13 +16564,16 @@
           <a:ln/>
         </p:spPr>
         <p:txBody>
-          <a:bodyPr wrap="square" lIns="254" tIns="254" rIns="254" bIns="254" rtlCol="0" anchor="t">
+          <a:bodyPr wrap="square" lIns="508" tIns="508" rIns="508" bIns="508" rtlCol="0" anchor="t">
             <a:normAutofit/>
           </a:bodyPr>
           <a:lstStyle/>
           <a:p>
-            <a:r>
-              <a:rPr lang="en-US" sz="1380" dirty="0">
+            <a:pPr indent="0" marL="0">
+              <a:buNone/>
+            </a:pPr>
+            <a:r>
+              <a:rPr lang="en-US" sz="1220" dirty="0">
                 <a:solidFill>
                   <a:srgbClr val="17364A"/>
                 </a:solidFill>
@@ -16294,13 +16581,16 @@
                 <a:ea typeface="Aptos" pitchFamily="34" charset="-122"/>
                 <a:cs typeface="Aptos" pitchFamily="34" charset="-120"/>
               </a:rPr>
-              <a:t>Staff may use it to summarize guidance, draft meeting notes, simplify technical language,.</a:t>
-            </a:r>
-            <a:endParaRPr lang="en-US" sz="1380" dirty="0"/>
-          </a:p>
-          <a:p>
-            <a:r>
-              <a:rPr lang="en-US" sz="1380" dirty="0">
+              <a:t>Staff may use it to summarize guidance, draft meeting notes,.</a:t>
+            </a:r>
+            <a:endParaRPr lang="en-US" sz="1220" dirty="0"/>
+          </a:p>
+          <a:p>
+            <a:pPr indent="0" marL="0">
+              <a:buNone/>
+            </a:pPr>
+            <a:r>
+              <a:rPr lang="en-US" sz="1220" dirty="0">
                 <a:solidFill>
                   <a:srgbClr val="17364A"/>
                 </a:solidFill>
@@ -16310,11 +16600,14 @@
               </a:rPr>
               <a:t>The same capabilities create risk.</a:t>
             </a:r>
-            <a:endParaRPr lang="en-US" sz="1380" dirty="0"/>
-          </a:p>
-          <a:p>
-            <a:r>
-              <a:rPr lang="en-US" sz="1380" dirty="0">
+            <a:endParaRPr lang="en-US" sz="1220" dirty="0"/>
+          </a:p>
+          <a:p>
+            <a:pPr indent="0" marL="0">
+              <a:buNone/>
+            </a:pPr>
+            <a:r>
+              <a:rPr lang="en-US" sz="1220" dirty="0">
                 <a:solidFill>
                   <a:srgbClr val="17364A"/>
                 </a:solidFill>
@@ -16322,9 +16615,9 @@
                 <a:ea typeface="Aptos" pitchFamily="34" charset="-122"/>
                 <a:cs typeface="Aptos" pitchFamily="34" charset="-120"/>
               </a:rPr>
-              <a:t>Generative AI can invent facts, omit caveats, misstate guidance, flatten uncertainty, or.</a:t>
-            </a:r>
-            <a:endParaRPr lang="en-US" sz="1380" dirty="0"/>
+              <a:t>Generative AI can invent facts, omit caveats, misstate guidance,.</a:t>
+            </a:r>
+            <a:endParaRPr lang="en-US" sz="1220" dirty="0"/>
           </a:p>
         </p:txBody>
       </p:sp>
@@ -16402,17 +16695,17 @@
         </p:nvSpPr>
         <p:spPr>
           <a:xfrm>
-            <a:off x="7799832" y="5001768"/>
-            <a:ext cx="3145536" cy="502920"/>
-          </a:xfrm>
-          <a:prstGeom prst="rect">
-            <a:avLst/>
-          </a:prstGeom>
-          <a:noFill/>
-          <a:ln/>
-        </p:spPr>
-        <p:txBody>
-          <a:bodyPr wrap="square" lIns="0" tIns="0" rIns="0" bIns="0" rtlCol="0" anchor="t">
+            <a:off x="7799832" y="4974336"/>
+            <a:ext cx="3145536" cy="576072"/>
+          </a:xfrm>
+          <a:prstGeom prst="rect">
+            <a:avLst/>
+          </a:prstGeom>
+          <a:noFill/>
+          <a:ln/>
+        </p:spPr>
+        <p:txBody>
+          <a:bodyPr wrap="square" lIns="254" tIns="254" rIns="254" bIns="254" rtlCol="0" anchor="t">
             <a:normAutofit/>
           </a:bodyPr>
           <a:lstStyle/>
@@ -16421,7 +16714,7 @@
               <a:buNone/>
             </a:pPr>
             <a:r>
-              <a:rPr lang="en-US" sz="1550" dirty="0">
+              <a:rPr lang="en-US" sz="1320" dirty="0">
                 <a:solidFill>
                   <a:srgbClr val="17364A"/>
                 </a:solidFill>
@@ -16429,9 +16722,9 @@
                 <a:ea typeface="Aptos" pitchFamily="34" charset="-122"/>
                 <a:cs typeface="Aptos" pitchFamily="34" charset="-120"/>
               </a:rPr>
-              <a:t>Connect the concept to data quality, model performance, validation evidence, monitoring measures, and decisions that remain under human control.</a:t>
-            </a:r>
-            <a:endParaRPr lang="en-US" sz="1550" dirty="0"/>
+              <a:t>Connect the concept to data quality, model performance, validation evidence, monitoring measures, and decisions that.</a:t>
+            </a:r>
+            <a:endParaRPr lang="en-US" sz="1320" dirty="0"/>
           </a:p>
         </p:txBody>
       </p:sp>
@@ -16732,49 +17025,58 @@
           <a:ln/>
         </p:spPr>
         <p:txBody>
-          <a:bodyPr wrap="square" lIns="635" tIns="635" rIns="635" bIns="635" rtlCol="0" anchor="t">
+          <a:bodyPr wrap="square" lIns="1016" tIns="1016" rIns="1016" bIns="1016" rtlCol="0" anchor="t">
             <a:normAutofit/>
           </a:bodyPr>
           <a:lstStyle/>
           <a:p>
+            <a:pPr indent="0" marL="0">
+              <a:buNone/>
+            </a:pPr>
             <a:r>
               <a:rPr lang="en-US" sz="2100" dirty="0">
                 <a:solidFill>
-                  <a:srgbClr val="17364A"/>
-                </a:solidFill>
-                <a:latin typeface="Aptos" pitchFamily="34" charset="0"/>
-                <a:ea typeface="Aptos" pitchFamily="34" charset="-122"/>
-                <a:cs typeface="Aptos" pitchFamily="34" charset="-120"/>
-              </a:rPr>
-              <a:t>A communications team may use generative AI to draft a plain-language public message about a local.</a:t>
+                  <a:srgbClr val="003A63"/>
+                </a:solidFill>
+                <a:latin typeface="Aptos" pitchFamily="34" charset="0"/>
+                <a:ea typeface="Aptos" pitchFamily="34" charset="-122"/>
+                <a:cs typeface="Aptos" pitchFamily="34" charset="-120"/>
+              </a:rPr>
+              <a:t>• A communications team may use generative AI to draft a plain-language public message about a.</a:t>
             </a:r>
             <a:endParaRPr lang="en-US" sz="2100" dirty="0"/>
           </a:p>
           <a:p>
+            <a:pPr indent="0" marL="0">
+              <a:buNone/>
+            </a:pPr>
             <a:r>
               <a:rPr lang="en-US" sz="2100" dirty="0">
                 <a:solidFill>
-                  <a:srgbClr val="17364A"/>
-                </a:solidFill>
-                <a:latin typeface="Aptos" pitchFamily="34" charset="0"/>
-                <a:ea typeface="Aptos" pitchFamily="34" charset="-122"/>
-                <a:cs typeface="Aptos" pitchFamily="34" charset="-120"/>
-              </a:rPr>
-              <a:t>The draft may be clear and readable, but reviewers must check whether the numbers are correct, whether.</a:t>
+                  <a:srgbClr val="003A63"/>
+                </a:solidFill>
+                <a:latin typeface="Aptos" pitchFamily="34" charset="0"/>
+                <a:ea typeface="Aptos" pitchFamily="34" charset="-122"/>
+                <a:cs typeface="Aptos" pitchFamily="34" charset="-120"/>
+              </a:rPr>
+              <a:t>• The draft may be clear and readable, but reviewers must check whether the numbers are correct,.</a:t>
             </a:r>
             <a:endParaRPr lang="en-US" sz="2100" dirty="0"/>
           </a:p>
           <a:p>
+            <a:pPr indent="0" marL="0">
+              <a:buNone/>
+            </a:pPr>
             <a:r>
               <a:rPr lang="en-US" sz="2100" dirty="0">
                 <a:solidFill>
-                  <a:srgbClr val="17364A"/>
-                </a:solidFill>
-                <a:latin typeface="Aptos" pitchFamily="34" charset="0"/>
-                <a:ea typeface="Aptos" pitchFamily="34" charset="-122"/>
-                <a:cs typeface="Aptos" pitchFamily="34" charset="-120"/>
-              </a:rPr>
-              <a:t>An epidemiology team may use generative AI to summarize case investigation notes for internal review.</a:t>
+                  <a:srgbClr val="003A63"/>
+                </a:solidFill>
+                <a:latin typeface="Aptos" pitchFamily="34" charset="0"/>
+                <a:ea typeface="Aptos" pitchFamily="34" charset="-122"/>
+                <a:cs typeface="Aptos" pitchFamily="34" charset="-120"/>
+              </a:rPr>
+              <a:t>• An epidemiology team may use generative AI to summarize case investigation notes for internal.</a:t>
             </a:r>
             <a:endParaRPr lang="en-US" sz="2100" dirty="0"/>
           </a:p>
@@ -16854,17 +17156,17 @@
         </p:nvSpPr>
         <p:spPr>
           <a:xfrm>
-            <a:off x="7799832" y="1828800"/>
-            <a:ext cx="3145536" cy="685800"/>
-          </a:xfrm>
-          <a:prstGeom prst="rect">
-            <a:avLst/>
-          </a:prstGeom>
-          <a:noFill/>
-          <a:ln/>
-        </p:spPr>
-        <p:txBody>
-          <a:bodyPr wrap="square" lIns="0" tIns="0" rIns="0" bIns="0" rtlCol="0" anchor="t">
+            <a:off x="7799832" y="1801368"/>
+            <a:ext cx="3145536" cy="758952"/>
+          </a:xfrm>
+          <a:prstGeom prst="rect">
+            <a:avLst/>
+          </a:prstGeom>
+          <a:noFill/>
+          <a:ln/>
+        </p:spPr>
+        <p:txBody>
+          <a:bodyPr wrap="square" lIns="254" tIns="254" rIns="254" bIns="254" rtlCol="0" anchor="t">
             <a:normAutofit/>
           </a:bodyPr>
           <a:lstStyle/>
@@ -16873,7 +17175,7 @@
               <a:buNone/>
             </a:pPr>
             <a:r>
-              <a:rPr lang="en-US" sz="1550" dirty="0">
+              <a:rPr lang="en-US" sz="1320" dirty="0">
                 <a:solidFill>
                   <a:srgbClr val="17364A"/>
                 </a:solidFill>
@@ -16883,7 +17185,7 @@
               </a:rPr>
               <a:t>A communications team may use generative AI to draft a plain-language public message about a local.</a:t>
             </a:r>
-            <a:endParaRPr lang="en-US" sz="1550" dirty="0"/>
+            <a:endParaRPr lang="en-US" sz="1320" dirty="0"/>
           </a:p>
         </p:txBody>
       </p:sp>
@@ -16971,13 +17273,16 @@
           <a:ln/>
         </p:spPr>
         <p:txBody>
-          <a:bodyPr wrap="square" lIns="254" tIns="254" rIns="254" bIns="254" rtlCol="0" anchor="t">
+          <a:bodyPr wrap="square" lIns="508" tIns="508" rIns="508" bIns="508" rtlCol="0" anchor="t">
             <a:normAutofit/>
           </a:bodyPr>
           <a:lstStyle/>
           <a:p>
-            <a:r>
-              <a:rPr lang="en-US" sz="1380" dirty="0">
+            <a:pPr indent="0" marL="0">
+              <a:buNone/>
+            </a:pPr>
+            <a:r>
+              <a:rPr lang="en-US" sz="1220" dirty="0">
                 <a:solidFill>
                   <a:srgbClr val="17364A"/>
                 </a:solidFill>
@@ -16985,13 +17290,16 @@
                 <a:ea typeface="Aptos" pitchFamily="34" charset="-122"/>
                 <a:cs typeface="Aptos" pitchFamily="34" charset="-120"/>
               </a:rPr>
-              <a:t>A communications team may use generative AI to draft a plain-language public message about.</a:t>
-            </a:r>
-            <a:endParaRPr lang="en-US" sz="1380" dirty="0"/>
-          </a:p>
-          <a:p>
-            <a:r>
-              <a:rPr lang="en-US" sz="1380" dirty="0">
+              <a:t>A communications team may use generative AI to draft a.</a:t>
+            </a:r>
+            <a:endParaRPr lang="en-US" sz="1220" dirty="0"/>
+          </a:p>
+          <a:p>
+            <a:pPr indent="0" marL="0">
+              <a:buNone/>
+            </a:pPr>
+            <a:r>
+              <a:rPr lang="en-US" sz="1220" dirty="0">
                 <a:solidFill>
                   <a:srgbClr val="17364A"/>
                 </a:solidFill>
@@ -16999,13 +17307,16 @@
                 <a:ea typeface="Aptos" pitchFamily="34" charset="-122"/>
                 <a:cs typeface="Aptos" pitchFamily="34" charset="-120"/>
               </a:rPr>
-              <a:t>The draft may be clear and readable, but reviewers must check whether the numbers are.</a:t>
-            </a:r>
-            <a:endParaRPr lang="en-US" sz="1380" dirty="0"/>
-          </a:p>
-          <a:p>
-            <a:r>
-              <a:rPr lang="en-US" sz="1380" dirty="0">
+              <a:t>The draft may be clear and readable, but reviewers must check.</a:t>
+            </a:r>
+            <a:endParaRPr lang="en-US" sz="1220" dirty="0"/>
+          </a:p>
+          <a:p>
+            <a:pPr indent="0" marL="0">
+              <a:buNone/>
+            </a:pPr>
+            <a:r>
+              <a:rPr lang="en-US" sz="1220" dirty="0">
                 <a:solidFill>
                   <a:srgbClr val="17364A"/>
                 </a:solidFill>
@@ -17013,9 +17324,9 @@
                 <a:ea typeface="Aptos" pitchFamily="34" charset="-122"/>
                 <a:cs typeface="Aptos" pitchFamily="34" charset="-120"/>
               </a:rPr>
-              <a:t>The summary must be checked against source notes because a missed exposure, incorrect.</a:t>
-            </a:r>
-            <a:endParaRPr lang="en-US" sz="1380" dirty="0"/>
+              <a:t>The summary must be checked against source notes because a missed.</a:t>
+            </a:r>
+            <a:endParaRPr lang="en-US" sz="1220" dirty="0"/>
           </a:p>
         </p:txBody>
       </p:sp>
@@ -17093,17 +17404,17 @@
         </p:nvSpPr>
         <p:spPr>
           <a:xfrm>
-            <a:off x="7799832" y="5001768"/>
-            <a:ext cx="3145536" cy="502920"/>
-          </a:xfrm>
-          <a:prstGeom prst="rect">
-            <a:avLst/>
-          </a:prstGeom>
-          <a:noFill/>
-          <a:ln/>
-        </p:spPr>
-        <p:txBody>
-          <a:bodyPr wrap="square" lIns="0" tIns="0" rIns="0" bIns="0" rtlCol="0" anchor="t">
+            <a:off x="7799832" y="4974336"/>
+            <a:ext cx="3145536" cy="576072"/>
+          </a:xfrm>
+          <a:prstGeom prst="rect">
+            <a:avLst/>
+          </a:prstGeom>
+          <a:noFill/>
+          <a:ln/>
+        </p:spPr>
+        <p:txBody>
+          <a:bodyPr wrap="square" lIns="254" tIns="254" rIns="254" bIns="254" rtlCol="0" anchor="t">
             <a:normAutofit/>
           </a:bodyPr>
           <a:lstStyle/>
@@ -17112,7 +17423,7 @@
               <a:buNone/>
             </a:pPr>
             <a:r>
-              <a:rPr lang="en-US" sz="1550" dirty="0">
+              <a:rPr lang="en-US" sz="1320" dirty="0">
                 <a:solidFill>
                   <a:srgbClr val="17364A"/>
                 </a:solidFill>
@@ -17120,9 +17431,9 @@
                 <a:ea typeface="Aptos" pitchFamily="34" charset="-122"/>
                 <a:cs typeface="Aptos" pitchFamily="34" charset="-120"/>
               </a:rPr>
-              <a:t>Connect the concept to data quality, model performance, validation evidence, monitoring measures, and decisions that remain under human control.</a:t>
-            </a:r>
-            <a:endParaRPr lang="en-US" sz="1550" dirty="0"/>
+              <a:t>Connect the concept to data quality, model performance, validation evidence, monitoring measures, and decisions that.</a:t>
+            </a:r>
+            <a:endParaRPr lang="en-US" sz="1320" dirty="0"/>
           </a:p>
         </p:txBody>
       </p:sp>

--- a/downloads/presentations/modules/anl-310.pptx
+++ b/downloads/presentations/modules/anl-310.pptx
@@ -3419,11 +3419,11 @@
         <p:spPr>
           <a:xfrm>
             <a:off x="7635240" y="1325880"/>
-            <a:ext cx="3474720" cy="1325880"/>
+            <a:ext cx="3474720" cy="1207008"/>
           </a:xfrm>
           <a:prstGeom prst="roundRect">
             <a:avLst>
-              <a:gd name="adj" fmla="val 8276"/>
+              <a:gd name="adj" fmla="val 9091"/>
             </a:avLst>
           </a:prstGeom>
           <a:solidFill>
@@ -3485,7 +3485,7 @@
         <p:spPr>
           <a:xfrm>
             <a:off x="7799832" y="1801368"/>
-            <a:ext cx="3145536" cy="758952"/>
+            <a:ext cx="3145536" cy="640080"/>
           </a:xfrm>
           <a:prstGeom prst="rect">
             <a:avLst/>
@@ -3525,12 +3525,12 @@
         </p:nvSpPr>
         <p:spPr>
           <a:xfrm>
-            <a:off x="7635240" y="2788920"/>
-            <a:ext cx="3474720" cy="1536192"/>
+            <a:off x="7635240" y="2670048"/>
+            <a:ext cx="3474720" cy="1377086"/>
           </a:xfrm>
           <a:prstGeom prst="roundRect">
             <a:avLst>
-              <a:gd name="adj" fmla="val 7143"/>
+              <a:gd name="adj" fmla="val 7968"/>
             </a:avLst>
           </a:prstGeom>
           <a:solidFill>
@@ -3552,8 +3552,8 @@
         </p:nvSpPr>
         <p:spPr>
           <a:xfrm>
-            <a:off x="7799832" y="2935224"/>
-            <a:ext cx="3145536" cy="256032"/>
+            <a:off x="7799832" y="2798064"/>
+            <a:ext cx="3145536" cy="237744"/>
           </a:xfrm>
           <a:prstGeom prst="rect">
             <a:avLst/>
@@ -3569,7 +3569,7 @@
               <a:buNone/>
             </a:pPr>
             <a:r>
-              <a:rPr lang="en-US" sz="1300" b="1" dirty="0">
+              <a:rPr lang="en-US" sz="1250" b="1" dirty="0">
                 <a:solidFill>
                   <a:srgbClr val="0068B7"/>
                 </a:solidFill>
@@ -3577,101 +3577,317 @@
                 <a:ea typeface="Aptos" pitchFamily="34" charset="-122"/>
                 <a:cs typeface="Aptos" pitchFamily="34" charset="-120"/>
               </a:rPr>
-              <a:t>Concept checkpoints</a:t>
-            </a:r>
-            <a:endParaRPr lang="en-US" sz="1300" dirty="0"/>
-          </a:p>
-        </p:txBody>
-      </p:sp>
-      <p:sp>
-        <p:nvSpPr>
-          <p:cNvPr id="15" name="Text 13"/>
-          <p:cNvSpPr/>
-          <p:nvPr/>
-        </p:nvSpPr>
-        <p:spPr>
-          <a:xfrm>
-            <a:off x="7818120" y="3300984"/>
-            <a:ext cx="3090672" cy="877824"/>
-          </a:xfrm>
-          <a:prstGeom prst="rect">
-            <a:avLst/>
-          </a:prstGeom>
-          <a:noFill/>
-          <a:ln/>
-        </p:spPr>
-        <p:txBody>
-          <a:bodyPr wrap="square" lIns="508" tIns="508" rIns="508" bIns="508" rtlCol="0" anchor="t">
+              <a:t>Data-to-decision flow</a:t>
+            </a:r>
+            <a:endParaRPr lang="en-US" sz="1250" dirty="0"/>
+          </a:p>
+        </p:txBody>
+      </p:sp>
+      <p:sp>
+        <p:nvSpPr>
+          <p:cNvPr id="15" name="Shape 13"/>
+          <p:cNvSpPr/>
+          <p:nvPr/>
+        </p:nvSpPr>
+        <p:spPr>
+          <a:xfrm>
+            <a:off x="8763000" y="3351276"/>
+            <a:ext cx="164592" cy="0"/>
+          </a:xfrm>
+          <a:prstGeom prst="line">
+            <a:avLst/>
+          </a:prstGeom>
+          <a:noFill/>
+          <a:ln w="15240">
+            <a:solidFill>
+              <a:srgbClr val="8ABBD8"/>
+            </a:solidFill>
+            <a:prstDash val="solid"/>
+          </a:ln>
+        </p:spPr>
+      </p:sp>
+      <p:sp>
+        <p:nvSpPr>
+          <p:cNvPr id="16" name="Shape 14"/>
+          <p:cNvSpPr/>
+          <p:nvPr/>
+        </p:nvSpPr>
+        <p:spPr>
+          <a:xfrm>
+            <a:off x="7872984" y="3200400"/>
+            <a:ext cx="890016" cy="301752"/>
+          </a:xfrm>
+          <a:prstGeom prst="roundRect">
+            <a:avLst>
+              <a:gd name="adj" fmla="val 24242"/>
+            </a:avLst>
+          </a:prstGeom>
+          <a:solidFill>
+            <a:srgbClr val="0068B7"/>
+          </a:solidFill>
+          <a:ln w="12700">
+            <a:solidFill>
+              <a:srgbClr val="0068B7"/>
+            </a:solidFill>
+            <a:prstDash val="solid"/>
+          </a:ln>
+        </p:spPr>
+      </p:sp>
+      <p:sp>
+        <p:nvSpPr>
+          <p:cNvPr id="17" name="Text 15"/>
+          <p:cNvSpPr/>
+          <p:nvPr/>
+        </p:nvSpPr>
+        <p:spPr>
+          <a:xfrm>
+            <a:off x="7909560" y="3273552"/>
+            <a:ext cx="816864" cy="146304"/>
+          </a:xfrm>
+          <a:prstGeom prst="rect">
+            <a:avLst/>
+          </a:prstGeom>
+          <a:noFill/>
+          <a:ln/>
+        </p:spPr>
+        <p:txBody>
+          <a:bodyPr wrap="square" lIns="0" tIns="0" rIns="0" bIns="0" rtlCol="0" anchor="ctr">
             <a:normAutofit/>
           </a:bodyPr>
           <a:lstStyle/>
           <a:p>
-            <a:pPr indent="0" marL="0">
-              <a:buNone/>
-            </a:pPr>
-            <a:r>
-              <a:rPr lang="en-US" sz="1220" dirty="0">
-                <a:solidFill>
-                  <a:srgbClr val="17364A"/>
-                </a:solidFill>
-                <a:latin typeface="Aptos" pitchFamily="34" charset="0"/>
-                <a:ea typeface="Aptos" pitchFamily="34" charset="-122"/>
-                <a:cs typeface="Aptos" pitchFamily="34" charset="-120"/>
-              </a:rPr>
-              <a:t>A brainstormed outline, internal draft, public advisory, case.</a:t>
-            </a:r>
-            <a:endParaRPr lang="en-US" sz="1220" dirty="0"/>
-          </a:p>
-          <a:p>
-            <a:pPr indent="0" marL="0">
-              <a:buNone/>
-            </a:pPr>
-            <a:r>
-              <a:rPr lang="en-US" sz="1220" dirty="0">
-                <a:solidFill>
-                  <a:srgbClr val="17364A"/>
-                </a:solidFill>
-                <a:latin typeface="Aptos" pitchFamily="34" charset="0"/>
-                <a:ea typeface="Aptos" pitchFamily="34" charset="-122"/>
-                <a:cs typeface="Aptos" pitchFamily="34" charset="-120"/>
-              </a:rPr>
-              <a:t>Factuality review requires comparison to source material.</a:t>
-            </a:r>
-            <a:endParaRPr lang="en-US" sz="1220" dirty="0"/>
-          </a:p>
-          <a:p>
-            <a:pPr indent="0" marL="0">
-              <a:buNone/>
-            </a:pPr>
-            <a:r>
-              <a:rPr lang="en-US" sz="1220" dirty="0">
-                <a:solidFill>
-                  <a:srgbClr val="17364A"/>
-                </a:solidFill>
-                <a:latin typeface="Aptos" pitchFamily="34" charset="0"/>
-                <a:ea typeface="Aptos" pitchFamily="34" charset="-122"/>
-                <a:cs typeface="Aptos" pitchFamily="34" charset="-120"/>
-              </a:rPr>
-              <a:t>Reviewers should check names, dates, numbers, conditions, legal.</a:t>
-            </a:r>
-            <a:endParaRPr lang="en-US" sz="1220" dirty="0"/>
-          </a:p>
-        </p:txBody>
-      </p:sp>
-      <p:sp>
-        <p:nvSpPr>
-          <p:cNvPr id="16" name="Shape 14"/>
-          <p:cNvSpPr/>
-          <p:nvPr/>
-        </p:nvSpPr>
-        <p:spPr>
-          <a:xfrm>
-            <a:off x="7635240" y="4498848"/>
-            <a:ext cx="3474720" cy="1143000"/>
+            <a:pPr algn="ctr" indent="0" marL="0">
+              <a:buNone/>
+            </a:pPr>
+            <a:r>
+              <a:rPr lang="en-US" sz="880" b="1" dirty="0">
+                <a:solidFill>
+                  <a:srgbClr val="FFFFFF"/>
+                </a:solidFill>
+                <a:latin typeface="Aptos" pitchFamily="34" charset="0"/>
+                <a:ea typeface="Aptos" pitchFamily="34" charset="-122"/>
+                <a:cs typeface="Aptos" pitchFamily="34" charset="-120"/>
+              </a:rPr>
+              <a:t>Data</a:t>
+            </a:r>
+            <a:endParaRPr lang="en-US" sz="880" dirty="0"/>
+          </a:p>
+        </p:txBody>
+      </p:sp>
+      <p:sp>
+        <p:nvSpPr>
+          <p:cNvPr id="18" name="Shape 16"/>
+          <p:cNvSpPr/>
+          <p:nvPr/>
+        </p:nvSpPr>
+        <p:spPr>
+          <a:xfrm>
+            <a:off x="9817608" y="3351276"/>
+            <a:ext cx="164592" cy="0"/>
+          </a:xfrm>
+          <a:prstGeom prst="line">
+            <a:avLst/>
+          </a:prstGeom>
+          <a:noFill/>
+          <a:ln w="15240">
+            <a:solidFill>
+              <a:srgbClr val="8ABBD8"/>
+            </a:solidFill>
+            <a:prstDash val="solid"/>
+          </a:ln>
+        </p:spPr>
+      </p:sp>
+      <p:sp>
+        <p:nvSpPr>
+          <p:cNvPr id="19" name="Shape 17"/>
+          <p:cNvSpPr/>
+          <p:nvPr/>
+        </p:nvSpPr>
+        <p:spPr>
+          <a:xfrm>
+            <a:off x="8927592" y="3200400"/>
+            <a:ext cx="890016" cy="301752"/>
           </a:xfrm>
           <a:prstGeom prst="roundRect">
             <a:avLst>
-              <a:gd name="adj" fmla="val 9600"/>
+              <a:gd name="adj" fmla="val 24242"/>
+            </a:avLst>
+          </a:prstGeom>
+          <a:solidFill>
+            <a:srgbClr val="2F8A28"/>
+          </a:solidFill>
+          <a:ln w="12700">
+            <a:solidFill>
+              <a:srgbClr val="2F8A28"/>
+            </a:solidFill>
+            <a:prstDash val="solid"/>
+          </a:ln>
+        </p:spPr>
+      </p:sp>
+      <p:sp>
+        <p:nvSpPr>
+          <p:cNvPr id="20" name="Text 18"/>
+          <p:cNvSpPr/>
+          <p:nvPr/>
+        </p:nvSpPr>
+        <p:spPr>
+          <a:xfrm>
+            <a:off x="8964168" y="3273552"/>
+            <a:ext cx="816864" cy="146304"/>
+          </a:xfrm>
+          <a:prstGeom prst="rect">
+            <a:avLst/>
+          </a:prstGeom>
+          <a:noFill/>
+          <a:ln/>
+        </p:spPr>
+        <p:txBody>
+          <a:bodyPr wrap="square" lIns="0" tIns="0" rIns="0" bIns="0" rtlCol="0" anchor="ctr">
+            <a:normAutofit/>
+          </a:bodyPr>
+          <a:lstStyle/>
+          <a:p>
+            <a:pPr algn="ctr" indent="0" marL="0">
+              <a:buNone/>
+            </a:pPr>
+            <a:r>
+              <a:rPr lang="en-US" sz="880" b="1" dirty="0">
+                <a:solidFill>
+                  <a:srgbClr val="FFFFFF"/>
+                </a:solidFill>
+                <a:latin typeface="Aptos" pitchFamily="34" charset="0"/>
+                <a:ea typeface="Aptos" pitchFamily="34" charset="-122"/>
+                <a:cs typeface="Aptos" pitchFamily="34" charset="-120"/>
+              </a:rPr>
+              <a:t>Analysis</a:t>
+            </a:r>
+            <a:endParaRPr lang="en-US" sz="880" dirty="0"/>
+          </a:p>
+        </p:txBody>
+      </p:sp>
+      <p:sp>
+        <p:nvSpPr>
+          <p:cNvPr id="21" name="Shape 19"/>
+          <p:cNvSpPr/>
+          <p:nvPr/>
+        </p:nvSpPr>
+        <p:spPr>
+          <a:xfrm>
+            <a:off x="9982200" y="3200400"/>
+            <a:ext cx="890016" cy="301752"/>
+          </a:xfrm>
+          <a:prstGeom prst="roundRect">
+            <a:avLst>
+              <a:gd name="adj" fmla="val 24242"/>
+            </a:avLst>
+          </a:prstGeom>
+          <a:solidFill>
+            <a:srgbClr val="6A4CA3"/>
+          </a:solidFill>
+          <a:ln w="12700">
+            <a:solidFill>
+              <a:srgbClr val="6A4CA3"/>
+            </a:solidFill>
+            <a:prstDash val="solid"/>
+          </a:ln>
+        </p:spPr>
+      </p:sp>
+      <p:sp>
+        <p:nvSpPr>
+          <p:cNvPr id="22" name="Text 20"/>
+          <p:cNvSpPr/>
+          <p:nvPr/>
+        </p:nvSpPr>
+        <p:spPr>
+          <a:xfrm>
+            <a:off x="10018776" y="3273552"/>
+            <a:ext cx="816864" cy="146304"/>
+          </a:xfrm>
+          <a:prstGeom prst="rect">
+            <a:avLst/>
+          </a:prstGeom>
+          <a:noFill/>
+          <a:ln/>
+        </p:spPr>
+        <p:txBody>
+          <a:bodyPr wrap="square" lIns="0" tIns="0" rIns="0" bIns="0" rtlCol="0" anchor="ctr">
+            <a:normAutofit/>
+          </a:bodyPr>
+          <a:lstStyle/>
+          <a:p>
+            <a:pPr algn="ctr" indent="0" marL="0">
+              <a:buNone/>
+            </a:pPr>
+            <a:r>
+              <a:rPr lang="en-US" sz="880" b="1" dirty="0">
+                <a:solidFill>
+                  <a:srgbClr val="FFFFFF"/>
+                </a:solidFill>
+                <a:latin typeface="Aptos" pitchFamily="34" charset="0"/>
+                <a:ea typeface="Aptos" pitchFamily="34" charset="-122"/>
+                <a:cs typeface="Aptos" pitchFamily="34" charset="-120"/>
+              </a:rPr>
+              <a:t>Review</a:t>
+            </a:r>
+            <a:endParaRPr lang="en-US" sz="880" dirty="0"/>
+          </a:p>
+        </p:txBody>
+      </p:sp>
+      <p:sp>
+        <p:nvSpPr>
+          <p:cNvPr id="23" name="Text 21"/>
+          <p:cNvSpPr/>
+          <p:nvPr/>
+        </p:nvSpPr>
+        <p:spPr>
+          <a:xfrm>
+            <a:off x="7854696" y="3694176"/>
+            <a:ext cx="3035808" cy="206654"/>
+          </a:xfrm>
+          <a:prstGeom prst="rect">
+            <a:avLst/>
+          </a:prstGeom>
+          <a:noFill/>
+          <a:ln/>
+        </p:spPr>
+        <p:txBody>
+          <a:bodyPr wrap="square" lIns="254" tIns="254" rIns="254" bIns="254" rtlCol="0" anchor="t">
+            <a:normAutofit/>
+          </a:bodyPr>
+          <a:lstStyle/>
+          <a:p>
+            <a:pPr indent="0" marL="0">
+              <a:buNone/>
+            </a:pPr>
+            <a:r>
+              <a:rPr lang="en-US" sz="1120" dirty="0">
+                <a:solidFill>
+                  <a:srgbClr val="17364A"/>
+                </a:solidFill>
+                <a:latin typeface="Aptos" pitchFamily="34" charset="0"/>
+                <a:ea typeface="Aptos" pitchFamily="34" charset="-122"/>
+                <a:cs typeface="Aptos" pitchFamily="34" charset="-120"/>
+              </a:rPr>
+              <a:t>The important handoff is not from data to AI; it is from analysis to accountable human review.</a:t>
+            </a:r>
+            <a:endParaRPr lang="en-US" sz="1120" dirty="0"/>
+          </a:p>
+        </p:txBody>
+      </p:sp>
+      <p:sp>
+        <p:nvSpPr>
+          <p:cNvPr id="24" name="Shape 22"/>
+          <p:cNvSpPr/>
+          <p:nvPr/>
+        </p:nvSpPr>
+        <p:spPr>
+          <a:xfrm>
+            <a:off x="7635240" y="4184294"/>
+            <a:ext cx="3474720" cy="1466698"/>
+          </a:xfrm>
+          <a:prstGeom prst="roundRect">
+            <a:avLst>
+              <a:gd name="adj" fmla="val 7481"/>
             </a:avLst>
           </a:prstGeom>
           <a:solidFill>
@@ -3687,13 +3903,13 @@
       </p:sp>
       <p:sp>
         <p:nvSpPr>
-          <p:cNvPr id="17" name="Text 15"/>
-          <p:cNvSpPr/>
-          <p:nvPr/>
-        </p:nvSpPr>
-        <p:spPr>
-          <a:xfrm>
-            <a:off x="7799832" y="4645152"/>
+          <p:cNvPr id="25" name="Text 23"/>
+          <p:cNvSpPr/>
+          <p:nvPr/>
+        </p:nvSpPr>
+        <p:spPr>
+          <a:xfrm>
+            <a:off x="7799832" y="4330598"/>
             <a:ext cx="3145536" cy="256032"/>
           </a:xfrm>
           <a:prstGeom prst="rect">
@@ -3726,14 +3942,14 @@
       </p:sp>
       <p:sp>
         <p:nvSpPr>
-          <p:cNvPr id="18" name="Text 16"/>
-          <p:cNvSpPr/>
-          <p:nvPr/>
-        </p:nvSpPr>
-        <p:spPr>
-          <a:xfrm>
-            <a:off x="7799832" y="4974336"/>
-            <a:ext cx="3145536" cy="576072"/>
+          <p:cNvPr id="26" name="Text 24"/>
+          <p:cNvSpPr/>
+          <p:nvPr/>
+        </p:nvSpPr>
+        <p:spPr>
+          <a:xfrm>
+            <a:off x="7799832" y="4659782"/>
+            <a:ext cx="3145536" cy="899770"/>
           </a:xfrm>
           <a:prstGeom prst="rect">
             <a:avLst/>
@@ -3759,7 +3975,7 @@
                 <a:ea typeface="Aptos" pitchFamily="34" charset="-122"/>
                 <a:cs typeface="Aptos" pitchFamily="34" charset="-120"/>
               </a:rPr>
-              <a:t>Connect the concept to data quality, model performance, validation evidence, monitoring measures, and decisions that.</a:t>
+              <a:t>Connect the concept to data quality, model performance, validation evidence, monitoring measures, and decisions that remain under human control.</a:t>
             </a:r>
             <a:endParaRPr lang="en-US" sz="1320" dirty="0"/>
           </a:p>
@@ -4128,11 +4344,11 @@
         <p:spPr>
           <a:xfrm>
             <a:off x="7635240" y="1325880"/>
-            <a:ext cx="3474720" cy="1325880"/>
+            <a:ext cx="3474720" cy="1255471"/>
           </a:xfrm>
           <a:prstGeom prst="roundRect">
             <a:avLst>
-              <a:gd name="adj" fmla="val 8276"/>
+              <a:gd name="adj" fmla="val 8740"/>
             </a:avLst>
           </a:prstGeom>
           <a:solidFill>
@@ -4194,7 +4410,7 @@
         <p:spPr>
           <a:xfrm>
             <a:off x="7799832" y="1801368"/>
-            <a:ext cx="3145536" cy="758952"/>
+            <a:ext cx="3145536" cy="688543"/>
           </a:xfrm>
           <a:prstGeom prst="rect">
             <a:avLst/>
@@ -4234,12 +4450,12 @@
         </p:nvSpPr>
         <p:spPr>
           <a:xfrm>
-            <a:off x="7635240" y="2788920"/>
-            <a:ext cx="3474720" cy="1536192"/>
+            <a:off x="7635240" y="2718511"/>
+            <a:ext cx="3474720" cy="1328623"/>
           </a:xfrm>
           <a:prstGeom prst="roundRect">
             <a:avLst>
-              <a:gd name="adj" fmla="val 7143"/>
+              <a:gd name="adj" fmla="val 8259"/>
             </a:avLst>
           </a:prstGeom>
           <a:solidFill>
@@ -4261,7 +4477,7 @@
         </p:nvSpPr>
         <p:spPr>
           <a:xfrm>
-            <a:off x="7799832" y="2935224"/>
+            <a:off x="7799832" y="2864815"/>
             <a:ext cx="3145536" cy="256032"/>
           </a:xfrm>
           <a:prstGeom prst="rect">
@@ -4300,8 +4516,8 @@
         </p:nvSpPr>
         <p:spPr>
           <a:xfrm>
-            <a:off x="7818120" y="3300984"/>
-            <a:ext cx="3090672" cy="877824"/>
+            <a:off x="7818120" y="3230575"/>
+            <a:ext cx="3090672" cy="670255"/>
           </a:xfrm>
           <a:prstGeom prst="rect">
             <a:avLst/>
@@ -4375,12 +4591,12 @@
         </p:nvSpPr>
         <p:spPr>
           <a:xfrm>
-            <a:off x="7635240" y="4498848"/>
-            <a:ext cx="3474720" cy="1143000"/>
+            <a:off x="7635240" y="4184294"/>
+            <a:ext cx="3474720" cy="1466698"/>
           </a:xfrm>
           <a:prstGeom prst="roundRect">
             <a:avLst>
-              <a:gd name="adj" fmla="val 9600"/>
+              <a:gd name="adj" fmla="val 7481"/>
             </a:avLst>
           </a:prstGeom>
           <a:solidFill>
@@ -4402,7 +4618,7 @@
         </p:nvSpPr>
         <p:spPr>
           <a:xfrm>
-            <a:off x="7799832" y="4645152"/>
+            <a:off x="7799832" y="4330598"/>
             <a:ext cx="3145536" cy="256032"/>
           </a:xfrm>
           <a:prstGeom prst="rect">
@@ -4441,8 +4657,8 @@
         </p:nvSpPr>
         <p:spPr>
           <a:xfrm>
-            <a:off x="7799832" y="4974336"/>
-            <a:ext cx="3145536" cy="576072"/>
+            <a:off x="7799832" y="4659782"/>
+            <a:ext cx="3145536" cy="899770"/>
           </a:xfrm>
           <a:prstGeom prst="rect">
             <a:avLst/>
@@ -4468,7 +4684,7 @@
                 <a:ea typeface="Aptos" pitchFamily="34" charset="-122"/>
                 <a:cs typeface="Aptos" pitchFamily="34" charset="-120"/>
               </a:rPr>
-              <a:t>Connect the concept to data quality, model performance, validation evidence, monitoring measures, and decisions that.</a:t>
+              <a:t>Connect the concept to data quality, model performance, validation evidence, monitoring measures, and decisions that remain under human control.</a:t>
             </a:r>
             <a:endParaRPr lang="en-US" sz="1320" dirty="0"/>
           </a:p>
@@ -4837,11 +5053,11 @@
         <p:spPr>
           <a:xfrm>
             <a:off x="7635240" y="1325880"/>
-            <a:ext cx="3474720" cy="1325880"/>
+            <a:ext cx="3474720" cy="1207008"/>
           </a:xfrm>
           <a:prstGeom prst="roundRect">
             <a:avLst>
-              <a:gd name="adj" fmla="val 8276"/>
+              <a:gd name="adj" fmla="val 9091"/>
             </a:avLst>
           </a:prstGeom>
           <a:solidFill>
@@ -4903,7 +5119,7 @@
         <p:spPr>
           <a:xfrm>
             <a:off x="7799832" y="1801368"/>
-            <a:ext cx="3145536" cy="758952"/>
+            <a:ext cx="3145536" cy="640080"/>
           </a:xfrm>
           <a:prstGeom prst="rect">
             <a:avLst/>
@@ -4943,7 +5159,7 @@
         </p:nvSpPr>
         <p:spPr>
           <a:xfrm>
-            <a:off x="7635240" y="2788920"/>
+            <a:off x="7635240" y="2670048"/>
             <a:ext cx="3474720" cy="1536192"/>
           </a:xfrm>
           <a:prstGeom prst="roundRect">
@@ -4970,7 +5186,7 @@
         </p:nvSpPr>
         <p:spPr>
           <a:xfrm>
-            <a:off x="7799832" y="2935224"/>
+            <a:off x="7799832" y="2816352"/>
             <a:ext cx="3145536" cy="256032"/>
           </a:xfrm>
           <a:prstGeom prst="rect">
@@ -5009,7 +5225,7 @@
         </p:nvSpPr>
         <p:spPr>
           <a:xfrm>
-            <a:off x="7818120" y="3300984"/>
+            <a:off x="7818120" y="3182112"/>
             <a:ext cx="3090672" cy="877824"/>
           </a:xfrm>
           <a:prstGeom prst="rect">
@@ -5084,12 +5300,12 @@
         </p:nvSpPr>
         <p:spPr>
           <a:xfrm>
-            <a:off x="7635240" y="4498848"/>
-            <a:ext cx="3474720" cy="1143000"/>
+            <a:off x="7635240" y="4343400"/>
+            <a:ext cx="3474720" cy="1255471"/>
           </a:xfrm>
           <a:prstGeom prst="roundRect">
             <a:avLst>
-              <a:gd name="adj" fmla="val 9600"/>
+              <a:gd name="adj" fmla="val 8740"/>
             </a:avLst>
           </a:prstGeom>
           <a:solidFill>
@@ -5111,7 +5327,7 @@
         </p:nvSpPr>
         <p:spPr>
           <a:xfrm>
-            <a:off x="7799832" y="4645152"/>
+            <a:off x="7799832" y="4489704"/>
             <a:ext cx="3145536" cy="256032"/>
           </a:xfrm>
           <a:prstGeom prst="rect">
@@ -5150,8 +5366,8 @@
         </p:nvSpPr>
         <p:spPr>
           <a:xfrm>
-            <a:off x="7799832" y="4974336"/>
-            <a:ext cx="3145536" cy="576072"/>
+            <a:off x="7799832" y="4818888"/>
+            <a:ext cx="3145536" cy="688543"/>
           </a:xfrm>
           <a:prstGeom prst="rect">
             <a:avLst/>
@@ -5177,7 +5393,7 @@
                 <a:ea typeface="Aptos" pitchFamily="34" charset="-122"/>
                 <a:cs typeface="Aptos" pitchFamily="34" charset="-120"/>
               </a:rPr>
-              <a:t>Identify what could go wrong, who could be affected, what safeguards are needed, and what evidence should be reviewed.</a:t>
+              <a:t>Identify what could go wrong, who could be affected, what safeguards are needed, and what evidence should be reviewed before use.</a:t>
             </a:r>
             <a:endParaRPr lang="en-US" sz="1320" dirty="0"/>
           </a:p>
@@ -5546,11 +5762,11 @@
         <p:spPr>
           <a:xfrm>
             <a:off x="7635240" y="1325880"/>
-            <a:ext cx="3474720" cy="1325880"/>
+            <a:ext cx="3474720" cy="1207008"/>
           </a:xfrm>
           <a:prstGeom prst="roundRect">
             <a:avLst>
-              <a:gd name="adj" fmla="val 8276"/>
+              <a:gd name="adj" fmla="val 9091"/>
             </a:avLst>
           </a:prstGeom>
           <a:solidFill>
@@ -5612,7 +5828,7 @@
         <p:spPr>
           <a:xfrm>
             <a:off x="7799832" y="1801368"/>
-            <a:ext cx="3145536" cy="758952"/>
+            <a:ext cx="3145536" cy="640080"/>
           </a:xfrm>
           <a:prstGeom prst="rect">
             <a:avLst/>
@@ -5652,7 +5868,7 @@
         </p:nvSpPr>
         <p:spPr>
           <a:xfrm>
-            <a:off x="7635240" y="2788920"/>
+            <a:off x="7635240" y="2670048"/>
             <a:ext cx="3474720" cy="1536192"/>
           </a:xfrm>
           <a:prstGeom prst="roundRect">
@@ -5679,7 +5895,7 @@
         </p:nvSpPr>
         <p:spPr>
           <a:xfrm>
-            <a:off x="7799832" y="2935224"/>
+            <a:off x="7799832" y="2816352"/>
             <a:ext cx="3145536" cy="256032"/>
           </a:xfrm>
           <a:prstGeom prst="rect">
@@ -5718,7 +5934,7 @@
         </p:nvSpPr>
         <p:spPr>
           <a:xfrm>
-            <a:off x="7818120" y="3300984"/>
+            <a:off x="7818120" y="3182112"/>
             <a:ext cx="3090672" cy="877824"/>
           </a:xfrm>
           <a:prstGeom prst="rect">
@@ -5793,12 +6009,12 @@
         </p:nvSpPr>
         <p:spPr>
           <a:xfrm>
-            <a:off x="7635240" y="4498848"/>
-            <a:ext cx="3474720" cy="1143000"/>
+            <a:off x="7635240" y="4343400"/>
+            <a:ext cx="3474720" cy="1255471"/>
           </a:xfrm>
           <a:prstGeom prst="roundRect">
             <a:avLst>
-              <a:gd name="adj" fmla="val 9600"/>
+              <a:gd name="adj" fmla="val 8740"/>
             </a:avLst>
           </a:prstGeom>
           <a:solidFill>
@@ -5820,7 +6036,7 @@
         </p:nvSpPr>
         <p:spPr>
           <a:xfrm>
-            <a:off x="7799832" y="4645152"/>
+            <a:off x="7799832" y="4489704"/>
             <a:ext cx="3145536" cy="256032"/>
           </a:xfrm>
           <a:prstGeom prst="rect">
@@ -5859,8 +6075,8 @@
         </p:nvSpPr>
         <p:spPr>
           <a:xfrm>
-            <a:off x="7799832" y="4974336"/>
-            <a:ext cx="3145536" cy="576072"/>
+            <a:off x="7799832" y="4818888"/>
+            <a:ext cx="3145536" cy="688543"/>
           </a:xfrm>
           <a:prstGeom prst="rect">
             <a:avLst/>
@@ -5886,7 +6102,7 @@
                 <a:ea typeface="Aptos" pitchFamily="34" charset="-122"/>
                 <a:cs typeface="Aptos" pitchFamily="34" charset="-120"/>
               </a:rPr>
-              <a:t>Identify what could go wrong, who could be affected, what safeguards are needed, and what evidence should be reviewed.</a:t>
+              <a:t>Identify what could go wrong, who could be affected, what safeguards are needed, and what evidence should be reviewed before use.</a:t>
             </a:r>
             <a:endParaRPr lang="en-US" sz="1320" dirty="0"/>
           </a:p>
@@ -6255,11 +6471,11 @@
         <p:spPr>
           <a:xfrm>
             <a:off x="7635240" y="1325880"/>
-            <a:ext cx="3474720" cy="1325880"/>
+            <a:ext cx="3474720" cy="1255471"/>
           </a:xfrm>
           <a:prstGeom prst="roundRect">
             <a:avLst>
-              <a:gd name="adj" fmla="val 8276"/>
+              <a:gd name="adj" fmla="val 8740"/>
             </a:avLst>
           </a:prstGeom>
           <a:solidFill>
@@ -6321,7 +6537,7 @@
         <p:spPr>
           <a:xfrm>
             <a:off x="7799832" y="1801368"/>
-            <a:ext cx="3145536" cy="758952"/>
+            <a:ext cx="3145536" cy="688543"/>
           </a:xfrm>
           <a:prstGeom prst="rect">
             <a:avLst/>
@@ -6361,12 +6577,12 @@
         </p:nvSpPr>
         <p:spPr>
           <a:xfrm>
-            <a:off x="7635240" y="2788920"/>
-            <a:ext cx="3474720" cy="1536192"/>
+            <a:off x="7635240" y="2718511"/>
+            <a:ext cx="3474720" cy="1328623"/>
           </a:xfrm>
           <a:prstGeom prst="roundRect">
             <a:avLst>
-              <a:gd name="adj" fmla="val 7143"/>
+              <a:gd name="adj" fmla="val 8259"/>
             </a:avLst>
           </a:prstGeom>
           <a:solidFill>
@@ -6388,7 +6604,7 @@
         </p:nvSpPr>
         <p:spPr>
           <a:xfrm>
-            <a:off x="7799832" y="2935224"/>
+            <a:off x="7799832" y="2864815"/>
             <a:ext cx="3145536" cy="256032"/>
           </a:xfrm>
           <a:prstGeom prst="rect">
@@ -6427,8 +6643,8 @@
         </p:nvSpPr>
         <p:spPr>
           <a:xfrm>
-            <a:off x="7818120" y="3300984"/>
-            <a:ext cx="3090672" cy="877824"/>
+            <a:off x="7818120" y="3230575"/>
+            <a:ext cx="3090672" cy="670255"/>
           </a:xfrm>
           <a:prstGeom prst="rect">
             <a:avLst/>
@@ -6502,12 +6718,12 @@
         </p:nvSpPr>
         <p:spPr>
           <a:xfrm>
-            <a:off x="7635240" y="4498848"/>
-            <a:ext cx="3474720" cy="1143000"/>
+            <a:off x="7635240" y="4184294"/>
+            <a:ext cx="3474720" cy="1466698"/>
           </a:xfrm>
           <a:prstGeom prst="roundRect">
             <a:avLst>
-              <a:gd name="adj" fmla="val 9600"/>
+              <a:gd name="adj" fmla="val 7481"/>
             </a:avLst>
           </a:prstGeom>
           <a:solidFill>
@@ -6529,7 +6745,7 @@
         </p:nvSpPr>
         <p:spPr>
           <a:xfrm>
-            <a:off x="7799832" y="4645152"/>
+            <a:off x="7799832" y="4330598"/>
             <a:ext cx="3145536" cy="256032"/>
           </a:xfrm>
           <a:prstGeom prst="rect">
@@ -6568,8 +6784,8 @@
         </p:nvSpPr>
         <p:spPr>
           <a:xfrm>
-            <a:off x="7799832" y="4974336"/>
-            <a:ext cx="3145536" cy="576072"/>
+            <a:off x="7799832" y="4659782"/>
+            <a:ext cx="3145536" cy="899770"/>
           </a:xfrm>
           <a:prstGeom prst="rect">
             <a:avLst/>
@@ -6595,7 +6811,7 @@
                 <a:ea typeface="Aptos" pitchFamily="34" charset="-122"/>
                 <a:cs typeface="Aptos" pitchFamily="34" charset="-120"/>
               </a:rPr>
-              <a:t>Connect the concept to data quality, model performance, validation evidence, monitoring measures, and decisions that.</a:t>
+              <a:t>Connect the concept to data quality, model performance, validation evidence, monitoring measures, and decisions that remain under human control.</a:t>
             </a:r>
             <a:endParaRPr lang="en-US" sz="1320" dirty="0"/>
           </a:p>
@@ -6964,11 +7180,11 @@
         <p:spPr>
           <a:xfrm>
             <a:off x="7635240" y="1325880"/>
-            <a:ext cx="3474720" cy="1325880"/>
+            <a:ext cx="3474720" cy="1207008"/>
           </a:xfrm>
           <a:prstGeom prst="roundRect">
             <a:avLst>
-              <a:gd name="adj" fmla="val 8276"/>
+              <a:gd name="adj" fmla="val 9091"/>
             </a:avLst>
           </a:prstGeom>
           <a:solidFill>
@@ -7030,7 +7246,7 @@
         <p:spPr>
           <a:xfrm>
             <a:off x="7799832" y="1801368"/>
-            <a:ext cx="3145536" cy="758952"/>
+            <a:ext cx="3145536" cy="640080"/>
           </a:xfrm>
           <a:prstGeom prst="rect">
             <a:avLst/>
@@ -7070,12 +7286,12 @@
         </p:nvSpPr>
         <p:spPr>
           <a:xfrm>
-            <a:off x="7635240" y="2788920"/>
-            <a:ext cx="3474720" cy="1536192"/>
+            <a:off x="7635240" y="2670048"/>
+            <a:ext cx="3474720" cy="1377086"/>
           </a:xfrm>
           <a:prstGeom prst="roundRect">
             <a:avLst>
-              <a:gd name="adj" fmla="val 7143"/>
+              <a:gd name="adj" fmla="val 7968"/>
             </a:avLst>
           </a:prstGeom>
           <a:solidFill>
@@ -7097,7 +7313,7 @@
         </p:nvSpPr>
         <p:spPr>
           <a:xfrm>
-            <a:off x="7799832" y="2935224"/>
+            <a:off x="7799832" y="2816352"/>
             <a:ext cx="3145536" cy="256032"/>
           </a:xfrm>
           <a:prstGeom prst="rect">
@@ -7136,8 +7352,8 @@
         </p:nvSpPr>
         <p:spPr>
           <a:xfrm>
-            <a:off x="7818120" y="3300984"/>
-            <a:ext cx="3090672" cy="877824"/>
+            <a:off x="7818120" y="3182112"/>
+            <a:ext cx="3090672" cy="718718"/>
           </a:xfrm>
           <a:prstGeom prst="rect">
             <a:avLst/>
@@ -7211,12 +7427,12 @@
         </p:nvSpPr>
         <p:spPr>
           <a:xfrm>
-            <a:off x="7635240" y="4498848"/>
-            <a:ext cx="3474720" cy="1143000"/>
+            <a:off x="7635240" y="4184294"/>
+            <a:ext cx="3474720" cy="1466698"/>
           </a:xfrm>
           <a:prstGeom prst="roundRect">
             <a:avLst>
-              <a:gd name="adj" fmla="val 9600"/>
+              <a:gd name="adj" fmla="val 7481"/>
             </a:avLst>
           </a:prstGeom>
           <a:solidFill>
@@ -7238,7 +7454,7 @@
         </p:nvSpPr>
         <p:spPr>
           <a:xfrm>
-            <a:off x="7799832" y="4645152"/>
+            <a:off x="7799832" y="4330598"/>
             <a:ext cx="3145536" cy="256032"/>
           </a:xfrm>
           <a:prstGeom prst="rect">
@@ -7277,8 +7493,8 @@
         </p:nvSpPr>
         <p:spPr>
           <a:xfrm>
-            <a:off x="7799832" y="4974336"/>
-            <a:ext cx="3145536" cy="576072"/>
+            <a:off x="7799832" y="4659782"/>
+            <a:ext cx="3145536" cy="899770"/>
           </a:xfrm>
           <a:prstGeom prst="rect">
             <a:avLst/>
@@ -7304,7 +7520,7 @@
                 <a:ea typeface="Aptos" pitchFamily="34" charset="-122"/>
                 <a:cs typeface="Aptos" pitchFamily="34" charset="-120"/>
               </a:rPr>
-              <a:t>Connect the concept to data quality, model performance, validation evidence, monitoring measures, and decisions that.</a:t>
+              <a:t>Connect the concept to data quality, model performance, validation evidence, monitoring measures, and decisions that remain under human control.</a:t>
             </a:r>
             <a:endParaRPr lang="en-US" sz="1320" dirty="0"/>
           </a:p>
@@ -7656,11 +7872,11 @@
         <p:spPr>
           <a:xfrm>
             <a:off x="7635240" y="1325880"/>
-            <a:ext cx="3474720" cy="1325880"/>
+            <a:ext cx="3474720" cy="1207008"/>
           </a:xfrm>
           <a:prstGeom prst="roundRect">
             <a:avLst>
-              <a:gd name="adj" fmla="val 8276"/>
+              <a:gd name="adj" fmla="val 9091"/>
             </a:avLst>
           </a:prstGeom>
           <a:solidFill>
@@ -7722,7 +7938,7 @@
         <p:spPr>
           <a:xfrm>
             <a:off x="7799832" y="1801368"/>
-            <a:ext cx="3145536" cy="758952"/>
+            <a:ext cx="3145536" cy="640080"/>
           </a:xfrm>
           <a:prstGeom prst="rect">
             <a:avLst/>
@@ -7762,12 +7978,12 @@
         </p:nvSpPr>
         <p:spPr>
           <a:xfrm>
-            <a:off x="7635240" y="2788920"/>
-            <a:ext cx="3474720" cy="1536192"/>
+            <a:off x="7635240" y="2670048"/>
+            <a:ext cx="3474720" cy="1377086"/>
           </a:xfrm>
           <a:prstGeom prst="roundRect">
             <a:avLst>
-              <a:gd name="adj" fmla="val 7143"/>
+              <a:gd name="adj" fmla="val 7968"/>
             </a:avLst>
           </a:prstGeom>
           <a:solidFill>
@@ -7789,7 +8005,7 @@
         </p:nvSpPr>
         <p:spPr>
           <a:xfrm>
-            <a:off x="7799832" y="2935224"/>
+            <a:off x="7799832" y="2816352"/>
             <a:ext cx="3145536" cy="256032"/>
           </a:xfrm>
           <a:prstGeom prst="rect">
@@ -7828,8 +8044,8 @@
         </p:nvSpPr>
         <p:spPr>
           <a:xfrm>
-            <a:off x="7818120" y="3300984"/>
-            <a:ext cx="3090672" cy="877824"/>
+            <a:off x="7818120" y="3182112"/>
+            <a:ext cx="3090672" cy="718718"/>
           </a:xfrm>
           <a:prstGeom prst="rect">
             <a:avLst/>
@@ -7886,12 +8102,12 @@
         </p:nvSpPr>
         <p:spPr>
           <a:xfrm>
-            <a:off x="7635240" y="4498848"/>
-            <a:ext cx="3474720" cy="1143000"/>
+            <a:off x="7635240" y="4184294"/>
+            <a:ext cx="3474720" cy="1466698"/>
           </a:xfrm>
           <a:prstGeom prst="roundRect">
             <a:avLst>
-              <a:gd name="adj" fmla="val 9600"/>
+              <a:gd name="adj" fmla="val 7481"/>
             </a:avLst>
           </a:prstGeom>
           <a:solidFill>
@@ -7913,7 +8129,7 @@
         </p:nvSpPr>
         <p:spPr>
           <a:xfrm>
-            <a:off x="7799832" y="4645152"/>
+            <a:off x="7799832" y="4330598"/>
             <a:ext cx="3145536" cy="256032"/>
           </a:xfrm>
           <a:prstGeom prst="rect">
@@ -7952,8 +8168,8 @@
         </p:nvSpPr>
         <p:spPr>
           <a:xfrm>
-            <a:off x="7799832" y="4974336"/>
-            <a:ext cx="3145536" cy="576072"/>
+            <a:off x="7799832" y="4659782"/>
+            <a:ext cx="3145536" cy="899770"/>
           </a:xfrm>
           <a:prstGeom prst="rect">
             <a:avLst/>
@@ -7979,7 +8195,7 @@
                 <a:ea typeface="Aptos" pitchFamily="34" charset="-122"/>
                 <a:cs typeface="Aptos" pitchFamily="34" charset="-120"/>
               </a:rPr>
-              <a:t>Connect the concept to data quality, model performance, validation evidence, monitoring measures, and decisions that.</a:t>
+              <a:t>Connect the concept to data quality, model performance, validation evidence, monitoring measures, and decisions that remain under human control.</a:t>
             </a:r>
             <a:endParaRPr lang="en-US" sz="1320" dirty="0"/>
           </a:p>
@@ -8348,11 +8564,11 @@
         <p:spPr>
           <a:xfrm>
             <a:off x="7635240" y="1325880"/>
-            <a:ext cx="3474720" cy="1325880"/>
+            <a:ext cx="3474720" cy="1207008"/>
           </a:xfrm>
           <a:prstGeom prst="roundRect">
             <a:avLst>
-              <a:gd name="adj" fmla="val 8276"/>
+              <a:gd name="adj" fmla="val 9091"/>
             </a:avLst>
           </a:prstGeom>
           <a:solidFill>
@@ -8414,7 +8630,7 @@
         <p:spPr>
           <a:xfrm>
             <a:off x="7799832" y="1801368"/>
-            <a:ext cx="3145536" cy="758952"/>
+            <a:ext cx="3145536" cy="640080"/>
           </a:xfrm>
           <a:prstGeom prst="rect">
             <a:avLst/>
@@ -8454,12 +8670,12 @@
         </p:nvSpPr>
         <p:spPr>
           <a:xfrm>
-            <a:off x="7635240" y="2788920"/>
-            <a:ext cx="3474720" cy="1536192"/>
+            <a:off x="7635240" y="2670048"/>
+            <a:ext cx="3474720" cy="1377086"/>
           </a:xfrm>
           <a:prstGeom prst="roundRect">
             <a:avLst>
-              <a:gd name="adj" fmla="val 7143"/>
+              <a:gd name="adj" fmla="val 7968"/>
             </a:avLst>
           </a:prstGeom>
           <a:solidFill>
@@ -8481,7 +8697,7 @@
         </p:nvSpPr>
         <p:spPr>
           <a:xfrm>
-            <a:off x="7799832" y="2935224"/>
+            <a:off x="7799832" y="2816352"/>
             <a:ext cx="3145536" cy="256032"/>
           </a:xfrm>
           <a:prstGeom prst="rect">
@@ -8520,8 +8736,8 @@
         </p:nvSpPr>
         <p:spPr>
           <a:xfrm>
-            <a:off x="7818120" y="3300984"/>
-            <a:ext cx="3090672" cy="877824"/>
+            <a:off x="7818120" y="3182112"/>
+            <a:ext cx="3090672" cy="718718"/>
           </a:xfrm>
           <a:prstGeom prst="rect">
             <a:avLst/>
@@ -8578,12 +8794,12 @@
         </p:nvSpPr>
         <p:spPr>
           <a:xfrm>
-            <a:off x="7635240" y="4498848"/>
-            <a:ext cx="3474720" cy="1143000"/>
+            <a:off x="7635240" y="4184294"/>
+            <a:ext cx="3474720" cy="1466698"/>
           </a:xfrm>
           <a:prstGeom prst="roundRect">
             <a:avLst>
-              <a:gd name="adj" fmla="val 9600"/>
+              <a:gd name="adj" fmla="val 7481"/>
             </a:avLst>
           </a:prstGeom>
           <a:solidFill>
@@ -8605,7 +8821,7 @@
         </p:nvSpPr>
         <p:spPr>
           <a:xfrm>
-            <a:off x="7799832" y="4645152"/>
+            <a:off x="7799832" y="4330598"/>
             <a:ext cx="3145536" cy="256032"/>
           </a:xfrm>
           <a:prstGeom prst="rect">
@@ -8644,8 +8860,8 @@
         </p:nvSpPr>
         <p:spPr>
           <a:xfrm>
-            <a:off x="7799832" y="4974336"/>
-            <a:ext cx="3145536" cy="576072"/>
+            <a:off x="7799832" y="4659782"/>
+            <a:ext cx="3145536" cy="899770"/>
           </a:xfrm>
           <a:prstGeom prst="rect">
             <a:avLst/>
@@ -8671,7 +8887,7 @@
                 <a:ea typeface="Aptos" pitchFamily="34" charset="-122"/>
                 <a:cs typeface="Aptos" pitchFamily="34" charset="-120"/>
               </a:rPr>
-              <a:t>Use the assignment to test whether you can explain the concept, apply it to a realistic public health situation, and.</a:t>
+              <a:t>Use the assignment to test whether you can explain the concept, apply it to a realistic public health situation, and identify what would need review before the work moves forward.</a:t>
             </a:r>
             <a:endParaRPr lang="en-US" sz="1320" dirty="0"/>
           </a:p>
@@ -9040,11 +9256,11 @@
         <p:spPr>
           <a:xfrm>
             <a:off x="7635240" y="1325880"/>
-            <a:ext cx="3474720" cy="1325880"/>
+            <a:ext cx="3474720" cy="1207008"/>
           </a:xfrm>
           <a:prstGeom prst="roundRect">
             <a:avLst>
-              <a:gd name="adj" fmla="val 8276"/>
+              <a:gd name="adj" fmla="val 9091"/>
             </a:avLst>
           </a:prstGeom>
           <a:solidFill>
@@ -9106,7 +9322,7 @@
         <p:spPr>
           <a:xfrm>
             <a:off x="7799832" y="1801368"/>
-            <a:ext cx="3145536" cy="758952"/>
+            <a:ext cx="3145536" cy="640080"/>
           </a:xfrm>
           <a:prstGeom prst="rect">
             <a:avLst/>
@@ -9146,12 +9362,12 @@
         </p:nvSpPr>
         <p:spPr>
           <a:xfrm>
-            <a:off x="7635240" y="2788920"/>
-            <a:ext cx="3474720" cy="1536192"/>
+            <a:off x="7635240" y="2670048"/>
+            <a:ext cx="3474720" cy="1377086"/>
           </a:xfrm>
           <a:prstGeom prst="roundRect">
             <a:avLst>
-              <a:gd name="adj" fmla="val 7143"/>
+              <a:gd name="adj" fmla="val 7968"/>
             </a:avLst>
           </a:prstGeom>
           <a:solidFill>
@@ -9173,7 +9389,7 @@
         </p:nvSpPr>
         <p:spPr>
           <a:xfrm>
-            <a:off x="7799832" y="2935224"/>
+            <a:off x="7799832" y="2816352"/>
             <a:ext cx="3145536" cy="256032"/>
           </a:xfrm>
           <a:prstGeom prst="rect">
@@ -9212,8 +9428,8 @@
         </p:nvSpPr>
         <p:spPr>
           <a:xfrm>
-            <a:off x="7818120" y="3300984"/>
-            <a:ext cx="3090672" cy="877824"/>
+            <a:off x="7818120" y="3182112"/>
+            <a:ext cx="3090672" cy="718718"/>
           </a:xfrm>
           <a:prstGeom prst="rect">
             <a:avLst/>
@@ -9287,12 +9503,12 @@
         </p:nvSpPr>
         <p:spPr>
           <a:xfrm>
-            <a:off x="7635240" y="4498848"/>
-            <a:ext cx="3474720" cy="1143000"/>
+            <a:off x="7635240" y="4184294"/>
+            <a:ext cx="3474720" cy="1466698"/>
           </a:xfrm>
           <a:prstGeom prst="roundRect">
             <a:avLst>
-              <a:gd name="adj" fmla="val 9600"/>
+              <a:gd name="adj" fmla="val 7481"/>
             </a:avLst>
           </a:prstGeom>
           <a:solidFill>
@@ -9314,7 +9530,7 @@
         </p:nvSpPr>
         <p:spPr>
           <a:xfrm>
-            <a:off x="7799832" y="4645152"/>
+            <a:off x="7799832" y="4330598"/>
             <a:ext cx="3145536" cy="256032"/>
           </a:xfrm>
           <a:prstGeom prst="rect">
@@ -9353,8 +9569,8 @@
         </p:nvSpPr>
         <p:spPr>
           <a:xfrm>
-            <a:off x="7799832" y="4974336"/>
-            <a:ext cx="3145536" cy="576072"/>
+            <a:off x="7799832" y="4659782"/>
+            <a:ext cx="3145536" cy="899770"/>
           </a:xfrm>
           <a:prstGeom prst="rect">
             <a:avLst/>
@@ -9380,7 +9596,7 @@
                 <a:ea typeface="Aptos" pitchFamily="34" charset="-122"/>
                 <a:cs typeface="Aptos" pitchFamily="34" charset="-120"/>
               </a:rPr>
-              <a:t>Connect the concept to data quality, model performance, validation evidence, monitoring measures, and decisions that.</a:t>
+              <a:t>Connect the concept to data quality, model performance, validation evidence, monitoring measures, and decisions that remain under human control.</a:t>
             </a:r>
             <a:endParaRPr lang="en-US" sz="1320" dirty="0"/>
           </a:p>
@@ -9715,11 +9931,11 @@
         <p:spPr>
           <a:xfrm>
             <a:off x="7635240" y="1325880"/>
-            <a:ext cx="3474720" cy="1325880"/>
+            <a:ext cx="3474720" cy="1207008"/>
           </a:xfrm>
           <a:prstGeom prst="roundRect">
             <a:avLst>
-              <a:gd name="adj" fmla="val 8276"/>
+              <a:gd name="adj" fmla="val 9091"/>
             </a:avLst>
           </a:prstGeom>
           <a:solidFill>
@@ -9781,7 +9997,7 @@
         <p:spPr>
           <a:xfrm>
             <a:off x="7799832" y="1801368"/>
-            <a:ext cx="3145536" cy="758952"/>
+            <a:ext cx="3145536" cy="640080"/>
           </a:xfrm>
           <a:prstGeom prst="rect">
             <a:avLst/>
@@ -9821,12 +10037,12 @@
         </p:nvSpPr>
         <p:spPr>
           <a:xfrm>
-            <a:off x="7635240" y="2788920"/>
-            <a:ext cx="3474720" cy="1536192"/>
+            <a:off x="7635240" y="2670048"/>
+            <a:ext cx="3474720" cy="1377086"/>
           </a:xfrm>
           <a:prstGeom prst="roundRect">
             <a:avLst>
-              <a:gd name="adj" fmla="val 7143"/>
+              <a:gd name="adj" fmla="val 7968"/>
             </a:avLst>
           </a:prstGeom>
           <a:solidFill>
@@ -9848,7 +10064,7 @@
         </p:nvSpPr>
         <p:spPr>
           <a:xfrm>
-            <a:off x="7799832" y="2935224"/>
+            <a:off x="7799832" y="2816352"/>
             <a:ext cx="3145536" cy="256032"/>
           </a:xfrm>
           <a:prstGeom prst="rect">
@@ -9887,8 +10103,8 @@
         </p:nvSpPr>
         <p:spPr>
           <a:xfrm>
-            <a:off x="7818120" y="3300984"/>
-            <a:ext cx="3090672" cy="877824"/>
+            <a:off x="7818120" y="3182112"/>
+            <a:ext cx="3090672" cy="718718"/>
           </a:xfrm>
           <a:prstGeom prst="rect">
             <a:avLst/>
@@ -9928,12 +10144,12 @@
         </p:nvSpPr>
         <p:spPr>
           <a:xfrm>
-            <a:off x="7635240" y="4498848"/>
-            <a:ext cx="3474720" cy="1143000"/>
+            <a:off x="7635240" y="4184294"/>
+            <a:ext cx="3474720" cy="1466698"/>
           </a:xfrm>
           <a:prstGeom prst="roundRect">
             <a:avLst>
-              <a:gd name="adj" fmla="val 9600"/>
+              <a:gd name="adj" fmla="val 7481"/>
             </a:avLst>
           </a:prstGeom>
           <a:solidFill>
@@ -9955,7 +10171,7 @@
         </p:nvSpPr>
         <p:spPr>
           <a:xfrm>
-            <a:off x="7799832" y="4645152"/>
+            <a:off x="7799832" y="4330598"/>
             <a:ext cx="3145536" cy="256032"/>
           </a:xfrm>
           <a:prstGeom prst="rect">
@@ -9994,8 +10210,8 @@
         </p:nvSpPr>
         <p:spPr>
           <a:xfrm>
-            <a:off x="7799832" y="4974336"/>
-            <a:ext cx="3145536" cy="576072"/>
+            <a:off x="7799832" y="4659782"/>
+            <a:ext cx="3145536" cy="899770"/>
           </a:xfrm>
           <a:prstGeom prst="rect">
             <a:avLst/>
@@ -10021,7 +10237,7 @@
                 <a:ea typeface="Aptos" pitchFamily="34" charset="-122"/>
                 <a:cs typeface="Aptos" pitchFamily="34" charset="-120"/>
               </a:rPr>
-              <a:t>Connect the concept to data quality, model performance, validation evidence, monitoring measures, and decisions that.</a:t>
+              <a:t>Connect the concept to data quality, model performance, validation evidence, monitoring measures, and decisions that remain under human control.</a:t>
             </a:r>
             <a:endParaRPr lang="en-US" sz="1320" dirty="0"/>
           </a:p>
@@ -10992,11 +11208,11 @@
         <p:spPr>
           <a:xfrm>
             <a:off x="7635240" y="1325880"/>
-            <a:ext cx="3474720" cy="1325880"/>
+            <a:ext cx="3474720" cy="1207008"/>
           </a:xfrm>
           <a:prstGeom prst="roundRect">
             <a:avLst>
-              <a:gd name="adj" fmla="val 8276"/>
+              <a:gd name="adj" fmla="val 9091"/>
             </a:avLst>
           </a:prstGeom>
           <a:solidFill>
@@ -11058,7 +11274,7 @@
         <p:spPr>
           <a:xfrm>
             <a:off x="7799832" y="1801368"/>
-            <a:ext cx="3145536" cy="758952"/>
+            <a:ext cx="3145536" cy="640080"/>
           </a:xfrm>
           <a:prstGeom prst="rect">
             <a:avLst/>
@@ -11098,12 +11314,12 @@
         </p:nvSpPr>
         <p:spPr>
           <a:xfrm>
-            <a:off x="7635240" y="2788920"/>
-            <a:ext cx="3474720" cy="1536192"/>
+            <a:off x="7635240" y="2670048"/>
+            <a:ext cx="3474720" cy="1377086"/>
           </a:xfrm>
           <a:prstGeom prst="roundRect">
             <a:avLst>
-              <a:gd name="adj" fmla="val 7143"/>
+              <a:gd name="adj" fmla="val 7968"/>
             </a:avLst>
           </a:prstGeom>
           <a:solidFill>
@@ -11125,7 +11341,7 @@
         </p:nvSpPr>
         <p:spPr>
           <a:xfrm>
-            <a:off x="7799832" y="2935224"/>
+            <a:off x="7799832" y="2816352"/>
             <a:ext cx="3145536" cy="256032"/>
           </a:xfrm>
           <a:prstGeom prst="rect">
@@ -11164,8 +11380,8 @@
         </p:nvSpPr>
         <p:spPr>
           <a:xfrm>
-            <a:off x="7818120" y="3300984"/>
-            <a:ext cx="3090672" cy="877824"/>
+            <a:off x="7818120" y="3182112"/>
+            <a:ext cx="3090672" cy="718718"/>
           </a:xfrm>
           <a:prstGeom prst="rect">
             <a:avLst/>
@@ -11239,12 +11455,12 @@
         </p:nvSpPr>
         <p:spPr>
           <a:xfrm>
-            <a:off x="7635240" y="4498848"/>
-            <a:ext cx="3474720" cy="1143000"/>
+            <a:off x="7635240" y="4184294"/>
+            <a:ext cx="3474720" cy="1466698"/>
           </a:xfrm>
           <a:prstGeom prst="roundRect">
             <a:avLst>
-              <a:gd name="adj" fmla="val 9600"/>
+              <a:gd name="adj" fmla="val 7481"/>
             </a:avLst>
           </a:prstGeom>
           <a:solidFill>
@@ -11266,7 +11482,7 @@
         </p:nvSpPr>
         <p:spPr>
           <a:xfrm>
-            <a:off x="7799832" y="4645152"/>
+            <a:off x="7799832" y="4330598"/>
             <a:ext cx="3145536" cy="256032"/>
           </a:xfrm>
           <a:prstGeom prst="rect">
@@ -11305,8 +11521,8 @@
         </p:nvSpPr>
         <p:spPr>
           <a:xfrm>
-            <a:off x="7799832" y="4974336"/>
-            <a:ext cx="3145536" cy="576072"/>
+            <a:off x="7799832" y="4659782"/>
+            <a:ext cx="3145536" cy="899770"/>
           </a:xfrm>
           <a:prstGeom prst="rect">
             <a:avLst/>
@@ -11332,7 +11548,7 @@
                 <a:ea typeface="Aptos" pitchFamily="34" charset="-122"/>
                 <a:cs typeface="Aptos" pitchFamily="34" charset="-120"/>
               </a:rPr>
-              <a:t>Use the assignment to test whether you can explain the concept, apply it to a realistic public health situation, and.</a:t>
+              <a:t>Use the assignment to test whether you can explain the concept, apply it to a realistic public health situation, and identify what would need review before the work moves forward.</a:t>
             </a:r>
             <a:endParaRPr lang="en-US" sz="1320" dirty="0"/>
           </a:p>
@@ -11701,11 +11917,11 @@
         <p:spPr>
           <a:xfrm>
             <a:off x="7635240" y="1325880"/>
-            <a:ext cx="3474720" cy="1325880"/>
+            <a:ext cx="3474720" cy="1207008"/>
           </a:xfrm>
           <a:prstGeom prst="roundRect">
             <a:avLst>
-              <a:gd name="adj" fmla="val 8276"/>
+              <a:gd name="adj" fmla="val 9091"/>
             </a:avLst>
           </a:prstGeom>
           <a:solidFill>
@@ -11767,7 +11983,7 @@
         <p:spPr>
           <a:xfrm>
             <a:off x="7799832" y="1801368"/>
-            <a:ext cx="3145536" cy="758952"/>
+            <a:ext cx="3145536" cy="640080"/>
           </a:xfrm>
           <a:prstGeom prst="rect">
             <a:avLst/>
@@ -11807,12 +12023,12 @@
         </p:nvSpPr>
         <p:spPr>
           <a:xfrm>
-            <a:off x="7635240" y="2788920"/>
-            <a:ext cx="3474720" cy="1536192"/>
+            <a:off x="7635240" y="2670048"/>
+            <a:ext cx="3474720" cy="1377086"/>
           </a:xfrm>
           <a:prstGeom prst="roundRect">
             <a:avLst>
-              <a:gd name="adj" fmla="val 7143"/>
+              <a:gd name="adj" fmla="val 7968"/>
             </a:avLst>
           </a:prstGeom>
           <a:solidFill>
@@ -11834,7 +12050,7 @@
         </p:nvSpPr>
         <p:spPr>
           <a:xfrm>
-            <a:off x="7799832" y="2935224"/>
+            <a:off x="7799832" y="2816352"/>
             <a:ext cx="3145536" cy="256032"/>
           </a:xfrm>
           <a:prstGeom prst="rect">
@@ -11873,8 +12089,8 @@
         </p:nvSpPr>
         <p:spPr>
           <a:xfrm>
-            <a:off x="7818120" y="3300984"/>
-            <a:ext cx="3090672" cy="877824"/>
+            <a:off x="7818120" y="3182112"/>
+            <a:ext cx="3090672" cy="718718"/>
           </a:xfrm>
           <a:prstGeom prst="rect">
             <a:avLst/>
@@ -11948,12 +12164,12 @@
         </p:nvSpPr>
         <p:spPr>
           <a:xfrm>
-            <a:off x="7635240" y="4498848"/>
-            <a:ext cx="3474720" cy="1143000"/>
+            <a:off x="7635240" y="4184294"/>
+            <a:ext cx="3474720" cy="1466698"/>
           </a:xfrm>
           <a:prstGeom prst="roundRect">
             <a:avLst>
-              <a:gd name="adj" fmla="val 9600"/>
+              <a:gd name="adj" fmla="val 7481"/>
             </a:avLst>
           </a:prstGeom>
           <a:solidFill>
@@ -11975,7 +12191,7 @@
         </p:nvSpPr>
         <p:spPr>
           <a:xfrm>
-            <a:off x="7799832" y="4645152"/>
+            <a:off x="7799832" y="4330598"/>
             <a:ext cx="3145536" cy="256032"/>
           </a:xfrm>
           <a:prstGeom prst="rect">
@@ -12014,8 +12230,8 @@
         </p:nvSpPr>
         <p:spPr>
           <a:xfrm>
-            <a:off x="7799832" y="4974336"/>
-            <a:ext cx="3145536" cy="576072"/>
+            <a:off x="7799832" y="4659782"/>
+            <a:ext cx="3145536" cy="899770"/>
           </a:xfrm>
           <a:prstGeom prst="rect">
             <a:avLst/>
@@ -12041,7 +12257,7 @@
                 <a:ea typeface="Aptos" pitchFamily="34" charset="-122"/>
                 <a:cs typeface="Aptos" pitchFamily="34" charset="-120"/>
               </a:rPr>
-              <a:t>Use the assignment to test whether you can explain the concept, apply it to a realistic public health situation, and.</a:t>
+              <a:t>Use the assignment to test whether you can explain the concept, apply it to a realistic public health situation, and identify what would need review before the work moves forward.</a:t>
             </a:r>
             <a:endParaRPr lang="en-US" sz="1320" dirty="0"/>
           </a:p>
@@ -12410,11 +12626,11 @@
         <p:spPr>
           <a:xfrm>
             <a:off x="7635240" y="1325880"/>
-            <a:ext cx="3474720" cy="1325880"/>
+            <a:ext cx="3474720" cy="1207008"/>
           </a:xfrm>
           <a:prstGeom prst="roundRect">
             <a:avLst>
-              <a:gd name="adj" fmla="val 8276"/>
+              <a:gd name="adj" fmla="val 9091"/>
             </a:avLst>
           </a:prstGeom>
           <a:solidFill>
@@ -12476,7 +12692,7 @@
         <p:spPr>
           <a:xfrm>
             <a:off x="7799832" y="1801368"/>
-            <a:ext cx="3145536" cy="758952"/>
+            <a:ext cx="3145536" cy="640080"/>
           </a:xfrm>
           <a:prstGeom prst="rect">
             <a:avLst/>
@@ -12516,12 +12732,12 @@
         </p:nvSpPr>
         <p:spPr>
           <a:xfrm>
-            <a:off x="7635240" y="2788920"/>
-            <a:ext cx="3474720" cy="1536192"/>
+            <a:off x="7635240" y="2670048"/>
+            <a:ext cx="3474720" cy="1377086"/>
           </a:xfrm>
           <a:prstGeom prst="roundRect">
             <a:avLst>
-              <a:gd name="adj" fmla="val 7143"/>
+              <a:gd name="adj" fmla="val 7968"/>
             </a:avLst>
           </a:prstGeom>
           <a:solidFill>
@@ -12543,7 +12759,7 @@
         </p:nvSpPr>
         <p:spPr>
           <a:xfrm>
-            <a:off x="7799832" y="2935224"/>
+            <a:off x="7799832" y="2816352"/>
             <a:ext cx="3145536" cy="256032"/>
           </a:xfrm>
           <a:prstGeom prst="rect">
@@ -12582,8 +12798,8 @@
         </p:nvSpPr>
         <p:spPr>
           <a:xfrm>
-            <a:off x="7818120" y="3300984"/>
-            <a:ext cx="3090672" cy="877824"/>
+            <a:off x="7818120" y="3182112"/>
+            <a:ext cx="3090672" cy="718718"/>
           </a:xfrm>
           <a:prstGeom prst="rect">
             <a:avLst/>
@@ -12640,12 +12856,12 @@
         </p:nvSpPr>
         <p:spPr>
           <a:xfrm>
-            <a:off x="7635240" y="4498848"/>
-            <a:ext cx="3474720" cy="1143000"/>
+            <a:off x="7635240" y="4184294"/>
+            <a:ext cx="3474720" cy="1466698"/>
           </a:xfrm>
           <a:prstGeom prst="roundRect">
             <a:avLst>
-              <a:gd name="adj" fmla="val 9600"/>
+              <a:gd name="adj" fmla="val 7481"/>
             </a:avLst>
           </a:prstGeom>
           <a:solidFill>
@@ -12667,7 +12883,7 @@
         </p:nvSpPr>
         <p:spPr>
           <a:xfrm>
-            <a:off x="7799832" y="4645152"/>
+            <a:off x="7799832" y="4330598"/>
             <a:ext cx="3145536" cy="256032"/>
           </a:xfrm>
           <a:prstGeom prst="rect">
@@ -12706,8 +12922,8 @@
         </p:nvSpPr>
         <p:spPr>
           <a:xfrm>
-            <a:off x="7799832" y="4974336"/>
-            <a:ext cx="3145536" cy="576072"/>
+            <a:off x="7799832" y="4659782"/>
+            <a:ext cx="3145536" cy="899770"/>
           </a:xfrm>
           <a:prstGeom prst="rect">
             <a:avLst/>
@@ -12733,7 +12949,7 @@
                 <a:ea typeface="Aptos" pitchFamily="34" charset="-122"/>
                 <a:cs typeface="Aptos" pitchFamily="34" charset="-120"/>
               </a:rPr>
-              <a:t>Connect the concept to data quality, model performance, validation evidence, monitoring measures, and decisions that.</a:t>
+              <a:t>Connect the concept to data quality, model performance, validation evidence, monitoring measures, and decisions that remain under human control.</a:t>
             </a:r>
             <a:endParaRPr lang="en-US" sz="1320" dirty="0"/>
           </a:p>
@@ -13211,7 +13427,7 @@
                 <a:ea typeface="Aptos" pitchFamily="34" charset="-122"/>
                 <a:cs typeface="Aptos" pitchFamily="34" charset="-120"/>
               </a:rPr>
-              <a:t>Use the related plays to identify decisions, participants, timing, approvals, and documentation needed for responsible.</a:t>
+              <a:t>Use the related plays to identify decisions, participants, timing, approvals, and documentation needed for responsible implementation.</a:t>
             </a:r>
             <a:endParaRPr lang="en-US" sz="1320" dirty="0"/>
           </a:p>
@@ -13830,7 +14046,7 @@
                 <a:ea typeface="Aptos" pitchFamily="34" charset="-122"/>
                 <a:cs typeface="Aptos" pitchFamily="34" charset="-120"/>
               </a:rPr>
-              <a:t>Use linked tools when your department needs a structured worksheet, template, checklist, review process, or.</a:t>
+              <a:t>Use linked tools when your department needs a structured worksheet, template, checklist, review process, or documentation artifact.</a:t>
             </a:r>
             <a:endParaRPr lang="en-US" sz="1320" dirty="0"/>
           </a:p>
@@ -14340,11 +14556,11 @@
         <p:spPr>
           <a:xfrm>
             <a:off x="7635240" y="1325880"/>
-            <a:ext cx="3474720" cy="1325880"/>
+            <a:ext cx="3474720" cy="1207008"/>
           </a:xfrm>
           <a:prstGeom prst="roundRect">
             <a:avLst>
-              <a:gd name="adj" fmla="val 8276"/>
+              <a:gd name="adj" fmla="val 9091"/>
             </a:avLst>
           </a:prstGeom>
           <a:solidFill>
@@ -14406,7 +14622,7 @@
         <p:spPr>
           <a:xfrm>
             <a:off x="7799832" y="1801368"/>
-            <a:ext cx="3145536" cy="758952"/>
+            <a:ext cx="3145536" cy="640080"/>
           </a:xfrm>
           <a:prstGeom prst="rect">
             <a:avLst/>
@@ -14446,12 +14662,12 @@
         </p:nvSpPr>
         <p:spPr>
           <a:xfrm>
-            <a:off x="7635240" y="2788920"/>
-            <a:ext cx="3474720" cy="1536192"/>
+            <a:off x="7635240" y="2670048"/>
+            <a:ext cx="3474720" cy="1377086"/>
           </a:xfrm>
           <a:prstGeom prst="roundRect">
             <a:avLst>
-              <a:gd name="adj" fmla="val 7143"/>
+              <a:gd name="adj" fmla="val 7968"/>
             </a:avLst>
           </a:prstGeom>
           <a:solidFill>
@@ -14473,7 +14689,7 @@
         </p:nvSpPr>
         <p:spPr>
           <a:xfrm>
-            <a:off x="7799832" y="2935224"/>
+            <a:off x="7799832" y="2816352"/>
             <a:ext cx="3145536" cy="256032"/>
           </a:xfrm>
           <a:prstGeom prst="rect">
@@ -14512,8 +14728,8 @@
         </p:nvSpPr>
         <p:spPr>
           <a:xfrm>
-            <a:off x="7818120" y="3300984"/>
-            <a:ext cx="3090672" cy="877824"/>
+            <a:off x="7818120" y="3182112"/>
+            <a:ext cx="3090672" cy="718718"/>
           </a:xfrm>
           <a:prstGeom prst="rect">
             <a:avLst/>
@@ -14570,12 +14786,12 @@
         </p:nvSpPr>
         <p:spPr>
           <a:xfrm>
-            <a:off x="7635240" y="4498848"/>
-            <a:ext cx="3474720" cy="1143000"/>
+            <a:off x="7635240" y="4184294"/>
+            <a:ext cx="3474720" cy="1466698"/>
           </a:xfrm>
           <a:prstGeom prst="roundRect">
             <a:avLst>
-              <a:gd name="adj" fmla="val 9600"/>
+              <a:gd name="adj" fmla="val 7481"/>
             </a:avLst>
           </a:prstGeom>
           <a:solidFill>
@@ -14597,7 +14813,7 @@
         </p:nvSpPr>
         <p:spPr>
           <a:xfrm>
-            <a:off x="7799832" y="4645152"/>
+            <a:off x="7799832" y="4330598"/>
             <a:ext cx="3145536" cy="256032"/>
           </a:xfrm>
           <a:prstGeom prst="rect">
@@ -14636,8 +14852,8 @@
         </p:nvSpPr>
         <p:spPr>
           <a:xfrm>
-            <a:off x="7799832" y="4974336"/>
-            <a:ext cx="3145536" cy="576072"/>
+            <a:off x="7799832" y="4659782"/>
+            <a:ext cx="3145536" cy="899770"/>
           </a:xfrm>
           <a:prstGeom prst="rect">
             <a:avLst/>
@@ -14663,7 +14879,7 @@
                 <a:ea typeface="Aptos" pitchFamily="34" charset="-122"/>
                 <a:cs typeface="Aptos" pitchFamily="34" charset="-120"/>
               </a:rPr>
-              <a:t>Use the assignment to test whether you can explain the concept, apply it to a realistic public health situation, and.</a:t>
+              <a:t>Use the assignment to test whether you can explain the concept, apply it to a realistic public health situation, and identify what would need review before the work moves forward.</a:t>
             </a:r>
             <a:endParaRPr lang="en-US" sz="1320" dirty="0"/>
           </a:p>
@@ -14998,11 +15214,11 @@
         <p:spPr>
           <a:xfrm>
             <a:off x="7635240" y="1325880"/>
-            <a:ext cx="3474720" cy="1325880"/>
+            <a:ext cx="3474720" cy="1207008"/>
           </a:xfrm>
           <a:prstGeom prst="roundRect">
             <a:avLst>
-              <a:gd name="adj" fmla="val 8276"/>
+              <a:gd name="adj" fmla="val 9091"/>
             </a:avLst>
           </a:prstGeom>
           <a:solidFill>
@@ -15064,7 +15280,7 @@
         <p:spPr>
           <a:xfrm>
             <a:off x="7799832" y="1801368"/>
-            <a:ext cx="3145536" cy="758952"/>
+            <a:ext cx="3145536" cy="640080"/>
           </a:xfrm>
           <a:prstGeom prst="rect">
             <a:avLst/>
@@ -15104,12 +15320,12 @@
         </p:nvSpPr>
         <p:spPr>
           <a:xfrm>
-            <a:off x="7635240" y="2788920"/>
-            <a:ext cx="3474720" cy="1536192"/>
+            <a:off x="7635240" y="2670048"/>
+            <a:ext cx="3474720" cy="1377086"/>
           </a:xfrm>
           <a:prstGeom prst="roundRect">
             <a:avLst>
-              <a:gd name="adj" fmla="val 7143"/>
+              <a:gd name="adj" fmla="val 7968"/>
             </a:avLst>
           </a:prstGeom>
           <a:solidFill>
@@ -15131,7 +15347,7 @@
         </p:nvSpPr>
         <p:spPr>
           <a:xfrm>
-            <a:off x="7799832" y="2935224"/>
+            <a:off x="7799832" y="2816352"/>
             <a:ext cx="3145536" cy="256032"/>
           </a:xfrm>
           <a:prstGeom prst="rect">
@@ -15170,8 +15386,8 @@
         </p:nvSpPr>
         <p:spPr>
           <a:xfrm>
-            <a:off x="7818120" y="3300984"/>
-            <a:ext cx="3090672" cy="877824"/>
+            <a:off x="7818120" y="3182112"/>
+            <a:ext cx="3090672" cy="718718"/>
           </a:xfrm>
           <a:prstGeom prst="rect">
             <a:avLst/>
@@ -15211,12 +15427,12 @@
         </p:nvSpPr>
         <p:spPr>
           <a:xfrm>
-            <a:off x="7635240" y="4498848"/>
-            <a:ext cx="3474720" cy="1143000"/>
+            <a:off x="7635240" y="4184294"/>
+            <a:ext cx="3474720" cy="1466698"/>
           </a:xfrm>
           <a:prstGeom prst="roundRect">
             <a:avLst>
-              <a:gd name="adj" fmla="val 9600"/>
+              <a:gd name="adj" fmla="val 7481"/>
             </a:avLst>
           </a:prstGeom>
           <a:solidFill>
@@ -15238,7 +15454,7 @@
         </p:nvSpPr>
         <p:spPr>
           <a:xfrm>
-            <a:off x="7799832" y="4645152"/>
+            <a:off x="7799832" y="4330598"/>
             <a:ext cx="3145536" cy="256032"/>
           </a:xfrm>
           <a:prstGeom prst="rect">
@@ -15277,8 +15493,8 @@
         </p:nvSpPr>
         <p:spPr>
           <a:xfrm>
-            <a:off x="7799832" y="4974336"/>
-            <a:ext cx="3145536" cy="576072"/>
+            <a:off x="7799832" y="4659782"/>
+            <a:ext cx="3145536" cy="899770"/>
           </a:xfrm>
           <a:prstGeom prst="rect">
             <a:avLst/>
@@ -15304,7 +15520,7 @@
                 <a:ea typeface="Aptos" pitchFamily="34" charset="-122"/>
                 <a:cs typeface="Aptos" pitchFamily="34" charset="-120"/>
               </a:rPr>
-              <a:t>Use the assignment to test whether you can explain the concept, apply it to a realistic public health situation, and.</a:t>
+              <a:t>Use the assignment to test whether you can explain the concept, apply it to a realistic public health situation, and identify what would need review before the work moves forward.</a:t>
             </a:r>
             <a:endParaRPr lang="en-US" sz="1320" dirty="0"/>
           </a:p>
@@ -15673,11 +15889,11 @@
         <p:spPr>
           <a:xfrm>
             <a:off x="7635240" y="1325880"/>
-            <a:ext cx="3474720" cy="1325880"/>
+            <a:ext cx="3474720" cy="1255471"/>
           </a:xfrm>
           <a:prstGeom prst="roundRect">
             <a:avLst>
-              <a:gd name="adj" fmla="val 8276"/>
+              <a:gd name="adj" fmla="val 8740"/>
             </a:avLst>
           </a:prstGeom>
           <a:solidFill>
@@ -15739,7 +15955,7 @@
         <p:spPr>
           <a:xfrm>
             <a:off x="7799832" y="1801368"/>
-            <a:ext cx="3145536" cy="758952"/>
+            <a:ext cx="3145536" cy="688543"/>
           </a:xfrm>
           <a:prstGeom prst="rect">
             <a:avLst/>
@@ -15779,12 +15995,12 @@
         </p:nvSpPr>
         <p:spPr>
           <a:xfrm>
-            <a:off x="7635240" y="2788920"/>
-            <a:ext cx="3474720" cy="1536192"/>
+            <a:off x="7635240" y="2718511"/>
+            <a:ext cx="3474720" cy="1328623"/>
           </a:xfrm>
           <a:prstGeom prst="roundRect">
             <a:avLst>
-              <a:gd name="adj" fmla="val 7143"/>
+              <a:gd name="adj" fmla="val 8259"/>
             </a:avLst>
           </a:prstGeom>
           <a:solidFill>
@@ -15806,8 +16022,8 @@
         </p:nvSpPr>
         <p:spPr>
           <a:xfrm>
-            <a:off x="7799832" y="2935224"/>
-            <a:ext cx="3145536" cy="256032"/>
+            <a:off x="7799832" y="2846527"/>
+            <a:ext cx="3145536" cy="237744"/>
           </a:xfrm>
           <a:prstGeom prst="rect">
             <a:avLst/>
@@ -15823,7 +16039,7 @@
               <a:buNone/>
             </a:pPr>
             <a:r>
-              <a:rPr lang="en-US" sz="1300" b="1" dirty="0">
+              <a:rPr lang="en-US" sz="1250" b="1" dirty="0">
                 <a:solidFill>
                   <a:srgbClr val="0068B7"/>
                 </a:solidFill>
@@ -15831,101 +16047,317 @@
                 <a:ea typeface="Aptos" pitchFamily="34" charset="-122"/>
                 <a:cs typeface="Aptos" pitchFamily="34" charset="-120"/>
               </a:rPr>
-              <a:t>Concept checkpoints</a:t>
-            </a:r>
-            <a:endParaRPr lang="en-US" sz="1300" dirty="0"/>
-          </a:p>
-        </p:txBody>
-      </p:sp>
-      <p:sp>
-        <p:nvSpPr>
-          <p:cNvPr id="15" name="Text 13"/>
-          <p:cNvSpPr/>
-          <p:nvPr/>
-        </p:nvSpPr>
-        <p:spPr>
-          <a:xfrm>
-            <a:off x="7818120" y="3300984"/>
-            <a:ext cx="3090672" cy="877824"/>
-          </a:xfrm>
-          <a:prstGeom prst="rect">
-            <a:avLst/>
-          </a:prstGeom>
-          <a:noFill/>
-          <a:ln/>
-        </p:spPr>
-        <p:txBody>
-          <a:bodyPr wrap="square" lIns="508" tIns="508" rIns="508" bIns="508" rtlCol="0" anchor="t">
+              <a:t>Data-to-decision flow</a:t>
+            </a:r>
+            <a:endParaRPr lang="en-US" sz="1250" dirty="0"/>
+          </a:p>
+        </p:txBody>
+      </p:sp>
+      <p:sp>
+        <p:nvSpPr>
+          <p:cNvPr id="15" name="Shape 13"/>
+          <p:cNvSpPr/>
+          <p:nvPr/>
+        </p:nvSpPr>
+        <p:spPr>
+          <a:xfrm>
+            <a:off x="8763000" y="3399739"/>
+            <a:ext cx="164592" cy="0"/>
+          </a:xfrm>
+          <a:prstGeom prst="line">
+            <a:avLst/>
+          </a:prstGeom>
+          <a:noFill/>
+          <a:ln w="15240">
+            <a:solidFill>
+              <a:srgbClr val="8ABBD8"/>
+            </a:solidFill>
+            <a:prstDash val="solid"/>
+          </a:ln>
+        </p:spPr>
+      </p:sp>
+      <p:sp>
+        <p:nvSpPr>
+          <p:cNvPr id="16" name="Shape 14"/>
+          <p:cNvSpPr/>
+          <p:nvPr/>
+        </p:nvSpPr>
+        <p:spPr>
+          <a:xfrm>
+            <a:off x="7872984" y="3248863"/>
+            <a:ext cx="890016" cy="301752"/>
+          </a:xfrm>
+          <a:prstGeom prst="roundRect">
+            <a:avLst>
+              <a:gd name="adj" fmla="val 24242"/>
+            </a:avLst>
+          </a:prstGeom>
+          <a:solidFill>
+            <a:srgbClr val="0068B7"/>
+          </a:solidFill>
+          <a:ln w="12700">
+            <a:solidFill>
+              <a:srgbClr val="0068B7"/>
+            </a:solidFill>
+            <a:prstDash val="solid"/>
+          </a:ln>
+        </p:spPr>
+      </p:sp>
+      <p:sp>
+        <p:nvSpPr>
+          <p:cNvPr id="17" name="Text 15"/>
+          <p:cNvSpPr/>
+          <p:nvPr/>
+        </p:nvSpPr>
+        <p:spPr>
+          <a:xfrm>
+            <a:off x="7909560" y="3322015"/>
+            <a:ext cx="816864" cy="146304"/>
+          </a:xfrm>
+          <a:prstGeom prst="rect">
+            <a:avLst/>
+          </a:prstGeom>
+          <a:noFill/>
+          <a:ln/>
+        </p:spPr>
+        <p:txBody>
+          <a:bodyPr wrap="square" lIns="0" tIns="0" rIns="0" bIns="0" rtlCol="0" anchor="ctr">
             <a:normAutofit/>
           </a:bodyPr>
           <a:lstStyle/>
           <a:p>
-            <a:pPr indent="0" marL="0">
-              <a:buNone/>
-            </a:pPr>
-            <a:r>
-              <a:rPr lang="en-US" sz="1220" dirty="0">
-                <a:solidFill>
-                  <a:srgbClr val="17364A"/>
-                </a:solidFill>
-                <a:latin typeface="Aptos" pitchFamily="34" charset="0"/>
-                <a:ea typeface="Aptos" pitchFamily="34" charset="-122"/>
-                <a:cs typeface="Aptos" pitchFamily="34" charset="-120"/>
-              </a:rPr>
-              <a:t>Generative AI can draft, summarize, translate, classify, explain,.</a:t>
-            </a:r>
-            <a:endParaRPr lang="en-US" sz="1220" dirty="0"/>
-          </a:p>
-          <a:p>
-            <a:pPr indent="0" marL="0">
-              <a:buNone/>
-            </a:pPr>
-            <a:r>
-              <a:rPr lang="en-US" sz="1220" dirty="0">
-                <a:solidFill>
-                  <a:srgbClr val="17364A"/>
-                </a:solidFill>
-                <a:latin typeface="Aptos" pitchFamily="34" charset="0"/>
-                <a:ea typeface="Aptos" pitchFamily="34" charset="-122"/>
-                <a:cs typeface="Aptos" pitchFamily="34" charset="-120"/>
-              </a:rPr>
-              <a:t>In public health, generated content may affect case review, public.</a:t>
-            </a:r>
-            <a:endParaRPr lang="en-US" sz="1220" dirty="0"/>
-          </a:p>
-          <a:p>
-            <a:pPr indent="0" marL="0">
-              <a:buNone/>
-            </a:pPr>
-            <a:r>
-              <a:rPr lang="en-US" sz="1220" dirty="0">
-                <a:solidFill>
-                  <a:srgbClr val="17364A"/>
-                </a:solidFill>
-                <a:latin typeface="Aptos" pitchFamily="34" charset="0"/>
-                <a:ea typeface="Aptos" pitchFamily="34" charset="-122"/>
-                <a:cs typeface="Aptos" pitchFamily="34" charset="-120"/>
-              </a:rPr>
-              <a:t>This module teaches learners how to evaluate generative AI outputs.</a:t>
-            </a:r>
-            <a:endParaRPr lang="en-US" sz="1220" dirty="0"/>
-          </a:p>
-        </p:txBody>
-      </p:sp>
-      <p:sp>
-        <p:nvSpPr>
-          <p:cNvPr id="16" name="Shape 14"/>
-          <p:cNvSpPr/>
-          <p:nvPr/>
-        </p:nvSpPr>
-        <p:spPr>
-          <a:xfrm>
-            <a:off x="7635240" y="4498848"/>
-            <a:ext cx="3474720" cy="1143000"/>
+            <a:pPr algn="ctr" indent="0" marL="0">
+              <a:buNone/>
+            </a:pPr>
+            <a:r>
+              <a:rPr lang="en-US" sz="880" b="1" dirty="0">
+                <a:solidFill>
+                  <a:srgbClr val="FFFFFF"/>
+                </a:solidFill>
+                <a:latin typeface="Aptos" pitchFamily="34" charset="0"/>
+                <a:ea typeface="Aptos" pitchFamily="34" charset="-122"/>
+                <a:cs typeface="Aptos" pitchFamily="34" charset="-120"/>
+              </a:rPr>
+              <a:t>Data</a:t>
+            </a:r>
+            <a:endParaRPr lang="en-US" sz="880" dirty="0"/>
+          </a:p>
+        </p:txBody>
+      </p:sp>
+      <p:sp>
+        <p:nvSpPr>
+          <p:cNvPr id="18" name="Shape 16"/>
+          <p:cNvSpPr/>
+          <p:nvPr/>
+        </p:nvSpPr>
+        <p:spPr>
+          <a:xfrm>
+            <a:off x="9817608" y="3399739"/>
+            <a:ext cx="164592" cy="0"/>
+          </a:xfrm>
+          <a:prstGeom prst="line">
+            <a:avLst/>
+          </a:prstGeom>
+          <a:noFill/>
+          <a:ln w="15240">
+            <a:solidFill>
+              <a:srgbClr val="8ABBD8"/>
+            </a:solidFill>
+            <a:prstDash val="solid"/>
+          </a:ln>
+        </p:spPr>
+      </p:sp>
+      <p:sp>
+        <p:nvSpPr>
+          <p:cNvPr id="19" name="Shape 17"/>
+          <p:cNvSpPr/>
+          <p:nvPr/>
+        </p:nvSpPr>
+        <p:spPr>
+          <a:xfrm>
+            <a:off x="8927592" y="3248863"/>
+            <a:ext cx="890016" cy="301752"/>
           </a:xfrm>
           <a:prstGeom prst="roundRect">
             <a:avLst>
-              <a:gd name="adj" fmla="val 9600"/>
+              <a:gd name="adj" fmla="val 24242"/>
+            </a:avLst>
+          </a:prstGeom>
+          <a:solidFill>
+            <a:srgbClr val="2F8A28"/>
+          </a:solidFill>
+          <a:ln w="12700">
+            <a:solidFill>
+              <a:srgbClr val="2F8A28"/>
+            </a:solidFill>
+            <a:prstDash val="solid"/>
+          </a:ln>
+        </p:spPr>
+      </p:sp>
+      <p:sp>
+        <p:nvSpPr>
+          <p:cNvPr id="20" name="Text 18"/>
+          <p:cNvSpPr/>
+          <p:nvPr/>
+        </p:nvSpPr>
+        <p:spPr>
+          <a:xfrm>
+            <a:off x="8964168" y="3322015"/>
+            <a:ext cx="816864" cy="146304"/>
+          </a:xfrm>
+          <a:prstGeom prst="rect">
+            <a:avLst/>
+          </a:prstGeom>
+          <a:noFill/>
+          <a:ln/>
+        </p:spPr>
+        <p:txBody>
+          <a:bodyPr wrap="square" lIns="0" tIns="0" rIns="0" bIns="0" rtlCol="0" anchor="ctr">
+            <a:normAutofit/>
+          </a:bodyPr>
+          <a:lstStyle/>
+          <a:p>
+            <a:pPr algn="ctr" indent="0" marL="0">
+              <a:buNone/>
+            </a:pPr>
+            <a:r>
+              <a:rPr lang="en-US" sz="880" b="1" dirty="0">
+                <a:solidFill>
+                  <a:srgbClr val="FFFFFF"/>
+                </a:solidFill>
+                <a:latin typeface="Aptos" pitchFamily="34" charset="0"/>
+                <a:ea typeface="Aptos" pitchFamily="34" charset="-122"/>
+                <a:cs typeface="Aptos" pitchFamily="34" charset="-120"/>
+              </a:rPr>
+              <a:t>Analysis</a:t>
+            </a:r>
+            <a:endParaRPr lang="en-US" sz="880" dirty="0"/>
+          </a:p>
+        </p:txBody>
+      </p:sp>
+      <p:sp>
+        <p:nvSpPr>
+          <p:cNvPr id="21" name="Shape 19"/>
+          <p:cNvSpPr/>
+          <p:nvPr/>
+        </p:nvSpPr>
+        <p:spPr>
+          <a:xfrm>
+            <a:off x="9982200" y="3248863"/>
+            <a:ext cx="890016" cy="301752"/>
+          </a:xfrm>
+          <a:prstGeom prst="roundRect">
+            <a:avLst>
+              <a:gd name="adj" fmla="val 24242"/>
+            </a:avLst>
+          </a:prstGeom>
+          <a:solidFill>
+            <a:srgbClr val="6A4CA3"/>
+          </a:solidFill>
+          <a:ln w="12700">
+            <a:solidFill>
+              <a:srgbClr val="6A4CA3"/>
+            </a:solidFill>
+            <a:prstDash val="solid"/>
+          </a:ln>
+        </p:spPr>
+      </p:sp>
+      <p:sp>
+        <p:nvSpPr>
+          <p:cNvPr id="22" name="Text 20"/>
+          <p:cNvSpPr/>
+          <p:nvPr/>
+        </p:nvSpPr>
+        <p:spPr>
+          <a:xfrm>
+            <a:off x="10018776" y="3322015"/>
+            <a:ext cx="816864" cy="146304"/>
+          </a:xfrm>
+          <a:prstGeom prst="rect">
+            <a:avLst/>
+          </a:prstGeom>
+          <a:noFill/>
+          <a:ln/>
+        </p:spPr>
+        <p:txBody>
+          <a:bodyPr wrap="square" lIns="0" tIns="0" rIns="0" bIns="0" rtlCol="0" anchor="ctr">
+            <a:normAutofit/>
+          </a:bodyPr>
+          <a:lstStyle/>
+          <a:p>
+            <a:pPr algn="ctr" indent="0" marL="0">
+              <a:buNone/>
+            </a:pPr>
+            <a:r>
+              <a:rPr lang="en-US" sz="880" b="1" dirty="0">
+                <a:solidFill>
+                  <a:srgbClr val="FFFFFF"/>
+                </a:solidFill>
+                <a:latin typeface="Aptos" pitchFamily="34" charset="0"/>
+                <a:ea typeface="Aptos" pitchFamily="34" charset="-122"/>
+                <a:cs typeface="Aptos" pitchFamily="34" charset="-120"/>
+              </a:rPr>
+              <a:t>Review</a:t>
+            </a:r>
+            <a:endParaRPr lang="en-US" sz="880" dirty="0"/>
+          </a:p>
+        </p:txBody>
+      </p:sp>
+      <p:sp>
+        <p:nvSpPr>
+          <p:cNvPr id="23" name="Text 21"/>
+          <p:cNvSpPr/>
+          <p:nvPr/>
+        </p:nvSpPr>
+        <p:spPr>
+          <a:xfrm>
+            <a:off x="7854696" y="3742639"/>
+            <a:ext cx="3035808" cy="158191"/>
+          </a:xfrm>
+          <a:prstGeom prst="rect">
+            <a:avLst/>
+          </a:prstGeom>
+          <a:noFill/>
+          <a:ln/>
+        </p:spPr>
+        <p:txBody>
+          <a:bodyPr wrap="square" lIns="254" tIns="254" rIns="254" bIns="254" rtlCol="0" anchor="t">
+            <a:normAutofit/>
+          </a:bodyPr>
+          <a:lstStyle/>
+          <a:p>
+            <a:pPr indent="0" marL="0">
+              <a:buNone/>
+            </a:pPr>
+            <a:r>
+              <a:rPr lang="en-US" sz="1120" dirty="0">
+                <a:solidFill>
+                  <a:srgbClr val="17364A"/>
+                </a:solidFill>
+                <a:latin typeface="Aptos" pitchFamily="34" charset="0"/>
+                <a:ea typeface="Aptos" pitchFamily="34" charset="-122"/>
+                <a:cs typeface="Aptos" pitchFamily="34" charset="-120"/>
+              </a:rPr>
+              <a:t>The important handoff is not from data to AI; it is from analysis to accountable human review.</a:t>
+            </a:r>
+            <a:endParaRPr lang="en-US" sz="1120" dirty="0"/>
+          </a:p>
+        </p:txBody>
+      </p:sp>
+      <p:sp>
+        <p:nvSpPr>
+          <p:cNvPr id="24" name="Shape 22"/>
+          <p:cNvSpPr/>
+          <p:nvPr/>
+        </p:nvSpPr>
+        <p:spPr>
+          <a:xfrm>
+            <a:off x="7635240" y="4184294"/>
+            <a:ext cx="3474720" cy="1466698"/>
+          </a:xfrm>
+          <a:prstGeom prst="roundRect">
+            <a:avLst>
+              <a:gd name="adj" fmla="val 7481"/>
             </a:avLst>
           </a:prstGeom>
           <a:solidFill>
@@ -15941,13 +16373,13 @@
       </p:sp>
       <p:sp>
         <p:nvSpPr>
-          <p:cNvPr id="17" name="Text 15"/>
-          <p:cNvSpPr/>
-          <p:nvPr/>
-        </p:nvSpPr>
-        <p:spPr>
-          <a:xfrm>
-            <a:off x="7799832" y="4645152"/>
+          <p:cNvPr id="25" name="Text 23"/>
+          <p:cNvSpPr/>
+          <p:nvPr/>
+        </p:nvSpPr>
+        <p:spPr>
+          <a:xfrm>
+            <a:off x="7799832" y="4330598"/>
             <a:ext cx="3145536" cy="256032"/>
           </a:xfrm>
           <a:prstGeom prst="rect">
@@ -15980,14 +16412,14 @@
       </p:sp>
       <p:sp>
         <p:nvSpPr>
-          <p:cNvPr id="18" name="Text 16"/>
-          <p:cNvSpPr/>
-          <p:nvPr/>
-        </p:nvSpPr>
-        <p:spPr>
-          <a:xfrm>
-            <a:off x="7799832" y="4974336"/>
-            <a:ext cx="3145536" cy="576072"/>
+          <p:cNvPr id="26" name="Text 24"/>
+          <p:cNvSpPr/>
+          <p:nvPr/>
+        </p:nvSpPr>
+        <p:spPr>
+          <a:xfrm>
+            <a:off x="7799832" y="4659782"/>
+            <a:ext cx="3145536" cy="899770"/>
           </a:xfrm>
           <a:prstGeom prst="rect">
             <a:avLst/>
@@ -16013,7 +16445,7 @@
                 <a:ea typeface="Aptos" pitchFamily="34" charset="-122"/>
                 <a:cs typeface="Aptos" pitchFamily="34" charset="-120"/>
               </a:rPr>
-              <a:t>Connect the concept to data quality, model performance, validation evidence, monitoring measures, and decisions that.</a:t>
+              <a:t>Connect the concept to data quality, model performance, validation evidence, monitoring measures, and decisions that remain under human control.</a:t>
             </a:r>
             <a:endParaRPr lang="en-US" sz="1320" dirty="0"/>
           </a:p>
@@ -16382,11 +16814,11 @@
         <p:spPr>
           <a:xfrm>
             <a:off x="7635240" y="1325880"/>
-            <a:ext cx="3474720" cy="1325880"/>
+            <a:ext cx="3474720" cy="1207008"/>
           </a:xfrm>
           <a:prstGeom prst="roundRect">
             <a:avLst>
-              <a:gd name="adj" fmla="val 8276"/>
+              <a:gd name="adj" fmla="val 9091"/>
             </a:avLst>
           </a:prstGeom>
           <a:solidFill>
@@ -16448,7 +16880,7 @@
         <p:spPr>
           <a:xfrm>
             <a:off x="7799832" y="1801368"/>
-            <a:ext cx="3145536" cy="758952"/>
+            <a:ext cx="3145536" cy="640080"/>
           </a:xfrm>
           <a:prstGeom prst="rect">
             <a:avLst/>
@@ -16474,7 +16906,7 @@
                 <a:ea typeface="Aptos" pitchFamily="34" charset="-122"/>
                 <a:cs typeface="Aptos" pitchFamily="34" charset="-120"/>
               </a:rPr>
-              <a:t>Generative AI matters for public health because it can reduce burden in text-heavy workflows.</a:t>
+              <a:t>Generative AI matters for public health because it can reduce burden in text-heavy.</a:t>
             </a:r>
             <a:endParaRPr lang="en-US" sz="1320" dirty="0"/>
           </a:p>
@@ -16488,12 +16920,12 @@
         </p:nvSpPr>
         <p:spPr>
           <a:xfrm>
-            <a:off x="7635240" y="2788920"/>
-            <a:ext cx="3474720" cy="1536192"/>
+            <a:off x="7635240" y="2670048"/>
+            <a:ext cx="3474720" cy="1377086"/>
           </a:xfrm>
           <a:prstGeom prst="roundRect">
             <a:avLst>
-              <a:gd name="adj" fmla="val 7143"/>
+              <a:gd name="adj" fmla="val 7968"/>
             </a:avLst>
           </a:prstGeom>
           <a:solidFill>
@@ -16515,8 +16947,8 @@
         </p:nvSpPr>
         <p:spPr>
           <a:xfrm>
-            <a:off x="7799832" y="2935224"/>
-            <a:ext cx="3145536" cy="256032"/>
+            <a:off x="7799832" y="2798064"/>
+            <a:ext cx="3145536" cy="237744"/>
           </a:xfrm>
           <a:prstGeom prst="rect">
             <a:avLst/>
@@ -16532,7 +16964,7 @@
               <a:buNone/>
             </a:pPr>
             <a:r>
-              <a:rPr lang="en-US" sz="1300" b="1" dirty="0">
+              <a:rPr lang="en-US" sz="1250" b="1" dirty="0">
                 <a:solidFill>
                   <a:srgbClr val="0068B7"/>
                 </a:solidFill>
@@ -16540,101 +16972,317 @@
                 <a:ea typeface="Aptos" pitchFamily="34" charset="-122"/>
                 <a:cs typeface="Aptos" pitchFamily="34" charset="-120"/>
               </a:rPr>
-              <a:t>Concept checkpoints</a:t>
-            </a:r>
-            <a:endParaRPr lang="en-US" sz="1300" dirty="0"/>
-          </a:p>
-        </p:txBody>
-      </p:sp>
-      <p:sp>
-        <p:nvSpPr>
-          <p:cNvPr id="15" name="Text 13"/>
-          <p:cNvSpPr/>
-          <p:nvPr/>
-        </p:nvSpPr>
-        <p:spPr>
-          <a:xfrm>
-            <a:off x="7818120" y="3300984"/>
-            <a:ext cx="3090672" cy="877824"/>
-          </a:xfrm>
-          <a:prstGeom prst="rect">
-            <a:avLst/>
-          </a:prstGeom>
-          <a:noFill/>
-          <a:ln/>
-        </p:spPr>
-        <p:txBody>
-          <a:bodyPr wrap="square" lIns="508" tIns="508" rIns="508" bIns="508" rtlCol="0" anchor="t">
+              <a:t>Data-to-decision flow</a:t>
+            </a:r>
+            <a:endParaRPr lang="en-US" sz="1250" dirty="0"/>
+          </a:p>
+        </p:txBody>
+      </p:sp>
+      <p:sp>
+        <p:nvSpPr>
+          <p:cNvPr id="15" name="Shape 13"/>
+          <p:cNvSpPr/>
+          <p:nvPr/>
+        </p:nvSpPr>
+        <p:spPr>
+          <a:xfrm>
+            <a:off x="8763000" y="3351276"/>
+            <a:ext cx="164592" cy="0"/>
+          </a:xfrm>
+          <a:prstGeom prst="line">
+            <a:avLst/>
+          </a:prstGeom>
+          <a:noFill/>
+          <a:ln w="15240">
+            <a:solidFill>
+              <a:srgbClr val="8ABBD8"/>
+            </a:solidFill>
+            <a:prstDash val="solid"/>
+          </a:ln>
+        </p:spPr>
+      </p:sp>
+      <p:sp>
+        <p:nvSpPr>
+          <p:cNvPr id="16" name="Shape 14"/>
+          <p:cNvSpPr/>
+          <p:nvPr/>
+        </p:nvSpPr>
+        <p:spPr>
+          <a:xfrm>
+            <a:off x="7872984" y="3200400"/>
+            <a:ext cx="890016" cy="301752"/>
+          </a:xfrm>
+          <a:prstGeom prst="roundRect">
+            <a:avLst>
+              <a:gd name="adj" fmla="val 24242"/>
+            </a:avLst>
+          </a:prstGeom>
+          <a:solidFill>
+            <a:srgbClr val="0068B7"/>
+          </a:solidFill>
+          <a:ln w="12700">
+            <a:solidFill>
+              <a:srgbClr val="0068B7"/>
+            </a:solidFill>
+            <a:prstDash val="solid"/>
+          </a:ln>
+        </p:spPr>
+      </p:sp>
+      <p:sp>
+        <p:nvSpPr>
+          <p:cNvPr id="17" name="Text 15"/>
+          <p:cNvSpPr/>
+          <p:nvPr/>
+        </p:nvSpPr>
+        <p:spPr>
+          <a:xfrm>
+            <a:off x="7909560" y="3273552"/>
+            <a:ext cx="816864" cy="146304"/>
+          </a:xfrm>
+          <a:prstGeom prst="rect">
+            <a:avLst/>
+          </a:prstGeom>
+          <a:noFill/>
+          <a:ln/>
+        </p:spPr>
+        <p:txBody>
+          <a:bodyPr wrap="square" lIns="0" tIns="0" rIns="0" bIns="0" rtlCol="0" anchor="ctr">
             <a:normAutofit/>
           </a:bodyPr>
           <a:lstStyle/>
           <a:p>
-            <a:pPr indent="0" marL="0">
-              <a:buNone/>
-            </a:pPr>
-            <a:r>
-              <a:rPr lang="en-US" sz="1220" dirty="0">
-                <a:solidFill>
-                  <a:srgbClr val="17364A"/>
-                </a:solidFill>
-                <a:latin typeface="Aptos" pitchFamily="34" charset="0"/>
-                <a:ea typeface="Aptos" pitchFamily="34" charset="-122"/>
-                <a:cs typeface="Aptos" pitchFamily="34" charset="-120"/>
-              </a:rPr>
-              <a:t>Staff may use it to summarize guidance, draft meeting notes,.</a:t>
-            </a:r>
-            <a:endParaRPr lang="en-US" sz="1220" dirty="0"/>
-          </a:p>
-          <a:p>
-            <a:pPr indent="0" marL="0">
-              <a:buNone/>
-            </a:pPr>
-            <a:r>
-              <a:rPr lang="en-US" sz="1220" dirty="0">
-                <a:solidFill>
-                  <a:srgbClr val="17364A"/>
-                </a:solidFill>
-                <a:latin typeface="Aptos" pitchFamily="34" charset="0"/>
-                <a:ea typeface="Aptos" pitchFamily="34" charset="-122"/>
-                <a:cs typeface="Aptos" pitchFamily="34" charset="-120"/>
-              </a:rPr>
-              <a:t>The same capabilities create risk.</a:t>
-            </a:r>
-            <a:endParaRPr lang="en-US" sz="1220" dirty="0"/>
-          </a:p>
-          <a:p>
-            <a:pPr indent="0" marL="0">
-              <a:buNone/>
-            </a:pPr>
-            <a:r>
-              <a:rPr lang="en-US" sz="1220" dirty="0">
-                <a:solidFill>
-                  <a:srgbClr val="17364A"/>
-                </a:solidFill>
-                <a:latin typeface="Aptos" pitchFamily="34" charset="0"/>
-                <a:ea typeface="Aptos" pitchFamily="34" charset="-122"/>
-                <a:cs typeface="Aptos" pitchFamily="34" charset="-120"/>
-              </a:rPr>
-              <a:t>Generative AI can invent facts, omit caveats, misstate guidance,.</a:t>
-            </a:r>
-            <a:endParaRPr lang="en-US" sz="1220" dirty="0"/>
-          </a:p>
-        </p:txBody>
-      </p:sp>
-      <p:sp>
-        <p:nvSpPr>
-          <p:cNvPr id="16" name="Shape 14"/>
-          <p:cNvSpPr/>
-          <p:nvPr/>
-        </p:nvSpPr>
-        <p:spPr>
-          <a:xfrm>
-            <a:off x="7635240" y="4498848"/>
-            <a:ext cx="3474720" cy="1143000"/>
+            <a:pPr algn="ctr" indent="0" marL="0">
+              <a:buNone/>
+            </a:pPr>
+            <a:r>
+              <a:rPr lang="en-US" sz="880" b="1" dirty="0">
+                <a:solidFill>
+                  <a:srgbClr val="FFFFFF"/>
+                </a:solidFill>
+                <a:latin typeface="Aptos" pitchFamily="34" charset="0"/>
+                <a:ea typeface="Aptos" pitchFamily="34" charset="-122"/>
+                <a:cs typeface="Aptos" pitchFamily="34" charset="-120"/>
+              </a:rPr>
+              <a:t>Data</a:t>
+            </a:r>
+            <a:endParaRPr lang="en-US" sz="880" dirty="0"/>
+          </a:p>
+        </p:txBody>
+      </p:sp>
+      <p:sp>
+        <p:nvSpPr>
+          <p:cNvPr id="18" name="Shape 16"/>
+          <p:cNvSpPr/>
+          <p:nvPr/>
+        </p:nvSpPr>
+        <p:spPr>
+          <a:xfrm>
+            <a:off x="9817608" y="3351276"/>
+            <a:ext cx="164592" cy="0"/>
+          </a:xfrm>
+          <a:prstGeom prst="line">
+            <a:avLst/>
+          </a:prstGeom>
+          <a:noFill/>
+          <a:ln w="15240">
+            <a:solidFill>
+              <a:srgbClr val="8ABBD8"/>
+            </a:solidFill>
+            <a:prstDash val="solid"/>
+          </a:ln>
+        </p:spPr>
+      </p:sp>
+      <p:sp>
+        <p:nvSpPr>
+          <p:cNvPr id="19" name="Shape 17"/>
+          <p:cNvSpPr/>
+          <p:nvPr/>
+        </p:nvSpPr>
+        <p:spPr>
+          <a:xfrm>
+            <a:off x="8927592" y="3200400"/>
+            <a:ext cx="890016" cy="301752"/>
           </a:xfrm>
           <a:prstGeom prst="roundRect">
             <a:avLst>
-              <a:gd name="adj" fmla="val 9600"/>
+              <a:gd name="adj" fmla="val 24242"/>
+            </a:avLst>
+          </a:prstGeom>
+          <a:solidFill>
+            <a:srgbClr val="2F8A28"/>
+          </a:solidFill>
+          <a:ln w="12700">
+            <a:solidFill>
+              <a:srgbClr val="2F8A28"/>
+            </a:solidFill>
+            <a:prstDash val="solid"/>
+          </a:ln>
+        </p:spPr>
+      </p:sp>
+      <p:sp>
+        <p:nvSpPr>
+          <p:cNvPr id="20" name="Text 18"/>
+          <p:cNvSpPr/>
+          <p:nvPr/>
+        </p:nvSpPr>
+        <p:spPr>
+          <a:xfrm>
+            <a:off x="8964168" y="3273552"/>
+            <a:ext cx="816864" cy="146304"/>
+          </a:xfrm>
+          <a:prstGeom prst="rect">
+            <a:avLst/>
+          </a:prstGeom>
+          <a:noFill/>
+          <a:ln/>
+        </p:spPr>
+        <p:txBody>
+          <a:bodyPr wrap="square" lIns="0" tIns="0" rIns="0" bIns="0" rtlCol="0" anchor="ctr">
+            <a:normAutofit/>
+          </a:bodyPr>
+          <a:lstStyle/>
+          <a:p>
+            <a:pPr algn="ctr" indent="0" marL="0">
+              <a:buNone/>
+            </a:pPr>
+            <a:r>
+              <a:rPr lang="en-US" sz="880" b="1" dirty="0">
+                <a:solidFill>
+                  <a:srgbClr val="FFFFFF"/>
+                </a:solidFill>
+                <a:latin typeface="Aptos" pitchFamily="34" charset="0"/>
+                <a:ea typeface="Aptos" pitchFamily="34" charset="-122"/>
+                <a:cs typeface="Aptos" pitchFamily="34" charset="-120"/>
+              </a:rPr>
+              <a:t>Analysis</a:t>
+            </a:r>
+            <a:endParaRPr lang="en-US" sz="880" dirty="0"/>
+          </a:p>
+        </p:txBody>
+      </p:sp>
+      <p:sp>
+        <p:nvSpPr>
+          <p:cNvPr id="21" name="Shape 19"/>
+          <p:cNvSpPr/>
+          <p:nvPr/>
+        </p:nvSpPr>
+        <p:spPr>
+          <a:xfrm>
+            <a:off x="9982200" y="3200400"/>
+            <a:ext cx="890016" cy="301752"/>
+          </a:xfrm>
+          <a:prstGeom prst="roundRect">
+            <a:avLst>
+              <a:gd name="adj" fmla="val 24242"/>
+            </a:avLst>
+          </a:prstGeom>
+          <a:solidFill>
+            <a:srgbClr val="6A4CA3"/>
+          </a:solidFill>
+          <a:ln w="12700">
+            <a:solidFill>
+              <a:srgbClr val="6A4CA3"/>
+            </a:solidFill>
+            <a:prstDash val="solid"/>
+          </a:ln>
+        </p:spPr>
+      </p:sp>
+      <p:sp>
+        <p:nvSpPr>
+          <p:cNvPr id="22" name="Text 20"/>
+          <p:cNvSpPr/>
+          <p:nvPr/>
+        </p:nvSpPr>
+        <p:spPr>
+          <a:xfrm>
+            <a:off x="10018776" y="3273552"/>
+            <a:ext cx="816864" cy="146304"/>
+          </a:xfrm>
+          <a:prstGeom prst="rect">
+            <a:avLst/>
+          </a:prstGeom>
+          <a:noFill/>
+          <a:ln/>
+        </p:spPr>
+        <p:txBody>
+          <a:bodyPr wrap="square" lIns="0" tIns="0" rIns="0" bIns="0" rtlCol="0" anchor="ctr">
+            <a:normAutofit/>
+          </a:bodyPr>
+          <a:lstStyle/>
+          <a:p>
+            <a:pPr algn="ctr" indent="0" marL="0">
+              <a:buNone/>
+            </a:pPr>
+            <a:r>
+              <a:rPr lang="en-US" sz="880" b="1" dirty="0">
+                <a:solidFill>
+                  <a:srgbClr val="FFFFFF"/>
+                </a:solidFill>
+                <a:latin typeface="Aptos" pitchFamily="34" charset="0"/>
+                <a:ea typeface="Aptos" pitchFamily="34" charset="-122"/>
+                <a:cs typeface="Aptos" pitchFamily="34" charset="-120"/>
+              </a:rPr>
+              <a:t>Review</a:t>
+            </a:r>
+            <a:endParaRPr lang="en-US" sz="880" dirty="0"/>
+          </a:p>
+        </p:txBody>
+      </p:sp>
+      <p:sp>
+        <p:nvSpPr>
+          <p:cNvPr id="23" name="Text 21"/>
+          <p:cNvSpPr/>
+          <p:nvPr/>
+        </p:nvSpPr>
+        <p:spPr>
+          <a:xfrm>
+            <a:off x="7854696" y="3694176"/>
+            <a:ext cx="3035808" cy="206654"/>
+          </a:xfrm>
+          <a:prstGeom prst="rect">
+            <a:avLst/>
+          </a:prstGeom>
+          <a:noFill/>
+          <a:ln/>
+        </p:spPr>
+        <p:txBody>
+          <a:bodyPr wrap="square" lIns="254" tIns="254" rIns="254" bIns="254" rtlCol="0" anchor="t">
+            <a:normAutofit/>
+          </a:bodyPr>
+          <a:lstStyle/>
+          <a:p>
+            <a:pPr indent="0" marL="0">
+              <a:buNone/>
+            </a:pPr>
+            <a:r>
+              <a:rPr lang="en-US" sz="1120" dirty="0">
+                <a:solidFill>
+                  <a:srgbClr val="17364A"/>
+                </a:solidFill>
+                <a:latin typeface="Aptos" pitchFamily="34" charset="0"/>
+                <a:ea typeface="Aptos" pitchFamily="34" charset="-122"/>
+                <a:cs typeface="Aptos" pitchFamily="34" charset="-120"/>
+              </a:rPr>
+              <a:t>The important handoff is not from data to AI; it is from analysis to accountable human review.</a:t>
+            </a:r>
+            <a:endParaRPr lang="en-US" sz="1120" dirty="0"/>
+          </a:p>
+        </p:txBody>
+      </p:sp>
+      <p:sp>
+        <p:nvSpPr>
+          <p:cNvPr id="24" name="Shape 22"/>
+          <p:cNvSpPr/>
+          <p:nvPr/>
+        </p:nvSpPr>
+        <p:spPr>
+          <a:xfrm>
+            <a:off x="7635240" y="4184294"/>
+            <a:ext cx="3474720" cy="1466698"/>
+          </a:xfrm>
+          <a:prstGeom prst="roundRect">
+            <a:avLst>
+              <a:gd name="adj" fmla="val 7481"/>
             </a:avLst>
           </a:prstGeom>
           <a:solidFill>
@@ -16650,13 +17298,13 @@
       </p:sp>
       <p:sp>
         <p:nvSpPr>
-          <p:cNvPr id="17" name="Text 15"/>
-          <p:cNvSpPr/>
-          <p:nvPr/>
-        </p:nvSpPr>
-        <p:spPr>
-          <a:xfrm>
-            <a:off x="7799832" y="4645152"/>
+          <p:cNvPr id="25" name="Text 23"/>
+          <p:cNvSpPr/>
+          <p:nvPr/>
+        </p:nvSpPr>
+        <p:spPr>
+          <a:xfrm>
+            <a:off x="7799832" y="4330598"/>
             <a:ext cx="3145536" cy="256032"/>
           </a:xfrm>
           <a:prstGeom prst="rect">
@@ -16689,14 +17337,14 @@
       </p:sp>
       <p:sp>
         <p:nvSpPr>
-          <p:cNvPr id="18" name="Text 16"/>
-          <p:cNvSpPr/>
-          <p:nvPr/>
-        </p:nvSpPr>
-        <p:spPr>
-          <a:xfrm>
-            <a:off x="7799832" y="4974336"/>
-            <a:ext cx="3145536" cy="576072"/>
+          <p:cNvPr id="26" name="Text 24"/>
+          <p:cNvSpPr/>
+          <p:nvPr/>
+        </p:nvSpPr>
+        <p:spPr>
+          <a:xfrm>
+            <a:off x="7799832" y="4659782"/>
+            <a:ext cx="3145536" cy="899770"/>
           </a:xfrm>
           <a:prstGeom prst="rect">
             <a:avLst/>
@@ -16722,7 +17370,7 @@
                 <a:ea typeface="Aptos" pitchFamily="34" charset="-122"/>
                 <a:cs typeface="Aptos" pitchFamily="34" charset="-120"/>
               </a:rPr>
-              <a:t>Connect the concept to data quality, model performance, validation evidence, monitoring measures, and decisions that.</a:t>
+              <a:t>Connect the concept to data quality, model performance, validation evidence, monitoring measures, and decisions that remain under human control.</a:t>
             </a:r>
             <a:endParaRPr lang="en-US" sz="1320" dirty="0"/>
           </a:p>
@@ -17091,11 +17739,11 @@
         <p:spPr>
           <a:xfrm>
             <a:off x="7635240" y="1325880"/>
-            <a:ext cx="3474720" cy="1325880"/>
+            <a:ext cx="3474720" cy="1255471"/>
           </a:xfrm>
           <a:prstGeom prst="roundRect">
             <a:avLst>
-              <a:gd name="adj" fmla="val 8276"/>
+              <a:gd name="adj" fmla="val 8740"/>
             </a:avLst>
           </a:prstGeom>
           <a:solidFill>
@@ -17157,7 +17805,7 @@
         <p:spPr>
           <a:xfrm>
             <a:off x="7799832" y="1801368"/>
-            <a:ext cx="3145536" cy="758952"/>
+            <a:ext cx="3145536" cy="688543"/>
           </a:xfrm>
           <a:prstGeom prst="rect">
             <a:avLst/>
@@ -17197,12 +17845,12 @@
         </p:nvSpPr>
         <p:spPr>
           <a:xfrm>
-            <a:off x="7635240" y="2788920"/>
-            <a:ext cx="3474720" cy="1536192"/>
+            <a:off x="7635240" y="2718511"/>
+            <a:ext cx="3474720" cy="1328623"/>
           </a:xfrm>
           <a:prstGeom prst="roundRect">
             <a:avLst>
-              <a:gd name="adj" fmla="val 7143"/>
+              <a:gd name="adj" fmla="val 8259"/>
             </a:avLst>
           </a:prstGeom>
           <a:solidFill>
@@ -17224,7 +17872,7 @@
         </p:nvSpPr>
         <p:spPr>
           <a:xfrm>
-            <a:off x="7799832" y="2935224"/>
+            <a:off x="7799832" y="2864815"/>
             <a:ext cx="3145536" cy="256032"/>
           </a:xfrm>
           <a:prstGeom prst="rect">
@@ -17263,8 +17911,8 @@
         </p:nvSpPr>
         <p:spPr>
           <a:xfrm>
-            <a:off x="7818120" y="3300984"/>
-            <a:ext cx="3090672" cy="877824"/>
+            <a:off x="7818120" y="3230575"/>
+            <a:ext cx="3090672" cy="670255"/>
           </a:xfrm>
           <a:prstGeom prst="rect">
             <a:avLst/>
@@ -17338,12 +17986,12 @@
         </p:nvSpPr>
         <p:spPr>
           <a:xfrm>
-            <a:off x="7635240" y="4498848"/>
-            <a:ext cx="3474720" cy="1143000"/>
+            <a:off x="7635240" y="4184294"/>
+            <a:ext cx="3474720" cy="1466698"/>
           </a:xfrm>
           <a:prstGeom prst="roundRect">
             <a:avLst>
-              <a:gd name="adj" fmla="val 9600"/>
+              <a:gd name="adj" fmla="val 7481"/>
             </a:avLst>
           </a:prstGeom>
           <a:solidFill>
@@ -17365,7 +18013,7 @@
         </p:nvSpPr>
         <p:spPr>
           <a:xfrm>
-            <a:off x="7799832" y="4645152"/>
+            <a:off x="7799832" y="4330598"/>
             <a:ext cx="3145536" cy="256032"/>
           </a:xfrm>
           <a:prstGeom prst="rect">
@@ -17404,8 +18052,8 @@
         </p:nvSpPr>
         <p:spPr>
           <a:xfrm>
-            <a:off x="7799832" y="4974336"/>
-            <a:ext cx="3145536" cy="576072"/>
+            <a:off x="7799832" y="4659782"/>
+            <a:ext cx="3145536" cy="899770"/>
           </a:xfrm>
           <a:prstGeom prst="rect">
             <a:avLst/>
@@ -17431,7 +18079,7 @@
                 <a:ea typeface="Aptos" pitchFamily="34" charset="-122"/>
                 <a:cs typeface="Aptos" pitchFamily="34" charset="-120"/>
               </a:rPr>
-              <a:t>Connect the concept to data quality, model performance, validation evidence, monitoring measures, and decisions that.</a:t>
+              <a:t>Connect the concept to data quality, model performance, validation evidence, monitoring measures, and decisions that remain under human control.</a:t>
             </a:r>
             <a:endParaRPr lang="en-US" sz="1320" dirty="0"/>
           </a:p>

--- a/downloads/presentations/modules/anl-310.pptx
+++ b/downloads/presentations/modules/anl-310.pptx
@@ -3343,8 +3343,8 @@
         </p:nvSpPr>
         <p:spPr>
           <a:xfrm>
-            <a:off x="868680" y="1508760"/>
-            <a:ext cx="6309360" cy="4160520"/>
+            <a:off x="822960" y="1463040"/>
+            <a:ext cx="6565392" cy="4343400"/>
           </a:xfrm>
           <a:prstGeom prst="rect">
             <a:avLst/>
@@ -3362,7 +3362,7 @@
               <a:buNone/>
             </a:pPr>
             <a:r>
-              <a:rPr lang="en-US" sz="2100" dirty="0">
+              <a:rPr lang="en-US" sz="1920" dirty="0">
                 <a:solidFill>
                   <a:srgbClr val="003A63"/>
                 </a:solidFill>
@@ -3372,14 +3372,14 @@
               </a:rPr>
               <a:t>• Generative AI evaluation should begin with intended use.</a:t>
             </a:r>
-            <a:endParaRPr lang="en-US" sz="2100" dirty="0"/>
-          </a:p>
-          <a:p>
-            <a:pPr indent="0" marL="0">
-              <a:buNone/>
-            </a:pPr>
-            <a:r>
-              <a:rPr lang="en-US" sz="2100" dirty="0">
+            <a:endParaRPr lang="en-US" sz="1920" dirty="0"/>
+          </a:p>
+          <a:p>
+            <a:pPr indent="0" marL="0">
+              <a:buNone/>
+            </a:pPr>
+            <a:r>
+              <a:rPr lang="en-US" sz="1920" dirty="0">
                 <a:solidFill>
                   <a:srgbClr val="003A63"/>
                 </a:solidFill>
@@ -3387,16 +3387,16 @@
                 <a:ea typeface="Aptos" pitchFamily="34" charset="-122"/>
                 <a:cs typeface="Aptos" pitchFamily="34" charset="-120"/>
               </a:rPr>
-              <a:t>• A brainstormed outline, internal draft, public advisory, case summary, policy synthesis, or.</a:t>
-            </a:r>
-            <a:endParaRPr lang="en-US" sz="2100" dirty="0"/>
-          </a:p>
-          <a:p>
-            <a:pPr indent="0" marL="0">
-              <a:buNone/>
-            </a:pPr>
-            <a:r>
-              <a:rPr lang="en-US" sz="2100" dirty="0">
+              <a:t>• A brainstormed outline, internal draft, public advisory, case summary,.</a:t>
+            </a:r>
+            <a:endParaRPr lang="en-US" sz="1920" dirty="0"/>
+          </a:p>
+          <a:p>
+            <a:pPr indent="0" marL="0">
+              <a:buNone/>
+            </a:pPr>
+            <a:r>
+              <a:rPr lang="en-US" sz="1920" dirty="0">
                 <a:solidFill>
                   <a:srgbClr val="003A63"/>
                 </a:solidFill>
@@ -3404,9 +3404,9 @@
                 <a:ea typeface="Aptos" pitchFamily="34" charset="-122"/>
                 <a:cs typeface="Aptos" pitchFamily="34" charset="-120"/>
               </a:rPr>
-              <a:t>• The more sensitive, public-facing, or consequential the use, the stronger the review should be.</a:t>
-            </a:r>
-            <a:endParaRPr lang="en-US" sz="2100" dirty="0"/>
+              <a:t>• The more sensitive, public-facing, or consequential the use, the stronger.</a:t>
+            </a:r>
+            <a:endParaRPr lang="en-US" sz="1920" dirty="0"/>
           </a:p>
         </p:txBody>
       </p:sp>
@@ -3418,12 +3418,12 @@
         </p:nvSpPr>
         <p:spPr>
           <a:xfrm>
-            <a:off x="7635240" y="1325880"/>
-            <a:ext cx="3474720" cy="1207008"/>
+            <a:off x="7543800" y="1325880"/>
+            <a:ext cx="3611880" cy="1261872"/>
           </a:xfrm>
           <a:prstGeom prst="roundRect">
             <a:avLst>
-              <a:gd name="adj" fmla="val 9091"/>
+              <a:gd name="adj" fmla="val 8696"/>
             </a:avLst>
           </a:prstGeom>
           <a:solidFill>
@@ -3445,8 +3445,8 @@
         </p:nvSpPr>
         <p:spPr>
           <a:xfrm>
-            <a:off x="7799832" y="1472184"/>
-            <a:ext cx="3145536" cy="256032"/>
+            <a:off x="7708392" y="1453896"/>
+            <a:ext cx="3282696" cy="228600"/>
           </a:xfrm>
           <a:prstGeom prst="rect">
             <a:avLst/>
@@ -3462,7 +3462,7 @@
               <a:buNone/>
             </a:pPr>
             <a:r>
-              <a:rPr lang="en-US" sz="1300" b="1" dirty="0">
+              <a:rPr lang="en-US" sz="1220" b="1" dirty="0">
                 <a:solidFill>
                   <a:srgbClr val="0068B7"/>
                 </a:solidFill>
@@ -3472,7 +3472,7 @@
               </a:rPr>
               <a:t>Data decision</a:t>
             </a:r>
-            <a:endParaRPr lang="en-US" sz="1300" dirty="0"/>
+            <a:endParaRPr lang="en-US" sz="1220" dirty="0"/>
           </a:p>
         </p:txBody>
       </p:sp>
@@ -3484,8 +3484,8 @@
         </p:nvSpPr>
         <p:spPr>
           <a:xfrm>
-            <a:off x="7799832" y="1801368"/>
-            <a:ext cx="3145536" cy="640080"/>
+            <a:off x="7708392" y="1764792"/>
+            <a:ext cx="3282696" cy="749808"/>
           </a:xfrm>
           <a:prstGeom prst="rect">
             <a:avLst/>
@@ -3503,7 +3503,7 @@
               <a:buNone/>
             </a:pPr>
             <a:r>
-              <a:rPr lang="en-US" sz="1320" dirty="0">
+              <a:rPr lang="en-US" sz="1220" dirty="0">
                 <a:solidFill>
                   <a:srgbClr val="17364A"/>
                 </a:solidFill>
@@ -3513,7 +3513,7 @@
               </a:rPr>
               <a:t>Generative AI evaluation should begin with intended use.</a:t>
             </a:r>
-            <a:endParaRPr lang="en-US" sz="1320" dirty="0"/>
+            <a:endParaRPr lang="en-US" sz="1220" dirty="0"/>
           </a:p>
         </p:txBody>
       </p:sp>
@@ -3525,12 +3525,12 @@
         </p:nvSpPr>
         <p:spPr>
           <a:xfrm>
-            <a:off x="7635240" y="2670048"/>
-            <a:ext cx="3474720" cy="1377086"/>
+            <a:off x="7543800" y="2724912"/>
+            <a:ext cx="3611880" cy="1527048"/>
           </a:xfrm>
           <a:prstGeom prst="roundRect">
             <a:avLst>
-              <a:gd name="adj" fmla="val 7968"/>
+              <a:gd name="adj" fmla="val 7186"/>
             </a:avLst>
           </a:prstGeom>
           <a:solidFill>
@@ -3552,24 +3552,26 @@
         </p:nvSpPr>
         <p:spPr>
           <a:xfrm>
-            <a:off x="7799832" y="2798064"/>
-            <a:ext cx="3145536" cy="237744"/>
-          </a:xfrm>
-          <a:prstGeom prst="rect">
-            <a:avLst/>
-          </a:prstGeom>
-          <a:noFill/>
-          <a:ln/>
-        </p:spPr>
-        <p:txBody>
-          <a:bodyPr wrap="square" lIns="0" tIns="0" rIns="0" bIns="0" rtlCol="0" anchor="ctr"/>
-          <a:lstStyle/>
-          <a:p>
-            <a:pPr indent="0" marL="0">
-              <a:buNone/>
-            </a:pPr>
-            <a:r>
-              <a:rPr lang="en-US" sz="1250" b="1" dirty="0">
+            <a:off x="7708392" y="2852928"/>
+            <a:ext cx="3282696" cy="219456"/>
+          </a:xfrm>
+          <a:prstGeom prst="rect">
+            <a:avLst/>
+          </a:prstGeom>
+          <a:noFill/>
+          <a:ln/>
+        </p:spPr>
+        <p:txBody>
+          <a:bodyPr wrap="square" lIns="0" tIns="0" rIns="0" bIns="0" rtlCol="0" anchor="ctr">
+            <a:normAutofit/>
+          </a:bodyPr>
+          <a:lstStyle/>
+          <a:p>
+            <a:pPr indent="0" marL="0">
+              <a:buNone/>
+            </a:pPr>
+            <a:r>
+              <a:rPr lang="en-US" sz="1160" b="1" dirty="0">
                 <a:solidFill>
                   <a:srgbClr val="0068B7"/>
                 </a:solidFill>
@@ -3579,7 +3581,7 @@
               </a:rPr>
               <a:t>Data-to-decision flow</a:t>
             </a:r>
-            <a:endParaRPr lang="en-US" sz="1250" dirty="0"/>
+            <a:endParaRPr lang="en-US" sz="1160" dirty="0"/>
           </a:p>
         </p:txBody>
       </p:sp>
@@ -3591,7 +3593,7 @@
         </p:nvSpPr>
         <p:spPr>
           <a:xfrm>
-            <a:off x="8763000" y="3351276"/>
+            <a:off x="8717280" y="3406140"/>
             <a:ext cx="164592" cy="0"/>
           </a:xfrm>
           <a:prstGeom prst="line">
@@ -3614,8 +3616,8 @@
         </p:nvSpPr>
         <p:spPr>
           <a:xfrm>
-            <a:off x="7872984" y="3200400"/>
-            <a:ext cx="890016" cy="301752"/>
+            <a:off x="7781544" y="3255264"/>
+            <a:ext cx="935736" cy="301752"/>
           </a:xfrm>
           <a:prstGeom prst="roundRect">
             <a:avLst>
@@ -3641,8 +3643,8 @@
         </p:nvSpPr>
         <p:spPr>
           <a:xfrm>
-            <a:off x="7909560" y="3273552"/>
-            <a:ext cx="816864" cy="146304"/>
+            <a:off x="7818120" y="3328416"/>
+            <a:ext cx="862584" cy="146304"/>
           </a:xfrm>
           <a:prstGeom prst="rect">
             <a:avLst/>
@@ -3682,7 +3684,7 @@
         </p:nvSpPr>
         <p:spPr>
           <a:xfrm>
-            <a:off x="9817608" y="3351276"/>
+            <a:off x="9817608" y="3406140"/>
             <a:ext cx="164592" cy="0"/>
           </a:xfrm>
           <a:prstGeom prst="line">
@@ -3705,8 +3707,8 @@
         </p:nvSpPr>
         <p:spPr>
           <a:xfrm>
-            <a:off x="8927592" y="3200400"/>
-            <a:ext cx="890016" cy="301752"/>
+            <a:off x="8881872" y="3255264"/>
+            <a:ext cx="935736" cy="301752"/>
           </a:xfrm>
           <a:prstGeom prst="roundRect">
             <a:avLst>
@@ -3732,8 +3734,8 @@
         </p:nvSpPr>
         <p:spPr>
           <a:xfrm>
-            <a:off x="8964168" y="3273552"/>
-            <a:ext cx="816864" cy="146304"/>
+            <a:off x="8918448" y="3328416"/>
+            <a:ext cx="862584" cy="146304"/>
           </a:xfrm>
           <a:prstGeom prst="rect">
             <a:avLst/>
@@ -3773,8 +3775,8 @@
         </p:nvSpPr>
         <p:spPr>
           <a:xfrm>
-            <a:off x="9982200" y="3200400"/>
-            <a:ext cx="890016" cy="301752"/>
+            <a:off x="9982200" y="3255264"/>
+            <a:ext cx="935736" cy="301752"/>
           </a:xfrm>
           <a:prstGeom prst="roundRect">
             <a:avLst>
@@ -3800,8 +3802,8 @@
         </p:nvSpPr>
         <p:spPr>
           <a:xfrm>
-            <a:off x="10018776" y="3273552"/>
-            <a:ext cx="816864" cy="146304"/>
+            <a:off x="10018776" y="3328416"/>
+            <a:ext cx="862584" cy="146304"/>
           </a:xfrm>
           <a:prstGeom prst="rect">
             <a:avLst/>
@@ -3841,8 +3843,8 @@
         </p:nvSpPr>
         <p:spPr>
           <a:xfrm>
-            <a:off x="7854696" y="3694176"/>
-            <a:ext cx="3035808" cy="206654"/>
+            <a:off x="7763256" y="3749040"/>
+            <a:ext cx="3172968" cy="356616"/>
           </a:xfrm>
           <a:prstGeom prst="rect">
             <a:avLst/>
@@ -3860,7 +3862,7 @@
               <a:buNone/>
             </a:pPr>
             <a:r>
-              <a:rPr lang="en-US" sz="1120" dirty="0">
+              <a:rPr lang="en-US" sz="1040" dirty="0">
                 <a:solidFill>
                   <a:srgbClr val="17364A"/>
                 </a:solidFill>
@@ -3868,9 +3870,9 @@
                 <a:ea typeface="Aptos" pitchFamily="34" charset="-122"/>
                 <a:cs typeface="Aptos" pitchFamily="34" charset="-120"/>
               </a:rPr>
-              <a:t>The important handoff is not from data to AI; it is from analysis to accountable human review.</a:t>
-            </a:r>
-            <a:endParaRPr lang="en-US" sz="1120" dirty="0"/>
+              <a:t>The important handoff is not from data to AI; it is from analysis to.</a:t>
+            </a:r>
+            <a:endParaRPr lang="en-US" sz="1040" dirty="0"/>
           </a:p>
         </p:txBody>
       </p:sp>
@@ -3882,12 +3884,12 @@
         </p:nvSpPr>
         <p:spPr>
           <a:xfrm>
-            <a:off x="7635240" y="4184294"/>
-            <a:ext cx="3474720" cy="1466698"/>
+            <a:off x="7543800" y="4389120"/>
+            <a:ext cx="3611880" cy="1261872"/>
           </a:xfrm>
           <a:prstGeom prst="roundRect">
             <a:avLst>
-              <a:gd name="adj" fmla="val 7481"/>
+              <a:gd name="adj" fmla="val 8696"/>
             </a:avLst>
           </a:prstGeom>
           <a:solidFill>
@@ -3909,8 +3911,8 @@
         </p:nvSpPr>
         <p:spPr>
           <a:xfrm>
-            <a:off x="7799832" y="4330598"/>
-            <a:ext cx="3145536" cy="256032"/>
+            <a:off x="7708392" y="4517136"/>
+            <a:ext cx="3282696" cy="228600"/>
           </a:xfrm>
           <a:prstGeom prst="rect">
             <a:avLst/>
@@ -3926,7 +3928,7 @@
               <a:buNone/>
             </a:pPr>
             <a:r>
-              <a:rPr lang="en-US" sz="1300" b="1" dirty="0">
+              <a:rPr lang="en-US" sz="1220" b="1" dirty="0">
                 <a:solidFill>
                   <a:srgbClr val="0068B7"/>
                 </a:solidFill>
@@ -3936,7 +3938,7 @@
               </a:rPr>
               <a:t>How to validate</a:t>
             </a:r>
-            <a:endParaRPr lang="en-US" sz="1300" dirty="0"/>
+            <a:endParaRPr lang="en-US" sz="1220" dirty="0"/>
           </a:p>
         </p:txBody>
       </p:sp>
@@ -3948,8 +3950,8 @@
         </p:nvSpPr>
         <p:spPr>
           <a:xfrm>
-            <a:off x="7799832" y="4659782"/>
-            <a:ext cx="3145536" cy="899770"/>
+            <a:off x="7708392" y="4828032"/>
+            <a:ext cx="3282696" cy="749808"/>
           </a:xfrm>
           <a:prstGeom prst="rect">
             <a:avLst/>
@@ -3967,7 +3969,7 @@
               <a:buNone/>
             </a:pPr>
             <a:r>
-              <a:rPr lang="en-US" sz="1320" dirty="0">
+              <a:rPr lang="en-US" sz="1220" dirty="0">
                 <a:solidFill>
                   <a:srgbClr val="17364A"/>
                 </a:solidFill>
@@ -3975,9 +3977,9 @@
                 <a:ea typeface="Aptos" pitchFamily="34" charset="-122"/>
                 <a:cs typeface="Aptos" pitchFamily="34" charset="-120"/>
               </a:rPr>
-              <a:t>Connect the concept to data quality, model performance, validation evidence, monitoring measures, and decisions that remain under human control.</a:t>
-            </a:r>
-            <a:endParaRPr lang="en-US" sz="1320" dirty="0"/>
+              <a:t>Connect the concept to data quality, model performance, validation evidence,.</a:t>
+            </a:r>
+            <a:endParaRPr lang="en-US" sz="1220" dirty="0"/>
           </a:p>
         </p:txBody>
       </p:sp>
@@ -4268,8 +4270,8 @@
         </p:nvSpPr>
         <p:spPr>
           <a:xfrm>
-            <a:off x="868680" y="1508760"/>
-            <a:ext cx="6309360" cy="4160520"/>
+            <a:off x="822960" y="1463040"/>
+            <a:ext cx="6565392" cy="4343400"/>
           </a:xfrm>
           <a:prstGeom prst="rect">
             <a:avLst/>
@@ -4287,7 +4289,7 @@
               <a:buNone/>
             </a:pPr>
             <a:r>
-              <a:rPr lang="en-US" sz="2100" dirty="0">
+              <a:rPr lang="en-US" sz="1920" dirty="0">
                 <a:solidFill>
                   <a:srgbClr val="003A63"/>
                 </a:solidFill>
@@ -4295,16 +4297,16 @@
                 <a:ea typeface="Aptos" pitchFamily="34" charset="-122"/>
                 <a:cs typeface="Aptos" pitchFamily="34" charset="-120"/>
               </a:rPr>
-              <a:t>• Equity and accessibility review should be included when outputs affect staff, partners, or the.</a:t>
-            </a:r>
-            <a:endParaRPr lang="en-US" sz="2100" dirty="0"/>
-          </a:p>
-          <a:p>
-            <a:pPr indent="0" marL="0">
-              <a:buNone/>
-            </a:pPr>
-            <a:r>
-              <a:rPr lang="en-US" sz="2100" dirty="0">
+              <a:t>• Equity and accessibility review should be included when outputs affect.</a:t>
+            </a:r>
+            <a:endParaRPr lang="en-US" sz="1920" dirty="0"/>
+          </a:p>
+          <a:p>
+            <a:pPr indent="0" marL="0">
+              <a:buNone/>
+            </a:pPr>
+            <a:r>
+              <a:rPr lang="en-US" sz="1920" dirty="0">
                 <a:solidFill>
                   <a:srgbClr val="003A63"/>
                 </a:solidFill>
@@ -4312,16 +4314,16 @@
                 <a:ea typeface="Aptos" pitchFamily="34" charset="-122"/>
                 <a:cs typeface="Aptos" pitchFamily="34" charset="-120"/>
               </a:rPr>
-              <a:t>• Reviewers should assess reading level, language access, disability accessibility, cultural.</a:t>
-            </a:r>
-            <a:endParaRPr lang="en-US" sz="2100" dirty="0"/>
-          </a:p>
-          <a:p>
-            <a:pPr indent="0" marL="0">
-              <a:buNone/>
-            </a:pPr>
-            <a:r>
-              <a:rPr lang="en-US" sz="2100" dirty="0">
+              <a:t>• Reviewers should assess reading level, language access, disability.</a:t>
+            </a:r>
+            <a:endParaRPr lang="en-US" sz="1920" dirty="0"/>
+          </a:p>
+          <a:p>
+            <a:pPr indent="0" marL="0">
+              <a:buNone/>
+            </a:pPr>
+            <a:r>
+              <a:rPr lang="en-US" sz="1920" dirty="0">
                 <a:solidFill>
                   <a:srgbClr val="003A63"/>
                 </a:solidFill>
@@ -4329,9 +4331,9 @@
                 <a:ea typeface="Aptos" pitchFamily="34" charset="-122"/>
                 <a:cs typeface="Aptos" pitchFamily="34" charset="-120"/>
               </a:rPr>
-              <a:t>• Translation or multilingual adaptation should include review by qualified humans when used for.</a:t>
-            </a:r>
-            <a:endParaRPr lang="en-US" sz="2100" dirty="0"/>
+              <a:t>• Translation or multilingual adaptation should include review by qualified.</a:t>
+            </a:r>
+            <a:endParaRPr lang="en-US" sz="1920" dirty="0"/>
           </a:p>
         </p:txBody>
       </p:sp>
@@ -4343,12 +4345,12 @@
         </p:nvSpPr>
         <p:spPr>
           <a:xfrm>
-            <a:off x="7635240" y="1325880"/>
-            <a:ext cx="3474720" cy="1255471"/>
+            <a:off x="7543800" y="1325880"/>
+            <a:ext cx="3611880" cy="1261872"/>
           </a:xfrm>
           <a:prstGeom prst="roundRect">
             <a:avLst>
-              <a:gd name="adj" fmla="val 8740"/>
+              <a:gd name="adj" fmla="val 8696"/>
             </a:avLst>
           </a:prstGeom>
           <a:solidFill>
@@ -4370,8 +4372,8 @@
         </p:nvSpPr>
         <p:spPr>
           <a:xfrm>
-            <a:off x="7799832" y="1472184"/>
-            <a:ext cx="3145536" cy="256032"/>
+            <a:off x="7708392" y="1453896"/>
+            <a:ext cx="3282696" cy="228600"/>
           </a:xfrm>
           <a:prstGeom prst="rect">
             <a:avLst/>
@@ -4387,7 +4389,7 @@
               <a:buNone/>
             </a:pPr>
             <a:r>
-              <a:rPr lang="en-US" sz="1300" b="1" dirty="0">
+              <a:rPr lang="en-US" sz="1220" b="1" dirty="0">
                 <a:solidFill>
                   <a:srgbClr val="0068B7"/>
                 </a:solidFill>
@@ -4397,7 +4399,7 @@
               </a:rPr>
               <a:t>Data decision</a:t>
             </a:r>
-            <a:endParaRPr lang="en-US" sz="1300" dirty="0"/>
+            <a:endParaRPr lang="en-US" sz="1220" dirty="0"/>
           </a:p>
         </p:txBody>
       </p:sp>
@@ -4409,8 +4411,8 @@
         </p:nvSpPr>
         <p:spPr>
           <a:xfrm>
-            <a:off x="7799832" y="1801368"/>
-            <a:ext cx="3145536" cy="688543"/>
+            <a:off x="7708392" y="1764792"/>
+            <a:ext cx="3282696" cy="749808"/>
           </a:xfrm>
           <a:prstGeom prst="rect">
             <a:avLst/>
@@ -4428,7 +4430,7 @@
               <a:buNone/>
             </a:pPr>
             <a:r>
-              <a:rPr lang="en-US" sz="1320" dirty="0">
+              <a:rPr lang="en-US" sz="1220" dirty="0">
                 <a:solidFill>
                   <a:srgbClr val="17364A"/>
                 </a:solidFill>
@@ -4436,9 +4438,9 @@
                 <a:ea typeface="Aptos" pitchFamily="34" charset="-122"/>
                 <a:cs typeface="Aptos" pitchFamily="34" charset="-120"/>
               </a:rPr>
-              <a:t>Equity and accessibility review should be included when outputs affect staff, partners, or the public.</a:t>
-            </a:r>
-            <a:endParaRPr lang="en-US" sz="1320" dirty="0"/>
+              <a:t>Equity and accessibility review should be included when outputs affect staff,.</a:t>
+            </a:r>
+            <a:endParaRPr lang="en-US" sz="1220" dirty="0"/>
           </a:p>
         </p:txBody>
       </p:sp>
@@ -4450,12 +4452,12 @@
         </p:nvSpPr>
         <p:spPr>
           <a:xfrm>
-            <a:off x="7635240" y="2718511"/>
-            <a:ext cx="3474720" cy="1328623"/>
+            <a:off x="7543800" y="2724912"/>
+            <a:ext cx="3611880" cy="1527048"/>
           </a:xfrm>
           <a:prstGeom prst="roundRect">
             <a:avLst>
-              <a:gd name="adj" fmla="val 8259"/>
+              <a:gd name="adj" fmla="val 7186"/>
             </a:avLst>
           </a:prstGeom>
           <a:solidFill>
@@ -4477,8 +4479,8 @@
         </p:nvSpPr>
         <p:spPr>
           <a:xfrm>
-            <a:off x="7799832" y="2864815"/>
-            <a:ext cx="3145536" cy="256032"/>
+            <a:off x="7708392" y="2852928"/>
+            <a:ext cx="3282696" cy="228600"/>
           </a:xfrm>
           <a:prstGeom prst="rect">
             <a:avLst/>
@@ -4494,7 +4496,7 @@
               <a:buNone/>
             </a:pPr>
             <a:r>
-              <a:rPr lang="en-US" sz="1300" b="1" dirty="0">
+              <a:rPr lang="en-US" sz="1220" b="1" dirty="0">
                 <a:solidFill>
                   <a:srgbClr val="0068B7"/>
                 </a:solidFill>
@@ -4504,7 +4506,7 @@
               </a:rPr>
               <a:t>Concept checkpoints</a:t>
             </a:r>
-            <a:endParaRPr lang="en-US" sz="1300" dirty="0"/>
+            <a:endParaRPr lang="en-US" sz="1220" dirty="0"/>
           </a:p>
         </p:txBody>
       </p:sp>
@@ -4516,8 +4518,8 @@
         </p:nvSpPr>
         <p:spPr>
           <a:xfrm>
-            <a:off x="7818120" y="3230575"/>
-            <a:ext cx="3090672" cy="670255"/>
+            <a:off x="7726680" y="3182112"/>
+            <a:ext cx="3227832" cy="960120"/>
           </a:xfrm>
           <a:prstGeom prst="rect">
             <a:avLst/>
@@ -4535,7 +4537,7 @@
               <a:buNone/>
             </a:pPr>
             <a:r>
-              <a:rPr lang="en-US" sz="1220" dirty="0">
+              <a:rPr lang="en-US" sz="1140" dirty="0">
                 <a:solidFill>
                   <a:srgbClr val="17364A"/>
                 </a:solidFill>
@@ -4543,16 +4545,16 @@
                 <a:ea typeface="Aptos" pitchFamily="34" charset="-122"/>
                 <a:cs typeface="Aptos" pitchFamily="34" charset="-120"/>
               </a:rPr>
-              <a:t>Reviewers should assess reading level, language access, disability.</a:t>
-            </a:r>
-            <a:endParaRPr lang="en-US" sz="1220" dirty="0"/>
-          </a:p>
-          <a:p>
-            <a:pPr indent="0" marL="0">
-              <a:buNone/>
-            </a:pPr>
-            <a:r>
-              <a:rPr lang="en-US" sz="1220" dirty="0">
+              <a:t>Reviewers should assess reading level, language.</a:t>
+            </a:r>
+            <a:endParaRPr lang="en-US" sz="1140" dirty="0"/>
+          </a:p>
+          <a:p>
+            <a:pPr indent="0" marL="0">
+              <a:buNone/>
+            </a:pPr>
+            <a:r>
+              <a:rPr lang="en-US" sz="1140" dirty="0">
                 <a:solidFill>
                   <a:srgbClr val="17364A"/>
                 </a:solidFill>
@@ -4560,16 +4562,16 @@
                 <a:ea typeface="Aptos" pitchFamily="34" charset="-122"/>
                 <a:cs typeface="Aptos" pitchFamily="34" charset="-120"/>
               </a:rPr>
-              <a:t>Translation or multilingual adaptation should include review by.</a:t>
-            </a:r>
-            <a:endParaRPr lang="en-US" sz="1220" dirty="0"/>
-          </a:p>
-          <a:p>
-            <a:pPr indent="0" marL="0">
-              <a:buNone/>
-            </a:pPr>
-            <a:r>
-              <a:rPr lang="en-US" sz="1220" dirty="0">
+              <a:t>Translation or multilingual adaptation should.</a:t>
+            </a:r>
+            <a:endParaRPr lang="en-US" sz="1140" dirty="0"/>
+          </a:p>
+          <a:p>
+            <a:pPr indent="0" marL="0">
+              <a:buNone/>
+            </a:pPr>
+            <a:r>
+              <a:rPr lang="en-US" sz="1140" dirty="0">
                 <a:solidFill>
                   <a:srgbClr val="17364A"/>
                 </a:solidFill>
@@ -4579,7 +4581,7 @@
               </a:rPr>
               <a:t>Documentation should be proportionate to risk.</a:t>
             </a:r>
-            <a:endParaRPr lang="en-US" sz="1220" dirty="0"/>
+            <a:endParaRPr lang="en-US" sz="1140" dirty="0"/>
           </a:p>
         </p:txBody>
       </p:sp>
@@ -4591,12 +4593,12 @@
         </p:nvSpPr>
         <p:spPr>
           <a:xfrm>
-            <a:off x="7635240" y="4184294"/>
-            <a:ext cx="3474720" cy="1466698"/>
+            <a:off x="7543800" y="4389120"/>
+            <a:ext cx="3611880" cy="1261872"/>
           </a:xfrm>
           <a:prstGeom prst="roundRect">
             <a:avLst>
-              <a:gd name="adj" fmla="val 7481"/>
+              <a:gd name="adj" fmla="val 8696"/>
             </a:avLst>
           </a:prstGeom>
           <a:solidFill>
@@ -4618,8 +4620,8 @@
         </p:nvSpPr>
         <p:spPr>
           <a:xfrm>
-            <a:off x="7799832" y="4330598"/>
-            <a:ext cx="3145536" cy="256032"/>
+            <a:off x="7708392" y="4517136"/>
+            <a:ext cx="3282696" cy="228600"/>
           </a:xfrm>
           <a:prstGeom prst="rect">
             <a:avLst/>
@@ -4635,7 +4637,7 @@
               <a:buNone/>
             </a:pPr>
             <a:r>
-              <a:rPr lang="en-US" sz="1300" b="1" dirty="0">
+              <a:rPr lang="en-US" sz="1220" b="1" dirty="0">
                 <a:solidFill>
                   <a:srgbClr val="0068B7"/>
                 </a:solidFill>
@@ -4645,7 +4647,7 @@
               </a:rPr>
               <a:t>How to validate</a:t>
             </a:r>
-            <a:endParaRPr lang="en-US" sz="1300" dirty="0"/>
+            <a:endParaRPr lang="en-US" sz="1220" dirty="0"/>
           </a:p>
         </p:txBody>
       </p:sp>
@@ -4657,8 +4659,8 @@
         </p:nvSpPr>
         <p:spPr>
           <a:xfrm>
-            <a:off x="7799832" y="4659782"/>
-            <a:ext cx="3145536" cy="899770"/>
+            <a:off x="7708392" y="4828032"/>
+            <a:ext cx="3282696" cy="749808"/>
           </a:xfrm>
           <a:prstGeom prst="rect">
             <a:avLst/>
@@ -4676,7 +4678,7 @@
               <a:buNone/>
             </a:pPr>
             <a:r>
-              <a:rPr lang="en-US" sz="1320" dirty="0">
+              <a:rPr lang="en-US" sz="1220" dirty="0">
                 <a:solidFill>
                   <a:srgbClr val="17364A"/>
                 </a:solidFill>
@@ -4684,9 +4686,9 @@
                 <a:ea typeface="Aptos" pitchFamily="34" charset="-122"/>
                 <a:cs typeface="Aptos" pitchFamily="34" charset="-120"/>
               </a:rPr>
-              <a:t>Connect the concept to data quality, model performance, validation evidence, monitoring measures, and decisions that remain under human control.</a:t>
-            </a:r>
-            <a:endParaRPr lang="en-US" sz="1320" dirty="0"/>
+              <a:t>Connect the concept to data quality, model performance, validation evidence,.</a:t>
+            </a:r>
+            <a:endParaRPr lang="en-US" sz="1220" dirty="0"/>
           </a:p>
         </p:txBody>
       </p:sp>
@@ -4977,8 +4979,8 @@
         </p:nvSpPr>
         <p:spPr>
           <a:xfrm>
-            <a:off x="868680" y="1508760"/>
-            <a:ext cx="6309360" cy="4160520"/>
+            <a:off x="822960" y="1463040"/>
+            <a:ext cx="6565392" cy="4343400"/>
           </a:xfrm>
           <a:prstGeom prst="rect">
             <a:avLst/>
@@ -4996,7 +4998,7 @@
               <a:buNone/>
             </a:pPr>
             <a:r>
-              <a:rPr lang="en-US" sz="2100" dirty="0">
+              <a:rPr lang="en-US" sz="1920" dirty="0">
                 <a:solidFill>
                   <a:srgbClr val="003A63"/>
                 </a:solidFill>
@@ -5006,14 +5008,14 @@
               </a:rPr>
               <a:t>• Fluent but false outputs.</a:t>
             </a:r>
-            <a:endParaRPr lang="en-US" sz="2100" dirty="0"/>
-          </a:p>
-          <a:p>
-            <a:pPr indent="0" marL="0">
-              <a:buNone/>
-            </a:pPr>
-            <a:r>
-              <a:rPr lang="en-US" sz="2100" dirty="0">
+            <a:endParaRPr lang="en-US" sz="1920" dirty="0"/>
+          </a:p>
+          <a:p>
+            <a:pPr indent="0" marL="0">
+              <a:buNone/>
+            </a:pPr>
+            <a:r>
+              <a:rPr lang="en-US" sz="1920" dirty="0">
                 <a:solidFill>
                   <a:srgbClr val="003A63"/>
                 </a:solidFill>
@@ -5023,14 +5025,14 @@
               </a:rPr>
               <a:t>• A polished output may contain unsupported claims.</a:t>
             </a:r>
-            <a:endParaRPr lang="en-US" sz="2100" dirty="0"/>
-          </a:p>
-          <a:p>
-            <a:pPr indent="0" marL="0">
-              <a:buNone/>
-            </a:pPr>
-            <a:r>
-              <a:rPr lang="en-US" sz="2100" dirty="0">
+            <a:endParaRPr lang="en-US" sz="1920" dirty="0"/>
+          </a:p>
+          <a:p>
+            <a:pPr indent="0" marL="0">
+              <a:buNone/>
+            </a:pPr>
+            <a:r>
+              <a:rPr lang="en-US" sz="1920" dirty="0">
                 <a:solidFill>
                   <a:srgbClr val="003A63"/>
                 </a:solidFill>
@@ -5040,7 +5042,7 @@
               </a:rPr>
               <a:t>• Guardrails include source checking, citations, and reviewer signoff.</a:t>
             </a:r>
-            <a:endParaRPr lang="en-US" sz="2100" dirty="0"/>
+            <a:endParaRPr lang="en-US" sz="1920" dirty="0"/>
           </a:p>
         </p:txBody>
       </p:sp>
@@ -5052,12 +5054,12 @@
         </p:nvSpPr>
         <p:spPr>
           <a:xfrm>
-            <a:off x="7635240" y="1325880"/>
-            <a:ext cx="3474720" cy="1207008"/>
+            <a:off x="7543800" y="1325880"/>
+            <a:ext cx="3611880" cy="1261872"/>
           </a:xfrm>
           <a:prstGeom prst="roundRect">
             <a:avLst>
-              <a:gd name="adj" fmla="val 9091"/>
+              <a:gd name="adj" fmla="val 8696"/>
             </a:avLst>
           </a:prstGeom>
           <a:solidFill>
@@ -5079,8 +5081,8 @@
         </p:nvSpPr>
         <p:spPr>
           <a:xfrm>
-            <a:off x="7799832" y="1472184"/>
-            <a:ext cx="3145536" cy="256032"/>
+            <a:off x="7708392" y="1453896"/>
+            <a:ext cx="3282696" cy="228600"/>
           </a:xfrm>
           <a:prstGeom prst="rect">
             <a:avLst/>
@@ -5096,7 +5098,7 @@
               <a:buNone/>
             </a:pPr>
             <a:r>
-              <a:rPr lang="en-US" sz="1300" b="1" dirty="0">
+              <a:rPr lang="en-US" sz="1220" b="1" dirty="0">
                 <a:solidFill>
                   <a:srgbClr val="0068B7"/>
                 </a:solidFill>
@@ -5106,7 +5108,7 @@
               </a:rPr>
               <a:t>Risk check</a:t>
             </a:r>
-            <a:endParaRPr lang="en-US" sz="1300" dirty="0"/>
+            <a:endParaRPr lang="en-US" sz="1220" dirty="0"/>
           </a:p>
         </p:txBody>
       </p:sp>
@@ -5118,8 +5120,8 @@
         </p:nvSpPr>
         <p:spPr>
           <a:xfrm>
-            <a:off x="7799832" y="1801368"/>
-            <a:ext cx="3145536" cy="640080"/>
+            <a:off x="7708392" y="1764792"/>
+            <a:ext cx="3282696" cy="749808"/>
           </a:xfrm>
           <a:prstGeom prst="rect">
             <a:avLst/>
@@ -5137,7 +5139,7 @@
               <a:buNone/>
             </a:pPr>
             <a:r>
-              <a:rPr lang="en-US" sz="1320" dirty="0">
+              <a:rPr lang="en-US" sz="1220" dirty="0">
                 <a:solidFill>
                   <a:srgbClr val="17364A"/>
                 </a:solidFill>
@@ -5147,7 +5149,7 @@
               </a:rPr>
               <a:t>Fluent but false outputs.</a:t>
             </a:r>
-            <a:endParaRPr lang="en-US" sz="1320" dirty="0"/>
+            <a:endParaRPr lang="en-US" sz="1220" dirty="0"/>
           </a:p>
         </p:txBody>
       </p:sp>
@@ -5159,12 +5161,12 @@
         </p:nvSpPr>
         <p:spPr>
           <a:xfrm>
-            <a:off x="7635240" y="2670048"/>
-            <a:ext cx="3474720" cy="1536192"/>
+            <a:off x="7543800" y="2724912"/>
+            <a:ext cx="3611880" cy="1527048"/>
           </a:xfrm>
           <a:prstGeom prst="roundRect">
             <a:avLst>
-              <a:gd name="adj" fmla="val 7143"/>
+              <a:gd name="adj" fmla="val 7186"/>
             </a:avLst>
           </a:prstGeom>
           <a:solidFill>
@@ -5186,8 +5188,8 @@
         </p:nvSpPr>
         <p:spPr>
           <a:xfrm>
-            <a:off x="7799832" y="2816352"/>
-            <a:ext cx="3145536" cy="256032"/>
+            <a:off x="7708392" y="2852928"/>
+            <a:ext cx="3282696" cy="228600"/>
           </a:xfrm>
           <a:prstGeom prst="rect">
             <a:avLst/>
@@ -5203,7 +5205,7 @@
               <a:buNone/>
             </a:pPr>
             <a:r>
-              <a:rPr lang="en-US" sz="1300" b="1" dirty="0">
+              <a:rPr lang="en-US" sz="1220" b="1" dirty="0">
                 <a:solidFill>
                   <a:srgbClr val="0068B7"/>
                 </a:solidFill>
@@ -5213,7 +5215,7 @@
               </a:rPr>
               <a:t>Concept checkpoints</a:t>
             </a:r>
-            <a:endParaRPr lang="en-US" sz="1300" dirty="0"/>
+            <a:endParaRPr lang="en-US" sz="1220" dirty="0"/>
           </a:p>
         </p:txBody>
       </p:sp>
@@ -5225,8 +5227,8 @@
         </p:nvSpPr>
         <p:spPr>
           <a:xfrm>
-            <a:off x="7818120" y="3182112"/>
-            <a:ext cx="3090672" cy="877824"/>
+            <a:off x="7726680" y="3182112"/>
+            <a:ext cx="3227832" cy="960120"/>
           </a:xfrm>
           <a:prstGeom prst="rect">
             <a:avLst/>
@@ -5244,7 +5246,7 @@
               <a:buNone/>
             </a:pPr>
             <a:r>
-              <a:rPr lang="en-US" sz="1220" dirty="0">
+              <a:rPr lang="en-US" sz="1140" dirty="0">
                 <a:solidFill>
                   <a:srgbClr val="17364A"/>
                 </a:solidFill>
@@ -5254,14 +5256,14 @@
               </a:rPr>
               <a:t>Omitted caveats.</a:t>
             </a:r>
-            <a:endParaRPr lang="en-US" sz="1220" dirty="0"/>
-          </a:p>
-          <a:p>
-            <a:pPr indent="0" marL="0">
-              <a:buNone/>
-            </a:pPr>
-            <a:r>
-              <a:rPr lang="en-US" sz="1220" dirty="0">
+            <a:endParaRPr lang="en-US" sz="1140" dirty="0"/>
+          </a:p>
+          <a:p>
+            <a:pPr indent="0" marL="0">
+              <a:buNone/>
+            </a:pPr>
+            <a:r>
+              <a:rPr lang="en-US" sz="1140" dirty="0">
                 <a:solidFill>
                   <a:srgbClr val="17364A"/>
                 </a:solidFill>
@@ -5271,14 +5273,14 @@
               </a:rPr>
               <a:t>AI may simplify uncertainty away.</a:t>
             </a:r>
-            <a:endParaRPr lang="en-US" sz="1220" dirty="0"/>
-          </a:p>
-          <a:p>
-            <a:pPr indent="0" marL="0">
-              <a:buNone/>
-            </a:pPr>
-            <a:r>
-              <a:rPr lang="en-US" sz="1220" dirty="0">
+            <a:endParaRPr lang="en-US" sz="1140" dirty="0"/>
+          </a:p>
+          <a:p>
+            <a:pPr indent="0" marL="0">
+              <a:buNone/>
+            </a:pPr>
+            <a:r>
+              <a:rPr lang="en-US" sz="1140" dirty="0">
                 <a:solidFill>
                   <a:srgbClr val="17364A"/>
                 </a:solidFill>
@@ -5286,9 +5288,9 @@
                 <a:ea typeface="Aptos" pitchFamily="34" charset="-122"/>
                 <a:cs typeface="Aptos" pitchFamily="34" charset="-120"/>
               </a:rPr>
-              <a:t>Guardrails include completeness review and required caveat checks.</a:t>
-            </a:r>
-            <a:endParaRPr lang="en-US" sz="1220" dirty="0"/>
+              <a:t>Guardrails include completeness review and.</a:t>
+            </a:r>
+            <a:endParaRPr lang="en-US" sz="1140" dirty="0"/>
           </a:p>
         </p:txBody>
       </p:sp>
@@ -5300,12 +5302,12 @@
         </p:nvSpPr>
         <p:spPr>
           <a:xfrm>
-            <a:off x="7635240" y="4343400"/>
-            <a:ext cx="3474720" cy="1255471"/>
+            <a:off x="7543800" y="4389120"/>
+            <a:ext cx="3611880" cy="1261872"/>
           </a:xfrm>
           <a:prstGeom prst="roundRect">
             <a:avLst>
-              <a:gd name="adj" fmla="val 8740"/>
+              <a:gd name="adj" fmla="val 8696"/>
             </a:avLst>
           </a:prstGeom>
           <a:solidFill>
@@ -5327,8 +5329,8 @@
         </p:nvSpPr>
         <p:spPr>
           <a:xfrm>
-            <a:off x="7799832" y="4489704"/>
-            <a:ext cx="3145536" cy="256032"/>
+            <a:off x="7708392" y="4517136"/>
+            <a:ext cx="3282696" cy="228600"/>
           </a:xfrm>
           <a:prstGeom prst="rect">
             <a:avLst/>
@@ -5344,7 +5346,7 @@
               <a:buNone/>
             </a:pPr>
             <a:r>
-              <a:rPr lang="en-US" sz="1300" b="1" dirty="0">
+              <a:rPr lang="en-US" sz="1220" b="1" dirty="0">
                 <a:solidFill>
                   <a:srgbClr val="0068B7"/>
                 </a:solidFill>
@@ -5354,7 +5356,7 @@
               </a:rPr>
               <a:t>Safeguard to plan</a:t>
             </a:r>
-            <a:endParaRPr lang="en-US" sz="1300" dirty="0"/>
+            <a:endParaRPr lang="en-US" sz="1220" dirty="0"/>
           </a:p>
         </p:txBody>
       </p:sp>
@@ -5366,8 +5368,8 @@
         </p:nvSpPr>
         <p:spPr>
           <a:xfrm>
-            <a:off x="7799832" y="4818888"/>
-            <a:ext cx="3145536" cy="688543"/>
+            <a:off x="7708392" y="4828032"/>
+            <a:ext cx="3282696" cy="749808"/>
           </a:xfrm>
           <a:prstGeom prst="rect">
             <a:avLst/>
@@ -5385,7 +5387,7 @@
               <a:buNone/>
             </a:pPr>
             <a:r>
-              <a:rPr lang="en-US" sz="1320" dirty="0">
+              <a:rPr lang="en-US" sz="1220" dirty="0">
                 <a:solidFill>
                   <a:srgbClr val="17364A"/>
                 </a:solidFill>
@@ -5393,9 +5395,9 @@
                 <a:ea typeface="Aptos" pitchFamily="34" charset="-122"/>
                 <a:cs typeface="Aptos" pitchFamily="34" charset="-120"/>
               </a:rPr>
-              <a:t>Identify what could go wrong, who could be affected, what safeguards are needed, and what evidence should be reviewed before use.</a:t>
-            </a:r>
-            <a:endParaRPr lang="en-US" sz="1320" dirty="0"/>
+              <a:t>Identify what could go wrong, who could be affected, what safeguards are needed,.</a:t>
+            </a:r>
+            <a:endParaRPr lang="en-US" sz="1220" dirty="0"/>
           </a:p>
         </p:txBody>
       </p:sp>
@@ -5686,8 +5688,8 @@
         </p:nvSpPr>
         <p:spPr>
           <a:xfrm>
-            <a:off x="868680" y="1508760"/>
-            <a:ext cx="6309360" cy="4160520"/>
+            <a:off x="822960" y="1463040"/>
+            <a:ext cx="6565392" cy="4343400"/>
           </a:xfrm>
           <a:prstGeom prst="rect">
             <a:avLst/>
@@ -5705,7 +5707,7 @@
               <a:buNone/>
             </a:pPr>
             <a:r>
-              <a:rPr lang="en-US" sz="2100" dirty="0">
+              <a:rPr lang="en-US" sz="1920" dirty="0">
                 <a:solidFill>
                   <a:srgbClr val="003A63"/>
                 </a:solidFill>
@@ -5715,14 +5717,14 @@
               </a:rPr>
               <a:t>• Privacy exposure.</a:t>
             </a:r>
-            <a:endParaRPr lang="en-US" sz="2100" dirty="0"/>
-          </a:p>
-          <a:p>
-            <a:pPr indent="0" marL="0">
-              <a:buNone/>
-            </a:pPr>
-            <a:r>
-              <a:rPr lang="en-US" sz="2100" dirty="0">
+            <a:endParaRPr lang="en-US" sz="1920" dirty="0"/>
+          </a:p>
+          <a:p>
+            <a:pPr indent="0" marL="0">
+              <a:buNone/>
+            </a:pPr>
+            <a:r>
+              <a:rPr lang="en-US" sz="1920" dirty="0">
                 <a:solidFill>
                   <a:srgbClr val="003A63"/>
                 </a:solidFill>
@@ -5732,14 +5734,14 @@
               </a:rPr>
               <a:t>• Prompts or outputs may include sensitive data.</a:t>
             </a:r>
-            <a:endParaRPr lang="en-US" sz="2100" dirty="0"/>
-          </a:p>
-          <a:p>
-            <a:pPr indent="0" marL="0">
-              <a:buNone/>
-            </a:pPr>
-            <a:r>
-              <a:rPr lang="en-US" sz="2100" dirty="0">
+            <a:endParaRPr lang="en-US" sz="1920" dirty="0"/>
+          </a:p>
+          <a:p>
+            <a:pPr indent="0" marL="0">
+              <a:buNone/>
+            </a:pPr>
+            <a:r>
+              <a:rPr lang="en-US" sz="1920" dirty="0">
                 <a:solidFill>
                   <a:srgbClr val="003A63"/>
                 </a:solidFill>
@@ -5747,9 +5749,9 @@
                 <a:ea typeface="Aptos" pitchFamily="34" charset="-122"/>
                 <a:cs typeface="Aptos" pitchFamily="34" charset="-120"/>
               </a:rPr>
-              <a:t>• Guardrails include approved tools, data-use tiers, redaction, access controls, and records.</a:t>
-            </a:r>
-            <a:endParaRPr lang="en-US" sz="2100" dirty="0"/>
+              <a:t>• Guardrails include approved tools, data-use tiers, redaction, access.</a:t>
+            </a:r>
+            <a:endParaRPr lang="en-US" sz="1920" dirty="0"/>
           </a:p>
         </p:txBody>
       </p:sp>
@@ -5761,12 +5763,12 @@
         </p:nvSpPr>
         <p:spPr>
           <a:xfrm>
-            <a:off x="7635240" y="1325880"/>
-            <a:ext cx="3474720" cy="1207008"/>
+            <a:off x="7543800" y="1325880"/>
+            <a:ext cx="3611880" cy="1261872"/>
           </a:xfrm>
           <a:prstGeom prst="roundRect">
             <a:avLst>
-              <a:gd name="adj" fmla="val 9091"/>
+              <a:gd name="adj" fmla="val 8696"/>
             </a:avLst>
           </a:prstGeom>
           <a:solidFill>
@@ -5788,8 +5790,8 @@
         </p:nvSpPr>
         <p:spPr>
           <a:xfrm>
-            <a:off x="7799832" y="1472184"/>
-            <a:ext cx="3145536" cy="256032"/>
+            <a:off x="7708392" y="1453896"/>
+            <a:ext cx="3282696" cy="228600"/>
           </a:xfrm>
           <a:prstGeom prst="rect">
             <a:avLst/>
@@ -5805,7 +5807,7 @@
               <a:buNone/>
             </a:pPr>
             <a:r>
-              <a:rPr lang="en-US" sz="1300" b="1" dirty="0">
+              <a:rPr lang="en-US" sz="1220" b="1" dirty="0">
                 <a:solidFill>
                   <a:srgbClr val="0068B7"/>
                 </a:solidFill>
@@ -5815,7 +5817,7 @@
               </a:rPr>
               <a:t>Risk check</a:t>
             </a:r>
-            <a:endParaRPr lang="en-US" sz="1300" dirty="0"/>
+            <a:endParaRPr lang="en-US" sz="1220" dirty="0"/>
           </a:p>
         </p:txBody>
       </p:sp>
@@ -5827,8 +5829,8 @@
         </p:nvSpPr>
         <p:spPr>
           <a:xfrm>
-            <a:off x="7799832" y="1801368"/>
-            <a:ext cx="3145536" cy="640080"/>
+            <a:off x="7708392" y="1764792"/>
+            <a:ext cx="3282696" cy="749808"/>
           </a:xfrm>
           <a:prstGeom prst="rect">
             <a:avLst/>
@@ -5846,7 +5848,7 @@
               <a:buNone/>
             </a:pPr>
             <a:r>
-              <a:rPr lang="en-US" sz="1320" dirty="0">
+              <a:rPr lang="en-US" sz="1220" dirty="0">
                 <a:solidFill>
                   <a:srgbClr val="17364A"/>
                 </a:solidFill>
@@ -5856,7 +5858,7 @@
               </a:rPr>
               <a:t>Privacy exposure.</a:t>
             </a:r>
-            <a:endParaRPr lang="en-US" sz="1320" dirty="0"/>
+            <a:endParaRPr lang="en-US" sz="1220" dirty="0"/>
           </a:p>
         </p:txBody>
       </p:sp>
@@ -5868,12 +5870,12 @@
         </p:nvSpPr>
         <p:spPr>
           <a:xfrm>
-            <a:off x="7635240" y="2670048"/>
-            <a:ext cx="3474720" cy="1536192"/>
+            <a:off x="7543800" y="2724912"/>
+            <a:ext cx="3611880" cy="1527048"/>
           </a:xfrm>
           <a:prstGeom prst="roundRect">
             <a:avLst>
-              <a:gd name="adj" fmla="val 7143"/>
+              <a:gd name="adj" fmla="val 7186"/>
             </a:avLst>
           </a:prstGeom>
           <a:solidFill>
@@ -5895,8 +5897,8 @@
         </p:nvSpPr>
         <p:spPr>
           <a:xfrm>
-            <a:off x="7799832" y="2816352"/>
-            <a:ext cx="3145536" cy="256032"/>
+            <a:off x="7708392" y="2852928"/>
+            <a:ext cx="3282696" cy="228600"/>
           </a:xfrm>
           <a:prstGeom prst="rect">
             <a:avLst/>
@@ -5912,7 +5914,7 @@
               <a:buNone/>
             </a:pPr>
             <a:r>
-              <a:rPr lang="en-US" sz="1300" b="1" dirty="0">
+              <a:rPr lang="en-US" sz="1220" b="1" dirty="0">
                 <a:solidFill>
                   <a:srgbClr val="0068B7"/>
                 </a:solidFill>
@@ -5922,7 +5924,7 @@
               </a:rPr>
               <a:t>Concept checkpoints</a:t>
             </a:r>
-            <a:endParaRPr lang="en-US" sz="1300" dirty="0"/>
+            <a:endParaRPr lang="en-US" sz="1220" dirty="0"/>
           </a:p>
         </p:txBody>
       </p:sp>
@@ -5934,8 +5936,8 @@
         </p:nvSpPr>
         <p:spPr>
           <a:xfrm>
-            <a:off x="7818120" y="3182112"/>
-            <a:ext cx="3090672" cy="877824"/>
+            <a:off x="7726680" y="3182112"/>
+            <a:ext cx="3227832" cy="960120"/>
           </a:xfrm>
           <a:prstGeom prst="rect">
             <a:avLst/>
@@ -5953,7 +5955,7 @@
               <a:buNone/>
             </a:pPr>
             <a:r>
-              <a:rPr lang="en-US" sz="1220" dirty="0">
+              <a:rPr lang="en-US" sz="1140" dirty="0">
                 <a:solidFill>
                   <a:srgbClr val="17364A"/>
                 </a:solidFill>
@@ -5963,14 +5965,14 @@
               </a:rPr>
               <a:t>Privacy exposure.</a:t>
             </a:r>
-            <a:endParaRPr lang="en-US" sz="1220" dirty="0"/>
-          </a:p>
-          <a:p>
-            <a:pPr indent="0" marL="0">
-              <a:buNone/>
-            </a:pPr>
-            <a:r>
-              <a:rPr lang="en-US" sz="1220" dirty="0">
+            <a:endParaRPr lang="en-US" sz="1140" dirty="0"/>
+          </a:p>
+          <a:p>
+            <a:pPr indent="0" marL="0">
+              <a:buNone/>
+            </a:pPr>
+            <a:r>
+              <a:rPr lang="en-US" sz="1140" dirty="0">
                 <a:solidFill>
                   <a:srgbClr val="17364A"/>
                 </a:solidFill>
@@ -5980,14 +5982,14 @@
               </a:rPr>
               <a:t>Prompts or outputs may include sensitive data.</a:t>
             </a:r>
-            <a:endParaRPr lang="en-US" sz="1220" dirty="0"/>
-          </a:p>
-          <a:p>
-            <a:pPr indent="0" marL="0">
-              <a:buNone/>
-            </a:pPr>
-            <a:r>
-              <a:rPr lang="en-US" sz="1220" dirty="0">
+            <a:endParaRPr lang="en-US" sz="1140" dirty="0"/>
+          </a:p>
+          <a:p>
+            <a:pPr indent="0" marL="0">
+              <a:buNone/>
+            </a:pPr>
+            <a:r>
+              <a:rPr lang="en-US" sz="1140" dirty="0">
                 <a:solidFill>
                   <a:srgbClr val="17364A"/>
                 </a:solidFill>
@@ -5995,9 +5997,9 @@
                 <a:ea typeface="Aptos" pitchFamily="34" charset="-122"/>
                 <a:cs typeface="Aptos" pitchFamily="34" charset="-120"/>
               </a:rPr>
-              <a:t>Guardrails include approved tools, data-use tiers, redaction,.</a:t>
-            </a:r>
-            <a:endParaRPr lang="en-US" sz="1220" dirty="0"/>
+              <a:t>Guardrails include approved tools, data-use tiers,.</a:t>
+            </a:r>
+            <a:endParaRPr lang="en-US" sz="1140" dirty="0"/>
           </a:p>
         </p:txBody>
       </p:sp>
@@ -6009,12 +6011,12 @@
         </p:nvSpPr>
         <p:spPr>
           <a:xfrm>
-            <a:off x="7635240" y="4343400"/>
-            <a:ext cx="3474720" cy="1255471"/>
+            <a:off x="7543800" y="4389120"/>
+            <a:ext cx="3611880" cy="1261872"/>
           </a:xfrm>
           <a:prstGeom prst="roundRect">
             <a:avLst>
-              <a:gd name="adj" fmla="val 8740"/>
+              <a:gd name="adj" fmla="val 8696"/>
             </a:avLst>
           </a:prstGeom>
           <a:solidFill>
@@ -6036,8 +6038,8 @@
         </p:nvSpPr>
         <p:spPr>
           <a:xfrm>
-            <a:off x="7799832" y="4489704"/>
-            <a:ext cx="3145536" cy="256032"/>
+            <a:off x="7708392" y="4517136"/>
+            <a:ext cx="3282696" cy="228600"/>
           </a:xfrm>
           <a:prstGeom prst="rect">
             <a:avLst/>
@@ -6053,7 +6055,7 @@
               <a:buNone/>
             </a:pPr>
             <a:r>
-              <a:rPr lang="en-US" sz="1300" b="1" dirty="0">
+              <a:rPr lang="en-US" sz="1220" b="1" dirty="0">
                 <a:solidFill>
                   <a:srgbClr val="0068B7"/>
                 </a:solidFill>
@@ -6063,7 +6065,7 @@
               </a:rPr>
               <a:t>Safeguard to plan</a:t>
             </a:r>
-            <a:endParaRPr lang="en-US" sz="1300" dirty="0"/>
+            <a:endParaRPr lang="en-US" sz="1220" dirty="0"/>
           </a:p>
         </p:txBody>
       </p:sp>
@@ -6075,8 +6077,8 @@
         </p:nvSpPr>
         <p:spPr>
           <a:xfrm>
-            <a:off x="7799832" y="4818888"/>
-            <a:ext cx="3145536" cy="688543"/>
+            <a:off x="7708392" y="4828032"/>
+            <a:ext cx="3282696" cy="749808"/>
           </a:xfrm>
           <a:prstGeom prst="rect">
             <a:avLst/>
@@ -6094,7 +6096,7 @@
               <a:buNone/>
             </a:pPr>
             <a:r>
-              <a:rPr lang="en-US" sz="1320" dirty="0">
+              <a:rPr lang="en-US" sz="1220" dirty="0">
                 <a:solidFill>
                   <a:srgbClr val="17364A"/>
                 </a:solidFill>
@@ -6102,9 +6104,9 @@
                 <a:ea typeface="Aptos" pitchFamily="34" charset="-122"/>
                 <a:cs typeface="Aptos" pitchFamily="34" charset="-120"/>
               </a:rPr>
-              <a:t>Identify what could go wrong, who could be affected, what safeguards are needed, and what evidence should be reviewed before use.</a:t>
-            </a:r>
-            <a:endParaRPr lang="en-US" sz="1320" dirty="0"/>
+              <a:t>Identify what could go wrong, who could be affected, what safeguards are needed,.</a:t>
+            </a:r>
+            <a:endParaRPr lang="en-US" sz="1220" dirty="0"/>
           </a:p>
         </p:txBody>
       </p:sp>
@@ -6395,8 +6397,8 @@
         </p:nvSpPr>
         <p:spPr>
           <a:xfrm>
-            <a:off x="868680" y="1508760"/>
-            <a:ext cx="6309360" cy="4160520"/>
+            <a:off x="822960" y="1463040"/>
+            <a:ext cx="6565392" cy="4343400"/>
           </a:xfrm>
           <a:prstGeom prst="rect">
             <a:avLst/>
@@ -6414,7 +6416,7 @@
               <a:buNone/>
             </a:pPr>
             <a:r>
-              <a:rPr lang="en-US" sz="2100" dirty="0">
+              <a:rPr lang="en-US" sz="1920" dirty="0">
                 <a:solidFill>
                   <a:srgbClr val="003A63"/>
                 </a:solidFill>
@@ -6422,16 +6424,16 @@
                 <a:ea typeface="Aptos" pitchFamily="34" charset="-122"/>
                 <a:cs typeface="Aptos" pitchFamily="34" charset="-120"/>
               </a:rPr>
-              <a:t>• Generative AI output evaluation applies to drafting, summarization, classification,.</a:t>
-            </a:r>
-            <a:endParaRPr lang="en-US" sz="2100" dirty="0"/>
-          </a:p>
-          <a:p>
-            <a:pPr indent="0" marL="0">
-              <a:buNone/>
-            </a:pPr>
-            <a:r>
-              <a:rPr lang="en-US" sz="2100" dirty="0">
+              <a:t>• Generative AI output evaluation applies to drafting, summarization,.</a:t>
+            </a:r>
+            <a:endParaRPr lang="en-US" sz="1920" dirty="0"/>
+          </a:p>
+          <a:p>
+            <a:pPr indent="0" marL="0">
+              <a:buNone/>
+            </a:pPr>
+            <a:r>
+              <a:rPr lang="en-US" sz="1920" dirty="0">
                 <a:solidFill>
                   <a:srgbClr val="003A63"/>
                 </a:solidFill>
@@ -6439,16 +6441,16 @@
                 <a:ea typeface="Aptos" pitchFamily="34" charset="-122"/>
                 <a:cs typeface="Aptos" pitchFamily="34" charset="-120"/>
               </a:rPr>
-              <a:t>• It is also relevant to RAG and agentic workflows because generated text may summarize.</a:t>
-            </a:r>
-            <a:endParaRPr lang="en-US" sz="2100" dirty="0"/>
-          </a:p>
-          <a:p>
-            <a:pPr indent="0" marL="0">
-              <a:buNone/>
-            </a:pPr>
-            <a:r>
-              <a:rPr lang="en-US" sz="2100" dirty="0">
+              <a:t>• It is also relevant to RAG and agentic workflows because generated text may.</a:t>
+            </a:r>
+            <a:endParaRPr lang="en-US" sz="1920" dirty="0"/>
+          </a:p>
+          <a:p>
+            <a:pPr indent="0" marL="0">
+              <a:buNone/>
+            </a:pPr>
+            <a:r>
+              <a:rPr lang="en-US" sz="1920" dirty="0">
                 <a:solidFill>
                   <a:srgbClr val="003A63"/>
                 </a:solidFill>
@@ -6458,7 +6460,7 @@
               </a:rPr>
               <a:t>• Evaluation should be built into workflow design, not added after deployment.</a:t>
             </a:r>
-            <a:endParaRPr lang="en-US" sz="2100" dirty="0"/>
+            <a:endParaRPr lang="en-US" sz="1920" dirty="0"/>
           </a:p>
         </p:txBody>
       </p:sp>
@@ -6470,12 +6472,12 @@
         </p:nvSpPr>
         <p:spPr>
           <a:xfrm>
-            <a:off x="7635240" y="1325880"/>
-            <a:ext cx="3474720" cy="1255471"/>
+            <a:off x="7543800" y="1325880"/>
+            <a:ext cx="3611880" cy="1261872"/>
           </a:xfrm>
           <a:prstGeom prst="roundRect">
             <a:avLst>
-              <a:gd name="adj" fmla="val 8740"/>
+              <a:gd name="adj" fmla="val 8696"/>
             </a:avLst>
           </a:prstGeom>
           <a:solidFill>
@@ -6497,8 +6499,8 @@
         </p:nvSpPr>
         <p:spPr>
           <a:xfrm>
-            <a:off x="7799832" y="1472184"/>
-            <a:ext cx="3145536" cy="256032"/>
+            <a:off x="7708392" y="1453896"/>
+            <a:ext cx="3282696" cy="228600"/>
           </a:xfrm>
           <a:prstGeom prst="rect">
             <a:avLst/>
@@ -6514,7 +6516,7 @@
               <a:buNone/>
             </a:pPr>
             <a:r>
-              <a:rPr lang="en-US" sz="1300" b="1" dirty="0">
+              <a:rPr lang="en-US" sz="1220" b="1" dirty="0">
                 <a:solidFill>
                   <a:srgbClr val="0068B7"/>
                 </a:solidFill>
@@ -6524,7 +6526,7 @@
               </a:rPr>
               <a:t>Data decision</a:t>
             </a:r>
-            <a:endParaRPr lang="en-US" sz="1300" dirty="0"/>
+            <a:endParaRPr lang="en-US" sz="1220" dirty="0"/>
           </a:p>
         </p:txBody>
       </p:sp>
@@ -6536,8 +6538,8 @@
         </p:nvSpPr>
         <p:spPr>
           <a:xfrm>
-            <a:off x="7799832" y="1801368"/>
-            <a:ext cx="3145536" cy="688543"/>
+            <a:off x="7708392" y="1764792"/>
+            <a:ext cx="3282696" cy="749808"/>
           </a:xfrm>
           <a:prstGeom prst="rect">
             <a:avLst/>
@@ -6555,7 +6557,7 @@
               <a:buNone/>
             </a:pPr>
             <a:r>
-              <a:rPr lang="en-US" sz="1320" dirty="0">
+              <a:rPr lang="en-US" sz="1220" dirty="0">
                 <a:solidFill>
                   <a:srgbClr val="17364A"/>
                 </a:solidFill>
@@ -6563,9 +6565,9 @@
                 <a:ea typeface="Aptos" pitchFamily="34" charset="-122"/>
                 <a:cs typeface="Aptos" pitchFamily="34" charset="-120"/>
               </a:rPr>
-              <a:t>Generative AI output evaluation applies to drafting, summarization, classification, translation, code.</a:t>
-            </a:r>
-            <a:endParaRPr lang="en-US" sz="1320" dirty="0"/>
+              <a:t>Generative AI output evaluation applies to drafting, summarization,.</a:t>
+            </a:r>
+            <a:endParaRPr lang="en-US" sz="1220" dirty="0"/>
           </a:p>
         </p:txBody>
       </p:sp>
@@ -6577,12 +6579,12 @@
         </p:nvSpPr>
         <p:spPr>
           <a:xfrm>
-            <a:off x="7635240" y="2718511"/>
-            <a:ext cx="3474720" cy="1328623"/>
+            <a:off x="7543800" y="2724912"/>
+            <a:ext cx="3611880" cy="1527048"/>
           </a:xfrm>
           <a:prstGeom prst="roundRect">
             <a:avLst>
-              <a:gd name="adj" fmla="val 8259"/>
+              <a:gd name="adj" fmla="val 7186"/>
             </a:avLst>
           </a:prstGeom>
           <a:solidFill>
@@ -6604,8 +6606,8 @@
         </p:nvSpPr>
         <p:spPr>
           <a:xfrm>
-            <a:off x="7799832" y="2864815"/>
-            <a:ext cx="3145536" cy="256032"/>
+            <a:off x="7708392" y="2852928"/>
+            <a:ext cx="3282696" cy="228600"/>
           </a:xfrm>
           <a:prstGeom prst="rect">
             <a:avLst/>
@@ -6621,7 +6623,7 @@
               <a:buNone/>
             </a:pPr>
             <a:r>
-              <a:rPr lang="en-US" sz="1300" b="1" dirty="0">
+              <a:rPr lang="en-US" sz="1220" b="1" dirty="0">
                 <a:solidFill>
                   <a:srgbClr val="0068B7"/>
                 </a:solidFill>
@@ -6631,7 +6633,7 @@
               </a:rPr>
               <a:t>Concept checkpoints</a:t>
             </a:r>
-            <a:endParaRPr lang="en-US" sz="1300" dirty="0"/>
+            <a:endParaRPr lang="en-US" sz="1220" dirty="0"/>
           </a:p>
         </p:txBody>
       </p:sp>
@@ -6643,8 +6645,8 @@
         </p:nvSpPr>
         <p:spPr>
           <a:xfrm>
-            <a:off x="7818120" y="3230575"/>
-            <a:ext cx="3090672" cy="670255"/>
+            <a:off x="7726680" y="3182112"/>
+            <a:ext cx="3227832" cy="960120"/>
           </a:xfrm>
           <a:prstGeom prst="rect">
             <a:avLst/>
@@ -6662,7 +6664,7 @@
               <a:buNone/>
             </a:pPr>
             <a:r>
-              <a:rPr lang="en-US" sz="1220" dirty="0">
+              <a:rPr lang="en-US" sz="1140" dirty="0">
                 <a:solidFill>
                   <a:srgbClr val="17364A"/>
                 </a:solidFill>
@@ -6670,16 +6672,16 @@
                 <a:ea typeface="Aptos" pitchFamily="34" charset="-122"/>
                 <a:cs typeface="Aptos" pitchFamily="34" charset="-120"/>
               </a:rPr>
-              <a:t>Generative AI output evaluation applies to drafting,.</a:t>
-            </a:r>
-            <a:endParaRPr lang="en-US" sz="1220" dirty="0"/>
-          </a:p>
-          <a:p>
-            <a:pPr indent="0" marL="0">
-              <a:buNone/>
-            </a:pPr>
-            <a:r>
-              <a:rPr lang="en-US" sz="1220" dirty="0">
+              <a:t>Generative AI output evaluation applies to.</a:t>
+            </a:r>
+            <a:endParaRPr lang="en-US" sz="1140" dirty="0"/>
+          </a:p>
+          <a:p>
+            <a:pPr indent="0" marL="0">
+              <a:buNone/>
+            </a:pPr>
+            <a:r>
+              <a:rPr lang="en-US" sz="1140" dirty="0">
                 <a:solidFill>
                   <a:srgbClr val="17364A"/>
                 </a:solidFill>
@@ -6687,16 +6689,16 @@
                 <a:ea typeface="Aptos" pitchFamily="34" charset="-122"/>
                 <a:cs typeface="Aptos" pitchFamily="34" charset="-120"/>
               </a:rPr>
-              <a:t>It is also relevant to RAG and agentic workflows because generated.</a:t>
-            </a:r>
-            <a:endParaRPr lang="en-US" sz="1220" dirty="0"/>
-          </a:p>
-          <a:p>
-            <a:pPr indent="0" marL="0">
-              <a:buNone/>
-            </a:pPr>
-            <a:r>
-              <a:rPr lang="en-US" sz="1220" dirty="0">
+              <a:t>It is also relevant to RAG and agentic workflows.</a:t>
+            </a:r>
+            <a:endParaRPr lang="en-US" sz="1140" dirty="0"/>
+          </a:p>
+          <a:p>
+            <a:pPr indent="0" marL="0">
+              <a:buNone/>
+            </a:pPr>
+            <a:r>
+              <a:rPr lang="en-US" sz="1140" dirty="0">
                 <a:solidFill>
                   <a:srgbClr val="17364A"/>
                 </a:solidFill>
@@ -6704,9 +6706,9 @@
                 <a:ea typeface="Aptos" pitchFamily="34" charset="-122"/>
                 <a:cs typeface="Aptos" pitchFamily="34" charset="-120"/>
               </a:rPr>
-              <a:t>The strongest approach is to create rubrics for specific output.</a:t>
-            </a:r>
-            <a:endParaRPr lang="en-US" sz="1220" dirty="0"/>
+              <a:t>The strongest approach is to create rubrics for.</a:t>
+            </a:r>
+            <a:endParaRPr lang="en-US" sz="1140" dirty="0"/>
           </a:p>
         </p:txBody>
       </p:sp>
@@ -6718,12 +6720,12 @@
         </p:nvSpPr>
         <p:spPr>
           <a:xfrm>
-            <a:off x="7635240" y="4184294"/>
-            <a:ext cx="3474720" cy="1466698"/>
+            <a:off x="7543800" y="4389120"/>
+            <a:ext cx="3611880" cy="1261872"/>
           </a:xfrm>
           <a:prstGeom prst="roundRect">
             <a:avLst>
-              <a:gd name="adj" fmla="val 7481"/>
+              <a:gd name="adj" fmla="val 8696"/>
             </a:avLst>
           </a:prstGeom>
           <a:solidFill>
@@ -6745,8 +6747,8 @@
         </p:nvSpPr>
         <p:spPr>
           <a:xfrm>
-            <a:off x="7799832" y="4330598"/>
-            <a:ext cx="3145536" cy="256032"/>
+            <a:off x="7708392" y="4517136"/>
+            <a:ext cx="3282696" cy="228600"/>
           </a:xfrm>
           <a:prstGeom prst="rect">
             <a:avLst/>
@@ -6762,7 +6764,7 @@
               <a:buNone/>
             </a:pPr>
             <a:r>
-              <a:rPr lang="en-US" sz="1300" b="1" dirty="0">
+              <a:rPr lang="en-US" sz="1220" b="1" dirty="0">
                 <a:solidFill>
                   <a:srgbClr val="0068B7"/>
                 </a:solidFill>
@@ -6772,7 +6774,7 @@
               </a:rPr>
               <a:t>How to validate</a:t>
             </a:r>
-            <a:endParaRPr lang="en-US" sz="1300" dirty="0"/>
+            <a:endParaRPr lang="en-US" sz="1220" dirty="0"/>
           </a:p>
         </p:txBody>
       </p:sp>
@@ -6784,8 +6786,8 @@
         </p:nvSpPr>
         <p:spPr>
           <a:xfrm>
-            <a:off x="7799832" y="4659782"/>
-            <a:ext cx="3145536" cy="899770"/>
+            <a:off x="7708392" y="4828032"/>
+            <a:ext cx="3282696" cy="749808"/>
           </a:xfrm>
           <a:prstGeom prst="rect">
             <a:avLst/>
@@ -6803,7 +6805,7 @@
               <a:buNone/>
             </a:pPr>
             <a:r>
-              <a:rPr lang="en-US" sz="1320" dirty="0">
+              <a:rPr lang="en-US" sz="1220" dirty="0">
                 <a:solidFill>
                   <a:srgbClr val="17364A"/>
                 </a:solidFill>
@@ -6811,9 +6813,9 @@
                 <a:ea typeface="Aptos" pitchFamily="34" charset="-122"/>
                 <a:cs typeface="Aptos" pitchFamily="34" charset="-120"/>
               </a:rPr>
-              <a:t>Connect the concept to data quality, model performance, validation evidence, monitoring measures, and decisions that remain under human control.</a:t>
-            </a:r>
-            <a:endParaRPr lang="en-US" sz="1320" dirty="0"/>
+              <a:t>Connect the concept to data quality, model performance, validation evidence,.</a:t>
+            </a:r>
+            <a:endParaRPr lang="en-US" sz="1220" dirty="0"/>
           </a:p>
         </p:txBody>
       </p:sp>
@@ -7104,8 +7106,8 @@
         </p:nvSpPr>
         <p:spPr>
           <a:xfrm>
-            <a:off x="868680" y="1508760"/>
-            <a:ext cx="6309360" cy="4160520"/>
+            <a:off x="822960" y="1463040"/>
+            <a:ext cx="6565392" cy="4343400"/>
           </a:xfrm>
           <a:prstGeom prst="rect">
             <a:avLst/>
@@ -7123,7 +7125,7 @@
               <a:buNone/>
             </a:pPr>
             <a:r>
-              <a:rPr lang="en-US" sz="2100" dirty="0">
+              <a:rPr lang="en-US" sz="1920" dirty="0">
                 <a:solidFill>
                   <a:srgbClr val="003A63"/>
                 </a:solidFill>
@@ -7133,14 +7135,14 @@
               </a:rPr>
               <a:t>• What type of generative AI output is being evaluated?</a:t>
             </a:r>
-            <a:endParaRPr lang="en-US" sz="2100" dirty="0"/>
-          </a:p>
-          <a:p>
-            <a:pPr indent="0" marL="0">
-              <a:buNone/>
-            </a:pPr>
-            <a:r>
-              <a:rPr lang="en-US" sz="2100" dirty="0">
+            <a:endParaRPr lang="en-US" sz="1920" dirty="0"/>
+          </a:p>
+          <a:p>
+            <a:pPr indent="0" marL="0">
+              <a:buNone/>
+            </a:pPr>
+            <a:r>
+              <a:rPr lang="en-US" sz="1920" dirty="0">
                 <a:solidFill>
                   <a:srgbClr val="003A63"/>
                 </a:solidFill>
@@ -7150,14 +7152,14 @@
               </a:rPr>
               <a:t>• What source material should be used to verify the output?</a:t>
             </a:r>
-            <a:endParaRPr lang="en-US" sz="2100" dirty="0"/>
-          </a:p>
-          <a:p>
-            <a:pPr indent="0" marL="0">
-              <a:buNone/>
-            </a:pPr>
-            <a:r>
-              <a:rPr lang="en-US" sz="2100" dirty="0">
+            <a:endParaRPr lang="en-US" sz="1920" dirty="0"/>
+          </a:p>
+          <a:p>
+            <a:pPr indent="0" marL="0">
+              <a:buNone/>
+            </a:pPr>
+            <a:r>
+              <a:rPr lang="en-US" sz="1920" dirty="0">
                 <a:solidFill>
                   <a:srgbClr val="003A63"/>
                 </a:solidFill>
@@ -7167,7 +7169,7 @@
               </a:rPr>
               <a:t>• What errors or omissions would be most harmful?</a:t>
             </a:r>
-            <a:endParaRPr lang="en-US" sz="2100" dirty="0"/>
+            <a:endParaRPr lang="en-US" sz="1920" dirty="0"/>
           </a:p>
         </p:txBody>
       </p:sp>
@@ -7179,12 +7181,12 @@
         </p:nvSpPr>
         <p:spPr>
           <a:xfrm>
-            <a:off x="7635240" y="1325880"/>
-            <a:ext cx="3474720" cy="1207008"/>
+            <a:off x="7543800" y="1325880"/>
+            <a:ext cx="3611880" cy="1261872"/>
           </a:xfrm>
           <a:prstGeom prst="roundRect">
             <a:avLst>
-              <a:gd name="adj" fmla="val 9091"/>
+              <a:gd name="adj" fmla="val 8696"/>
             </a:avLst>
           </a:prstGeom>
           <a:solidFill>
@@ -7206,8 +7208,8 @@
         </p:nvSpPr>
         <p:spPr>
           <a:xfrm>
-            <a:off x="7799832" y="1472184"/>
-            <a:ext cx="3145536" cy="256032"/>
+            <a:off x="7708392" y="1453896"/>
+            <a:ext cx="3282696" cy="228600"/>
           </a:xfrm>
           <a:prstGeom prst="rect">
             <a:avLst/>
@@ -7223,7 +7225,7 @@
               <a:buNone/>
             </a:pPr>
             <a:r>
-              <a:rPr lang="en-US" sz="1300" b="1" dirty="0">
+              <a:rPr lang="en-US" sz="1220" b="1" dirty="0">
                 <a:solidFill>
                   <a:srgbClr val="0068B7"/>
                 </a:solidFill>
@@ -7233,7 +7235,7 @@
               </a:rPr>
               <a:t>Data decision</a:t>
             </a:r>
-            <a:endParaRPr lang="en-US" sz="1300" dirty="0"/>
+            <a:endParaRPr lang="en-US" sz="1220" dirty="0"/>
           </a:p>
         </p:txBody>
       </p:sp>
@@ -7245,8 +7247,8 @@
         </p:nvSpPr>
         <p:spPr>
           <a:xfrm>
-            <a:off x="7799832" y="1801368"/>
-            <a:ext cx="3145536" cy="640080"/>
+            <a:off x="7708392" y="1764792"/>
+            <a:ext cx="3282696" cy="749808"/>
           </a:xfrm>
           <a:prstGeom prst="rect">
             <a:avLst/>
@@ -7264,7 +7266,7 @@
               <a:buNone/>
             </a:pPr>
             <a:r>
-              <a:rPr lang="en-US" sz="1320" dirty="0">
+              <a:rPr lang="en-US" sz="1220" dirty="0">
                 <a:solidFill>
                   <a:srgbClr val="17364A"/>
                 </a:solidFill>
@@ -7274,7 +7276,7 @@
               </a:rPr>
               <a:t>What type of generative AI output is being evaluated?</a:t>
             </a:r>
-            <a:endParaRPr lang="en-US" sz="1320" dirty="0"/>
+            <a:endParaRPr lang="en-US" sz="1220" dirty="0"/>
           </a:p>
         </p:txBody>
       </p:sp>
@@ -7286,12 +7288,12 @@
         </p:nvSpPr>
         <p:spPr>
           <a:xfrm>
-            <a:off x="7635240" y="2670048"/>
-            <a:ext cx="3474720" cy="1377086"/>
+            <a:off x="7543800" y="2724912"/>
+            <a:ext cx="3611880" cy="1527048"/>
           </a:xfrm>
           <a:prstGeom prst="roundRect">
             <a:avLst>
-              <a:gd name="adj" fmla="val 7968"/>
+              <a:gd name="adj" fmla="val 7186"/>
             </a:avLst>
           </a:prstGeom>
           <a:solidFill>
@@ -7313,8 +7315,8 @@
         </p:nvSpPr>
         <p:spPr>
           <a:xfrm>
-            <a:off x="7799832" y="2816352"/>
-            <a:ext cx="3145536" cy="256032"/>
+            <a:off x="7708392" y="2852928"/>
+            <a:ext cx="3282696" cy="228600"/>
           </a:xfrm>
           <a:prstGeom prst="rect">
             <a:avLst/>
@@ -7330,7 +7332,7 @@
               <a:buNone/>
             </a:pPr>
             <a:r>
-              <a:rPr lang="en-US" sz="1300" b="1" dirty="0">
+              <a:rPr lang="en-US" sz="1220" b="1" dirty="0">
                 <a:solidFill>
                   <a:srgbClr val="0068B7"/>
                 </a:solidFill>
@@ -7340,7 +7342,7 @@
               </a:rPr>
               <a:t>Concept checkpoints</a:t>
             </a:r>
-            <a:endParaRPr lang="en-US" sz="1300" dirty="0"/>
+            <a:endParaRPr lang="en-US" sz="1220" dirty="0"/>
           </a:p>
         </p:txBody>
       </p:sp>
@@ -7352,8 +7354,8 @@
         </p:nvSpPr>
         <p:spPr>
           <a:xfrm>
-            <a:off x="7818120" y="3182112"/>
-            <a:ext cx="3090672" cy="718718"/>
+            <a:off x="7726680" y="3182112"/>
+            <a:ext cx="3227832" cy="960120"/>
           </a:xfrm>
           <a:prstGeom prst="rect">
             <a:avLst/>
@@ -7371,7 +7373,7 @@
               <a:buNone/>
             </a:pPr>
             <a:r>
-              <a:rPr lang="en-US" sz="1220" dirty="0">
+              <a:rPr lang="en-US" sz="1140" dirty="0">
                 <a:solidFill>
                   <a:srgbClr val="17364A"/>
                 </a:solidFill>
@@ -7379,16 +7381,16 @@
                 <a:ea typeface="Aptos" pitchFamily="34" charset="-122"/>
                 <a:cs typeface="Aptos" pitchFamily="34" charset="-120"/>
               </a:rPr>
-              <a:t>What type of generative AI output is being evaluated?</a:t>
-            </a:r>
-            <a:endParaRPr lang="en-US" sz="1220" dirty="0"/>
-          </a:p>
-          <a:p>
-            <a:pPr indent="0" marL="0">
-              <a:buNone/>
-            </a:pPr>
-            <a:r>
-              <a:rPr lang="en-US" sz="1220" dirty="0">
+              <a:t>What type of generative AI output is being.</a:t>
+            </a:r>
+            <a:endParaRPr lang="en-US" sz="1140" dirty="0"/>
+          </a:p>
+          <a:p>
+            <a:pPr indent="0" marL="0">
+              <a:buNone/>
+            </a:pPr>
+            <a:r>
+              <a:rPr lang="en-US" sz="1140" dirty="0">
                 <a:solidFill>
                   <a:srgbClr val="17364A"/>
                 </a:solidFill>
@@ -7396,16 +7398,16 @@
                 <a:ea typeface="Aptos" pitchFamily="34" charset="-122"/>
                 <a:cs typeface="Aptos" pitchFamily="34" charset="-120"/>
               </a:rPr>
-              <a:t>What source material should be used to verify the output?</a:t>
-            </a:r>
-            <a:endParaRPr lang="en-US" sz="1220" dirty="0"/>
-          </a:p>
-          <a:p>
-            <a:pPr indent="0" marL="0">
-              <a:buNone/>
-            </a:pPr>
-            <a:r>
-              <a:rPr lang="en-US" sz="1220" dirty="0">
+              <a:t>What source material should be used to verify the.</a:t>
+            </a:r>
+            <a:endParaRPr lang="en-US" sz="1140" dirty="0"/>
+          </a:p>
+          <a:p>
+            <a:pPr indent="0" marL="0">
+              <a:buNone/>
+            </a:pPr>
+            <a:r>
+              <a:rPr lang="en-US" sz="1140" dirty="0">
                 <a:solidFill>
                   <a:srgbClr val="17364A"/>
                 </a:solidFill>
@@ -7415,7 +7417,7 @@
               </a:rPr>
               <a:t>What errors or omissions would be most harmful?</a:t>
             </a:r>
-            <a:endParaRPr lang="en-US" sz="1220" dirty="0"/>
+            <a:endParaRPr lang="en-US" sz="1140" dirty="0"/>
           </a:p>
         </p:txBody>
       </p:sp>
@@ -7427,12 +7429,12 @@
         </p:nvSpPr>
         <p:spPr>
           <a:xfrm>
-            <a:off x="7635240" y="4184294"/>
-            <a:ext cx="3474720" cy="1466698"/>
+            <a:off x="7543800" y="4389120"/>
+            <a:ext cx="3611880" cy="1261872"/>
           </a:xfrm>
           <a:prstGeom prst="roundRect">
             <a:avLst>
-              <a:gd name="adj" fmla="val 7481"/>
+              <a:gd name="adj" fmla="val 8696"/>
             </a:avLst>
           </a:prstGeom>
           <a:solidFill>
@@ -7454,8 +7456,8 @@
         </p:nvSpPr>
         <p:spPr>
           <a:xfrm>
-            <a:off x="7799832" y="4330598"/>
-            <a:ext cx="3145536" cy="256032"/>
+            <a:off x="7708392" y="4517136"/>
+            <a:ext cx="3282696" cy="228600"/>
           </a:xfrm>
           <a:prstGeom prst="rect">
             <a:avLst/>
@@ -7471,7 +7473,7 @@
               <a:buNone/>
             </a:pPr>
             <a:r>
-              <a:rPr lang="en-US" sz="1300" b="1" dirty="0">
+              <a:rPr lang="en-US" sz="1220" b="1" dirty="0">
                 <a:solidFill>
                   <a:srgbClr val="0068B7"/>
                 </a:solidFill>
@@ -7481,7 +7483,7 @@
               </a:rPr>
               <a:t>How to validate</a:t>
             </a:r>
-            <a:endParaRPr lang="en-US" sz="1300" dirty="0"/>
+            <a:endParaRPr lang="en-US" sz="1220" dirty="0"/>
           </a:p>
         </p:txBody>
       </p:sp>
@@ -7493,8 +7495,8 @@
         </p:nvSpPr>
         <p:spPr>
           <a:xfrm>
-            <a:off x="7799832" y="4659782"/>
-            <a:ext cx="3145536" cy="899770"/>
+            <a:off x="7708392" y="4828032"/>
+            <a:ext cx="3282696" cy="749808"/>
           </a:xfrm>
           <a:prstGeom prst="rect">
             <a:avLst/>
@@ -7512,7 +7514,7 @@
               <a:buNone/>
             </a:pPr>
             <a:r>
-              <a:rPr lang="en-US" sz="1320" dirty="0">
+              <a:rPr lang="en-US" sz="1220" dirty="0">
                 <a:solidFill>
                   <a:srgbClr val="17364A"/>
                 </a:solidFill>
@@ -7520,9 +7522,9 @@
                 <a:ea typeface="Aptos" pitchFamily="34" charset="-122"/>
                 <a:cs typeface="Aptos" pitchFamily="34" charset="-120"/>
               </a:rPr>
-              <a:t>Connect the concept to data quality, model performance, validation evidence, monitoring measures, and decisions that remain under human control.</a:t>
-            </a:r>
-            <a:endParaRPr lang="en-US" sz="1320" dirty="0"/>
+              <a:t>Connect the concept to data quality, model performance, validation evidence,.</a:t>
+            </a:r>
+            <a:endParaRPr lang="en-US" sz="1220" dirty="0"/>
           </a:p>
         </p:txBody>
       </p:sp>
@@ -7813,8 +7815,8 @@
         </p:nvSpPr>
         <p:spPr>
           <a:xfrm>
-            <a:off x="868680" y="1508760"/>
-            <a:ext cx="6309360" cy="4160520"/>
+            <a:off x="822960" y="1463040"/>
+            <a:ext cx="6565392" cy="4343400"/>
           </a:xfrm>
           <a:prstGeom prst="rect">
             <a:avLst/>
@@ -7832,7 +7834,7 @@
               <a:buNone/>
             </a:pPr>
             <a:r>
-              <a:rPr lang="en-US" sz="2100" dirty="0">
+              <a:rPr lang="en-US" sz="1920" dirty="0">
                 <a:solidFill>
                   <a:srgbClr val="003A63"/>
                 </a:solidFill>
@@ -7842,14 +7844,14 @@
               </a:rPr>
               <a:t>• What review criteria are needed for equity, accessibility, language, and tone?</a:t>
             </a:r>
-            <a:endParaRPr lang="en-US" sz="2100" dirty="0"/>
-          </a:p>
-          <a:p>
-            <a:pPr indent="0" marL="0">
-              <a:buNone/>
-            </a:pPr>
-            <a:r>
-              <a:rPr lang="en-US" sz="2100" dirty="0">
+            <a:endParaRPr lang="en-US" sz="1920" dirty="0"/>
+          </a:p>
+          <a:p>
+            <a:pPr indent="0" marL="0">
+              <a:buNone/>
+            </a:pPr>
+            <a:r>
+              <a:rPr lang="en-US" sz="1920" dirty="0">
                 <a:solidFill>
                   <a:srgbClr val="003A63"/>
                 </a:solidFill>
@@ -7859,7 +7861,7 @@
               </a:rPr>
               <a:t>• What documentation is required before the output can be used?</a:t>
             </a:r>
-            <a:endParaRPr lang="en-US" sz="2100" dirty="0"/>
+            <a:endParaRPr lang="en-US" sz="1920" dirty="0"/>
           </a:p>
         </p:txBody>
       </p:sp>
@@ -7871,12 +7873,12 @@
         </p:nvSpPr>
         <p:spPr>
           <a:xfrm>
-            <a:off x="7635240" y="1325880"/>
-            <a:ext cx="3474720" cy="1207008"/>
+            <a:off x="7543800" y="1325880"/>
+            <a:ext cx="3611880" cy="1261872"/>
           </a:xfrm>
           <a:prstGeom prst="roundRect">
             <a:avLst>
-              <a:gd name="adj" fmla="val 9091"/>
+              <a:gd name="adj" fmla="val 8696"/>
             </a:avLst>
           </a:prstGeom>
           <a:solidFill>
@@ -7898,8 +7900,8 @@
         </p:nvSpPr>
         <p:spPr>
           <a:xfrm>
-            <a:off x="7799832" y="1472184"/>
-            <a:ext cx="3145536" cy="256032"/>
+            <a:off x="7708392" y="1453896"/>
+            <a:ext cx="3282696" cy="228600"/>
           </a:xfrm>
           <a:prstGeom prst="rect">
             <a:avLst/>
@@ -7915,7 +7917,7 @@
               <a:buNone/>
             </a:pPr>
             <a:r>
-              <a:rPr lang="en-US" sz="1300" b="1" dirty="0">
+              <a:rPr lang="en-US" sz="1220" b="1" dirty="0">
                 <a:solidFill>
                   <a:srgbClr val="0068B7"/>
                 </a:solidFill>
@@ -7925,7 +7927,7 @@
               </a:rPr>
               <a:t>Data decision</a:t>
             </a:r>
-            <a:endParaRPr lang="en-US" sz="1300" dirty="0"/>
+            <a:endParaRPr lang="en-US" sz="1220" dirty="0"/>
           </a:p>
         </p:txBody>
       </p:sp>
@@ -7937,8 +7939,8 @@
         </p:nvSpPr>
         <p:spPr>
           <a:xfrm>
-            <a:off x="7799832" y="1801368"/>
-            <a:ext cx="3145536" cy="640080"/>
+            <a:off x="7708392" y="1764792"/>
+            <a:ext cx="3282696" cy="749808"/>
           </a:xfrm>
           <a:prstGeom prst="rect">
             <a:avLst/>
@@ -7956,7 +7958,7 @@
               <a:buNone/>
             </a:pPr>
             <a:r>
-              <a:rPr lang="en-US" sz="1320" dirty="0">
+              <a:rPr lang="en-US" sz="1220" dirty="0">
                 <a:solidFill>
                   <a:srgbClr val="17364A"/>
                 </a:solidFill>
@@ -7966,7 +7968,7 @@
               </a:rPr>
               <a:t>What review criteria are needed for equity, accessibility, language, and tone?</a:t>
             </a:r>
-            <a:endParaRPr lang="en-US" sz="1320" dirty="0"/>
+            <a:endParaRPr lang="en-US" sz="1220" dirty="0"/>
           </a:p>
         </p:txBody>
       </p:sp>
@@ -7978,12 +7980,12 @@
         </p:nvSpPr>
         <p:spPr>
           <a:xfrm>
-            <a:off x="7635240" y="2670048"/>
-            <a:ext cx="3474720" cy="1377086"/>
+            <a:off x="7543800" y="2724912"/>
+            <a:ext cx="3611880" cy="1527048"/>
           </a:xfrm>
           <a:prstGeom prst="roundRect">
             <a:avLst>
-              <a:gd name="adj" fmla="val 7968"/>
+              <a:gd name="adj" fmla="val 7186"/>
             </a:avLst>
           </a:prstGeom>
           <a:solidFill>
@@ -8005,8 +8007,8 @@
         </p:nvSpPr>
         <p:spPr>
           <a:xfrm>
-            <a:off x="7799832" y="2816352"/>
-            <a:ext cx="3145536" cy="256032"/>
+            <a:off x="7708392" y="2852928"/>
+            <a:ext cx="3282696" cy="228600"/>
           </a:xfrm>
           <a:prstGeom prst="rect">
             <a:avLst/>
@@ -8022,7 +8024,7 @@
               <a:buNone/>
             </a:pPr>
             <a:r>
-              <a:rPr lang="en-US" sz="1300" b="1" dirty="0">
+              <a:rPr lang="en-US" sz="1220" b="1" dirty="0">
                 <a:solidFill>
                   <a:srgbClr val="0068B7"/>
                 </a:solidFill>
@@ -8032,7 +8034,7 @@
               </a:rPr>
               <a:t>Concept checkpoints</a:t>
             </a:r>
-            <a:endParaRPr lang="en-US" sz="1300" dirty="0"/>
+            <a:endParaRPr lang="en-US" sz="1220" dirty="0"/>
           </a:p>
         </p:txBody>
       </p:sp>
@@ -8044,8 +8046,8 @@
         </p:nvSpPr>
         <p:spPr>
           <a:xfrm>
-            <a:off x="7818120" y="3182112"/>
-            <a:ext cx="3090672" cy="718718"/>
+            <a:off x="7726680" y="3182112"/>
+            <a:ext cx="3227832" cy="960120"/>
           </a:xfrm>
           <a:prstGeom prst="rect">
             <a:avLst/>
@@ -8063,7 +8065,7 @@
               <a:buNone/>
             </a:pPr>
             <a:r>
-              <a:rPr lang="en-US" sz="1220" dirty="0">
+              <a:rPr lang="en-US" sz="1140" dirty="0">
                 <a:solidFill>
                   <a:srgbClr val="17364A"/>
                 </a:solidFill>
@@ -8071,16 +8073,16 @@
                 <a:ea typeface="Aptos" pitchFamily="34" charset="-122"/>
                 <a:cs typeface="Aptos" pitchFamily="34" charset="-120"/>
               </a:rPr>
-              <a:t>What review criteria are needed for equity, accessibility,.</a:t>
-            </a:r>
-            <a:endParaRPr lang="en-US" sz="1220" dirty="0"/>
-          </a:p>
-          <a:p>
-            <a:pPr indent="0" marL="0">
-              <a:buNone/>
-            </a:pPr>
-            <a:r>
-              <a:rPr lang="en-US" sz="1220" dirty="0">
+              <a:t>What review criteria are needed for equity,.</a:t>
+            </a:r>
+            <a:endParaRPr lang="en-US" sz="1140" dirty="0"/>
+          </a:p>
+          <a:p>
+            <a:pPr indent="0" marL="0">
+              <a:buNone/>
+            </a:pPr>
+            <a:r>
+              <a:rPr lang="en-US" sz="1140" dirty="0">
                 <a:solidFill>
                   <a:srgbClr val="17364A"/>
                 </a:solidFill>
@@ -8088,9 +8090,9 @@
                 <a:ea typeface="Aptos" pitchFamily="34" charset="-122"/>
                 <a:cs typeface="Aptos" pitchFamily="34" charset="-120"/>
               </a:rPr>
-              <a:t>What documentation is required before the output can be used?</a:t>
-            </a:r>
-            <a:endParaRPr lang="en-US" sz="1220" dirty="0"/>
+              <a:t>What documentation is required before the output.</a:t>
+            </a:r>
+            <a:endParaRPr lang="en-US" sz="1140" dirty="0"/>
           </a:p>
         </p:txBody>
       </p:sp>
@@ -8102,12 +8104,12 @@
         </p:nvSpPr>
         <p:spPr>
           <a:xfrm>
-            <a:off x="7635240" y="4184294"/>
-            <a:ext cx="3474720" cy="1466698"/>
+            <a:off x="7543800" y="4389120"/>
+            <a:ext cx="3611880" cy="1261872"/>
           </a:xfrm>
           <a:prstGeom prst="roundRect">
             <a:avLst>
-              <a:gd name="adj" fmla="val 7481"/>
+              <a:gd name="adj" fmla="val 8696"/>
             </a:avLst>
           </a:prstGeom>
           <a:solidFill>
@@ -8129,8 +8131,8 @@
         </p:nvSpPr>
         <p:spPr>
           <a:xfrm>
-            <a:off x="7799832" y="4330598"/>
-            <a:ext cx="3145536" cy="256032"/>
+            <a:off x="7708392" y="4517136"/>
+            <a:ext cx="3282696" cy="228600"/>
           </a:xfrm>
           <a:prstGeom prst="rect">
             <a:avLst/>
@@ -8146,7 +8148,7 @@
               <a:buNone/>
             </a:pPr>
             <a:r>
-              <a:rPr lang="en-US" sz="1300" b="1" dirty="0">
+              <a:rPr lang="en-US" sz="1220" b="1" dirty="0">
                 <a:solidFill>
                   <a:srgbClr val="0068B7"/>
                 </a:solidFill>
@@ -8156,7 +8158,7 @@
               </a:rPr>
               <a:t>How to validate</a:t>
             </a:r>
-            <a:endParaRPr lang="en-US" sz="1300" dirty="0"/>
+            <a:endParaRPr lang="en-US" sz="1220" dirty="0"/>
           </a:p>
         </p:txBody>
       </p:sp>
@@ -8168,8 +8170,8 @@
         </p:nvSpPr>
         <p:spPr>
           <a:xfrm>
-            <a:off x="7799832" y="4659782"/>
-            <a:ext cx="3145536" cy="899770"/>
+            <a:off x="7708392" y="4828032"/>
+            <a:ext cx="3282696" cy="749808"/>
           </a:xfrm>
           <a:prstGeom prst="rect">
             <a:avLst/>
@@ -8187,7 +8189,7 @@
               <a:buNone/>
             </a:pPr>
             <a:r>
-              <a:rPr lang="en-US" sz="1320" dirty="0">
+              <a:rPr lang="en-US" sz="1220" dirty="0">
                 <a:solidFill>
                   <a:srgbClr val="17364A"/>
                 </a:solidFill>
@@ -8195,9 +8197,9 @@
                 <a:ea typeface="Aptos" pitchFamily="34" charset="-122"/>
                 <a:cs typeface="Aptos" pitchFamily="34" charset="-120"/>
               </a:rPr>
-              <a:t>Connect the concept to data quality, model performance, validation evidence, monitoring measures, and decisions that remain under human control.</a:t>
-            </a:r>
-            <a:endParaRPr lang="en-US" sz="1320" dirty="0"/>
+              <a:t>Connect the concept to data quality, model performance, validation evidence,.</a:t>
+            </a:r>
+            <a:endParaRPr lang="en-US" sz="1220" dirty="0"/>
           </a:p>
         </p:txBody>
       </p:sp>
@@ -8488,8 +8490,8 @@
         </p:nvSpPr>
         <p:spPr>
           <a:xfrm>
-            <a:off x="868680" y="1508760"/>
-            <a:ext cx="6309360" cy="4160520"/>
+            <a:off x="822960" y="1463040"/>
+            <a:ext cx="6565392" cy="4343400"/>
           </a:xfrm>
           <a:prstGeom prst="rect">
             <a:avLst/>
@@ -8507,7 +8509,7 @@
               <a:buNone/>
             </a:pPr>
             <a:r>
-              <a:rPr lang="en-US" sz="2100" dirty="0">
+              <a:rPr lang="en-US" sz="1920" dirty="0">
                 <a:solidFill>
                   <a:srgbClr val="003A63"/>
                 </a:solidFill>
@@ -8515,16 +8517,16 @@
                 <a:ea typeface="Aptos" pitchFamily="34" charset="-122"/>
                 <a:cs typeface="Aptos" pitchFamily="34" charset="-120"/>
               </a:rPr>
-              <a:t>• Create a generative AI output evaluation rubric for one public health use case.</a:t>
-            </a:r>
-            <a:endParaRPr lang="en-US" sz="2100" dirty="0"/>
-          </a:p>
-          <a:p>
-            <a:pPr indent="0" marL="0">
-              <a:buNone/>
-            </a:pPr>
-            <a:r>
-              <a:rPr lang="en-US" sz="2100" dirty="0">
+              <a:t>• Create a generative AI output evaluation rubric for one public health use.</a:t>
+            </a:r>
+            <a:endParaRPr lang="en-US" sz="1920" dirty="0"/>
+          </a:p>
+          <a:p>
+            <a:pPr indent="0" marL="0">
+              <a:buNone/>
+            </a:pPr>
+            <a:r>
+              <a:rPr lang="en-US" sz="1920" dirty="0">
                 <a:solidFill>
                   <a:srgbClr val="003A63"/>
                 </a:solidFill>
@@ -8532,16 +8534,16 @@
                 <a:ea typeface="Aptos" pitchFamily="34" charset="-122"/>
                 <a:cs typeface="Aptos" pitchFamily="34" charset="-120"/>
               </a:rPr>
-              <a:t>• Include intended use, source verification, factuality, completeness, unsupported claims,.</a:t>
-            </a:r>
-            <a:endParaRPr lang="en-US" sz="2100" dirty="0"/>
-          </a:p>
-          <a:p>
-            <a:pPr indent="0" marL="0">
-              <a:buNone/>
-            </a:pPr>
-            <a:r>
-              <a:rPr lang="en-US" sz="2100" dirty="0">
+              <a:t>• Include intended use, source verification, factuality, completeness,.</a:t>
+            </a:r>
+            <a:endParaRPr lang="en-US" sz="1920" dirty="0"/>
+          </a:p>
+          <a:p>
+            <a:pPr indent="0" marL="0">
+              <a:buNone/>
+            </a:pPr>
+            <a:r>
+              <a:rPr lang="en-US" sz="1920" dirty="0">
                 <a:solidFill>
                   <a:srgbClr val="003A63"/>
                 </a:solidFill>
@@ -8549,9 +8551,9 @@
                 <a:ea typeface="Aptos" pitchFamily="34" charset="-122"/>
                 <a:cs typeface="Aptos" pitchFamily="34" charset="-120"/>
               </a:rPr>
-              <a:t>• Then apply the rubric to a sample AI-generated output and document whether the output should be.</a:t>
-            </a:r>
-            <a:endParaRPr lang="en-US" sz="2100" dirty="0"/>
+              <a:t>• Then apply the rubric to a sample AI-generated output and document whether.</a:t>
+            </a:r>
+            <a:endParaRPr lang="en-US" sz="1920" dirty="0"/>
           </a:p>
         </p:txBody>
       </p:sp>
@@ -8563,12 +8565,12 @@
         </p:nvSpPr>
         <p:spPr>
           <a:xfrm>
-            <a:off x="7635240" y="1325880"/>
-            <a:ext cx="3474720" cy="1207008"/>
+            <a:off x="7543800" y="1325880"/>
+            <a:ext cx="3611880" cy="1261872"/>
           </a:xfrm>
           <a:prstGeom prst="roundRect">
             <a:avLst>
-              <a:gd name="adj" fmla="val 9091"/>
+              <a:gd name="adj" fmla="val 8696"/>
             </a:avLst>
           </a:prstGeom>
           <a:solidFill>
@@ -8590,8 +8592,8 @@
         </p:nvSpPr>
         <p:spPr>
           <a:xfrm>
-            <a:off x="7799832" y="1472184"/>
-            <a:ext cx="3145536" cy="256032"/>
+            <a:off x="7708392" y="1453896"/>
+            <a:ext cx="3282696" cy="228600"/>
           </a:xfrm>
           <a:prstGeom prst="rect">
             <a:avLst/>
@@ -8607,7 +8609,7 @@
               <a:buNone/>
             </a:pPr>
             <a:r>
-              <a:rPr lang="en-US" sz="1300" b="1" dirty="0">
+              <a:rPr lang="en-US" sz="1220" b="1" dirty="0">
                 <a:solidFill>
                   <a:srgbClr val="0068B7"/>
                 </a:solidFill>
@@ -8617,7 +8619,7 @@
               </a:rPr>
               <a:t>Data decision</a:t>
             </a:r>
-            <a:endParaRPr lang="en-US" sz="1300" dirty="0"/>
+            <a:endParaRPr lang="en-US" sz="1220" dirty="0"/>
           </a:p>
         </p:txBody>
       </p:sp>
@@ -8629,8 +8631,8 @@
         </p:nvSpPr>
         <p:spPr>
           <a:xfrm>
-            <a:off x="7799832" y="1801368"/>
-            <a:ext cx="3145536" cy="640080"/>
+            <a:off x="7708392" y="1764792"/>
+            <a:ext cx="3282696" cy="749808"/>
           </a:xfrm>
           <a:prstGeom prst="rect">
             <a:avLst/>
@@ -8648,7 +8650,7 @@
               <a:buNone/>
             </a:pPr>
             <a:r>
-              <a:rPr lang="en-US" sz="1320" dirty="0">
+              <a:rPr lang="en-US" sz="1220" dirty="0">
                 <a:solidFill>
                   <a:srgbClr val="17364A"/>
                 </a:solidFill>
@@ -8658,7 +8660,7 @@
               </a:rPr>
               <a:t>Create a generative AI output evaluation rubric for one public health use case.</a:t>
             </a:r>
-            <a:endParaRPr lang="en-US" sz="1320" dirty="0"/>
+            <a:endParaRPr lang="en-US" sz="1220" dirty="0"/>
           </a:p>
         </p:txBody>
       </p:sp>
@@ -8670,12 +8672,12 @@
         </p:nvSpPr>
         <p:spPr>
           <a:xfrm>
-            <a:off x="7635240" y="2670048"/>
-            <a:ext cx="3474720" cy="1377086"/>
+            <a:off x="7543800" y="2724912"/>
+            <a:ext cx="3611880" cy="1527048"/>
           </a:xfrm>
           <a:prstGeom prst="roundRect">
             <a:avLst>
-              <a:gd name="adj" fmla="val 7968"/>
+              <a:gd name="adj" fmla="val 7186"/>
             </a:avLst>
           </a:prstGeom>
           <a:solidFill>
@@ -8697,8 +8699,8 @@
         </p:nvSpPr>
         <p:spPr>
           <a:xfrm>
-            <a:off x="7799832" y="2816352"/>
-            <a:ext cx="3145536" cy="256032"/>
+            <a:off x="7708392" y="2852928"/>
+            <a:ext cx="3282696" cy="228600"/>
           </a:xfrm>
           <a:prstGeom prst="rect">
             <a:avLst/>
@@ -8714,7 +8716,7 @@
               <a:buNone/>
             </a:pPr>
             <a:r>
-              <a:rPr lang="en-US" sz="1300" b="1" dirty="0">
+              <a:rPr lang="en-US" sz="1220" b="1" dirty="0">
                 <a:solidFill>
                   <a:srgbClr val="0068B7"/>
                 </a:solidFill>
@@ -8724,7 +8726,7 @@
               </a:rPr>
               <a:t>Concept checkpoints</a:t>
             </a:r>
-            <a:endParaRPr lang="en-US" sz="1300" dirty="0"/>
+            <a:endParaRPr lang="en-US" sz="1220" dirty="0"/>
           </a:p>
         </p:txBody>
       </p:sp>
@@ -8736,8 +8738,8 @@
         </p:nvSpPr>
         <p:spPr>
           <a:xfrm>
-            <a:off x="7818120" y="3182112"/>
-            <a:ext cx="3090672" cy="718718"/>
+            <a:off x="7726680" y="3182112"/>
+            <a:ext cx="3227832" cy="960120"/>
           </a:xfrm>
           <a:prstGeom prst="rect">
             <a:avLst/>
@@ -8755,7 +8757,7 @@
               <a:buNone/>
             </a:pPr>
             <a:r>
-              <a:rPr lang="en-US" sz="1220" dirty="0">
+              <a:rPr lang="en-US" sz="1140" dirty="0">
                 <a:solidFill>
                   <a:srgbClr val="17364A"/>
                 </a:solidFill>
@@ -8763,16 +8765,16 @@
                 <a:ea typeface="Aptos" pitchFamily="34" charset="-122"/>
                 <a:cs typeface="Aptos" pitchFamily="34" charset="-120"/>
               </a:rPr>
-              <a:t>Include intended use, source verification, factuality,.</a:t>
-            </a:r>
-            <a:endParaRPr lang="en-US" sz="1220" dirty="0"/>
-          </a:p>
-          <a:p>
-            <a:pPr indent="0" marL="0">
-              <a:buNone/>
-            </a:pPr>
-            <a:r>
-              <a:rPr lang="en-US" sz="1220" dirty="0">
+              <a:t>Include intended use, source verification,.</a:t>
+            </a:r>
+            <a:endParaRPr lang="en-US" sz="1140" dirty="0"/>
+          </a:p>
+          <a:p>
+            <a:pPr indent="0" marL="0">
+              <a:buNone/>
+            </a:pPr>
+            <a:r>
+              <a:rPr lang="en-US" sz="1140" dirty="0">
                 <a:solidFill>
                   <a:srgbClr val="17364A"/>
                 </a:solidFill>
@@ -8780,9 +8782,9 @@
                 <a:ea typeface="Aptos" pitchFamily="34" charset="-122"/>
                 <a:cs typeface="Aptos" pitchFamily="34" charset="-120"/>
               </a:rPr>
-              <a:t>Then apply the rubric to a sample AI-generated output and document.</a:t>
-            </a:r>
-            <a:endParaRPr lang="en-US" sz="1220" dirty="0"/>
+              <a:t>Then apply the rubric to a sample AI-generated.</a:t>
+            </a:r>
+            <a:endParaRPr lang="en-US" sz="1140" dirty="0"/>
           </a:p>
         </p:txBody>
       </p:sp>
@@ -8794,12 +8796,12 @@
         </p:nvSpPr>
         <p:spPr>
           <a:xfrm>
-            <a:off x="7635240" y="4184294"/>
-            <a:ext cx="3474720" cy="1466698"/>
+            <a:off x="7543800" y="4389120"/>
+            <a:ext cx="3611880" cy="1261872"/>
           </a:xfrm>
           <a:prstGeom prst="roundRect">
             <a:avLst>
-              <a:gd name="adj" fmla="val 7481"/>
+              <a:gd name="adj" fmla="val 8696"/>
             </a:avLst>
           </a:prstGeom>
           <a:solidFill>
@@ -8821,8 +8823,8 @@
         </p:nvSpPr>
         <p:spPr>
           <a:xfrm>
-            <a:off x="7799832" y="4330598"/>
-            <a:ext cx="3145536" cy="256032"/>
+            <a:off x="7708392" y="4517136"/>
+            <a:ext cx="3282696" cy="228600"/>
           </a:xfrm>
           <a:prstGeom prst="rect">
             <a:avLst/>
@@ -8838,7 +8840,7 @@
               <a:buNone/>
             </a:pPr>
             <a:r>
-              <a:rPr lang="en-US" sz="1300" b="1" dirty="0">
+              <a:rPr lang="en-US" sz="1220" b="1" dirty="0">
                 <a:solidFill>
                   <a:srgbClr val="0068B7"/>
                 </a:solidFill>
@@ -8848,7 +8850,7 @@
               </a:rPr>
               <a:t>How to validate</a:t>
             </a:r>
-            <a:endParaRPr lang="en-US" sz="1300" dirty="0"/>
+            <a:endParaRPr lang="en-US" sz="1220" dirty="0"/>
           </a:p>
         </p:txBody>
       </p:sp>
@@ -8860,8 +8862,8 @@
         </p:nvSpPr>
         <p:spPr>
           <a:xfrm>
-            <a:off x="7799832" y="4659782"/>
-            <a:ext cx="3145536" cy="899770"/>
+            <a:off x="7708392" y="4828032"/>
+            <a:ext cx="3282696" cy="749808"/>
           </a:xfrm>
           <a:prstGeom prst="rect">
             <a:avLst/>
@@ -8879,7 +8881,7 @@
               <a:buNone/>
             </a:pPr>
             <a:r>
-              <a:rPr lang="en-US" sz="1320" dirty="0">
+              <a:rPr lang="en-US" sz="1220" dirty="0">
                 <a:solidFill>
                   <a:srgbClr val="17364A"/>
                 </a:solidFill>
@@ -8887,9 +8889,9 @@
                 <a:ea typeface="Aptos" pitchFamily="34" charset="-122"/>
                 <a:cs typeface="Aptos" pitchFamily="34" charset="-120"/>
               </a:rPr>
-              <a:t>Use the assignment to test whether you can explain the concept, apply it to a realistic public health situation, and identify what would need review before the work moves forward.</a:t>
-            </a:r>
-            <a:endParaRPr lang="en-US" sz="1320" dirty="0"/>
+              <a:t>Use the assignment to test whether you can explain the concept, apply it to a.</a:t>
+            </a:r>
+            <a:endParaRPr lang="en-US" sz="1220" dirty="0"/>
           </a:p>
         </p:txBody>
       </p:sp>
@@ -9180,8 +9182,8 @@
         </p:nvSpPr>
         <p:spPr>
           <a:xfrm>
-            <a:off x="868680" y="1508760"/>
-            <a:ext cx="6309360" cy="4160520"/>
+            <a:off x="822960" y="1463040"/>
+            <a:ext cx="6565392" cy="4343400"/>
           </a:xfrm>
           <a:prstGeom prst="rect">
             <a:avLst/>
@@ -9199,7 +9201,7 @@
               <a:buNone/>
             </a:pPr>
             <a:r>
-              <a:rPr lang="en-US" sz="2100" dirty="0">
+              <a:rPr lang="en-US" sz="1920" dirty="0">
                 <a:solidFill>
                   <a:srgbClr val="003A63"/>
                 </a:solidFill>
@@ -9209,14 +9211,14 @@
               </a:rPr>
               <a:t>• Generative AI output evaluation rubric</a:t>
             </a:r>
-            <a:endParaRPr lang="en-US" sz="2100" dirty="0"/>
-          </a:p>
-          <a:p>
-            <a:pPr indent="0" marL="0">
-              <a:buNone/>
-            </a:pPr>
-            <a:r>
-              <a:rPr lang="en-US" sz="2100" dirty="0">
+            <a:endParaRPr lang="en-US" sz="1920" dirty="0"/>
+          </a:p>
+          <a:p>
+            <a:pPr indent="0" marL="0">
+              <a:buNone/>
+            </a:pPr>
+            <a:r>
+              <a:rPr lang="en-US" sz="1920" dirty="0">
                 <a:solidFill>
                   <a:srgbClr val="003A63"/>
                 </a:solidFill>
@@ -9226,14 +9228,14 @@
               </a:rPr>
               <a:t>• Completed sample review</a:t>
             </a:r>
-            <a:endParaRPr lang="en-US" sz="2100" dirty="0"/>
-          </a:p>
-          <a:p>
-            <a:pPr indent="0" marL="0">
-              <a:buNone/>
-            </a:pPr>
-            <a:r>
-              <a:rPr lang="en-US" sz="2100" dirty="0">
+            <a:endParaRPr lang="en-US" sz="1920" dirty="0"/>
+          </a:p>
+          <a:p>
+            <a:pPr indent="0" marL="0">
+              <a:buNone/>
+            </a:pPr>
+            <a:r>
+              <a:rPr lang="en-US" sz="1920" dirty="0">
                 <a:solidFill>
                   <a:srgbClr val="003A63"/>
                 </a:solidFill>
@@ -9243,7 +9245,7 @@
               </a:rPr>
               <a:t>• Source verification notes</a:t>
             </a:r>
-            <a:endParaRPr lang="en-US" sz="2100" dirty="0"/>
+            <a:endParaRPr lang="en-US" sz="1920" dirty="0"/>
           </a:p>
         </p:txBody>
       </p:sp>
@@ -9255,12 +9257,12 @@
         </p:nvSpPr>
         <p:spPr>
           <a:xfrm>
-            <a:off x="7635240" y="1325880"/>
-            <a:ext cx="3474720" cy="1207008"/>
+            <a:off x="7543800" y="1325880"/>
+            <a:ext cx="3611880" cy="1261872"/>
           </a:xfrm>
           <a:prstGeom prst="roundRect">
             <a:avLst>
-              <a:gd name="adj" fmla="val 9091"/>
+              <a:gd name="adj" fmla="val 8696"/>
             </a:avLst>
           </a:prstGeom>
           <a:solidFill>
@@ -9282,8 +9284,8 @@
         </p:nvSpPr>
         <p:spPr>
           <a:xfrm>
-            <a:off x="7799832" y="1472184"/>
-            <a:ext cx="3145536" cy="256032"/>
+            <a:off x="7708392" y="1453896"/>
+            <a:ext cx="3282696" cy="228600"/>
           </a:xfrm>
           <a:prstGeom prst="rect">
             <a:avLst/>
@@ -9299,7 +9301,7 @@
               <a:buNone/>
             </a:pPr>
             <a:r>
-              <a:rPr lang="en-US" sz="1300" b="1" dirty="0">
+              <a:rPr lang="en-US" sz="1220" b="1" dirty="0">
                 <a:solidFill>
                   <a:srgbClr val="0068B7"/>
                 </a:solidFill>
@@ -9309,7 +9311,7 @@
               </a:rPr>
               <a:t>Data decision</a:t>
             </a:r>
-            <a:endParaRPr lang="en-US" sz="1300" dirty="0"/>
+            <a:endParaRPr lang="en-US" sz="1220" dirty="0"/>
           </a:p>
         </p:txBody>
       </p:sp>
@@ -9321,8 +9323,8 @@
         </p:nvSpPr>
         <p:spPr>
           <a:xfrm>
-            <a:off x="7799832" y="1801368"/>
-            <a:ext cx="3145536" cy="640080"/>
+            <a:off x="7708392" y="1764792"/>
+            <a:ext cx="3282696" cy="749808"/>
           </a:xfrm>
           <a:prstGeom prst="rect">
             <a:avLst/>
@@ -9340,7 +9342,7 @@
               <a:buNone/>
             </a:pPr>
             <a:r>
-              <a:rPr lang="en-US" sz="1320" dirty="0">
+              <a:rPr lang="en-US" sz="1220" dirty="0">
                 <a:solidFill>
                   <a:srgbClr val="17364A"/>
                 </a:solidFill>
@@ -9350,7 +9352,7 @@
               </a:rPr>
               <a:t>Generative AI output evaluation rubric</a:t>
             </a:r>
-            <a:endParaRPr lang="en-US" sz="1320" dirty="0"/>
+            <a:endParaRPr lang="en-US" sz="1220" dirty="0"/>
           </a:p>
         </p:txBody>
       </p:sp>
@@ -9362,12 +9364,12 @@
         </p:nvSpPr>
         <p:spPr>
           <a:xfrm>
-            <a:off x="7635240" y="2670048"/>
-            <a:ext cx="3474720" cy="1377086"/>
+            <a:off x="7543800" y="2724912"/>
+            <a:ext cx="3611880" cy="1527048"/>
           </a:xfrm>
           <a:prstGeom prst="roundRect">
             <a:avLst>
-              <a:gd name="adj" fmla="val 7968"/>
+              <a:gd name="adj" fmla="val 7186"/>
             </a:avLst>
           </a:prstGeom>
           <a:solidFill>
@@ -9389,8 +9391,8 @@
         </p:nvSpPr>
         <p:spPr>
           <a:xfrm>
-            <a:off x="7799832" y="2816352"/>
-            <a:ext cx="3145536" cy="256032"/>
+            <a:off x="7708392" y="2852928"/>
+            <a:ext cx="3282696" cy="228600"/>
           </a:xfrm>
           <a:prstGeom prst="rect">
             <a:avLst/>
@@ -9406,7 +9408,7 @@
               <a:buNone/>
             </a:pPr>
             <a:r>
-              <a:rPr lang="en-US" sz="1300" b="1" dirty="0">
+              <a:rPr lang="en-US" sz="1220" b="1" dirty="0">
                 <a:solidFill>
                   <a:srgbClr val="0068B7"/>
                 </a:solidFill>
@@ -9416,7 +9418,7 @@
               </a:rPr>
               <a:t>Concept checkpoints</a:t>
             </a:r>
-            <a:endParaRPr lang="en-US" sz="1300" dirty="0"/>
+            <a:endParaRPr lang="en-US" sz="1220" dirty="0"/>
           </a:p>
         </p:txBody>
       </p:sp>
@@ -9428,8 +9430,8 @@
         </p:nvSpPr>
         <p:spPr>
           <a:xfrm>
-            <a:off x="7818120" y="3182112"/>
-            <a:ext cx="3090672" cy="718718"/>
+            <a:off x="7726680" y="3182112"/>
+            <a:ext cx="3227832" cy="960120"/>
           </a:xfrm>
           <a:prstGeom prst="rect">
             <a:avLst/>
@@ -9447,7 +9449,7 @@
               <a:buNone/>
             </a:pPr>
             <a:r>
-              <a:rPr lang="en-US" sz="1220" dirty="0">
+              <a:rPr lang="en-US" sz="1140" dirty="0">
                 <a:solidFill>
                   <a:srgbClr val="17364A"/>
                 </a:solidFill>
@@ -9457,14 +9459,14 @@
               </a:rPr>
               <a:t>Generative AI output evaluation rubric</a:t>
             </a:r>
-            <a:endParaRPr lang="en-US" sz="1220" dirty="0"/>
-          </a:p>
-          <a:p>
-            <a:pPr indent="0" marL="0">
-              <a:buNone/>
-            </a:pPr>
-            <a:r>
-              <a:rPr lang="en-US" sz="1220" dirty="0">
+            <a:endParaRPr lang="en-US" sz="1140" dirty="0"/>
+          </a:p>
+          <a:p>
+            <a:pPr indent="0" marL="0">
+              <a:buNone/>
+            </a:pPr>
+            <a:r>
+              <a:rPr lang="en-US" sz="1140" dirty="0">
                 <a:solidFill>
                   <a:srgbClr val="17364A"/>
                 </a:solidFill>
@@ -9474,14 +9476,14 @@
               </a:rPr>
               <a:t>Completed sample review</a:t>
             </a:r>
-            <a:endParaRPr lang="en-US" sz="1220" dirty="0"/>
-          </a:p>
-          <a:p>
-            <a:pPr indent="0" marL="0">
-              <a:buNone/>
-            </a:pPr>
-            <a:r>
-              <a:rPr lang="en-US" sz="1220" dirty="0">
+            <a:endParaRPr lang="en-US" sz="1140" dirty="0"/>
+          </a:p>
+          <a:p>
+            <a:pPr indent="0" marL="0">
+              <a:buNone/>
+            </a:pPr>
+            <a:r>
+              <a:rPr lang="en-US" sz="1140" dirty="0">
                 <a:solidFill>
                   <a:srgbClr val="17364A"/>
                 </a:solidFill>
@@ -9491,7 +9493,7 @@
               </a:rPr>
               <a:t>Source verification notes</a:t>
             </a:r>
-            <a:endParaRPr lang="en-US" sz="1220" dirty="0"/>
+            <a:endParaRPr lang="en-US" sz="1140" dirty="0"/>
           </a:p>
         </p:txBody>
       </p:sp>
@@ -9503,12 +9505,12 @@
         </p:nvSpPr>
         <p:spPr>
           <a:xfrm>
-            <a:off x="7635240" y="4184294"/>
-            <a:ext cx="3474720" cy="1466698"/>
+            <a:off x="7543800" y="4389120"/>
+            <a:ext cx="3611880" cy="1261872"/>
           </a:xfrm>
           <a:prstGeom prst="roundRect">
             <a:avLst>
-              <a:gd name="adj" fmla="val 7481"/>
+              <a:gd name="adj" fmla="val 8696"/>
             </a:avLst>
           </a:prstGeom>
           <a:solidFill>
@@ -9530,8 +9532,8 @@
         </p:nvSpPr>
         <p:spPr>
           <a:xfrm>
-            <a:off x="7799832" y="4330598"/>
-            <a:ext cx="3145536" cy="256032"/>
+            <a:off x="7708392" y="4517136"/>
+            <a:ext cx="3282696" cy="228600"/>
           </a:xfrm>
           <a:prstGeom prst="rect">
             <a:avLst/>
@@ -9547,7 +9549,7 @@
               <a:buNone/>
             </a:pPr>
             <a:r>
-              <a:rPr lang="en-US" sz="1300" b="1" dirty="0">
+              <a:rPr lang="en-US" sz="1220" b="1" dirty="0">
                 <a:solidFill>
                   <a:srgbClr val="0068B7"/>
                 </a:solidFill>
@@ -9557,7 +9559,7 @@
               </a:rPr>
               <a:t>How to validate</a:t>
             </a:r>
-            <a:endParaRPr lang="en-US" sz="1300" dirty="0"/>
+            <a:endParaRPr lang="en-US" sz="1220" dirty="0"/>
           </a:p>
         </p:txBody>
       </p:sp>
@@ -9569,8 +9571,8 @@
         </p:nvSpPr>
         <p:spPr>
           <a:xfrm>
-            <a:off x="7799832" y="4659782"/>
-            <a:ext cx="3145536" cy="899770"/>
+            <a:off x="7708392" y="4828032"/>
+            <a:ext cx="3282696" cy="749808"/>
           </a:xfrm>
           <a:prstGeom prst="rect">
             <a:avLst/>
@@ -9588,7 +9590,7 @@
               <a:buNone/>
             </a:pPr>
             <a:r>
-              <a:rPr lang="en-US" sz="1320" dirty="0">
+              <a:rPr lang="en-US" sz="1220" dirty="0">
                 <a:solidFill>
                   <a:srgbClr val="17364A"/>
                 </a:solidFill>
@@ -9596,9 +9598,9 @@
                 <a:ea typeface="Aptos" pitchFamily="34" charset="-122"/>
                 <a:cs typeface="Aptos" pitchFamily="34" charset="-120"/>
               </a:rPr>
-              <a:t>Connect the concept to data quality, model performance, validation evidence, monitoring measures, and decisions that remain under human control.</a:t>
-            </a:r>
-            <a:endParaRPr lang="en-US" sz="1320" dirty="0"/>
+              <a:t>Connect the concept to data quality, model performance, validation evidence,.</a:t>
+            </a:r>
+            <a:endParaRPr lang="en-US" sz="1220" dirty="0"/>
           </a:p>
         </p:txBody>
       </p:sp>
@@ -9889,8 +9891,8 @@
         </p:nvSpPr>
         <p:spPr>
           <a:xfrm>
-            <a:off x="868680" y="1508760"/>
-            <a:ext cx="6309360" cy="4160520"/>
+            <a:off x="822960" y="1463040"/>
+            <a:ext cx="6565392" cy="4343400"/>
           </a:xfrm>
           <a:prstGeom prst="rect">
             <a:avLst/>
@@ -9908,7 +9910,7 @@
               <a:buNone/>
             </a:pPr>
             <a:r>
-              <a:rPr lang="en-US" sz="2100" dirty="0">
+              <a:rPr lang="en-US" sz="1920" dirty="0">
                 <a:solidFill>
                   <a:srgbClr val="003A63"/>
                 </a:solidFill>
@@ -9918,7 +9920,7 @@
               </a:rPr>
               <a:t>• Approval or escalation documentation</a:t>
             </a:r>
-            <a:endParaRPr lang="en-US" sz="2100" dirty="0"/>
+            <a:endParaRPr lang="en-US" sz="1920" dirty="0"/>
           </a:p>
         </p:txBody>
       </p:sp>
@@ -9930,12 +9932,12 @@
         </p:nvSpPr>
         <p:spPr>
           <a:xfrm>
-            <a:off x="7635240" y="1325880"/>
-            <a:ext cx="3474720" cy="1207008"/>
+            <a:off x="7543800" y="1325880"/>
+            <a:ext cx="3611880" cy="1261872"/>
           </a:xfrm>
           <a:prstGeom prst="roundRect">
             <a:avLst>
-              <a:gd name="adj" fmla="val 9091"/>
+              <a:gd name="adj" fmla="val 8696"/>
             </a:avLst>
           </a:prstGeom>
           <a:solidFill>
@@ -9957,8 +9959,8 @@
         </p:nvSpPr>
         <p:spPr>
           <a:xfrm>
-            <a:off x="7799832" y="1472184"/>
-            <a:ext cx="3145536" cy="256032"/>
+            <a:off x="7708392" y="1453896"/>
+            <a:ext cx="3282696" cy="228600"/>
           </a:xfrm>
           <a:prstGeom prst="rect">
             <a:avLst/>
@@ -9974,7 +9976,7 @@
               <a:buNone/>
             </a:pPr>
             <a:r>
-              <a:rPr lang="en-US" sz="1300" b="1" dirty="0">
+              <a:rPr lang="en-US" sz="1220" b="1" dirty="0">
                 <a:solidFill>
                   <a:srgbClr val="0068B7"/>
                 </a:solidFill>
@@ -9984,7 +9986,7 @@
               </a:rPr>
               <a:t>Data decision</a:t>
             </a:r>
-            <a:endParaRPr lang="en-US" sz="1300" dirty="0"/>
+            <a:endParaRPr lang="en-US" sz="1220" dirty="0"/>
           </a:p>
         </p:txBody>
       </p:sp>
@@ -9996,8 +9998,8 @@
         </p:nvSpPr>
         <p:spPr>
           <a:xfrm>
-            <a:off x="7799832" y="1801368"/>
-            <a:ext cx="3145536" cy="640080"/>
+            <a:off x="7708392" y="1764792"/>
+            <a:ext cx="3282696" cy="749808"/>
           </a:xfrm>
           <a:prstGeom prst="rect">
             <a:avLst/>
@@ -10015,7 +10017,7 @@
               <a:buNone/>
             </a:pPr>
             <a:r>
-              <a:rPr lang="en-US" sz="1320" dirty="0">
+              <a:rPr lang="en-US" sz="1220" dirty="0">
                 <a:solidFill>
                   <a:srgbClr val="17364A"/>
                 </a:solidFill>
@@ -10025,7 +10027,7 @@
               </a:rPr>
               <a:t>Approval or escalation documentation</a:t>
             </a:r>
-            <a:endParaRPr lang="en-US" sz="1320" dirty="0"/>
+            <a:endParaRPr lang="en-US" sz="1220" dirty="0"/>
           </a:p>
         </p:txBody>
       </p:sp>
@@ -10037,12 +10039,12 @@
         </p:nvSpPr>
         <p:spPr>
           <a:xfrm>
-            <a:off x="7635240" y="2670048"/>
-            <a:ext cx="3474720" cy="1377086"/>
+            <a:off x="7543800" y="2724912"/>
+            <a:ext cx="3611880" cy="1527048"/>
           </a:xfrm>
           <a:prstGeom prst="roundRect">
             <a:avLst>
-              <a:gd name="adj" fmla="val 7968"/>
+              <a:gd name="adj" fmla="val 7186"/>
             </a:avLst>
           </a:prstGeom>
           <a:solidFill>
@@ -10064,8 +10066,8 @@
         </p:nvSpPr>
         <p:spPr>
           <a:xfrm>
-            <a:off x="7799832" y="2816352"/>
-            <a:ext cx="3145536" cy="256032"/>
+            <a:off x="7708392" y="2852928"/>
+            <a:ext cx="3282696" cy="228600"/>
           </a:xfrm>
           <a:prstGeom prst="rect">
             <a:avLst/>
@@ -10081,7 +10083,7 @@
               <a:buNone/>
             </a:pPr>
             <a:r>
-              <a:rPr lang="en-US" sz="1300" b="1" dirty="0">
+              <a:rPr lang="en-US" sz="1220" b="1" dirty="0">
                 <a:solidFill>
                   <a:srgbClr val="0068B7"/>
                 </a:solidFill>
@@ -10091,7 +10093,7 @@
               </a:rPr>
               <a:t>Concept checkpoints</a:t>
             </a:r>
-            <a:endParaRPr lang="en-US" sz="1300" dirty="0"/>
+            <a:endParaRPr lang="en-US" sz="1220" dirty="0"/>
           </a:p>
         </p:txBody>
       </p:sp>
@@ -10103,8 +10105,8 @@
         </p:nvSpPr>
         <p:spPr>
           <a:xfrm>
-            <a:off x="7818120" y="3182112"/>
-            <a:ext cx="3090672" cy="718718"/>
+            <a:off x="7726680" y="3182112"/>
+            <a:ext cx="3227832" cy="960120"/>
           </a:xfrm>
           <a:prstGeom prst="rect">
             <a:avLst/>
@@ -10122,7 +10124,7 @@
               <a:buNone/>
             </a:pPr>
             <a:r>
-              <a:rPr lang="en-US" sz="1220" dirty="0">
+              <a:rPr lang="en-US" sz="1140" dirty="0">
                 <a:solidFill>
                   <a:srgbClr val="17364A"/>
                 </a:solidFill>
@@ -10132,7 +10134,7 @@
               </a:rPr>
               <a:t>Approval or escalation documentation</a:t>
             </a:r>
-            <a:endParaRPr lang="en-US" sz="1220" dirty="0"/>
+            <a:endParaRPr lang="en-US" sz="1140" dirty="0"/>
           </a:p>
         </p:txBody>
       </p:sp>
@@ -10144,12 +10146,12 @@
         </p:nvSpPr>
         <p:spPr>
           <a:xfrm>
-            <a:off x="7635240" y="4184294"/>
-            <a:ext cx="3474720" cy="1466698"/>
+            <a:off x="7543800" y="4389120"/>
+            <a:ext cx="3611880" cy="1261872"/>
           </a:xfrm>
           <a:prstGeom prst="roundRect">
             <a:avLst>
-              <a:gd name="adj" fmla="val 7481"/>
+              <a:gd name="adj" fmla="val 8696"/>
             </a:avLst>
           </a:prstGeom>
           <a:solidFill>
@@ -10171,8 +10173,8 @@
         </p:nvSpPr>
         <p:spPr>
           <a:xfrm>
-            <a:off x="7799832" y="4330598"/>
-            <a:ext cx="3145536" cy="256032"/>
+            <a:off x="7708392" y="4517136"/>
+            <a:ext cx="3282696" cy="228600"/>
           </a:xfrm>
           <a:prstGeom prst="rect">
             <a:avLst/>
@@ -10188,7 +10190,7 @@
               <a:buNone/>
             </a:pPr>
             <a:r>
-              <a:rPr lang="en-US" sz="1300" b="1" dirty="0">
+              <a:rPr lang="en-US" sz="1220" b="1" dirty="0">
                 <a:solidFill>
                   <a:srgbClr val="0068B7"/>
                 </a:solidFill>
@@ -10198,7 +10200,7 @@
               </a:rPr>
               <a:t>How to validate</a:t>
             </a:r>
-            <a:endParaRPr lang="en-US" sz="1300" dirty="0"/>
+            <a:endParaRPr lang="en-US" sz="1220" dirty="0"/>
           </a:p>
         </p:txBody>
       </p:sp>
@@ -10210,8 +10212,8 @@
         </p:nvSpPr>
         <p:spPr>
           <a:xfrm>
-            <a:off x="7799832" y="4659782"/>
-            <a:ext cx="3145536" cy="899770"/>
+            <a:off x="7708392" y="4828032"/>
+            <a:ext cx="3282696" cy="749808"/>
           </a:xfrm>
           <a:prstGeom prst="rect">
             <a:avLst/>
@@ -10229,7 +10231,7 @@
               <a:buNone/>
             </a:pPr>
             <a:r>
-              <a:rPr lang="en-US" sz="1320" dirty="0">
+              <a:rPr lang="en-US" sz="1220" dirty="0">
                 <a:solidFill>
                   <a:srgbClr val="17364A"/>
                 </a:solidFill>
@@ -10237,9 +10239,9 @@
                 <a:ea typeface="Aptos" pitchFamily="34" charset="-122"/>
                 <a:cs typeface="Aptos" pitchFamily="34" charset="-120"/>
               </a:rPr>
-              <a:t>Connect the concept to data quality, model performance, validation evidence, monitoring measures, and decisions that remain under human control.</a:t>
-            </a:r>
-            <a:endParaRPr lang="en-US" sz="1320" dirty="0"/>
+              <a:t>Connect the concept to data quality, model performance, validation evidence,.</a:t>
+            </a:r>
+            <a:endParaRPr lang="en-US" sz="1220" dirty="0"/>
           </a:p>
         </p:txBody>
       </p:sp>
@@ -10557,7 +10559,7 @@
                 <a:ea typeface="Aptos" pitchFamily="34" charset="-122"/>
                 <a:cs typeface="Aptos" pitchFamily="34" charset="-120"/>
               </a:rPr>
-              <a:t>• Generative AI can draft, summarize, translate, classify, explain, and synthesize information,.</a:t>
+              <a:t>• Generative AI can draft, summarize, translate, classify, explain, and.</a:t>
             </a:r>
             <a:endParaRPr lang="en-US" sz="2100" dirty="0"/>
           </a:p>
@@ -10574,7 +10576,7 @@
                 <a:ea typeface="Aptos" pitchFamily="34" charset="-122"/>
                 <a:cs typeface="Aptos" pitchFamily="34" charset="-120"/>
               </a:rPr>
-              <a:t>• In public health, generated content may affect case review, public communication, policy.</a:t>
+              <a:t>• In public health, generated content may affect case review, public.</a:t>
             </a:r>
             <a:endParaRPr lang="en-US" sz="2100" dirty="0"/>
           </a:p>
@@ -10591,7 +10593,7 @@
                 <a:ea typeface="Aptos" pitchFamily="34" charset="-122"/>
                 <a:cs typeface="Aptos" pitchFamily="34" charset="-120"/>
               </a:rPr>
-              <a:t>• Fluent writing does not guarantee accuracy, completeness, appropriateness, or safety.</a:t>
+              <a:t>• Fluent writing does not guarantee accuracy, completeness, appropriateness,.</a:t>
             </a:r>
             <a:endParaRPr lang="en-US" sz="2100" dirty="0"/>
           </a:p>
@@ -10632,8 +10634,8 @@
         </p:nvSpPr>
         <p:spPr>
           <a:xfrm>
-            <a:off x="8074152" y="1563624"/>
-            <a:ext cx="2825496" cy="256032"/>
+            <a:off x="8074152" y="1545336"/>
+            <a:ext cx="2825496" cy="228600"/>
           </a:xfrm>
           <a:prstGeom prst="rect">
             <a:avLst/>
@@ -10649,7 +10651,7 @@
               <a:buNone/>
             </a:pPr>
             <a:r>
-              <a:rPr lang="en-US" sz="1300" b="1" dirty="0">
+              <a:rPr lang="en-US" sz="1220" b="1" dirty="0">
                 <a:solidFill>
                   <a:srgbClr val="0068B7"/>
                 </a:solidFill>
@@ -10659,7 +10661,7 @@
               </a:rPr>
               <a:t>Module details</a:t>
             </a:r>
-            <a:endParaRPr lang="en-US" sz="1300" dirty="0"/>
+            <a:endParaRPr lang="en-US" sz="1220" dirty="0"/>
           </a:p>
         </p:txBody>
       </p:sp>
@@ -10671,8 +10673,8 @@
         </p:nvSpPr>
         <p:spPr>
           <a:xfrm>
-            <a:off x="8074152" y="1892808"/>
-            <a:ext cx="2825496" cy="1353312"/>
+            <a:off x="8074152" y="1856232"/>
+            <a:ext cx="2825496" cy="1408176"/>
           </a:xfrm>
           <a:prstGeom prst="rect">
             <a:avLst/>
@@ -10690,7 +10692,7 @@
               <a:buNone/>
             </a:pPr>
             <a:r>
-              <a:rPr lang="en-US" sz="1320" dirty="0">
+              <a:rPr lang="en-US" sz="1220" dirty="0">
                 <a:solidFill>
                   <a:srgbClr val="17364A"/>
                 </a:solidFill>
@@ -10698,9 +10700,9 @@
                 <a:ea typeface="Aptos" pitchFamily="34" charset="-122"/>
                 <a:cs typeface="Aptos" pitchFamily="34" charset="-120"/>
               </a:rPr>
-              <a:t>Level: intermediate/practitioner Primary track: Analytics and Modeling Track Appears in tracks: analytics-modeling</a:t>
-            </a:r>
-            <a:endParaRPr lang="en-US" sz="1320" dirty="0"/>
+              <a:t>Level: intermediate/practitioner Primary track: Analytics and Modeling Track.</a:t>
+            </a:r>
+            <a:endParaRPr lang="en-US" sz="1220" dirty="0"/>
           </a:p>
         </p:txBody>
       </p:sp>
@@ -10739,8 +10741,8 @@
         </p:nvSpPr>
         <p:spPr>
           <a:xfrm>
-            <a:off x="8074152" y="3822192"/>
-            <a:ext cx="2825496" cy="256032"/>
+            <a:off x="8074152" y="3803904"/>
+            <a:ext cx="2825496" cy="228600"/>
           </a:xfrm>
           <a:prstGeom prst="rect">
             <a:avLst/>
@@ -10756,7 +10758,7 @@
               <a:buNone/>
             </a:pPr>
             <a:r>
-              <a:rPr lang="en-US" sz="1300" b="1" dirty="0">
+              <a:rPr lang="en-US" sz="1220" b="1" dirty="0">
                 <a:solidFill>
                   <a:srgbClr val="0068B7"/>
                 </a:solidFill>
@@ -10766,7 +10768,7 @@
               </a:rPr>
               <a:t>Learning sequence</a:t>
             </a:r>
-            <a:endParaRPr lang="en-US" sz="1300" dirty="0"/>
+            <a:endParaRPr lang="en-US" sz="1220" dirty="0"/>
           </a:p>
         </p:txBody>
       </p:sp>
@@ -10778,8 +10780,8 @@
         </p:nvSpPr>
         <p:spPr>
           <a:xfrm>
-            <a:off x="8092440" y="4187952"/>
-            <a:ext cx="2770632" cy="1033272"/>
+            <a:off x="8092440" y="4133088"/>
+            <a:ext cx="2770632" cy="1124712"/>
           </a:xfrm>
           <a:prstGeom prst="rect">
             <a:avLst/>
@@ -10797,7 +10799,7 @@
               <a:buNone/>
             </a:pPr>
             <a:r>
-              <a:rPr lang="en-US" sz="1220" dirty="0">
+              <a:rPr lang="en-US" sz="1140" dirty="0">
                 <a:solidFill>
                   <a:srgbClr val="17364A"/>
                 </a:solidFill>
@@ -10807,14 +10809,14 @@
               </a:rPr>
               <a:t>Read the module for shared vocabulary and context.</a:t>
             </a:r>
-            <a:endParaRPr lang="en-US" sz="1220" dirty="0"/>
-          </a:p>
-          <a:p>
-            <a:pPr indent="0" marL="0">
-              <a:buNone/>
-            </a:pPr>
-            <a:r>
-              <a:rPr lang="en-US" sz="1220" dirty="0">
+            <a:endParaRPr lang="en-US" sz="1140" dirty="0"/>
+          </a:p>
+          <a:p>
+            <a:pPr indent="0" marL="0">
+              <a:buNone/>
+            </a:pPr>
+            <a:r>
+              <a:rPr lang="en-US" sz="1140" dirty="0">
                 <a:solidFill>
                   <a:srgbClr val="17364A"/>
                 </a:solidFill>
@@ -10822,16 +10824,16 @@
                 <a:ea typeface="Aptos" pitchFamily="34" charset="-122"/>
                 <a:cs typeface="Aptos" pitchFamily="34" charset="-120"/>
               </a:rPr>
-              <a:t>Complete the practical exercise to apply the concept.</a:t>
-            </a:r>
-            <a:endParaRPr lang="en-US" sz="1220" dirty="0"/>
-          </a:p>
-          <a:p>
-            <a:pPr indent="0" marL="0">
-              <a:buNone/>
-            </a:pPr>
-            <a:r>
-              <a:rPr lang="en-US" sz="1220" dirty="0">
+              <a:t>Complete the practical exercise to apply the.</a:t>
+            </a:r>
+            <a:endParaRPr lang="en-US" sz="1140" dirty="0"/>
+          </a:p>
+          <a:p>
+            <a:pPr indent="0" marL="0">
+              <a:buNone/>
+            </a:pPr>
+            <a:r>
+              <a:rPr lang="en-US" sz="1140" dirty="0">
                 <a:solidFill>
                   <a:srgbClr val="17364A"/>
                 </a:solidFill>
@@ -10841,7 +10843,7 @@
               </a:rPr>
               <a:t>Use the notes and references for deeper review.</a:t>
             </a:r>
-            <a:endParaRPr lang="en-US" sz="1220" dirty="0"/>
+            <a:endParaRPr lang="en-US" sz="1140" dirty="0"/>
           </a:p>
         </p:txBody>
       </p:sp>
@@ -11132,8 +11134,8 @@
         </p:nvSpPr>
         <p:spPr>
           <a:xfrm>
-            <a:off x="868680" y="1508760"/>
-            <a:ext cx="6309360" cy="4160520"/>
+            <a:off x="822960" y="1463040"/>
+            <a:ext cx="6565392" cy="4343400"/>
           </a:xfrm>
           <a:prstGeom prst="rect">
             <a:avLst/>
@@ -11151,7 +11153,7 @@
               <a:buNone/>
             </a:pPr>
             <a:r>
-              <a:rPr lang="en-US" sz="2100" dirty="0">
+              <a:rPr lang="en-US" sz="1920" dirty="0">
                 <a:solidFill>
                   <a:srgbClr val="003A63"/>
                 </a:solidFill>
@@ -11161,14 +11163,14 @@
               </a:rPr>
               <a:t>• Generative AI output evaluation rubric</a:t>
             </a:r>
-            <a:endParaRPr lang="en-US" sz="2100" dirty="0"/>
-          </a:p>
-          <a:p>
-            <a:pPr indent="0" marL="0">
-              <a:buNone/>
-            </a:pPr>
-            <a:r>
-              <a:rPr lang="en-US" sz="2100" dirty="0">
+            <a:endParaRPr lang="en-US" sz="1920" dirty="0"/>
+          </a:p>
+          <a:p>
+            <a:pPr indent="0" marL="0">
+              <a:buNone/>
+            </a:pPr>
+            <a:r>
+              <a:rPr lang="en-US" sz="1920" dirty="0">
                 <a:solidFill>
                   <a:srgbClr val="003A63"/>
                 </a:solidFill>
@@ -11178,14 +11180,14 @@
               </a:rPr>
               <a:t>• Completed sample review</a:t>
             </a:r>
-            <a:endParaRPr lang="en-US" sz="2100" dirty="0"/>
-          </a:p>
-          <a:p>
-            <a:pPr indent="0" marL="0">
-              <a:buNone/>
-            </a:pPr>
-            <a:r>
-              <a:rPr lang="en-US" sz="2100" dirty="0">
+            <a:endParaRPr lang="en-US" sz="1920" dirty="0"/>
+          </a:p>
+          <a:p>
+            <a:pPr indent="0" marL="0">
+              <a:buNone/>
+            </a:pPr>
+            <a:r>
+              <a:rPr lang="en-US" sz="1920" dirty="0">
                 <a:solidFill>
                   <a:srgbClr val="003A63"/>
                 </a:solidFill>
@@ -11195,7 +11197,7 @@
               </a:rPr>
               <a:t>• Source verification notes</a:t>
             </a:r>
-            <a:endParaRPr lang="en-US" sz="2100" dirty="0"/>
+            <a:endParaRPr lang="en-US" sz="1920" dirty="0"/>
           </a:p>
         </p:txBody>
       </p:sp>
@@ -11207,12 +11209,12 @@
         </p:nvSpPr>
         <p:spPr>
           <a:xfrm>
-            <a:off x="7635240" y="1325880"/>
-            <a:ext cx="3474720" cy="1207008"/>
+            <a:off x="7543800" y="1325880"/>
+            <a:ext cx="3611880" cy="1261872"/>
           </a:xfrm>
           <a:prstGeom prst="roundRect">
             <a:avLst>
-              <a:gd name="adj" fmla="val 9091"/>
+              <a:gd name="adj" fmla="val 8696"/>
             </a:avLst>
           </a:prstGeom>
           <a:solidFill>
@@ -11234,8 +11236,8 @@
         </p:nvSpPr>
         <p:spPr>
           <a:xfrm>
-            <a:off x="7799832" y="1472184"/>
-            <a:ext cx="3145536" cy="256032"/>
+            <a:off x="7708392" y="1453896"/>
+            <a:ext cx="3282696" cy="228600"/>
           </a:xfrm>
           <a:prstGeom prst="rect">
             <a:avLst/>
@@ -11251,7 +11253,7 @@
               <a:buNone/>
             </a:pPr>
             <a:r>
-              <a:rPr lang="en-US" sz="1300" b="1" dirty="0">
+              <a:rPr lang="en-US" sz="1220" b="1" dirty="0">
                 <a:solidFill>
                   <a:srgbClr val="0068B7"/>
                 </a:solidFill>
@@ -11261,7 +11263,7 @@
               </a:rPr>
               <a:t>Data decision</a:t>
             </a:r>
-            <a:endParaRPr lang="en-US" sz="1300" dirty="0"/>
+            <a:endParaRPr lang="en-US" sz="1220" dirty="0"/>
           </a:p>
         </p:txBody>
       </p:sp>
@@ -11273,8 +11275,8 @@
         </p:nvSpPr>
         <p:spPr>
           <a:xfrm>
-            <a:off x="7799832" y="1801368"/>
-            <a:ext cx="3145536" cy="640080"/>
+            <a:off x="7708392" y="1764792"/>
+            <a:ext cx="3282696" cy="749808"/>
           </a:xfrm>
           <a:prstGeom prst="rect">
             <a:avLst/>
@@ -11292,7 +11294,7 @@
               <a:buNone/>
             </a:pPr>
             <a:r>
-              <a:rPr lang="en-US" sz="1320" dirty="0">
+              <a:rPr lang="en-US" sz="1220" dirty="0">
                 <a:solidFill>
                   <a:srgbClr val="17364A"/>
                 </a:solidFill>
@@ -11302,7 +11304,7 @@
               </a:rPr>
               <a:t>Generative AI output evaluation rubric</a:t>
             </a:r>
-            <a:endParaRPr lang="en-US" sz="1320" dirty="0"/>
+            <a:endParaRPr lang="en-US" sz="1220" dirty="0"/>
           </a:p>
         </p:txBody>
       </p:sp>
@@ -11314,12 +11316,12 @@
         </p:nvSpPr>
         <p:spPr>
           <a:xfrm>
-            <a:off x="7635240" y="2670048"/>
-            <a:ext cx="3474720" cy="1377086"/>
+            <a:off x="7543800" y="2724912"/>
+            <a:ext cx="3611880" cy="1527048"/>
           </a:xfrm>
           <a:prstGeom prst="roundRect">
             <a:avLst>
-              <a:gd name="adj" fmla="val 7968"/>
+              <a:gd name="adj" fmla="val 7186"/>
             </a:avLst>
           </a:prstGeom>
           <a:solidFill>
@@ -11341,8 +11343,8 @@
         </p:nvSpPr>
         <p:spPr>
           <a:xfrm>
-            <a:off x="7799832" y="2816352"/>
-            <a:ext cx="3145536" cy="256032"/>
+            <a:off x="7708392" y="2852928"/>
+            <a:ext cx="3282696" cy="228600"/>
           </a:xfrm>
           <a:prstGeom prst="rect">
             <a:avLst/>
@@ -11358,7 +11360,7 @@
               <a:buNone/>
             </a:pPr>
             <a:r>
-              <a:rPr lang="en-US" sz="1300" b="1" dirty="0">
+              <a:rPr lang="en-US" sz="1220" b="1" dirty="0">
                 <a:solidFill>
                   <a:srgbClr val="0068B7"/>
                 </a:solidFill>
@@ -11368,7 +11370,7 @@
               </a:rPr>
               <a:t>Concept checkpoints</a:t>
             </a:r>
-            <a:endParaRPr lang="en-US" sz="1300" dirty="0"/>
+            <a:endParaRPr lang="en-US" sz="1220" dirty="0"/>
           </a:p>
         </p:txBody>
       </p:sp>
@@ -11380,8 +11382,8 @@
         </p:nvSpPr>
         <p:spPr>
           <a:xfrm>
-            <a:off x="7818120" y="3182112"/>
-            <a:ext cx="3090672" cy="718718"/>
+            <a:off x="7726680" y="3182112"/>
+            <a:ext cx="3227832" cy="960120"/>
           </a:xfrm>
           <a:prstGeom prst="rect">
             <a:avLst/>
@@ -11399,7 +11401,7 @@
               <a:buNone/>
             </a:pPr>
             <a:r>
-              <a:rPr lang="en-US" sz="1220" dirty="0">
+              <a:rPr lang="en-US" sz="1140" dirty="0">
                 <a:solidFill>
                   <a:srgbClr val="17364A"/>
                 </a:solidFill>
@@ -11409,14 +11411,14 @@
               </a:rPr>
               <a:t>Generative AI output evaluation rubric</a:t>
             </a:r>
-            <a:endParaRPr lang="en-US" sz="1220" dirty="0"/>
-          </a:p>
-          <a:p>
-            <a:pPr indent="0" marL="0">
-              <a:buNone/>
-            </a:pPr>
-            <a:r>
-              <a:rPr lang="en-US" sz="1220" dirty="0">
+            <a:endParaRPr lang="en-US" sz="1140" dirty="0"/>
+          </a:p>
+          <a:p>
+            <a:pPr indent="0" marL="0">
+              <a:buNone/>
+            </a:pPr>
+            <a:r>
+              <a:rPr lang="en-US" sz="1140" dirty="0">
                 <a:solidFill>
                   <a:srgbClr val="17364A"/>
                 </a:solidFill>
@@ -11426,14 +11428,14 @@
               </a:rPr>
               <a:t>Completed sample review</a:t>
             </a:r>
-            <a:endParaRPr lang="en-US" sz="1220" dirty="0"/>
-          </a:p>
-          <a:p>
-            <a:pPr indent="0" marL="0">
-              <a:buNone/>
-            </a:pPr>
-            <a:r>
-              <a:rPr lang="en-US" sz="1220" dirty="0">
+            <a:endParaRPr lang="en-US" sz="1140" dirty="0"/>
+          </a:p>
+          <a:p>
+            <a:pPr indent="0" marL="0">
+              <a:buNone/>
+            </a:pPr>
+            <a:r>
+              <a:rPr lang="en-US" sz="1140" dirty="0">
                 <a:solidFill>
                   <a:srgbClr val="17364A"/>
                 </a:solidFill>
@@ -11443,7 +11445,7 @@
               </a:rPr>
               <a:t>Source verification notes</a:t>
             </a:r>
-            <a:endParaRPr lang="en-US" sz="1220" dirty="0"/>
+            <a:endParaRPr lang="en-US" sz="1140" dirty="0"/>
           </a:p>
         </p:txBody>
       </p:sp>
@@ -11455,12 +11457,12 @@
         </p:nvSpPr>
         <p:spPr>
           <a:xfrm>
-            <a:off x="7635240" y="4184294"/>
-            <a:ext cx="3474720" cy="1466698"/>
+            <a:off x="7543800" y="4389120"/>
+            <a:ext cx="3611880" cy="1261872"/>
           </a:xfrm>
           <a:prstGeom prst="roundRect">
             <a:avLst>
-              <a:gd name="adj" fmla="val 7481"/>
+              <a:gd name="adj" fmla="val 8696"/>
             </a:avLst>
           </a:prstGeom>
           <a:solidFill>
@@ -11482,8 +11484,8 @@
         </p:nvSpPr>
         <p:spPr>
           <a:xfrm>
-            <a:off x="7799832" y="4330598"/>
-            <a:ext cx="3145536" cy="256032"/>
+            <a:off x="7708392" y="4517136"/>
+            <a:ext cx="3282696" cy="228600"/>
           </a:xfrm>
           <a:prstGeom prst="rect">
             <a:avLst/>
@@ -11499,7 +11501,7 @@
               <a:buNone/>
             </a:pPr>
             <a:r>
-              <a:rPr lang="en-US" sz="1300" b="1" dirty="0">
+              <a:rPr lang="en-US" sz="1220" b="1" dirty="0">
                 <a:solidFill>
                   <a:srgbClr val="0068B7"/>
                 </a:solidFill>
@@ -11509,7 +11511,7 @@
               </a:rPr>
               <a:t>How to validate</a:t>
             </a:r>
-            <a:endParaRPr lang="en-US" sz="1300" dirty="0"/>
+            <a:endParaRPr lang="en-US" sz="1220" dirty="0"/>
           </a:p>
         </p:txBody>
       </p:sp>
@@ -11521,8 +11523,8 @@
         </p:nvSpPr>
         <p:spPr>
           <a:xfrm>
-            <a:off x="7799832" y="4659782"/>
-            <a:ext cx="3145536" cy="899770"/>
+            <a:off x="7708392" y="4828032"/>
+            <a:ext cx="3282696" cy="749808"/>
           </a:xfrm>
           <a:prstGeom prst="rect">
             <a:avLst/>
@@ -11540,7 +11542,7 @@
               <a:buNone/>
             </a:pPr>
             <a:r>
-              <a:rPr lang="en-US" sz="1320" dirty="0">
+              <a:rPr lang="en-US" sz="1220" dirty="0">
                 <a:solidFill>
                   <a:srgbClr val="17364A"/>
                 </a:solidFill>
@@ -11548,9 +11550,9 @@
                 <a:ea typeface="Aptos" pitchFamily="34" charset="-122"/>
                 <a:cs typeface="Aptos" pitchFamily="34" charset="-120"/>
               </a:rPr>
-              <a:t>Use the assignment to test whether you can explain the concept, apply it to a realistic public health situation, and identify what would need review before the work moves forward.</a:t>
-            </a:r>
-            <a:endParaRPr lang="en-US" sz="1320" dirty="0"/>
+              <a:t>Use the assignment to test whether you can explain the concept, apply it to a.</a:t>
+            </a:r>
+            <a:endParaRPr lang="en-US" sz="1220" dirty="0"/>
           </a:p>
         </p:txBody>
       </p:sp>
@@ -11841,8 +11843,8 @@
         </p:nvSpPr>
         <p:spPr>
           <a:xfrm>
-            <a:off x="868680" y="1508760"/>
-            <a:ext cx="6309360" cy="4160520"/>
+            <a:off x="822960" y="1463040"/>
+            <a:ext cx="6565392" cy="4343400"/>
           </a:xfrm>
           <a:prstGeom prst="rect">
             <a:avLst/>
@@ -11860,7 +11862,7 @@
               <a:buNone/>
             </a:pPr>
             <a:r>
-              <a:rPr lang="en-US" sz="2100" dirty="0">
+              <a:rPr lang="en-US" sz="1920" dirty="0">
                 <a:solidFill>
                   <a:srgbClr val="003A63"/>
                 </a:solidFill>
@@ -11870,14 +11872,14 @@
               </a:rPr>
               <a:t>• 1. Why is fluency not enough to trust a generative AI output?</a:t>
             </a:r>
-            <a:endParaRPr lang="en-US" sz="2100" dirty="0"/>
-          </a:p>
-          <a:p>
-            <a:pPr indent="0" marL="0">
-              <a:buNone/>
-            </a:pPr>
-            <a:r>
-              <a:rPr lang="en-US" sz="2100" dirty="0">
+            <a:endParaRPr lang="en-US" sz="1920" dirty="0"/>
+          </a:p>
+          <a:p>
+            <a:pPr indent="0" marL="0">
+              <a:buNone/>
+            </a:pPr>
+            <a:r>
+              <a:rPr lang="en-US" sz="1920" dirty="0">
                 <a:solidFill>
                   <a:srgbClr val="003A63"/>
                 </a:solidFill>
@@ -11887,14 +11889,14 @@
               </a:rPr>
               <a:t>• 2. What does grounding mean?</a:t>
             </a:r>
-            <a:endParaRPr lang="en-US" sz="2100" dirty="0"/>
-          </a:p>
-          <a:p>
-            <a:pPr indent="0" marL="0">
-              <a:buNone/>
-            </a:pPr>
-            <a:r>
-              <a:rPr lang="en-US" sz="2100" dirty="0">
+            <a:endParaRPr lang="en-US" sz="1920" dirty="0"/>
+          </a:p>
+          <a:p>
+            <a:pPr indent="0" marL="0">
+              <a:buNone/>
+            </a:pPr>
+            <a:r>
+              <a:rPr lang="en-US" sz="1920" dirty="0">
                 <a:solidFill>
                   <a:srgbClr val="003A63"/>
                 </a:solidFill>
@@ -11904,7 +11906,7 @@
               </a:rPr>
               <a:t>• 3. Which issue can be as harmful as an incorrect statement?</a:t>
             </a:r>
-            <a:endParaRPr lang="en-US" sz="2100" dirty="0"/>
+            <a:endParaRPr lang="en-US" sz="1920" dirty="0"/>
           </a:p>
         </p:txBody>
       </p:sp>
@@ -11916,12 +11918,12 @@
         </p:nvSpPr>
         <p:spPr>
           <a:xfrm>
-            <a:off x="7635240" y="1325880"/>
-            <a:ext cx="3474720" cy="1207008"/>
+            <a:off x="7543800" y="1325880"/>
+            <a:ext cx="3611880" cy="1261872"/>
           </a:xfrm>
           <a:prstGeom prst="roundRect">
             <a:avLst>
-              <a:gd name="adj" fmla="val 9091"/>
+              <a:gd name="adj" fmla="val 8696"/>
             </a:avLst>
           </a:prstGeom>
           <a:solidFill>
@@ -11943,8 +11945,8 @@
         </p:nvSpPr>
         <p:spPr>
           <a:xfrm>
-            <a:off x="7799832" y="1472184"/>
-            <a:ext cx="3145536" cy="256032"/>
+            <a:off x="7708392" y="1453896"/>
+            <a:ext cx="3282696" cy="228600"/>
           </a:xfrm>
           <a:prstGeom prst="rect">
             <a:avLst/>
@@ -11960,7 +11962,7 @@
               <a:buNone/>
             </a:pPr>
             <a:r>
-              <a:rPr lang="en-US" sz="1300" b="1" dirty="0">
+              <a:rPr lang="en-US" sz="1220" b="1" dirty="0">
                 <a:solidFill>
                   <a:srgbClr val="0068B7"/>
                 </a:solidFill>
@@ -11970,7 +11972,7 @@
               </a:rPr>
               <a:t>Data decision</a:t>
             </a:r>
-            <a:endParaRPr lang="en-US" sz="1300" dirty="0"/>
+            <a:endParaRPr lang="en-US" sz="1220" dirty="0"/>
           </a:p>
         </p:txBody>
       </p:sp>
@@ -11982,8 +11984,8 @@
         </p:nvSpPr>
         <p:spPr>
           <a:xfrm>
-            <a:off x="7799832" y="1801368"/>
-            <a:ext cx="3145536" cy="640080"/>
+            <a:off x="7708392" y="1764792"/>
+            <a:ext cx="3282696" cy="749808"/>
           </a:xfrm>
           <a:prstGeom prst="rect">
             <a:avLst/>
@@ -12001,7 +12003,7 @@
               <a:buNone/>
             </a:pPr>
             <a:r>
-              <a:rPr lang="en-US" sz="1320" dirty="0">
+              <a:rPr lang="en-US" sz="1220" dirty="0">
                 <a:solidFill>
                   <a:srgbClr val="17364A"/>
                 </a:solidFill>
@@ -12011,7 +12013,7 @@
               </a:rPr>
               <a:t>1. Why is fluency not enough to trust a generative AI output?</a:t>
             </a:r>
-            <a:endParaRPr lang="en-US" sz="1320" dirty="0"/>
+            <a:endParaRPr lang="en-US" sz="1220" dirty="0"/>
           </a:p>
         </p:txBody>
       </p:sp>
@@ -12023,12 +12025,12 @@
         </p:nvSpPr>
         <p:spPr>
           <a:xfrm>
-            <a:off x="7635240" y="2670048"/>
-            <a:ext cx="3474720" cy="1377086"/>
+            <a:off x="7543800" y="2724912"/>
+            <a:ext cx="3611880" cy="1527048"/>
           </a:xfrm>
           <a:prstGeom prst="roundRect">
             <a:avLst>
-              <a:gd name="adj" fmla="val 7968"/>
+              <a:gd name="adj" fmla="val 7186"/>
             </a:avLst>
           </a:prstGeom>
           <a:solidFill>
@@ -12050,8 +12052,8 @@
         </p:nvSpPr>
         <p:spPr>
           <a:xfrm>
-            <a:off x="7799832" y="2816352"/>
-            <a:ext cx="3145536" cy="256032"/>
+            <a:off x="7708392" y="2852928"/>
+            <a:ext cx="3282696" cy="228600"/>
           </a:xfrm>
           <a:prstGeom prst="rect">
             <a:avLst/>
@@ -12067,7 +12069,7 @@
               <a:buNone/>
             </a:pPr>
             <a:r>
-              <a:rPr lang="en-US" sz="1300" b="1" dirty="0">
+              <a:rPr lang="en-US" sz="1220" b="1" dirty="0">
                 <a:solidFill>
                   <a:srgbClr val="0068B7"/>
                 </a:solidFill>
@@ -12077,7 +12079,7 @@
               </a:rPr>
               <a:t>Concept checkpoints</a:t>
             </a:r>
-            <a:endParaRPr lang="en-US" sz="1300" dirty="0"/>
+            <a:endParaRPr lang="en-US" sz="1220" dirty="0"/>
           </a:p>
         </p:txBody>
       </p:sp>
@@ -12089,8 +12091,8 @@
         </p:nvSpPr>
         <p:spPr>
           <a:xfrm>
-            <a:off x="7818120" y="3182112"/>
-            <a:ext cx="3090672" cy="718718"/>
+            <a:off x="7726680" y="3182112"/>
+            <a:ext cx="3227832" cy="960120"/>
           </a:xfrm>
           <a:prstGeom prst="rect">
             <a:avLst/>
@@ -12108,7 +12110,7 @@
               <a:buNone/>
             </a:pPr>
             <a:r>
-              <a:rPr lang="en-US" sz="1220" dirty="0">
+              <a:rPr lang="en-US" sz="1140" dirty="0">
                 <a:solidFill>
                   <a:srgbClr val="17364A"/>
                 </a:solidFill>
@@ -12118,14 +12120,14 @@
               </a:rPr>
               <a:t>1.</a:t>
             </a:r>
-            <a:endParaRPr lang="en-US" sz="1220" dirty="0"/>
-          </a:p>
-          <a:p>
-            <a:pPr indent="0" marL="0">
-              <a:buNone/>
-            </a:pPr>
-            <a:r>
-              <a:rPr lang="en-US" sz="1220" dirty="0">
+            <a:endParaRPr lang="en-US" sz="1140" dirty="0"/>
+          </a:p>
+          <a:p>
+            <a:pPr indent="0" marL="0">
+              <a:buNone/>
+            </a:pPr>
+            <a:r>
+              <a:rPr lang="en-US" sz="1140" dirty="0">
                 <a:solidFill>
                   <a:srgbClr val="17364A"/>
                 </a:solidFill>
@@ -12133,16 +12135,16 @@
                 <a:ea typeface="Aptos" pitchFamily="34" charset="-122"/>
                 <a:cs typeface="Aptos" pitchFamily="34" charset="-120"/>
               </a:rPr>
-              <a:t>Why is fluency not enough to trust a generative AI output?</a:t>
-            </a:r>
-            <a:endParaRPr lang="en-US" sz="1220" dirty="0"/>
-          </a:p>
-          <a:p>
-            <a:pPr indent="0" marL="0">
-              <a:buNone/>
-            </a:pPr>
-            <a:r>
-              <a:rPr lang="en-US" sz="1220" dirty="0">
+              <a:t>Why is fluency not enough to trust a generative AI.</a:t>
+            </a:r>
+            <a:endParaRPr lang="en-US" sz="1140" dirty="0"/>
+          </a:p>
+          <a:p>
+            <a:pPr indent="0" marL="0">
+              <a:buNone/>
+            </a:pPr>
+            <a:r>
+              <a:rPr lang="en-US" sz="1140" dirty="0">
                 <a:solidFill>
                   <a:srgbClr val="17364A"/>
                 </a:solidFill>
@@ -12152,7 +12154,7 @@
               </a:rPr>
               <a:t>2.</a:t>
             </a:r>
-            <a:endParaRPr lang="en-US" sz="1220" dirty="0"/>
+            <a:endParaRPr lang="en-US" sz="1140" dirty="0"/>
           </a:p>
         </p:txBody>
       </p:sp>
@@ -12164,12 +12166,12 @@
         </p:nvSpPr>
         <p:spPr>
           <a:xfrm>
-            <a:off x="7635240" y="4184294"/>
-            <a:ext cx="3474720" cy="1466698"/>
+            <a:off x="7543800" y="4389120"/>
+            <a:ext cx="3611880" cy="1261872"/>
           </a:xfrm>
           <a:prstGeom prst="roundRect">
             <a:avLst>
-              <a:gd name="adj" fmla="val 7481"/>
+              <a:gd name="adj" fmla="val 8696"/>
             </a:avLst>
           </a:prstGeom>
           <a:solidFill>
@@ -12191,8 +12193,8 @@
         </p:nvSpPr>
         <p:spPr>
           <a:xfrm>
-            <a:off x="7799832" y="4330598"/>
-            <a:ext cx="3145536" cy="256032"/>
+            <a:off x="7708392" y="4517136"/>
+            <a:ext cx="3282696" cy="228600"/>
           </a:xfrm>
           <a:prstGeom prst="rect">
             <a:avLst/>
@@ -12208,7 +12210,7 @@
               <a:buNone/>
             </a:pPr>
             <a:r>
-              <a:rPr lang="en-US" sz="1300" b="1" dirty="0">
+              <a:rPr lang="en-US" sz="1220" b="1" dirty="0">
                 <a:solidFill>
                   <a:srgbClr val="0068B7"/>
                 </a:solidFill>
@@ -12218,7 +12220,7 @@
               </a:rPr>
               <a:t>How to validate</a:t>
             </a:r>
-            <a:endParaRPr lang="en-US" sz="1300" dirty="0"/>
+            <a:endParaRPr lang="en-US" sz="1220" dirty="0"/>
           </a:p>
         </p:txBody>
       </p:sp>
@@ -12230,8 +12232,8 @@
         </p:nvSpPr>
         <p:spPr>
           <a:xfrm>
-            <a:off x="7799832" y="4659782"/>
-            <a:ext cx="3145536" cy="899770"/>
+            <a:off x="7708392" y="4828032"/>
+            <a:ext cx="3282696" cy="749808"/>
           </a:xfrm>
           <a:prstGeom prst="rect">
             <a:avLst/>
@@ -12249,7 +12251,7 @@
               <a:buNone/>
             </a:pPr>
             <a:r>
-              <a:rPr lang="en-US" sz="1320" dirty="0">
+              <a:rPr lang="en-US" sz="1220" dirty="0">
                 <a:solidFill>
                   <a:srgbClr val="17364A"/>
                 </a:solidFill>
@@ -12257,9 +12259,9 @@
                 <a:ea typeface="Aptos" pitchFamily="34" charset="-122"/>
                 <a:cs typeface="Aptos" pitchFamily="34" charset="-120"/>
               </a:rPr>
-              <a:t>Use the assignment to test whether you can explain the concept, apply it to a realistic public health situation, and identify what would need review before the work moves forward.</a:t>
-            </a:r>
-            <a:endParaRPr lang="en-US" sz="1320" dirty="0"/>
+              <a:t>Use the assignment to test whether you can explain the concept, apply it to a.</a:t>
+            </a:r>
+            <a:endParaRPr lang="en-US" sz="1220" dirty="0"/>
           </a:p>
         </p:txBody>
       </p:sp>
@@ -12550,8 +12552,8 @@
         </p:nvSpPr>
         <p:spPr>
           <a:xfrm>
-            <a:off x="868680" y="1508760"/>
-            <a:ext cx="6309360" cy="4160520"/>
+            <a:off x="822960" y="1463040"/>
+            <a:ext cx="6565392" cy="4343400"/>
           </a:xfrm>
           <a:prstGeom prst="rect">
             <a:avLst/>
@@ -12569,7 +12571,7 @@
               <a:buNone/>
             </a:pPr>
             <a:r>
-              <a:rPr lang="en-US" sz="2100" dirty="0">
+              <a:rPr lang="en-US" sz="1920" dirty="0">
                 <a:solidFill>
                   <a:srgbClr val="003A63"/>
                 </a:solidFill>
@@ -12579,14 +12581,14 @@
               </a:rPr>
               <a:t>• NIST AI RMF Generative AI Profile:.</a:t>
             </a:r>
-            <a:endParaRPr lang="en-US" sz="2100" dirty="0"/>
-          </a:p>
-          <a:p>
-            <a:pPr indent="0" marL="0">
-              <a:buNone/>
-            </a:pPr>
-            <a:r>
-              <a:rPr lang="en-US" sz="2100" dirty="0">
+            <a:endParaRPr lang="en-US" sz="1920" dirty="0"/>
+          </a:p>
+          <a:p>
+            <a:pPr indent="0" marL="0">
+              <a:buNone/>
+            </a:pPr>
+            <a:r>
+              <a:rPr lang="en-US" sz="1920" dirty="0">
                 <a:solidFill>
                   <a:srgbClr val="003A63"/>
                 </a:solidFill>
@@ -12596,14 +12598,14 @@
               </a:rPr>
               <a:t>• NIST Artificial Intelligence Risk Management Framework:.</a:t>
             </a:r>
-            <a:endParaRPr lang="en-US" sz="2100" dirty="0"/>
-          </a:p>
-          <a:p>
-            <a:pPr indent="0" marL="0">
-              <a:buNone/>
-            </a:pPr>
-            <a:r>
-              <a:rPr lang="en-US" sz="2100" dirty="0">
+            <a:endParaRPr lang="en-US" sz="1920" dirty="0"/>
+          </a:p>
+          <a:p>
+            <a:pPr indent="0" marL="0">
+              <a:buNone/>
+            </a:pPr>
+            <a:r>
+              <a:rPr lang="en-US" sz="1920" dirty="0">
                 <a:solidFill>
                   <a:srgbClr val="003A63"/>
                 </a:solidFill>
@@ -12613,7 +12615,7 @@
               </a:rPr>
               <a:t>• OWASP Top 10 for Large Language Model Applications:.</a:t>
             </a:r>
-            <a:endParaRPr lang="en-US" sz="2100" dirty="0"/>
+            <a:endParaRPr lang="en-US" sz="1920" dirty="0"/>
           </a:p>
         </p:txBody>
       </p:sp>
@@ -12625,12 +12627,12 @@
         </p:nvSpPr>
         <p:spPr>
           <a:xfrm>
-            <a:off x="7635240" y="1325880"/>
-            <a:ext cx="3474720" cy="1207008"/>
+            <a:off x="7543800" y="1325880"/>
+            <a:ext cx="3611880" cy="1261872"/>
           </a:xfrm>
           <a:prstGeom prst="roundRect">
             <a:avLst>
-              <a:gd name="adj" fmla="val 9091"/>
+              <a:gd name="adj" fmla="val 8696"/>
             </a:avLst>
           </a:prstGeom>
           <a:solidFill>
@@ -12652,8 +12654,8 @@
         </p:nvSpPr>
         <p:spPr>
           <a:xfrm>
-            <a:off x="7799832" y="1472184"/>
-            <a:ext cx="3145536" cy="256032"/>
+            <a:off x="7708392" y="1453896"/>
+            <a:ext cx="3282696" cy="228600"/>
           </a:xfrm>
           <a:prstGeom prst="rect">
             <a:avLst/>
@@ -12669,7 +12671,7 @@
               <a:buNone/>
             </a:pPr>
             <a:r>
-              <a:rPr lang="en-US" sz="1300" b="1" dirty="0">
+              <a:rPr lang="en-US" sz="1220" b="1" dirty="0">
                 <a:solidFill>
                   <a:srgbClr val="0068B7"/>
                 </a:solidFill>
@@ -12679,7 +12681,7 @@
               </a:rPr>
               <a:t>Data decision</a:t>
             </a:r>
-            <a:endParaRPr lang="en-US" sz="1300" dirty="0"/>
+            <a:endParaRPr lang="en-US" sz="1220" dirty="0"/>
           </a:p>
         </p:txBody>
       </p:sp>
@@ -12691,8 +12693,8 @@
         </p:nvSpPr>
         <p:spPr>
           <a:xfrm>
-            <a:off x="7799832" y="1801368"/>
-            <a:ext cx="3145536" cy="640080"/>
+            <a:off x="7708392" y="1764792"/>
+            <a:ext cx="3282696" cy="749808"/>
           </a:xfrm>
           <a:prstGeom prst="rect">
             <a:avLst/>
@@ -12710,7 +12712,7 @@
               <a:buNone/>
             </a:pPr>
             <a:r>
-              <a:rPr lang="en-US" sz="1320" dirty="0">
+              <a:rPr lang="en-US" sz="1220" dirty="0">
                 <a:solidFill>
                   <a:srgbClr val="17364A"/>
                 </a:solidFill>
@@ -12720,7 +12722,7 @@
               </a:rPr>
               <a:t>NIST AI RMF Generative AI Profile:.</a:t>
             </a:r>
-            <a:endParaRPr lang="en-US" sz="1320" dirty="0"/>
+            <a:endParaRPr lang="en-US" sz="1220" dirty="0"/>
           </a:p>
         </p:txBody>
       </p:sp>
@@ -12732,12 +12734,12 @@
         </p:nvSpPr>
         <p:spPr>
           <a:xfrm>
-            <a:off x="7635240" y="2670048"/>
-            <a:ext cx="3474720" cy="1377086"/>
+            <a:off x="7543800" y="2724912"/>
+            <a:ext cx="3611880" cy="1527048"/>
           </a:xfrm>
           <a:prstGeom prst="roundRect">
             <a:avLst>
-              <a:gd name="adj" fmla="val 7968"/>
+              <a:gd name="adj" fmla="val 7186"/>
             </a:avLst>
           </a:prstGeom>
           <a:solidFill>
@@ -12759,8 +12761,8 @@
         </p:nvSpPr>
         <p:spPr>
           <a:xfrm>
-            <a:off x="7799832" y="2816352"/>
-            <a:ext cx="3145536" cy="256032"/>
+            <a:off x="7708392" y="2852928"/>
+            <a:ext cx="3282696" cy="228600"/>
           </a:xfrm>
           <a:prstGeom prst="rect">
             <a:avLst/>
@@ -12776,7 +12778,7 @@
               <a:buNone/>
             </a:pPr>
             <a:r>
-              <a:rPr lang="en-US" sz="1300" b="1" dirty="0">
+              <a:rPr lang="en-US" sz="1220" b="1" dirty="0">
                 <a:solidFill>
                   <a:srgbClr val="0068B7"/>
                 </a:solidFill>
@@ -12786,7 +12788,7 @@
               </a:rPr>
               <a:t>Concept checkpoints</a:t>
             </a:r>
-            <a:endParaRPr lang="en-US" sz="1300" dirty="0"/>
+            <a:endParaRPr lang="en-US" sz="1220" dirty="0"/>
           </a:p>
         </p:txBody>
       </p:sp>
@@ -12798,8 +12800,8 @@
         </p:nvSpPr>
         <p:spPr>
           <a:xfrm>
-            <a:off x="7818120" y="3182112"/>
-            <a:ext cx="3090672" cy="718718"/>
+            <a:off x="7726680" y="3182112"/>
+            <a:ext cx="3227832" cy="960120"/>
           </a:xfrm>
           <a:prstGeom prst="rect">
             <a:avLst/>
@@ -12817,7 +12819,7 @@
               <a:buNone/>
             </a:pPr>
             <a:r>
-              <a:rPr lang="en-US" sz="1220" dirty="0">
+              <a:rPr lang="en-US" sz="1140" dirty="0">
                 <a:solidFill>
                   <a:srgbClr val="17364A"/>
                 </a:solidFill>
@@ -12825,16 +12827,16 @@
                 <a:ea typeface="Aptos" pitchFamily="34" charset="-122"/>
                 <a:cs typeface="Aptos" pitchFamily="34" charset="-120"/>
               </a:rPr>
-              <a:t>NIST Artificial Intelligence Risk Management Framework:.</a:t>
-            </a:r>
-            <a:endParaRPr lang="en-US" sz="1220" dirty="0"/>
-          </a:p>
-          <a:p>
-            <a:pPr indent="0" marL="0">
-              <a:buNone/>
-            </a:pPr>
-            <a:r>
-              <a:rPr lang="en-US" sz="1220" dirty="0">
+              <a:t>NIST Artificial Intelligence Risk Management.</a:t>
+            </a:r>
+            <a:endParaRPr lang="en-US" sz="1140" dirty="0"/>
+          </a:p>
+          <a:p>
+            <a:pPr indent="0" marL="0">
+              <a:buNone/>
+            </a:pPr>
+            <a:r>
+              <a:rPr lang="en-US" sz="1140" dirty="0">
                 <a:solidFill>
                   <a:srgbClr val="17364A"/>
                 </a:solidFill>
@@ -12844,7 +12846,7 @@
               </a:rPr>
               <a:t>WHO Guidance on Large Multi-Modal Models:.</a:t>
             </a:r>
-            <a:endParaRPr lang="en-US" sz="1220" dirty="0"/>
+            <a:endParaRPr lang="en-US" sz="1140" dirty="0"/>
           </a:p>
         </p:txBody>
       </p:sp>
@@ -12856,12 +12858,12 @@
         </p:nvSpPr>
         <p:spPr>
           <a:xfrm>
-            <a:off x="7635240" y="4184294"/>
-            <a:ext cx="3474720" cy="1466698"/>
+            <a:off x="7543800" y="4389120"/>
+            <a:ext cx="3611880" cy="1261872"/>
           </a:xfrm>
           <a:prstGeom prst="roundRect">
             <a:avLst>
-              <a:gd name="adj" fmla="val 7481"/>
+              <a:gd name="adj" fmla="val 8696"/>
             </a:avLst>
           </a:prstGeom>
           <a:solidFill>
@@ -12883,8 +12885,8 @@
         </p:nvSpPr>
         <p:spPr>
           <a:xfrm>
-            <a:off x="7799832" y="4330598"/>
-            <a:ext cx="3145536" cy="256032"/>
+            <a:off x="7708392" y="4517136"/>
+            <a:ext cx="3282696" cy="228600"/>
           </a:xfrm>
           <a:prstGeom prst="rect">
             <a:avLst/>
@@ -12900,7 +12902,7 @@
               <a:buNone/>
             </a:pPr>
             <a:r>
-              <a:rPr lang="en-US" sz="1300" b="1" dirty="0">
+              <a:rPr lang="en-US" sz="1220" b="1" dirty="0">
                 <a:solidFill>
                   <a:srgbClr val="0068B7"/>
                 </a:solidFill>
@@ -12910,7 +12912,7 @@
               </a:rPr>
               <a:t>How to validate</a:t>
             </a:r>
-            <a:endParaRPr lang="en-US" sz="1300" dirty="0"/>
+            <a:endParaRPr lang="en-US" sz="1220" dirty="0"/>
           </a:p>
         </p:txBody>
       </p:sp>
@@ -12922,8 +12924,8 @@
         </p:nvSpPr>
         <p:spPr>
           <a:xfrm>
-            <a:off x="7799832" y="4659782"/>
-            <a:ext cx="3145536" cy="899770"/>
+            <a:off x="7708392" y="4828032"/>
+            <a:ext cx="3282696" cy="749808"/>
           </a:xfrm>
           <a:prstGeom prst="rect">
             <a:avLst/>
@@ -12941,7 +12943,7 @@
               <a:buNone/>
             </a:pPr>
             <a:r>
-              <a:rPr lang="en-US" sz="1320" dirty="0">
+              <a:rPr lang="en-US" sz="1220" dirty="0">
                 <a:solidFill>
                   <a:srgbClr val="17364A"/>
                 </a:solidFill>
@@ -12949,9 +12951,9 @@
                 <a:ea typeface="Aptos" pitchFamily="34" charset="-122"/>
                 <a:cs typeface="Aptos" pitchFamily="34" charset="-120"/>
               </a:rPr>
-              <a:t>Connect the concept to data quality, model performance, validation evidence, monitoring measures, and decisions that remain under human control.</a:t>
-            </a:r>
-            <a:endParaRPr lang="en-US" sz="1320" dirty="0"/>
+              <a:t>Connect the concept to data quality, model performance, validation evidence,.</a:t>
+            </a:r>
+            <a:endParaRPr lang="en-US" sz="1220" dirty="0"/>
           </a:p>
         </p:txBody>
       </p:sp>
@@ -13269,7 +13271,7 @@
                 <a:ea typeface="Aptos" pitchFamily="34" charset="-122"/>
                 <a:cs typeface="Aptos" pitchFamily="34" charset="-120"/>
               </a:rPr>
-              <a:t>• Play 4: Engage Stakeholders - This lesson informs Play 4 by helping learners connect the.</a:t>
+              <a:t>• Play 4: Engage Stakeholders - This lesson informs Play 4 by helping learners.</a:t>
             </a:r>
             <a:endParaRPr lang="en-US" sz="1900" dirty="0"/>
           </a:p>
@@ -13286,7 +13288,7 @@
                 <a:ea typeface="Aptos" pitchFamily="34" charset="-122"/>
                 <a:cs typeface="Aptos" pitchFamily="34" charset="-120"/>
               </a:rPr>
-              <a:t>• Play 7: Prioritize Use Cases - This lesson informs Play 7 by helping learners connect the.</a:t>
+              <a:t>• Play 7: Prioritize Use Cases - This lesson informs Play 7 by helping.</a:t>
             </a:r>
             <a:endParaRPr lang="en-US" sz="1900" dirty="0"/>
           </a:p>
@@ -13303,7 +13305,7 @@
                 <a:ea typeface="Aptos" pitchFamily="34" charset="-122"/>
                 <a:cs typeface="Aptos" pitchFamily="34" charset="-120"/>
               </a:rPr>
-              <a:t>• Play 1: Vision &amp; Guardrails - This lesson informs Play 1 by helping learners connect the.</a:t>
+              <a:t>• Play 1: Vision &amp; Guardrails - This lesson informs Play 1 by helping learners.</a:t>
             </a:r>
             <a:endParaRPr lang="en-US" sz="1900" dirty="0"/>
           </a:p>
@@ -13320,7 +13322,7 @@
                 <a:ea typeface="Aptos" pitchFamily="34" charset="-122"/>
                 <a:cs typeface="Aptos" pitchFamily="34" charset="-120"/>
               </a:rPr>
-              <a:t>• Play 13: Monitor and Evaluate AI Systems - This lesson informs Play 13 by helping learners.</a:t>
+              <a:t>• Play 13: Monitor and Evaluate AI Systems - This lesson informs Play 13 by.</a:t>
             </a:r>
             <a:endParaRPr lang="en-US" sz="1900" dirty="0"/>
           </a:p>
@@ -13361,8 +13363,8 @@
         </p:nvSpPr>
         <p:spPr>
           <a:xfrm>
-            <a:off x="8211312" y="1563624"/>
-            <a:ext cx="2734056" cy="256032"/>
+            <a:off x="8211312" y="1545336"/>
+            <a:ext cx="2734056" cy="228600"/>
           </a:xfrm>
           <a:prstGeom prst="rect">
             <a:avLst/>
@@ -13378,7 +13380,7 @@
               <a:buNone/>
             </a:pPr>
             <a:r>
-              <a:rPr lang="en-US" sz="1300" b="1" dirty="0">
+              <a:rPr lang="en-US" sz="1220" b="1" dirty="0">
                 <a:solidFill>
                   <a:srgbClr val="0068B7"/>
                 </a:solidFill>
@@ -13388,7 +13390,7 @@
               </a:rPr>
               <a:t>Apply the lesson</a:t>
             </a:r>
-            <a:endParaRPr lang="en-US" sz="1300" dirty="0"/>
+            <a:endParaRPr lang="en-US" sz="1220" dirty="0"/>
           </a:p>
         </p:txBody>
       </p:sp>
@@ -13400,8 +13402,8 @@
         </p:nvSpPr>
         <p:spPr>
           <a:xfrm>
-            <a:off x="8211312" y="1892808"/>
-            <a:ext cx="2734056" cy="1536192"/>
+            <a:off x="8211312" y="1856232"/>
+            <a:ext cx="2734056" cy="1591056"/>
           </a:xfrm>
           <a:prstGeom prst="rect">
             <a:avLst/>
@@ -13419,7 +13421,7 @@
               <a:buNone/>
             </a:pPr>
             <a:r>
-              <a:rPr lang="en-US" sz="1320" dirty="0">
+              <a:rPr lang="en-US" sz="1220" dirty="0">
                 <a:solidFill>
                   <a:srgbClr val="17364A"/>
                 </a:solidFill>
@@ -13427,9 +13429,9 @@
                 <a:ea typeface="Aptos" pitchFamily="34" charset="-122"/>
                 <a:cs typeface="Aptos" pitchFamily="34" charset="-120"/>
               </a:rPr>
-              <a:t>Use the related plays to identify decisions, participants, timing, approvals, and documentation needed for responsible implementation.</a:t>
-            </a:r>
-            <a:endParaRPr lang="en-US" sz="1320" dirty="0"/>
+              <a:t>Use the related plays to identify decisions, participants, timing, approvals,.</a:t>
+            </a:r>
+            <a:endParaRPr lang="en-US" sz="1220" dirty="0"/>
           </a:p>
         </p:txBody>
       </p:sp>
@@ -13468,8 +13470,8 @@
         </p:nvSpPr>
         <p:spPr>
           <a:xfrm>
-            <a:off x="8211312" y="3941064"/>
-            <a:ext cx="2734056" cy="256032"/>
+            <a:off x="8211312" y="3922776"/>
+            <a:ext cx="2734056" cy="228600"/>
           </a:xfrm>
           <a:prstGeom prst="rect">
             <a:avLst/>
@@ -13485,7 +13487,7 @@
               <a:buNone/>
             </a:pPr>
             <a:r>
-              <a:rPr lang="en-US" sz="1300" b="1" dirty="0">
+              <a:rPr lang="en-US" sz="1220" b="1" dirty="0">
                 <a:solidFill>
                   <a:srgbClr val="0068B7"/>
                 </a:solidFill>
@@ -13495,7 +13497,7 @@
               </a:rPr>
               <a:t>Use the play links to</a:t>
             </a:r>
-            <a:endParaRPr lang="en-US" sz="1300" dirty="0"/>
+            <a:endParaRPr lang="en-US" sz="1220" dirty="0"/>
           </a:p>
         </p:txBody>
       </p:sp>
@@ -13507,8 +13509,8 @@
         </p:nvSpPr>
         <p:spPr>
           <a:xfrm>
-            <a:off x="8229600" y="4306824"/>
-            <a:ext cx="2679192" cy="941832"/>
+            <a:off x="8229600" y="4251960"/>
+            <a:ext cx="2679192" cy="1033272"/>
           </a:xfrm>
           <a:prstGeom prst="rect">
             <a:avLst/>
@@ -13526,7 +13528,7 @@
               <a:buNone/>
             </a:pPr>
             <a:r>
-              <a:rPr lang="en-US" sz="1220" dirty="0">
+              <a:rPr lang="en-US" sz="1140" dirty="0">
                 <a:solidFill>
                   <a:srgbClr val="17364A"/>
                 </a:solidFill>
@@ -13536,14 +13538,14 @@
               </a:rPr>
               <a:t>Locate the decision point in the playbook sequence.</a:t>
             </a:r>
-            <a:endParaRPr lang="en-US" sz="1220" dirty="0"/>
-          </a:p>
-          <a:p>
-            <a:pPr indent="0" marL="0">
-              <a:buNone/>
-            </a:pPr>
-            <a:r>
-              <a:rPr lang="en-US" sz="1220" dirty="0">
+            <a:endParaRPr lang="en-US" sz="1140" dirty="0"/>
+          </a:p>
+          <a:p>
+            <a:pPr indent="0" marL="0">
+              <a:buNone/>
+            </a:pPr>
+            <a:r>
+              <a:rPr lang="en-US" sz="1140" dirty="0">
                 <a:solidFill>
                   <a:srgbClr val="17364A"/>
                 </a:solidFill>
@@ -13553,14 +13555,14 @@
               </a:rPr>
               <a:t>Identify who should participate in the work.</a:t>
             </a:r>
-            <a:endParaRPr lang="en-US" sz="1220" dirty="0"/>
-          </a:p>
-          <a:p>
-            <a:pPr indent="0" marL="0">
-              <a:buNone/>
-            </a:pPr>
-            <a:r>
-              <a:rPr lang="en-US" sz="1220" dirty="0">
+            <a:endParaRPr lang="en-US" sz="1140" dirty="0"/>
+          </a:p>
+          <a:p>
+            <a:pPr indent="0" marL="0">
+              <a:buNone/>
+            </a:pPr>
+            <a:r>
+              <a:rPr lang="en-US" sz="1140" dirty="0">
                 <a:solidFill>
                   <a:srgbClr val="17364A"/>
                 </a:solidFill>
@@ -13568,9 +13570,9 @@
                 <a:ea typeface="Aptos" pitchFamily="34" charset="-122"/>
                 <a:cs typeface="Aptos" pitchFamily="34" charset="-120"/>
               </a:rPr>
-              <a:t>Document the review, approval, or implementation step.</a:t>
-            </a:r>
-            <a:endParaRPr lang="en-US" sz="1220" dirty="0"/>
+              <a:t>Document the review, approval, or implementation.</a:t>
+            </a:r>
+            <a:endParaRPr lang="en-US" sz="1140" dirty="0"/>
           </a:p>
         </p:txBody>
       </p:sp>
@@ -13888,7 +13890,7 @@
                 <a:ea typeface="Aptos" pitchFamily="34" charset="-122"/>
                 <a:cs typeface="Aptos" pitchFamily="34" charset="-120"/>
               </a:rPr>
-              <a:t>• Tool 1: AI Vision &amp; Principles Workshop (Workshop) - Use this tool to complete or strengthen.</a:t>
+              <a:t>• Tool 1: AI Vision &amp; Principles Workshop (Workshop) - Use this tool to.</a:t>
             </a:r>
             <a:endParaRPr lang="en-US" sz="1850" dirty="0"/>
           </a:p>
@@ -13905,7 +13907,7 @@
                 <a:ea typeface="Aptos" pitchFamily="34" charset="-122"/>
                 <a:cs typeface="Aptos" pitchFamily="34" charset="-120"/>
               </a:rPr>
-              <a:t>• Tool 3: Equity Impact Assessment Checklist (Checklist) - Use this tool to complete or.</a:t>
+              <a:t>• Tool 3: Equity Impact Assessment Checklist (Checklist) - Use this tool to.</a:t>
             </a:r>
             <a:endParaRPr lang="en-US" sz="1850" dirty="0"/>
           </a:p>
@@ -13922,7 +13924,7 @@
                 <a:ea typeface="Aptos" pitchFamily="34" charset="-122"/>
                 <a:cs typeface="Aptos" pitchFamily="34" charset="-120"/>
               </a:rPr>
-              <a:t>• Tool 20: Community Engagement Planning (Planning) - Use Community Engagement Planning to.</a:t>
+              <a:t>• Tool 20: Community Engagement Planning (Planning) - Use Community Engagement.</a:t>
             </a:r>
             <a:endParaRPr lang="en-US" sz="1850" dirty="0"/>
           </a:p>
@@ -13939,7 +13941,7 @@
                 <a:ea typeface="Aptos" pitchFamily="34" charset="-122"/>
                 <a:cs typeface="Aptos" pitchFamily="34" charset="-120"/>
               </a:rPr>
-              <a:t>• Tool 21: Stakeholder Mapping &amp; RACI (Template) - Use Stakeholder Mapping &amp; RACI to translate.</a:t>
+              <a:t>• Tool 21: Stakeholder Mapping &amp; RACI (Template) - Use Stakeholder Mapping &amp;.</a:t>
             </a:r>
             <a:endParaRPr lang="en-US" sz="1850" dirty="0"/>
           </a:p>
@@ -13980,8 +13982,8 @@
         </p:nvSpPr>
         <p:spPr>
           <a:xfrm>
-            <a:off x="8211312" y="1563624"/>
-            <a:ext cx="2734056" cy="256032"/>
+            <a:off x="8211312" y="1545336"/>
+            <a:ext cx="2734056" cy="228600"/>
           </a:xfrm>
           <a:prstGeom prst="rect">
             <a:avLst/>
@@ -13997,7 +13999,7 @@
               <a:buNone/>
             </a:pPr>
             <a:r>
-              <a:rPr lang="en-US" sz="1300" b="1" dirty="0">
+              <a:rPr lang="en-US" sz="1220" b="1" dirty="0">
                 <a:solidFill>
                   <a:srgbClr val="0068B7"/>
                 </a:solidFill>
@@ -14007,7 +14009,7 @@
               </a:rPr>
               <a:t>Use the tools</a:t>
             </a:r>
-            <a:endParaRPr lang="en-US" sz="1300" dirty="0"/>
+            <a:endParaRPr lang="en-US" sz="1220" dirty="0"/>
           </a:p>
         </p:txBody>
       </p:sp>
@@ -14019,8 +14021,8 @@
         </p:nvSpPr>
         <p:spPr>
           <a:xfrm>
-            <a:off x="8211312" y="1892808"/>
-            <a:ext cx="2734056" cy="1536192"/>
+            <a:off x="8211312" y="1856232"/>
+            <a:ext cx="2734056" cy="1591056"/>
           </a:xfrm>
           <a:prstGeom prst="rect">
             <a:avLst/>
@@ -14038,7 +14040,7 @@
               <a:buNone/>
             </a:pPr>
             <a:r>
-              <a:rPr lang="en-US" sz="1320" dirty="0">
+              <a:rPr lang="en-US" sz="1220" dirty="0">
                 <a:solidFill>
                   <a:srgbClr val="17364A"/>
                 </a:solidFill>
@@ -14046,9 +14048,9 @@
                 <a:ea typeface="Aptos" pitchFamily="34" charset="-122"/>
                 <a:cs typeface="Aptos" pitchFamily="34" charset="-120"/>
               </a:rPr>
-              <a:t>Use linked tools when your department needs a structured worksheet, template, checklist, review process, or documentation artifact.</a:t>
-            </a:r>
-            <a:endParaRPr lang="en-US" sz="1320" dirty="0"/>
+              <a:t>Use linked tools when your department needs a structured worksheet, template,.</a:t>
+            </a:r>
+            <a:endParaRPr lang="en-US" sz="1220" dirty="0"/>
           </a:p>
         </p:txBody>
       </p:sp>
@@ -14087,8 +14089,8 @@
         </p:nvSpPr>
         <p:spPr>
           <a:xfrm>
-            <a:off x="8211312" y="3941064"/>
-            <a:ext cx="2734056" cy="256032"/>
+            <a:off x="8211312" y="3922776"/>
+            <a:ext cx="2734056" cy="228600"/>
           </a:xfrm>
           <a:prstGeom prst="rect">
             <a:avLst/>
@@ -14104,7 +14106,7 @@
               <a:buNone/>
             </a:pPr>
             <a:r>
-              <a:rPr lang="en-US" sz="1300" b="1" dirty="0">
+              <a:rPr lang="en-US" sz="1220" b="1" dirty="0">
                 <a:solidFill>
                   <a:srgbClr val="0068B7"/>
                 </a:solidFill>
@@ -14114,7 +14116,7 @@
               </a:rPr>
               <a:t>Tool selection cues</a:t>
             </a:r>
-            <a:endParaRPr lang="en-US" sz="1300" dirty="0"/>
+            <a:endParaRPr lang="en-US" sz="1220" dirty="0"/>
           </a:p>
         </p:txBody>
       </p:sp>
@@ -14126,8 +14128,8 @@
         </p:nvSpPr>
         <p:spPr>
           <a:xfrm>
-            <a:off x="8229600" y="4306824"/>
-            <a:ext cx="2679192" cy="941832"/>
+            <a:off x="8229600" y="4251960"/>
+            <a:ext cx="2679192" cy="1033272"/>
           </a:xfrm>
           <a:prstGeom prst="rect">
             <a:avLst/>
@@ -14145,7 +14147,7 @@
               <a:buNone/>
             </a:pPr>
             <a:r>
-              <a:rPr lang="en-US" sz="1220" dirty="0">
+              <a:rPr lang="en-US" sz="1140" dirty="0">
                 <a:solidFill>
                   <a:srgbClr val="17364A"/>
                 </a:solidFill>
@@ -14155,14 +14157,14 @@
               </a:rPr>
               <a:t>Use a tool when no comparable local process exists.</a:t>
             </a:r>
-            <a:endParaRPr lang="en-US" sz="1220" dirty="0"/>
-          </a:p>
-          <a:p>
-            <a:pPr indent="0" marL="0">
-              <a:buNone/>
-            </a:pPr>
-            <a:r>
-              <a:rPr lang="en-US" sz="1220" dirty="0">
+            <a:endParaRPr lang="en-US" sz="1140" dirty="0"/>
+          </a:p>
+          <a:p>
+            <a:pPr indent="0" marL="0">
+              <a:buNone/>
+            </a:pPr>
+            <a:r>
+              <a:rPr lang="en-US" sz="1140" dirty="0">
                 <a:solidFill>
                   <a:srgbClr val="17364A"/>
                 </a:solidFill>
@@ -14170,16 +14172,16 @@
                 <a:ea typeface="Aptos" pitchFamily="34" charset="-122"/>
                 <a:cs typeface="Aptos" pitchFamily="34" charset="-120"/>
               </a:rPr>
-              <a:t>Adapt existing department templates when they already fit the.</a:t>
-            </a:r>
-            <a:endParaRPr lang="en-US" sz="1220" dirty="0"/>
-          </a:p>
-          <a:p>
-            <a:pPr indent="0" marL="0">
-              <a:buNone/>
-            </a:pPr>
-            <a:r>
-              <a:rPr lang="en-US" sz="1220" dirty="0">
+              <a:t>Adapt existing department templates when they.</a:t>
+            </a:r>
+            <a:endParaRPr lang="en-US" sz="1140" dirty="0"/>
+          </a:p>
+          <a:p>
+            <a:pPr indent="0" marL="0">
+              <a:buNone/>
+            </a:pPr>
+            <a:r>
+              <a:rPr lang="en-US" sz="1140" dirty="0">
                 <a:solidFill>
                   <a:srgbClr val="17364A"/>
                 </a:solidFill>
@@ -14187,9 +14189,9 @@
                 <a:ea typeface="Aptos" pitchFamily="34" charset="-122"/>
                 <a:cs typeface="Aptos" pitchFamily="34" charset="-120"/>
               </a:rPr>
-              <a:t>Save the completed artifact as evidence of the decision.</a:t>
-            </a:r>
-            <a:endParaRPr lang="en-US" sz="1220" dirty="0"/>
+              <a:t>Save the completed artifact as evidence of the.</a:t>
+            </a:r>
+            <a:endParaRPr lang="en-US" sz="1140" dirty="0"/>
           </a:p>
         </p:txBody>
       </p:sp>
@@ -14480,8 +14482,8 @@
         </p:nvSpPr>
         <p:spPr>
           <a:xfrm>
-            <a:off x="868680" y="1508760"/>
-            <a:ext cx="6309360" cy="4160520"/>
+            <a:off x="822960" y="1463040"/>
+            <a:ext cx="6565392" cy="4343400"/>
           </a:xfrm>
           <a:prstGeom prst="rect">
             <a:avLst/>
@@ -14499,7 +14501,7 @@
               <a:buNone/>
             </a:pPr>
             <a:r>
-              <a:rPr lang="en-US" sz="2100" dirty="0">
+              <a:rPr lang="en-US" sz="1920" dirty="0">
                 <a:solidFill>
                   <a:srgbClr val="003A63"/>
                 </a:solidFill>
@@ -14507,16 +14509,16 @@
                 <a:ea typeface="Aptos" pitchFamily="34" charset="-122"/>
                 <a:cs typeface="Aptos" pitchFamily="34" charset="-120"/>
               </a:rPr>
-              <a:t>• Explain why generative AI outputs require structured review before public health use.</a:t>
-            </a:r>
-            <a:endParaRPr lang="en-US" sz="2100" dirty="0"/>
-          </a:p>
-          <a:p>
-            <a:pPr indent="0" marL="0">
-              <a:buNone/>
-            </a:pPr>
-            <a:r>
-              <a:rPr lang="en-US" sz="2100" dirty="0">
+              <a:t>• Explain why generative AI outputs require structured review before public.</a:t>
+            </a:r>
+            <a:endParaRPr lang="en-US" sz="1920" dirty="0"/>
+          </a:p>
+          <a:p>
+            <a:pPr indent="0" marL="0">
+              <a:buNone/>
+            </a:pPr>
+            <a:r>
+              <a:rPr lang="en-US" sz="1920" dirty="0">
                 <a:solidFill>
                   <a:srgbClr val="003A63"/>
                 </a:solidFill>
@@ -14524,16 +14526,16 @@
                 <a:ea typeface="Aptos" pitchFamily="34" charset="-122"/>
                 <a:cs typeface="Aptos" pitchFamily="34" charset="-120"/>
               </a:rPr>
-              <a:t>• Distinguish factuality, source grounding, completeness, relevance, tone, and accessibility.</a:t>
-            </a:r>
-            <a:endParaRPr lang="en-US" sz="2100" dirty="0"/>
-          </a:p>
-          <a:p>
-            <a:pPr indent="0" marL="0">
-              <a:buNone/>
-            </a:pPr>
-            <a:r>
-              <a:rPr lang="en-US" sz="2100" dirty="0">
+              <a:t>• Distinguish factuality, source grounding, completeness, relevance, tone, and.</a:t>
+            </a:r>
+            <a:endParaRPr lang="en-US" sz="1920" dirty="0"/>
+          </a:p>
+          <a:p>
+            <a:pPr indent="0" marL="0">
+              <a:buNone/>
+            </a:pPr>
+            <a:r>
+              <a:rPr lang="en-US" sz="1920" dirty="0">
                 <a:solidFill>
                   <a:srgbClr val="003A63"/>
                 </a:solidFill>
@@ -14541,9 +14543,9 @@
                 <a:ea typeface="Aptos" pitchFamily="34" charset="-122"/>
                 <a:cs typeface="Aptos" pitchFamily="34" charset="-120"/>
               </a:rPr>
-              <a:t>• Identify hallucinations, omissions, unsupported claims, and misleading certainty.</a:t>
-            </a:r>
-            <a:endParaRPr lang="en-US" sz="2100" dirty="0"/>
+              <a:t>• Identify hallucinations, omissions, unsupported claims, and misleading.</a:t>
+            </a:r>
+            <a:endParaRPr lang="en-US" sz="1920" dirty="0"/>
           </a:p>
         </p:txBody>
       </p:sp>
@@ -14555,12 +14557,12 @@
         </p:nvSpPr>
         <p:spPr>
           <a:xfrm>
-            <a:off x="7635240" y="1325880"/>
-            <a:ext cx="3474720" cy="1207008"/>
+            <a:off x="7543800" y="1325880"/>
+            <a:ext cx="3611880" cy="1261872"/>
           </a:xfrm>
           <a:prstGeom prst="roundRect">
             <a:avLst>
-              <a:gd name="adj" fmla="val 9091"/>
+              <a:gd name="adj" fmla="val 8696"/>
             </a:avLst>
           </a:prstGeom>
           <a:solidFill>
@@ -14582,8 +14584,8 @@
         </p:nvSpPr>
         <p:spPr>
           <a:xfrm>
-            <a:off x="7799832" y="1472184"/>
-            <a:ext cx="3145536" cy="256032"/>
+            <a:off x="7708392" y="1453896"/>
+            <a:ext cx="3282696" cy="228600"/>
           </a:xfrm>
           <a:prstGeom prst="rect">
             <a:avLst/>
@@ -14599,7 +14601,7 @@
               <a:buNone/>
             </a:pPr>
             <a:r>
-              <a:rPr lang="en-US" sz="1300" b="1" dirty="0">
+              <a:rPr lang="en-US" sz="1220" b="1" dirty="0">
                 <a:solidFill>
                   <a:srgbClr val="0068B7"/>
                 </a:solidFill>
@@ -14609,7 +14611,7 @@
               </a:rPr>
               <a:t>Data decision</a:t>
             </a:r>
-            <a:endParaRPr lang="en-US" sz="1300" dirty="0"/>
+            <a:endParaRPr lang="en-US" sz="1220" dirty="0"/>
           </a:p>
         </p:txBody>
       </p:sp>
@@ -14621,8 +14623,8 @@
         </p:nvSpPr>
         <p:spPr>
           <a:xfrm>
-            <a:off x="7799832" y="1801368"/>
-            <a:ext cx="3145536" cy="640080"/>
+            <a:off x="7708392" y="1764792"/>
+            <a:ext cx="3282696" cy="749808"/>
           </a:xfrm>
           <a:prstGeom prst="rect">
             <a:avLst/>
@@ -14640,7 +14642,7 @@
               <a:buNone/>
             </a:pPr>
             <a:r>
-              <a:rPr lang="en-US" sz="1320" dirty="0">
+              <a:rPr lang="en-US" sz="1220" dirty="0">
                 <a:solidFill>
                   <a:srgbClr val="17364A"/>
                 </a:solidFill>
@@ -14648,9 +14650,9 @@
                 <a:ea typeface="Aptos" pitchFamily="34" charset="-122"/>
                 <a:cs typeface="Aptos" pitchFamily="34" charset="-120"/>
               </a:rPr>
-              <a:t>Explain why generative AI outputs require structured review before public health use.</a:t>
-            </a:r>
-            <a:endParaRPr lang="en-US" sz="1320" dirty="0"/>
+              <a:t>Explain why generative AI outputs require structured review before public health.</a:t>
+            </a:r>
+            <a:endParaRPr lang="en-US" sz="1220" dirty="0"/>
           </a:p>
         </p:txBody>
       </p:sp>
@@ -14662,12 +14664,12 @@
         </p:nvSpPr>
         <p:spPr>
           <a:xfrm>
-            <a:off x="7635240" y="2670048"/>
-            <a:ext cx="3474720" cy="1377086"/>
+            <a:off x="7543800" y="2724912"/>
+            <a:ext cx="3611880" cy="1527048"/>
           </a:xfrm>
           <a:prstGeom prst="roundRect">
             <a:avLst>
-              <a:gd name="adj" fmla="val 7968"/>
+              <a:gd name="adj" fmla="val 7186"/>
             </a:avLst>
           </a:prstGeom>
           <a:solidFill>
@@ -14689,8 +14691,8 @@
         </p:nvSpPr>
         <p:spPr>
           <a:xfrm>
-            <a:off x="7799832" y="2816352"/>
-            <a:ext cx="3145536" cy="256032"/>
+            <a:off x="7708392" y="2852928"/>
+            <a:ext cx="3282696" cy="228600"/>
           </a:xfrm>
           <a:prstGeom prst="rect">
             <a:avLst/>
@@ -14706,7 +14708,7 @@
               <a:buNone/>
             </a:pPr>
             <a:r>
-              <a:rPr lang="en-US" sz="1300" b="1" dirty="0">
+              <a:rPr lang="en-US" sz="1220" b="1" dirty="0">
                 <a:solidFill>
                   <a:srgbClr val="0068B7"/>
                 </a:solidFill>
@@ -14716,7 +14718,7 @@
               </a:rPr>
               <a:t>Concept checkpoints</a:t>
             </a:r>
-            <a:endParaRPr lang="en-US" sz="1300" dirty="0"/>
+            <a:endParaRPr lang="en-US" sz="1220" dirty="0"/>
           </a:p>
         </p:txBody>
       </p:sp>
@@ -14728,8 +14730,8 @@
         </p:nvSpPr>
         <p:spPr>
           <a:xfrm>
-            <a:off x="7818120" y="3182112"/>
-            <a:ext cx="3090672" cy="718718"/>
+            <a:off x="7726680" y="3182112"/>
+            <a:ext cx="3227832" cy="960120"/>
           </a:xfrm>
           <a:prstGeom prst="rect">
             <a:avLst/>
@@ -14747,7 +14749,7 @@
               <a:buNone/>
             </a:pPr>
             <a:r>
-              <a:rPr lang="en-US" sz="1220" dirty="0">
+              <a:rPr lang="en-US" sz="1140" dirty="0">
                 <a:solidFill>
                   <a:srgbClr val="17364A"/>
                 </a:solidFill>
@@ -14755,16 +14757,16 @@
                 <a:ea typeface="Aptos" pitchFamily="34" charset="-122"/>
                 <a:cs typeface="Aptos" pitchFamily="34" charset="-120"/>
               </a:rPr>
-              <a:t>Design review criteria for different output types, including.</a:t>
-            </a:r>
-            <a:endParaRPr lang="en-US" sz="1220" dirty="0"/>
-          </a:p>
-          <a:p>
-            <a:pPr indent="0" marL="0">
-              <a:buNone/>
-            </a:pPr>
-            <a:r>
-              <a:rPr lang="en-US" sz="1220" dirty="0">
+              <a:t>Design review criteria for different output types,.</a:t>
+            </a:r>
+            <a:endParaRPr lang="en-US" sz="1140" dirty="0"/>
+          </a:p>
+          <a:p>
+            <a:pPr indent="0" marL="0">
+              <a:buNone/>
+            </a:pPr>
+            <a:r>
+              <a:rPr lang="en-US" sz="1140" dirty="0">
                 <a:solidFill>
                   <a:srgbClr val="17364A"/>
                 </a:solidFill>
@@ -14772,9 +14774,9 @@
                 <a:ea typeface="Aptos" pitchFamily="34" charset="-122"/>
                 <a:cs typeface="Aptos" pitchFamily="34" charset="-120"/>
               </a:rPr>
-              <a:t>Apply stronger review requirements for sensitive, public-facing,.</a:t>
-            </a:r>
-            <a:endParaRPr lang="en-US" sz="1220" dirty="0"/>
+              <a:t>Apply stronger review requirements for sensitive,.</a:t>
+            </a:r>
+            <a:endParaRPr lang="en-US" sz="1140" dirty="0"/>
           </a:p>
         </p:txBody>
       </p:sp>
@@ -14786,12 +14788,12 @@
         </p:nvSpPr>
         <p:spPr>
           <a:xfrm>
-            <a:off x="7635240" y="4184294"/>
-            <a:ext cx="3474720" cy="1466698"/>
+            <a:off x="7543800" y="4389120"/>
+            <a:ext cx="3611880" cy="1261872"/>
           </a:xfrm>
           <a:prstGeom prst="roundRect">
             <a:avLst>
-              <a:gd name="adj" fmla="val 7481"/>
+              <a:gd name="adj" fmla="val 8696"/>
             </a:avLst>
           </a:prstGeom>
           <a:solidFill>
@@ -14813,8 +14815,8 @@
         </p:nvSpPr>
         <p:spPr>
           <a:xfrm>
-            <a:off x="7799832" y="4330598"/>
-            <a:ext cx="3145536" cy="256032"/>
+            <a:off x="7708392" y="4517136"/>
+            <a:ext cx="3282696" cy="228600"/>
           </a:xfrm>
           <a:prstGeom prst="rect">
             <a:avLst/>
@@ -14830,7 +14832,7 @@
               <a:buNone/>
             </a:pPr>
             <a:r>
-              <a:rPr lang="en-US" sz="1300" b="1" dirty="0">
+              <a:rPr lang="en-US" sz="1220" b="1" dirty="0">
                 <a:solidFill>
                   <a:srgbClr val="0068B7"/>
                 </a:solidFill>
@@ -14840,7 +14842,7 @@
               </a:rPr>
               <a:t>How to validate</a:t>
             </a:r>
-            <a:endParaRPr lang="en-US" sz="1300" dirty="0"/>
+            <a:endParaRPr lang="en-US" sz="1220" dirty="0"/>
           </a:p>
         </p:txBody>
       </p:sp>
@@ -14852,8 +14854,8 @@
         </p:nvSpPr>
         <p:spPr>
           <a:xfrm>
-            <a:off x="7799832" y="4659782"/>
-            <a:ext cx="3145536" cy="899770"/>
+            <a:off x="7708392" y="4828032"/>
+            <a:ext cx="3282696" cy="749808"/>
           </a:xfrm>
           <a:prstGeom prst="rect">
             <a:avLst/>
@@ -14871,7 +14873,7 @@
               <a:buNone/>
             </a:pPr>
             <a:r>
-              <a:rPr lang="en-US" sz="1320" dirty="0">
+              <a:rPr lang="en-US" sz="1220" dirty="0">
                 <a:solidFill>
                   <a:srgbClr val="17364A"/>
                 </a:solidFill>
@@ -14879,9 +14881,9 @@
                 <a:ea typeface="Aptos" pitchFamily="34" charset="-122"/>
                 <a:cs typeface="Aptos" pitchFamily="34" charset="-120"/>
               </a:rPr>
-              <a:t>Use the assignment to test whether you can explain the concept, apply it to a realistic public health situation, and identify what would need review before the work moves forward.</a:t>
-            </a:r>
-            <a:endParaRPr lang="en-US" sz="1320" dirty="0"/>
+              <a:t>Use the assignment to test whether you can explain the concept, apply it to a.</a:t>
+            </a:r>
+            <a:endParaRPr lang="en-US" sz="1220" dirty="0"/>
           </a:p>
         </p:txBody>
       </p:sp>
@@ -15172,8 +15174,8 @@
         </p:nvSpPr>
         <p:spPr>
           <a:xfrm>
-            <a:off x="868680" y="1508760"/>
-            <a:ext cx="6309360" cy="4160520"/>
+            <a:off x="822960" y="1463040"/>
+            <a:ext cx="6565392" cy="4343400"/>
           </a:xfrm>
           <a:prstGeom prst="rect">
             <a:avLst/>
@@ -15191,7 +15193,7 @@
               <a:buNone/>
             </a:pPr>
             <a:r>
-              <a:rPr lang="en-US" sz="2100" dirty="0">
+              <a:rPr lang="en-US" sz="1920" dirty="0">
                 <a:solidFill>
                   <a:srgbClr val="003A63"/>
                 </a:solidFill>
@@ -15201,7 +15203,7 @@
               </a:rPr>
               <a:t>• Produce a generative AI output evaluation rubric.</a:t>
             </a:r>
-            <a:endParaRPr lang="en-US" sz="2100" dirty="0"/>
+            <a:endParaRPr lang="en-US" sz="1920" dirty="0"/>
           </a:p>
         </p:txBody>
       </p:sp>
@@ -15213,12 +15215,12 @@
         </p:nvSpPr>
         <p:spPr>
           <a:xfrm>
-            <a:off x="7635240" y="1325880"/>
-            <a:ext cx="3474720" cy="1207008"/>
+            <a:off x="7543800" y="1325880"/>
+            <a:ext cx="3611880" cy="1261872"/>
           </a:xfrm>
           <a:prstGeom prst="roundRect">
             <a:avLst>
-              <a:gd name="adj" fmla="val 9091"/>
+              <a:gd name="adj" fmla="val 8696"/>
             </a:avLst>
           </a:prstGeom>
           <a:solidFill>
@@ -15240,8 +15242,8 @@
         </p:nvSpPr>
         <p:spPr>
           <a:xfrm>
-            <a:off x="7799832" y="1472184"/>
-            <a:ext cx="3145536" cy="256032"/>
+            <a:off x="7708392" y="1453896"/>
+            <a:ext cx="3282696" cy="228600"/>
           </a:xfrm>
           <a:prstGeom prst="rect">
             <a:avLst/>
@@ -15257,7 +15259,7 @@
               <a:buNone/>
             </a:pPr>
             <a:r>
-              <a:rPr lang="en-US" sz="1300" b="1" dirty="0">
+              <a:rPr lang="en-US" sz="1220" b="1" dirty="0">
                 <a:solidFill>
                   <a:srgbClr val="0068B7"/>
                 </a:solidFill>
@@ -15267,7 +15269,7 @@
               </a:rPr>
               <a:t>Data decision</a:t>
             </a:r>
-            <a:endParaRPr lang="en-US" sz="1300" dirty="0"/>
+            <a:endParaRPr lang="en-US" sz="1220" dirty="0"/>
           </a:p>
         </p:txBody>
       </p:sp>
@@ -15279,8 +15281,8 @@
         </p:nvSpPr>
         <p:spPr>
           <a:xfrm>
-            <a:off x="7799832" y="1801368"/>
-            <a:ext cx="3145536" cy="640080"/>
+            <a:off x="7708392" y="1764792"/>
+            <a:ext cx="3282696" cy="749808"/>
           </a:xfrm>
           <a:prstGeom prst="rect">
             <a:avLst/>
@@ -15298,7 +15300,7 @@
               <a:buNone/>
             </a:pPr>
             <a:r>
-              <a:rPr lang="en-US" sz="1320" dirty="0">
+              <a:rPr lang="en-US" sz="1220" dirty="0">
                 <a:solidFill>
                   <a:srgbClr val="17364A"/>
                 </a:solidFill>
@@ -15308,7 +15310,7 @@
               </a:rPr>
               <a:t>Produce a generative AI output evaluation rubric.</a:t>
             </a:r>
-            <a:endParaRPr lang="en-US" sz="1320" dirty="0"/>
+            <a:endParaRPr lang="en-US" sz="1220" dirty="0"/>
           </a:p>
         </p:txBody>
       </p:sp>
@@ -15320,12 +15322,12 @@
         </p:nvSpPr>
         <p:spPr>
           <a:xfrm>
-            <a:off x="7635240" y="2670048"/>
-            <a:ext cx="3474720" cy="1377086"/>
+            <a:off x="7543800" y="2724912"/>
+            <a:ext cx="3611880" cy="1527048"/>
           </a:xfrm>
           <a:prstGeom prst="roundRect">
             <a:avLst>
-              <a:gd name="adj" fmla="val 7968"/>
+              <a:gd name="adj" fmla="val 7186"/>
             </a:avLst>
           </a:prstGeom>
           <a:solidFill>
@@ -15347,8 +15349,8 @@
         </p:nvSpPr>
         <p:spPr>
           <a:xfrm>
-            <a:off x="7799832" y="2816352"/>
-            <a:ext cx="3145536" cy="256032"/>
+            <a:off x="7708392" y="2852928"/>
+            <a:ext cx="3282696" cy="228600"/>
           </a:xfrm>
           <a:prstGeom prst="rect">
             <a:avLst/>
@@ -15364,7 +15366,7 @@
               <a:buNone/>
             </a:pPr>
             <a:r>
-              <a:rPr lang="en-US" sz="1300" b="1" dirty="0">
+              <a:rPr lang="en-US" sz="1220" b="1" dirty="0">
                 <a:solidFill>
                   <a:srgbClr val="0068B7"/>
                 </a:solidFill>
@@ -15374,7 +15376,7 @@
               </a:rPr>
               <a:t>Concept checkpoints</a:t>
             </a:r>
-            <a:endParaRPr lang="en-US" sz="1300" dirty="0"/>
+            <a:endParaRPr lang="en-US" sz="1220" dirty="0"/>
           </a:p>
         </p:txBody>
       </p:sp>
@@ -15386,8 +15388,8 @@
         </p:nvSpPr>
         <p:spPr>
           <a:xfrm>
-            <a:off x="7818120" y="3182112"/>
-            <a:ext cx="3090672" cy="718718"/>
+            <a:off x="7726680" y="3182112"/>
+            <a:ext cx="3227832" cy="960120"/>
           </a:xfrm>
           <a:prstGeom prst="rect">
             <a:avLst/>
@@ -15405,7 +15407,7 @@
               <a:buNone/>
             </a:pPr>
             <a:r>
-              <a:rPr lang="en-US" sz="1220" dirty="0">
+              <a:rPr lang="en-US" sz="1140" dirty="0">
                 <a:solidFill>
                   <a:srgbClr val="17364A"/>
                 </a:solidFill>
@@ -15415,7 +15417,7 @@
               </a:rPr>
               <a:t>Produce a generative AI output evaluation rubric.</a:t>
             </a:r>
-            <a:endParaRPr lang="en-US" sz="1220" dirty="0"/>
+            <a:endParaRPr lang="en-US" sz="1140" dirty="0"/>
           </a:p>
         </p:txBody>
       </p:sp>
@@ -15427,12 +15429,12 @@
         </p:nvSpPr>
         <p:spPr>
           <a:xfrm>
-            <a:off x="7635240" y="4184294"/>
-            <a:ext cx="3474720" cy="1466698"/>
+            <a:off x="7543800" y="4389120"/>
+            <a:ext cx="3611880" cy="1261872"/>
           </a:xfrm>
           <a:prstGeom prst="roundRect">
             <a:avLst>
-              <a:gd name="adj" fmla="val 7481"/>
+              <a:gd name="adj" fmla="val 8696"/>
             </a:avLst>
           </a:prstGeom>
           <a:solidFill>
@@ -15454,8 +15456,8 @@
         </p:nvSpPr>
         <p:spPr>
           <a:xfrm>
-            <a:off x="7799832" y="4330598"/>
-            <a:ext cx="3145536" cy="256032"/>
+            <a:off x="7708392" y="4517136"/>
+            <a:ext cx="3282696" cy="228600"/>
           </a:xfrm>
           <a:prstGeom prst="rect">
             <a:avLst/>
@@ -15471,7 +15473,7 @@
               <a:buNone/>
             </a:pPr>
             <a:r>
-              <a:rPr lang="en-US" sz="1300" b="1" dirty="0">
+              <a:rPr lang="en-US" sz="1220" b="1" dirty="0">
                 <a:solidFill>
                   <a:srgbClr val="0068B7"/>
                 </a:solidFill>
@@ -15481,7 +15483,7 @@
               </a:rPr>
               <a:t>How to validate</a:t>
             </a:r>
-            <a:endParaRPr lang="en-US" sz="1300" dirty="0"/>
+            <a:endParaRPr lang="en-US" sz="1220" dirty="0"/>
           </a:p>
         </p:txBody>
       </p:sp>
@@ -15493,8 +15495,8 @@
         </p:nvSpPr>
         <p:spPr>
           <a:xfrm>
-            <a:off x="7799832" y="4659782"/>
-            <a:ext cx="3145536" cy="899770"/>
+            <a:off x="7708392" y="4828032"/>
+            <a:ext cx="3282696" cy="749808"/>
           </a:xfrm>
           <a:prstGeom prst="rect">
             <a:avLst/>
@@ -15512,7 +15514,7 @@
               <a:buNone/>
             </a:pPr>
             <a:r>
-              <a:rPr lang="en-US" sz="1320" dirty="0">
+              <a:rPr lang="en-US" sz="1220" dirty="0">
                 <a:solidFill>
                   <a:srgbClr val="17364A"/>
                 </a:solidFill>
@@ -15520,9 +15522,9 @@
                 <a:ea typeface="Aptos" pitchFamily="34" charset="-122"/>
                 <a:cs typeface="Aptos" pitchFamily="34" charset="-120"/>
               </a:rPr>
-              <a:t>Use the assignment to test whether you can explain the concept, apply it to a realistic public health situation, and identify what would need review before the work moves forward.</a:t>
-            </a:r>
-            <a:endParaRPr lang="en-US" sz="1320" dirty="0"/>
+              <a:t>Use the assignment to test whether you can explain the concept, apply it to a.</a:t>
+            </a:r>
+            <a:endParaRPr lang="en-US" sz="1220" dirty="0"/>
           </a:p>
         </p:txBody>
       </p:sp>
@@ -15813,8 +15815,8 @@
         </p:nvSpPr>
         <p:spPr>
           <a:xfrm>
-            <a:off x="868680" y="1508760"/>
-            <a:ext cx="6309360" cy="4160520"/>
+            <a:off x="822960" y="1463040"/>
+            <a:ext cx="6565392" cy="4343400"/>
           </a:xfrm>
           <a:prstGeom prst="rect">
             <a:avLst/>
@@ -15832,7 +15834,7 @@
               <a:buNone/>
             </a:pPr>
             <a:r>
-              <a:rPr lang="en-US" sz="2100" dirty="0">
+              <a:rPr lang="en-US" sz="1920" dirty="0">
                 <a:solidFill>
                   <a:srgbClr val="003A63"/>
                 </a:solidFill>
@@ -15840,16 +15842,16 @@
                 <a:ea typeface="Aptos" pitchFamily="34" charset="-122"/>
                 <a:cs typeface="Aptos" pitchFamily="34" charset="-120"/>
               </a:rPr>
-              <a:t>• Generative AI can draft, summarize, translate, classify, explain, and synthesize information,.</a:t>
-            </a:r>
-            <a:endParaRPr lang="en-US" sz="2100" dirty="0"/>
-          </a:p>
-          <a:p>
-            <a:pPr indent="0" marL="0">
-              <a:buNone/>
-            </a:pPr>
-            <a:r>
-              <a:rPr lang="en-US" sz="2100" dirty="0">
+              <a:t>• Generative AI can draft, summarize, translate, classify, explain, and.</a:t>
+            </a:r>
+            <a:endParaRPr lang="en-US" sz="1920" dirty="0"/>
+          </a:p>
+          <a:p>
+            <a:pPr indent="0" marL="0">
+              <a:buNone/>
+            </a:pPr>
+            <a:r>
+              <a:rPr lang="en-US" sz="1920" dirty="0">
                 <a:solidFill>
                   <a:srgbClr val="003A63"/>
                 </a:solidFill>
@@ -15857,16 +15859,16 @@
                 <a:ea typeface="Aptos" pitchFamily="34" charset="-122"/>
                 <a:cs typeface="Aptos" pitchFamily="34" charset="-120"/>
               </a:rPr>
-              <a:t>• In public health, generated content may affect case review, public communication, policy.</a:t>
-            </a:r>
-            <a:endParaRPr lang="en-US" sz="2100" dirty="0"/>
-          </a:p>
-          <a:p>
-            <a:pPr indent="0" marL="0">
-              <a:buNone/>
-            </a:pPr>
-            <a:r>
-              <a:rPr lang="en-US" sz="2100" dirty="0">
+              <a:t>• In public health, generated content may affect case review, public.</a:t>
+            </a:r>
+            <a:endParaRPr lang="en-US" sz="1920" dirty="0"/>
+          </a:p>
+          <a:p>
+            <a:pPr indent="0" marL="0">
+              <a:buNone/>
+            </a:pPr>
+            <a:r>
+              <a:rPr lang="en-US" sz="1920" dirty="0">
                 <a:solidFill>
                   <a:srgbClr val="003A63"/>
                 </a:solidFill>
@@ -15874,9 +15876,9 @@
                 <a:ea typeface="Aptos" pitchFamily="34" charset="-122"/>
                 <a:cs typeface="Aptos" pitchFamily="34" charset="-120"/>
               </a:rPr>
-              <a:t>• Fluent writing does not guarantee accuracy, completeness, appropriateness, or safety.</a:t>
-            </a:r>
-            <a:endParaRPr lang="en-US" sz="2100" dirty="0"/>
+              <a:t>• Fluent writing does not guarantee accuracy, completeness, appropriateness,.</a:t>
+            </a:r>
+            <a:endParaRPr lang="en-US" sz="1920" dirty="0"/>
           </a:p>
         </p:txBody>
       </p:sp>
@@ -15888,12 +15890,12 @@
         </p:nvSpPr>
         <p:spPr>
           <a:xfrm>
-            <a:off x="7635240" y="1325880"/>
-            <a:ext cx="3474720" cy="1255471"/>
+            <a:off x="7543800" y="1325880"/>
+            <a:ext cx="3611880" cy="1261872"/>
           </a:xfrm>
           <a:prstGeom prst="roundRect">
             <a:avLst>
-              <a:gd name="adj" fmla="val 8740"/>
+              <a:gd name="adj" fmla="val 8696"/>
             </a:avLst>
           </a:prstGeom>
           <a:solidFill>
@@ -15915,8 +15917,8 @@
         </p:nvSpPr>
         <p:spPr>
           <a:xfrm>
-            <a:off x="7799832" y="1472184"/>
-            <a:ext cx="3145536" cy="256032"/>
+            <a:off x="7708392" y="1453896"/>
+            <a:ext cx="3282696" cy="228600"/>
           </a:xfrm>
           <a:prstGeom prst="rect">
             <a:avLst/>
@@ -15932,7 +15934,7 @@
               <a:buNone/>
             </a:pPr>
             <a:r>
-              <a:rPr lang="en-US" sz="1300" b="1" dirty="0">
+              <a:rPr lang="en-US" sz="1220" b="1" dirty="0">
                 <a:solidFill>
                   <a:srgbClr val="0068B7"/>
                 </a:solidFill>
@@ -15942,7 +15944,7 @@
               </a:rPr>
               <a:t>Data decision</a:t>
             </a:r>
-            <a:endParaRPr lang="en-US" sz="1300" dirty="0"/>
+            <a:endParaRPr lang="en-US" sz="1220" dirty="0"/>
           </a:p>
         </p:txBody>
       </p:sp>
@@ -15954,8 +15956,8 @@
         </p:nvSpPr>
         <p:spPr>
           <a:xfrm>
-            <a:off x="7799832" y="1801368"/>
-            <a:ext cx="3145536" cy="688543"/>
+            <a:off x="7708392" y="1764792"/>
+            <a:ext cx="3282696" cy="749808"/>
           </a:xfrm>
           <a:prstGeom prst="rect">
             <a:avLst/>
@@ -15973,7 +15975,7 @@
               <a:buNone/>
             </a:pPr>
             <a:r>
-              <a:rPr lang="en-US" sz="1320" dirty="0">
+              <a:rPr lang="en-US" sz="1220" dirty="0">
                 <a:solidFill>
                   <a:srgbClr val="17364A"/>
                 </a:solidFill>
@@ -15981,9 +15983,9 @@
                 <a:ea typeface="Aptos" pitchFamily="34" charset="-122"/>
                 <a:cs typeface="Aptos" pitchFamily="34" charset="-120"/>
               </a:rPr>
-              <a:t>Generative AI can draft, summarize, translate, classify, explain, and synthesize information, but its.</a:t>
-            </a:r>
-            <a:endParaRPr lang="en-US" sz="1320" dirty="0"/>
+              <a:t>Generative AI can draft, summarize, translate, classify, explain, and synthesize.</a:t>
+            </a:r>
+            <a:endParaRPr lang="en-US" sz="1220" dirty="0"/>
           </a:p>
         </p:txBody>
       </p:sp>
@@ -15995,12 +15997,12 @@
         </p:nvSpPr>
         <p:spPr>
           <a:xfrm>
-            <a:off x="7635240" y="2718511"/>
-            <a:ext cx="3474720" cy="1328623"/>
+            <a:off x="7543800" y="2724912"/>
+            <a:ext cx="3611880" cy="1527048"/>
           </a:xfrm>
           <a:prstGeom prst="roundRect">
             <a:avLst>
-              <a:gd name="adj" fmla="val 8259"/>
+              <a:gd name="adj" fmla="val 7186"/>
             </a:avLst>
           </a:prstGeom>
           <a:solidFill>
@@ -16022,24 +16024,26 @@
         </p:nvSpPr>
         <p:spPr>
           <a:xfrm>
-            <a:off x="7799832" y="2846527"/>
-            <a:ext cx="3145536" cy="237744"/>
-          </a:xfrm>
-          <a:prstGeom prst="rect">
-            <a:avLst/>
-          </a:prstGeom>
-          <a:noFill/>
-          <a:ln/>
-        </p:spPr>
-        <p:txBody>
-          <a:bodyPr wrap="square" lIns="0" tIns="0" rIns="0" bIns="0" rtlCol="0" anchor="ctr"/>
-          <a:lstStyle/>
-          <a:p>
-            <a:pPr indent="0" marL="0">
-              <a:buNone/>
-            </a:pPr>
-            <a:r>
-              <a:rPr lang="en-US" sz="1250" b="1" dirty="0">
+            <a:off x="7708392" y="2852928"/>
+            <a:ext cx="3282696" cy="219456"/>
+          </a:xfrm>
+          <a:prstGeom prst="rect">
+            <a:avLst/>
+          </a:prstGeom>
+          <a:noFill/>
+          <a:ln/>
+        </p:spPr>
+        <p:txBody>
+          <a:bodyPr wrap="square" lIns="0" tIns="0" rIns="0" bIns="0" rtlCol="0" anchor="ctr">
+            <a:normAutofit/>
+          </a:bodyPr>
+          <a:lstStyle/>
+          <a:p>
+            <a:pPr indent="0" marL="0">
+              <a:buNone/>
+            </a:pPr>
+            <a:r>
+              <a:rPr lang="en-US" sz="1160" b="1" dirty="0">
                 <a:solidFill>
                   <a:srgbClr val="0068B7"/>
                 </a:solidFill>
@@ -16049,7 +16053,7 @@
               </a:rPr>
               <a:t>Data-to-decision flow</a:t>
             </a:r>
-            <a:endParaRPr lang="en-US" sz="1250" dirty="0"/>
+            <a:endParaRPr lang="en-US" sz="1160" dirty="0"/>
           </a:p>
         </p:txBody>
       </p:sp>
@@ -16061,7 +16065,7 @@
         </p:nvSpPr>
         <p:spPr>
           <a:xfrm>
-            <a:off x="8763000" y="3399739"/>
+            <a:off x="8717280" y="3406140"/>
             <a:ext cx="164592" cy="0"/>
           </a:xfrm>
           <a:prstGeom prst="line">
@@ -16084,8 +16088,8 @@
         </p:nvSpPr>
         <p:spPr>
           <a:xfrm>
-            <a:off x="7872984" y="3248863"/>
-            <a:ext cx="890016" cy="301752"/>
+            <a:off x="7781544" y="3255264"/>
+            <a:ext cx="935736" cy="301752"/>
           </a:xfrm>
           <a:prstGeom prst="roundRect">
             <a:avLst>
@@ -16111,8 +16115,8 @@
         </p:nvSpPr>
         <p:spPr>
           <a:xfrm>
-            <a:off x="7909560" y="3322015"/>
-            <a:ext cx="816864" cy="146304"/>
+            <a:off x="7818120" y="3328416"/>
+            <a:ext cx="862584" cy="146304"/>
           </a:xfrm>
           <a:prstGeom prst="rect">
             <a:avLst/>
@@ -16152,7 +16156,7 @@
         </p:nvSpPr>
         <p:spPr>
           <a:xfrm>
-            <a:off x="9817608" y="3399739"/>
+            <a:off x="9817608" y="3406140"/>
             <a:ext cx="164592" cy="0"/>
           </a:xfrm>
           <a:prstGeom prst="line">
@@ -16175,8 +16179,8 @@
         </p:nvSpPr>
         <p:spPr>
           <a:xfrm>
-            <a:off x="8927592" y="3248863"/>
-            <a:ext cx="890016" cy="301752"/>
+            <a:off x="8881872" y="3255264"/>
+            <a:ext cx="935736" cy="301752"/>
           </a:xfrm>
           <a:prstGeom prst="roundRect">
             <a:avLst>
@@ -16202,8 +16206,8 @@
         </p:nvSpPr>
         <p:spPr>
           <a:xfrm>
-            <a:off x="8964168" y="3322015"/>
-            <a:ext cx="816864" cy="146304"/>
+            <a:off x="8918448" y="3328416"/>
+            <a:ext cx="862584" cy="146304"/>
           </a:xfrm>
           <a:prstGeom prst="rect">
             <a:avLst/>
@@ -16243,8 +16247,8 @@
         </p:nvSpPr>
         <p:spPr>
           <a:xfrm>
-            <a:off x="9982200" y="3248863"/>
-            <a:ext cx="890016" cy="301752"/>
+            <a:off x="9982200" y="3255264"/>
+            <a:ext cx="935736" cy="301752"/>
           </a:xfrm>
           <a:prstGeom prst="roundRect">
             <a:avLst>
@@ -16270,8 +16274,8 @@
         </p:nvSpPr>
         <p:spPr>
           <a:xfrm>
-            <a:off x="10018776" y="3322015"/>
-            <a:ext cx="816864" cy="146304"/>
+            <a:off x="10018776" y="3328416"/>
+            <a:ext cx="862584" cy="146304"/>
           </a:xfrm>
           <a:prstGeom prst="rect">
             <a:avLst/>
@@ -16311,8 +16315,8 @@
         </p:nvSpPr>
         <p:spPr>
           <a:xfrm>
-            <a:off x="7854696" y="3742639"/>
-            <a:ext cx="3035808" cy="158191"/>
+            <a:off x="7763256" y="3749040"/>
+            <a:ext cx="3172968" cy="356616"/>
           </a:xfrm>
           <a:prstGeom prst="rect">
             <a:avLst/>
@@ -16330,7 +16334,7 @@
               <a:buNone/>
             </a:pPr>
             <a:r>
-              <a:rPr lang="en-US" sz="1120" dirty="0">
+              <a:rPr lang="en-US" sz="1040" dirty="0">
                 <a:solidFill>
                   <a:srgbClr val="17364A"/>
                 </a:solidFill>
@@ -16338,9 +16342,9 @@
                 <a:ea typeface="Aptos" pitchFamily="34" charset="-122"/>
                 <a:cs typeface="Aptos" pitchFamily="34" charset="-120"/>
               </a:rPr>
-              <a:t>The important handoff is not from data to AI; it is from analysis to accountable human review.</a:t>
-            </a:r>
-            <a:endParaRPr lang="en-US" sz="1120" dirty="0"/>
+              <a:t>The important handoff is not from data to AI; it is from analysis to.</a:t>
+            </a:r>
+            <a:endParaRPr lang="en-US" sz="1040" dirty="0"/>
           </a:p>
         </p:txBody>
       </p:sp>
@@ -16352,12 +16356,12 @@
         </p:nvSpPr>
         <p:spPr>
           <a:xfrm>
-            <a:off x="7635240" y="4184294"/>
-            <a:ext cx="3474720" cy="1466698"/>
+            <a:off x="7543800" y="4389120"/>
+            <a:ext cx="3611880" cy="1261872"/>
           </a:xfrm>
           <a:prstGeom prst="roundRect">
             <a:avLst>
-              <a:gd name="adj" fmla="val 7481"/>
+              <a:gd name="adj" fmla="val 8696"/>
             </a:avLst>
           </a:prstGeom>
           <a:solidFill>
@@ -16379,8 +16383,8 @@
         </p:nvSpPr>
         <p:spPr>
           <a:xfrm>
-            <a:off x="7799832" y="4330598"/>
-            <a:ext cx="3145536" cy="256032"/>
+            <a:off x="7708392" y="4517136"/>
+            <a:ext cx="3282696" cy="228600"/>
           </a:xfrm>
           <a:prstGeom prst="rect">
             <a:avLst/>
@@ -16396,7 +16400,7 @@
               <a:buNone/>
             </a:pPr>
             <a:r>
-              <a:rPr lang="en-US" sz="1300" b="1" dirty="0">
+              <a:rPr lang="en-US" sz="1220" b="1" dirty="0">
                 <a:solidFill>
                   <a:srgbClr val="0068B7"/>
                 </a:solidFill>
@@ -16406,7 +16410,7 @@
               </a:rPr>
               <a:t>How to validate</a:t>
             </a:r>
-            <a:endParaRPr lang="en-US" sz="1300" dirty="0"/>
+            <a:endParaRPr lang="en-US" sz="1220" dirty="0"/>
           </a:p>
         </p:txBody>
       </p:sp>
@@ -16418,8 +16422,8 @@
         </p:nvSpPr>
         <p:spPr>
           <a:xfrm>
-            <a:off x="7799832" y="4659782"/>
-            <a:ext cx="3145536" cy="899770"/>
+            <a:off x="7708392" y="4828032"/>
+            <a:ext cx="3282696" cy="749808"/>
           </a:xfrm>
           <a:prstGeom prst="rect">
             <a:avLst/>
@@ -16437,7 +16441,7 @@
               <a:buNone/>
             </a:pPr>
             <a:r>
-              <a:rPr lang="en-US" sz="1320" dirty="0">
+              <a:rPr lang="en-US" sz="1220" dirty="0">
                 <a:solidFill>
                   <a:srgbClr val="17364A"/>
                 </a:solidFill>
@@ -16445,9 +16449,9 @@
                 <a:ea typeface="Aptos" pitchFamily="34" charset="-122"/>
                 <a:cs typeface="Aptos" pitchFamily="34" charset="-120"/>
               </a:rPr>
-              <a:t>Connect the concept to data quality, model performance, validation evidence, monitoring measures, and decisions that remain under human control.</a:t>
-            </a:r>
-            <a:endParaRPr lang="en-US" sz="1320" dirty="0"/>
+              <a:t>Connect the concept to data quality, model performance, validation evidence,.</a:t>
+            </a:r>
+            <a:endParaRPr lang="en-US" sz="1220" dirty="0"/>
           </a:p>
         </p:txBody>
       </p:sp>
@@ -16738,8 +16742,8 @@
         </p:nvSpPr>
         <p:spPr>
           <a:xfrm>
-            <a:off x="868680" y="1508760"/>
-            <a:ext cx="6309360" cy="4160520"/>
+            <a:off x="822960" y="1463040"/>
+            <a:ext cx="6565392" cy="4343400"/>
           </a:xfrm>
           <a:prstGeom prst="rect">
             <a:avLst/>
@@ -16757,7 +16761,7 @@
               <a:buNone/>
             </a:pPr>
             <a:r>
-              <a:rPr lang="en-US" sz="2100" dirty="0">
+              <a:rPr lang="en-US" sz="1920" dirty="0">
                 <a:solidFill>
                   <a:srgbClr val="003A63"/>
                 </a:solidFill>
@@ -16765,16 +16769,16 @@
                 <a:ea typeface="Aptos" pitchFamily="34" charset="-122"/>
                 <a:cs typeface="Aptos" pitchFamily="34" charset="-120"/>
               </a:rPr>
-              <a:t>• Generative AI matters for public health because it can reduce burden in text-heavy workflows.</a:t>
-            </a:r>
-            <a:endParaRPr lang="en-US" sz="2100" dirty="0"/>
-          </a:p>
-          <a:p>
-            <a:pPr indent="0" marL="0">
-              <a:buNone/>
-            </a:pPr>
-            <a:r>
-              <a:rPr lang="en-US" sz="2100" dirty="0">
+              <a:t>• Generative AI matters for public health because it can reduce burden in.</a:t>
+            </a:r>
+            <a:endParaRPr lang="en-US" sz="1920" dirty="0"/>
+          </a:p>
+          <a:p>
+            <a:pPr indent="0" marL="0">
+              <a:buNone/>
+            </a:pPr>
+            <a:r>
+              <a:rPr lang="en-US" sz="1920" dirty="0">
                 <a:solidFill>
                   <a:srgbClr val="003A63"/>
                 </a:solidFill>
@@ -16782,16 +16786,16 @@
                 <a:ea typeface="Aptos" pitchFamily="34" charset="-122"/>
                 <a:cs typeface="Aptos" pitchFamily="34" charset="-120"/>
               </a:rPr>
-              <a:t>• Staff may use it to summarize guidance, draft meeting notes, simplify technical language,.</a:t>
-            </a:r>
-            <a:endParaRPr lang="en-US" sz="2100" dirty="0"/>
-          </a:p>
-          <a:p>
-            <a:pPr indent="0" marL="0">
-              <a:buNone/>
-            </a:pPr>
-            <a:r>
-              <a:rPr lang="en-US" sz="2100" dirty="0">
+              <a:t>• Staff may use it to summarize guidance, draft meeting notes, simplify.</a:t>
+            </a:r>
+            <a:endParaRPr lang="en-US" sz="1920" dirty="0"/>
+          </a:p>
+          <a:p>
+            <a:pPr indent="0" marL="0">
+              <a:buNone/>
+            </a:pPr>
+            <a:r>
+              <a:rPr lang="en-US" sz="1920" dirty="0">
                 <a:solidFill>
                   <a:srgbClr val="003A63"/>
                 </a:solidFill>
@@ -16801,7 +16805,7 @@
               </a:rPr>
               <a:t>• These uses can be valuable when they save time and improve clarity.</a:t>
             </a:r>
-            <a:endParaRPr lang="en-US" sz="2100" dirty="0"/>
+            <a:endParaRPr lang="en-US" sz="1920" dirty="0"/>
           </a:p>
         </p:txBody>
       </p:sp>
@@ -16813,12 +16817,12 @@
         </p:nvSpPr>
         <p:spPr>
           <a:xfrm>
-            <a:off x="7635240" y="1325880"/>
-            <a:ext cx="3474720" cy="1207008"/>
+            <a:off x="7543800" y="1325880"/>
+            <a:ext cx="3611880" cy="1261872"/>
           </a:xfrm>
           <a:prstGeom prst="roundRect">
             <a:avLst>
-              <a:gd name="adj" fmla="val 9091"/>
+              <a:gd name="adj" fmla="val 8696"/>
             </a:avLst>
           </a:prstGeom>
           <a:solidFill>
@@ -16840,8 +16844,8 @@
         </p:nvSpPr>
         <p:spPr>
           <a:xfrm>
-            <a:off x="7799832" y="1472184"/>
-            <a:ext cx="3145536" cy="256032"/>
+            <a:off x="7708392" y="1453896"/>
+            <a:ext cx="3282696" cy="228600"/>
           </a:xfrm>
           <a:prstGeom prst="rect">
             <a:avLst/>
@@ -16857,7 +16861,7 @@
               <a:buNone/>
             </a:pPr>
             <a:r>
-              <a:rPr lang="en-US" sz="1300" b="1" dirty="0">
+              <a:rPr lang="en-US" sz="1220" b="1" dirty="0">
                 <a:solidFill>
                   <a:srgbClr val="0068B7"/>
                 </a:solidFill>
@@ -16867,7 +16871,7 @@
               </a:rPr>
               <a:t>Data decision</a:t>
             </a:r>
-            <a:endParaRPr lang="en-US" sz="1300" dirty="0"/>
+            <a:endParaRPr lang="en-US" sz="1220" dirty="0"/>
           </a:p>
         </p:txBody>
       </p:sp>
@@ -16879,8 +16883,8 @@
         </p:nvSpPr>
         <p:spPr>
           <a:xfrm>
-            <a:off x="7799832" y="1801368"/>
-            <a:ext cx="3145536" cy="640080"/>
+            <a:off x="7708392" y="1764792"/>
+            <a:ext cx="3282696" cy="749808"/>
           </a:xfrm>
           <a:prstGeom prst="rect">
             <a:avLst/>
@@ -16898,7 +16902,7 @@
               <a:buNone/>
             </a:pPr>
             <a:r>
-              <a:rPr lang="en-US" sz="1320" dirty="0">
+              <a:rPr lang="en-US" sz="1220" dirty="0">
                 <a:solidFill>
                   <a:srgbClr val="17364A"/>
                 </a:solidFill>
@@ -16906,9 +16910,9 @@
                 <a:ea typeface="Aptos" pitchFamily="34" charset="-122"/>
                 <a:cs typeface="Aptos" pitchFamily="34" charset="-120"/>
               </a:rPr>
-              <a:t>Generative AI matters for public health because it can reduce burden in text-heavy.</a:t>
-            </a:r>
-            <a:endParaRPr lang="en-US" sz="1320" dirty="0"/>
+              <a:t>Generative AI matters for public health because it can reduce burden in.</a:t>
+            </a:r>
+            <a:endParaRPr lang="en-US" sz="1220" dirty="0"/>
           </a:p>
         </p:txBody>
       </p:sp>
@@ -16920,12 +16924,12 @@
         </p:nvSpPr>
         <p:spPr>
           <a:xfrm>
-            <a:off x="7635240" y="2670048"/>
-            <a:ext cx="3474720" cy="1377086"/>
+            <a:off x="7543800" y="2724912"/>
+            <a:ext cx="3611880" cy="1527048"/>
           </a:xfrm>
           <a:prstGeom prst="roundRect">
             <a:avLst>
-              <a:gd name="adj" fmla="val 7968"/>
+              <a:gd name="adj" fmla="val 7186"/>
             </a:avLst>
           </a:prstGeom>
           <a:solidFill>
@@ -16947,24 +16951,26 @@
         </p:nvSpPr>
         <p:spPr>
           <a:xfrm>
-            <a:off x="7799832" y="2798064"/>
-            <a:ext cx="3145536" cy="237744"/>
-          </a:xfrm>
-          <a:prstGeom prst="rect">
-            <a:avLst/>
-          </a:prstGeom>
-          <a:noFill/>
-          <a:ln/>
-        </p:spPr>
-        <p:txBody>
-          <a:bodyPr wrap="square" lIns="0" tIns="0" rIns="0" bIns="0" rtlCol="0" anchor="ctr"/>
-          <a:lstStyle/>
-          <a:p>
-            <a:pPr indent="0" marL="0">
-              <a:buNone/>
-            </a:pPr>
-            <a:r>
-              <a:rPr lang="en-US" sz="1250" b="1" dirty="0">
+            <a:off x="7708392" y="2852928"/>
+            <a:ext cx="3282696" cy="219456"/>
+          </a:xfrm>
+          <a:prstGeom prst="rect">
+            <a:avLst/>
+          </a:prstGeom>
+          <a:noFill/>
+          <a:ln/>
+        </p:spPr>
+        <p:txBody>
+          <a:bodyPr wrap="square" lIns="0" tIns="0" rIns="0" bIns="0" rtlCol="0" anchor="ctr">
+            <a:normAutofit/>
+          </a:bodyPr>
+          <a:lstStyle/>
+          <a:p>
+            <a:pPr indent="0" marL="0">
+              <a:buNone/>
+            </a:pPr>
+            <a:r>
+              <a:rPr lang="en-US" sz="1160" b="1" dirty="0">
                 <a:solidFill>
                   <a:srgbClr val="0068B7"/>
                 </a:solidFill>
@@ -16974,7 +16980,7 @@
               </a:rPr>
               <a:t>Data-to-decision flow</a:t>
             </a:r>
-            <a:endParaRPr lang="en-US" sz="1250" dirty="0"/>
+            <a:endParaRPr lang="en-US" sz="1160" dirty="0"/>
           </a:p>
         </p:txBody>
       </p:sp>
@@ -16986,7 +16992,7 @@
         </p:nvSpPr>
         <p:spPr>
           <a:xfrm>
-            <a:off x="8763000" y="3351276"/>
+            <a:off x="8717280" y="3406140"/>
             <a:ext cx="164592" cy="0"/>
           </a:xfrm>
           <a:prstGeom prst="line">
@@ -17009,8 +17015,8 @@
         </p:nvSpPr>
         <p:spPr>
           <a:xfrm>
-            <a:off x="7872984" y="3200400"/>
-            <a:ext cx="890016" cy="301752"/>
+            <a:off x="7781544" y="3255264"/>
+            <a:ext cx="935736" cy="301752"/>
           </a:xfrm>
           <a:prstGeom prst="roundRect">
             <a:avLst>
@@ -17036,8 +17042,8 @@
         </p:nvSpPr>
         <p:spPr>
           <a:xfrm>
-            <a:off x="7909560" y="3273552"/>
-            <a:ext cx="816864" cy="146304"/>
+            <a:off x="7818120" y="3328416"/>
+            <a:ext cx="862584" cy="146304"/>
           </a:xfrm>
           <a:prstGeom prst="rect">
             <a:avLst/>
@@ -17077,7 +17083,7 @@
         </p:nvSpPr>
         <p:spPr>
           <a:xfrm>
-            <a:off x="9817608" y="3351276"/>
+            <a:off x="9817608" y="3406140"/>
             <a:ext cx="164592" cy="0"/>
           </a:xfrm>
           <a:prstGeom prst="line">
@@ -17100,8 +17106,8 @@
         </p:nvSpPr>
         <p:spPr>
           <a:xfrm>
-            <a:off x="8927592" y="3200400"/>
-            <a:ext cx="890016" cy="301752"/>
+            <a:off x="8881872" y="3255264"/>
+            <a:ext cx="935736" cy="301752"/>
           </a:xfrm>
           <a:prstGeom prst="roundRect">
             <a:avLst>
@@ -17127,8 +17133,8 @@
         </p:nvSpPr>
         <p:spPr>
           <a:xfrm>
-            <a:off x="8964168" y="3273552"/>
-            <a:ext cx="816864" cy="146304"/>
+            <a:off x="8918448" y="3328416"/>
+            <a:ext cx="862584" cy="146304"/>
           </a:xfrm>
           <a:prstGeom prst="rect">
             <a:avLst/>
@@ -17168,8 +17174,8 @@
         </p:nvSpPr>
         <p:spPr>
           <a:xfrm>
-            <a:off x="9982200" y="3200400"/>
-            <a:ext cx="890016" cy="301752"/>
+            <a:off x="9982200" y="3255264"/>
+            <a:ext cx="935736" cy="301752"/>
           </a:xfrm>
           <a:prstGeom prst="roundRect">
             <a:avLst>
@@ -17195,8 +17201,8 @@
         </p:nvSpPr>
         <p:spPr>
           <a:xfrm>
-            <a:off x="10018776" y="3273552"/>
-            <a:ext cx="816864" cy="146304"/>
+            <a:off x="10018776" y="3328416"/>
+            <a:ext cx="862584" cy="146304"/>
           </a:xfrm>
           <a:prstGeom prst="rect">
             <a:avLst/>
@@ -17236,8 +17242,8 @@
         </p:nvSpPr>
         <p:spPr>
           <a:xfrm>
-            <a:off x="7854696" y="3694176"/>
-            <a:ext cx="3035808" cy="206654"/>
+            <a:off x="7763256" y="3749040"/>
+            <a:ext cx="3172968" cy="356616"/>
           </a:xfrm>
           <a:prstGeom prst="rect">
             <a:avLst/>
@@ -17255,7 +17261,7 @@
               <a:buNone/>
             </a:pPr>
             <a:r>
-              <a:rPr lang="en-US" sz="1120" dirty="0">
+              <a:rPr lang="en-US" sz="1040" dirty="0">
                 <a:solidFill>
                   <a:srgbClr val="17364A"/>
                 </a:solidFill>
@@ -17263,9 +17269,9 @@
                 <a:ea typeface="Aptos" pitchFamily="34" charset="-122"/>
                 <a:cs typeface="Aptos" pitchFamily="34" charset="-120"/>
               </a:rPr>
-              <a:t>The important handoff is not from data to AI; it is from analysis to accountable human review.</a:t>
-            </a:r>
-            <a:endParaRPr lang="en-US" sz="1120" dirty="0"/>
+              <a:t>The important handoff is not from data to AI; it is from analysis to.</a:t>
+            </a:r>
+            <a:endParaRPr lang="en-US" sz="1040" dirty="0"/>
           </a:p>
         </p:txBody>
       </p:sp>
@@ -17277,12 +17283,12 @@
         </p:nvSpPr>
         <p:spPr>
           <a:xfrm>
-            <a:off x="7635240" y="4184294"/>
-            <a:ext cx="3474720" cy="1466698"/>
+            <a:off x="7543800" y="4389120"/>
+            <a:ext cx="3611880" cy="1261872"/>
           </a:xfrm>
           <a:prstGeom prst="roundRect">
             <a:avLst>
-              <a:gd name="adj" fmla="val 7481"/>
+              <a:gd name="adj" fmla="val 8696"/>
             </a:avLst>
           </a:prstGeom>
           <a:solidFill>
@@ -17304,8 +17310,8 @@
         </p:nvSpPr>
         <p:spPr>
           <a:xfrm>
-            <a:off x="7799832" y="4330598"/>
-            <a:ext cx="3145536" cy="256032"/>
+            <a:off x="7708392" y="4517136"/>
+            <a:ext cx="3282696" cy="228600"/>
           </a:xfrm>
           <a:prstGeom prst="rect">
             <a:avLst/>
@@ -17321,7 +17327,7 @@
               <a:buNone/>
             </a:pPr>
             <a:r>
-              <a:rPr lang="en-US" sz="1300" b="1" dirty="0">
+              <a:rPr lang="en-US" sz="1220" b="1" dirty="0">
                 <a:solidFill>
                   <a:srgbClr val="0068B7"/>
                 </a:solidFill>
@@ -17331,7 +17337,7 @@
               </a:rPr>
               <a:t>How to validate</a:t>
             </a:r>
-            <a:endParaRPr lang="en-US" sz="1300" dirty="0"/>
+            <a:endParaRPr lang="en-US" sz="1220" dirty="0"/>
           </a:p>
         </p:txBody>
       </p:sp>
@@ -17343,8 +17349,8 @@
         </p:nvSpPr>
         <p:spPr>
           <a:xfrm>
-            <a:off x="7799832" y="4659782"/>
-            <a:ext cx="3145536" cy="899770"/>
+            <a:off x="7708392" y="4828032"/>
+            <a:ext cx="3282696" cy="749808"/>
           </a:xfrm>
           <a:prstGeom prst="rect">
             <a:avLst/>
@@ -17362,7 +17368,7 @@
               <a:buNone/>
             </a:pPr>
             <a:r>
-              <a:rPr lang="en-US" sz="1320" dirty="0">
+              <a:rPr lang="en-US" sz="1220" dirty="0">
                 <a:solidFill>
                   <a:srgbClr val="17364A"/>
                 </a:solidFill>
@@ -17370,9 +17376,9 @@
                 <a:ea typeface="Aptos" pitchFamily="34" charset="-122"/>
                 <a:cs typeface="Aptos" pitchFamily="34" charset="-120"/>
               </a:rPr>
-              <a:t>Connect the concept to data quality, model performance, validation evidence, monitoring measures, and decisions that remain under human control.</a:t>
-            </a:r>
-            <a:endParaRPr lang="en-US" sz="1320" dirty="0"/>
+              <a:t>Connect the concept to data quality, model performance, validation evidence,.</a:t>
+            </a:r>
+            <a:endParaRPr lang="en-US" sz="1220" dirty="0"/>
           </a:p>
         </p:txBody>
       </p:sp>
@@ -17663,8 +17669,8 @@
         </p:nvSpPr>
         <p:spPr>
           <a:xfrm>
-            <a:off x="868680" y="1508760"/>
-            <a:ext cx="6309360" cy="4160520"/>
+            <a:off x="822960" y="1463040"/>
+            <a:ext cx="6565392" cy="4343400"/>
           </a:xfrm>
           <a:prstGeom prst="rect">
             <a:avLst/>
@@ -17682,7 +17688,7 @@
               <a:buNone/>
             </a:pPr>
             <a:r>
-              <a:rPr lang="en-US" sz="2100" dirty="0">
+              <a:rPr lang="en-US" sz="1920" dirty="0">
                 <a:solidFill>
                   <a:srgbClr val="003A63"/>
                 </a:solidFill>
@@ -17690,16 +17696,16 @@
                 <a:ea typeface="Aptos" pitchFamily="34" charset="-122"/>
                 <a:cs typeface="Aptos" pitchFamily="34" charset="-120"/>
               </a:rPr>
-              <a:t>• A communications team may use generative AI to draft a plain-language public message about a.</a:t>
-            </a:r>
-            <a:endParaRPr lang="en-US" sz="2100" dirty="0"/>
-          </a:p>
-          <a:p>
-            <a:pPr indent="0" marL="0">
-              <a:buNone/>
-            </a:pPr>
-            <a:r>
-              <a:rPr lang="en-US" sz="2100" dirty="0">
+              <a:t>• A communications team may use generative AI to draft a plain-language public.</a:t>
+            </a:r>
+            <a:endParaRPr lang="en-US" sz="1920" dirty="0"/>
+          </a:p>
+          <a:p>
+            <a:pPr indent="0" marL="0">
+              <a:buNone/>
+            </a:pPr>
+            <a:r>
+              <a:rPr lang="en-US" sz="1920" dirty="0">
                 <a:solidFill>
                   <a:srgbClr val="003A63"/>
                 </a:solidFill>
@@ -17707,16 +17713,16 @@
                 <a:ea typeface="Aptos" pitchFamily="34" charset="-122"/>
                 <a:cs typeface="Aptos" pitchFamily="34" charset="-120"/>
               </a:rPr>
-              <a:t>• The draft may be clear and readable, but reviewers must check whether the numbers are correct,.</a:t>
-            </a:r>
-            <a:endParaRPr lang="en-US" sz="2100" dirty="0"/>
-          </a:p>
-          <a:p>
-            <a:pPr indent="0" marL="0">
-              <a:buNone/>
-            </a:pPr>
-            <a:r>
-              <a:rPr lang="en-US" sz="2100" dirty="0">
+              <a:t>• The draft may be clear and readable, but reviewers must check whether the.</a:t>
+            </a:r>
+            <a:endParaRPr lang="en-US" sz="1920" dirty="0"/>
+          </a:p>
+          <a:p>
+            <a:pPr indent="0" marL="0">
+              <a:buNone/>
+            </a:pPr>
+            <a:r>
+              <a:rPr lang="en-US" sz="1920" dirty="0">
                 <a:solidFill>
                   <a:srgbClr val="003A63"/>
                 </a:solidFill>
@@ -17724,9 +17730,9 @@
                 <a:ea typeface="Aptos" pitchFamily="34" charset="-122"/>
                 <a:cs typeface="Aptos" pitchFamily="34" charset="-120"/>
               </a:rPr>
-              <a:t>• An epidemiology team may use generative AI to summarize case investigation notes for internal.</a:t>
-            </a:r>
-            <a:endParaRPr lang="en-US" sz="2100" dirty="0"/>
+              <a:t>• An epidemiology team may use generative AI to summarize case investigation.</a:t>
+            </a:r>
+            <a:endParaRPr lang="en-US" sz="1920" dirty="0"/>
           </a:p>
         </p:txBody>
       </p:sp>
@@ -17738,12 +17744,12 @@
         </p:nvSpPr>
         <p:spPr>
           <a:xfrm>
-            <a:off x="7635240" y="1325880"/>
-            <a:ext cx="3474720" cy="1255471"/>
+            <a:off x="7543800" y="1325880"/>
+            <a:ext cx="3611880" cy="1261872"/>
           </a:xfrm>
           <a:prstGeom prst="roundRect">
             <a:avLst>
-              <a:gd name="adj" fmla="val 8740"/>
+              <a:gd name="adj" fmla="val 8696"/>
             </a:avLst>
           </a:prstGeom>
           <a:solidFill>
@@ -17765,8 +17771,8 @@
         </p:nvSpPr>
         <p:spPr>
           <a:xfrm>
-            <a:off x="7799832" y="1472184"/>
-            <a:ext cx="3145536" cy="256032"/>
+            <a:off x="7708392" y="1453896"/>
+            <a:ext cx="3282696" cy="228600"/>
           </a:xfrm>
           <a:prstGeom prst="rect">
             <a:avLst/>
@@ -17782,7 +17788,7 @@
               <a:buNone/>
             </a:pPr>
             <a:r>
-              <a:rPr lang="en-US" sz="1300" b="1" dirty="0">
+              <a:rPr lang="en-US" sz="1220" b="1" dirty="0">
                 <a:solidFill>
                   <a:srgbClr val="0068B7"/>
                 </a:solidFill>
@@ -17792,7 +17798,7 @@
               </a:rPr>
               <a:t>Data decision</a:t>
             </a:r>
-            <a:endParaRPr lang="en-US" sz="1300" dirty="0"/>
+            <a:endParaRPr lang="en-US" sz="1220" dirty="0"/>
           </a:p>
         </p:txBody>
       </p:sp>
@@ -17804,8 +17810,8 @@
         </p:nvSpPr>
         <p:spPr>
           <a:xfrm>
-            <a:off x="7799832" y="1801368"/>
-            <a:ext cx="3145536" cy="688543"/>
+            <a:off x="7708392" y="1764792"/>
+            <a:ext cx="3282696" cy="749808"/>
           </a:xfrm>
           <a:prstGeom prst="rect">
             <a:avLst/>
@@ -17823,7 +17829,7 @@
               <a:buNone/>
             </a:pPr>
             <a:r>
-              <a:rPr lang="en-US" sz="1320" dirty="0">
+              <a:rPr lang="en-US" sz="1220" dirty="0">
                 <a:solidFill>
                   <a:srgbClr val="17364A"/>
                 </a:solidFill>
@@ -17831,9 +17837,9 @@
                 <a:ea typeface="Aptos" pitchFamily="34" charset="-122"/>
                 <a:cs typeface="Aptos" pitchFamily="34" charset="-120"/>
               </a:rPr>
-              <a:t>A communications team may use generative AI to draft a plain-language public message about a local.</a:t>
-            </a:r>
-            <a:endParaRPr lang="en-US" sz="1320" dirty="0"/>
+              <a:t>A communications team may use generative AI to draft a plain-language public.</a:t>
+            </a:r>
+            <a:endParaRPr lang="en-US" sz="1220" dirty="0"/>
           </a:p>
         </p:txBody>
       </p:sp>
@@ -17845,12 +17851,12 @@
         </p:nvSpPr>
         <p:spPr>
           <a:xfrm>
-            <a:off x="7635240" y="2718511"/>
-            <a:ext cx="3474720" cy="1328623"/>
+            <a:off x="7543800" y="2724912"/>
+            <a:ext cx="3611880" cy="1527048"/>
           </a:xfrm>
           <a:prstGeom prst="roundRect">
             <a:avLst>
-              <a:gd name="adj" fmla="val 8259"/>
+              <a:gd name="adj" fmla="val 7186"/>
             </a:avLst>
           </a:prstGeom>
           <a:solidFill>
@@ -17872,8 +17878,8 @@
         </p:nvSpPr>
         <p:spPr>
           <a:xfrm>
-            <a:off x="7799832" y="2864815"/>
-            <a:ext cx="3145536" cy="256032"/>
+            <a:off x="7708392" y="2852928"/>
+            <a:ext cx="3282696" cy="228600"/>
           </a:xfrm>
           <a:prstGeom prst="rect">
             <a:avLst/>
@@ -17889,7 +17895,7 @@
               <a:buNone/>
             </a:pPr>
             <a:r>
-              <a:rPr lang="en-US" sz="1300" b="1" dirty="0">
+              <a:rPr lang="en-US" sz="1220" b="1" dirty="0">
                 <a:solidFill>
                   <a:srgbClr val="0068B7"/>
                 </a:solidFill>
@@ -17899,7 +17905,7 @@
               </a:rPr>
               <a:t>Concept checkpoints</a:t>
             </a:r>
-            <a:endParaRPr lang="en-US" sz="1300" dirty="0"/>
+            <a:endParaRPr lang="en-US" sz="1220" dirty="0"/>
           </a:p>
         </p:txBody>
       </p:sp>
@@ -17911,8 +17917,8 @@
         </p:nvSpPr>
         <p:spPr>
           <a:xfrm>
-            <a:off x="7818120" y="3230575"/>
-            <a:ext cx="3090672" cy="670255"/>
+            <a:off x="7726680" y="3182112"/>
+            <a:ext cx="3227832" cy="960120"/>
           </a:xfrm>
           <a:prstGeom prst="rect">
             <a:avLst/>
@@ -17930,7 +17936,7 @@
               <a:buNone/>
             </a:pPr>
             <a:r>
-              <a:rPr lang="en-US" sz="1220" dirty="0">
+              <a:rPr lang="en-US" sz="1140" dirty="0">
                 <a:solidFill>
                   <a:srgbClr val="17364A"/>
                 </a:solidFill>
@@ -17938,16 +17944,16 @@
                 <a:ea typeface="Aptos" pitchFamily="34" charset="-122"/>
                 <a:cs typeface="Aptos" pitchFamily="34" charset="-120"/>
               </a:rPr>
-              <a:t>A communications team may use generative AI to draft a.</a:t>
-            </a:r>
-            <a:endParaRPr lang="en-US" sz="1220" dirty="0"/>
-          </a:p>
-          <a:p>
-            <a:pPr indent="0" marL="0">
-              <a:buNone/>
-            </a:pPr>
-            <a:r>
-              <a:rPr lang="en-US" sz="1220" dirty="0">
+              <a:t>A communications team may use generative AI to.</a:t>
+            </a:r>
+            <a:endParaRPr lang="en-US" sz="1140" dirty="0"/>
+          </a:p>
+          <a:p>
+            <a:pPr indent="0" marL="0">
+              <a:buNone/>
+            </a:pPr>
+            <a:r>
+              <a:rPr lang="en-US" sz="1140" dirty="0">
                 <a:solidFill>
                   <a:srgbClr val="17364A"/>
                 </a:solidFill>
@@ -17955,16 +17961,16 @@
                 <a:ea typeface="Aptos" pitchFamily="34" charset="-122"/>
                 <a:cs typeface="Aptos" pitchFamily="34" charset="-120"/>
               </a:rPr>
-              <a:t>The draft may be clear and readable, but reviewers must check.</a:t>
-            </a:r>
-            <a:endParaRPr lang="en-US" sz="1220" dirty="0"/>
-          </a:p>
-          <a:p>
-            <a:pPr indent="0" marL="0">
-              <a:buNone/>
-            </a:pPr>
-            <a:r>
-              <a:rPr lang="en-US" sz="1220" dirty="0">
+              <a:t>The draft may be clear and readable, but reviewers.</a:t>
+            </a:r>
+            <a:endParaRPr lang="en-US" sz="1140" dirty="0"/>
+          </a:p>
+          <a:p>
+            <a:pPr indent="0" marL="0">
+              <a:buNone/>
+            </a:pPr>
+            <a:r>
+              <a:rPr lang="en-US" sz="1140" dirty="0">
                 <a:solidFill>
                   <a:srgbClr val="17364A"/>
                 </a:solidFill>
@@ -17972,9 +17978,9 @@
                 <a:ea typeface="Aptos" pitchFamily="34" charset="-122"/>
                 <a:cs typeface="Aptos" pitchFamily="34" charset="-120"/>
               </a:rPr>
-              <a:t>The summary must be checked against source notes because a missed.</a:t>
-            </a:r>
-            <a:endParaRPr lang="en-US" sz="1220" dirty="0"/>
+              <a:t>The summary must be checked against source notes.</a:t>
+            </a:r>
+            <a:endParaRPr lang="en-US" sz="1140" dirty="0"/>
           </a:p>
         </p:txBody>
       </p:sp>
@@ -17986,12 +17992,12 @@
         </p:nvSpPr>
         <p:spPr>
           <a:xfrm>
-            <a:off x="7635240" y="4184294"/>
-            <a:ext cx="3474720" cy="1466698"/>
+            <a:off x="7543800" y="4389120"/>
+            <a:ext cx="3611880" cy="1261872"/>
           </a:xfrm>
           <a:prstGeom prst="roundRect">
             <a:avLst>
-              <a:gd name="adj" fmla="val 7481"/>
+              <a:gd name="adj" fmla="val 8696"/>
             </a:avLst>
           </a:prstGeom>
           <a:solidFill>
@@ -18013,8 +18019,8 @@
         </p:nvSpPr>
         <p:spPr>
           <a:xfrm>
-            <a:off x="7799832" y="4330598"/>
-            <a:ext cx="3145536" cy="256032"/>
+            <a:off x="7708392" y="4517136"/>
+            <a:ext cx="3282696" cy="228600"/>
           </a:xfrm>
           <a:prstGeom prst="rect">
             <a:avLst/>
@@ -18030,7 +18036,7 @@
               <a:buNone/>
             </a:pPr>
             <a:r>
-              <a:rPr lang="en-US" sz="1300" b="1" dirty="0">
+              <a:rPr lang="en-US" sz="1220" b="1" dirty="0">
                 <a:solidFill>
                   <a:srgbClr val="0068B7"/>
                 </a:solidFill>
@@ -18040,7 +18046,7 @@
               </a:rPr>
               <a:t>How to validate</a:t>
             </a:r>
-            <a:endParaRPr lang="en-US" sz="1300" dirty="0"/>
+            <a:endParaRPr lang="en-US" sz="1220" dirty="0"/>
           </a:p>
         </p:txBody>
       </p:sp>
@@ -18052,8 +18058,8 @@
         </p:nvSpPr>
         <p:spPr>
           <a:xfrm>
-            <a:off x="7799832" y="4659782"/>
-            <a:ext cx="3145536" cy="899770"/>
+            <a:off x="7708392" y="4828032"/>
+            <a:ext cx="3282696" cy="749808"/>
           </a:xfrm>
           <a:prstGeom prst="rect">
             <a:avLst/>
@@ -18071,7 +18077,7 @@
               <a:buNone/>
             </a:pPr>
             <a:r>
-              <a:rPr lang="en-US" sz="1320" dirty="0">
+              <a:rPr lang="en-US" sz="1220" dirty="0">
                 <a:solidFill>
                   <a:srgbClr val="17364A"/>
                 </a:solidFill>
@@ -18079,9 +18085,9 @@
                 <a:ea typeface="Aptos" pitchFamily="34" charset="-122"/>
                 <a:cs typeface="Aptos" pitchFamily="34" charset="-120"/>
               </a:rPr>
-              <a:t>Connect the concept to data quality, model performance, validation evidence, monitoring measures, and decisions that remain under human control.</a:t>
-            </a:r>
-            <a:endParaRPr lang="en-US" sz="1320" dirty="0"/>
+              <a:t>Connect the concept to data quality, model performance, validation evidence,.</a:t>
+            </a:r>
+            <a:endParaRPr lang="en-US" sz="1220" dirty="0"/>
           </a:p>
         </p:txBody>
       </p:sp>

--- a/downloads/presentations/modules/anl-310.pptx
+++ b/downloads/presentations/modules/anl-310.pptx
@@ -11870,7 +11870,7 @@
                 <a:ea typeface="Aptos" pitchFamily="34" charset="-122"/>
                 <a:cs typeface="Aptos" pitchFamily="34" charset="-120"/>
               </a:rPr>
-              <a:t>• 1. Why is fluency not enough to trust a generative AI output?</a:t>
+              <a:t>1. Why is fluency not enough to trust a generative AI output?</a:t>
             </a:r>
             <a:endParaRPr lang="en-US" sz="1920" dirty="0"/>
           </a:p>
@@ -11887,7 +11887,7 @@
                 <a:ea typeface="Aptos" pitchFamily="34" charset="-122"/>
                 <a:cs typeface="Aptos" pitchFamily="34" charset="-120"/>
               </a:rPr>
-              <a:t>• 2. What does grounding mean?</a:t>
+              <a:t>2. What does grounding mean?</a:t>
             </a:r>
             <a:endParaRPr lang="en-US" sz="1920" dirty="0"/>
           </a:p>
@@ -11904,7 +11904,7 @@
                 <a:ea typeface="Aptos" pitchFamily="34" charset="-122"/>
                 <a:cs typeface="Aptos" pitchFamily="34" charset="-120"/>
               </a:rPr>
-              <a:t>• 3. Which issue can be as harmful as an incorrect statement?</a:t>
+              <a:t>3. Which issue can be as harmful as an incorrect statement?</a:t>
             </a:r>
             <a:endParaRPr lang="en-US" sz="1920" dirty="0"/>
           </a:p>
@@ -12011,7 +12011,7 @@
                 <a:ea typeface="Aptos" pitchFamily="34" charset="-122"/>
                 <a:cs typeface="Aptos" pitchFamily="34" charset="-120"/>
               </a:rPr>
-              <a:t>1. Why is fluency not enough to trust a generative AI output?</a:t>
+              <a:t>Why is fluency not enough to trust a generative AI output?</a:t>
             </a:r>
             <a:endParaRPr lang="en-US" sz="1220" dirty="0"/>
           </a:p>
@@ -12118,41 +12118,7 @@
                 <a:ea typeface="Aptos" pitchFamily="34" charset="-122"/>
                 <a:cs typeface="Aptos" pitchFamily="34" charset="-120"/>
               </a:rPr>
-              <a:t>1.</a:t>
-            </a:r>
-            <a:endParaRPr lang="en-US" sz="1140" dirty="0"/>
-          </a:p>
-          <a:p>
-            <a:pPr indent="0" marL="0">
-              <a:buNone/>
-            </a:pPr>
-            <a:r>
-              <a:rPr lang="en-US" sz="1140" dirty="0">
-                <a:solidFill>
-                  <a:srgbClr val="17364A"/>
-                </a:solidFill>
-                <a:latin typeface="Aptos" pitchFamily="34" charset="0"/>
-                <a:ea typeface="Aptos" pitchFamily="34" charset="-122"/>
-                <a:cs typeface="Aptos" pitchFamily="34" charset="-120"/>
-              </a:rPr>
               <a:t>Why is fluency not enough to trust a generative AI.</a:t>
-            </a:r>
-            <a:endParaRPr lang="en-US" sz="1140" dirty="0"/>
-          </a:p>
-          <a:p>
-            <a:pPr indent="0" marL="0">
-              <a:buNone/>
-            </a:pPr>
-            <a:r>
-              <a:rPr lang="en-US" sz="1140" dirty="0">
-                <a:solidFill>
-                  <a:srgbClr val="17364A"/>
-                </a:solidFill>
-                <a:latin typeface="Aptos" pitchFamily="34" charset="0"/>
-                <a:ea typeface="Aptos" pitchFamily="34" charset="-122"/>
-                <a:cs typeface="Aptos" pitchFamily="34" charset="-120"/>
-              </a:rPr>
-              <a:t>2.</a:t>
             </a:r>
             <a:endParaRPr lang="en-US" sz="1140" dirty="0"/>
           </a:p>
